--- a/POOL_PITCH.pptx
+++ b/POOL_PITCH.pptx
@@ -2,18 +2,18 @@
 <file path=ppt/presentation.xml><?xml version="1.0" encoding="utf-8"?>
 <p:presentation xmlns:p="http://schemas.openxmlformats.org/presentationml/2006/main">
   <p:sldMasterIdLst>
-    <p:sldMasterId xmlns:r="http://schemas.openxmlformats.org/officeDocument/2006/relationships" id="2147483648" r:id="Rbad5be95b68c485e"/>
+    <p:sldMasterId xmlns:r="http://schemas.openxmlformats.org/officeDocument/2006/relationships" id="2147483648" r:id="R92ccbcae0ed1408e"/>
   </p:sldMasterIdLst>
   <p:notesMasterIdLst>
-    <p:notesMasterId xmlns:r="http://schemas.openxmlformats.org/officeDocument/2006/relationships" r:id="R6787e6a5efb445d3"/>
+    <p:notesMasterId xmlns:r="http://schemas.openxmlformats.org/officeDocument/2006/relationships" r:id="Rddf2c521edd448af"/>
   </p:notesMasterIdLst>
   <p:sldIdLst>
-    <p:sldId xmlns:r="http://schemas.openxmlformats.org/officeDocument/2006/relationships" id="256" r:id="R8321e9d96cd646bf"/>
-    <p:sldId xmlns:r="http://schemas.openxmlformats.org/officeDocument/2006/relationships" id="257" r:id="Ra6e07f8d8fc14f1b"/>
-    <p:sldId xmlns:r="http://schemas.openxmlformats.org/officeDocument/2006/relationships" id="258" r:id="R22a8adb54e774695"/>
-    <p:sldId xmlns:r="http://schemas.openxmlformats.org/officeDocument/2006/relationships" id="259" r:id="R0afce54a84254bb3"/>
-    <p:sldId xmlns:r="http://schemas.openxmlformats.org/officeDocument/2006/relationships" id="260" r:id="R066658530ce3438d"/>
-    <p:sldId xmlns:r="http://schemas.openxmlformats.org/officeDocument/2006/relationships" id="261" r:id="Rfcbf293b347e4da7"/>
+    <p:sldId xmlns:r="http://schemas.openxmlformats.org/officeDocument/2006/relationships" id="256" r:id="R4d61c8d1e3af49c9"/>
+    <p:sldId xmlns:r="http://schemas.openxmlformats.org/officeDocument/2006/relationships" id="257" r:id="Ref80c8dccab5402d"/>
+    <p:sldId xmlns:r="http://schemas.openxmlformats.org/officeDocument/2006/relationships" id="258" r:id="Rf1cb46d3d4ca4c0a"/>
+    <p:sldId xmlns:r="http://schemas.openxmlformats.org/officeDocument/2006/relationships" id="259" r:id="Rc641e8dbe2124420"/>
+    <p:sldId xmlns:r="http://schemas.openxmlformats.org/officeDocument/2006/relationships" id="260" r:id="R6974aa24acf643cc"/>
+    <p:sldId xmlns:r="http://schemas.openxmlformats.org/officeDocument/2006/relationships" id="261" r:id="Rc040778fb0d84379"/>
   </p:sldIdLst>
   <p:sldSz cx="12192000" cy="6858000"/>
   <p:notesSz cx="6858000" cy="9144000"/>
@@ -537,7 +537,7 @@
           <a:lstStyle xmlns:a="http://schemas.openxmlformats.org/drawingml/2006/main"/>
           <a:p xmlns:a="http://schemas.openxmlformats.org/drawingml/2006/main">
             <a:r>
-              <a:t>Three compatible buyer intents reserve full MSRP: 3 × $479, 4 × $479, and 5 × $479. Reservation turns stated interest into demand the market can trust. A fourth ultrawide request remains outside because compatibility is a hard constraint. Be explicit: the current buyer ledger is browser-local sandbox state, not custody, escrow, or a bank account.</a:t>
+              <a:t>The homepage buyer agent turns natural language into a catalog-aware decision receipt. It shows the product match, private mandate, deterministic checks, and full-MSRP coverage that would be required only if the buyer later joins. Interpretation requests no financial authorization, saves nothing, reserves nothing, and moves $0. Only the buyer's explicit Save creates browser-local intent state; joining remains a separate later action. The catalog is seeded, not connected to live retailers.</a:t>
             </a:r>
           </a:p>
           <a:p xmlns:a="http://schemas.openxmlformats.org/drawingml/2006/main">
@@ -552,7 +552,12 @@
           </a:p>
           <a:p xmlns:a="http://schemas.openxmlformats.org/drawingml/2006/main">
             <a:r>
-              <a:t>- /Applications/Personal App/Pool/app/demo/demo-experience.tsx</a:t>
+              <a:t>- /Applications/Personal App/Pool/app/_components/product-workspace.tsx</a:t>
+            </a:r>
+          </a:p>
+          <a:p xmlns:a="http://schemas.openxmlformats.org/drawingml/2006/main">
+            <a:r>
+              <a:t>- /Applications/Personal App/Pool/app/api/agent/product-intent/route.ts</a:t>
             </a:r>
           </a:p>
           <a:p xmlns:a="http://schemas.openxmlformats.org/drawingml/2006/main">
@@ -627,7 +632,7 @@
           <a:lstStyle xmlns:a="http://schemas.openxmlformats.org/drawingml/2006/main"/>
           <a:p xmlns:a="http://schemas.openxmlformats.org/drawingml/2006/main">
             <a:r>
-              <a:t>In the protected fixed competition flow, POOL finalizes the funding commitment before registering the admitted sealed-offer hash set. After Rain settles, attestRainSettlement names one previously registered offer as accepted and binds the exact receipt-ID set. Buyer ceilings and merchant floors remain offchain. Monad orders POOL's recorded claims; it does not prove when an offchain bid first existed, what a seller saw, or that bank funds exist. Claim Testnet only with finalized explorer evidence. The dated Rain evidence in this branch is explicitly Monad local-only.</a:t>
+              <a:t>The public /evidence record is source-bound to overnight@246d81a. Registry 0xE1b75A905Cab4005623AA8912AF4a67b9c29b217 deployed on Monad Testnet chain 10143 at finalized block 52198045. Commitment 0x12f3…543f finalized before six offer-registration transactions. After Rain, attestation 0x9abe…9807e finalized at block 52198437, naming one registered offer and binding the digest of the exact three Rain settlement IDs. This proves POOL's operator-attested ordering, not custody, offchain seller visibility, independent verification of Rain, or real-money movement.</a:t>
             </a:r>
           </a:p>
           <a:p xmlns:a="http://schemas.openxmlformats.org/drawingml/2006/main">
@@ -647,12 +652,32 @@
           </a:p>
           <a:p xmlns:a="http://schemas.openxmlformats.org/drawingml/2006/main">
             <a:r>
-              <a:t>- /Applications/Personal App/Pool/public/evidence/rain-sandbox-2026-08-09.json</a:t>
-            </a:r>
-          </a:p>
-          <a:p xmlns:a="http://schemas.openxmlformats.org/drawingml/2006/main">
-            <a:r>
-              <a:t>- /Applications/Personal App/Pool/public/evidence/rain-sandbox-2026-08-09.png</a:t>
+              <a:t>- /Applications/Personal App/Pool/public/evidence/rain-monad-testnet-2026-08-09.json</a:t>
+            </a:r>
+          </a:p>
+          <a:p xmlns:a="http://schemas.openxmlformats.org/drawingml/2006/main">
+            <a:r>
+              <a:t>- /Applications/Personal App/Pool/public/evidence/rain-monad-testnet-2026-08-09.png</a:t>
+            </a:r>
+          </a:p>
+          <a:p xmlns:a="http://schemas.openxmlformats.org/drawingml/2006/main">
+            <a:r>
+              <a:t>- https://testnet.monadscan.com/address/0xE1b75A905Cab4005623AA8912AF4a67b9c29b217</a:t>
+            </a:r>
+          </a:p>
+          <a:p xmlns:a="http://schemas.openxmlformats.org/drawingml/2006/main">
+            <a:r>
+              <a:t>- https://testnet.monadscan.com/tx/0x926f2aba82b9d28d116b1cec8d023ae576c145efe3b4bd58b0ed5f40c02ebc48</a:t>
+            </a:r>
+          </a:p>
+          <a:p xmlns:a="http://schemas.openxmlformats.org/drawingml/2006/main">
+            <a:r>
+              <a:t>- https://testnet.monadscan.com/tx/0xf22b02b9988a1583634154677e0499f9859fcef24a1697f50e1cd7859519dfcd</a:t>
+            </a:r>
+          </a:p>
+          <a:p xmlns:a="http://schemas.openxmlformats.org/drawingml/2006/main">
+            <a:r>
+              <a:t>- https://testnet.monadscan.com/tx/0x9abec12dded847e9466074a7c37f984b7fd5ca3315b80e6d74137adf2bc9807e</a:t>
             </a:r>
           </a:p>
           <a:p xmlns:a="http://schemas.openxmlformats.org/drawingml/2006/main">
@@ -732,7 +757,7 @@
           <a:lstStyle xmlns:a="http://schemas.openxmlformats.org/drawingml/2006/main"/>
           <a:p xmlns:a="http://schemas.openxmlformats.org/drawingml/2006/main">
             <a:r>
-              <a:t>Only after the fixture coalition freezes do three simulated merchant agents receive an anonymized request. They never see private buyer ceilings or one another's floors. Deterministic policy checks price, delivery, warranty, quantity, freshness, and every private mandate. Signal clears at $389 per unit; the coalition remains pinned at 12 units.</a:t>
+              <a:t>Only after the fixture coalition freezes do three simulated seller agents receive an anonymized request. They never see private buyer ceilings or one another's floors. Deterministic policy checks price, delivery, warranty, quantity, freshness, and every private mandate; Signal clears at $389 per unit. The /merchant Seller Pilot Sandbox exposes the blinded fixture RFP and a zero-write bid dry run for Q&amp;A. It has no live retailer, traction claim, binding bid, inventory, order, payment, Rain call, or Monad call.</a:t>
             </a:r>
           </a:p>
           <a:p xmlns:a="http://schemas.openxmlformats.org/drawingml/2006/main">
@@ -748,6 +773,16 @@
           <a:p xmlns:a="http://schemas.openxmlformats.org/drawingml/2006/main">
             <a:r>
               <a:t>- /Applications/Personal App/Pool/app/demo/demo-experience.tsx</a:t>
+            </a:r>
+          </a:p>
+          <a:p xmlns:a="http://schemas.openxmlformats.org/drawingml/2006/main">
+            <a:r>
+              <a:t>- /Applications/Personal App/Pool/app/merchant/page.tsx</a:t>
+            </a:r>
+          </a:p>
+          <a:p xmlns:a="http://schemas.openxmlformats.org/drawingml/2006/main">
+            <a:r>
+              <a:t>- /Applications/Personal App/Pool/app/api/merchant/pilot/route.ts</a:t>
             </a:r>
           </a:p>
           <a:p xmlns:a="http://schemas.openxmlformats.org/drawingml/2006/main">
@@ -822,7 +857,7 @@
           <a:lstStyle xmlns:a="http://schemas.openxmlformats.org/drawingml/2006/main"/>
           <a:p xmlns:a="http://schemas.openxmlformats.org/drawingml/2006/main">
             <a:r>
-              <a:t>Rain receives bounded payment authority only after the fixed market clears. POOL derives the requested scoped-card amount, electronics MCC 5732, and expiry from each allocation. Rain applies its documented 1.2× lifetime authorization ceiling to accommodate holds; POOL's deterministic preflight still admits only the exact agreed charge. The dated evidence records three exact settled amounts and the provider decline reason scoped_card_mcc_not_allowed for MCC 7995. Say 'Rain sandbox settled' only when provider IDs render; otherwise say rehearsal.</a:t>
+              <a:t>Rain receives bounded payment authority only after the fixed market clears. POOL derives the requested scoped-card amount, electronics MCC 5732, and expiry from each allocation. Rain applies its documented 1.2× lifetime authorization ceiling to accommodate holds; POOL's deterministic preflight still admits only the exact agreed charge. The source-bound record preserves the same three exact settled IDs through same-day idempotent replay and the provider decline reason scoped_card_mcc_not_allowed for MCC 7995. The replay did not move real money or create three new records. Say 'Rain sandbox settled' only when provider IDs render; otherwise say rehearsal.</a:t>
             </a:r>
           </a:p>
           <a:p xmlns:a="http://schemas.openxmlformats.org/drawingml/2006/main">
@@ -842,12 +877,12 @@
           </a:p>
           <a:p xmlns:a="http://schemas.openxmlformats.org/drawingml/2006/main">
             <a:r>
-              <a:t>- /Applications/Personal App/Pool/public/evidence/rain-sandbox-2026-08-09.json</a:t>
-            </a:r>
-          </a:p>
-          <a:p xmlns:a="http://schemas.openxmlformats.org/drawingml/2006/main">
-            <a:r>
-              <a:t>- /Applications/Personal App/Pool/public/evidence/rain-sandbox-2026-08-09.png</a:t>
+              <a:t>- /Applications/Personal App/Pool/public/evidence/rain-monad-testnet-2026-08-09.json</a:t>
+            </a:r>
+          </a:p>
+          <a:p xmlns:a="http://schemas.openxmlformats.org/drawingml/2006/main">
+            <a:r>
+              <a:t>- /Applications/Personal App/Pool/public/evidence/rain-monad-testnet-2026-08-09.png</a:t>
             </a:r>
           </a:p>
           <a:p xmlns:a="http://schemas.openxmlformats.org/drawingml/2006/main">
@@ -927,7 +962,7 @@
           <a:lstStyle xmlns:a="http://schemas.openxmlformats.org/drawingml/2006/main"/>
           <a:p xmlns:a="http://schemas.openxmlformats.org/drawingml/2006/main">
             <a:r>
-              <a:t>Close: the fixed fixture ledger reserves $5,748, the dated Rain sandbox evidence settles $4,668, and the fixture makes $1,080 available again—an 18.8% price improvement with zero human negotiation. Rain scopes authority; Monad can order POOL's recorded claims when Testnet evidence exists. The included dated Rain proof is explicitly Monad local-only, so do not present it as Testnet. The consumer product market is a modeled-quote rehearsal only: it creates no capture, order, payment, Rain mutation, or Monad mutation.</a:t>
+              <a:t>Close: the fixed fixture ledger reserves $5,748, the source-bound Rain sandbox record totals $4,668, and the fixture makes $1,080 available again—an 18.8% price improvement with zero human negotiation. The current record preserves the same three Rain IDs through same-day idempotent replay and finalized Monad Testnet ordering from commitment through six offer registrations to the post-Rain attestation. No real money moved. The consumer product market is still a modeled-quote rehearsal only: it creates no capture, order, payment, Rain mutation, or Monad mutation. The Seller Pilot is a zero-write Q&amp;A artifact, not traction.</a:t>
             </a:r>
           </a:p>
           <a:p xmlns:a="http://schemas.openxmlformats.org/drawingml/2006/main">
@@ -952,12 +987,12 @@
           </a:p>
           <a:p xmlns:a="http://schemas.openxmlformats.org/drawingml/2006/main">
             <a:r>
-              <a:t>- /Applications/Personal App/Pool/public/evidence/rain-sandbox-2026-08-09.json</a:t>
-            </a:r>
-          </a:p>
-          <a:p xmlns:a="http://schemas.openxmlformats.org/drawingml/2006/main">
-            <a:r>
-              <a:t>- /Applications/Personal App/Pool/public/evidence/rain-sandbox-2026-08-09.png</a:t>
+              <a:t>- /Applications/Personal App/Pool/public/evidence/rain-monad-testnet-2026-08-09.json</a:t>
+            </a:r>
+          </a:p>
+          <a:p xmlns:a="http://schemas.openxmlformats.org/drawingml/2006/main">
+            <a:r>
+              <a:t>- /Applications/Personal App/Pool/public/evidence/rain-monad-testnet-2026-08-09.png</a:t>
             </a:r>
           </a:p>
           <a:p xmlns:a="http://schemas.openxmlformats.org/drawingml/2006/main">
@@ -1035,7 +1070,7 @@
   </p:cSld>
   <p:clrMap bg1="lt1" tx1="dk1" bg2="lt2" tx2="dk2" accent1="accent1" accent2="accent2" accent3="accent3" accent4="accent4" accent5="accent5" accent6="accent6" hlink="hlink" folHlink="folHlink"/>
   <p:sldLayoutIdLst>
-    <p:sldLayoutId xmlns:r="http://schemas.openxmlformats.org/officeDocument/2006/relationships" id="2147483649" r:id="R3b81e74dd5b54d4e"/>
+    <p:sldLayoutId xmlns:r="http://schemas.openxmlformats.org/officeDocument/2006/relationships" id="2147483649" r:id="R17678ee8253e4769"/>
   </p:sldLayoutIdLst>
   <p:txStyles>
     <p:titleStyle>
@@ -1586,7 +1621,7 @@
           <p:cNvPr id="56" name="grid-v-40">
             <a:extLst xmlns:a="http://schemas.openxmlformats.org/drawingml/2006/main">
               <a:ext uri="{FF2B5EF4-FFF2-40B4-BE49-F238E27FC236}">
-                <a16:creationId xmlns:a16="http://schemas.microsoft.com/office/drawing/2014/main" id="{3A35E9AF-D86C-4DD2-AFBB-6E4C4FF468FC}"/>
+                <a16:creationId xmlns:a16="http://schemas.microsoft.com/office/drawing/2014/main" id="{B37176A5-12E5-41A9-ABDE-A8B79ED953B9}"/>
               </a:ext>
             </a:extLst>
           </p:cNvPr>
@@ -1617,7 +1652,7 @@
           <p:cNvPr id="2" name="grid-v-104">
             <a:extLst xmlns:a="http://schemas.openxmlformats.org/drawingml/2006/main">
               <a:ext uri="{FF2B5EF4-FFF2-40B4-BE49-F238E27FC236}">
-                <a16:creationId xmlns:a16="http://schemas.microsoft.com/office/drawing/2014/main" id="{0A37C991-8D92-4AC2-85F9-E3C69C5D6C8A}"/>
+                <a16:creationId xmlns:a16="http://schemas.microsoft.com/office/drawing/2014/main" id="{F5A97FD0-1C20-42A5-A913-32A6B1725B7C}"/>
               </a:ext>
             </a:extLst>
           </p:cNvPr>
@@ -1648,7 +1683,7 @@
           <p:cNvPr id="3" name="grid-v-168">
             <a:extLst xmlns:a="http://schemas.openxmlformats.org/drawingml/2006/main">
               <a:ext uri="{FF2B5EF4-FFF2-40B4-BE49-F238E27FC236}">
-                <a16:creationId xmlns:a16="http://schemas.microsoft.com/office/drawing/2014/main" id="{C665067C-E0C8-4DD1-96A6-02BD16C8320D}"/>
+                <a16:creationId xmlns:a16="http://schemas.microsoft.com/office/drawing/2014/main" id="{55CB818C-1C3F-4A15-9C9F-A1FD8EE66EDC}"/>
               </a:ext>
             </a:extLst>
           </p:cNvPr>
@@ -1679,7 +1714,7 @@
           <p:cNvPr id="4" name="grid-v-232">
             <a:extLst xmlns:a="http://schemas.openxmlformats.org/drawingml/2006/main">
               <a:ext uri="{FF2B5EF4-FFF2-40B4-BE49-F238E27FC236}">
-                <a16:creationId xmlns:a16="http://schemas.microsoft.com/office/drawing/2014/main" id="{98004085-8F81-4EA4-9788-84B9F29A9A3A}"/>
+                <a16:creationId xmlns:a16="http://schemas.microsoft.com/office/drawing/2014/main" id="{192209EC-493A-4AEF-95A6-B2AE5524BEEB}"/>
               </a:ext>
             </a:extLst>
           </p:cNvPr>
@@ -1710,7 +1745,7 @@
           <p:cNvPr id="5" name="grid-v-296">
             <a:extLst xmlns:a="http://schemas.openxmlformats.org/drawingml/2006/main">
               <a:ext uri="{FF2B5EF4-FFF2-40B4-BE49-F238E27FC236}">
-                <a16:creationId xmlns:a16="http://schemas.microsoft.com/office/drawing/2014/main" id="{9B0C5319-5028-4513-8D92-20433DD80E3A}"/>
+                <a16:creationId xmlns:a16="http://schemas.microsoft.com/office/drawing/2014/main" id="{53067B5A-CD71-4498-B9A3-1969F71FCF79}"/>
               </a:ext>
             </a:extLst>
           </p:cNvPr>
@@ -1741,7 +1776,7 @@
           <p:cNvPr id="6" name="grid-v-360">
             <a:extLst xmlns:a="http://schemas.openxmlformats.org/drawingml/2006/main">
               <a:ext uri="{FF2B5EF4-FFF2-40B4-BE49-F238E27FC236}">
-                <a16:creationId xmlns:a16="http://schemas.microsoft.com/office/drawing/2014/main" id="{6719BFDB-AD46-40F5-820A-A20B40074A6F}"/>
+                <a16:creationId xmlns:a16="http://schemas.microsoft.com/office/drawing/2014/main" id="{99BD57AC-334E-4323-A933-4FE544F31914}"/>
               </a:ext>
             </a:extLst>
           </p:cNvPr>
@@ -1772,7 +1807,7 @@
           <p:cNvPr id="7" name="grid-v-424">
             <a:extLst xmlns:a="http://schemas.openxmlformats.org/drawingml/2006/main">
               <a:ext uri="{FF2B5EF4-FFF2-40B4-BE49-F238E27FC236}">
-                <a16:creationId xmlns:a16="http://schemas.microsoft.com/office/drawing/2014/main" id="{BBB4F6E2-30CB-49CA-8052-10550D7150E0}"/>
+                <a16:creationId xmlns:a16="http://schemas.microsoft.com/office/drawing/2014/main" id="{8592C408-9CA8-49C1-AE2F-C2A21056F24D}"/>
               </a:ext>
             </a:extLst>
           </p:cNvPr>
@@ -1803,7 +1838,7 @@
           <p:cNvPr id="8" name="grid-v-488">
             <a:extLst xmlns:a="http://schemas.openxmlformats.org/drawingml/2006/main">
               <a:ext uri="{FF2B5EF4-FFF2-40B4-BE49-F238E27FC236}">
-                <a16:creationId xmlns:a16="http://schemas.microsoft.com/office/drawing/2014/main" id="{C8A2FD65-C449-4E21-993F-C02FAC667692}"/>
+                <a16:creationId xmlns:a16="http://schemas.microsoft.com/office/drawing/2014/main" id="{7F2E8274-EBCA-4E2A-B9FA-2EEC97C3993E}"/>
               </a:ext>
             </a:extLst>
           </p:cNvPr>
@@ -1834,7 +1869,7 @@
           <p:cNvPr id="9" name="grid-v-552">
             <a:extLst xmlns:a="http://schemas.openxmlformats.org/drawingml/2006/main">
               <a:ext uri="{FF2B5EF4-FFF2-40B4-BE49-F238E27FC236}">
-                <a16:creationId xmlns:a16="http://schemas.microsoft.com/office/drawing/2014/main" id="{C35889A7-C47C-428C-AAD3-B57DAC9AFC5D}"/>
+                <a16:creationId xmlns:a16="http://schemas.microsoft.com/office/drawing/2014/main" id="{60268F24-C44C-49A5-A0A5-33B03AAE2BFC}"/>
               </a:ext>
             </a:extLst>
           </p:cNvPr>
@@ -1865,7 +1900,7 @@
           <p:cNvPr id="10" name="grid-v-616">
             <a:extLst xmlns:a="http://schemas.openxmlformats.org/drawingml/2006/main">
               <a:ext uri="{FF2B5EF4-FFF2-40B4-BE49-F238E27FC236}">
-                <a16:creationId xmlns:a16="http://schemas.microsoft.com/office/drawing/2014/main" id="{48D2D54E-5849-4ED5-8B84-199E1F470E27}"/>
+                <a16:creationId xmlns:a16="http://schemas.microsoft.com/office/drawing/2014/main" id="{18498CF1-4A87-42D2-BA7B-9CD4EE398EAE}"/>
               </a:ext>
             </a:extLst>
           </p:cNvPr>
@@ -1896,7 +1931,7 @@
           <p:cNvPr id="11" name="grid-v-680">
             <a:extLst xmlns:a="http://schemas.openxmlformats.org/drawingml/2006/main">
               <a:ext uri="{FF2B5EF4-FFF2-40B4-BE49-F238E27FC236}">
-                <a16:creationId xmlns:a16="http://schemas.microsoft.com/office/drawing/2014/main" id="{4A6F443A-C55A-4F5F-82D0-DC03CB512ADE}"/>
+                <a16:creationId xmlns:a16="http://schemas.microsoft.com/office/drawing/2014/main" id="{BB4E3FAB-B842-4AB8-AACD-9373081D04E9}"/>
               </a:ext>
             </a:extLst>
           </p:cNvPr>
@@ -1927,7 +1962,7 @@
           <p:cNvPr id="12" name="grid-v-744">
             <a:extLst xmlns:a="http://schemas.openxmlformats.org/drawingml/2006/main">
               <a:ext uri="{FF2B5EF4-FFF2-40B4-BE49-F238E27FC236}">
-                <a16:creationId xmlns:a16="http://schemas.microsoft.com/office/drawing/2014/main" id="{0ECE6020-D153-4419-8ACE-33CD323C665D}"/>
+                <a16:creationId xmlns:a16="http://schemas.microsoft.com/office/drawing/2014/main" id="{0396BFD1-D9F9-4ECA-858B-96BEE62A0AFC}"/>
               </a:ext>
             </a:extLst>
           </p:cNvPr>
@@ -1958,7 +1993,7 @@
           <p:cNvPr id="13" name="grid-v-808">
             <a:extLst xmlns:a="http://schemas.openxmlformats.org/drawingml/2006/main">
               <a:ext uri="{FF2B5EF4-FFF2-40B4-BE49-F238E27FC236}">
-                <a16:creationId xmlns:a16="http://schemas.microsoft.com/office/drawing/2014/main" id="{707C41B8-7567-4004-9FEA-2A6196C47760}"/>
+                <a16:creationId xmlns:a16="http://schemas.microsoft.com/office/drawing/2014/main" id="{EBC34038-FA41-476C-88D8-2680369A34D0}"/>
               </a:ext>
             </a:extLst>
           </p:cNvPr>
@@ -1989,7 +2024,7 @@
           <p:cNvPr id="14" name="grid-v-872">
             <a:extLst xmlns:a="http://schemas.openxmlformats.org/drawingml/2006/main">
               <a:ext uri="{FF2B5EF4-FFF2-40B4-BE49-F238E27FC236}">
-                <a16:creationId xmlns:a16="http://schemas.microsoft.com/office/drawing/2014/main" id="{1AF0293E-01BA-4743-890B-1F40399BF174}"/>
+                <a16:creationId xmlns:a16="http://schemas.microsoft.com/office/drawing/2014/main" id="{DCBB655E-6562-4F81-9C40-67A669935CB9}"/>
               </a:ext>
             </a:extLst>
           </p:cNvPr>
@@ -2020,7 +2055,7 @@
           <p:cNvPr id="15" name="grid-v-936">
             <a:extLst xmlns:a="http://schemas.openxmlformats.org/drawingml/2006/main">
               <a:ext uri="{FF2B5EF4-FFF2-40B4-BE49-F238E27FC236}">
-                <a16:creationId xmlns:a16="http://schemas.microsoft.com/office/drawing/2014/main" id="{9411E703-07FC-48F3-9054-E054853CAA2B}"/>
+                <a16:creationId xmlns:a16="http://schemas.microsoft.com/office/drawing/2014/main" id="{E1A55F45-A9E5-4E9F-8EC8-C9485005170E}"/>
               </a:ext>
             </a:extLst>
           </p:cNvPr>
@@ -2051,7 +2086,7 @@
           <p:cNvPr id="16" name="grid-v-1000">
             <a:extLst xmlns:a="http://schemas.openxmlformats.org/drawingml/2006/main">
               <a:ext uri="{FF2B5EF4-FFF2-40B4-BE49-F238E27FC236}">
-                <a16:creationId xmlns:a16="http://schemas.microsoft.com/office/drawing/2014/main" id="{EEB1376E-E807-4550-867F-A12372553B77}"/>
+                <a16:creationId xmlns:a16="http://schemas.microsoft.com/office/drawing/2014/main" id="{09DF4DB3-1C30-4357-8581-0A9FB3A12555}"/>
               </a:ext>
             </a:extLst>
           </p:cNvPr>
@@ -2082,7 +2117,7 @@
           <p:cNvPr id="17" name="grid-v-1064">
             <a:extLst xmlns:a="http://schemas.openxmlformats.org/drawingml/2006/main">
               <a:ext uri="{FF2B5EF4-FFF2-40B4-BE49-F238E27FC236}">
-                <a16:creationId xmlns:a16="http://schemas.microsoft.com/office/drawing/2014/main" id="{E3A0DD36-08D0-468C-9ACC-E4FC0D74E335}"/>
+                <a16:creationId xmlns:a16="http://schemas.microsoft.com/office/drawing/2014/main" id="{DE7D4A69-C0EF-4483-A2AD-929AAE481C16}"/>
               </a:ext>
             </a:extLst>
           </p:cNvPr>
@@ -2113,7 +2148,7 @@
           <p:cNvPr id="18" name="grid-v-1128">
             <a:extLst xmlns:a="http://schemas.openxmlformats.org/drawingml/2006/main">
               <a:ext uri="{FF2B5EF4-FFF2-40B4-BE49-F238E27FC236}">
-                <a16:creationId xmlns:a16="http://schemas.microsoft.com/office/drawing/2014/main" id="{3AEA4517-ACCF-466F-9B80-2D8C5F1E431F}"/>
+                <a16:creationId xmlns:a16="http://schemas.microsoft.com/office/drawing/2014/main" id="{EAC008B0-B3BC-45B4-856F-32E9AD2F02FC}"/>
               </a:ext>
             </a:extLst>
           </p:cNvPr>
@@ -2144,7 +2179,7 @@
           <p:cNvPr id="19" name="grid-v-1192">
             <a:extLst xmlns:a="http://schemas.openxmlformats.org/drawingml/2006/main">
               <a:ext uri="{FF2B5EF4-FFF2-40B4-BE49-F238E27FC236}">
-                <a16:creationId xmlns:a16="http://schemas.microsoft.com/office/drawing/2014/main" id="{C294CAF7-3C40-474A-B08D-D19955E626FD}"/>
+                <a16:creationId xmlns:a16="http://schemas.microsoft.com/office/drawing/2014/main" id="{670ADAD5-5CDA-4421-9B9B-8138B0AB5AE3}"/>
               </a:ext>
             </a:extLst>
           </p:cNvPr>
@@ -2175,7 +2210,7 @@
           <p:cNvPr id="20" name="grid-h-112">
             <a:extLst xmlns:a="http://schemas.openxmlformats.org/drawingml/2006/main">
               <a:ext uri="{FF2B5EF4-FFF2-40B4-BE49-F238E27FC236}">
-                <a16:creationId xmlns:a16="http://schemas.microsoft.com/office/drawing/2014/main" id="{62CC13C4-300A-4DD2-9C5E-ED1E41ACE298}"/>
+                <a16:creationId xmlns:a16="http://schemas.microsoft.com/office/drawing/2014/main" id="{A7EC567C-6906-4586-B972-7915F0DD789D}"/>
               </a:ext>
             </a:extLst>
           </p:cNvPr>
@@ -2206,7 +2241,7 @@
           <p:cNvPr id="21" name="grid-h-176">
             <a:extLst xmlns:a="http://schemas.openxmlformats.org/drawingml/2006/main">
               <a:ext uri="{FF2B5EF4-FFF2-40B4-BE49-F238E27FC236}">
-                <a16:creationId xmlns:a16="http://schemas.microsoft.com/office/drawing/2014/main" id="{B7DB4A94-B6B8-4D7F-A5D8-EC12D209DA0F}"/>
+                <a16:creationId xmlns:a16="http://schemas.microsoft.com/office/drawing/2014/main" id="{249D2C6C-DCAE-44BE-98BC-A5B20B1A16E1}"/>
               </a:ext>
             </a:extLst>
           </p:cNvPr>
@@ -2237,7 +2272,7 @@
           <p:cNvPr id="22" name="grid-h-240">
             <a:extLst xmlns:a="http://schemas.openxmlformats.org/drawingml/2006/main">
               <a:ext uri="{FF2B5EF4-FFF2-40B4-BE49-F238E27FC236}">
-                <a16:creationId xmlns:a16="http://schemas.microsoft.com/office/drawing/2014/main" id="{0C5B0BE2-05C1-4989-B0F5-429681C284AA}"/>
+                <a16:creationId xmlns:a16="http://schemas.microsoft.com/office/drawing/2014/main" id="{FAA657E2-BE16-4664-8D74-3728C1F04140}"/>
               </a:ext>
             </a:extLst>
           </p:cNvPr>
@@ -2268,7 +2303,7 @@
           <p:cNvPr id="23" name="grid-h-304">
             <a:extLst xmlns:a="http://schemas.openxmlformats.org/drawingml/2006/main">
               <a:ext uri="{FF2B5EF4-FFF2-40B4-BE49-F238E27FC236}">
-                <a16:creationId xmlns:a16="http://schemas.microsoft.com/office/drawing/2014/main" id="{AB814AD7-E39D-44A0-AB6D-FA260DFFF303}"/>
+                <a16:creationId xmlns:a16="http://schemas.microsoft.com/office/drawing/2014/main" id="{44A8F6AD-1DC7-4321-9875-62D21C0A10D2}"/>
               </a:ext>
             </a:extLst>
           </p:cNvPr>
@@ -2299,7 +2334,7 @@
           <p:cNvPr id="24" name="grid-h-368">
             <a:extLst xmlns:a="http://schemas.openxmlformats.org/drawingml/2006/main">
               <a:ext uri="{FF2B5EF4-FFF2-40B4-BE49-F238E27FC236}">
-                <a16:creationId xmlns:a16="http://schemas.microsoft.com/office/drawing/2014/main" id="{36B9EA00-2AEE-4820-950D-9E34CD7EEA33}"/>
+                <a16:creationId xmlns:a16="http://schemas.microsoft.com/office/drawing/2014/main" id="{DB69C701-1A44-4ECB-AE33-085386815E97}"/>
               </a:ext>
             </a:extLst>
           </p:cNvPr>
@@ -2330,7 +2365,7 @@
           <p:cNvPr id="25" name="grid-h-432">
             <a:extLst xmlns:a="http://schemas.openxmlformats.org/drawingml/2006/main">
               <a:ext uri="{FF2B5EF4-FFF2-40B4-BE49-F238E27FC236}">
-                <a16:creationId xmlns:a16="http://schemas.microsoft.com/office/drawing/2014/main" id="{85813409-1C6A-40C4-BA01-349CE943F3A9}"/>
+                <a16:creationId xmlns:a16="http://schemas.microsoft.com/office/drawing/2014/main" id="{88A8D569-1B72-43EC-BB2D-78AE6685A415}"/>
               </a:ext>
             </a:extLst>
           </p:cNvPr>
@@ -2361,7 +2396,7 @@
           <p:cNvPr id="26" name="grid-h-496">
             <a:extLst xmlns:a="http://schemas.openxmlformats.org/drawingml/2006/main">
               <a:ext uri="{FF2B5EF4-FFF2-40B4-BE49-F238E27FC236}">
-                <a16:creationId xmlns:a16="http://schemas.microsoft.com/office/drawing/2014/main" id="{0699476F-D897-4BB2-B7EA-8169B3A51591}"/>
+                <a16:creationId xmlns:a16="http://schemas.microsoft.com/office/drawing/2014/main" id="{8B5FC4C9-E4F1-4094-9788-16874B51743E}"/>
               </a:ext>
             </a:extLst>
           </p:cNvPr>
@@ -2392,7 +2427,7 @@
           <p:cNvPr id="27" name="grid-h-560">
             <a:extLst xmlns:a="http://schemas.openxmlformats.org/drawingml/2006/main">
               <a:ext uri="{FF2B5EF4-FFF2-40B4-BE49-F238E27FC236}">
-                <a16:creationId xmlns:a16="http://schemas.microsoft.com/office/drawing/2014/main" id="{AE4F51AB-9502-45CC-9299-1BFC355DE1BC}"/>
+                <a16:creationId xmlns:a16="http://schemas.microsoft.com/office/drawing/2014/main" id="{A6D9CB3F-15DE-45E1-A900-C853C42E0001}"/>
               </a:ext>
             </a:extLst>
           </p:cNvPr>
@@ -2423,7 +2458,7 @@
           <p:cNvPr id="28" name="grid-h-624">
             <a:extLst xmlns:a="http://schemas.openxmlformats.org/drawingml/2006/main">
               <a:ext uri="{FF2B5EF4-FFF2-40B4-BE49-F238E27FC236}">
-                <a16:creationId xmlns:a16="http://schemas.microsoft.com/office/drawing/2014/main" id="{EDFCCCD1-7A8C-49EF-AE33-283B56F3C80D}"/>
+                <a16:creationId xmlns:a16="http://schemas.microsoft.com/office/drawing/2014/main" id="{7BAD83B8-7CD9-4D70-97DC-2947FF9983D9}"/>
               </a:ext>
             </a:extLst>
           </p:cNvPr>
@@ -2454,7 +2489,7 @@
           <p:cNvPr id="29" name="top-rule">
             <a:extLst xmlns:a="http://schemas.openxmlformats.org/drawingml/2006/main">
               <a:ext uri="{FF2B5EF4-FFF2-40B4-BE49-F238E27FC236}">
-                <a16:creationId xmlns:a16="http://schemas.microsoft.com/office/drawing/2014/main" id="{42F255AD-0228-4723-BAC1-B19275C5866C}"/>
+                <a16:creationId xmlns:a16="http://schemas.microsoft.com/office/drawing/2014/main" id="{EBCB6D6F-B677-452F-B097-C19C850FAD59}"/>
               </a:ext>
             </a:extLst>
           </p:cNvPr>
@@ -2485,7 +2520,7 @@
           <p:cNvPr id="30" name="wordmark">
             <a:extLst xmlns:a="http://schemas.openxmlformats.org/drawingml/2006/main">
               <a:ext uri="{FF2B5EF4-FFF2-40B4-BE49-F238E27FC236}">
-                <a16:creationId xmlns:a16="http://schemas.microsoft.com/office/drawing/2014/main" id="{C3808DBC-9A68-4FC5-83B9-B1DD7E95A307}"/>
+                <a16:creationId xmlns:a16="http://schemas.microsoft.com/office/drawing/2014/main" id="{6AF66360-571F-4661-B0BF-652A99D3D7C5}"/>
               </a:ext>
             </a:extLst>
           </p:cNvPr>
@@ -2547,7 +2582,7 @@
           <p:cNvPr id="31" name="environment-label">
             <a:extLst xmlns:a="http://schemas.openxmlformats.org/drawingml/2006/main">
               <a:ext uri="{FF2B5EF4-FFF2-40B4-BE49-F238E27FC236}">
-                <a16:creationId xmlns:a16="http://schemas.microsoft.com/office/drawing/2014/main" id="{E3149E4C-0E6E-42AA-9FFD-800321405386}"/>
+                <a16:creationId xmlns:a16="http://schemas.microsoft.com/office/drawing/2014/main" id="{1442EB29-D5F7-45E2-B7F2-74409D372888}"/>
               </a:ext>
             </a:extLst>
           </p:cNvPr>
@@ -2609,7 +2644,7 @@
           <p:cNvPr id="32" name="slide-index">
             <a:extLst xmlns:a="http://schemas.openxmlformats.org/drawingml/2006/main">
               <a:ext uri="{FF2B5EF4-FFF2-40B4-BE49-F238E27FC236}">
-                <a16:creationId xmlns:a16="http://schemas.microsoft.com/office/drawing/2014/main" id="{F01BE79C-9EBD-4CCB-80AD-6AD43C99604E}"/>
+                <a16:creationId xmlns:a16="http://schemas.microsoft.com/office/drawing/2014/main" id="{B51294CC-EA61-450D-93E1-0BF1C98FF37D}"/>
               </a:ext>
             </a:extLst>
           </p:cNvPr>
@@ -2671,7 +2706,7 @@
           <p:cNvPr id="33" name="event-footer">
             <a:extLst xmlns:a="http://schemas.openxmlformats.org/drawingml/2006/main">
               <a:ext uri="{FF2B5EF4-FFF2-40B4-BE49-F238E27FC236}">
-                <a16:creationId xmlns:a16="http://schemas.microsoft.com/office/drawing/2014/main" id="{20DFDBD2-68E2-4348-8C82-CAD498FDA080}"/>
+                <a16:creationId xmlns:a16="http://schemas.microsoft.com/office/drawing/2014/main" id="{7681396D-276C-43B0-93CE-92561CF14F10}"/>
               </a:ext>
             </a:extLst>
           </p:cNvPr>
@@ -2733,7 +2768,7 @@
           <p:cNvPr id="34" name="honesty-footer">
             <a:extLst xmlns:a="http://schemas.openxmlformats.org/drawingml/2006/main">
               <a:ext uri="{FF2B5EF4-FFF2-40B4-BE49-F238E27FC236}">
-                <a16:creationId xmlns:a16="http://schemas.microsoft.com/office/drawing/2014/main" id="{88E183ED-59A5-4B30-BC39-7D22081829F6}"/>
+                <a16:creationId xmlns:a16="http://schemas.microsoft.com/office/drawing/2014/main" id="{20E7E667-8751-41A8-A1A2-057C1F9D937D}"/>
               </a:ext>
             </a:extLst>
           </p:cNvPr>
@@ -2795,7 +2830,7 @@
           <p:cNvPr id="35" name="hero-headline">
             <a:extLst xmlns:a="http://schemas.openxmlformats.org/drawingml/2006/main">
               <a:ext uri="{FF2B5EF4-FFF2-40B4-BE49-F238E27FC236}">
-                <a16:creationId xmlns:a16="http://schemas.microsoft.com/office/drawing/2014/main" id="{6570F620-25A8-4533-8705-34D52C5B4177}"/>
+                <a16:creationId xmlns:a16="http://schemas.microsoft.com/office/drawing/2014/main" id="{D7EDAD4B-4FBF-4470-AB9D-E1DD2A7D34E5}"/>
               </a:ext>
             </a:extLst>
           </p:cNvPr>
@@ -2884,7 +2919,7 @@
           <p:cNvPr id="36" name="hero-subhead">
             <a:extLst xmlns:a="http://schemas.openxmlformats.org/drawingml/2006/main">
               <a:ext uri="{FF2B5EF4-FFF2-40B4-BE49-F238E27FC236}">
-                <a16:creationId xmlns:a16="http://schemas.microsoft.com/office/drawing/2014/main" id="{6A1442D9-E768-4A95-8AC0-9ED2E2978019}"/>
+                <a16:creationId xmlns:a16="http://schemas.microsoft.com/office/drawing/2014/main" id="{AE10BF18-16AB-4D44-B2C8-A25E71EA0F07}"/>
               </a:ext>
             </a:extLst>
           </p:cNvPr>
@@ -2946,7 +2981,7 @@
           <p:cNvPr id="37" name="hero-flow-1-shaft">
             <a:extLst xmlns:a="http://schemas.openxmlformats.org/drawingml/2006/main">
               <a:ext uri="{FF2B5EF4-FFF2-40B4-BE49-F238E27FC236}">
-                <a16:creationId xmlns:a16="http://schemas.microsoft.com/office/drawing/2014/main" id="{1EB4A879-8283-4433-8AA5-503226757EBF}"/>
+                <a16:creationId xmlns:a16="http://schemas.microsoft.com/office/drawing/2014/main" id="{F24E6046-5EA0-4795-8A90-CCA949BF4A7C}"/>
               </a:ext>
             </a:extLst>
           </p:cNvPr>
@@ -2977,7 +3012,7 @@
           <p:cNvPr id="38" name="hero-flow-1-head">
             <a:extLst xmlns:a="http://schemas.openxmlformats.org/drawingml/2006/main">
               <a:ext uri="{FF2B5EF4-FFF2-40B4-BE49-F238E27FC236}">
-                <a16:creationId xmlns:a16="http://schemas.microsoft.com/office/drawing/2014/main" id="{D74412D2-BD06-4596-8CC1-E8CA435E06D6}"/>
+                <a16:creationId xmlns:a16="http://schemas.microsoft.com/office/drawing/2014/main" id="{353C85CF-A66A-4882-B62F-D1B0A1AB7E27}"/>
               </a:ext>
             </a:extLst>
           </p:cNvPr>
@@ -3008,7 +3043,7 @@
           <p:cNvPr id="39" name="hero-flow-2-shaft">
             <a:extLst xmlns:a="http://schemas.openxmlformats.org/drawingml/2006/main">
               <a:ext uri="{FF2B5EF4-FFF2-40B4-BE49-F238E27FC236}">
-                <a16:creationId xmlns:a16="http://schemas.microsoft.com/office/drawing/2014/main" id="{B5DAC3DA-8189-49B8-B37F-10FE59E52EA6}"/>
+                <a16:creationId xmlns:a16="http://schemas.microsoft.com/office/drawing/2014/main" id="{B1C45571-88B6-40A9-9207-BF1A27A8AC8B}"/>
               </a:ext>
             </a:extLst>
           </p:cNvPr>
@@ -3039,7 +3074,7 @@
           <p:cNvPr id="40" name="hero-flow-2-head">
             <a:extLst xmlns:a="http://schemas.openxmlformats.org/drawingml/2006/main">
               <a:ext uri="{FF2B5EF4-FFF2-40B4-BE49-F238E27FC236}">
-                <a16:creationId xmlns:a16="http://schemas.microsoft.com/office/drawing/2014/main" id="{D79C27B0-F2B8-4646-A9B8-C632178444B7}"/>
+                <a16:creationId xmlns:a16="http://schemas.microsoft.com/office/drawing/2014/main" id="{2281E92B-B13B-4F0D-8A49-83D456CCACF7}"/>
               </a:ext>
             </a:extLst>
           </p:cNvPr>
@@ -3070,7 +3105,7 @@
           <p:cNvPr id="41" name="hero-units">
             <a:extLst xmlns:a="http://schemas.openxmlformats.org/drawingml/2006/main">
               <a:ext uri="{FF2B5EF4-FFF2-40B4-BE49-F238E27FC236}">
-                <a16:creationId xmlns:a16="http://schemas.microsoft.com/office/drawing/2014/main" id="{17A455C5-4804-458C-93F0-04C7E289BE58}"/>
+                <a16:creationId xmlns:a16="http://schemas.microsoft.com/office/drawing/2014/main" id="{A24457E1-86CF-49B7-B422-503249CE6762}"/>
               </a:ext>
             </a:extLst>
           </p:cNvPr>
@@ -3132,7 +3167,7 @@
           <p:cNvPr id="42" name="hero-units-label">
             <a:extLst xmlns:a="http://schemas.openxmlformats.org/drawingml/2006/main">
               <a:ext uri="{FF2B5EF4-FFF2-40B4-BE49-F238E27FC236}">
-                <a16:creationId xmlns:a16="http://schemas.microsoft.com/office/drawing/2014/main" id="{EAA3FBDB-742E-4BA9-B99A-94F2FF645101}"/>
+                <a16:creationId xmlns:a16="http://schemas.microsoft.com/office/drawing/2014/main" id="{8BC9C9DD-5B28-4019-8A81-D856AA425D36}"/>
               </a:ext>
             </a:extLst>
           </p:cNvPr>
@@ -3221,7 +3256,7 @@
           <p:cNvPr id="43" name="hero-price">
             <a:extLst xmlns:a="http://schemas.openxmlformats.org/drawingml/2006/main">
               <a:ext uri="{FF2B5EF4-FFF2-40B4-BE49-F238E27FC236}">
-                <a16:creationId xmlns:a16="http://schemas.microsoft.com/office/drawing/2014/main" id="{B8DEFBA2-0035-4219-B941-06967C2A307C}"/>
+                <a16:creationId xmlns:a16="http://schemas.microsoft.com/office/drawing/2014/main" id="{E89400FD-FF06-4483-9BC7-3C03EAB42598}"/>
               </a:ext>
             </a:extLst>
           </p:cNvPr>
@@ -3283,7 +3318,7 @@
           <p:cNvPr id="44" name="hero-price-label">
             <a:extLst xmlns:a="http://schemas.openxmlformats.org/drawingml/2006/main">
               <a:ext uri="{FF2B5EF4-FFF2-40B4-BE49-F238E27FC236}">
-                <a16:creationId xmlns:a16="http://schemas.microsoft.com/office/drawing/2014/main" id="{268684A7-D105-41DD-9203-2E7A4B720C19}"/>
+                <a16:creationId xmlns:a16="http://schemas.microsoft.com/office/drawing/2014/main" id="{1204C43E-5CC7-4CB0-BE95-8D1D947AF299}"/>
               </a:ext>
             </a:extLst>
           </p:cNvPr>
@@ -3345,7 +3380,7 @@
           <p:cNvPr id="45" name="hero-savings">
             <a:extLst xmlns:a="http://schemas.openxmlformats.org/drawingml/2006/main">
               <a:ext uri="{FF2B5EF4-FFF2-40B4-BE49-F238E27FC236}">
-                <a16:creationId xmlns:a16="http://schemas.microsoft.com/office/drawing/2014/main" id="{BDF87B36-2E9E-4E69-9B75-7E88F1BDA9D7}"/>
+                <a16:creationId xmlns:a16="http://schemas.microsoft.com/office/drawing/2014/main" id="{DC8C006C-AEAC-411C-842C-F9A089C130F1}"/>
               </a:ext>
             </a:extLst>
           </p:cNvPr>
@@ -3407,7 +3442,7 @@
           <p:cNvPr id="46" name="hero-savings-label">
             <a:extLst xmlns:a="http://schemas.openxmlformats.org/drawingml/2006/main">
               <a:ext uri="{FF2B5EF4-FFF2-40B4-BE49-F238E27FC236}">
-                <a16:creationId xmlns:a16="http://schemas.microsoft.com/office/drawing/2014/main" id="{3D8E4D6F-E608-498C-875C-E4CFAB06104A}"/>
+                <a16:creationId xmlns:a16="http://schemas.microsoft.com/office/drawing/2014/main" id="{CA7AEC89-409B-463F-A8C1-4AAC4C4BC70C}"/>
               </a:ext>
             </a:extLst>
           </p:cNvPr>
@@ -3469,7 +3504,7 @@
           <p:cNvPr id="47" name="hero-proof-bracket-tl-h">
             <a:extLst xmlns:a="http://schemas.openxmlformats.org/drawingml/2006/main">
               <a:ext uri="{FF2B5EF4-FFF2-40B4-BE49-F238E27FC236}">
-                <a16:creationId xmlns:a16="http://schemas.microsoft.com/office/drawing/2014/main" id="{804EBFDE-0CAC-46B5-AF25-1191A1695AD0}"/>
+                <a16:creationId xmlns:a16="http://schemas.microsoft.com/office/drawing/2014/main" id="{2895AD29-1909-46D1-8320-B06250B6BFA1}"/>
               </a:ext>
             </a:extLst>
           </p:cNvPr>
@@ -3500,7 +3535,7 @@
           <p:cNvPr id="48" name="hero-proof-bracket-tl-v">
             <a:extLst xmlns:a="http://schemas.openxmlformats.org/drawingml/2006/main">
               <a:ext uri="{FF2B5EF4-FFF2-40B4-BE49-F238E27FC236}">
-                <a16:creationId xmlns:a16="http://schemas.microsoft.com/office/drawing/2014/main" id="{0034B2AD-EBF7-4D2A-8EC3-A49A7DA185C3}"/>
+                <a16:creationId xmlns:a16="http://schemas.microsoft.com/office/drawing/2014/main" id="{247D9B27-F31B-4267-B611-D19EADA58817}"/>
               </a:ext>
             </a:extLst>
           </p:cNvPr>
@@ -3531,7 +3566,7 @@
           <p:cNvPr id="49" name="hero-proof-bracket-tr-h">
             <a:extLst xmlns:a="http://schemas.openxmlformats.org/drawingml/2006/main">
               <a:ext uri="{FF2B5EF4-FFF2-40B4-BE49-F238E27FC236}">
-                <a16:creationId xmlns:a16="http://schemas.microsoft.com/office/drawing/2014/main" id="{B224B731-FE99-4944-867D-115C81AF0B33}"/>
+                <a16:creationId xmlns:a16="http://schemas.microsoft.com/office/drawing/2014/main" id="{35BB5324-9307-4EC5-8848-464884318EFC}"/>
               </a:ext>
             </a:extLst>
           </p:cNvPr>
@@ -3562,7 +3597,7 @@
           <p:cNvPr id="50" name="hero-proof-bracket-tr-v">
             <a:extLst xmlns:a="http://schemas.openxmlformats.org/drawingml/2006/main">
               <a:ext uri="{FF2B5EF4-FFF2-40B4-BE49-F238E27FC236}">
-                <a16:creationId xmlns:a16="http://schemas.microsoft.com/office/drawing/2014/main" id="{785D2D8F-6904-4B99-B1B0-49ECD9B5AFC3}"/>
+                <a16:creationId xmlns:a16="http://schemas.microsoft.com/office/drawing/2014/main" id="{25DC1A70-F532-468A-89D9-79A785D0D888}"/>
               </a:ext>
             </a:extLst>
           </p:cNvPr>
@@ -3593,7 +3628,7 @@
           <p:cNvPr id="51" name="hero-proof-bracket-bl-h">
             <a:extLst xmlns:a="http://schemas.openxmlformats.org/drawingml/2006/main">
               <a:ext uri="{FF2B5EF4-FFF2-40B4-BE49-F238E27FC236}">
-                <a16:creationId xmlns:a16="http://schemas.microsoft.com/office/drawing/2014/main" id="{9EEF2DED-3F60-4295-BB44-369CA7FEB9C9}"/>
+                <a16:creationId xmlns:a16="http://schemas.microsoft.com/office/drawing/2014/main" id="{D78F40DE-F793-4597-8563-C17B91E6DB7E}"/>
               </a:ext>
             </a:extLst>
           </p:cNvPr>
@@ -3624,7 +3659,7 @@
           <p:cNvPr id="52" name="hero-proof-bracket-bl-v">
             <a:extLst xmlns:a="http://schemas.openxmlformats.org/drawingml/2006/main">
               <a:ext uri="{FF2B5EF4-FFF2-40B4-BE49-F238E27FC236}">
-                <a16:creationId xmlns:a16="http://schemas.microsoft.com/office/drawing/2014/main" id="{F67D4301-5EAF-4BF2-B435-616AB6B76329}"/>
+                <a16:creationId xmlns:a16="http://schemas.microsoft.com/office/drawing/2014/main" id="{A93B24F0-7C71-4329-B659-1E871CCDB355}"/>
               </a:ext>
             </a:extLst>
           </p:cNvPr>
@@ -3655,7 +3690,7 @@
           <p:cNvPr id="53" name="hero-proof-bracket-br-h">
             <a:extLst xmlns:a="http://schemas.openxmlformats.org/drawingml/2006/main">
               <a:ext uri="{FF2B5EF4-FFF2-40B4-BE49-F238E27FC236}">
-                <a16:creationId xmlns:a16="http://schemas.microsoft.com/office/drawing/2014/main" id="{728CD6D9-61AD-4C25-BD90-6398190BC11B}"/>
+                <a16:creationId xmlns:a16="http://schemas.microsoft.com/office/drawing/2014/main" id="{2C552CEC-1C0D-4BFA-8EA6-24D1C014B303}"/>
               </a:ext>
             </a:extLst>
           </p:cNvPr>
@@ -3686,7 +3721,7 @@
           <p:cNvPr id="54" name="hero-proof-bracket-br-v">
             <a:extLst xmlns:a="http://schemas.openxmlformats.org/drawingml/2006/main">
               <a:ext uri="{FF2B5EF4-FFF2-40B4-BE49-F238E27FC236}">
-                <a16:creationId xmlns:a16="http://schemas.microsoft.com/office/drawing/2014/main" id="{FBC28634-998D-4C00-BDE2-106E59338CDC}"/>
+                <a16:creationId xmlns:a16="http://schemas.microsoft.com/office/drawing/2014/main" id="{E08B4CD9-9499-43F3-9782-2F0F7961E6FF}"/>
               </a:ext>
             </a:extLst>
           </p:cNvPr>
@@ -3717,7 +3752,7 @@
           <p:cNvPr id="55" name="hero-thesis">
             <a:extLst xmlns:a="http://schemas.openxmlformats.org/drawingml/2006/main">
               <a:ext uri="{FF2B5EF4-FFF2-40B4-BE49-F238E27FC236}">
-                <a16:creationId xmlns:a16="http://schemas.microsoft.com/office/drawing/2014/main" id="{4CBF58F9-9BC1-46C4-855A-7FDED07B7078}"/>
+                <a16:creationId xmlns:a16="http://schemas.microsoft.com/office/drawing/2014/main" id="{86E1506D-417D-4A74-8265-EA06E3808A86}"/>
               </a:ext>
             </a:extLst>
           </p:cNvPr>
@@ -3777,7 +3812,7 @@
     </p:spTree>
     <p:extLst>
       <p:ext uri="{BB962C8B-B14F-4D97-AF65-F5344CB8AC3E}">
-        <p14:creationId xmlns:p14="http://schemas.microsoft.com/office/powerpoint/2010/main" val="1972023099"/>
+        <p14:creationId xmlns:p14="http://schemas.microsoft.com/office/powerpoint/2010/main" val="941715720"/>
       </p:ext>
     </p:extLst>
   </p:cSld>
@@ -3805,10 +3840,10 @@
       </p:grpSpPr>
       <p:sp>
         <p:nvSpPr>
-          <p:cNvPr id="66" name="grid-v-40">
-            <a:extLst xmlns:a="http://schemas.openxmlformats.org/drawingml/2006/main">
-              <a:ext uri="{FF2B5EF4-FFF2-40B4-BE49-F238E27FC236}">
-                <a16:creationId xmlns:a16="http://schemas.microsoft.com/office/drawing/2014/main" id="{EF133F97-A14D-41F3-A110-85E348A92FF5}"/>
+          <p:cNvPr id="75" name="grid-v-40">
+            <a:extLst xmlns:a="http://schemas.openxmlformats.org/drawingml/2006/main">
+              <a:ext uri="{FF2B5EF4-FFF2-40B4-BE49-F238E27FC236}">
+                <a16:creationId xmlns:a16="http://schemas.microsoft.com/office/drawing/2014/main" id="{97272970-7543-4F7B-A407-886AFF3ACB77}"/>
               </a:ext>
             </a:extLst>
           </p:cNvPr>
@@ -3839,7 +3874,7 @@
           <p:cNvPr id="2" name="grid-v-104">
             <a:extLst xmlns:a="http://schemas.openxmlformats.org/drawingml/2006/main">
               <a:ext uri="{FF2B5EF4-FFF2-40B4-BE49-F238E27FC236}">
-                <a16:creationId xmlns:a16="http://schemas.microsoft.com/office/drawing/2014/main" id="{7AD87E35-4C55-457E-89CC-3A9DF5A511E0}"/>
+                <a16:creationId xmlns:a16="http://schemas.microsoft.com/office/drawing/2014/main" id="{23BFA757-5EE6-4B0F-A66F-F9A1A48ECD2A}"/>
               </a:ext>
             </a:extLst>
           </p:cNvPr>
@@ -3870,7 +3905,7 @@
           <p:cNvPr id="3" name="grid-v-168">
             <a:extLst xmlns:a="http://schemas.openxmlformats.org/drawingml/2006/main">
               <a:ext uri="{FF2B5EF4-FFF2-40B4-BE49-F238E27FC236}">
-                <a16:creationId xmlns:a16="http://schemas.microsoft.com/office/drawing/2014/main" id="{F61C044D-D922-4550-8B5A-B382E3603873}"/>
+                <a16:creationId xmlns:a16="http://schemas.microsoft.com/office/drawing/2014/main" id="{B75BA833-E066-4098-92F5-6C2615CC7B99}"/>
               </a:ext>
             </a:extLst>
           </p:cNvPr>
@@ -3901,7 +3936,7 @@
           <p:cNvPr id="4" name="grid-v-232">
             <a:extLst xmlns:a="http://schemas.openxmlformats.org/drawingml/2006/main">
               <a:ext uri="{FF2B5EF4-FFF2-40B4-BE49-F238E27FC236}">
-                <a16:creationId xmlns:a16="http://schemas.microsoft.com/office/drawing/2014/main" id="{AFB74699-2B83-4743-8147-5640D903C7CA}"/>
+                <a16:creationId xmlns:a16="http://schemas.microsoft.com/office/drawing/2014/main" id="{6B6AA561-DB7C-4E6B-A5A8-EB63386C06EB}"/>
               </a:ext>
             </a:extLst>
           </p:cNvPr>
@@ -3932,7 +3967,7 @@
           <p:cNvPr id="5" name="grid-v-296">
             <a:extLst xmlns:a="http://schemas.openxmlformats.org/drawingml/2006/main">
               <a:ext uri="{FF2B5EF4-FFF2-40B4-BE49-F238E27FC236}">
-                <a16:creationId xmlns:a16="http://schemas.microsoft.com/office/drawing/2014/main" id="{1B287077-7289-4A36-81CC-9A8949FC0494}"/>
+                <a16:creationId xmlns:a16="http://schemas.microsoft.com/office/drawing/2014/main" id="{A5E0B1A3-6834-4F4D-A78E-1E6F4B15463A}"/>
               </a:ext>
             </a:extLst>
           </p:cNvPr>
@@ -3963,7 +3998,7 @@
           <p:cNvPr id="6" name="grid-v-360">
             <a:extLst xmlns:a="http://schemas.openxmlformats.org/drawingml/2006/main">
               <a:ext uri="{FF2B5EF4-FFF2-40B4-BE49-F238E27FC236}">
-                <a16:creationId xmlns:a16="http://schemas.microsoft.com/office/drawing/2014/main" id="{1C23199E-3DAB-415F-BEFE-EFF2437DB0B6}"/>
+                <a16:creationId xmlns:a16="http://schemas.microsoft.com/office/drawing/2014/main" id="{17F06FDA-4657-464F-99CC-000F4719C1FE}"/>
               </a:ext>
             </a:extLst>
           </p:cNvPr>
@@ -3994,7 +4029,7 @@
           <p:cNvPr id="7" name="grid-v-424">
             <a:extLst xmlns:a="http://schemas.openxmlformats.org/drawingml/2006/main">
               <a:ext uri="{FF2B5EF4-FFF2-40B4-BE49-F238E27FC236}">
-                <a16:creationId xmlns:a16="http://schemas.microsoft.com/office/drawing/2014/main" id="{BF7B3033-B713-4185-833E-CA364CBC3782}"/>
+                <a16:creationId xmlns:a16="http://schemas.microsoft.com/office/drawing/2014/main" id="{C8AF3088-E63A-479E-AD6C-8B6B02092C09}"/>
               </a:ext>
             </a:extLst>
           </p:cNvPr>
@@ -4025,7 +4060,7 @@
           <p:cNvPr id="8" name="grid-v-488">
             <a:extLst xmlns:a="http://schemas.openxmlformats.org/drawingml/2006/main">
               <a:ext uri="{FF2B5EF4-FFF2-40B4-BE49-F238E27FC236}">
-                <a16:creationId xmlns:a16="http://schemas.microsoft.com/office/drawing/2014/main" id="{9B8D63B2-8826-46F3-B66D-7772748E84A2}"/>
+                <a16:creationId xmlns:a16="http://schemas.microsoft.com/office/drawing/2014/main" id="{DC54824D-C867-4675-9824-18D9623DF576}"/>
               </a:ext>
             </a:extLst>
           </p:cNvPr>
@@ -4056,7 +4091,7 @@
           <p:cNvPr id="9" name="grid-v-552">
             <a:extLst xmlns:a="http://schemas.openxmlformats.org/drawingml/2006/main">
               <a:ext uri="{FF2B5EF4-FFF2-40B4-BE49-F238E27FC236}">
-                <a16:creationId xmlns:a16="http://schemas.microsoft.com/office/drawing/2014/main" id="{10943F0A-1B75-46D3-AA75-C6BB4014D586}"/>
+                <a16:creationId xmlns:a16="http://schemas.microsoft.com/office/drawing/2014/main" id="{67E0944E-2F49-45F0-BC7B-B42EC571FCB7}"/>
               </a:ext>
             </a:extLst>
           </p:cNvPr>
@@ -4087,7 +4122,7 @@
           <p:cNvPr id="10" name="grid-v-616">
             <a:extLst xmlns:a="http://schemas.openxmlformats.org/drawingml/2006/main">
               <a:ext uri="{FF2B5EF4-FFF2-40B4-BE49-F238E27FC236}">
-                <a16:creationId xmlns:a16="http://schemas.microsoft.com/office/drawing/2014/main" id="{0E8194CA-198C-4E39-B4EA-7C85DCCD9E99}"/>
+                <a16:creationId xmlns:a16="http://schemas.microsoft.com/office/drawing/2014/main" id="{2235693C-A6FA-46D5-B374-B4BBDD096F74}"/>
               </a:ext>
             </a:extLst>
           </p:cNvPr>
@@ -4118,7 +4153,7 @@
           <p:cNvPr id="11" name="grid-v-680">
             <a:extLst xmlns:a="http://schemas.openxmlformats.org/drawingml/2006/main">
               <a:ext uri="{FF2B5EF4-FFF2-40B4-BE49-F238E27FC236}">
-                <a16:creationId xmlns:a16="http://schemas.microsoft.com/office/drawing/2014/main" id="{BB20A88F-84EC-45EE-958C-06128BD2B50E}"/>
+                <a16:creationId xmlns:a16="http://schemas.microsoft.com/office/drawing/2014/main" id="{021477CE-0E78-4E4C-AF1A-71B2D6ACD610}"/>
               </a:ext>
             </a:extLst>
           </p:cNvPr>
@@ -4149,7 +4184,7 @@
           <p:cNvPr id="12" name="grid-v-744">
             <a:extLst xmlns:a="http://schemas.openxmlformats.org/drawingml/2006/main">
               <a:ext uri="{FF2B5EF4-FFF2-40B4-BE49-F238E27FC236}">
-                <a16:creationId xmlns:a16="http://schemas.microsoft.com/office/drawing/2014/main" id="{EB6AC1BD-B823-4FEC-A070-BCB5A17F554D}"/>
+                <a16:creationId xmlns:a16="http://schemas.microsoft.com/office/drawing/2014/main" id="{8E66B166-746C-4405-84AA-84448837DC44}"/>
               </a:ext>
             </a:extLst>
           </p:cNvPr>
@@ -4180,7 +4215,7 @@
           <p:cNvPr id="13" name="grid-v-808">
             <a:extLst xmlns:a="http://schemas.openxmlformats.org/drawingml/2006/main">
               <a:ext uri="{FF2B5EF4-FFF2-40B4-BE49-F238E27FC236}">
-                <a16:creationId xmlns:a16="http://schemas.microsoft.com/office/drawing/2014/main" id="{86149A18-3A55-40E2-B61D-3A21CCA58930}"/>
+                <a16:creationId xmlns:a16="http://schemas.microsoft.com/office/drawing/2014/main" id="{879A3E4B-9664-4E26-8BB1-0A9147149E62}"/>
               </a:ext>
             </a:extLst>
           </p:cNvPr>
@@ -4211,7 +4246,7 @@
           <p:cNvPr id="14" name="grid-v-872">
             <a:extLst xmlns:a="http://schemas.openxmlformats.org/drawingml/2006/main">
               <a:ext uri="{FF2B5EF4-FFF2-40B4-BE49-F238E27FC236}">
-                <a16:creationId xmlns:a16="http://schemas.microsoft.com/office/drawing/2014/main" id="{E8EC177F-A322-402C-9C69-2452CCA25946}"/>
+                <a16:creationId xmlns:a16="http://schemas.microsoft.com/office/drawing/2014/main" id="{A67283E8-9DCA-40DC-8378-8911B259E190}"/>
               </a:ext>
             </a:extLst>
           </p:cNvPr>
@@ -4242,7 +4277,7 @@
           <p:cNvPr id="15" name="grid-v-936">
             <a:extLst xmlns:a="http://schemas.openxmlformats.org/drawingml/2006/main">
               <a:ext uri="{FF2B5EF4-FFF2-40B4-BE49-F238E27FC236}">
-                <a16:creationId xmlns:a16="http://schemas.microsoft.com/office/drawing/2014/main" id="{2135F26D-2FA1-41FD-ABE3-24010C611FB5}"/>
+                <a16:creationId xmlns:a16="http://schemas.microsoft.com/office/drawing/2014/main" id="{BC0798ED-4DB2-437B-B86A-789DB79A5DC2}"/>
               </a:ext>
             </a:extLst>
           </p:cNvPr>
@@ -4273,7 +4308,7 @@
           <p:cNvPr id="16" name="grid-v-1000">
             <a:extLst xmlns:a="http://schemas.openxmlformats.org/drawingml/2006/main">
               <a:ext uri="{FF2B5EF4-FFF2-40B4-BE49-F238E27FC236}">
-                <a16:creationId xmlns:a16="http://schemas.microsoft.com/office/drawing/2014/main" id="{20A39D69-CDFF-4E68-A7D6-F479E84494FA}"/>
+                <a16:creationId xmlns:a16="http://schemas.microsoft.com/office/drawing/2014/main" id="{E3E6E2FA-91F9-4557-ADB1-4A3AF2BF9877}"/>
               </a:ext>
             </a:extLst>
           </p:cNvPr>
@@ -4304,7 +4339,7 @@
           <p:cNvPr id="17" name="grid-v-1064">
             <a:extLst xmlns:a="http://schemas.openxmlformats.org/drawingml/2006/main">
               <a:ext uri="{FF2B5EF4-FFF2-40B4-BE49-F238E27FC236}">
-                <a16:creationId xmlns:a16="http://schemas.microsoft.com/office/drawing/2014/main" id="{C4F89908-B70A-42D5-8680-20518EC6A05F}"/>
+                <a16:creationId xmlns:a16="http://schemas.microsoft.com/office/drawing/2014/main" id="{CE03462C-EA7A-4635-B0CD-DEE0EA8F04CC}"/>
               </a:ext>
             </a:extLst>
           </p:cNvPr>
@@ -4335,7 +4370,7 @@
           <p:cNvPr id="18" name="grid-v-1128">
             <a:extLst xmlns:a="http://schemas.openxmlformats.org/drawingml/2006/main">
               <a:ext uri="{FF2B5EF4-FFF2-40B4-BE49-F238E27FC236}">
-                <a16:creationId xmlns:a16="http://schemas.microsoft.com/office/drawing/2014/main" id="{DEF109CA-D42A-47D3-A062-4BC39D82E02B}"/>
+                <a16:creationId xmlns:a16="http://schemas.microsoft.com/office/drawing/2014/main" id="{36CCDB64-C60E-4546-B219-45F4AB44B29D}"/>
               </a:ext>
             </a:extLst>
           </p:cNvPr>
@@ -4366,7 +4401,7 @@
           <p:cNvPr id="19" name="grid-v-1192">
             <a:extLst xmlns:a="http://schemas.openxmlformats.org/drawingml/2006/main">
               <a:ext uri="{FF2B5EF4-FFF2-40B4-BE49-F238E27FC236}">
-                <a16:creationId xmlns:a16="http://schemas.microsoft.com/office/drawing/2014/main" id="{BDE5364F-C1A6-48D6-8E01-D1C4274AB3F8}"/>
+                <a16:creationId xmlns:a16="http://schemas.microsoft.com/office/drawing/2014/main" id="{D4A37551-7F46-44EE-9650-2E691311A7CB}"/>
               </a:ext>
             </a:extLst>
           </p:cNvPr>
@@ -4397,7 +4432,7 @@
           <p:cNvPr id="20" name="grid-h-112">
             <a:extLst xmlns:a="http://schemas.openxmlformats.org/drawingml/2006/main">
               <a:ext uri="{FF2B5EF4-FFF2-40B4-BE49-F238E27FC236}">
-                <a16:creationId xmlns:a16="http://schemas.microsoft.com/office/drawing/2014/main" id="{7C8649B9-8B1A-4944-BB22-6CAC11B6B421}"/>
+                <a16:creationId xmlns:a16="http://schemas.microsoft.com/office/drawing/2014/main" id="{229D210A-DEC0-4436-BFBF-C0AB0B0F6175}"/>
               </a:ext>
             </a:extLst>
           </p:cNvPr>
@@ -4428,7 +4463,7 @@
           <p:cNvPr id="21" name="grid-h-176">
             <a:extLst xmlns:a="http://schemas.openxmlformats.org/drawingml/2006/main">
               <a:ext uri="{FF2B5EF4-FFF2-40B4-BE49-F238E27FC236}">
-                <a16:creationId xmlns:a16="http://schemas.microsoft.com/office/drawing/2014/main" id="{1DEAEDBC-602A-4A74-8534-28BD9B606A78}"/>
+                <a16:creationId xmlns:a16="http://schemas.microsoft.com/office/drawing/2014/main" id="{341A304B-92CA-4A42-A54E-8A969D3B69AC}"/>
               </a:ext>
             </a:extLst>
           </p:cNvPr>
@@ -4459,7 +4494,7 @@
           <p:cNvPr id="22" name="grid-h-240">
             <a:extLst xmlns:a="http://schemas.openxmlformats.org/drawingml/2006/main">
               <a:ext uri="{FF2B5EF4-FFF2-40B4-BE49-F238E27FC236}">
-                <a16:creationId xmlns:a16="http://schemas.microsoft.com/office/drawing/2014/main" id="{1D3679EB-A22E-41D4-A300-B519EB11A9BF}"/>
+                <a16:creationId xmlns:a16="http://schemas.microsoft.com/office/drawing/2014/main" id="{2580AB83-94E7-49E3-A6BD-81C49A877774}"/>
               </a:ext>
             </a:extLst>
           </p:cNvPr>
@@ -4490,7 +4525,7 @@
           <p:cNvPr id="23" name="grid-h-304">
             <a:extLst xmlns:a="http://schemas.openxmlformats.org/drawingml/2006/main">
               <a:ext uri="{FF2B5EF4-FFF2-40B4-BE49-F238E27FC236}">
-                <a16:creationId xmlns:a16="http://schemas.microsoft.com/office/drawing/2014/main" id="{BC5A3EDB-0F63-46E8-895C-A822FF9989BC}"/>
+                <a16:creationId xmlns:a16="http://schemas.microsoft.com/office/drawing/2014/main" id="{FBA38BF6-160B-4422-838F-B2A517EE3598}"/>
               </a:ext>
             </a:extLst>
           </p:cNvPr>
@@ -4521,7 +4556,7 @@
           <p:cNvPr id="24" name="grid-h-368">
             <a:extLst xmlns:a="http://schemas.openxmlformats.org/drawingml/2006/main">
               <a:ext uri="{FF2B5EF4-FFF2-40B4-BE49-F238E27FC236}">
-                <a16:creationId xmlns:a16="http://schemas.microsoft.com/office/drawing/2014/main" id="{DDE506F5-40E1-4FAF-9D90-7DAB5E0D742B}"/>
+                <a16:creationId xmlns:a16="http://schemas.microsoft.com/office/drawing/2014/main" id="{048B99EF-2217-40F4-999A-C4FF60137122}"/>
               </a:ext>
             </a:extLst>
           </p:cNvPr>
@@ -4552,7 +4587,7 @@
           <p:cNvPr id="25" name="grid-h-432">
             <a:extLst xmlns:a="http://schemas.openxmlformats.org/drawingml/2006/main">
               <a:ext uri="{FF2B5EF4-FFF2-40B4-BE49-F238E27FC236}">
-                <a16:creationId xmlns:a16="http://schemas.microsoft.com/office/drawing/2014/main" id="{926572DE-0759-43CC-83E1-72B6E574B57B}"/>
+                <a16:creationId xmlns:a16="http://schemas.microsoft.com/office/drawing/2014/main" id="{B824E690-71B4-462F-979F-0C42B39157E7}"/>
               </a:ext>
             </a:extLst>
           </p:cNvPr>
@@ -4583,7 +4618,7 @@
           <p:cNvPr id="26" name="grid-h-496">
             <a:extLst xmlns:a="http://schemas.openxmlformats.org/drawingml/2006/main">
               <a:ext uri="{FF2B5EF4-FFF2-40B4-BE49-F238E27FC236}">
-                <a16:creationId xmlns:a16="http://schemas.microsoft.com/office/drawing/2014/main" id="{BF732DEE-61F6-425E-ABA6-2A4384B8B932}"/>
+                <a16:creationId xmlns:a16="http://schemas.microsoft.com/office/drawing/2014/main" id="{C48763CF-41F1-45CD-9131-8CF98E6CA69C}"/>
               </a:ext>
             </a:extLst>
           </p:cNvPr>
@@ -4614,7 +4649,7 @@
           <p:cNvPr id="27" name="grid-h-560">
             <a:extLst xmlns:a="http://schemas.openxmlformats.org/drawingml/2006/main">
               <a:ext uri="{FF2B5EF4-FFF2-40B4-BE49-F238E27FC236}">
-                <a16:creationId xmlns:a16="http://schemas.microsoft.com/office/drawing/2014/main" id="{12665722-3422-49F0-A0EA-2DF86ECF1643}"/>
+                <a16:creationId xmlns:a16="http://schemas.microsoft.com/office/drawing/2014/main" id="{1B22030E-8F92-4119-A4F9-4900AE780847}"/>
               </a:ext>
             </a:extLst>
           </p:cNvPr>
@@ -4645,7 +4680,7 @@
           <p:cNvPr id="28" name="grid-h-624">
             <a:extLst xmlns:a="http://schemas.openxmlformats.org/drawingml/2006/main">
               <a:ext uri="{FF2B5EF4-FFF2-40B4-BE49-F238E27FC236}">
-                <a16:creationId xmlns:a16="http://schemas.microsoft.com/office/drawing/2014/main" id="{5708BD2B-6B35-4383-8BEC-E5D4BAC91054}"/>
+                <a16:creationId xmlns:a16="http://schemas.microsoft.com/office/drawing/2014/main" id="{EEC79C12-C37E-4972-B78A-D22E281A83C0}"/>
               </a:ext>
             </a:extLst>
           </p:cNvPr>
@@ -4676,7 +4711,7 @@
           <p:cNvPr id="29" name="top-rule">
             <a:extLst xmlns:a="http://schemas.openxmlformats.org/drawingml/2006/main">
               <a:ext uri="{FF2B5EF4-FFF2-40B4-BE49-F238E27FC236}">
-                <a16:creationId xmlns:a16="http://schemas.microsoft.com/office/drawing/2014/main" id="{404E6AA8-77AE-44FB-AAD9-D42FB99E3F2D}"/>
+                <a16:creationId xmlns:a16="http://schemas.microsoft.com/office/drawing/2014/main" id="{A1A5CC30-D01F-4F3D-B2F6-9B4EE1513921}"/>
               </a:ext>
             </a:extLst>
           </p:cNvPr>
@@ -4707,7 +4742,7 @@
           <p:cNvPr id="30" name="wordmark">
             <a:extLst xmlns:a="http://schemas.openxmlformats.org/drawingml/2006/main">
               <a:ext uri="{FF2B5EF4-FFF2-40B4-BE49-F238E27FC236}">
-                <a16:creationId xmlns:a16="http://schemas.microsoft.com/office/drawing/2014/main" id="{C462C2AE-B75B-4051-A05B-BA12DFCE4C16}"/>
+                <a16:creationId xmlns:a16="http://schemas.microsoft.com/office/drawing/2014/main" id="{933D7994-2010-4FBF-936B-43E71628B756}"/>
               </a:ext>
             </a:extLst>
           </p:cNvPr>
@@ -4769,7 +4804,7 @@
           <p:cNvPr id="31" name="environment-label">
             <a:extLst xmlns:a="http://schemas.openxmlformats.org/drawingml/2006/main">
               <a:ext uri="{FF2B5EF4-FFF2-40B4-BE49-F238E27FC236}">
-                <a16:creationId xmlns:a16="http://schemas.microsoft.com/office/drawing/2014/main" id="{1F9E35B7-084B-43A6-90F2-717E8549DA47}"/>
+                <a16:creationId xmlns:a16="http://schemas.microsoft.com/office/drawing/2014/main" id="{CBB788D8-E4F6-40FC-8826-10E7A582AEF2}"/>
               </a:ext>
             </a:extLst>
           </p:cNvPr>
@@ -4821,7 +4856,7 @@
                 <a:ea typeface="Courier New"/>
                 <a:cs typeface="Courier New"/>
               </a:rPr>
-              <a:t>CREDIBLE DEMAND</a:t>
+              <a:t>BUYER DECISION RECEIPT</a:t>
             </a:r>
           </a:p>
         </p:txBody>
@@ -4831,7 +4866,7 @@
           <p:cNvPr id="32" name="slide-index">
             <a:extLst xmlns:a="http://schemas.openxmlformats.org/drawingml/2006/main">
               <a:ext uri="{FF2B5EF4-FFF2-40B4-BE49-F238E27FC236}">
-                <a16:creationId xmlns:a16="http://schemas.microsoft.com/office/drawing/2014/main" id="{E707021F-8406-4892-B87F-E82BF1AA91AB}"/>
+                <a16:creationId xmlns:a16="http://schemas.microsoft.com/office/drawing/2014/main" id="{5CD1373B-E27E-4B43-8D16-148813D83D32}"/>
               </a:ext>
             </a:extLst>
           </p:cNvPr>
@@ -4893,7 +4928,7 @@
           <p:cNvPr id="33" name="event-footer">
             <a:extLst xmlns:a="http://schemas.openxmlformats.org/drawingml/2006/main">
               <a:ext uri="{FF2B5EF4-FFF2-40B4-BE49-F238E27FC236}">
-                <a16:creationId xmlns:a16="http://schemas.microsoft.com/office/drawing/2014/main" id="{28308D29-C5CF-4957-A84D-B0DCBC408F18}"/>
+                <a16:creationId xmlns:a16="http://schemas.microsoft.com/office/drawing/2014/main" id="{67F7718D-CF72-4DFD-B1EE-580ABF436A8D}"/>
               </a:ext>
             </a:extLst>
           </p:cNvPr>
@@ -4955,7 +4990,7 @@
           <p:cNvPr id="34" name="honesty-footer">
             <a:extLst xmlns:a="http://schemas.openxmlformats.org/drawingml/2006/main">
               <a:ext uri="{FF2B5EF4-FFF2-40B4-BE49-F238E27FC236}">
-                <a16:creationId xmlns:a16="http://schemas.microsoft.com/office/drawing/2014/main" id="{D05032BC-C8B2-4B34-ADCF-53A77D130256}"/>
+                <a16:creationId xmlns:a16="http://schemas.microsoft.com/office/drawing/2014/main" id="{305DE237-214E-4F3D-B08F-0756698414E9}"/>
               </a:ext>
             </a:extLst>
           </p:cNvPr>
@@ -5017,7 +5052,7 @@
           <p:cNvPr id="35" name="eyebrow">
             <a:extLst xmlns:a="http://schemas.openxmlformats.org/drawingml/2006/main">
               <a:ext uri="{FF2B5EF4-FFF2-40B4-BE49-F238E27FC236}">
-                <a16:creationId xmlns:a16="http://schemas.microsoft.com/office/drawing/2014/main" id="{816800E4-D4B0-4349-95FD-5EA36AFCAA97}"/>
+                <a16:creationId xmlns:a16="http://schemas.microsoft.com/office/drawing/2014/main" id="{2A9FAFD7-05E4-41B3-B80B-06F082F8D4CD}"/>
               </a:ext>
             </a:extLst>
           </p:cNvPr>
@@ -5069,7 +5104,7 @@
                 <a:ea typeface="Courier New"/>
                 <a:cs typeface="Courier New"/>
               </a:rPr>
-              <a:t>01 / RESERVE</a:t>
+              <a:t>01 / INTERPRET</a:t>
             </a:r>
           </a:p>
         </p:txBody>
@@ -5079,7 +5114,7 @@
           <p:cNvPr id="36" name="slide-title">
             <a:extLst xmlns:a="http://schemas.openxmlformats.org/drawingml/2006/main">
               <a:ext uri="{FF2B5EF4-FFF2-40B4-BE49-F238E27FC236}">
-                <a16:creationId xmlns:a16="http://schemas.microsoft.com/office/drawing/2014/main" id="{1C5EB835-C439-4DBE-BDA2-F97EA3E5F6A5}"/>
+                <a16:creationId xmlns:a16="http://schemas.microsoft.com/office/drawing/2014/main" id="{04DCE5E8-C32D-4230-97A5-A5AAFD5FE3D5}"/>
               </a:ext>
             </a:extLst>
           </p:cNvPr>
@@ -5113,7 +5148,7 @@
                 <a:spcPct val="100000"/>
               </a:lnSpc>
               <a:buNone/>
-              <a:defRPr sz="3750" b="1">
+              <a:defRPr sz="3525" b="1">
                 <a:solidFill>
                   <a:srgbClr val="F1EFE5"/>
                 </a:solidFill>
@@ -5123,7 +5158,7 @@
               </a:defRPr>
             </a:pPr>
             <a:r>
-              <a:rPr sz="3750" b="1">
+              <a:rPr sz="3525" b="1">
                 <a:solidFill>
                   <a:srgbClr val="F1EFE5"/>
                 </a:solidFill>
@@ -5131,29 +5166,29 @@
                 <a:ea typeface="Arial Black"/>
                 <a:cs typeface="Arial Black"/>
               </a:rPr>
-              <a:t>FULL MSRP FIRST. MARKET SECOND.</a:t>
+              <a:t>INTERPRET FIRST. SAVE WITH CONSENT.</a:t>
             </a:r>
           </a:p>
         </p:txBody>
       </p:sp>
       <p:sp>
         <p:nvSpPr>
-          <p:cNvPr id="37" name="reserved-total">
-            <a:extLst xmlns:a="http://schemas.openxmlformats.org/drawingml/2006/main">
-              <a:ext uri="{FF2B5EF4-FFF2-40B4-BE49-F238E27FC236}">
-                <a16:creationId xmlns:a16="http://schemas.microsoft.com/office/drawing/2014/main" id="{58F148DD-49DB-4320-8E10-F0A09C7FC861}"/>
-              </a:ext>
-            </a:extLst>
-          </p:cNvPr>
-          <p:cNvSpPr>
-            <a:spLocks xmlns:a="http://schemas.openxmlformats.org/drawingml/2006/main" noGrp="1"/>
-          </p:cNvSpPr>
-          <p:nvPr/>
-        </p:nvSpPr>
-        <p:spPr>
-          <a:xfrm xmlns:a="http://schemas.openxmlformats.org/drawingml/2006/main">
-            <a:off x="400050" y="2419350"/>
-            <a:ext cx="3143250" cy="876300"/>
+          <p:cNvPr id="37" name="agent-request-label">
+            <a:extLst xmlns:a="http://schemas.openxmlformats.org/drawingml/2006/main">
+              <a:ext uri="{FF2B5EF4-FFF2-40B4-BE49-F238E27FC236}">
+                <a16:creationId xmlns:a16="http://schemas.microsoft.com/office/drawing/2014/main" id="{98AA1C75-C7DD-4981-A07F-E24392FAD52A}"/>
+              </a:ext>
+            </a:extLst>
+          </p:cNvPr>
+          <p:cNvSpPr>
+            <a:spLocks xmlns:a="http://schemas.openxmlformats.org/drawingml/2006/main" noGrp="1"/>
+          </p:cNvSpPr>
+          <p:nvPr/>
+        </p:nvSpPr>
+        <p:spPr>
+          <a:xfrm xmlns:a="http://schemas.openxmlformats.org/drawingml/2006/main">
+            <a:off x="419100" y="2343150"/>
+            <a:ext cx="2000250" cy="209550"/>
           </a:xfrm>
           <a:prstGeom xmlns:a="http://schemas.openxmlformats.org/drawingml/2006/main" prst="rect">
             <a:avLst/>
@@ -5175,47 +5210,47 @@
                 <a:spcPct val="100000"/>
               </a:lnSpc>
               <a:buNone/>
-              <a:defRPr sz="5025" b="1">
-                <a:solidFill>
-                  <a:srgbClr val="F1EFE5"/>
-                </a:solidFill>
-                <a:latin typeface="Arial Black"/>
-                <a:ea typeface="Arial Black"/>
-                <a:cs typeface="Arial Black"/>
+              <a:defRPr sz="1125" b="1">
+                <a:solidFill>
+                  <a:srgbClr val="C7F52F"/>
+                </a:solidFill>
+                <a:latin typeface="Courier New"/>
+                <a:ea typeface="Courier New"/>
+                <a:cs typeface="Courier New"/>
               </a:defRPr>
             </a:pPr>
             <a:r>
-              <a:rPr sz="5025" b="1">
-                <a:solidFill>
-                  <a:srgbClr val="F1EFE5"/>
-                </a:solidFill>
-                <a:latin typeface="Arial Black"/>
-                <a:ea typeface="Arial Black"/>
-                <a:cs typeface="Arial Black"/>
+              <a:rPr sz="1125" b="1">
+                <a:solidFill>
+                  <a:srgbClr val="C7F52F"/>
+                </a:solidFill>
+                <a:latin typeface="Courier New"/>
+                <a:ea typeface="Courier New"/>
+                <a:cs typeface="Courier New"/>
               </a:rPr>
-              <a:t>$5,748</a:t>
+              <a:t>BUYER REQUEST</a:t>
             </a:r>
           </a:p>
         </p:txBody>
       </p:sp>
       <p:sp>
         <p:nvSpPr>
-          <p:cNvPr id="38" name="reserve-status">
-            <a:extLst xmlns:a="http://schemas.openxmlformats.org/drawingml/2006/main">
-              <a:ext uri="{FF2B5EF4-FFF2-40B4-BE49-F238E27FC236}">
-                <a16:creationId xmlns:a16="http://schemas.microsoft.com/office/drawing/2014/main" id="{E98109D8-04C9-450D-99C8-F3DFBD1D21F4}"/>
-              </a:ext>
-            </a:extLst>
-          </p:cNvPr>
-          <p:cNvSpPr>
-            <a:spLocks xmlns:a="http://schemas.openxmlformats.org/drawingml/2006/main" noGrp="1"/>
-          </p:cNvSpPr>
-          <p:nvPr/>
-        </p:nvSpPr>
-        <p:spPr>
-          <a:xfrm xmlns:a="http://schemas.openxmlformats.org/drawingml/2006/main">
-            <a:off x="457200" y="3314700"/>
-            <a:ext cx="3429000" cy="266700"/>
+          <p:cNvPr id="38" name="agent-request">
+            <a:extLst xmlns:a="http://schemas.openxmlformats.org/drawingml/2006/main">
+              <a:ext uri="{FF2B5EF4-FFF2-40B4-BE49-F238E27FC236}">
+                <a16:creationId xmlns:a16="http://schemas.microsoft.com/office/drawing/2014/main" id="{5AF5444F-BD82-4381-99A5-A0C2DB78A66F}"/>
+              </a:ext>
+            </a:extLst>
+          </p:cNvPr>
+          <p:cNvSpPr>
+            <a:spLocks xmlns:a="http://schemas.openxmlformats.org/drawingml/2006/main" noGrp="1"/>
+          </p:cNvSpPr>
+          <p:nvPr/>
+        </p:nvSpPr>
+        <p:spPr>
+          <a:xfrm xmlns:a="http://schemas.openxmlformats.org/drawingml/2006/main">
+            <a:off x="419100" y="2686050"/>
+            <a:ext cx="3886200" cy="990600"/>
           </a:xfrm>
           <a:prstGeom xmlns:a="http://schemas.openxmlformats.org/drawingml/2006/main" prst="rect">
             <a:avLst/>
@@ -5234,50 +5269,77 @@
           <a:p xmlns:a="http://schemas.openxmlformats.org/drawingml/2006/main">
             <a:pPr algn="l">
               <a:lnSpc>
-                <a:spcPct val="100000"/>
+                <a:spcPct val="105000"/>
               </a:lnSpc>
               <a:buNone/>
-              <a:defRPr sz="1350" b="0">
-                <a:solidFill>
-                  <a:srgbClr val="C7F52F"/>
-                </a:solidFill>
-                <a:latin typeface="Courier New"/>
-                <a:ea typeface="Courier New"/>
-                <a:cs typeface="Courier New"/>
+              <a:defRPr sz="2025" b="1">
+                <a:solidFill>
+                  <a:srgbClr val="F1EFE5"/>
+                </a:solidFill>
+                <a:latin typeface="Arial"/>
+                <a:ea typeface="Arial"/>
+                <a:cs typeface="Arial"/>
               </a:defRPr>
             </a:pPr>
             <a:r>
-              <a:rPr sz="1350" b="0">
-                <a:solidFill>
-                  <a:srgbClr val="C7F52F"/>
-                </a:solidFill>
-                <a:latin typeface="Courier New"/>
-                <a:ea typeface="Courier New"/>
-                <a:cs typeface="Courier New"/>
+              <a:rPr sz="2025" b="1">
+                <a:solidFill>
+                  <a:srgbClr val="F1EFE5"/>
+                </a:solidFill>
+                <a:latin typeface="Arial"/>
+                <a:ea typeface="Arial"/>
+                <a:cs typeface="Arial"/>
               </a:rPr>
-              <a:t>AVAILABLE → RESERVED</a:t>
+              <a:t>“Sony headphones. One unit.</a:t>
+            </a:r>
+          </a:p>
+          <a:p xmlns:a="http://schemas.openxmlformats.org/drawingml/2006/main">
+            <a:pPr algn="l">
+              <a:lnSpc>
+                <a:spcPct val="105000"/>
+              </a:lnSpc>
+              <a:buNone/>
+              <a:defRPr sz="2025" b="1">
+                <a:solidFill>
+                  <a:srgbClr val="F1EFE5"/>
+                </a:solidFill>
+                <a:latin typeface="Arial"/>
+                <a:ea typeface="Arial"/>
+                <a:cs typeface="Arial"/>
+              </a:defRPr>
+            </a:pPr>
+            <a:r>
+              <a:rPr sz="2025" b="1">
+                <a:solidFill>
+                  <a:srgbClr val="F1EFE5"/>
+                </a:solidFill>
+                <a:latin typeface="Arial"/>
+                <a:ea typeface="Arial"/>
+                <a:cs typeface="Arial"/>
+              </a:rPr>
+              <a:t>Max $400. I can wait 30 days.”</a:t>
             </a:r>
           </a:p>
         </p:txBody>
       </p:sp>
       <p:sp>
         <p:nvSpPr>
-          <p:cNvPr id="39" name="reserve-explanation">
-            <a:extLst xmlns:a="http://schemas.openxmlformats.org/drawingml/2006/main">
-              <a:ext uri="{FF2B5EF4-FFF2-40B4-BE49-F238E27FC236}">
-                <a16:creationId xmlns:a16="http://schemas.microsoft.com/office/drawing/2014/main" id="{6DFF502A-2A7E-4E70-B3FA-DF941EC5344D}"/>
-              </a:ext>
-            </a:extLst>
-          </p:cNvPr>
-          <p:cNvSpPr>
-            <a:spLocks xmlns:a="http://schemas.openxmlformats.org/drawingml/2006/main" noGrp="1"/>
-          </p:cNvSpPr>
-          <p:nvPr/>
-        </p:nvSpPr>
-        <p:spPr>
-          <a:xfrm xmlns:a="http://schemas.openxmlformats.org/drawingml/2006/main">
-            <a:off x="457200" y="3762375"/>
-            <a:ext cx="4095750" cy="781050"/>
+          <p:cNvPr id="39" name="agent-stage-number-0">
+            <a:extLst xmlns:a="http://schemas.openxmlformats.org/drawingml/2006/main">
+              <a:ext uri="{FF2B5EF4-FFF2-40B4-BE49-F238E27FC236}">
+                <a16:creationId xmlns:a16="http://schemas.microsoft.com/office/drawing/2014/main" id="{779D79D0-E77B-436B-85B6-9B097A9E12EA}"/>
+              </a:ext>
+            </a:extLst>
+          </p:cNvPr>
+          <p:cNvSpPr>
+            <a:spLocks xmlns:a="http://schemas.openxmlformats.org/drawingml/2006/main" noGrp="1"/>
+          </p:cNvSpPr>
+          <p:nvPr/>
+        </p:nvSpPr>
+        <p:spPr>
+          <a:xfrm xmlns:a="http://schemas.openxmlformats.org/drawingml/2006/main">
+            <a:off x="419100" y="4000500"/>
+            <a:ext cx="304800" cy="190500"/>
           </a:xfrm>
           <a:prstGeom xmlns:a="http://schemas.openxmlformats.org/drawingml/2006/main" prst="rect">
             <a:avLst/>
@@ -5296,108 +5358,50 @@
           <a:p xmlns:a="http://schemas.openxmlformats.org/drawingml/2006/main">
             <a:pPr algn="l">
               <a:lnSpc>
-                <a:spcPct val="115000"/>
+                <a:spcPct val="100000"/>
               </a:lnSpc>
               <a:buNone/>
-              <a:defRPr sz="1500" b="0">
-                <a:solidFill>
-                  <a:srgbClr val="D3D1C8"/>
-                </a:solidFill>
-                <a:latin typeface="Arial"/>
-                <a:ea typeface="Arial"/>
-                <a:cs typeface="Arial"/>
+              <a:defRPr sz="975" b="1">
+                <a:solidFill>
+                  <a:srgbClr val="C7F52F"/>
+                </a:solidFill>
+                <a:latin typeface="Courier New"/>
+                <a:ea typeface="Courier New"/>
+                <a:cs typeface="Courier New"/>
               </a:defRPr>
             </a:pPr>
             <a:r>
-              <a:rPr sz="1500" b="0">
-                <a:solidFill>
-                  <a:srgbClr val="D3D1C8"/>
-                </a:solidFill>
-                <a:latin typeface="Arial"/>
-                <a:ea typeface="Arial"/>
-                <a:cs typeface="Arial"/>
+              <a:rPr sz="975" b="1">
+                <a:solidFill>
+                  <a:srgbClr val="C7F52F"/>
+                </a:solidFill>
+                <a:latin typeface="Courier New"/>
+                <a:ea typeface="Courier New"/>
+                <a:cs typeface="Courier New"/>
               </a:rPr>
-              <a:t>MSRP × quantity must be available before a buyer joins.</a:t>
-            </a:r>
-          </a:p>
-          <a:p xmlns:a="http://schemas.openxmlformats.org/drawingml/2006/main">
-            <a:pPr algn="l">
-              <a:lnSpc>
-                <a:spcPct val="115000"/>
-              </a:lnSpc>
-              <a:buNone/>
-              <a:defRPr sz="1500" b="0">
-                <a:solidFill>
-                  <a:srgbClr val="D3D1C8"/>
-                </a:solidFill>
-                <a:latin typeface="Arial"/>
-                <a:ea typeface="Arial"/>
-                <a:cs typeface="Arial"/>
-              </a:defRPr>
-            </a:pPr>
-            <a:r>
-              <a:rPr sz="1500" b="0">
-                <a:solidFill>
-                  <a:srgbClr val="D3D1C8"/>
-                </a:solidFill>
-                <a:latin typeface="Arial"/>
-                <a:ea typeface="Arial"/>
-                <a:cs typeface="Arial"/>
-              </a:rPr>
-              <a:t>Leaving before cutoff releases that reservation exactly once.</a:t>
+              <a:t>01</a:t>
             </a:r>
           </a:p>
         </p:txBody>
       </p:sp>
       <p:sp>
         <p:nvSpPr>
-          <p:cNvPr id="40" name="allocation-baseline">
-            <a:extLst xmlns:a="http://schemas.openxmlformats.org/drawingml/2006/main">
-              <a:ext uri="{FF2B5EF4-FFF2-40B4-BE49-F238E27FC236}">
-                <a16:creationId xmlns:a16="http://schemas.microsoft.com/office/drawing/2014/main" id="{72BFDFD5-316E-4D86-B9D0-0B8DEE6F113D}"/>
-              </a:ext>
-            </a:extLst>
-          </p:cNvPr>
-          <p:cNvSpPr>
-            <a:spLocks xmlns:a="http://schemas.openxmlformats.org/drawingml/2006/main" noGrp="1"/>
-          </p:cNvSpPr>
-          <p:nvPr/>
-        </p:nvSpPr>
-        <p:spPr>
-          <a:xfrm xmlns:a="http://schemas.openxmlformats.org/drawingml/2006/main">
-            <a:off x="4857750" y="2781300"/>
-            <a:ext cx="6210300" cy="0"/>
-          </a:xfrm>
-          <a:prstGeom xmlns:a="http://schemas.openxmlformats.org/drawingml/2006/main" prst="line">
-            <a:avLst/>
-          </a:prstGeom>
-          <a:noFill xmlns:a="http://schemas.openxmlformats.org/drawingml/2006/main"/>
-          <a:ln xmlns:a="http://schemas.openxmlformats.org/drawingml/2006/main" w="19050">
-            <a:solidFill>
-              <a:srgbClr val="252A26"/>
-            </a:solidFill>
-            <a:prstDash val="solid"/>
-          </a:ln>
-        </p:spPr>
-      </p:sp>
-      <p:sp>
-        <p:nvSpPr>
-          <p:cNvPr id="41" name="buyer-index-0">
-            <a:extLst xmlns:a="http://schemas.openxmlformats.org/drawingml/2006/main">
-              <a:ext uri="{FF2B5EF4-FFF2-40B4-BE49-F238E27FC236}">
-                <a16:creationId xmlns:a16="http://schemas.microsoft.com/office/drawing/2014/main" id="{B17DE3E0-FD4F-4983-987B-36A408BE6395}"/>
-              </a:ext>
-            </a:extLst>
-          </p:cNvPr>
-          <p:cNvSpPr>
-            <a:spLocks xmlns:a="http://schemas.openxmlformats.org/drawingml/2006/main" noGrp="1"/>
-          </p:cNvSpPr>
-          <p:nvPr/>
-        </p:nvSpPr>
-        <p:spPr>
-          <a:xfrm xmlns:a="http://schemas.openxmlformats.org/drawingml/2006/main">
-            <a:off x="4857750" y="2381250"/>
-            <a:ext cx="323850" cy="209550"/>
+          <p:cNvPr id="40" name="agent-stage-label-0">
+            <a:extLst xmlns:a="http://schemas.openxmlformats.org/drawingml/2006/main">
+              <a:ext uri="{FF2B5EF4-FFF2-40B4-BE49-F238E27FC236}">
+                <a16:creationId xmlns:a16="http://schemas.microsoft.com/office/drawing/2014/main" id="{AD6781F6-163A-4A4A-A5B7-857F72ECBD36}"/>
+              </a:ext>
+            </a:extLst>
+          </p:cNvPr>
+          <p:cNvSpPr>
+            <a:spLocks xmlns:a="http://schemas.openxmlformats.org/drawingml/2006/main" noGrp="1"/>
+          </p:cNvSpPr>
+          <p:nvPr/>
+        </p:nvSpPr>
+        <p:spPr>
+          <a:xfrm xmlns:a="http://schemas.openxmlformats.org/drawingml/2006/main">
+            <a:off x="419100" y="4257675"/>
+            <a:ext cx="876300" cy="190500"/>
           </a:xfrm>
           <a:prstGeom xmlns:a="http://schemas.openxmlformats.org/drawingml/2006/main" prst="rect">
             <a:avLst/>
@@ -5419,9 +5423,9 @@
                 <a:spcPct val="100000"/>
               </a:lnSpc>
               <a:buNone/>
-              <a:defRPr sz="1125" b="0">
-                <a:solidFill>
-                  <a:srgbClr val="858B84"/>
+              <a:defRPr sz="975" b="0">
+                <a:solidFill>
+                  <a:srgbClr val="D3D1C8"/>
                 </a:solidFill>
                 <a:latin typeface="Courier New"/>
                 <a:ea typeface="Courier New"/>
@@ -5429,37 +5433,99 @@
               </a:defRPr>
             </a:pPr>
             <a:r>
-              <a:rPr sz="1125" b="0">
-                <a:solidFill>
-                  <a:srgbClr val="858B84"/>
+              <a:rPr sz="975" b="0">
+                <a:solidFill>
+                  <a:srgbClr val="D3D1C8"/>
                 </a:solidFill>
                 <a:latin typeface="Courier New"/>
                 <a:ea typeface="Courier New"/>
                 <a:cs typeface="Courier New"/>
               </a:rPr>
-              <a:t>01</a:t>
+              <a:t>LANGUAGE</a:t>
             </a:r>
           </a:p>
         </p:txBody>
       </p:sp>
       <p:sp>
         <p:nvSpPr>
-          <p:cNvPr id="42" name="buyer-name-0">
-            <a:extLst xmlns:a="http://schemas.openxmlformats.org/drawingml/2006/main">
-              <a:ext uri="{FF2B5EF4-FFF2-40B4-BE49-F238E27FC236}">
-                <a16:creationId xmlns:a16="http://schemas.microsoft.com/office/drawing/2014/main" id="{FCD87217-7A45-4B46-AA8A-E3CC2144127F}"/>
-              </a:ext>
-            </a:extLst>
-          </p:cNvPr>
-          <p:cNvSpPr>
-            <a:spLocks xmlns:a="http://schemas.openxmlformats.org/drawingml/2006/main" noGrp="1"/>
-          </p:cNvSpPr>
-          <p:nvPr/>
-        </p:nvSpPr>
-        <p:spPr>
-          <a:xfrm xmlns:a="http://schemas.openxmlformats.org/drawingml/2006/main">
-            <a:off x="5314950" y="2381250"/>
-            <a:ext cx="1809750" cy="209550"/>
+          <p:cNvPr id="41" name="agent-stage-arrow-0-shaft">
+            <a:extLst xmlns:a="http://schemas.openxmlformats.org/drawingml/2006/main">
+              <a:ext uri="{FF2B5EF4-FFF2-40B4-BE49-F238E27FC236}">
+                <a16:creationId xmlns:a16="http://schemas.microsoft.com/office/drawing/2014/main" id="{77FCBE8D-9401-4A9C-B88D-A722FDEC2A57}"/>
+              </a:ext>
+            </a:extLst>
+          </p:cNvPr>
+          <p:cNvSpPr>
+            <a:spLocks xmlns:a="http://schemas.openxmlformats.org/drawingml/2006/main" noGrp="1"/>
+          </p:cNvSpPr>
+          <p:nvPr/>
+        </p:nvSpPr>
+        <p:spPr>
+          <a:xfrm xmlns:a="http://schemas.openxmlformats.org/drawingml/2006/main">
+            <a:off x="1085850" y="4086225"/>
+            <a:ext cx="95250" cy="28575"/>
+          </a:xfrm>
+          <a:prstGeom xmlns:a="http://schemas.openxmlformats.org/drawingml/2006/main" prst="rect">
+            <a:avLst/>
+          </a:prstGeom>
+          <a:solidFill xmlns:a="http://schemas.openxmlformats.org/drawingml/2006/main">
+            <a:srgbClr val="7C9920"/>
+          </a:solidFill>
+          <a:ln xmlns:a="http://schemas.openxmlformats.org/drawingml/2006/main" w="0">
+            <a:noFill/>
+            <a:prstDash val="solid"/>
+          </a:ln>
+        </p:spPr>
+      </p:sp>
+      <p:sp>
+        <p:nvSpPr>
+          <p:cNvPr id="42" name="agent-stage-arrow-0-head">
+            <a:extLst xmlns:a="http://schemas.openxmlformats.org/drawingml/2006/main">
+              <a:ext uri="{FF2B5EF4-FFF2-40B4-BE49-F238E27FC236}">
+                <a16:creationId xmlns:a16="http://schemas.microsoft.com/office/drawing/2014/main" id="{6BB01455-7024-4AAB-A7DA-C45ADDAF5BCA}"/>
+              </a:ext>
+            </a:extLst>
+          </p:cNvPr>
+          <p:cNvSpPr>
+            <a:spLocks xmlns:a="http://schemas.openxmlformats.org/drawingml/2006/main" noGrp="1"/>
+          </p:cNvSpPr>
+          <p:nvPr/>
+        </p:nvSpPr>
+        <p:spPr>
+          <a:xfrm xmlns:a="http://schemas.openxmlformats.org/drawingml/2006/main">
+            <a:off x="1143000" y="4010025"/>
+            <a:ext cx="209550" cy="180975"/>
+          </a:xfrm>
+          <a:prstGeom xmlns:a="http://schemas.openxmlformats.org/drawingml/2006/main" prst="rightArrow">
+            <a:avLst/>
+          </a:prstGeom>
+          <a:solidFill xmlns:a="http://schemas.openxmlformats.org/drawingml/2006/main">
+            <a:srgbClr val="7C9920"/>
+          </a:solidFill>
+          <a:ln xmlns:a="http://schemas.openxmlformats.org/drawingml/2006/main" w="0">
+            <a:noFill/>
+            <a:prstDash val="solid"/>
+          </a:ln>
+        </p:spPr>
+      </p:sp>
+      <p:sp>
+        <p:nvSpPr>
+          <p:cNvPr id="43" name="agent-stage-number-1">
+            <a:extLst xmlns:a="http://schemas.openxmlformats.org/drawingml/2006/main">
+              <a:ext uri="{FF2B5EF4-FFF2-40B4-BE49-F238E27FC236}">
+                <a16:creationId xmlns:a16="http://schemas.microsoft.com/office/drawing/2014/main" id="{E1A4C648-5B4F-4C78-A71B-5CB920311341}"/>
+              </a:ext>
+            </a:extLst>
+          </p:cNvPr>
+          <p:cNvSpPr>
+            <a:spLocks xmlns:a="http://schemas.openxmlformats.org/drawingml/2006/main" noGrp="1"/>
+          </p:cNvSpPr>
+          <p:nvPr/>
+        </p:nvSpPr>
+        <p:spPr>
+          <a:xfrm xmlns:a="http://schemas.openxmlformats.org/drawingml/2006/main">
+            <a:off x="1390650" y="4000500"/>
+            <a:ext cx="304800" cy="190500"/>
           </a:xfrm>
           <a:prstGeom xmlns:a="http://schemas.openxmlformats.org/drawingml/2006/main" prst="rect">
             <a:avLst/>
@@ -5481,9 +5547,9 @@
                 <a:spcPct val="100000"/>
               </a:lnSpc>
               <a:buNone/>
-              <a:defRPr sz="1275" b="0">
-                <a:solidFill>
-                  <a:srgbClr val="D3D1C8"/>
+              <a:defRPr sz="975" b="1">
+                <a:solidFill>
+                  <a:srgbClr val="C7F52F"/>
                 </a:solidFill>
                 <a:latin typeface="Courier New"/>
                 <a:ea typeface="Courier New"/>
@@ -5491,37 +5557,37 @@
               </a:defRPr>
             </a:pPr>
             <a:r>
-              <a:rPr sz="1275" b="0">
-                <a:solidFill>
-                  <a:srgbClr val="D3D1C8"/>
+              <a:rPr sz="975" b="1">
+                <a:solidFill>
+                  <a:srgbClr val="C7F52F"/>
                 </a:solidFill>
                 <a:latin typeface="Courier New"/>
                 <a:ea typeface="Courier New"/>
                 <a:cs typeface="Courier New"/>
               </a:rPr>
-              <a:t>HARBOR LABS</a:t>
+              <a:t>02</a:t>
             </a:r>
           </a:p>
         </p:txBody>
       </p:sp>
       <p:sp>
         <p:nvSpPr>
-          <p:cNvPr id="43" name="buyer-qty-0">
-            <a:extLst xmlns:a="http://schemas.openxmlformats.org/drawingml/2006/main">
-              <a:ext uri="{FF2B5EF4-FFF2-40B4-BE49-F238E27FC236}">
-                <a16:creationId xmlns:a16="http://schemas.microsoft.com/office/drawing/2014/main" id="{F4AD45C5-8A5B-4C6F-8C14-93C251208A2B}"/>
-              </a:ext>
-            </a:extLst>
-          </p:cNvPr>
-          <p:cNvSpPr>
-            <a:spLocks xmlns:a="http://schemas.openxmlformats.org/drawingml/2006/main" noGrp="1"/>
-          </p:cNvSpPr>
-          <p:nvPr/>
-        </p:nvSpPr>
-        <p:spPr>
-          <a:xfrm xmlns:a="http://schemas.openxmlformats.org/drawingml/2006/main">
-            <a:off x="9715500" y="2381250"/>
-            <a:ext cx="1047750" cy="209550"/>
+          <p:cNvPr id="44" name="agent-stage-label-1">
+            <a:extLst xmlns:a="http://schemas.openxmlformats.org/drawingml/2006/main">
+              <a:ext uri="{FF2B5EF4-FFF2-40B4-BE49-F238E27FC236}">
+                <a16:creationId xmlns:a16="http://schemas.microsoft.com/office/drawing/2014/main" id="{EAE67378-E306-4C39-A349-D3DA9EDB48F7}"/>
+              </a:ext>
+            </a:extLst>
+          </p:cNvPr>
+          <p:cNvSpPr>
+            <a:spLocks xmlns:a="http://schemas.openxmlformats.org/drawingml/2006/main" noGrp="1"/>
+          </p:cNvSpPr>
+          <p:nvPr/>
+        </p:nvSpPr>
+        <p:spPr>
+          <a:xfrm xmlns:a="http://schemas.openxmlformats.org/drawingml/2006/main">
+            <a:off x="1390650" y="4257675"/>
+            <a:ext cx="876300" cy="190500"/>
           </a:xfrm>
           <a:prstGeom xmlns:a="http://schemas.openxmlformats.org/drawingml/2006/main" prst="rect">
             <a:avLst/>
@@ -5538,14 +5604,14 @@
           </a:bodyPr>
           <a:lstStyle xmlns:a="http://schemas.openxmlformats.org/drawingml/2006/main"/>
           <a:p xmlns:a="http://schemas.openxmlformats.org/drawingml/2006/main">
-            <a:pPr algn="r">
+            <a:pPr algn="l">
               <a:lnSpc>
                 <a:spcPct val="100000"/>
               </a:lnSpc>
               <a:buNone/>
-              <a:defRPr sz="1275" b="0">
-                <a:solidFill>
-                  <a:srgbClr val="F1EFE5"/>
+              <a:defRPr sz="975" b="0">
+                <a:solidFill>
+                  <a:srgbClr val="D3D1C8"/>
                 </a:solidFill>
                 <a:latin typeface="Courier New"/>
                 <a:ea typeface="Courier New"/>
@@ -5553,37 +5619,99 @@
               </a:defRPr>
             </a:pPr>
             <a:r>
-              <a:rPr sz="1275" b="0">
-                <a:solidFill>
-                  <a:srgbClr val="F1EFE5"/>
+              <a:rPr sz="975" b="0">
+                <a:solidFill>
+                  <a:srgbClr val="D3D1C8"/>
                 </a:solidFill>
                 <a:latin typeface="Courier New"/>
                 <a:ea typeface="Courier New"/>
                 <a:cs typeface="Courier New"/>
               </a:rPr>
-              <a:t>3 UNITS</a:t>
+              <a:t>CATALOG</a:t>
             </a:r>
           </a:p>
         </p:txBody>
       </p:sp>
       <p:sp>
         <p:nvSpPr>
-          <p:cNvPr id="44" name="buyer-amount-0">
-            <a:extLst xmlns:a="http://schemas.openxmlformats.org/drawingml/2006/main">
-              <a:ext uri="{FF2B5EF4-FFF2-40B4-BE49-F238E27FC236}">
-                <a16:creationId xmlns:a16="http://schemas.microsoft.com/office/drawing/2014/main" id="{A7ABA114-ABC5-4127-AE14-227258B7F023}"/>
-              </a:ext>
-            </a:extLst>
-          </p:cNvPr>
-          <p:cNvSpPr>
-            <a:spLocks xmlns:a="http://schemas.openxmlformats.org/drawingml/2006/main" noGrp="1"/>
-          </p:cNvSpPr>
-          <p:nvPr/>
-        </p:nvSpPr>
-        <p:spPr>
-          <a:xfrm xmlns:a="http://schemas.openxmlformats.org/drawingml/2006/main">
-            <a:off x="10839450" y="2381250"/>
-            <a:ext cx="971550" cy="209550"/>
+          <p:cNvPr id="45" name="agent-stage-arrow-1-shaft">
+            <a:extLst xmlns:a="http://schemas.openxmlformats.org/drawingml/2006/main">
+              <a:ext uri="{FF2B5EF4-FFF2-40B4-BE49-F238E27FC236}">
+                <a16:creationId xmlns:a16="http://schemas.microsoft.com/office/drawing/2014/main" id="{724C7EE6-12FE-4CA0-AE31-A9E76D5CFFB4}"/>
+              </a:ext>
+            </a:extLst>
+          </p:cNvPr>
+          <p:cNvSpPr>
+            <a:spLocks xmlns:a="http://schemas.openxmlformats.org/drawingml/2006/main" noGrp="1"/>
+          </p:cNvSpPr>
+          <p:nvPr/>
+        </p:nvSpPr>
+        <p:spPr>
+          <a:xfrm xmlns:a="http://schemas.openxmlformats.org/drawingml/2006/main">
+            <a:off x="2057400" y="4086225"/>
+            <a:ext cx="95250" cy="28575"/>
+          </a:xfrm>
+          <a:prstGeom xmlns:a="http://schemas.openxmlformats.org/drawingml/2006/main" prst="rect">
+            <a:avLst/>
+          </a:prstGeom>
+          <a:solidFill xmlns:a="http://schemas.openxmlformats.org/drawingml/2006/main">
+            <a:srgbClr val="7C9920"/>
+          </a:solidFill>
+          <a:ln xmlns:a="http://schemas.openxmlformats.org/drawingml/2006/main" w="0">
+            <a:noFill/>
+            <a:prstDash val="solid"/>
+          </a:ln>
+        </p:spPr>
+      </p:sp>
+      <p:sp>
+        <p:nvSpPr>
+          <p:cNvPr id="46" name="agent-stage-arrow-1-head">
+            <a:extLst xmlns:a="http://schemas.openxmlformats.org/drawingml/2006/main">
+              <a:ext uri="{FF2B5EF4-FFF2-40B4-BE49-F238E27FC236}">
+                <a16:creationId xmlns:a16="http://schemas.microsoft.com/office/drawing/2014/main" id="{FE2F7F95-3D30-41B5-982F-E97FE3A9B33E}"/>
+              </a:ext>
+            </a:extLst>
+          </p:cNvPr>
+          <p:cNvSpPr>
+            <a:spLocks xmlns:a="http://schemas.openxmlformats.org/drawingml/2006/main" noGrp="1"/>
+          </p:cNvSpPr>
+          <p:nvPr/>
+        </p:nvSpPr>
+        <p:spPr>
+          <a:xfrm xmlns:a="http://schemas.openxmlformats.org/drawingml/2006/main">
+            <a:off x="2114550" y="4010025"/>
+            <a:ext cx="209550" cy="180975"/>
+          </a:xfrm>
+          <a:prstGeom xmlns:a="http://schemas.openxmlformats.org/drawingml/2006/main" prst="rightArrow">
+            <a:avLst/>
+          </a:prstGeom>
+          <a:solidFill xmlns:a="http://schemas.openxmlformats.org/drawingml/2006/main">
+            <a:srgbClr val="7C9920"/>
+          </a:solidFill>
+          <a:ln xmlns:a="http://schemas.openxmlformats.org/drawingml/2006/main" w="0">
+            <a:noFill/>
+            <a:prstDash val="solid"/>
+          </a:ln>
+        </p:spPr>
+      </p:sp>
+      <p:sp>
+        <p:nvSpPr>
+          <p:cNvPr id="47" name="agent-stage-number-2">
+            <a:extLst xmlns:a="http://schemas.openxmlformats.org/drawingml/2006/main">
+              <a:ext uri="{FF2B5EF4-FFF2-40B4-BE49-F238E27FC236}">
+                <a16:creationId xmlns:a16="http://schemas.microsoft.com/office/drawing/2014/main" id="{2B4B104C-4521-4381-A063-9CD5CA53F4BA}"/>
+              </a:ext>
+            </a:extLst>
+          </p:cNvPr>
+          <p:cNvSpPr>
+            <a:spLocks xmlns:a="http://schemas.openxmlformats.org/drawingml/2006/main" noGrp="1"/>
+          </p:cNvSpPr>
+          <p:nvPr/>
+        </p:nvSpPr>
+        <p:spPr>
+          <a:xfrm xmlns:a="http://schemas.openxmlformats.org/drawingml/2006/main">
+            <a:off x="2362200" y="4000500"/>
+            <a:ext cx="304800" cy="190500"/>
           </a:xfrm>
           <a:prstGeom xmlns:a="http://schemas.openxmlformats.org/drawingml/2006/main" prst="rect">
             <a:avLst/>
@@ -5600,12 +5728,12 @@
           </a:bodyPr>
           <a:lstStyle xmlns:a="http://schemas.openxmlformats.org/drawingml/2006/main"/>
           <a:p xmlns:a="http://schemas.openxmlformats.org/drawingml/2006/main">
-            <a:pPr algn="r">
+            <a:pPr algn="l">
               <a:lnSpc>
                 <a:spcPct val="100000"/>
               </a:lnSpc>
               <a:buNone/>
-              <a:defRPr sz="1275" b="0">
+              <a:defRPr sz="975" b="1">
                 <a:solidFill>
                   <a:srgbClr val="C7F52F"/>
                 </a:solidFill>
@@ -5615,7 +5743,7 @@
               </a:defRPr>
             </a:pPr>
             <a:r>
-              <a:rPr sz="1275" b="0">
+              <a:rPr sz="975" b="1">
                 <a:solidFill>
                   <a:srgbClr val="C7F52F"/>
                 </a:solidFill>
@@ -5623,91 +5751,29 @@
                 <a:ea typeface="Courier New"/>
                 <a:cs typeface="Courier New"/>
               </a:rPr>
-              <a:t>$1,437</a:t>
+              <a:t>03</a:t>
             </a:r>
           </a:p>
         </p:txBody>
       </p:sp>
       <p:sp>
         <p:nvSpPr>
-          <p:cNvPr id="45" name="buyer-bar-0">
-            <a:extLst xmlns:a="http://schemas.openxmlformats.org/drawingml/2006/main">
-              <a:ext uri="{FF2B5EF4-FFF2-40B4-BE49-F238E27FC236}">
-                <a16:creationId xmlns:a16="http://schemas.microsoft.com/office/drawing/2014/main" id="{72E481BE-313D-47C1-8B7A-71B89C84B3B9}"/>
-              </a:ext>
-            </a:extLst>
-          </p:cNvPr>
-          <p:cNvSpPr>
-            <a:spLocks xmlns:a="http://schemas.openxmlformats.org/drawingml/2006/main" noGrp="1"/>
-          </p:cNvSpPr>
-          <p:nvPr/>
-        </p:nvSpPr>
-        <p:spPr>
-          <a:xfrm xmlns:a="http://schemas.openxmlformats.org/drawingml/2006/main">
-            <a:off x="5314950" y="2705100"/>
-            <a:ext cx="1943100" cy="133350"/>
-          </a:xfrm>
-          <a:prstGeom xmlns:a="http://schemas.openxmlformats.org/drawingml/2006/main" prst="rect">
-            <a:avLst/>
-          </a:prstGeom>
-          <a:solidFill xmlns:a="http://schemas.openxmlformats.org/drawingml/2006/main">
-            <a:srgbClr val="C7F52F"/>
-          </a:solidFill>
-          <a:ln xmlns:a="http://schemas.openxmlformats.org/drawingml/2006/main" w="0">
-            <a:noFill/>
-            <a:prstDash val="solid"/>
-          </a:ln>
-        </p:spPr>
-      </p:sp>
-      <p:sp>
-        <p:nvSpPr>
-          <p:cNvPr id="46" name="buyer-bar-tail-0">
-            <a:extLst xmlns:a="http://schemas.openxmlformats.org/drawingml/2006/main">
-              <a:ext uri="{FF2B5EF4-FFF2-40B4-BE49-F238E27FC236}">
-                <a16:creationId xmlns:a16="http://schemas.microsoft.com/office/drawing/2014/main" id="{5698FAD8-24DF-41A6-9414-4BCCD16B30D2}"/>
-              </a:ext>
-            </a:extLst>
-          </p:cNvPr>
-          <p:cNvSpPr>
-            <a:spLocks xmlns:a="http://schemas.openxmlformats.org/drawingml/2006/main" noGrp="1"/>
-          </p:cNvSpPr>
-          <p:nvPr/>
-        </p:nvSpPr>
-        <p:spPr>
-          <a:xfrm xmlns:a="http://schemas.openxmlformats.org/drawingml/2006/main">
-            <a:off x="7258050" y="2705100"/>
-            <a:ext cx="1295400" cy="133350"/>
-          </a:xfrm>
-          <a:prstGeom xmlns:a="http://schemas.openxmlformats.org/drawingml/2006/main" prst="rect">
-            <a:avLst/>
-          </a:prstGeom>
-          <a:solidFill xmlns:a="http://schemas.openxmlformats.org/drawingml/2006/main">
-            <a:srgbClr val="252A26"/>
-          </a:solidFill>
-          <a:ln xmlns:a="http://schemas.openxmlformats.org/drawingml/2006/main" w="0">
-            <a:noFill/>
-            <a:prstDash val="solid"/>
-          </a:ln>
-        </p:spPr>
-      </p:sp>
-      <p:sp>
-        <p:nvSpPr>
-          <p:cNvPr id="47" name="buyer-index-1">
-            <a:extLst xmlns:a="http://schemas.openxmlformats.org/drawingml/2006/main">
-              <a:ext uri="{FF2B5EF4-FFF2-40B4-BE49-F238E27FC236}">
-                <a16:creationId xmlns:a16="http://schemas.microsoft.com/office/drawing/2014/main" id="{FD289058-5213-47B2-87BA-CA6AE1AE0A6D}"/>
-              </a:ext>
-            </a:extLst>
-          </p:cNvPr>
-          <p:cNvSpPr>
-            <a:spLocks xmlns:a="http://schemas.openxmlformats.org/drawingml/2006/main" noGrp="1"/>
-          </p:cNvSpPr>
-          <p:nvPr/>
-        </p:nvSpPr>
-        <p:spPr>
-          <a:xfrm xmlns:a="http://schemas.openxmlformats.org/drawingml/2006/main">
-            <a:off x="4857750" y="3276600"/>
-            <a:ext cx="323850" cy="209550"/>
+          <p:cNvPr id="48" name="agent-stage-label-2">
+            <a:extLst xmlns:a="http://schemas.openxmlformats.org/drawingml/2006/main">
+              <a:ext uri="{FF2B5EF4-FFF2-40B4-BE49-F238E27FC236}">
+                <a16:creationId xmlns:a16="http://schemas.microsoft.com/office/drawing/2014/main" id="{1F746994-8BBB-45EE-AC79-766A7E4F7EF7}"/>
+              </a:ext>
+            </a:extLst>
+          </p:cNvPr>
+          <p:cNvSpPr>
+            <a:spLocks xmlns:a="http://schemas.openxmlformats.org/drawingml/2006/main" noGrp="1"/>
+          </p:cNvSpPr>
+          <p:nvPr/>
+        </p:nvSpPr>
+        <p:spPr>
+          <a:xfrm xmlns:a="http://schemas.openxmlformats.org/drawingml/2006/main">
+            <a:off x="2362200" y="4257675"/>
+            <a:ext cx="876300" cy="190500"/>
           </a:xfrm>
           <a:prstGeom xmlns:a="http://schemas.openxmlformats.org/drawingml/2006/main" prst="rect">
             <a:avLst/>
@@ -5729,9 +5795,9 @@
                 <a:spcPct val="100000"/>
               </a:lnSpc>
               <a:buNone/>
-              <a:defRPr sz="1125" b="0">
-                <a:solidFill>
-                  <a:srgbClr val="858B84"/>
+              <a:defRPr sz="975" b="0">
+                <a:solidFill>
+                  <a:srgbClr val="D3D1C8"/>
                 </a:solidFill>
                 <a:latin typeface="Courier New"/>
                 <a:ea typeface="Courier New"/>
@@ -5739,37 +5805,99 @@
               </a:defRPr>
             </a:pPr>
             <a:r>
-              <a:rPr sz="1125" b="0">
-                <a:solidFill>
-                  <a:srgbClr val="858B84"/>
+              <a:rPr sz="975" b="0">
+                <a:solidFill>
+                  <a:srgbClr val="D3D1C8"/>
                 </a:solidFill>
                 <a:latin typeface="Courier New"/>
                 <a:ea typeface="Courier New"/>
                 <a:cs typeface="Courier New"/>
               </a:rPr>
-              <a:t>02</a:t>
+              <a:t>CHECKS</a:t>
             </a:r>
           </a:p>
         </p:txBody>
       </p:sp>
       <p:sp>
         <p:nvSpPr>
-          <p:cNvPr id="48" name="buyer-name-1">
-            <a:extLst xmlns:a="http://schemas.openxmlformats.org/drawingml/2006/main">
-              <a:ext uri="{FF2B5EF4-FFF2-40B4-BE49-F238E27FC236}">
-                <a16:creationId xmlns:a16="http://schemas.microsoft.com/office/drawing/2014/main" id="{18EEEEA2-2270-4EDF-9857-F22A318D5868}"/>
-              </a:ext>
-            </a:extLst>
-          </p:cNvPr>
-          <p:cNvSpPr>
-            <a:spLocks xmlns:a="http://schemas.openxmlformats.org/drawingml/2006/main" noGrp="1"/>
-          </p:cNvSpPr>
-          <p:nvPr/>
-        </p:nvSpPr>
-        <p:spPr>
-          <a:xfrm xmlns:a="http://schemas.openxmlformats.org/drawingml/2006/main">
-            <a:off x="5314950" y="3276600"/>
-            <a:ext cx="1809750" cy="209550"/>
+          <p:cNvPr id="49" name="agent-stage-arrow-2-shaft">
+            <a:extLst xmlns:a="http://schemas.openxmlformats.org/drawingml/2006/main">
+              <a:ext uri="{FF2B5EF4-FFF2-40B4-BE49-F238E27FC236}">
+                <a16:creationId xmlns:a16="http://schemas.microsoft.com/office/drawing/2014/main" id="{9E1C1826-5C97-4D5D-AF3C-3C8F98EC3A8A}"/>
+              </a:ext>
+            </a:extLst>
+          </p:cNvPr>
+          <p:cNvSpPr>
+            <a:spLocks xmlns:a="http://schemas.openxmlformats.org/drawingml/2006/main" noGrp="1"/>
+          </p:cNvSpPr>
+          <p:nvPr/>
+        </p:nvSpPr>
+        <p:spPr>
+          <a:xfrm xmlns:a="http://schemas.openxmlformats.org/drawingml/2006/main">
+            <a:off x="3028950" y="4086225"/>
+            <a:ext cx="95250" cy="28575"/>
+          </a:xfrm>
+          <a:prstGeom xmlns:a="http://schemas.openxmlformats.org/drawingml/2006/main" prst="rect">
+            <a:avLst/>
+          </a:prstGeom>
+          <a:solidFill xmlns:a="http://schemas.openxmlformats.org/drawingml/2006/main">
+            <a:srgbClr val="7C9920"/>
+          </a:solidFill>
+          <a:ln xmlns:a="http://schemas.openxmlformats.org/drawingml/2006/main" w="0">
+            <a:noFill/>
+            <a:prstDash val="solid"/>
+          </a:ln>
+        </p:spPr>
+      </p:sp>
+      <p:sp>
+        <p:nvSpPr>
+          <p:cNvPr id="50" name="agent-stage-arrow-2-head">
+            <a:extLst xmlns:a="http://schemas.openxmlformats.org/drawingml/2006/main">
+              <a:ext uri="{FF2B5EF4-FFF2-40B4-BE49-F238E27FC236}">
+                <a16:creationId xmlns:a16="http://schemas.microsoft.com/office/drawing/2014/main" id="{C2ADF2FE-A7F7-4D43-A4D5-91EA982CC6E0}"/>
+              </a:ext>
+            </a:extLst>
+          </p:cNvPr>
+          <p:cNvSpPr>
+            <a:spLocks xmlns:a="http://schemas.openxmlformats.org/drawingml/2006/main" noGrp="1"/>
+          </p:cNvSpPr>
+          <p:nvPr/>
+        </p:nvSpPr>
+        <p:spPr>
+          <a:xfrm xmlns:a="http://schemas.openxmlformats.org/drawingml/2006/main">
+            <a:off x="3086100" y="4010025"/>
+            <a:ext cx="209550" cy="180975"/>
+          </a:xfrm>
+          <a:prstGeom xmlns:a="http://schemas.openxmlformats.org/drawingml/2006/main" prst="rightArrow">
+            <a:avLst/>
+          </a:prstGeom>
+          <a:solidFill xmlns:a="http://schemas.openxmlformats.org/drawingml/2006/main">
+            <a:srgbClr val="7C9920"/>
+          </a:solidFill>
+          <a:ln xmlns:a="http://schemas.openxmlformats.org/drawingml/2006/main" w="0">
+            <a:noFill/>
+            <a:prstDash val="solid"/>
+          </a:ln>
+        </p:spPr>
+      </p:sp>
+      <p:sp>
+        <p:nvSpPr>
+          <p:cNvPr id="51" name="agent-stage-number-3">
+            <a:extLst xmlns:a="http://schemas.openxmlformats.org/drawingml/2006/main">
+              <a:ext uri="{FF2B5EF4-FFF2-40B4-BE49-F238E27FC236}">
+                <a16:creationId xmlns:a16="http://schemas.microsoft.com/office/drawing/2014/main" id="{13685AB7-EC7B-4AC4-AFE2-F86A2458056B}"/>
+              </a:ext>
+            </a:extLst>
+          </p:cNvPr>
+          <p:cNvSpPr>
+            <a:spLocks xmlns:a="http://schemas.openxmlformats.org/drawingml/2006/main" noGrp="1"/>
+          </p:cNvSpPr>
+          <p:nvPr/>
+        </p:nvSpPr>
+        <p:spPr>
+          <a:xfrm xmlns:a="http://schemas.openxmlformats.org/drawingml/2006/main">
+            <a:off x="3333750" y="4000500"/>
+            <a:ext cx="304800" cy="190500"/>
           </a:xfrm>
           <a:prstGeom xmlns:a="http://schemas.openxmlformats.org/drawingml/2006/main" prst="rect">
             <a:avLst/>
@@ -5791,9 +5919,9 @@
                 <a:spcPct val="100000"/>
               </a:lnSpc>
               <a:buNone/>
-              <a:defRPr sz="1275" b="0">
-                <a:solidFill>
-                  <a:srgbClr val="D3D1C8"/>
+              <a:defRPr sz="975" b="1">
+                <a:solidFill>
+                  <a:srgbClr val="C7F52F"/>
                 </a:solidFill>
                 <a:latin typeface="Courier New"/>
                 <a:ea typeface="Courier New"/>
@@ -5801,37 +5929,37 @@
               </a:defRPr>
             </a:pPr>
             <a:r>
-              <a:rPr sz="1275" b="0">
-                <a:solidFill>
-                  <a:srgbClr val="D3D1C8"/>
+              <a:rPr sz="975" b="1">
+                <a:solidFill>
+                  <a:srgbClr val="C7F52F"/>
                 </a:solidFill>
                 <a:latin typeface="Courier New"/>
                 <a:ea typeface="Courier New"/>
                 <a:cs typeface="Courier New"/>
               </a:rPr>
-              <a:t>PATCHWORK AI</a:t>
+              <a:t>04</a:t>
             </a:r>
           </a:p>
         </p:txBody>
       </p:sp>
       <p:sp>
         <p:nvSpPr>
-          <p:cNvPr id="49" name="buyer-qty-1">
-            <a:extLst xmlns:a="http://schemas.openxmlformats.org/drawingml/2006/main">
-              <a:ext uri="{FF2B5EF4-FFF2-40B4-BE49-F238E27FC236}">
-                <a16:creationId xmlns:a16="http://schemas.microsoft.com/office/drawing/2014/main" id="{F4A95715-2ED7-4764-A7B3-C8476845E5B9}"/>
-              </a:ext>
-            </a:extLst>
-          </p:cNvPr>
-          <p:cNvSpPr>
-            <a:spLocks xmlns:a="http://schemas.openxmlformats.org/drawingml/2006/main" noGrp="1"/>
-          </p:cNvSpPr>
-          <p:nvPr/>
-        </p:nvSpPr>
-        <p:spPr>
-          <a:xfrm xmlns:a="http://schemas.openxmlformats.org/drawingml/2006/main">
-            <a:off x="9715500" y="3276600"/>
-            <a:ext cx="1047750" cy="209550"/>
+          <p:cNvPr id="52" name="agent-stage-label-3">
+            <a:extLst xmlns:a="http://schemas.openxmlformats.org/drawingml/2006/main">
+              <a:ext uri="{FF2B5EF4-FFF2-40B4-BE49-F238E27FC236}">
+                <a16:creationId xmlns:a16="http://schemas.microsoft.com/office/drawing/2014/main" id="{B28FF42F-4901-421B-AEC8-D97C65D475F7}"/>
+              </a:ext>
+            </a:extLst>
+          </p:cNvPr>
+          <p:cNvSpPr>
+            <a:spLocks xmlns:a="http://schemas.openxmlformats.org/drawingml/2006/main" noGrp="1"/>
+          </p:cNvSpPr>
+          <p:nvPr/>
+        </p:nvSpPr>
+        <p:spPr>
+          <a:xfrm xmlns:a="http://schemas.openxmlformats.org/drawingml/2006/main">
+            <a:off x="3333750" y="4257675"/>
+            <a:ext cx="876300" cy="190500"/>
           </a:xfrm>
           <a:prstGeom xmlns:a="http://schemas.openxmlformats.org/drawingml/2006/main" prst="rect">
             <a:avLst/>
@@ -5848,200 +5976,14 @@
           </a:bodyPr>
           <a:lstStyle xmlns:a="http://schemas.openxmlformats.org/drawingml/2006/main"/>
           <a:p xmlns:a="http://schemas.openxmlformats.org/drawingml/2006/main">
-            <a:pPr algn="r">
-              <a:lnSpc>
-                <a:spcPct val="100000"/>
-              </a:lnSpc>
-              <a:buNone/>
-              <a:defRPr sz="1275" b="0">
-                <a:solidFill>
-                  <a:srgbClr val="F1EFE5"/>
-                </a:solidFill>
-                <a:latin typeface="Courier New"/>
-                <a:ea typeface="Courier New"/>
-                <a:cs typeface="Courier New"/>
-              </a:defRPr>
-            </a:pPr>
-            <a:r>
-              <a:rPr sz="1275" b="0">
-                <a:solidFill>
-                  <a:srgbClr val="F1EFE5"/>
-                </a:solidFill>
-                <a:latin typeface="Courier New"/>
-                <a:ea typeface="Courier New"/>
-                <a:cs typeface="Courier New"/>
-              </a:rPr>
-              <a:t>4 UNITS</a:t>
-            </a:r>
-          </a:p>
-        </p:txBody>
-      </p:sp>
-      <p:sp>
-        <p:nvSpPr>
-          <p:cNvPr id="50" name="buyer-amount-1">
-            <a:extLst xmlns:a="http://schemas.openxmlformats.org/drawingml/2006/main">
-              <a:ext uri="{FF2B5EF4-FFF2-40B4-BE49-F238E27FC236}">
-                <a16:creationId xmlns:a16="http://schemas.microsoft.com/office/drawing/2014/main" id="{34B54360-1979-40FF-98DF-E703C7D272F0}"/>
-              </a:ext>
-            </a:extLst>
-          </p:cNvPr>
-          <p:cNvSpPr>
-            <a:spLocks xmlns:a="http://schemas.openxmlformats.org/drawingml/2006/main" noGrp="1"/>
-          </p:cNvSpPr>
-          <p:nvPr/>
-        </p:nvSpPr>
-        <p:spPr>
-          <a:xfrm xmlns:a="http://schemas.openxmlformats.org/drawingml/2006/main">
-            <a:off x="10839450" y="3276600"/>
-            <a:ext cx="971550" cy="209550"/>
-          </a:xfrm>
-          <a:prstGeom xmlns:a="http://schemas.openxmlformats.org/drawingml/2006/main" prst="rect">
-            <a:avLst/>
-          </a:prstGeom>
-          <a:noFill xmlns:a="http://schemas.openxmlformats.org/drawingml/2006/main"/>
-          <a:ln xmlns:a="http://schemas.openxmlformats.org/drawingml/2006/main" w="0">
-            <a:noFill/>
-            <a:prstDash val="solid"/>
-          </a:ln>
-        </p:spPr>
-        <p:txBody>
-          <a:bodyPr xmlns:a="http://schemas.openxmlformats.org/drawingml/2006/main" wrap="square" lIns="0" tIns="0" rIns="0" bIns="0" anchor="t">
-            <a:noAutofit/>
-          </a:bodyPr>
-          <a:lstStyle xmlns:a="http://schemas.openxmlformats.org/drawingml/2006/main"/>
-          <a:p xmlns:a="http://schemas.openxmlformats.org/drawingml/2006/main">
-            <a:pPr algn="r">
-              <a:lnSpc>
-                <a:spcPct val="100000"/>
-              </a:lnSpc>
-              <a:buNone/>
-              <a:defRPr sz="1275" b="0">
-                <a:solidFill>
-                  <a:srgbClr val="C7F52F"/>
-                </a:solidFill>
-                <a:latin typeface="Courier New"/>
-                <a:ea typeface="Courier New"/>
-                <a:cs typeface="Courier New"/>
-              </a:defRPr>
-            </a:pPr>
-            <a:r>
-              <a:rPr sz="1275" b="0">
-                <a:solidFill>
-                  <a:srgbClr val="C7F52F"/>
-                </a:solidFill>
-                <a:latin typeface="Courier New"/>
-                <a:ea typeface="Courier New"/>
-                <a:cs typeface="Courier New"/>
-              </a:rPr>
-              <a:t>$1,916</a:t>
-            </a:r>
-          </a:p>
-        </p:txBody>
-      </p:sp>
-      <p:sp>
-        <p:nvSpPr>
-          <p:cNvPr id="51" name="buyer-bar-1">
-            <a:extLst xmlns:a="http://schemas.openxmlformats.org/drawingml/2006/main">
-              <a:ext uri="{FF2B5EF4-FFF2-40B4-BE49-F238E27FC236}">
-                <a16:creationId xmlns:a16="http://schemas.microsoft.com/office/drawing/2014/main" id="{4D85DCEA-D2E3-4526-A73E-B0D9EBE2C974}"/>
-              </a:ext>
-            </a:extLst>
-          </p:cNvPr>
-          <p:cNvSpPr>
-            <a:spLocks xmlns:a="http://schemas.openxmlformats.org/drawingml/2006/main" noGrp="1"/>
-          </p:cNvSpPr>
-          <p:nvPr/>
-        </p:nvSpPr>
-        <p:spPr>
-          <a:xfrm xmlns:a="http://schemas.openxmlformats.org/drawingml/2006/main">
-            <a:off x="5314950" y="3600450"/>
-            <a:ext cx="2590800" cy="133350"/>
-          </a:xfrm>
-          <a:prstGeom xmlns:a="http://schemas.openxmlformats.org/drawingml/2006/main" prst="rect">
-            <a:avLst/>
-          </a:prstGeom>
-          <a:solidFill xmlns:a="http://schemas.openxmlformats.org/drawingml/2006/main">
-            <a:srgbClr val="C7F52F"/>
-          </a:solidFill>
-          <a:ln xmlns:a="http://schemas.openxmlformats.org/drawingml/2006/main" w="0">
-            <a:noFill/>
-            <a:prstDash val="solid"/>
-          </a:ln>
-        </p:spPr>
-      </p:sp>
-      <p:sp>
-        <p:nvSpPr>
-          <p:cNvPr id="52" name="buyer-bar-tail-1">
-            <a:extLst xmlns:a="http://schemas.openxmlformats.org/drawingml/2006/main">
-              <a:ext uri="{FF2B5EF4-FFF2-40B4-BE49-F238E27FC236}">
-                <a16:creationId xmlns:a16="http://schemas.microsoft.com/office/drawing/2014/main" id="{386B6D67-CB99-4382-AA0D-39E3E41252EA}"/>
-              </a:ext>
-            </a:extLst>
-          </p:cNvPr>
-          <p:cNvSpPr>
-            <a:spLocks xmlns:a="http://schemas.openxmlformats.org/drawingml/2006/main" noGrp="1"/>
-          </p:cNvSpPr>
-          <p:nvPr/>
-        </p:nvSpPr>
-        <p:spPr>
-          <a:xfrm xmlns:a="http://schemas.openxmlformats.org/drawingml/2006/main">
-            <a:off x="7905750" y="3600450"/>
-            <a:ext cx="647700" cy="133350"/>
-          </a:xfrm>
-          <a:prstGeom xmlns:a="http://schemas.openxmlformats.org/drawingml/2006/main" prst="rect">
-            <a:avLst/>
-          </a:prstGeom>
-          <a:solidFill xmlns:a="http://schemas.openxmlformats.org/drawingml/2006/main">
-            <a:srgbClr val="252A26"/>
-          </a:solidFill>
-          <a:ln xmlns:a="http://schemas.openxmlformats.org/drawingml/2006/main" w="0">
-            <a:noFill/>
-            <a:prstDash val="solid"/>
-          </a:ln>
-        </p:spPr>
-      </p:sp>
-      <p:sp>
-        <p:nvSpPr>
-          <p:cNvPr id="53" name="buyer-index-2">
-            <a:extLst xmlns:a="http://schemas.openxmlformats.org/drawingml/2006/main">
-              <a:ext uri="{FF2B5EF4-FFF2-40B4-BE49-F238E27FC236}">
-                <a16:creationId xmlns:a16="http://schemas.microsoft.com/office/drawing/2014/main" id="{5A47DBAF-4835-483A-A91E-8A9D1BB0520C}"/>
-              </a:ext>
-            </a:extLst>
-          </p:cNvPr>
-          <p:cNvSpPr>
-            <a:spLocks xmlns:a="http://schemas.openxmlformats.org/drawingml/2006/main" noGrp="1"/>
-          </p:cNvSpPr>
-          <p:nvPr/>
-        </p:nvSpPr>
-        <p:spPr>
-          <a:xfrm xmlns:a="http://schemas.openxmlformats.org/drawingml/2006/main">
-            <a:off x="4857750" y="4171950"/>
-            <a:ext cx="323850" cy="209550"/>
-          </a:xfrm>
-          <a:prstGeom xmlns:a="http://schemas.openxmlformats.org/drawingml/2006/main" prst="rect">
-            <a:avLst/>
-          </a:prstGeom>
-          <a:noFill xmlns:a="http://schemas.openxmlformats.org/drawingml/2006/main"/>
-          <a:ln xmlns:a="http://schemas.openxmlformats.org/drawingml/2006/main" w="0">
-            <a:noFill/>
-            <a:prstDash val="solid"/>
-          </a:ln>
-        </p:spPr>
-        <p:txBody>
-          <a:bodyPr xmlns:a="http://schemas.openxmlformats.org/drawingml/2006/main" wrap="square" lIns="0" tIns="0" rIns="0" bIns="0" anchor="t">
-            <a:noAutofit/>
-          </a:bodyPr>
-          <a:lstStyle xmlns:a="http://schemas.openxmlformats.org/drawingml/2006/main"/>
-          <a:p xmlns:a="http://schemas.openxmlformats.org/drawingml/2006/main">
             <a:pPr algn="l">
               <a:lnSpc>
                 <a:spcPct val="100000"/>
               </a:lnSpc>
               <a:buNone/>
-              <a:defRPr sz="1125" b="0">
-                <a:solidFill>
-                  <a:srgbClr val="858B84"/>
+              <a:defRPr sz="975" b="0">
+                <a:solidFill>
+                  <a:srgbClr val="D3D1C8"/>
                 </a:solidFill>
                 <a:latin typeface="Courier New"/>
                 <a:ea typeface="Courier New"/>
@@ -6049,291 +5991,45 @@
               </a:defRPr>
             </a:pPr>
             <a:r>
-              <a:rPr sz="1125" b="0">
-                <a:solidFill>
-                  <a:srgbClr val="858B84"/>
+              <a:rPr sz="975" b="0">
+                <a:solidFill>
+                  <a:srgbClr val="D3D1C8"/>
                 </a:solidFill>
                 <a:latin typeface="Courier New"/>
                 <a:ea typeface="Courier New"/>
                 <a:cs typeface="Courier New"/>
               </a:rPr>
-              <a:t>03</a:t>
+              <a:t>REVIEW</a:t>
             </a:r>
           </a:p>
         </p:txBody>
       </p:sp>
       <p:sp>
         <p:nvSpPr>
-          <p:cNvPr id="54" name="buyer-name-2">
-            <a:extLst xmlns:a="http://schemas.openxmlformats.org/drawingml/2006/main">
-              <a:ext uri="{FF2B5EF4-FFF2-40B4-BE49-F238E27FC236}">
-                <a16:creationId xmlns:a16="http://schemas.microsoft.com/office/drawing/2014/main" id="{FE666838-57AF-45D4-919F-076C27064BB5}"/>
-              </a:ext>
-            </a:extLst>
-          </p:cNvPr>
-          <p:cNvSpPr>
-            <a:spLocks xmlns:a="http://schemas.openxmlformats.org/drawingml/2006/main" noGrp="1"/>
-          </p:cNvSpPr>
-          <p:nvPr/>
-        </p:nvSpPr>
-        <p:spPr>
-          <a:xfrm xmlns:a="http://schemas.openxmlformats.org/drawingml/2006/main">
-            <a:off x="5314950" y="4171950"/>
-            <a:ext cx="1809750" cy="209550"/>
+          <p:cNvPr id="53" name="receipt-frame">
+            <a:extLst xmlns:a="http://schemas.openxmlformats.org/drawingml/2006/main">
+              <a:ext uri="{FF2B5EF4-FFF2-40B4-BE49-F238E27FC236}">
+                <a16:creationId xmlns:a16="http://schemas.microsoft.com/office/drawing/2014/main" id="{D5C88238-40AF-4186-8F95-85BE56060338}"/>
+              </a:ext>
+            </a:extLst>
+          </p:cNvPr>
+          <p:cNvSpPr>
+            <a:spLocks xmlns:a="http://schemas.openxmlformats.org/drawingml/2006/main" noGrp="1"/>
+          </p:cNvSpPr>
+          <p:nvPr/>
+        </p:nvSpPr>
+        <p:spPr>
+          <a:xfrm xmlns:a="http://schemas.openxmlformats.org/drawingml/2006/main">
+            <a:off x="4762500" y="2266950"/>
+            <a:ext cx="7048500" cy="3105150"/>
           </a:xfrm>
           <a:prstGeom xmlns:a="http://schemas.openxmlformats.org/drawingml/2006/main" prst="rect">
             <a:avLst/>
           </a:prstGeom>
-          <a:noFill xmlns:a="http://schemas.openxmlformats.org/drawingml/2006/main"/>
-          <a:ln xmlns:a="http://schemas.openxmlformats.org/drawingml/2006/main" w="0">
-            <a:noFill/>
-            <a:prstDash val="solid"/>
-          </a:ln>
-        </p:spPr>
-        <p:txBody>
-          <a:bodyPr xmlns:a="http://schemas.openxmlformats.org/drawingml/2006/main" wrap="square" lIns="0" tIns="0" rIns="0" bIns="0" anchor="t">
-            <a:noAutofit/>
-          </a:bodyPr>
-          <a:lstStyle xmlns:a="http://schemas.openxmlformats.org/drawingml/2006/main"/>
-          <a:p xmlns:a="http://schemas.openxmlformats.org/drawingml/2006/main">
-            <a:pPr algn="l">
-              <a:lnSpc>
-                <a:spcPct val="100000"/>
-              </a:lnSpc>
-              <a:buNone/>
-              <a:defRPr sz="1275" b="0">
-                <a:solidFill>
-                  <a:srgbClr val="D3D1C8"/>
-                </a:solidFill>
-                <a:latin typeface="Courier New"/>
-                <a:ea typeface="Courier New"/>
-                <a:cs typeface="Courier New"/>
-              </a:defRPr>
-            </a:pPr>
-            <a:r>
-              <a:rPr sz="1275" b="0">
-                <a:solidFill>
-                  <a:srgbClr val="D3D1C8"/>
-                </a:solidFill>
-                <a:latin typeface="Courier New"/>
-                <a:ea typeface="Courier New"/>
-                <a:cs typeface="Courier New"/>
-              </a:rPr>
-              <a:t>KERNEL WORKS</a:t>
-            </a:r>
-          </a:p>
-        </p:txBody>
-      </p:sp>
-      <p:sp>
-        <p:nvSpPr>
-          <p:cNvPr id="55" name="buyer-qty-2">
-            <a:extLst xmlns:a="http://schemas.openxmlformats.org/drawingml/2006/main">
-              <a:ext uri="{FF2B5EF4-FFF2-40B4-BE49-F238E27FC236}">
-                <a16:creationId xmlns:a16="http://schemas.microsoft.com/office/drawing/2014/main" id="{69F33A24-430C-42A8-8FB2-ED82B63D4DC5}"/>
-              </a:ext>
-            </a:extLst>
-          </p:cNvPr>
-          <p:cNvSpPr>
-            <a:spLocks xmlns:a="http://schemas.openxmlformats.org/drawingml/2006/main" noGrp="1"/>
-          </p:cNvSpPr>
-          <p:nvPr/>
-        </p:nvSpPr>
-        <p:spPr>
-          <a:xfrm xmlns:a="http://schemas.openxmlformats.org/drawingml/2006/main">
-            <a:off x="9715500" y="4171950"/>
-            <a:ext cx="1047750" cy="209550"/>
-          </a:xfrm>
-          <a:prstGeom xmlns:a="http://schemas.openxmlformats.org/drawingml/2006/main" prst="rect">
-            <a:avLst/>
-          </a:prstGeom>
-          <a:noFill xmlns:a="http://schemas.openxmlformats.org/drawingml/2006/main"/>
-          <a:ln xmlns:a="http://schemas.openxmlformats.org/drawingml/2006/main" w="0">
-            <a:noFill/>
-            <a:prstDash val="solid"/>
-          </a:ln>
-        </p:spPr>
-        <p:txBody>
-          <a:bodyPr xmlns:a="http://schemas.openxmlformats.org/drawingml/2006/main" wrap="square" lIns="0" tIns="0" rIns="0" bIns="0" anchor="t">
-            <a:noAutofit/>
-          </a:bodyPr>
-          <a:lstStyle xmlns:a="http://schemas.openxmlformats.org/drawingml/2006/main"/>
-          <a:p xmlns:a="http://schemas.openxmlformats.org/drawingml/2006/main">
-            <a:pPr algn="r">
-              <a:lnSpc>
-                <a:spcPct val="100000"/>
-              </a:lnSpc>
-              <a:buNone/>
-              <a:defRPr sz="1275" b="0">
-                <a:solidFill>
-                  <a:srgbClr val="F1EFE5"/>
-                </a:solidFill>
-                <a:latin typeface="Courier New"/>
-                <a:ea typeface="Courier New"/>
-                <a:cs typeface="Courier New"/>
-              </a:defRPr>
-            </a:pPr>
-            <a:r>
-              <a:rPr sz="1275" b="0">
-                <a:solidFill>
-                  <a:srgbClr val="F1EFE5"/>
-                </a:solidFill>
-                <a:latin typeface="Courier New"/>
-                <a:ea typeface="Courier New"/>
-                <a:cs typeface="Courier New"/>
-              </a:rPr>
-              <a:t>5 UNITS</a:t>
-            </a:r>
-          </a:p>
-        </p:txBody>
-      </p:sp>
-      <p:sp>
-        <p:nvSpPr>
-          <p:cNvPr id="56" name="buyer-amount-2">
-            <a:extLst xmlns:a="http://schemas.openxmlformats.org/drawingml/2006/main">
-              <a:ext uri="{FF2B5EF4-FFF2-40B4-BE49-F238E27FC236}">
-                <a16:creationId xmlns:a16="http://schemas.microsoft.com/office/drawing/2014/main" id="{CE1414D5-5A90-4D9C-A42D-8E1BDE1ADD84}"/>
-              </a:ext>
-            </a:extLst>
-          </p:cNvPr>
-          <p:cNvSpPr>
-            <a:spLocks xmlns:a="http://schemas.openxmlformats.org/drawingml/2006/main" noGrp="1"/>
-          </p:cNvSpPr>
-          <p:nvPr/>
-        </p:nvSpPr>
-        <p:spPr>
-          <a:xfrm xmlns:a="http://schemas.openxmlformats.org/drawingml/2006/main">
-            <a:off x="10839450" y="4171950"/>
-            <a:ext cx="971550" cy="209550"/>
-          </a:xfrm>
-          <a:prstGeom xmlns:a="http://schemas.openxmlformats.org/drawingml/2006/main" prst="rect">
-            <a:avLst/>
-          </a:prstGeom>
-          <a:noFill xmlns:a="http://schemas.openxmlformats.org/drawingml/2006/main"/>
-          <a:ln xmlns:a="http://schemas.openxmlformats.org/drawingml/2006/main" w="0">
-            <a:noFill/>
-            <a:prstDash val="solid"/>
-          </a:ln>
-        </p:spPr>
-        <p:txBody>
-          <a:bodyPr xmlns:a="http://schemas.openxmlformats.org/drawingml/2006/main" wrap="square" lIns="0" tIns="0" rIns="0" bIns="0" anchor="t">
-            <a:noAutofit/>
-          </a:bodyPr>
-          <a:lstStyle xmlns:a="http://schemas.openxmlformats.org/drawingml/2006/main"/>
-          <a:p xmlns:a="http://schemas.openxmlformats.org/drawingml/2006/main">
-            <a:pPr algn="r">
-              <a:lnSpc>
-                <a:spcPct val="100000"/>
-              </a:lnSpc>
-              <a:buNone/>
-              <a:defRPr sz="1275" b="0">
-                <a:solidFill>
-                  <a:srgbClr val="C7F52F"/>
-                </a:solidFill>
-                <a:latin typeface="Courier New"/>
-                <a:ea typeface="Courier New"/>
-                <a:cs typeface="Courier New"/>
-              </a:defRPr>
-            </a:pPr>
-            <a:r>
-              <a:rPr sz="1275" b="0">
-                <a:solidFill>
-                  <a:srgbClr val="C7F52F"/>
-                </a:solidFill>
-                <a:latin typeface="Courier New"/>
-                <a:ea typeface="Courier New"/>
-                <a:cs typeface="Courier New"/>
-              </a:rPr>
-              <a:t>$2,395</a:t>
-            </a:r>
-          </a:p>
-        </p:txBody>
-      </p:sp>
-      <p:sp>
-        <p:nvSpPr>
-          <p:cNvPr id="57" name="buyer-bar-2">
-            <a:extLst xmlns:a="http://schemas.openxmlformats.org/drawingml/2006/main">
-              <a:ext uri="{FF2B5EF4-FFF2-40B4-BE49-F238E27FC236}">
-                <a16:creationId xmlns:a16="http://schemas.microsoft.com/office/drawing/2014/main" id="{6899A051-681B-4ED4-9EB2-4EB5D21B367F}"/>
-              </a:ext>
-            </a:extLst>
-          </p:cNvPr>
-          <p:cNvSpPr>
-            <a:spLocks xmlns:a="http://schemas.openxmlformats.org/drawingml/2006/main" noGrp="1"/>
-          </p:cNvSpPr>
-          <p:nvPr/>
-        </p:nvSpPr>
-        <p:spPr>
-          <a:xfrm xmlns:a="http://schemas.openxmlformats.org/drawingml/2006/main">
-            <a:off x="5314950" y="4495800"/>
-            <a:ext cx="3238500" cy="133350"/>
-          </a:xfrm>
-          <a:prstGeom xmlns:a="http://schemas.openxmlformats.org/drawingml/2006/main" prst="rect">
-            <a:avLst/>
-          </a:prstGeom>
           <a:solidFill xmlns:a="http://schemas.openxmlformats.org/drawingml/2006/main">
-            <a:srgbClr val="C7F52F"/>
+            <a:srgbClr val="080A09"/>
           </a:solidFill>
-          <a:ln xmlns:a="http://schemas.openxmlformats.org/drawingml/2006/main" w="0">
-            <a:noFill/>
-            <a:prstDash val="solid"/>
-          </a:ln>
-        </p:spPr>
-      </p:sp>
-      <p:sp>
-        <p:nvSpPr>
-          <p:cNvPr id="58" name="buyer-bar-tail-2">
-            <a:extLst xmlns:a="http://schemas.openxmlformats.org/drawingml/2006/main">
-              <a:ext uri="{FF2B5EF4-FFF2-40B4-BE49-F238E27FC236}">
-                <a16:creationId xmlns:a16="http://schemas.microsoft.com/office/drawing/2014/main" id="{D4037A2D-D4F7-4721-942B-55AEBCE6D0F6}"/>
-              </a:ext>
-            </a:extLst>
-          </p:cNvPr>
-          <p:cNvSpPr>
-            <a:spLocks xmlns:a="http://schemas.openxmlformats.org/drawingml/2006/main" noGrp="1"/>
-          </p:cNvSpPr>
-          <p:nvPr/>
-        </p:nvSpPr>
-        <p:spPr>
-          <a:xfrm xmlns:a="http://schemas.openxmlformats.org/drawingml/2006/main">
-            <a:off x="8553450" y="4495800"/>
-            <a:ext cx="0" cy="133350"/>
-          </a:xfrm>
-          <a:prstGeom xmlns:a="http://schemas.openxmlformats.org/drawingml/2006/main" prst="rect">
-            <a:avLst/>
-          </a:prstGeom>
-          <a:solidFill xmlns:a="http://schemas.openxmlformats.org/drawingml/2006/main">
-            <a:srgbClr val="252A26"/>
-          </a:solidFill>
-          <a:ln xmlns:a="http://schemas.openxmlformats.org/drawingml/2006/main" w="0">
-            <a:noFill/>
-            <a:prstDash val="solid"/>
-          </a:ln>
-        </p:spPr>
-      </p:sp>
-      <p:sp>
-        <p:nvSpPr>
-          <p:cNvPr id="59" name="excluded-rule">
-            <a:extLst xmlns:a="http://schemas.openxmlformats.org/drawingml/2006/main">
-              <a:ext uri="{FF2B5EF4-FFF2-40B4-BE49-F238E27FC236}">
-                <a16:creationId xmlns:a16="http://schemas.microsoft.com/office/drawing/2014/main" id="{A1CEBBBC-DADF-4B72-9EDC-A588F423AA05}"/>
-              </a:ext>
-            </a:extLst>
-          </p:cNvPr>
-          <p:cNvSpPr>
-            <a:spLocks xmlns:a="http://schemas.openxmlformats.org/drawingml/2006/main" noGrp="1"/>
-          </p:cNvSpPr>
-          <p:nvPr/>
-        </p:nvSpPr>
-        <p:spPr>
-          <a:xfrm xmlns:a="http://schemas.openxmlformats.org/drawingml/2006/main">
-            <a:off x="4857750" y="5067300"/>
-            <a:ext cx="6953250" cy="0"/>
-          </a:xfrm>
-          <a:prstGeom xmlns:a="http://schemas.openxmlformats.org/drawingml/2006/main" prst="line">
-            <a:avLst/>
-          </a:prstGeom>
-          <a:noFill xmlns:a="http://schemas.openxmlformats.org/drawingml/2006/main"/>
-          <a:ln xmlns:a="http://schemas.openxmlformats.org/drawingml/2006/main" w="11430">
+          <a:ln xmlns:a="http://schemas.openxmlformats.org/drawingml/2006/main" w="14288">
             <a:solidFill>
               <a:srgbClr val="252A26"/>
             </a:solidFill>
@@ -6343,22 +6039,22 @@
       </p:sp>
       <p:sp>
         <p:nvSpPr>
-          <p:cNvPr id="60" name="excluded-label">
-            <a:extLst xmlns:a="http://schemas.openxmlformats.org/drawingml/2006/main">
-              <a:ext uri="{FF2B5EF4-FFF2-40B4-BE49-F238E27FC236}">
-                <a16:creationId xmlns:a16="http://schemas.microsoft.com/office/drawing/2014/main" id="{16C90CB0-56C5-48F6-BF50-FC610BF0C1B4}"/>
-              </a:ext>
-            </a:extLst>
-          </p:cNvPr>
-          <p:cNvSpPr>
-            <a:spLocks xmlns:a="http://schemas.openxmlformats.org/drawingml/2006/main" noGrp="1"/>
-          </p:cNvSpPr>
-          <p:nvPr/>
-        </p:nvSpPr>
-        <p:spPr>
-          <a:xfrm xmlns:a="http://schemas.openxmlformats.org/drawingml/2006/main">
-            <a:off x="4857750" y="5257800"/>
-            <a:ext cx="1047750" cy="209550"/>
+          <p:cNvPr id="54" name="receipt-label">
+            <a:extLst xmlns:a="http://schemas.openxmlformats.org/drawingml/2006/main">
+              <a:ext uri="{FF2B5EF4-FFF2-40B4-BE49-F238E27FC236}">
+                <a16:creationId xmlns:a16="http://schemas.microsoft.com/office/drawing/2014/main" id="{D03A15F1-663F-4599-BFE5-51D1A49A465A}"/>
+              </a:ext>
+            </a:extLst>
+          </p:cNvPr>
+          <p:cNvSpPr>
+            <a:spLocks xmlns:a="http://schemas.openxmlformats.org/drawingml/2006/main" noGrp="1"/>
+          </p:cNvSpPr>
+          <p:nvPr/>
+        </p:nvSpPr>
+        <p:spPr>
+          <a:xfrm xmlns:a="http://schemas.openxmlformats.org/drawingml/2006/main">
+            <a:off x="5010150" y="2457450"/>
+            <a:ext cx="2381250" cy="228600"/>
           </a:xfrm>
           <a:prstGeom xmlns:a="http://schemas.openxmlformats.org/drawingml/2006/main" prst="rect">
             <a:avLst/>
@@ -6382,7 +6078,7 @@
               <a:buNone/>
               <a:defRPr sz="1200" b="1">
                 <a:solidFill>
-                  <a:srgbClr val="FF2B79"/>
+                  <a:srgbClr val="C7F52F"/>
                 </a:solidFill>
                 <a:latin typeface="Courier New"/>
                 <a:ea typeface="Courier New"/>
@@ -6392,35 +6088,35 @@
             <a:r>
               <a:rPr sz="1200" b="1">
                 <a:solidFill>
-                  <a:srgbClr val="FF2B79"/>
+                  <a:srgbClr val="C7F52F"/>
                 </a:solidFill>
                 <a:latin typeface="Courier New"/>
                 <a:ea typeface="Courier New"/>
                 <a:cs typeface="Courier New"/>
               </a:rPr>
-              <a:t>EXCLUDED</a:t>
+              <a:t>DECISION RECEIPT</a:t>
             </a:r>
           </a:p>
         </p:txBody>
       </p:sp>
       <p:sp>
         <p:nvSpPr>
-          <p:cNvPr id="61" name="excluded-request">
-            <a:extLst xmlns:a="http://schemas.openxmlformats.org/drawingml/2006/main">
-              <a:ext uri="{FF2B5EF4-FFF2-40B4-BE49-F238E27FC236}">
-                <a16:creationId xmlns:a16="http://schemas.microsoft.com/office/drawing/2014/main" id="{8DA29B58-F55F-405C-9312-ECEA28375FCC}"/>
-              </a:ext>
-            </a:extLst>
-          </p:cNvPr>
-          <p:cNvSpPr>
-            <a:spLocks xmlns:a="http://schemas.openxmlformats.org/drawingml/2006/main" noGrp="1"/>
-          </p:cNvSpPr>
-          <p:nvPr/>
-        </p:nvSpPr>
-        <p:spPr>
-          <a:xfrm xmlns:a="http://schemas.openxmlformats.org/drawingml/2006/main">
-            <a:off x="6286500" y="5257800"/>
-            <a:ext cx="2476500" cy="209550"/>
+          <p:cNvPr id="55" name="receipt-status">
+            <a:extLst xmlns:a="http://schemas.openxmlformats.org/drawingml/2006/main">
+              <a:ext uri="{FF2B5EF4-FFF2-40B4-BE49-F238E27FC236}">
+                <a16:creationId xmlns:a16="http://schemas.microsoft.com/office/drawing/2014/main" id="{1E1448F7-FC0B-4167-AA48-A1C9001E5968}"/>
+              </a:ext>
+            </a:extLst>
+          </p:cNvPr>
+          <p:cNvSpPr>
+            <a:spLocks xmlns:a="http://schemas.openxmlformats.org/drawingml/2006/main" noGrp="1"/>
+          </p:cNvSpPr>
+          <p:nvPr/>
+        </p:nvSpPr>
+        <p:spPr>
+          <a:xfrm xmlns:a="http://schemas.openxmlformats.org/drawingml/2006/main">
+            <a:off x="9163050" y="2457450"/>
+            <a:ext cx="2362200" cy="228600"/>
           </a:xfrm>
           <a:prstGeom xmlns:a="http://schemas.openxmlformats.org/drawingml/2006/main" prst="rect">
             <a:avLst/>
@@ -6437,14 +6133,76 @@
           </a:bodyPr>
           <a:lstStyle xmlns:a="http://schemas.openxmlformats.org/drawingml/2006/main"/>
           <a:p xmlns:a="http://schemas.openxmlformats.org/drawingml/2006/main">
+            <a:pPr algn="r">
+              <a:lnSpc>
+                <a:spcPct val="100000"/>
+              </a:lnSpc>
+              <a:buNone/>
+              <a:defRPr sz="1125" b="1">
+                <a:solidFill>
+                  <a:srgbClr val="C7F52F"/>
+                </a:solidFill>
+                <a:latin typeface="Courier New"/>
+                <a:ea typeface="Courier New"/>
+                <a:cs typeface="Courier New"/>
+              </a:defRPr>
+            </a:pPr>
+            <a:r>
+              <a:rPr sz="1125" b="1">
+                <a:solidFill>
+                  <a:srgbClr val="C7F52F"/>
+                </a:solidFill>
+                <a:latin typeface="Courier New"/>
+                <a:ea typeface="Courier New"/>
+                <a:cs typeface="Courier New"/>
+              </a:rPr>
+              <a:t>READY FOR REVIEW</a:t>
+            </a:r>
+          </a:p>
+        </p:txBody>
+      </p:sp>
+      <p:sp>
+        <p:nvSpPr>
+          <p:cNvPr id="56" name="receipt-row-label-0">
+            <a:extLst xmlns:a="http://schemas.openxmlformats.org/drawingml/2006/main">
+              <a:ext uri="{FF2B5EF4-FFF2-40B4-BE49-F238E27FC236}">
+                <a16:creationId xmlns:a16="http://schemas.microsoft.com/office/drawing/2014/main" id="{31C2DB99-6D39-4202-BC80-3D284D844FF9}"/>
+              </a:ext>
+            </a:extLst>
+          </p:cNvPr>
+          <p:cNvSpPr>
+            <a:spLocks xmlns:a="http://schemas.openxmlformats.org/drawingml/2006/main" noGrp="1"/>
+          </p:cNvSpPr>
+          <p:nvPr/>
+        </p:nvSpPr>
+        <p:spPr>
+          <a:xfrm xmlns:a="http://schemas.openxmlformats.org/drawingml/2006/main">
+            <a:off x="5010150" y="2914650"/>
+            <a:ext cx="2190750" cy="190500"/>
+          </a:xfrm>
+          <a:prstGeom xmlns:a="http://schemas.openxmlformats.org/drawingml/2006/main" prst="rect">
+            <a:avLst/>
+          </a:prstGeom>
+          <a:noFill xmlns:a="http://schemas.openxmlformats.org/drawingml/2006/main"/>
+          <a:ln xmlns:a="http://schemas.openxmlformats.org/drawingml/2006/main" w="0">
+            <a:noFill/>
+            <a:prstDash val="solid"/>
+          </a:ln>
+        </p:spPr>
+        <p:txBody>
+          <a:bodyPr xmlns:a="http://schemas.openxmlformats.org/drawingml/2006/main" wrap="square" lIns="0" tIns="0" rIns="0" bIns="0" anchor="t">
+            <a:noAutofit/>
+          </a:bodyPr>
+          <a:lstStyle xmlns:a="http://schemas.openxmlformats.org/drawingml/2006/main"/>
+          <a:p xmlns:a="http://schemas.openxmlformats.org/drawingml/2006/main">
             <a:pPr algn="l">
               <a:lnSpc>
                 <a:spcPct val="100000"/>
               </a:lnSpc>
               <a:buNone/>
-              <a:defRPr sz="1275" b="0">
-                <a:solidFill>
-                  <a:srgbClr val="D3D1C8"/>
+              <a:defRPr sz="975" b="0">
+                <a:solidFill>
+                  <a:srgbClr val="858B84"/>
                 </a:solidFill>
                 <a:latin typeface="Courier New"/>
                 <a:ea typeface="Courier New"/>
@@ -6452,37 +6210,37 @@
               </a:defRPr>
             </a:pPr>
             <a:r>
-              <a:rPr sz="1275" b="0">
-                <a:solidFill>
-                  <a:srgbClr val="D3D1C8"/>
+              <a:rPr sz="975" b="0">
+                <a:solidFill>
+                  <a:srgbClr val="858B84"/>
                 </a:solidFill>
                 <a:latin typeface="Courier New"/>
                 <a:ea typeface="Courier New"/>
                 <a:cs typeface="Courier New"/>
               </a:rPr>
-              <a:t>34" ULTRAWIDE REQUEST</a:t>
+              <a:t>CATALOG MATCH</a:t>
             </a:r>
           </a:p>
         </p:txBody>
       </p:sp>
       <p:sp>
         <p:nvSpPr>
-          <p:cNvPr id="62" name="excluded-reason">
-            <a:extLst xmlns:a="http://schemas.openxmlformats.org/drawingml/2006/main">
-              <a:ext uri="{FF2B5EF4-FFF2-40B4-BE49-F238E27FC236}">
-                <a16:creationId xmlns:a16="http://schemas.microsoft.com/office/drawing/2014/main" id="{9B99BC34-3F7F-4771-859A-2121361B2E81}"/>
-              </a:ext>
-            </a:extLst>
-          </p:cNvPr>
-          <p:cNvSpPr>
-            <a:spLocks xmlns:a="http://schemas.openxmlformats.org/drawingml/2006/main" noGrp="1"/>
-          </p:cNvSpPr>
-          <p:nvPr/>
-        </p:nvSpPr>
-        <p:spPr>
-          <a:xfrm xmlns:a="http://schemas.openxmlformats.org/drawingml/2006/main">
-            <a:off x="9029700" y="5257800"/>
-            <a:ext cx="2781300" cy="209550"/>
+          <p:cNvPr id="57" name="receipt-row-value-0">
+            <a:extLst xmlns:a="http://schemas.openxmlformats.org/drawingml/2006/main">
+              <a:ext uri="{FF2B5EF4-FFF2-40B4-BE49-F238E27FC236}">
+                <a16:creationId xmlns:a16="http://schemas.microsoft.com/office/drawing/2014/main" id="{3253E129-FDFA-4E5C-B57B-55B708604F21}"/>
+              </a:ext>
+            </a:extLst>
+          </p:cNvPr>
+          <p:cNvSpPr>
+            <a:spLocks xmlns:a="http://schemas.openxmlformats.org/drawingml/2006/main" noGrp="1"/>
+          </p:cNvSpPr>
+          <p:nvPr/>
+        </p:nvSpPr>
+        <p:spPr>
+          <a:xfrm xmlns:a="http://schemas.openxmlformats.org/drawingml/2006/main">
+            <a:off x="7315200" y="2876550"/>
+            <a:ext cx="2552700" cy="266700"/>
           </a:xfrm>
           <a:prstGeom xmlns:a="http://schemas.openxmlformats.org/drawingml/2006/main" prst="rect">
             <a:avLst/>
@@ -6499,12 +6257,74 @@
           </a:bodyPr>
           <a:lstStyle xmlns:a="http://schemas.openxmlformats.org/drawingml/2006/main"/>
           <a:p xmlns:a="http://schemas.openxmlformats.org/drawingml/2006/main">
+            <a:pPr algn="l">
+              <a:lnSpc>
+                <a:spcPct val="100000"/>
+              </a:lnSpc>
+              <a:buNone/>
+              <a:defRPr sz="1500" b="1">
+                <a:solidFill>
+                  <a:srgbClr val="F1EFE5"/>
+                </a:solidFill>
+                <a:latin typeface="Courier New"/>
+                <a:ea typeface="Courier New"/>
+                <a:cs typeface="Courier New"/>
+              </a:defRPr>
+            </a:pPr>
+            <a:r>
+              <a:rPr sz="1500" b="1">
+                <a:solidFill>
+                  <a:srgbClr val="F1EFE5"/>
+                </a:solidFill>
+                <a:latin typeface="Courier New"/>
+                <a:ea typeface="Courier New"/>
+                <a:cs typeface="Courier New"/>
+              </a:rPr>
+              <a:t>SONY WH-1000XM6</a:t>
+            </a:r>
+          </a:p>
+        </p:txBody>
+      </p:sp>
+      <p:sp>
+        <p:nvSpPr>
+          <p:cNvPr id="58" name="receipt-row-detail-0">
+            <a:extLst xmlns:a="http://schemas.openxmlformats.org/drawingml/2006/main">
+              <a:ext uri="{FF2B5EF4-FFF2-40B4-BE49-F238E27FC236}">
+                <a16:creationId xmlns:a16="http://schemas.microsoft.com/office/drawing/2014/main" id="{EA23FAE6-29AE-47E8-A302-02624AAE1F0E}"/>
+              </a:ext>
+            </a:extLst>
+          </p:cNvPr>
+          <p:cNvSpPr>
+            <a:spLocks xmlns:a="http://schemas.openxmlformats.org/drawingml/2006/main" noGrp="1"/>
+          </p:cNvSpPr>
+          <p:nvPr/>
+        </p:nvSpPr>
+        <p:spPr>
+          <a:xfrm xmlns:a="http://schemas.openxmlformats.org/drawingml/2006/main">
+            <a:off x="9925050" y="2914650"/>
+            <a:ext cx="1600200" cy="190500"/>
+          </a:xfrm>
+          <a:prstGeom xmlns:a="http://schemas.openxmlformats.org/drawingml/2006/main" prst="rect">
+            <a:avLst/>
+          </a:prstGeom>
+          <a:noFill xmlns:a="http://schemas.openxmlformats.org/drawingml/2006/main"/>
+          <a:ln xmlns:a="http://schemas.openxmlformats.org/drawingml/2006/main" w="0">
+            <a:noFill/>
+            <a:prstDash val="solid"/>
+          </a:ln>
+        </p:spPr>
+        <p:txBody>
+          <a:bodyPr xmlns:a="http://schemas.openxmlformats.org/drawingml/2006/main" wrap="square" lIns="0" tIns="0" rIns="0" bIns="0" anchor="t">
+            <a:noAutofit/>
+          </a:bodyPr>
+          <a:lstStyle xmlns:a="http://schemas.openxmlformats.org/drawingml/2006/main"/>
+          <a:p xmlns:a="http://schemas.openxmlformats.org/drawingml/2006/main">
             <a:pPr algn="r">
               <a:lnSpc>
                 <a:spcPct val="100000"/>
               </a:lnSpc>
               <a:buNone/>
-              <a:defRPr sz="1200" b="0">
+              <a:defRPr sz="900" b="0">
                 <a:solidFill>
                   <a:srgbClr val="858B84"/>
                 </a:solidFill>
@@ -6514,7 +6334,7 @@
               </a:defRPr>
             </a:pPr>
             <a:r>
-              <a:rPr sz="1200" b="0">
+              <a:rPr sz="900" b="0">
                 <a:solidFill>
                   <a:srgbClr val="858B84"/>
                 </a:solidFill>
@@ -6522,29 +6342,711 @@
                 <a:ea typeface="Courier New"/>
                 <a:cs typeface="Courier New"/>
               </a:rPr>
-              <a:t>FORM FACTOR ≠ PERMISSION</a:t>
+              <a:t>seeded catalog</a:t>
             </a:r>
           </a:p>
         </p:txBody>
       </p:sp>
       <p:sp>
         <p:nvSpPr>
-          <p:cNvPr id="63" name="sandbox-boundary-bg">
-            <a:extLst xmlns:a="http://schemas.openxmlformats.org/drawingml/2006/main">
-              <a:ext uri="{FF2B5EF4-FFF2-40B4-BE49-F238E27FC236}">
-                <a16:creationId xmlns:a16="http://schemas.microsoft.com/office/drawing/2014/main" id="{EC972B5F-E8CB-453B-851C-CE392A9F8BA9}"/>
-              </a:ext>
-            </a:extLst>
-          </p:cNvPr>
-          <p:cNvSpPr>
-            <a:spLocks xmlns:a="http://schemas.openxmlformats.org/drawingml/2006/main" noGrp="1"/>
-          </p:cNvSpPr>
-          <p:nvPr/>
-        </p:nvSpPr>
-        <p:spPr>
-          <a:xfrm xmlns:a="http://schemas.openxmlformats.org/drawingml/2006/main">
-            <a:off x="400050" y="5581650"/>
-            <a:ext cx="11410950" cy="400050"/>
+          <p:cNvPr id="59" name="receipt-row-rule-0">
+            <a:extLst xmlns:a="http://schemas.openxmlformats.org/drawingml/2006/main">
+              <a:ext uri="{FF2B5EF4-FFF2-40B4-BE49-F238E27FC236}">
+                <a16:creationId xmlns:a16="http://schemas.microsoft.com/office/drawing/2014/main" id="{1E484E01-E9F5-489D-B57E-B6F533E2ECC8}"/>
+              </a:ext>
+            </a:extLst>
+          </p:cNvPr>
+          <p:cNvSpPr>
+            <a:spLocks xmlns:a="http://schemas.openxmlformats.org/drawingml/2006/main" noGrp="1"/>
+          </p:cNvSpPr>
+          <p:nvPr/>
+        </p:nvSpPr>
+        <p:spPr>
+          <a:xfrm xmlns:a="http://schemas.openxmlformats.org/drawingml/2006/main">
+            <a:off x="5010150" y="3248025"/>
+            <a:ext cx="6515100" cy="0"/>
+          </a:xfrm>
+          <a:prstGeom xmlns:a="http://schemas.openxmlformats.org/drawingml/2006/main" prst="line">
+            <a:avLst/>
+          </a:prstGeom>
+          <a:noFill xmlns:a="http://schemas.openxmlformats.org/drawingml/2006/main"/>
+          <a:ln xmlns:a="http://schemas.openxmlformats.org/drawingml/2006/main" w="9525">
+            <a:solidFill>
+              <a:srgbClr val="252A26"/>
+            </a:solidFill>
+            <a:prstDash val="solid"/>
+          </a:ln>
+        </p:spPr>
+      </p:sp>
+      <p:sp>
+        <p:nvSpPr>
+          <p:cNvPr id="60" name="receipt-row-label-1">
+            <a:extLst xmlns:a="http://schemas.openxmlformats.org/drawingml/2006/main">
+              <a:ext uri="{FF2B5EF4-FFF2-40B4-BE49-F238E27FC236}">
+                <a16:creationId xmlns:a16="http://schemas.microsoft.com/office/drawing/2014/main" id="{7F691DC3-8B16-4C19-B060-FD16C36C741B}"/>
+              </a:ext>
+            </a:extLst>
+          </p:cNvPr>
+          <p:cNvSpPr>
+            <a:spLocks xmlns:a="http://schemas.openxmlformats.org/drawingml/2006/main" noGrp="1"/>
+          </p:cNvSpPr>
+          <p:nvPr/>
+        </p:nvSpPr>
+        <p:spPr>
+          <a:xfrm xmlns:a="http://schemas.openxmlformats.org/drawingml/2006/main">
+            <a:off x="5010150" y="3467100"/>
+            <a:ext cx="2190750" cy="190500"/>
+          </a:xfrm>
+          <a:prstGeom xmlns:a="http://schemas.openxmlformats.org/drawingml/2006/main" prst="rect">
+            <a:avLst/>
+          </a:prstGeom>
+          <a:noFill xmlns:a="http://schemas.openxmlformats.org/drawingml/2006/main"/>
+          <a:ln xmlns:a="http://schemas.openxmlformats.org/drawingml/2006/main" w="0">
+            <a:noFill/>
+            <a:prstDash val="solid"/>
+          </a:ln>
+        </p:spPr>
+        <p:txBody>
+          <a:bodyPr xmlns:a="http://schemas.openxmlformats.org/drawingml/2006/main" wrap="square" lIns="0" tIns="0" rIns="0" bIns="0" anchor="t">
+            <a:noAutofit/>
+          </a:bodyPr>
+          <a:lstStyle xmlns:a="http://schemas.openxmlformats.org/drawingml/2006/main"/>
+          <a:p xmlns:a="http://schemas.openxmlformats.org/drawingml/2006/main">
+            <a:pPr algn="l">
+              <a:lnSpc>
+                <a:spcPct val="100000"/>
+              </a:lnSpc>
+              <a:buNone/>
+              <a:defRPr sz="975" b="0">
+                <a:solidFill>
+                  <a:srgbClr val="858B84"/>
+                </a:solidFill>
+                <a:latin typeface="Courier New"/>
+                <a:ea typeface="Courier New"/>
+                <a:cs typeface="Courier New"/>
+              </a:defRPr>
+            </a:pPr>
+            <a:r>
+              <a:rPr sz="975" b="0">
+                <a:solidFill>
+                  <a:srgbClr val="858B84"/>
+                </a:solidFill>
+                <a:latin typeface="Courier New"/>
+                <a:ea typeface="Courier New"/>
+                <a:cs typeface="Courier New"/>
+              </a:rPr>
+              <a:t>PRIVATE MANDATE</a:t>
+            </a:r>
+          </a:p>
+        </p:txBody>
+      </p:sp>
+      <p:sp>
+        <p:nvSpPr>
+          <p:cNvPr id="61" name="receipt-row-value-1">
+            <a:extLst xmlns:a="http://schemas.openxmlformats.org/drawingml/2006/main">
+              <a:ext uri="{FF2B5EF4-FFF2-40B4-BE49-F238E27FC236}">
+                <a16:creationId xmlns:a16="http://schemas.microsoft.com/office/drawing/2014/main" id="{52381610-3EC9-4849-A79F-416EA9F16602}"/>
+              </a:ext>
+            </a:extLst>
+          </p:cNvPr>
+          <p:cNvSpPr>
+            <a:spLocks xmlns:a="http://schemas.openxmlformats.org/drawingml/2006/main" noGrp="1"/>
+          </p:cNvSpPr>
+          <p:nvPr/>
+        </p:nvSpPr>
+        <p:spPr>
+          <a:xfrm xmlns:a="http://schemas.openxmlformats.org/drawingml/2006/main">
+            <a:off x="7315200" y="3429000"/>
+            <a:ext cx="2552700" cy="266700"/>
+          </a:xfrm>
+          <a:prstGeom xmlns:a="http://schemas.openxmlformats.org/drawingml/2006/main" prst="rect">
+            <a:avLst/>
+          </a:prstGeom>
+          <a:noFill xmlns:a="http://schemas.openxmlformats.org/drawingml/2006/main"/>
+          <a:ln xmlns:a="http://schemas.openxmlformats.org/drawingml/2006/main" w="0">
+            <a:noFill/>
+            <a:prstDash val="solid"/>
+          </a:ln>
+        </p:spPr>
+        <p:txBody>
+          <a:bodyPr xmlns:a="http://schemas.openxmlformats.org/drawingml/2006/main" wrap="square" lIns="0" tIns="0" rIns="0" bIns="0" anchor="t">
+            <a:noAutofit/>
+          </a:bodyPr>
+          <a:lstStyle xmlns:a="http://schemas.openxmlformats.org/drawingml/2006/main"/>
+          <a:p xmlns:a="http://schemas.openxmlformats.org/drawingml/2006/main">
+            <a:pPr algn="l">
+              <a:lnSpc>
+                <a:spcPct val="100000"/>
+              </a:lnSpc>
+              <a:buNone/>
+              <a:defRPr sz="1500" b="1">
+                <a:solidFill>
+                  <a:srgbClr val="F1EFE5"/>
+                </a:solidFill>
+                <a:latin typeface="Courier New"/>
+                <a:ea typeface="Courier New"/>
+                <a:cs typeface="Courier New"/>
+              </a:defRPr>
+            </a:pPr>
+            <a:r>
+              <a:rPr sz="1500" b="1">
+                <a:solidFill>
+                  <a:srgbClr val="F1EFE5"/>
+                </a:solidFill>
+                <a:latin typeface="Courier New"/>
+                <a:ea typeface="Courier New"/>
+                <a:cs typeface="Courier New"/>
+              </a:rPr>
+              <a:t>1 UNIT · $400 MAX</a:t>
+            </a:r>
+          </a:p>
+        </p:txBody>
+      </p:sp>
+      <p:sp>
+        <p:nvSpPr>
+          <p:cNvPr id="62" name="receipt-row-detail-1">
+            <a:extLst xmlns:a="http://schemas.openxmlformats.org/drawingml/2006/main">
+              <a:ext uri="{FF2B5EF4-FFF2-40B4-BE49-F238E27FC236}">
+                <a16:creationId xmlns:a16="http://schemas.microsoft.com/office/drawing/2014/main" id="{56A89428-57D8-4A59-A5F1-644C1CAFC663}"/>
+              </a:ext>
+            </a:extLst>
+          </p:cNvPr>
+          <p:cNvSpPr>
+            <a:spLocks xmlns:a="http://schemas.openxmlformats.org/drawingml/2006/main" noGrp="1"/>
+          </p:cNvSpPr>
+          <p:nvPr/>
+        </p:nvSpPr>
+        <p:spPr>
+          <a:xfrm xmlns:a="http://schemas.openxmlformats.org/drawingml/2006/main">
+            <a:off x="9925050" y="3467100"/>
+            <a:ext cx="1600200" cy="190500"/>
+          </a:xfrm>
+          <a:prstGeom xmlns:a="http://schemas.openxmlformats.org/drawingml/2006/main" prst="rect">
+            <a:avLst/>
+          </a:prstGeom>
+          <a:noFill xmlns:a="http://schemas.openxmlformats.org/drawingml/2006/main"/>
+          <a:ln xmlns:a="http://schemas.openxmlformats.org/drawingml/2006/main" w="0">
+            <a:noFill/>
+            <a:prstDash val="solid"/>
+          </a:ln>
+        </p:spPr>
+        <p:txBody>
+          <a:bodyPr xmlns:a="http://schemas.openxmlformats.org/drawingml/2006/main" wrap="square" lIns="0" tIns="0" rIns="0" bIns="0" anchor="t">
+            <a:noAutofit/>
+          </a:bodyPr>
+          <a:lstStyle xmlns:a="http://schemas.openxmlformats.org/drawingml/2006/main"/>
+          <a:p xmlns:a="http://schemas.openxmlformats.org/drawingml/2006/main">
+            <a:pPr algn="r">
+              <a:lnSpc>
+                <a:spcPct val="100000"/>
+              </a:lnSpc>
+              <a:buNone/>
+              <a:defRPr sz="900" b="0">
+                <a:solidFill>
+                  <a:srgbClr val="858B84"/>
+                </a:solidFill>
+                <a:latin typeface="Courier New"/>
+                <a:ea typeface="Courier New"/>
+                <a:cs typeface="Courier New"/>
+              </a:defRPr>
+            </a:pPr>
+            <a:r>
+              <a:rPr sz="900" b="0">
+                <a:solidFill>
+                  <a:srgbClr val="858B84"/>
+                </a:solidFill>
+                <a:latin typeface="Courier New"/>
+                <a:ea typeface="Courier New"/>
+                <a:cs typeface="Courier New"/>
+              </a:rPr>
+              <a:t>30-day patience</a:t>
+            </a:r>
+          </a:p>
+        </p:txBody>
+      </p:sp>
+      <p:sp>
+        <p:nvSpPr>
+          <p:cNvPr id="63" name="receipt-row-rule-1">
+            <a:extLst xmlns:a="http://schemas.openxmlformats.org/drawingml/2006/main">
+              <a:ext uri="{FF2B5EF4-FFF2-40B4-BE49-F238E27FC236}">
+                <a16:creationId xmlns:a16="http://schemas.microsoft.com/office/drawing/2014/main" id="{FD5B5E16-9306-4633-8196-5DAF903A41F8}"/>
+              </a:ext>
+            </a:extLst>
+          </p:cNvPr>
+          <p:cNvSpPr>
+            <a:spLocks xmlns:a="http://schemas.openxmlformats.org/drawingml/2006/main" noGrp="1"/>
+          </p:cNvSpPr>
+          <p:nvPr/>
+        </p:nvSpPr>
+        <p:spPr>
+          <a:xfrm xmlns:a="http://schemas.openxmlformats.org/drawingml/2006/main">
+            <a:off x="5010150" y="3800475"/>
+            <a:ext cx="6515100" cy="0"/>
+          </a:xfrm>
+          <a:prstGeom xmlns:a="http://schemas.openxmlformats.org/drawingml/2006/main" prst="line">
+            <a:avLst/>
+          </a:prstGeom>
+          <a:noFill xmlns:a="http://schemas.openxmlformats.org/drawingml/2006/main"/>
+          <a:ln xmlns:a="http://schemas.openxmlformats.org/drawingml/2006/main" w="9525">
+            <a:solidFill>
+              <a:srgbClr val="252A26"/>
+            </a:solidFill>
+            <a:prstDash val="solid"/>
+          </a:ln>
+        </p:spPr>
+      </p:sp>
+      <p:sp>
+        <p:nvSpPr>
+          <p:cNvPr id="64" name="receipt-row-label-2">
+            <a:extLst xmlns:a="http://schemas.openxmlformats.org/drawingml/2006/main">
+              <a:ext uri="{FF2B5EF4-FFF2-40B4-BE49-F238E27FC236}">
+                <a16:creationId xmlns:a16="http://schemas.microsoft.com/office/drawing/2014/main" id="{F8D7526C-57F7-4976-917F-401703A6768D}"/>
+              </a:ext>
+            </a:extLst>
+          </p:cNvPr>
+          <p:cNvSpPr>
+            <a:spLocks xmlns:a="http://schemas.openxmlformats.org/drawingml/2006/main" noGrp="1"/>
+          </p:cNvSpPr>
+          <p:nvPr/>
+        </p:nvSpPr>
+        <p:spPr>
+          <a:xfrm xmlns:a="http://schemas.openxmlformats.org/drawingml/2006/main">
+            <a:off x="5010150" y="4019550"/>
+            <a:ext cx="2190750" cy="190500"/>
+          </a:xfrm>
+          <a:prstGeom xmlns:a="http://schemas.openxmlformats.org/drawingml/2006/main" prst="rect">
+            <a:avLst/>
+          </a:prstGeom>
+          <a:noFill xmlns:a="http://schemas.openxmlformats.org/drawingml/2006/main"/>
+          <a:ln xmlns:a="http://schemas.openxmlformats.org/drawingml/2006/main" w="0">
+            <a:noFill/>
+            <a:prstDash val="solid"/>
+          </a:ln>
+        </p:spPr>
+        <p:txBody>
+          <a:bodyPr xmlns:a="http://schemas.openxmlformats.org/drawingml/2006/main" wrap="square" lIns="0" tIns="0" rIns="0" bIns="0" anchor="t">
+            <a:noAutofit/>
+          </a:bodyPr>
+          <a:lstStyle xmlns:a="http://schemas.openxmlformats.org/drawingml/2006/main"/>
+          <a:p xmlns:a="http://schemas.openxmlformats.org/drawingml/2006/main">
+            <a:pPr algn="l">
+              <a:lnSpc>
+                <a:spcPct val="100000"/>
+              </a:lnSpc>
+              <a:buNone/>
+              <a:defRPr sz="975" b="0">
+                <a:solidFill>
+                  <a:srgbClr val="858B84"/>
+                </a:solidFill>
+                <a:latin typeface="Courier New"/>
+                <a:ea typeface="Courier New"/>
+                <a:cs typeface="Courier New"/>
+              </a:defRPr>
+            </a:pPr>
+            <a:r>
+              <a:rPr sz="975" b="0">
+                <a:solidFill>
+                  <a:srgbClr val="858B84"/>
+                </a:solidFill>
+                <a:latin typeface="Courier New"/>
+                <a:ea typeface="Courier New"/>
+                <a:cs typeface="Courier New"/>
+              </a:rPr>
+              <a:t>MANDATE CHECKS</a:t>
+            </a:r>
+          </a:p>
+        </p:txBody>
+      </p:sp>
+      <p:sp>
+        <p:nvSpPr>
+          <p:cNvPr id="65" name="receipt-row-value-2">
+            <a:extLst xmlns:a="http://schemas.openxmlformats.org/drawingml/2006/main">
+              <a:ext uri="{FF2B5EF4-FFF2-40B4-BE49-F238E27FC236}">
+                <a16:creationId xmlns:a16="http://schemas.microsoft.com/office/drawing/2014/main" id="{CD33781C-552F-4F43-98A7-8983C24B0F09}"/>
+              </a:ext>
+            </a:extLst>
+          </p:cNvPr>
+          <p:cNvSpPr>
+            <a:spLocks xmlns:a="http://schemas.openxmlformats.org/drawingml/2006/main" noGrp="1"/>
+          </p:cNvSpPr>
+          <p:nvPr/>
+        </p:nvSpPr>
+        <p:spPr>
+          <a:xfrm xmlns:a="http://schemas.openxmlformats.org/drawingml/2006/main">
+            <a:off x="7315200" y="3981450"/>
+            <a:ext cx="2552700" cy="266700"/>
+          </a:xfrm>
+          <a:prstGeom xmlns:a="http://schemas.openxmlformats.org/drawingml/2006/main" prst="rect">
+            <a:avLst/>
+          </a:prstGeom>
+          <a:noFill xmlns:a="http://schemas.openxmlformats.org/drawingml/2006/main"/>
+          <a:ln xmlns:a="http://schemas.openxmlformats.org/drawingml/2006/main" w="0">
+            <a:noFill/>
+            <a:prstDash val="solid"/>
+          </a:ln>
+        </p:spPr>
+        <p:txBody>
+          <a:bodyPr xmlns:a="http://schemas.openxmlformats.org/drawingml/2006/main" wrap="square" lIns="0" tIns="0" rIns="0" bIns="0" anchor="t">
+            <a:noAutofit/>
+          </a:bodyPr>
+          <a:lstStyle xmlns:a="http://schemas.openxmlformats.org/drawingml/2006/main"/>
+          <a:p xmlns:a="http://schemas.openxmlformats.org/drawingml/2006/main">
+            <a:pPr algn="l">
+              <a:lnSpc>
+                <a:spcPct val="100000"/>
+              </a:lnSpc>
+              <a:buNone/>
+              <a:defRPr sz="1500" b="1">
+                <a:solidFill>
+                  <a:srgbClr val="C7F52F"/>
+                </a:solidFill>
+                <a:latin typeface="Courier New"/>
+                <a:ea typeface="Courier New"/>
+                <a:cs typeface="Courier New"/>
+              </a:defRPr>
+            </a:pPr>
+            <a:r>
+              <a:rPr sz="1500" b="1">
+                <a:solidFill>
+                  <a:srgbClr val="C7F52F"/>
+                </a:solidFill>
+                <a:latin typeface="Courier New"/>
+                <a:ea typeface="Courier New"/>
+                <a:cs typeface="Courier New"/>
+              </a:rPr>
+              <a:t>PASSED</a:t>
+            </a:r>
+          </a:p>
+        </p:txBody>
+      </p:sp>
+      <p:sp>
+        <p:nvSpPr>
+          <p:cNvPr id="66" name="receipt-row-detail-2">
+            <a:extLst xmlns:a="http://schemas.openxmlformats.org/drawingml/2006/main">
+              <a:ext uri="{FF2B5EF4-FFF2-40B4-BE49-F238E27FC236}">
+                <a16:creationId xmlns:a16="http://schemas.microsoft.com/office/drawing/2014/main" id="{0A3BD091-E47D-4B9E-97C0-C7E3A08F75D1}"/>
+              </a:ext>
+            </a:extLst>
+          </p:cNvPr>
+          <p:cNvSpPr>
+            <a:spLocks xmlns:a="http://schemas.openxmlformats.org/drawingml/2006/main" noGrp="1"/>
+          </p:cNvSpPr>
+          <p:nvPr/>
+        </p:nvSpPr>
+        <p:spPr>
+          <a:xfrm xmlns:a="http://schemas.openxmlformats.org/drawingml/2006/main">
+            <a:off x="9925050" y="4019550"/>
+            <a:ext cx="1600200" cy="190500"/>
+          </a:xfrm>
+          <a:prstGeom xmlns:a="http://schemas.openxmlformats.org/drawingml/2006/main" prst="rect">
+            <a:avLst/>
+          </a:prstGeom>
+          <a:noFill xmlns:a="http://schemas.openxmlformats.org/drawingml/2006/main"/>
+          <a:ln xmlns:a="http://schemas.openxmlformats.org/drawingml/2006/main" w="0">
+            <a:noFill/>
+            <a:prstDash val="solid"/>
+          </a:ln>
+        </p:spPr>
+        <p:txBody>
+          <a:bodyPr xmlns:a="http://schemas.openxmlformats.org/drawingml/2006/main" wrap="square" lIns="0" tIns="0" rIns="0" bIns="0" anchor="t">
+            <a:noAutofit/>
+          </a:bodyPr>
+          <a:lstStyle xmlns:a="http://schemas.openxmlformats.org/drawingml/2006/main"/>
+          <a:p xmlns:a="http://schemas.openxmlformats.org/drawingml/2006/main">
+            <a:pPr algn="r">
+              <a:lnSpc>
+                <a:spcPct val="100000"/>
+              </a:lnSpc>
+              <a:buNone/>
+              <a:defRPr sz="900" b="0">
+                <a:solidFill>
+                  <a:srgbClr val="858B84"/>
+                </a:solidFill>
+                <a:latin typeface="Courier New"/>
+                <a:ea typeface="Courier New"/>
+                <a:cs typeface="Courier New"/>
+              </a:defRPr>
+            </a:pPr>
+            <a:r>
+              <a:rPr sz="900" b="0">
+                <a:solidFill>
+                  <a:srgbClr val="858B84"/>
+                </a:solidFill>
+                <a:latin typeface="Courier New"/>
+                <a:ea typeface="Courier New"/>
+                <a:cs typeface="Courier New"/>
+              </a:rPr>
+              <a:t>deterministic policy</a:t>
+            </a:r>
+          </a:p>
+        </p:txBody>
+      </p:sp>
+      <p:sp>
+        <p:nvSpPr>
+          <p:cNvPr id="67" name="receipt-row-rule-2">
+            <a:extLst xmlns:a="http://schemas.openxmlformats.org/drawingml/2006/main">
+              <a:ext uri="{FF2B5EF4-FFF2-40B4-BE49-F238E27FC236}">
+                <a16:creationId xmlns:a16="http://schemas.microsoft.com/office/drawing/2014/main" id="{DD140540-80FF-49FF-B0A8-BAF652289663}"/>
+              </a:ext>
+            </a:extLst>
+          </p:cNvPr>
+          <p:cNvSpPr>
+            <a:spLocks xmlns:a="http://schemas.openxmlformats.org/drawingml/2006/main" noGrp="1"/>
+          </p:cNvSpPr>
+          <p:nvPr/>
+        </p:nvSpPr>
+        <p:spPr>
+          <a:xfrm xmlns:a="http://schemas.openxmlformats.org/drawingml/2006/main">
+            <a:off x="5010150" y="4352925"/>
+            <a:ext cx="6515100" cy="0"/>
+          </a:xfrm>
+          <a:prstGeom xmlns:a="http://schemas.openxmlformats.org/drawingml/2006/main" prst="line">
+            <a:avLst/>
+          </a:prstGeom>
+          <a:noFill xmlns:a="http://schemas.openxmlformats.org/drawingml/2006/main"/>
+          <a:ln xmlns:a="http://schemas.openxmlformats.org/drawingml/2006/main" w="9525">
+            <a:solidFill>
+              <a:srgbClr val="252A26"/>
+            </a:solidFill>
+            <a:prstDash val="solid"/>
+          </a:ln>
+        </p:spPr>
+      </p:sp>
+      <p:sp>
+        <p:nvSpPr>
+          <p:cNvPr id="68" name="receipt-row-label-3">
+            <a:extLst xmlns:a="http://schemas.openxmlformats.org/drawingml/2006/main">
+              <a:ext uri="{FF2B5EF4-FFF2-40B4-BE49-F238E27FC236}">
+                <a16:creationId xmlns:a16="http://schemas.microsoft.com/office/drawing/2014/main" id="{9DD1A4C0-2D22-4C5D-9A25-3AECAE437F9F}"/>
+              </a:ext>
+            </a:extLst>
+          </p:cNvPr>
+          <p:cNvSpPr>
+            <a:spLocks xmlns:a="http://schemas.openxmlformats.org/drawingml/2006/main" noGrp="1"/>
+          </p:cNvSpPr>
+          <p:nvPr/>
+        </p:nvSpPr>
+        <p:spPr>
+          <a:xfrm xmlns:a="http://schemas.openxmlformats.org/drawingml/2006/main">
+            <a:off x="5010150" y="4572000"/>
+            <a:ext cx="2190750" cy="190500"/>
+          </a:xfrm>
+          <a:prstGeom xmlns:a="http://schemas.openxmlformats.org/drawingml/2006/main" prst="rect">
+            <a:avLst/>
+          </a:prstGeom>
+          <a:noFill xmlns:a="http://schemas.openxmlformats.org/drawingml/2006/main"/>
+          <a:ln xmlns:a="http://schemas.openxmlformats.org/drawingml/2006/main" w="0">
+            <a:noFill/>
+            <a:prstDash val="solid"/>
+          </a:ln>
+        </p:spPr>
+        <p:txBody>
+          <a:bodyPr xmlns:a="http://schemas.openxmlformats.org/drawingml/2006/main" wrap="square" lIns="0" tIns="0" rIns="0" bIns="0" anchor="t">
+            <a:noAutofit/>
+          </a:bodyPr>
+          <a:lstStyle xmlns:a="http://schemas.openxmlformats.org/drawingml/2006/main"/>
+          <a:p xmlns:a="http://schemas.openxmlformats.org/drawingml/2006/main">
+            <a:pPr algn="l">
+              <a:lnSpc>
+                <a:spcPct val="100000"/>
+              </a:lnSpc>
+              <a:buNone/>
+              <a:defRPr sz="975" b="0">
+                <a:solidFill>
+                  <a:srgbClr val="858B84"/>
+                </a:solidFill>
+                <a:latin typeface="Courier New"/>
+                <a:ea typeface="Courier New"/>
+                <a:cs typeface="Courier New"/>
+              </a:defRPr>
+            </a:pPr>
+            <a:r>
+              <a:rPr sz="975" b="0">
+                <a:solidFill>
+                  <a:srgbClr val="858B84"/>
+                </a:solidFill>
+                <a:latin typeface="Courier New"/>
+                <a:ea typeface="Courier New"/>
+                <a:cs typeface="Courier New"/>
+              </a:rPr>
+              <a:t>MSRP IF JOINED LATER</a:t>
+            </a:r>
+          </a:p>
+        </p:txBody>
+      </p:sp>
+      <p:sp>
+        <p:nvSpPr>
+          <p:cNvPr id="69" name="receipt-row-value-3">
+            <a:extLst xmlns:a="http://schemas.openxmlformats.org/drawingml/2006/main">
+              <a:ext uri="{FF2B5EF4-FFF2-40B4-BE49-F238E27FC236}">
+                <a16:creationId xmlns:a16="http://schemas.microsoft.com/office/drawing/2014/main" id="{E0885D4E-E400-4733-B886-80ACAD348305}"/>
+              </a:ext>
+            </a:extLst>
+          </p:cNvPr>
+          <p:cNvSpPr>
+            <a:spLocks xmlns:a="http://schemas.openxmlformats.org/drawingml/2006/main" noGrp="1"/>
+          </p:cNvSpPr>
+          <p:nvPr/>
+        </p:nvSpPr>
+        <p:spPr>
+          <a:xfrm xmlns:a="http://schemas.openxmlformats.org/drawingml/2006/main">
+            <a:off x="7315200" y="4533900"/>
+            <a:ext cx="2552700" cy="266700"/>
+          </a:xfrm>
+          <a:prstGeom xmlns:a="http://schemas.openxmlformats.org/drawingml/2006/main" prst="rect">
+            <a:avLst/>
+          </a:prstGeom>
+          <a:noFill xmlns:a="http://schemas.openxmlformats.org/drawingml/2006/main"/>
+          <a:ln xmlns:a="http://schemas.openxmlformats.org/drawingml/2006/main" w="0">
+            <a:noFill/>
+            <a:prstDash val="solid"/>
+          </a:ln>
+        </p:spPr>
+        <p:txBody>
+          <a:bodyPr xmlns:a="http://schemas.openxmlformats.org/drawingml/2006/main" wrap="square" lIns="0" tIns="0" rIns="0" bIns="0" anchor="t">
+            <a:noAutofit/>
+          </a:bodyPr>
+          <a:lstStyle xmlns:a="http://schemas.openxmlformats.org/drawingml/2006/main"/>
+          <a:p xmlns:a="http://schemas.openxmlformats.org/drawingml/2006/main">
+            <a:pPr algn="l">
+              <a:lnSpc>
+                <a:spcPct val="100000"/>
+              </a:lnSpc>
+              <a:buNone/>
+              <a:defRPr sz="1500" b="1">
+                <a:solidFill>
+                  <a:srgbClr val="F1EFE5"/>
+                </a:solidFill>
+                <a:latin typeface="Courier New"/>
+                <a:ea typeface="Courier New"/>
+                <a:cs typeface="Courier New"/>
+              </a:defRPr>
+            </a:pPr>
+            <a:r>
+              <a:rPr sz="1500" b="1">
+                <a:solidFill>
+                  <a:srgbClr val="F1EFE5"/>
+                </a:solidFill>
+                <a:latin typeface="Courier New"/>
+                <a:ea typeface="Courier New"/>
+                <a:cs typeface="Courier New"/>
+              </a:rPr>
+              <a:t>$449.99</a:t>
+            </a:r>
+          </a:p>
+        </p:txBody>
+      </p:sp>
+      <p:sp>
+        <p:nvSpPr>
+          <p:cNvPr id="70" name="receipt-row-detail-3">
+            <a:extLst xmlns:a="http://schemas.openxmlformats.org/drawingml/2006/main">
+              <a:ext uri="{FF2B5EF4-FFF2-40B4-BE49-F238E27FC236}">
+                <a16:creationId xmlns:a16="http://schemas.microsoft.com/office/drawing/2014/main" id="{6B090285-986E-4215-BF86-C4FC052576E0}"/>
+              </a:ext>
+            </a:extLst>
+          </p:cNvPr>
+          <p:cNvSpPr>
+            <a:spLocks xmlns:a="http://schemas.openxmlformats.org/drawingml/2006/main" noGrp="1"/>
+          </p:cNvSpPr>
+          <p:nvPr/>
+        </p:nvSpPr>
+        <p:spPr>
+          <a:xfrm xmlns:a="http://schemas.openxmlformats.org/drawingml/2006/main">
+            <a:off x="9925050" y="4572000"/>
+            <a:ext cx="1600200" cy="190500"/>
+          </a:xfrm>
+          <a:prstGeom xmlns:a="http://schemas.openxmlformats.org/drawingml/2006/main" prst="rect">
+            <a:avLst/>
+          </a:prstGeom>
+          <a:noFill xmlns:a="http://schemas.openxmlformats.org/drawingml/2006/main"/>
+          <a:ln xmlns:a="http://schemas.openxmlformats.org/drawingml/2006/main" w="0">
+            <a:noFill/>
+            <a:prstDash val="solid"/>
+          </a:ln>
+        </p:spPr>
+        <p:txBody>
+          <a:bodyPr xmlns:a="http://schemas.openxmlformats.org/drawingml/2006/main" wrap="square" lIns="0" tIns="0" rIns="0" bIns="0" anchor="t">
+            <a:noAutofit/>
+          </a:bodyPr>
+          <a:lstStyle xmlns:a="http://schemas.openxmlformats.org/drawingml/2006/main"/>
+          <a:p xmlns:a="http://schemas.openxmlformats.org/drawingml/2006/main">
+            <a:pPr algn="r">
+              <a:lnSpc>
+                <a:spcPct val="100000"/>
+              </a:lnSpc>
+              <a:buNone/>
+              <a:defRPr sz="900" b="0">
+                <a:solidFill>
+                  <a:srgbClr val="858B84"/>
+                </a:solidFill>
+                <a:latin typeface="Courier New"/>
+                <a:ea typeface="Courier New"/>
+                <a:cs typeface="Courier New"/>
+              </a:defRPr>
+            </a:pPr>
+            <a:r>
+              <a:rPr sz="900" b="0">
+                <a:solidFill>
+                  <a:srgbClr val="858B84"/>
+                </a:solidFill>
+                <a:latin typeface="Courier New"/>
+                <a:ea typeface="Courier New"/>
+                <a:cs typeface="Courier New"/>
+              </a:rPr>
+              <a:t>not requested now</a:t>
+            </a:r>
+          </a:p>
+        </p:txBody>
+      </p:sp>
+      <p:sp>
+        <p:nvSpPr>
+          <p:cNvPr id="71" name="receipt-row-rule-3">
+            <a:extLst xmlns:a="http://schemas.openxmlformats.org/drawingml/2006/main">
+              <a:ext uri="{FF2B5EF4-FFF2-40B4-BE49-F238E27FC236}">
+                <a16:creationId xmlns:a16="http://schemas.microsoft.com/office/drawing/2014/main" id="{AAE897C6-02EC-4083-A47E-CCC5CE006CBB}"/>
+              </a:ext>
+            </a:extLst>
+          </p:cNvPr>
+          <p:cNvSpPr>
+            <a:spLocks xmlns:a="http://schemas.openxmlformats.org/drawingml/2006/main" noGrp="1"/>
+          </p:cNvSpPr>
+          <p:nvPr/>
+        </p:nvSpPr>
+        <p:spPr>
+          <a:xfrm xmlns:a="http://schemas.openxmlformats.org/drawingml/2006/main">
+            <a:off x="5010150" y="4905375"/>
+            <a:ext cx="6515100" cy="0"/>
+          </a:xfrm>
+          <a:prstGeom xmlns:a="http://schemas.openxmlformats.org/drawingml/2006/main" prst="line">
+            <a:avLst/>
+          </a:prstGeom>
+          <a:noFill xmlns:a="http://schemas.openxmlformats.org/drawingml/2006/main"/>
+          <a:ln xmlns:a="http://schemas.openxmlformats.org/drawingml/2006/main" w="9525">
+            <a:solidFill>
+              <a:srgbClr val="252A26"/>
+            </a:solidFill>
+            <a:prstDash val="solid"/>
+          </a:ln>
+        </p:spPr>
+      </p:sp>
+      <p:sp>
+        <p:nvSpPr>
+          <p:cNvPr id="72" name="agent-boundary-bg">
+            <a:extLst xmlns:a="http://schemas.openxmlformats.org/drawingml/2006/main">
+              <a:ext uri="{FF2B5EF4-FFF2-40B4-BE49-F238E27FC236}">
+                <a16:creationId xmlns:a16="http://schemas.microsoft.com/office/drawing/2014/main" id="{F58AF1BE-6DEF-4F93-A5F2-56E5600F8B1E}"/>
+              </a:ext>
+            </a:extLst>
+          </p:cNvPr>
+          <p:cNvSpPr>
+            <a:spLocks xmlns:a="http://schemas.openxmlformats.org/drawingml/2006/main" noGrp="1"/>
+          </p:cNvSpPr>
+          <p:nvPr/>
+        </p:nvSpPr>
+        <p:spPr>
+          <a:xfrm xmlns:a="http://schemas.openxmlformats.org/drawingml/2006/main">
+            <a:off x="419100" y="5600700"/>
+            <a:ext cx="11391900" cy="400050"/>
           </a:xfrm>
           <a:prstGeom xmlns:a="http://schemas.openxmlformats.org/drawingml/2006/main" prst="rect">
             <a:avLst/>
@@ -6562,22 +7064,22 @@
       </p:sp>
       <p:sp>
         <p:nvSpPr>
-          <p:cNvPr id="64" name="boundary-label">
-            <a:extLst xmlns:a="http://schemas.openxmlformats.org/drawingml/2006/main">
-              <a:ext uri="{FF2B5EF4-FFF2-40B4-BE49-F238E27FC236}">
-                <a16:creationId xmlns:a16="http://schemas.microsoft.com/office/drawing/2014/main" id="{1142FE25-519E-4028-8093-4E41A84955FC}"/>
-              </a:ext>
-            </a:extLst>
-          </p:cNvPr>
-          <p:cNvSpPr>
-            <a:spLocks xmlns:a="http://schemas.openxmlformats.org/drawingml/2006/main" noGrp="1"/>
-          </p:cNvSpPr>
-          <p:nvPr/>
-        </p:nvSpPr>
-        <p:spPr>
-          <a:xfrm xmlns:a="http://schemas.openxmlformats.org/drawingml/2006/main">
-            <a:off x="571500" y="5686425"/>
-            <a:ext cx="1000125" cy="190500"/>
+          <p:cNvPr id="73" name="agent-save-boundary">
+            <a:extLst xmlns:a="http://schemas.openxmlformats.org/drawingml/2006/main">
+              <a:ext uri="{FF2B5EF4-FFF2-40B4-BE49-F238E27FC236}">
+                <a16:creationId xmlns:a16="http://schemas.microsoft.com/office/drawing/2014/main" id="{13A5864C-C4F3-49F1-9D6C-260F266E8D34}"/>
+              </a:ext>
+            </a:extLst>
+          </p:cNvPr>
+          <p:cNvSpPr>
+            <a:spLocks xmlns:a="http://schemas.openxmlformats.org/drawingml/2006/main" noGrp="1"/>
+          </p:cNvSpPr>
+          <p:nvPr/>
+        </p:nvSpPr>
+        <p:spPr>
+          <a:xfrm xmlns:a="http://schemas.openxmlformats.org/drawingml/2006/main">
+            <a:off x="590550" y="5705475"/>
+            <a:ext cx="4857750" cy="190500"/>
           </a:xfrm>
           <a:prstGeom xmlns:a="http://schemas.openxmlformats.org/drawingml/2006/main" prst="rect">
             <a:avLst/>
@@ -6601,7 +7103,7 @@
               <a:buNone/>
               <a:defRPr sz="1050" b="1">
                 <a:solidFill>
-                  <a:srgbClr val="FF2B79"/>
+                  <a:srgbClr val="D3D1C8"/>
                 </a:solidFill>
                 <a:latin typeface="Courier New"/>
                 <a:ea typeface="Courier New"/>
@@ -6611,35 +7113,35 @@
             <a:r>
               <a:rPr sz="1050" b="1">
                 <a:solidFill>
-                  <a:srgbClr val="FF2B79"/>
+                  <a:srgbClr val="D3D1C8"/>
                 </a:solidFill>
                 <a:latin typeface="Courier New"/>
                 <a:ea typeface="Courier New"/>
                 <a:cs typeface="Courier New"/>
               </a:rPr>
-              <a:t>BOUNDARY</a:t>
+              <a:t>ONLY EXPLICIT SAVE CREATES LOCAL INTENT</a:t>
             </a:r>
           </a:p>
         </p:txBody>
       </p:sp>
       <p:sp>
         <p:nvSpPr>
-          <p:cNvPr id="65" name="boundary-copy">
-            <a:extLst xmlns:a="http://schemas.openxmlformats.org/drawingml/2006/main">
-              <a:ext uri="{FF2B5EF4-FFF2-40B4-BE49-F238E27FC236}">
-                <a16:creationId xmlns:a16="http://schemas.microsoft.com/office/drawing/2014/main" id="{B7891A4E-8627-41BB-AFB8-5B77DB5696B2}"/>
-              </a:ext>
-            </a:extLst>
-          </p:cNvPr>
-          <p:cNvSpPr>
-            <a:spLocks xmlns:a="http://schemas.openxmlformats.org/drawingml/2006/main" noGrp="1"/>
-          </p:cNvSpPr>
-          <p:nvPr/>
-        </p:nvSpPr>
-        <p:spPr>
-          <a:xfrm xmlns:a="http://schemas.openxmlformats.org/drawingml/2006/main">
-            <a:off x="1752600" y="5676900"/>
-            <a:ext cx="9525000" cy="209550"/>
+          <p:cNvPr id="74" name="agent-money-boundary">
+            <a:extLst xmlns:a="http://schemas.openxmlformats.org/drawingml/2006/main">
+              <a:ext uri="{FF2B5EF4-FFF2-40B4-BE49-F238E27FC236}">
+                <a16:creationId xmlns:a16="http://schemas.microsoft.com/office/drawing/2014/main" id="{3F3AD424-FB38-4E75-A42D-9C45704F6CAF}"/>
+              </a:ext>
+            </a:extLst>
+          </p:cNvPr>
+          <p:cNvSpPr>
+            <a:spLocks xmlns:a="http://schemas.openxmlformats.org/drawingml/2006/main" noGrp="1"/>
+          </p:cNvSpPr>
+          <p:nvPr/>
+        </p:nvSpPr>
+        <p:spPr>
+          <a:xfrm xmlns:a="http://schemas.openxmlformats.org/drawingml/2006/main">
+            <a:off x="5638800" y="5705475"/>
+            <a:ext cx="5943600" cy="190500"/>
           </a:xfrm>
           <a:prstGeom xmlns:a="http://schemas.openxmlformats.org/drawingml/2006/main" prst="rect">
             <a:avLst/>
@@ -6656,14 +7158,14 @@
           </a:bodyPr>
           <a:lstStyle xmlns:a="http://schemas.openxmlformats.org/drawingml/2006/main"/>
           <a:p xmlns:a="http://schemas.openxmlformats.org/drawingml/2006/main">
-            <a:pPr algn="l">
+            <a:pPr algn="r">
               <a:lnSpc>
                 <a:spcPct val="100000"/>
               </a:lnSpc>
               <a:buNone/>
-              <a:defRPr sz="1275" b="0">
-                <a:solidFill>
-                  <a:srgbClr val="D3D1C8"/>
+              <a:defRPr sz="1125" b="1">
+                <a:solidFill>
+                  <a:srgbClr val="FF2B79"/>
                 </a:solidFill>
                 <a:latin typeface="Courier New"/>
                 <a:ea typeface="Courier New"/>
@@ -6671,15 +7173,15 @@
               </a:defRPr>
             </a:pPr>
             <a:r>
-              <a:rPr sz="1275" b="0">
-                <a:solidFill>
-                  <a:srgbClr val="D3D1C8"/>
+              <a:rPr sz="1125" b="1">
+                <a:solidFill>
+                  <a:srgbClr val="FF2B79"/>
                 </a:solidFill>
                 <a:latin typeface="Courier New"/>
                 <a:ea typeface="Courier New"/>
                 <a:cs typeface="Courier New"/>
               </a:rPr>
-              <a:t>Browser-local sandbox ledger — not custody, escrow, or a bank account.</a:t>
+              <a:t>FINANCIAL AUTHORIZATION: NOT REQUESTED · $0 MOVED</a:t>
             </a:r>
           </a:p>
         </p:txBody>
@@ -6687,7 +7189,7 @@
     </p:spTree>
     <p:extLst>
       <p:ext uri="{BB962C8B-B14F-4D97-AF65-F5344CB8AC3E}">
-        <p14:creationId xmlns:p14="http://schemas.microsoft.com/office/powerpoint/2010/main" val="494821893"/>
+        <p14:creationId xmlns:p14="http://schemas.microsoft.com/office/powerpoint/2010/main" val="1497849821"/>
       </p:ext>
     </p:extLst>
   </p:cSld>
@@ -6715,10 +7217,10 @@
       </p:grpSpPr>
       <p:sp>
         <p:nvSpPr>
-          <p:cNvPr id="68" name="grid-v-40">
-            <a:extLst xmlns:a="http://schemas.openxmlformats.org/drawingml/2006/main">
-              <a:ext uri="{FF2B5EF4-FFF2-40B4-BE49-F238E27FC236}">
-                <a16:creationId xmlns:a16="http://schemas.microsoft.com/office/drawing/2014/main" id="{542F7D48-6D45-4DE2-84E7-3D5F54992846}"/>
+          <p:cNvPr id="70" name="grid-v-40">
+            <a:extLst xmlns:a="http://schemas.openxmlformats.org/drawingml/2006/main">
+              <a:ext uri="{FF2B5EF4-FFF2-40B4-BE49-F238E27FC236}">
+                <a16:creationId xmlns:a16="http://schemas.microsoft.com/office/drawing/2014/main" id="{C5A78E0A-07C8-409A-B533-2FC7E377BB5A}"/>
               </a:ext>
             </a:extLst>
           </p:cNvPr>
@@ -6749,7 +7251,7 @@
           <p:cNvPr id="2" name="grid-v-104">
             <a:extLst xmlns:a="http://schemas.openxmlformats.org/drawingml/2006/main">
               <a:ext uri="{FF2B5EF4-FFF2-40B4-BE49-F238E27FC236}">
-                <a16:creationId xmlns:a16="http://schemas.microsoft.com/office/drawing/2014/main" id="{1638A279-B3DE-4559-AE3E-6EF57D960D4B}"/>
+                <a16:creationId xmlns:a16="http://schemas.microsoft.com/office/drawing/2014/main" id="{FAA914C3-1A37-4BF6-A53F-B340EC3AB4B1}"/>
               </a:ext>
             </a:extLst>
           </p:cNvPr>
@@ -6780,7 +7282,7 @@
           <p:cNvPr id="3" name="grid-v-168">
             <a:extLst xmlns:a="http://schemas.openxmlformats.org/drawingml/2006/main">
               <a:ext uri="{FF2B5EF4-FFF2-40B4-BE49-F238E27FC236}">
-                <a16:creationId xmlns:a16="http://schemas.microsoft.com/office/drawing/2014/main" id="{46D8CAA4-E350-4494-8789-99C821E48401}"/>
+                <a16:creationId xmlns:a16="http://schemas.microsoft.com/office/drawing/2014/main" id="{CB39CDAC-6CE8-452A-96BF-C18F19ABDF25}"/>
               </a:ext>
             </a:extLst>
           </p:cNvPr>
@@ -6811,7 +7313,7 @@
           <p:cNvPr id="4" name="grid-v-232">
             <a:extLst xmlns:a="http://schemas.openxmlformats.org/drawingml/2006/main">
               <a:ext uri="{FF2B5EF4-FFF2-40B4-BE49-F238E27FC236}">
-                <a16:creationId xmlns:a16="http://schemas.microsoft.com/office/drawing/2014/main" id="{E1658D73-7866-42CC-A1C1-B207D4DBEBC3}"/>
+                <a16:creationId xmlns:a16="http://schemas.microsoft.com/office/drawing/2014/main" id="{CEFBDC70-2B6B-4D32-B60C-3EDA9A6E4C69}"/>
               </a:ext>
             </a:extLst>
           </p:cNvPr>
@@ -6842,7 +7344,7 @@
           <p:cNvPr id="5" name="grid-v-296">
             <a:extLst xmlns:a="http://schemas.openxmlformats.org/drawingml/2006/main">
               <a:ext uri="{FF2B5EF4-FFF2-40B4-BE49-F238E27FC236}">
-                <a16:creationId xmlns:a16="http://schemas.microsoft.com/office/drawing/2014/main" id="{CD411BB4-C1E7-416C-B343-1938A1860468}"/>
+                <a16:creationId xmlns:a16="http://schemas.microsoft.com/office/drawing/2014/main" id="{5FFC9840-E654-4556-8740-2A67ED60E84D}"/>
               </a:ext>
             </a:extLst>
           </p:cNvPr>
@@ -6873,7 +7375,7 @@
           <p:cNvPr id="6" name="grid-v-360">
             <a:extLst xmlns:a="http://schemas.openxmlformats.org/drawingml/2006/main">
               <a:ext uri="{FF2B5EF4-FFF2-40B4-BE49-F238E27FC236}">
-                <a16:creationId xmlns:a16="http://schemas.microsoft.com/office/drawing/2014/main" id="{11D2506C-BD3C-4089-9CBD-E81D85395682}"/>
+                <a16:creationId xmlns:a16="http://schemas.microsoft.com/office/drawing/2014/main" id="{9FCFEE58-E5A5-47B9-A3B7-896EDEB613CD}"/>
               </a:ext>
             </a:extLst>
           </p:cNvPr>
@@ -6904,7 +7406,7 @@
           <p:cNvPr id="7" name="grid-v-424">
             <a:extLst xmlns:a="http://schemas.openxmlformats.org/drawingml/2006/main">
               <a:ext uri="{FF2B5EF4-FFF2-40B4-BE49-F238E27FC236}">
-                <a16:creationId xmlns:a16="http://schemas.microsoft.com/office/drawing/2014/main" id="{654BEB20-6F77-41E6-9BB1-1F0F401A539E}"/>
+                <a16:creationId xmlns:a16="http://schemas.microsoft.com/office/drawing/2014/main" id="{2FB10CDF-AE6A-4EF3-8548-68076417B19C}"/>
               </a:ext>
             </a:extLst>
           </p:cNvPr>
@@ -6935,7 +7437,7 @@
           <p:cNvPr id="8" name="grid-v-488">
             <a:extLst xmlns:a="http://schemas.openxmlformats.org/drawingml/2006/main">
               <a:ext uri="{FF2B5EF4-FFF2-40B4-BE49-F238E27FC236}">
-                <a16:creationId xmlns:a16="http://schemas.microsoft.com/office/drawing/2014/main" id="{05A26046-714F-4E97-BCBC-CF8322EF2E58}"/>
+                <a16:creationId xmlns:a16="http://schemas.microsoft.com/office/drawing/2014/main" id="{5DAF60DF-EC2F-4293-A0A3-D5B099C9CB74}"/>
               </a:ext>
             </a:extLst>
           </p:cNvPr>
@@ -6966,7 +7468,7 @@
           <p:cNvPr id="9" name="grid-v-552">
             <a:extLst xmlns:a="http://schemas.openxmlformats.org/drawingml/2006/main">
               <a:ext uri="{FF2B5EF4-FFF2-40B4-BE49-F238E27FC236}">
-                <a16:creationId xmlns:a16="http://schemas.microsoft.com/office/drawing/2014/main" id="{98414702-9BE8-4E1D-AA9B-4E93F2D4A1D5}"/>
+                <a16:creationId xmlns:a16="http://schemas.microsoft.com/office/drawing/2014/main" id="{CF825111-5978-41F1-B281-9DFBB8E9FFE8}"/>
               </a:ext>
             </a:extLst>
           </p:cNvPr>
@@ -6997,7 +7499,7 @@
           <p:cNvPr id="10" name="grid-v-616">
             <a:extLst xmlns:a="http://schemas.openxmlformats.org/drawingml/2006/main">
               <a:ext uri="{FF2B5EF4-FFF2-40B4-BE49-F238E27FC236}">
-                <a16:creationId xmlns:a16="http://schemas.microsoft.com/office/drawing/2014/main" id="{B8481538-2EE6-455E-92DE-EB92B6D02538}"/>
+                <a16:creationId xmlns:a16="http://schemas.microsoft.com/office/drawing/2014/main" id="{C965BE53-28EB-4762-993E-24FF03A8105A}"/>
               </a:ext>
             </a:extLst>
           </p:cNvPr>
@@ -7028,7 +7530,7 @@
           <p:cNvPr id="11" name="grid-v-680">
             <a:extLst xmlns:a="http://schemas.openxmlformats.org/drawingml/2006/main">
               <a:ext uri="{FF2B5EF4-FFF2-40B4-BE49-F238E27FC236}">
-                <a16:creationId xmlns:a16="http://schemas.microsoft.com/office/drawing/2014/main" id="{DF18295B-8EEB-44F5-9CF9-38592863EB67}"/>
+                <a16:creationId xmlns:a16="http://schemas.microsoft.com/office/drawing/2014/main" id="{6D10F0BF-98B3-4C06-A7CA-248B510D9AF2}"/>
               </a:ext>
             </a:extLst>
           </p:cNvPr>
@@ -7059,7 +7561,7 @@
           <p:cNvPr id="12" name="grid-v-744">
             <a:extLst xmlns:a="http://schemas.openxmlformats.org/drawingml/2006/main">
               <a:ext uri="{FF2B5EF4-FFF2-40B4-BE49-F238E27FC236}">
-                <a16:creationId xmlns:a16="http://schemas.microsoft.com/office/drawing/2014/main" id="{F0B74884-BA3F-4DB5-9B85-DCC8363B5503}"/>
+                <a16:creationId xmlns:a16="http://schemas.microsoft.com/office/drawing/2014/main" id="{DE4E745F-997C-48C6-89D7-E0799275ACA0}"/>
               </a:ext>
             </a:extLst>
           </p:cNvPr>
@@ -7090,7 +7592,7 @@
           <p:cNvPr id="13" name="grid-v-808">
             <a:extLst xmlns:a="http://schemas.openxmlformats.org/drawingml/2006/main">
               <a:ext uri="{FF2B5EF4-FFF2-40B4-BE49-F238E27FC236}">
-                <a16:creationId xmlns:a16="http://schemas.microsoft.com/office/drawing/2014/main" id="{DEF3ADD1-76BE-464F-8E7F-334AB6CC361A}"/>
+                <a16:creationId xmlns:a16="http://schemas.microsoft.com/office/drawing/2014/main" id="{91982C0A-A125-45FD-BC18-6F3FD5E64C5E}"/>
               </a:ext>
             </a:extLst>
           </p:cNvPr>
@@ -7121,7 +7623,7 @@
           <p:cNvPr id="14" name="grid-v-872">
             <a:extLst xmlns:a="http://schemas.openxmlformats.org/drawingml/2006/main">
               <a:ext uri="{FF2B5EF4-FFF2-40B4-BE49-F238E27FC236}">
-                <a16:creationId xmlns:a16="http://schemas.microsoft.com/office/drawing/2014/main" id="{38B365CB-FA49-4BE0-810D-FCB2E5D9377A}"/>
+                <a16:creationId xmlns:a16="http://schemas.microsoft.com/office/drawing/2014/main" id="{6FE93D15-3B75-4334-8D46-8F182064B6EA}"/>
               </a:ext>
             </a:extLst>
           </p:cNvPr>
@@ -7152,7 +7654,7 @@
           <p:cNvPr id="15" name="grid-v-936">
             <a:extLst xmlns:a="http://schemas.openxmlformats.org/drawingml/2006/main">
               <a:ext uri="{FF2B5EF4-FFF2-40B4-BE49-F238E27FC236}">
-                <a16:creationId xmlns:a16="http://schemas.microsoft.com/office/drawing/2014/main" id="{CBCB6315-BCE8-4B0B-889F-341BB7F459B7}"/>
+                <a16:creationId xmlns:a16="http://schemas.microsoft.com/office/drawing/2014/main" id="{275F905F-26E1-4141-B76E-D3113391EE57}"/>
               </a:ext>
             </a:extLst>
           </p:cNvPr>
@@ -7183,7 +7685,7 @@
           <p:cNvPr id="16" name="grid-v-1000">
             <a:extLst xmlns:a="http://schemas.openxmlformats.org/drawingml/2006/main">
               <a:ext uri="{FF2B5EF4-FFF2-40B4-BE49-F238E27FC236}">
-                <a16:creationId xmlns:a16="http://schemas.microsoft.com/office/drawing/2014/main" id="{570381F2-3CE4-44A7-B325-2926441527AD}"/>
+                <a16:creationId xmlns:a16="http://schemas.microsoft.com/office/drawing/2014/main" id="{5830BA63-2F30-4C38-A18D-55AAE71DB8DF}"/>
               </a:ext>
             </a:extLst>
           </p:cNvPr>
@@ -7214,7 +7716,7 @@
           <p:cNvPr id="17" name="grid-v-1064">
             <a:extLst xmlns:a="http://schemas.openxmlformats.org/drawingml/2006/main">
               <a:ext uri="{FF2B5EF4-FFF2-40B4-BE49-F238E27FC236}">
-                <a16:creationId xmlns:a16="http://schemas.microsoft.com/office/drawing/2014/main" id="{D9CE7D4A-0FBD-484C-9080-92467E616D33}"/>
+                <a16:creationId xmlns:a16="http://schemas.microsoft.com/office/drawing/2014/main" id="{68210D3B-0C62-467F-AE6C-9FE95AE52E02}"/>
               </a:ext>
             </a:extLst>
           </p:cNvPr>
@@ -7245,7 +7747,7 @@
           <p:cNvPr id="18" name="grid-v-1128">
             <a:extLst xmlns:a="http://schemas.openxmlformats.org/drawingml/2006/main">
               <a:ext uri="{FF2B5EF4-FFF2-40B4-BE49-F238E27FC236}">
-                <a16:creationId xmlns:a16="http://schemas.microsoft.com/office/drawing/2014/main" id="{F2388CB3-5C3C-464D-A7EB-DAD02FB97497}"/>
+                <a16:creationId xmlns:a16="http://schemas.microsoft.com/office/drawing/2014/main" id="{B17A7BF4-E6C1-4802-AFAB-3D4662094B4F}"/>
               </a:ext>
             </a:extLst>
           </p:cNvPr>
@@ -7276,7 +7778,7 @@
           <p:cNvPr id="19" name="grid-v-1192">
             <a:extLst xmlns:a="http://schemas.openxmlformats.org/drawingml/2006/main">
               <a:ext uri="{FF2B5EF4-FFF2-40B4-BE49-F238E27FC236}">
-                <a16:creationId xmlns:a16="http://schemas.microsoft.com/office/drawing/2014/main" id="{B7AA5BB9-AE8B-4EBE-B929-A36D44514D23}"/>
+                <a16:creationId xmlns:a16="http://schemas.microsoft.com/office/drawing/2014/main" id="{0170BEE5-D6FB-472D-BA55-AE3D89FC7766}"/>
               </a:ext>
             </a:extLst>
           </p:cNvPr>
@@ -7307,7 +7809,7 @@
           <p:cNvPr id="20" name="grid-h-112">
             <a:extLst xmlns:a="http://schemas.openxmlformats.org/drawingml/2006/main">
               <a:ext uri="{FF2B5EF4-FFF2-40B4-BE49-F238E27FC236}">
-                <a16:creationId xmlns:a16="http://schemas.microsoft.com/office/drawing/2014/main" id="{159A5223-DC02-4247-8C26-5E0BA37C8588}"/>
+                <a16:creationId xmlns:a16="http://schemas.microsoft.com/office/drawing/2014/main" id="{84C8036A-4AEB-4C56-A093-0BF78EC1F798}"/>
               </a:ext>
             </a:extLst>
           </p:cNvPr>
@@ -7338,7 +7840,7 @@
           <p:cNvPr id="21" name="grid-h-176">
             <a:extLst xmlns:a="http://schemas.openxmlformats.org/drawingml/2006/main">
               <a:ext uri="{FF2B5EF4-FFF2-40B4-BE49-F238E27FC236}">
-                <a16:creationId xmlns:a16="http://schemas.microsoft.com/office/drawing/2014/main" id="{57FA03F4-9D98-4A79-BFAB-0B2F95323852}"/>
+                <a16:creationId xmlns:a16="http://schemas.microsoft.com/office/drawing/2014/main" id="{D5DF61D1-1F31-4504-AD8D-EFF3DE70FCA5}"/>
               </a:ext>
             </a:extLst>
           </p:cNvPr>
@@ -7369,7 +7871,7 @@
           <p:cNvPr id="22" name="grid-h-240">
             <a:extLst xmlns:a="http://schemas.openxmlformats.org/drawingml/2006/main">
               <a:ext uri="{FF2B5EF4-FFF2-40B4-BE49-F238E27FC236}">
-                <a16:creationId xmlns:a16="http://schemas.microsoft.com/office/drawing/2014/main" id="{D0A6510B-5D54-441F-81CF-3B8F200E8C79}"/>
+                <a16:creationId xmlns:a16="http://schemas.microsoft.com/office/drawing/2014/main" id="{CEE0142A-E98B-48BC-9C77-05D17278F3DD}"/>
               </a:ext>
             </a:extLst>
           </p:cNvPr>
@@ -7400,7 +7902,7 @@
           <p:cNvPr id="23" name="grid-h-304">
             <a:extLst xmlns:a="http://schemas.openxmlformats.org/drawingml/2006/main">
               <a:ext uri="{FF2B5EF4-FFF2-40B4-BE49-F238E27FC236}">
-                <a16:creationId xmlns:a16="http://schemas.microsoft.com/office/drawing/2014/main" id="{E01E04FC-4D74-4390-BA1C-E42B66D9D377}"/>
+                <a16:creationId xmlns:a16="http://schemas.microsoft.com/office/drawing/2014/main" id="{98F0A885-ADA7-4D90-B459-04416E3BC6CE}"/>
               </a:ext>
             </a:extLst>
           </p:cNvPr>
@@ -7431,7 +7933,7 @@
           <p:cNvPr id="24" name="grid-h-368">
             <a:extLst xmlns:a="http://schemas.openxmlformats.org/drawingml/2006/main">
               <a:ext uri="{FF2B5EF4-FFF2-40B4-BE49-F238E27FC236}">
-                <a16:creationId xmlns:a16="http://schemas.microsoft.com/office/drawing/2014/main" id="{E31A449B-ADAA-4D42-873C-A5FD9D459994}"/>
+                <a16:creationId xmlns:a16="http://schemas.microsoft.com/office/drawing/2014/main" id="{6E2FD44C-5B29-44FF-9A13-E6B934E18738}"/>
               </a:ext>
             </a:extLst>
           </p:cNvPr>
@@ -7462,7 +7964,7 @@
           <p:cNvPr id="25" name="grid-h-432">
             <a:extLst xmlns:a="http://schemas.openxmlformats.org/drawingml/2006/main">
               <a:ext uri="{FF2B5EF4-FFF2-40B4-BE49-F238E27FC236}">
-                <a16:creationId xmlns:a16="http://schemas.microsoft.com/office/drawing/2014/main" id="{69DCC2EE-B446-4C88-936C-7F71804E53CD}"/>
+                <a16:creationId xmlns:a16="http://schemas.microsoft.com/office/drawing/2014/main" id="{2BB87591-39AE-4F65-ABAC-6DF94C7C9F44}"/>
               </a:ext>
             </a:extLst>
           </p:cNvPr>
@@ -7493,7 +7995,7 @@
           <p:cNvPr id="26" name="grid-h-496">
             <a:extLst xmlns:a="http://schemas.openxmlformats.org/drawingml/2006/main">
               <a:ext uri="{FF2B5EF4-FFF2-40B4-BE49-F238E27FC236}">
-                <a16:creationId xmlns:a16="http://schemas.microsoft.com/office/drawing/2014/main" id="{DB252FFC-E406-4BE2-A0A5-B583BF7403CB}"/>
+                <a16:creationId xmlns:a16="http://schemas.microsoft.com/office/drawing/2014/main" id="{F5874A49-0CEC-4B3B-A3C5-8EC0405F43BF}"/>
               </a:ext>
             </a:extLst>
           </p:cNvPr>
@@ -7524,7 +8026,7 @@
           <p:cNvPr id="27" name="grid-h-560">
             <a:extLst xmlns:a="http://schemas.openxmlformats.org/drawingml/2006/main">
               <a:ext uri="{FF2B5EF4-FFF2-40B4-BE49-F238E27FC236}">
-                <a16:creationId xmlns:a16="http://schemas.microsoft.com/office/drawing/2014/main" id="{09FD6310-C0C8-43E1-A4EA-39E99C908F6D}"/>
+                <a16:creationId xmlns:a16="http://schemas.microsoft.com/office/drawing/2014/main" id="{2F22D1A5-F3D7-42F0-885B-EB07A6A9E277}"/>
               </a:ext>
             </a:extLst>
           </p:cNvPr>
@@ -7555,7 +8057,7 @@
           <p:cNvPr id="28" name="grid-h-624">
             <a:extLst xmlns:a="http://schemas.openxmlformats.org/drawingml/2006/main">
               <a:ext uri="{FF2B5EF4-FFF2-40B4-BE49-F238E27FC236}">
-                <a16:creationId xmlns:a16="http://schemas.microsoft.com/office/drawing/2014/main" id="{4B092B7C-0671-4404-BE39-92073673EF41}"/>
+                <a16:creationId xmlns:a16="http://schemas.microsoft.com/office/drawing/2014/main" id="{4C41C2B4-1C47-49E4-9201-D52BFE3F4B68}"/>
               </a:ext>
             </a:extLst>
           </p:cNvPr>
@@ -7586,7 +8088,7 @@
           <p:cNvPr id="29" name="top-rule">
             <a:extLst xmlns:a="http://schemas.openxmlformats.org/drawingml/2006/main">
               <a:ext uri="{FF2B5EF4-FFF2-40B4-BE49-F238E27FC236}">
-                <a16:creationId xmlns:a16="http://schemas.microsoft.com/office/drawing/2014/main" id="{5AFD48B5-3DFD-40CE-B159-F798E4266A14}"/>
+                <a16:creationId xmlns:a16="http://schemas.microsoft.com/office/drawing/2014/main" id="{4D4E9F6D-955C-4447-937C-E2E636814236}"/>
               </a:ext>
             </a:extLst>
           </p:cNvPr>
@@ -7617,7 +8119,7 @@
           <p:cNvPr id="30" name="wordmark">
             <a:extLst xmlns:a="http://schemas.openxmlformats.org/drawingml/2006/main">
               <a:ext uri="{FF2B5EF4-FFF2-40B4-BE49-F238E27FC236}">
-                <a16:creationId xmlns:a16="http://schemas.microsoft.com/office/drawing/2014/main" id="{DF6F55D1-F08C-49A3-B16B-3F6CE609374F}"/>
+                <a16:creationId xmlns:a16="http://schemas.microsoft.com/office/drawing/2014/main" id="{791AE2E3-02DB-4AEC-AF89-0FB85915C34F}"/>
               </a:ext>
             </a:extLst>
           </p:cNvPr>
@@ -7679,7 +8181,7 @@
           <p:cNvPr id="31" name="environment-label">
             <a:extLst xmlns:a="http://schemas.openxmlformats.org/drawingml/2006/main">
               <a:ext uri="{FF2B5EF4-FFF2-40B4-BE49-F238E27FC236}">
-                <a16:creationId xmlns:a16="http://schemas.microsoft.com/office/drawing/2014/main" id="{FCCF4965-374C-436A-B34C-F11C7AC167BF}"/>
+                <a16:creationId xmlns:a16="http://schemas.microsoft.com/office/drawing/2014/main" id="{8D21025A-90E8-409C-B554-D0437580C0FD}"/>
               </a:ext>
             </a:extLst>
           </p:cNvPr>
@@ -7731,7 +8233,7 @@
                 <a:ea typeface="Courier New"/>
                 <a:cs typeface="Courier New"/>
               </a:rPr>
-              <a:t>MONAD PROOF RAIL</a:t>
+              <a:t>PUBLIC EVIDENCE REGISTRY</a:t>
             </a:r>
           </a:p>
         </p:txBody>
@@ -7741,7 +8243,7 @@
           <p:cNvPr id="32" name="slide-index">
             <a:extLst xmlns:a="http://schemas.openxmlformats.org/drawingml/2006/main">
               <a:ext uri="{FF2B5EF4-FFF2-40B4-BE49-F238E27FC236}">
-                <a16:creationId xmlns:a16="http://schemas.microsoft.com/office/drawing/2014/main" id="{AA24880E-79EE-46FD-873B-4A09AF44E9BE}"/>
+                <a16:creationId xmlns:a16="http://schemas.microsoft.com/office/drawing/2014/main" id="{EFB789DA-D095-46C4-8488-DC867343C842}"/>
               </a:ext>
             </a:extLst>
           </p:cNvPr>
@@ -7803,7 +8305,7 @@
           <p:cNvPr id="33" name="event-footer">
             <a:extLst xmlns:a="http://schemas.openxmlformats.org/drawingml/2006/main">
               <a:ext uri="{FF2B5EF4-FFF2-40B4-BE49-F238E27FC236}">
-                <a16:creationId xmlns:a16="http://schemas.microsoft.com/office/drawing/2014/main" id="{068E1014-C5A2-46AB-B9AD-05332E4EEBA0}"/>
+                <a16:creationId xmlns:a16="http://schemas.microsoft.com/office/drawing/2014/main" id="{11D67114-D129-4D2A-B0E1-C35F3854DB22}"/>
               </a:ext>
             </a:extLst>
           </p:cNvPr>
@@ -7865,7 +8367,7 @@
           <p:cNvPr id="34" name="honesty-footer">
             <a:extLst xmlns:a="http://schemas.openxmlformats.org/drawingml/2006/main">
               <a:ext uri="{FF2B5EF4-FFF2-40B4-BE49-F238E27FC236}">
-                <a16:creationId xmlns:a16="http://schemas.microsoft.com/office/drawing/2014/main" id="{A39B985E-8E22-4D20-B153-C3FBF8A3133F}"/>
+                <a16:creationId xmlns:a16="http://schemas.microsoft.com/office/drawing/2014/main" id="{9C13EDD0-908E-4100-A1EC-CE794ED25057}"/>
               </a:ext>
             </a:extLst>
           </p:cNvPr>
@@ -7927,7 +8429,7 @@
           <p:cNvPr id="35" name="eyebrow">
             <a:extLst xmlns:a="http://schemas.openxmlformats.org/drawingml/2006/main">
               <a:ext uri="{FF2B5EF4-FFF2-40B4-BE49-F238E27FC236}">
-                <a16:creationId xmlns:a16="http://schemas.microsoft.com/office/drawing/2014/main" id="{52C4101C-E094-4015-A4BF-EB7C46E184ED}"/>
+                <a16:creationId xmlns:a16="http://schemas.microsoft.com/office/drawing/2014/main" id="{1D483372-6B7E-49E2-90C0-013AAE4AD50E}"/>
               </a:ext>
             </a:extLst>
           </p:cNvPr>
@@ -7979,7 +8481,7 @@
                 <a:ea typeface="Courier New"/>
                 <a:cs typeface="Courier New"/>
               </a:rPr>
-              <a:t>02 / COMMIT</a:t>
+              <a:t>02 / VERIFY</a:t>
             </a:r>
           </a:p>
         </p:txBody>
@@ -7989,7 +8491,7 @@
           <p:cNvPr id="36" name="slide-title">
             <a:extLst xmlns:a="http://schemas.openxmlformats.org/drawingml/2006/main">
               <a:ext uri="{FF2B5EF4-FFF2-40B4-BE49-F238E27FC236}">
-                <a16:creationId xmlns:a16="http://schemas.microsoft.com/office/drawing/2014/main" id="{BCA13B1A-B3C5-41A6-B863-5665A28A91D9}"/>
+                <a16:creationId xmlns:a16="http://schemas.microsoft.com/office/drawing/2014/main" id="{6D248E69-726D-42D5-8C02-6683E05BFFE0}"/>
               </a:ext>
             </a:extLst>
           </p:cNvPr>
@@ -8041,28 +8543,152 @@
                 <a:ea typeface="Arial Black"/>
                 <a:cs typeface="Arial Black"/>
               </a:rPr>
-              <a:t>COMMIT FIRST. REGISTER OFFERS SECOND.</a:t>
+              <a:t>THE PUBLIC RECORD SHOWS THE ORDER.</a:t>
             </a:r>
           </a:p>
         </p:txBody>
       </p:sp>
       <p:sp>
         <p:nvSpPr>
-          <p:cNvPr id="37" name="sequence-rail">
-            <a:extLst xmlns:a="http://schemas.openxmlformats.org/drawingml/2006/main">
-              <a:ext uri="{FF2B5EF4-FFF2-40B4-BE49-F238E27FC236}">
-                <a16:creationId xmlns:a16="http://schemas.microsoft.com/office/drawing/2014/main" id="{0EDAC86A-0982-42D3-9851-6ACF6B956BD3}"/>
-              </a:ext>
-            </a:extLst>
-          </p:cNvPr>
-          <p:cNvSpPr>
-            <a:spLocks xmlns:a="http://schemas.openxmlformats.org/drawingml/2006/main" noGrp="1"/>
-          </p:cNvSpPr>
-          <p:nvPr/>
-        </p:nvSpPr>
-        <p:spPr>
-          <a:xfrm xmlns:a="http://schemas.openxmlformats.org/drawingml/2006/main">
-            <a:off x="1009650" y="3429000"/>
+          <p:cNvPr id="37" name="registry-source">
+            <a:extLst xmlns:a="http://schemas.openxmlformats.org/drawingml/2006/main">
+              <a:ext uri="{FF2B5EF4-FFF2-40B4-BE49-F238E27FC236}">
+                <a16:creationId xmlns:a16="http://schemas.microsoft.com/office/drawing/2014/main" id="{1738EF20-56CF-4901-AA32-114B74D5017D}"/>
+              </a:ext>
+            </a:extLst>
+          </p:cNvPr>
+          <p:cNvSpPr>
+            <a:spLocks xmlns:a="http://schemas.openxmlformats.org/drawingml/2006/main" noGrp="1"/>
+          </p:cNvSpPr>
+          <p:nvPr/>
+        </p:nvSpPr>
+        <p:spPr>
+          <a:xfrm xmlns:a="http://schemas.openxmlformats.org/drawingml/2006/main">
+            <a:off x="419100" y="2266950"/>
+            <a:ext cx="6191250" cy="209550"/>
+          </a:xfrm>
+          <a:prstGeom xmlns:a="http://schemas.openxmlformats.org/drawingml/2006/main" prst="rect">
+            <a:avLst/>
+          </a:prstGeom>
+          <a:noFill xmlns:a="http://schemas.openxmlformats.org/drawingml/2006/main"/>
+          <a:ln xmlns:a="http://schemas.openxmlformats.org/drawingml/2006/main" w="0">
+            <a:noFill/>
+            <a:prstDash val="solid"/>
+          </a:ln>
+        </p:spPr>
+        <p:txBody>
+          <a:bodyPr xmlns:a="http://schemas.openxmlformats.org/drawingml/2006/main" wrap="square" lIns="0" tIns="0" rIns="0" bIns="0" anchor="t">
+            <a:noAutofit/>
+          </a:bodyPr>
+          <a:lstStyle xmlns:a="http://schemas.openxmlformats.org/drawingml/2006/main"/>
+          <a:p xmlns:a="http://schemas.openxmlformats.org/drawingml/2006/main">
+            <a:pPr algn="l">
+              <a:lnSpc>
+                <a:spcPct val="100000"/>
+              </a:lnSpc>
+              <a:buNone/>
+              <a:defRPr sz="1125" b="1">
+                <a:solidFill>
+                  <a:srgbClr val="C7F52F"/>
+                </a:solidFill>
+                <a:latin typeface="Courier New"/>
+                <a:ea typeface="Courier New"/>
+                <a:cs typeface="Courier New"/>
+              </a:defRPr>
+            </a:pPr>
+            <a:r>
+              <a:rPr sz="1125" b="1">
+                <a:solidFill>
+                  <a:srgbClr val="C7F52F"/>
+                </a:solidFill>
+                <a:latin typeface="Courier New"/>
+                <a:ea typeface="Courier New"/>
+                <a:cs typeface="Courier New"/>
+              </a:rPr>
+              <a:t>/EVIDENCE · SOURCE 246d81a · MONAD TESTNET 10143</a:t>
+            </a:r>
+          </a:p>
+        </p:txBody>
+      </p:sp>
+      <p:sp>
+        <p:nvSpPr>
+          <p:cNvPr id="38" name="registry-address">
+            <a:extLst xmlns:a="http://schemas.openxmlformats.org/drawingml/2006/main">
+              <a:ext uri="{FF2B5EF4-FFF2-40B4-BE49-F238E27FC236}">
+                <a16:creationId xmlns:a16="http://schemas.microsoft.com/office/drawing/2014/main" id="{BE24F104-16B9-4B40-8FEC-F8DE7E0AA16F}"/>
+              </a:ext>
+            </a:extLst>
+          </p:cNvPr>
+          <p:cNvSpPr>
+            <a:spLocks xmlns:a="http://schemas.openxmlformats.org/drawingml/2006/main" noGrp="1"/>
+          </p:cNvSpPr>
+          <p:nvPr/>
+        </p:nvSpPr>
+        <p:spPr>
+          <a:xfrm xmlns:a="http://schemas.openxmlformats.org/drawingml/2006/main">
+            <a:off x="6724650" y="2266950"/>
+            <a:ext cx="5067300" cy="209550"/>
+          </a:xfrm>
+          <a:prstGeom xmlns:a="http://schemas.openxmlformats.org/drawingml/2006/main" prst="rect">
+            <a:avLst/>
+          </a:prstGeom>
+          <a:noFill xmlns:a="http://schemas.openxmlformats.org/drawingml/2006/main"/>
+          <a:ln xmlns:a="http://schemas.openxmlformats.org/drawingml/2006/main" w="0">
+            <a:noFill/>
+            <a:prstDash val="solid"/>
+          </a:ln>
+        </p:spPr>
+        <p:txBody>
+          <a:bodyPr xmlns:a="http://schemas.openxmlformats.org/drawingml/2006/main" wrap="square" lIns="0" tIns="0" rIns="0" bIns="0" anchor="t">
+            <a:noAutofit/>
+          </a:bodyPr>
+          <a:lstStyle xmlns:a="http://schemas.openxmlformats.org/drawingml/2006/main"/>
+          <a:p xmlns:a="http://schemas.openxmlformats.org/drawingml/2006/main">
+            <a:pPr algn="r">
+              <a:lnSpc>
+                <a:spcPct val="100000"/>
+              </a:lnSpc>
+              <a:buNone/>
+              <a:defRPr sz="1050" b="0">
+                <a:solidFill>
+                  <a:srgbClr val="D3D1C8"/>
+                </a:solidFill>
+                <a:latin typeface="Courier New"/>
+                <a:ea typeface="Courier New"/>
+                <a:cs typeface="Courier New"/>
+              </a:defRPr>
+            </a:pPr>
+            <a:r>
+              <a:rPr sz="1050" b="0">
+                <a:solidFill>
+                  <a:srgbClr val="D3D1C8"/>
+                </a:solidFill>
+                <a:latin typeface="Courier New"/>
+                <a:ea typeface="Courier New"/>
+                <a:cs typeface="Courier New"/>
+              </a:rPr>
+              <a:t>REGISTRY 0xE1b7…b217 · DEPLOY BLOCK 52198045</a:t>
+            </a:r>
+          </a:p>
+        </p:txBody>
+      </p:sp>
+      <p:sp>
+        <p:nvSpPr>
+          <p:cNvPr id="39" name="sequence-rail">
+            <a:extLst xmlns:a="http://schemas.openxmlformats.org/drawingml/2006/main">
+              <a:ext uri="{FF2B5EF4-FFF2-40B4-BE49-F238E27FC236}">
+                <a16:creationId xmlns:a16="http://schemas.microsoft.com/office/drawing/2014/main" id="{7B349B6D-4753-489B-BB47-DDC159BD1201}"/>
+              </a:ext>
+            </a:extLst>
+          </p:cNvPr>
+          <p:cNvSpPr>
+            <a:spLocks xmlns:a="http://schemas.openxmlformats.org/drawingml/2006/main" noGrp="1"/>
+          </p:cNvSpPr>
+          <p:nvPr/>
+        </p:nvSpPr>
+        <p:spPr>
+          <a:xfrm xmlns:a="http://schemas.openxmlformats.org/drawingml/2006/main">
+            <a:off x="1009650" y="3505200"/>
             <a:ext cx="10096500" cy="0"/>
           </a:xfrm>
           <a:prstGeom xmlns:a="http://schemas.openxmlformats.org/drawingml/2006/main" prst="line">
@@ -8079,21 +8705,21 @@
       </p:sp>
       <p:sp>
         <p:nvSpPr>
-          <p:cNvPr id="38" name="step-node-0">
-            <a:extLst xmlns:a="http://schemas.openxmlformats.org/drawingml/2006/main">
-              <a:ext uri="{FF2B5EF4-FFF2-40B4-BE49-F238E27FC236}">
-                <a16:creationId xmlns:a16="http://schemas.microsoft.com/office/drawing/2014/main" id="{CF54E850-802B-47A4-B673-58C9612C7380}"/>
-              </a:ext>
-            </a:extLst>
-          </p:cNvPr>
-          <p:cNvSpPr>
-            <a:spLocks xmlns:a="http://schemas.openxmlformats.org/drawingml/2006/main" noGrp="1"/>
-          </p:cNvSpPr>
-          <p:nvPr/>
-        </p:nvSpPr>
-        <p:spPr>
-          <a:xfrm xmlns:a="http://schemas.openxmlformats.org/drawingml/2006/main">
-            <a:off x="1266825" y="3152775"/>
+          <p:cNvPr id="40" name="step-node-0">
+            <a:extLst xmlns:a="http://schemas.openxmlformats.org/drawingml/2006/main">
+              <a:ext uri="{FF2B5EF4-FFF2-40B4-BE49-F238E27FC236}">
+                <a16:creationId xmlns:a16="http://schemas.microsoft.com/office/drawing/2014/main" id="{8F85DB2E-8218-437E-948E-2B12F3895D6F}"/>
+              </a:ext>
+            </a:extLst>
+          </p:cNvPr>
+          <p:cNvSpPr>
+            <a:spLocks xmlns:a="http://schemas.openxmlformats.org/drawingml/2006/main" noGrp="1"/>
+          </p:cNvSpPr>
+          <p:nvPr/>
+        </p:nvSpPr>
+        <p:spPr>
+          <a:xfrm xmlns:a="http://schemas.openxmlformats.org/drawingml/2006/main">
+            <a:off x="1266825" y="3228975"/>
             <a:ext cx="552450" cy="552450"/>
           </a:xfrm>
           <a:prstGeom xmlns:a="http://schemas.openxmlformats.org/drawingml/2006/main" prst="ellipse">
@@ -8104,29 +8730,29 @@
           </a:solidFill>
           <a:ln xmlns:a="http://schemas.openxmlformats.org/drawingml/2006/main" w="28575">
             <a:solidFill>
-              <a:srgbClr val="F1EFE5"/>
-            </a:solidFill>
-            <a:prstDash val="solid"/>
-          </a:ln>
-        </p:spPr>
-      </p:sp>
-      <p:sp>
-        <p:nvSpPr>
-          <p:cNvPr id="39" name="step-number-0">
-            <a:extLst xmlns:a="http://schemas.openxmlformats.org/drawingml/2006/main">
-              <a:ext uri="{FF2B5EF4-FFF2-40B4-BE49-F238E27FC236}">
-                <a16:creationId xmlns:a16="http://schemas.microsoft.com/office/drawing/2014/main" id="{2C0347B9-6FCB-43FD-B868-A4521F56EE15}"/>
-              </a:ext>
-            </a:extLst>
-          </p:cNvPr>
-          <p:cNvSpPr>
-            <a:spLocks xmlns:a="http://schemas.openxmlformats.org/drawingml/2006/main" noGrp="1"/>
-          </p:cNvSpPr>
-          <p:nvPr/>
-        </p:nvSpPr>
-        <p:spPr>
-          <a:xfrm xmlns:a="http://schemas.openxmlformats.org/drawingml/2006/main">
-            <a:off x="1314450" y="3286125"/>
+              <a:srgbClr val="C7F52F"/>
+            </a:solidFill>
+            <a:prstDash val="solid"/>
+          </a:ln>
+        </p:spPr>
+      </p:sp>
+      <p:sp>
+        <p:nvSpPr>
+          <p:cNvPr id="41" name="step-number-0">
+            <a:extLst xmlns:a="http://schemas.openxmlformats.org/drawingml/2006/main">
+              <a:ext uri="{FF2B5EF4-FFF2-40B4-BE49-F238E27FC236}">
+                <a16:creationId xmlns:a16="http://schemas.microsoft.com/office/drawing/2014/main" id="{2AA2A624-9669-4B78-97DA-B70E59E9C18A}"/>
+              </a:ext>
+            </a:extLst>
+          </p:cNvPr>
+          <p:cNvSpPr>
+            <a:spLocks xmlns:a="http://schemas.openxmlformats.org/drawingml/2006/main" noGrp="1"/>
+          </p:cNvSpPr>
+          <p:nvPr/>
+        </p:nvSpPr>
+        <p:spPr>
+          <a:xfrm xmlns:a="http://schemas.openxmlformats.org/drawingml/2006/main">
+            <a:off x="1314450" y="3362325"/>
             <a:ext cx="457200" cy="266700"/>
           </a:xfrm>
           <a:prstGeom xmlns:a="http://schemas.openxmlformats.org/drawingml/2006/main" prst="rect">
@@ -8151,7 +8777,7 @@
               <a:buNone/>
               <a:defRPr sz="1350" b="1">
                 <a:solidFill>
-                  <a:srgbClr val="F1EFE5"/>
+                  <a:srgbClr val="C7F52F"/>
                 </a:solidFill>
                 <a:latin typeface="Courier New"/>
                 <a:ea typeface="Courier New"/>
@@ -8161,7 +8787,7 @@
             <a:r>
               <a:rPr sz="1350" b="1">
                 <a:solidFill>
-                  <a:srgbClr val="F1EFE5"/>
+                  <a:srgbClr val="C7F52F"/>
                 </a:solidFill>
                 <a:latin typeface="Courier New"/>
                 <a:ea typeface="Courier New"/>
@@ -8174,21 +8800,21 @@
       </p:sp>
       <p:sp>
         <p:nvSpPr>
-          <p:cNvPr id="40" name="step-title-0">
-            <a:extLst xmlns:a="http://schemas.openxmlformats.org/drawingml/2006/main">
-              <a:ext uri="{FF2B5EF4-FFF2-40B4-BE49-F238E27FC236}">
-                <a16:creationId xmlns:a16="http://schemas.microsoft.com/office/drawing/2014/main" id="{C934EF04-244A-4422-B68A-E2C277C0E0B1}"/>
-              </a:ext>
-            </a:extLst>
-          </p:cNvPr>
-          <p:cNvSpPr>
-            <a:spLocks xmlns:a="http://schemas.openxmlformats.org/drawingml/2006/main" noGrp="1"/>
-          </p:cNvSpPr>
-          <p:nvPr/>
-        </p:nvSpPr>
-        <p:spPr>
-          <a:xfrm xmlns:a="http://schemas.openxmlformats.org/drawingml/2006/main">
-            <a:off x="723900" y="3943350"/>
+          <p:cNvPr id="42" name="step-title-0">
+            <a:extLst xmlns:a="http://schemas.openxmlformats.org/drawingml/2006/main">
+              <a:ext uri="{FF2B5EF4-FFF2-40B4-BE49-F238E27FC236}">
+                <a16:creationId xmlns:a16="http://schemas.microsoft.com/office/drawing/2014/main" id="{4E21F968-8F9F-42E4-835B-2D54E84DE9BD}"/>
+              </a:ext>
+            </a:extLst>
+          </p:cNvPr>
+          <p:cNvSpPr>
+            <a:spLocks xmlns:a="http://schemas.openxmlformats.org/drawingml/2006/main" noGrp="1"/>
+          </p:cNvSpPr>
+          <p:nvPr/>
+        </p:nvSpPr>
+        <p:spPr>
+          <a:xfrm xmlns:a="http://schemas.openxmlformats.org/drawingml/2006/main">
+            <a:off x="723900" y="4019550"/>
             <a:ext cx="1638300" cy="342900"/>
           </a:xfrm>
           <a:prstGeom xmlns:a="http://schemas.openxmlformats.org/drawingml/2006/main" prst="rect">
@@ -8213,7 +8839,7 @@
               <a:buNone/>
               <a:defRPr sz="2025" b="1">
                 <a:solidFill>
-                  <a:srgbClr val="F1EFE5"/>
+                  <a:srgbClr val="C7F52F"/>
                 </a:solidFill>
                 <a:latin typeface="Arial Black"/>
                 <a:ea typeface="Arial Black"/>
@@ -8223,34 +8849,34 @@
             <a:r>
               <a:rPr sz="2025" b="1">
                 <a:solidFill>
-                  <a:srgbClr val="F1EFE5"/>
+                  <a:srgbClr val="C7F52F"/>
                 </a:solidFill>
                 <a:latin typeface="Arial Black"/>
                 <a:ea typeface="Arial Black"/>
                 <a:cs typeface="Arial Black"/>
               </a:rPr>
-              <a:t>RESERVE</a:t>
+              <a:t>COMMIT</a:t>
             </a:r>
           </a:p>
         </p:txBody>
       </p:sp>
       <p:sp>
         <p:nvSpPr>
-          <p:cNvPr id="41" name="step-sub-0">
-            <a:extLst xmlns:a="http://schemas.openxmlformats.org/drawingml/2006/main">
-              <a:ext uri="{FF2B5EF4-FFF2-40B4-BE49-F238E27FC236}">
-                <a16:creationId xmlns:a16="http://schemas.microsoft.com/office/drawing/2014/main" id="{17BB4153-3EFB-4096-9337-BB4FAA7105E1}"/>
-              </a:ext>
-            </a:extLst>
-          </p:cNvPr>
-          <p:cNvSpPr>
-            <a:spLocks xmlns:a="http://schemas.openxmlformats.org/drawingml/2006/main" noGrp="1"/>
-          </p:cNvSpPr>
-          <p:nvPr/>
-        </p:nvSpPr>
-        <p:spPr>
-          <a:xfrm xmlns:a="http://schemas.openxmlformats.org/drawingml/2006/main">
-            <a:off x="723900" y="4371975"/>
+          <p:cNvPr id="43" name="step-sub-0">
+            <a:extLst xmlns:a="http://schemas.openxmlformats.org/drawingml/2006/main">
+              <a:ext uri="{FF2B5EF4-FFF2-40B4-BE49-F238E27FC236}">
+                <a16:creationId xmlns:a16="http://schemas.microsoft.com/office/drawing/2014/main" id="{B1854A60-54A3-4699-9B51-57AC3FAB3C73}"/>
+              </a:ext>
+            </a:extLst>
+          </p:cNvPr>
+          <p:cNvSpPr>
+            <a:spLocks xmlns:a="http://schemas.openxmlformats.org/drawingml/2006/main" noGrp="1"/>
+          </p:cNvSpPr>
+          <p:nvPr/>
+        </p:nvSpPr>
+        <p:spPr>
+          <a:xfrm xmlns:a="http://schemas.openxmlformats.org/drawingml/2006/main">
+            <a:off x="723900" y="4448175"/>
             <a:ext cx="1638300" cy="209550"/>
           </a:xfrm>
           <a:prstGeom xmlns:a="http://schemas.openxmlformats.org/drawingml/2006/main" prst="rect">
@@ -8273,7 +8899,7 @@
                 <a:spcPct val="100000"/>
               </a:lnSpc>
               <a:buNone/>
-              <a:defRPr sz="1275" b="0">
+              <a:defRPr sz="1125" b="0">
                 <a:solidFill>
                   <a:srgbClr val="858B84"/>
                 </a:solidFill>
@@ -8283,7 +8909,7 @@
               </a:defRPr>
             </a:pPr>
             <a:r>
-              <a:rPr sz="1275" b="0">
+              <a:rPr sz="1125" b="0">
                 <a:solidFill>
                   <a:srgbClr val="858B84"/>
                 </a:solidFill>
@@ -8291,28 +8917,28 @@
                 <a:ea typeface="Courier New"/>
                 <a:cs typeface="Courier New"/>
               </a:rPr>
-              <a:t>$5,748 fixture</a:t>
+              <a:t>block 52198213</a:t>
             </a:r>
           </a:p>
         </p:txBody>
       </p:sp>
       <p:sp>
         <p:nvSpPr>
-          <p:cNvPr id="42" name="step-node-1">
-            <a:extLst xmlns:a="http://schemas.openxmlformats.org/drawingml/2006/main">
-              <a:ext uri="{FF2B5EF4-FFF2-40B4-BE49-F238E27FC236}">
-                <a16:creationId xmlns:a16="http://schemas.microsoft.com/office/drawing/2014/main" id="{73A06E06-732E-4C13-8748-C9CDF8F40D37}"/>
-              </a:ext>
-            </a:extLst>
-          </p:cNvPr>
-          <p:cNvSpPr>
-            <a:spLocks xmlns:a="http://schemas.openxmlformats.org/drawingml/2006/main" noGrp="1"/>
-          </p:cNvSpPr>
-          <p:nvPr/>
-        </p:nvSpPr>
-        <p:spPr>
-          <a:xfrm xmlns:a="http://schemas.openxmlformats.org/drawingml/2006/main">
-            <a:off x="3876675" y="3152775"/>
+          <p:cNvPr id="44" name="step-node-1">
+            <a:extLst xmlns:a="http://schemas.openxmlformats.org/drawingml/2006/main">
+              <a:ext uri="{FF2B5EF4-FFF2-40B4-BE49-F238E27FC236}">
+                <a16:creationId xmlns:a16="http://schemas.microsoft.com/office/drawing/2014/main" id="{9A680A2C-1D5A-4756-9E38-85A064422BA1}"/>
+              </a:ext>
+            </a:extLst>
+          </p:cNvPr>
+          <p:cNvSpPr>
+            <a:spLocks xmlns:a="http://schemas.openxmlformats.org/drawingml/2006/main" noGrp="1"/>
+          </p:cNvSpPr>
+          <p:nvPr/>
+        </p:nvSpPr>
+        <p:spPr>
+          <a:xfrm xmlns:a="http://schemas.openxmlformats.org/drawingml/2006/main">
+            <a:off x="3876675" y="3228975"/>
             <a:ext cx="552450" cy="552450"/>
           </a:xfrm>
           <a:prstGeom xmlns:a="http://schemas.openxmlformats.org/drawingml/2006/main" prst="ellipse">
@@ -8323,29 +8949,29 @@
           </a:solidFill>
           <a:ln xmlns:a="http://schemas.openxmlformats.org/drawingml/2006/main" w="28575">
             <a:solidFill>
-              <a:srgbClr val="C7F52F"/>
-            </a:solidFill>
-            <a:prstDash val="solid"/>
-          </a:ln>
-        </p:spPr>
-      </p:sp>
-      <p:sp>
-        <p:nvSpPr>
-          <p:cNvPr id="43" name="step-number-1">
-            <a:extLst xmlns:a="http://schemas.openxmlformats.org/drawingml/2006/main">
-              <a:ext uri="{FF2B5EF4-FFF2-40B4-BE49-F238E27FC236}">
-                <a16:creationId xmlns:a16="http://schemas.microsoft.com/office/drawing/2014/main" id="{D187B837-D886-4C19-B3AC-85224287446E}"/>
-              </a:ext>
-            </a:extLst>
-          </p:cNvPr>
-          <p:cNvSpPr>
-            <a:spLocks xmlns:a="http://schemas.openxmlformats.org/drawingml/2006/main" noGrp="1"/>
-          </p:cNvSpPr>
-          <p:nvPr/>
-        </p:nvSpPr>
-        <p:spPr>
-          <a:xfrm xmlns:a="http://schemas.openxmlformats.org/drawingml/2006/main">
-            <a:off x="3924300" y="3286125"/>
+              <a:srgbClr val="F1EFE5"/>
+            </a:solidFill>
+            <a:prstDash val="solid"/>
+          </a:ln>
+        </p:spPr>
+      </p:sp>
+      <p:sp>
+        <p:nvSpPr>
+          <p:cNvPr id="45" name="step-number-1">
+            <a:extLst xmlns:a="http://schemas.openxmlformats.org/drawingml/2006/main">
+              <a:ext uri="{FF2B5EF4-FFF2-40B4-BE49-F238E27FC236}">
+                <a16:creationId xmlns:a16="http://schemas.microsoft.com/office/drawing/2014/main" id="{3784D419-C60B-40FD-A66E-F28F66D6EBAF}"/>
+              </a:ext>
+            </a:extLst>
+          </p:cNvPr>
+          <p:cNvSpPr>
+            <a:spLocks xmlns:a="http://schemas.openxmlformats.org/drawingml/2006/main" noGrp="1"/>
+          </p:cNvSpPr>
+          <p:nvPr/>
+        </p:nvSpPr>
+        <p:spPr>
+          <a:xfrm xmlns:a="http://schemas.openxmlformats.org/drawingml/2006/main">
+            <a:off x="3924300" y="3362325"/>
             <a:ext cx="457200" cy="266700"/>
           </a:xfrm>
           <a:prstGeom xmlns:a="http://schemas.openxmlformats.org/drawingml/2006/main" prst="rect">
@@ -8370,7 +8996,7 @@
               <a:buNone/>
               <a:defRPr sz="1350" b="1">
                 <a:solidFill>
-                  <a:srgbClr val="C7F52F"/>
+                  <a:srgbClr val="F1EFE5"/>
                 </a:solidFill>
                 <a:latin typeface="Courier New"/>
                 <a:ea typeface="Courier New"/>
@@ -8380,7 +9006,7 @@
             <a:r>
               <a:rPr sz="1350" b="1">
                 <a:solidFill>
-                  <a:srgbClr val="C7F52F"/>
+                  <a:srgbClr val="F1EFE5"/>
                 </a:solidFill>
                 <a:latin typeface="Courier New"/>
                 <a:ea typeface="Courier New"/>
@@ -8393,21 +9019,459 @@
       </p:sp>
       <p:sp>
         <p:nvSpPr>
-          <p:cNvPr id="44" name="step-title-1">
-            <a:extLst xmlns:a="http://schemas.openxmlformats.org/drawingml/2006/main">
-              <a:ext uri="{FF2B5EF4-FFF2-40B4-BE49-F238E27FC236}">
-                <a16:creationId xmlns:a16="http://schemas.microsoft.com/office/drawing/2014/main" id="{1E7E7CDF-711D-4DB4-A292-CF56B6E261DC}"/>
-              </a:ext>
-            </a:extLst>
-          </p:cNvPr>
-          <p:cNvSpPr>
-            <a:spLocks xmlns:a="http://schemas.openxmlformats.org/drawingml/2006/main" noGrp="1"/>
-          </p:cNvSpPr>
-          <p:nvPr/>
-        </p:nvSpPr>
-        <p:spPr>
-          <a:xfrm xmlns:a="http://schemas.openxmlformats.org/drawingml/2006/main">
-            <a:off x="3333750" y="3943350"/>
+          <p:cNvPr id="46" name="step-title-1">
+            <a:extLst xmlns:a="http://schemas.openxmlformats.org/drawingml/2006/main">
+              <a:ext uri="{FF2B5EF4-FFF2-40B4-BE49-F238E27FC236}">
+                <a16:creationId xmlns:a16="http://schemas.microsoft.com/office/drawing/2014/main" id="{3841B5DF-CC6E-4355-B63F-56B607635B99}"/>
+              </a:ext>
+            </a:extLst>
+          </p:cNvPr>
+          <p:cNvSpPr>
+            <a:spLocks xmlns:a="http://schemas.openxmlformats.org/drawingml/2006/main" noGrp="1"/>
+          </p:cNvSpPr>
+          <p:nvPr/>
+        </p:nvSpPr>
+        <p:spPr>
+          <a:xfrm xmlns:a="http://schemas.openxmlformats.org/drawingml/2006/main">
+            <a:off x="3333750" y="4019550"/>
+            <a:ext cx="1638300" cy="342900"/>
+          </a:xfrm>
+          <a:prstGeom xmlns:a="http://schemas.openxmlformats.org/drawingml/2006/main" prst="rect">
+            <a:avLst/>
+          </a:prstGeom>
+          <a:noFill xmlns:a="http://schemas.openxmlformats.org/drawingml/2006/main"/>
+          <a:ln xmlns:a="http://schemas.openxmlformats.org/drawingml/2006/main" w="0">
+            <a:noFill/>
+            <a:prstDash val="solid"/>
+          </a:ln>
+        </p:spPr>
+        <p:txBody>
+          <a:bodyPr xmlns:a="http://schemas.openxmlformats.org/drawingml/2006/main" wrap="square" lIns="0" tIns="0" rIns="0" bIns="0" anchor="t">
+            <a:noAutofit/>
+          </a:bodyPr>
+          <a:lstStyle xmlns:a="http://schemas.openxmlformats.org/drawingml/2006/main"/>
+          <a:p xmlns:a="http://schemas.openxmlformats.org/drawingml/2006/main">
+            <a:pPr algn="ctr">
+              <a:lnSpc>
+                <a:spcPct val="100000"/>
+              </a:lnSpc>
+              <a:buNone/>
+              <a:defRPr sz="1575" b="1">
+                <a:solidFill>
+                  <a:srgbClr val="F1EFE5"/>
+                </a:solidFill>
+                <a:latin typeface="Arial Black"/>
+                <a:ea typeface="Arial Black"/>
+                <a:cs typeface="Arial Black"/>
+              </a:defRPr>
+            </a:pPr>
+            <a:r>
+              <a:rPr sz="1575" b="1">
+                <a:solidFill>
+                  <a:srgbClr val="F1EFE5"/>
+                </a:solidFill>
+                <a:latin typeface="Arial Black"/>
+                <a:ea typeface="Arial Black"/>
+                <a:cs typeface="Arial Black"/>
+              </a:rPr>
+              <a:t>REGISTER</a:t>
+            </a:r>
+          </a:p>
+        </p:txBody>
+      </p:sp>
+      <p:sp>
+        <p:nvSpPr>
+          <p:cNvPr id="47" name="step-sub-1">
+            <a:extLst xmlns:a="http://schemas.openxmlformats.org/drawingml/2006/main">
+              <a:ext uri="{FF2B5EF4-FFF2-40B4-BE49-F238E27FC236}">
+                <a16:creationId xmlns:a16="http://schemas.microsoft.com/office/drawing/2014/main" id="{1D7CC96B-B346-4753-9584-299A5A1CB761}"/>
+              </a:ext>
+            </a:extLst>
+          </p:cNvPr>
+          <p:cNvSpPr>
+            <a:spLocks xmlns:a="http://schemas.openxmlformats.org/drawingml/2006/main" noGrp="1"/>
+          </p:cNvSpPr>
+          <p:nvPr/>
+        </p:nvSpPr>
+        <p:spPr>
+          <a:xfrm xmlns:a="http://schemas.openxmlformats.org/drawingml/2006/main">
+            <a:off x="3333750" y="4448175"/>
+            <a:ext cx="1638300" cy="209550"/>
+          </a:xfrm>
+          <a:prstGeom xmlns:a="http://schemas.openxmlformats.org/drawingml/2006/main" prst="rect">
+            <a:avLst/>
+          </a:prstGeom>
+          <a:noFill xmlns:a="http://schemas.openxmlformats.org/drawingml/2006/main"/>
+          <a:ln xmlns:a="http://schemas.openxmlformats.org/drawingml/2006/main" w="0">
+            <a:noFill/>
+            <a:prstDash val="solid"/>
+          </a:ln>
+        </p:spPr>
+        <p:txBody>
+          <a:bodyPr xmlns:a="http://schemas.openxmlformats.org/drawingml/2006/main" wrap="square" lIns="0" tIns="0" rIns="0" bIns="0" anchor="t">
+            <a:noAutofit/>
+          </a:bodyPr>
+          <a:lstStyle xmlns:a="http://schemas.openxmlformats.org/drawingml/2006/main"/>
+          <a:p xmlns:a="http://schemas.openxmlformats.org/drawingml/2006/main">
+            <a:pPr algn="ctr">
+              <a:lnSpc>
+                <a:spcPct val="100000"/>
+              </a:lnSpc>
+              <a:buNone/>
+              <a:defRPr sz="1125" b="0">
+                <a:solidFill>
+                  <a:srgbClr val="858B84"/>
+                </a:solidFill>
+                <a:latin typeface="Courier New"/>
+                <a:ea typeface="Courier New"/>
+                <a:cs typeface="Courier New"/>
+              </a:defRPr>
+            </a:pPr>
+            <a:r>
+              <a:rPr sz="1125" b="0">
+                <a:solidFill>
+                  <a:srgbClr val="858B84"/>
+                </a:solidFill>
+                <a:latin typeface="Courier New"/>
+                <a:ea typeface="Courier New"/>
+                <a:cs typeface="Courier New"/>
+              </a:rPr>
+              <a:t>6 finalized offers</a:t>
+            </a:r>
+          </a:p>
+        </p:txBody>
+      </p:sp>
+      <p:sp>
+        <p:nvSpPr>
+          <p:cNvPr id="48" name="step-node-2">
+            <a:extLst xmlns:a="http://schemas.openxmlformats.org/drawingml/2006/main">
+              <a:ext uri="{FF2B5EF4-FFF2-40B4-BE49-F238E27FC236}">
+                <a16:creationId xmlns:a16="http://schemas.microsoft.com/office/drawing/2014/main" id="{C41084BE-3B25-4364-BA99-19369CADD614}"/>
+              </a:ext>
+            </a:extLst>
+          </p:cNvPr>
+          <p:cNvSpPr>
+            <a:spLocks xmlns:a="http://schemas.openxmlformats.org/drawingml/2006/main" noGrp="1"/>
+          </p:cNvSpPr>
+          <p:nvPr/>
+        </p:nvSpPr>
+        <p:spPr>
+          <a:xfrm xmlns:a="http://schemas.openxmlformats.org/drawingml/2006/main">
+            <a:off x="6486525" y="3228975"/>
+            <a:ext cx="552450" cy="552450"/>
+          </a:xfrm>
+          <a:prstGeom xmlns:a="http://schemas.openxmlformats.org/drawingml/2006/main" prst="ellipse">
+            <a:avLst/>
+          </a:prstGeom>
+          <a:solidFill xmlns:a="http://schemas.openxmlformats.org/drawingml/2006/main">
+            <a:srgbClr val="080A09"/>
+          </a:solidFill>
+          <a:ln xmlns:a="http://schemas.openxmlformats.org/drawingml/2006/main" w="28575">
+            <a:solidFill>
+              <a:srgbClr val="FF2B79"/>
+            </a:solidFill>
+            <a:prstDash val="solid"/>
+          </a:ln>
+        </p:spPr>
+      </p:sp>
+      <p:sp>
+        <p:nvSpPr>
+          <p:cNvPr id="49" name="step-number-2">
+            <a:extLst xmlns:a="http://schemas.openxmlformats.org/drawingml/2006/main">
+              <a:ext uri="{FF2B5EF4-FFF2-40B4-BE49-F238E27FC236}">
+                <a16:creationId xmlns:a16="http://schemas.microsoft.com/office/drawing/2014/main" id="{5EE14929-86C3-4564-B57A-86459F829469}"/>
+              </a:ext>
+            </a:extLst>
+          </p:cNvPr>
+          <p:cNvSpPr>
+            <a:spLocks xmlns:a="http://schemas.openxmlformats.org/drawingml/2006/main" noGrp="1"/>
+          </p:cNvSpPr>
+          <p:nvPr/>
+        </p:nvSpPr>
+        <p:spPr>
+          <a:xfrm xmlns:a="http://schemas.openxmlformats.org/drawingml/2006/main">
+            <a:off x="6534150" y="3362325"/>
+            <a:ext cx="457200" cy="266700"/>
+          </a:xfrm>
+          <a:prstGeom xmlns:a="http://schemas.openxmlformats.org/drawingml/2006/main" prst="rect">
+            <a:avLst/>
+          </a:prstGeom>
+          <a:noFill xmlns:a="http://schemas.openxmlformats.org/drawingml/2006/main"/>
+          <a:ln xmlns:a="http://schemas.openxmlformats.org/drawingml/2006/main" w="0">
+            <a:noFill/>
+            <a:prstDash val="solid"/>
+          </a:ln>
+        </p:spPr>
+        <p:txBody>
+          <a:bodyPr xmlns:a="http://schemas.openxmlformats.org/drawingml/2006/main" wrap="square" lIns="0" tIns="0" rIns="0" bIns="0" anchor="t">
+            <a:noAutofit/>
+          </a:bodyPr>
+          <a:lstStyle xmlns:a="http://schemas.openxmlformats.org/drawingml/2006/main"/>
+          <a:p xmlns:a="http://schemas.openxmlformats.org/drawingml/2006/main">
+            <a:pPr algn="ctr">
+              <a:lnSpc>
+                <a:spcPct val="100000"/>
+              </a:lnSpc>
+              <a:buNone/>
+              <a:defRPr sz="1350" b="1">
+                <a:solidFill>
+                  <a:srgbClr val="FF2B79"/>
+                </a:solidFill>
+                <a:latin typeface="Courier New"/>
+                <a:ea typeface="Courier New"/>
+                <a:cs typeface="Courier New"/>
+              </a:defRPr>
+            </a:pPr>
+            <a:r>
+              <a:rPr sz="1350" b="1">
+                <a:solidFill>
+                  <a:srgbClr val="FF2B79"/>
+                </a:solidFill>
+                <a:latin typeface="Courier New"/>
+                <a:ea typeface="Courier New"/>
+                <a:cs typeface="Courier New"/>
+              </a:rPr>
+              <a:t>03</a:t>
+            </a:r>
+          </a:p>
+        </p:txBody>
+      </p:sp>
+      <p:sp>
+        <p:nvSpPr>
+          <p:cNvPr id="50" name="step-title-2">
+            <a:extLst xmlns:a="http://schemas.openxmlformats.org/drawingml/2006/main">
+              <a:ext uri="{FF2B5EF4-FFF2-40B4-BE49-F238E27FC236}">
+                <a16:creationId xmlns:a16="http://schemas.microsoft.com/office/drawing/2014/main" id="{28D168D0-0015-4716-8BAF-61C42B3B9F33}"/>
+              </a:ext>
+            </a:extLst>
+          </p:cNvPr>
+          <p:cNvSpPr>
+            <a:spLocks xmlns:a="http://schemas.openxmlformats.org/drawingml/2006/main" noGrp="1"/>
+          </p:cNvSpPr>
+          <p:nvPr/>
+        </p:nvSpPr>
+        <p:spPr>
+          <a:xfrm xmlns:a="http://schemas.openxmlformats.org/drawingml/2006/main">
+            <a:off x="5943600" y="4019550"/>
+            <a:ext cx="1638300" cy="342900"/>
+          </a:xfrm>
+          <a:prstGeom xmlns:a="http://schemas.openxmlformats.org/drawingml/2006/main" prst="rect">
+            <a:avLst/>
+          </a:prstGeom>
+          <a:noFill xmlns:a="http://schemas.openxmlformats.org/drawingml/2006/main"/>
+          <a:ln xmlns:a="http://schemas.openxmlformats.org/drawingml/2006/main" w="0">
+            <a:noFill/>
+            <a:prstDash val="solid"/>
+          </a:ln>
+        </p:spPr>
+        <p:txBody>
+          <a:bodyPr xmlns:a="http://schemas.openxmlformats.org/drawingml/2006/main" wrap="square" lIns="0" tIns="0" rIns="0" bIns="0" anchor="t">
+            <a:noAutofit/>
+          </a:bodyPr>
+          <a:lstStyle xmlns:a="http://schemas.openxmlformats.org/drawingml/2006/main"/>
+          <a:p xmlns:a="http://schemas.openxmlformats.org/drawingml/2006/main">
+            <a:pPr algn="ctr">
+              <a:lnSpc>
+                <a:spcPct val="100000"/>
+              </a:lnSpc>
+              <a:buNone/>
+              <a:defRPr sz="1575" b="1">
+                <a:solidFill>
+                  <a:srgbClr val="FF2B79"/>
+                </a:solidFill>
+                <a:latin typeface="Arial Black"/>
+                <a:ea typeface="Arial Black"/>
+                <a:cs typeface="Arial Black"/>
+              </a:defRPr>
+            </a:pPr>
+            <a:r>
+              <a:rPr sz="1575" b="1">
+                <a:solidFill>
+                  <a:srgbClr val="FF2B79"/>
+                </a:solidFill>
+                <a:latin typeface="Arial Black"/>
+                <a:ea typeface="Arial Black"/>
+                <a:cs typeface="Arial Black"/>
+              </a:rPr>
+              <a:t>RAIN IDS</a:t>
+            </a:r>
+          </a:p>
+        </p:txBody>
+      </p:sp>
+      <p:sp>
+        <p:nvSpPr>
+          <p:cNvPr id="51" name="step-sub-2">
+            <a:extLst xmlns:a="http://schemas.openxmlformats.org/drawingml/2006/main">
+              <a:ext uri="{FF2B5EF4-FFF2-40B4-BE49-F238E27FC236}">
+                <a16:creationId xmlns:a16="http://schemas.microsoft.com/office/drawing/2014/main" id="{7E68092B-1441-40A2-B8B4-80240890152E}"/>
+              </a:ext>
+            </a:extLst>
+          </p:cNvPr>
+          <p:cNvSpPr>
+            <a:spLocks xmlns:a="http://schemas.openxmlformats.org/drawingml/2006/main" noGrp="1"/>
+          </p:cNvSpPr>
+          <p:nvPr/>
+        </p:nvSpPr>
+        <p:spPr>
+          <a:xfrm xmlns:a="http://schemas.openxmlformats.org/drawingml/2006/main">
+            <a:off x="5943600" y="4448175"/>
+            <a:ext cx="1638300" cy="209550"/>
+          </a:xfrm>
+          <a:prstGeom xmlns:a="http://schemas.openxmlformats.org/drawingml/2006/main" prst="rect">
+            <a:avLst/>
+          </a:prstGeom>
+          <a:noFill xmlns:a="http://schemas.openxmlformats.org/drawingml/2006/main"/>
+          <a:ln xmlns:a="http://schemas.openxmlformats.org/drawingml/2006/main" w="0">
+            <a:noFill/>
+            <a:prstDash val="solid"/>
+          </a:ln>
+        </p:spPr>
+        <p:txBody>
+          <a:bodyPr xmlns:a="http://schemas.openxmlformats.org/drawingml/2006/main" wrap="square" lIns="0" tIns="0" rIns="0" bIns="0" anchor="t">
+            <a:noAutofit/>
+          </a:bodyPr>
+          <a:lstStyle xmlns:a="http://schemas.openxmlformats.org/drawingml/2006/main"/>
+          <a:p xmlns:a="http://schemas.openxmlformats.org/drawingml/2006/main">
+            <a:pPr algn="ctr">
+              <a:lnSpc>
+                <a:spcPct val="100000"/>
+              </a:lnSpc>
+              <a:buNone/>
+              <a:defRPr sz="1125" b="0">
+                <a:solidFill>
+                  <a:srgbClr val="858B84"/>
+                </a:solidFill>
+                <a:latin typeface="Courier New"/>
+                <a:ea typeface="Courier New"/>
+                <a:cs typeface="Courier New"/>
+              </a:defRPr>
+            </a:pPr>
+            <a:r>
+              <a:rPr sz="1125" b="0">
+                <a:solidFill>
+                  <a:srgbClr val="858B84"/>
+                </a:solidFill>
+                <a:latin typeface="Courier New"/>
+                <a:ea typeface="Courier New"/>
+                <a:cs typeface="Courier New"/>
+              </a:rPr>
+              <a:t>3-id digest</a:t>
+            </a:r>
+          </a:p>
+        </p:txBody>
+      </p:sp>
+      <p:sp>
+        <p:nvSpPr>
+          <p:cNvPr id="52" name="step-node-3">
+            <a:extLst xmlns:a="http://schemas.openxmlformats.org/drawingml/2006/main">
+              <a:ext uri="{FF2B5EF4-FFF2-40B4-BE49-F238E27FC236}">
+                <a16:creationId xmlns:a16="http://schemas.microsoft.com/office/drawing/2014/main" id="{E4091DED-E396-41AE-942A-0272D62A3600}"/>
+              </a:ext>
+            </a:extLst>
+          </p:cNvPr>
+          <p:cNvSpPr>
+            <a:spLocks xmlns:a="http://schemas.openxmlformats.org/drawingml/2006/main" noGrp="1"/>
+          </p:cNvSpPr>
+          <p:nvPr/>
+        </p:nvSpPr>
+        <p:spPr>
+          <a:xfrm xmlns:a="http://schemas.openxmlformats.org/drawingml/2006/main">
+            <a:off x="9096375" y="3228975"/>
+            <a:ext cx="552450" cy="552450"/>
+          </a:xfrm>
+          <a:prstGeom xmlns:a="http://schemas.openxmlformats.org/drawingml/2006/main" prst="ellipse">
+            <a:avLst/>
+          </a:prstGeom>
+          <a:solidFill xmlns:a="http://schemas.openxmlformats.org/drawingml/2006/main">
+            <a:srgbClr val="080A09"/>
+          </a:solidFill>
+          <a:ln xmlns:a="http://schemas.openxmlformats.org/drawingml/2006/main" w="28575">
+            <a:solidFill>
+              <a:srgbClr val="C7F52F"/>
+            </a:solidFill>
+            <a:prstDash val="solid"/>
+          </a:ln>
+        </p:spPr>
+      </p:sp>
+      <p:sp>
+        <p:nvSpPr>
+          <p:cNvPr id="53" name="step-number-3">
+            <a:extLst xmlns:a="http://schemas.openxmlformats.org/drawingml/2006/main">
+              <a:ext uri="{FF2B5EF4-FFF2-40B4-BE49-F238E27FC236}">
+                <a16:creationId xmlns:a16="http://schemas.microsoft.com/office/drawing/2014/main" id="{3C61F244-EF0C-4730-8E5B-5C5B25A06A7A}"/>
+              </a:ext>
+            </a:extLst>
+          </p:cNvPr>
+          <p:cNvSpPr>
+            <a:spLocks xmlns:a="http://schemas.openxmlformats.org/drawingml/2006/main" noGrp="1"/>
+          </p:cNvSpPr>
+          <p:nvPr/>
+        </p:nvSpPr>
+        <p:spPr>
+          <a:xfrm xmlns:a="http://schemas.openxmlformats.org/drawingml/2006/main">
+            <a:off x="9144000" y="3362325"/>
+            <a:ext cx="457200" cy="266700"/>
+          </a:xfrm>
+          <a:prstGeom xmlns:a="http://schemas.openxmlformats.org/drawingml/2006/main" prst="rect">
+            <a:avLst/>
+          </a:prstGeom>
+          <a:noFill xmlns:a="http://schemas.openxmlformats.org/drawingml/2006/main"/>
+          <a:ln xmlns:a="http://schemas.openxmlformats.org/drawingml/2006/main" w="0">
+            <a:noFill/>
+            <a:prstDash val="solid"/>
+          </a:ln>
+        </p:spPr>
+        <p:txBody>
+          <a:bodyPr xmlns:a="http://schemas.openxmlformats.org/drawingml/2006/main" wrap="square" lIns="0" tIns="0" rIns="0" bIns="0" anchor="t">
+            <a:noAutofit/>
+          </a:bodyPr>
+          <a:lstStyle xmlns:a="http://schemas.openxmlformats.org/drawingml/2006/main"/>
+          <a:p xmlns:a="http://schemas.openxmlformats.org/drawingml/2006/main">
+            <a:pPr algn="ctr">
+              <a:lnSpc>
+                <a:spcPct val="100000"/>
+              </a:lnSpc>
+              <a:buNone/>
+              <a:defRPr sz="1350" b="1">
+                <a:solidFill>
+                  <a:srgbClr val="C7F52F"/>
+                </a:solidFill>
+                <a:latin typeface="Courier New"/>
+                <a:ea typeface="Courier New"/>
+                <a:cs typeface="Courier New"/>
+              </a:defRPr>
+            </a:pPr>
+            <a:r>
+              <a:rPr sz="1350" b="1">
+                <a:solidFill>
+                  <a:srgbClr val="C7F52F"/>
+                </a:solidFill>
+                <a:latin typeface="Courier New"/>
+                <a:ea typeface="Courier New"/>
+                <a:cs typeface="Courier New"/>
+              </a:rPr>
+              <a:t>04</a:t>
+            </a:r>
+          </a:p>
+        </p:txBody>
+      </p:sp>
+      <p:sp>
+        <p:nvSpPr>
+          <p:cNvPr id="54" name="step-title-3">
+            <a:extLst xmlns:a="http://schemas.openxmlformats.org/drawingml/2006/main">
+              <a:ext uri="{FF2B5EF4-FFF2-40B4-BE49-F238E27FC236}">
+                <a16:creationId xmlns:a16="http://schemas.microsoft.com/office/drawing/2014/main" id="{3173BC1F-6D3B-40E6-ABBA-C54F17477F45}"/>
+              </a:ext>
+            </a:extLst>
+          </p:cNvPr>
+          <p:cNvSpPr>
+            <a:spLocks xmlns:a="http://schemas.openxmlformats.org/drawingml/2006/main" noGrp="1"/>
+          </p:cNvSpPr>
+          <p:nvPr/>
+        </p:nvSpPr>
+        <p:spPr>
+          <a:xfrm xmlns:a="http://schemas.openxmlformats.org/drawingml/2006/main">
+            <a:off x="8553450" y="4019550"/>
             <a:ext cx="1638300" cy="342900"/>
           </a:xfrm>
           <a:prstGeom xmlns:a="http://schemas.openxmlformats.org/drawingml/2006/main" prst="rect">
@@ -8448,28 +9512,28 @@
                 <a:ea typeface="Arial Black"/>
                 <a:cs typeface="Arial Black"/>
               </a:rPr>
-              <a:t>COMMIT</a:t>
+              <a:t>ATTEST</a:t>
             </a:r>
           </a:p>
         </p:txBody>
       </p:sp>
       <p:sp>
         <p:nvSpPr>
-          <p:cNvPr id="45" name="step-sub-1">
-            <a:extLst xmlns:a="http://schemas.openxmlformats.org/drawingml/2006/main">
-              <a:ext uri="{FF2B5EF4-FFF2-40B4-BE49-F238E27FC236}">
-                <a16:creationId xmlns:a16="http://schemas.microsoft.com/office/drawing/2014/main" id="{DD9F4FCB-06C1-47E3-81A4-214576CE27E0}"/>
-              </a:ext>
-            </a:extLst>
-          </p:cNvPr>
-          <p:cNvSpPr>
-            <a:spLocks xmlns:a="http://schemas.openxmlformats.org/drawingml/2006/main" noGrp="1"/>
-          </p:cNvSpPr>
-          <p:nvPr/>
-        </p:nvSpPr>
-        <p:spPr>
-          <a:xfrm xmlns:a="http://schemas.openxmlformats.org/drawingml/2006/main">
-            <a:off x="3333750" y="4371975"/>
+          <p:cNvPr id="55" name="step-sub-3">
+            <a:extLst xmlns:a="http://schemas.openxmlformats.org/drawingml/2006/main">
+              <a:ext uri="{FF2B5EF4-FFF2-40B4-BE49-F238E27FC236}">
+                <a16:creationId xmlns:a16="http://schemas.microsoft.com/office/drawing/2014/main" id="{01A4DA61-4E34-4A49-9642-986F8A34838B}"/>
+              </a:ext>
+            </a:extLst>
+          </p:cNvPr>
+          <p:cNvSpPr>
+            <a:spLocks xmlns:a="http://schemas.openxmlformats.org/drawingml/2006/main" noGrp="1"/>
+          </p:cNvSpPr>
+          <p:nvPr/>
+        </p:nvSpPr>
+        <p:spPr>
+          <a:xfrm xmlns:a="http://schemas.openxmlformats.org/drawingml/2006/main">
+            <a:off x="8553450" y="4448175"/>
             <a:ext cx="1638300" cy="209550"/>
           </a:xfrm>
           <a:prstGeom xmlns:a="http://schemas.openxmlformats.org/drawingml/2006/main" prst="rect">
@@ -8492,7 +9556,7 @@
                 <a:spcPct val="100000"/>
               </a:lnSpc>
               <a:buNone/>
-              <a:defRPr sz="1275" b="0">
+              <a:defRPr sz="1125" b="0">
                 <a:solidFill>
                   <a:srgbClr val="858B84"/>
                 </a:solidFill>
@@ -8502,7 +9566,7 @@
               </a:defRPr>
             </a:pPr>
             <a:r>
-              <a:rPr sz="1275" b="0">
+              <a:rPr sz="1125" b="0">
                 <a:solidFill>
                   <a:srgbClr val="858B84"/>
                 </a:solidFill>
@@ -8510,466 +9574,28 @@
                 <a:ea typeface="Courier New"/>
                 <a:cs typeface="Courier New"/>
               </a:rPr>
-              <a:t>root + terms</a:t>
+              <a:t>block 52198437</a:t>
             </a:r>
           </a:p>
         </p:txBody>
       </p:sp>
       <p:sp>
         <p:nvSpPr>
-          <p:cNvPr id="46" name="step-node-2">
-            <a:extLst xmlns:a="http://schemas.openxmlformats.org/drawingml/2006/main">
-              <a:ext uri="{FF2B5EF4-FFF2-40B4-BE49-F238E27FC236}">
-                <a16:creationId xmlns:a16="http://schemas.microsoft.com/office/drawing/2014/main" id="{5B8FE609-3A0C-4590-B318-39984E5D5C89}"/>
-              </a:ext>
-            </a:extLst>
-          </p:cNvPr>
-          <p:cNvSpPr>
-            <a:spLocks xmlns:a="http://schemas.openxmlformats.org/drawingml/2006/main" noGrp="1"/>
-          </p:cNvSpPr>
-          <p:nvPr/>
-        </p:nvSpPr>
-        <p:spPr>
-          <a:xfrm xmlns:a="http://schemas.openxmlformats.org/drawingml/2006/main">
-            <a:off x="6486525" y="3152775"/>
-            <a:ext cx="552450" cy="552450"/>
-          </a:xfrm>
-          <a:prstGeom xmlns:a="http://schemas.openxmlformats.org/drawingml/2006/main" prst="ellipse">
-            <a:avLst/>
-          </a:prstGeom>
-          <a:solidFill xmlns:a="http://schemas.openxmlformats.org/drawingml/2006/main">
-            <a:srgbClr val="080A09"/>
-          </a:solidFill>
-          <a:ln xmlns:a="http://schemas.openxmlformats.org/drawingml/2006/main" w="28575">
-            <a:solidFill>
-              <a:srgbClr val="F1EFE5"/>
-            </a:solidFill>
-            <a:prstDash val="solid"/>
-          </a:ln>
-        </p:spPr>
-      </p:sp>
-      <p:sp>
-        <p:nvSpPr>
-          <p:cNvPr id="47" name="step-number-2">
-            <a:extLst xmlns:a="http://schemas.openxmlformats.org/drawingml/2006/main">
-              <a:ext uri="{FF2B5EF4-FFF2-40B4-BE49-F238E27FC236}">
-                <a16:creationId xmlns:a16="http://schemas.microsoft.com/office/drawing/2014/main" id="{FD40CA5B-F6BB-4A71-8D9A-9A7E7B023C66}"/>
-              </a:ext>
-            </a:extLst>
-          </p:cNvPr>
-          <p:cNvSpPr>
-            <a:spLocks xmlns:a="http://schemas.openxmlformats.org/drawingml/2006/main" noGrp="1"/>
-          </p:cNvSpPr>
-          <p:nvPr/>
-        </p:nvSpPr>
-        <p:spPr>
-          <a:xfrm xmlns:a="http://schemas.openxmlformats.org/drawingml/2006/main">
-            <a:off x="6534150" y="3286125"/>
-            <a:ext cx="457200" cy="266700"/>
-          </a:xfrm>
-          <a:prstGeom xmlns:a="http://schemas.openxmlformats.org/drawingml/2006/main" prst="rect">
-            <a:avLst/>
-          </a:prstGeom>
-          <a:noFill xmlns:a="http://schemas.openxmlformats.org/drawingml/2006/main"/>
-          <a:ln xmlns:a="http://schemas.openxmlformats.org/drawingml/2006/main" w="0">
-            <a:noFill/>
-            <a:prstDash val="solid"/>
-          </a:ln>
-        </p:spPr>
-        <p:txBody>
-          <a:bodyPr xmlns:a="http://schemas.openxmlformats.org/drawingml/2006/main" wrap="square" lIns="0" tIns="0" rIns="0" bIns="0" anchor="t">
-            <a:noAutofit/>
-          </a:bodyPr>
-          <a:lstStyle xmlns:a="http://schemas.openxmlformats.org/drawingml/2006/main"/>
-          <a:p xmlns:a="http://schemas.openxmlformats.org/drawingml/2006/main">
-            <a:pPr algn="ctr">
-              <a:lnSpc>
-                <a:spcPct val="100000"/>
-              </a:lnSpc>
-              <a:buNone/>
-              <a:defRPr sz="1350" b="1">
-                <a:solidFill>
-                  <a:srgbClr val="F1EFE5"/>
-                </a:solidFill>
-                <a:latin typeface="Courier New"/>
-                <a:ea typeface="Courier New"/>
-                <a:cs typeface="Courier New"/>
-              </a:defRPr>
-            </a:pPr>
-            <a:r>
-              <a:rPr sz="1350" b="1">
-                <a:solidFill>
-                  <a:srgbClr val="F1EFE5"/>
-                </a:solidFill>
-                <a:latin typeface="Courier New"/>
-                <a:ea typeface="Courier New"/>
-                <a:cs typeface="Courier New"/>
-              </a:rPr>
-              <a:t>03</a:t>
-            </a:r>
-          </a:p>
-        </p:txBody>
-      </p:sp>
-      <p:sp>
-        <p:nvSpPr>
-          <p:cNvPr id="48" name="step-title-2">
-            <a:extLst xmlns:a="http://schemas.openxmlformats.org/drawingml/2006/main">
-              <a:ext uri="{FF2B5EF4-FFF2-40B4-BE49-F238E27FC236}">
-                <a16:creationId xmlns:a16="http://schemas.microsoft.com/office/drawing/2014/main" id="{C4D51273-8235-474D-A0AB-F5A17BDC3AFA}"/>
-              </a:ext>
-            </a:extLst>
-          </p:cNvPr>
-          <p:cNvSpPr>
-            <a:spLocks xmlns:a="http://schemas.openxmlformats.org/drawingml/2006/main" noGrp="1"/>
-          </p:cNvSpPr>
-          <p:nvPr/>
-        </p:nvSpPr>
-        <p:spPr>
-          <a:xfrm xmlns:a="http://schemas.openxmlformats.org/drawingml/2006/main">
-            <a:off x="5943600" y="3943350"/>
-            <a:ext cx="1638300" cy="342900"/>
-          </a:xfrm>
-          <a:prstGeom xmlns:a="http://schemas.openxmlformats.org/drawingml/2006/main" prst="rect">
-            <a:avLst/>
-          </a:prstGeom>
-          <a:noFill xmlns:a="http://schemas.openxmlformats.org/drawingml/2006/main"/>
-          <a:ln xmlns:a="http://schemas.openxmlformats.org/drawingml/2006/main" w="0">
-            <a:noFill/>
-            <a:prstDash val="solid"/>
-          </a:ln>
-        </p:spPr>
-        <p:txBody>
-          <a:bodyPr xmlns:a="http://schemas.openxmlformats.org/drawingml/2006/main" wrap="square" lIns="0" tIns="0" rIns="0" bIns="0" anchor="t">
-            <a:noAutofit/>
-          </a:bodyPr>
-          <a:lstStyle xmlns:a="http://schemas.openxmlformats.org/drawingml/2006/main"/>
-          <a:p xmlns:a="http://schemas.openxmlformats.org/drawingml/2006/main">
-            <a:pPr algn="ctr">
-              <a:lnSpc>
-                <a:spcPct val="100000"/>
-              </a:lnSpc>
-              <a:buNone/>
-              <a:defRPr sz="1725" b="1">
-                <a:solidFill>
-                  <a:srgbClr val="F1EFE5"/>
-                </a:solidFill>
-                <a:latin typeface="Arial Black"/>
-                <a:ea typeface="Arial Black"/>
-                <a:cs typeface="Arial Black"/>
-              </a:defRPr>
-            </a:pPr>
-            <a:r>
-              <a:rPr sz="1725" b="1">
-                <a:solidFill>
-                  <a:srgbClr val="F1EFE5"/>
-                </a:solidFill>
-                <a:latin typeface="Arial Black"/>
-                <a:ea typeface="Arial Black"/>
-                <a:cs typeface="Arial Black"/>
-              </a:rPr>
-              <a:t>REGISTER</a:t>
-            </a:r>
-          </a:p>
-        </p:txBody>
-      </p:sp>
-      <p:sp>
-        <p:nvSpPr>
-          <p:cNvPr id="49" name="step-sub-2">
-            <a:extLst xmlns:a="http://schemas.openxmlformats.org/drawingml/2006/main">
-              <a:ext uri="{FF2B5EF4-FFF2-40B4-BE49-F238E27FC236}">
-                <a16:creationId xmlns:a16="http://schemas.microsoft.com/office/drawing/2014/main" id="{F8AA5D08-8EB4-4214-91C8-A666866A809E}"/>
-              </a:ext>
-            </a:extLst>
-          </p:cNvPr>
-          <p:cNvSpPr>
-            <a:spLocks xmlns:a="http://schemas.openxmlformats.org/drawingml/2006/main" noGrp="1"/>
-          </p:cNvSpPr>
-          <p:nvPr/>
-        </p:nvSpPr>
-        <p:spPr>
-          <a:xfrm xmlns:a="http://schemas.openxmlformats.org/drawingml/2006/main">
-            <a:off x="5943600" y="4371975"/>
-            <a:ext cx="1638300" cy="209550"/>
-          </a:xfrm>
-          <a:prstGeom xmlns:a="http://schemas.openxmlformats.org/drawingml/2006/main" prst="rect">
-            <a:avLst/>
-          </a:prstGeom>
-          <a:noFill xmlns:a="http://schemas.openxmlformats.org/drawingml/2006/main"/>
-          <a:ln xmlns:a="http://schemas.openxmlformats.org/drawingml/2006/main" w="0">
-            <a:noFill/>
-            <a:prstDash val="solid"/>
-          </a:ln>
-        </p:spPr>
-        <p:txBody>
-          <a:bodyPr xmlns:a="http://schemas.openxmlformats.org/drawingml/2006/main" wrap="square" lIns="0" tIns="0" rIns="0" bIns="0" anchor="t">
-            <a:noAutofit/>
-          </a:bodyPr>
-          <a:lstStyle xmlns:a="http://schemas.openxmlformats.org/drawingml/2006/main"/>
-          <a:p xmlns:a="http://schemas.openxmlformats.org/drawingml/2006/main">
-            <a:pPr algn="ctr">
-              <a:lnSpc>
-                <a:spcPct val="100000"/>
-              </a:lnSpc>
-              <a:buNone/>
-              <a:defRPr sz="1275" b="0">
-                <a:solidFill>
-                  <a:srgbClr val="858B84"/>
-                </a:solidFill>
-                <a:latin typeface="Courier New"/>
-                <a:ea typeface="Courier New"/>
-                <a:cs typeface="Courier New"/>
-              </a:defRPr>
-            </a:pPr>
-            <a:r>
-              <a:rPr sz="1275" b="0">
-                <a:solidFill>
-                  <a:srgbClr val="858B84"/>
-                </a:solidFill>
-                <a:latin typeface="Courier New"/>
-                <a:ea typeface="Courier New"/>
-                <a:cs typeface="Courier New"/>
-              </a:rPr>
-              <a:t>offer hash set</a:t>
-            </a:r>
-          </a:p>
-        </p:txBody>
-      </p:sp>
-      <p:sp>
-        <p:nvSpPr>
-          <p:cNvPr id="50" name="step-node-3">
-            <a:extLst xmlns:a="http://schemas.openxmlformats.org/drawingml/2006/main">
-              <a:ext uri="{FF2B5EF4-FFF2-40B4-BE49-F238E27FC236}">
-                <a16:creationId xmlns:a16="http://schemas.microsoft.com/office/drawing/2014/main" id="{A760D3FE-3E29-4422-BCE7-FD1D3BB12AC8}"/>
-              </a:ext>
-            </a:extLst>
-          </p:cNvPr>
-          <p:cNvSpPr>
-            <a:spLocks xmlns:a="http://schemas.openxmlformats.org/drawingml/2006/main" noGrp="1"/>
-          </p:cNvSpPr>
-          <p:nvPr/>
-        </p:nvSpPr>
-        <p:spPr>
-          <a:xfrm xmlns:a="http://schemas.openxmlformats.org/drawingml/2006/main">
-            <a:off x="9096375" y="3152775"/>
-            <a:ext cx="552450" cy="552450"/>
-          </a:xfrm>
-          <a:prstGeom xmlns:a="http://schemas.openxmlformats.org/drawingml/2006/main" prst="ellipse">
-            <a:avLst/>
-          </a:prstGeom>
-          <a:solidFill xmlns:a="http://schemas.openxmlformats.org/drawingml/2006/main">
-            <a:srgbClr val="080A09"/>
-          </a:solidFill>
-          <a:ln xmlns:a="http://schemas.openxmlformats.org/drawingml/2006/main" w="28575">
-            <a:solidFill>
-              <a:srgbClr val="FF2B79"/>
-            </a:solidFill>
-            <a:prstDash val="solid"/>
-          </a:ln>
-        </p:spPr>
-      </p:sp>
-      <p:sp>
-        <p:nvSpPr>
-          <p:cNvPr id="51" name="step-number-3">
-            <a:extLst xmlns:a="http://schemas.openxmlformats.org/drawingml/2006/main">
-              <a:ext uri="{FF2B5EF4-FFF2-40B4-BE49-F238E27FC236}">
-                <a16:creationId xmlns:a16="http://schemas.microsoft.com/office/drawing/2014/main" id="{EC62AFA1-163F-4D45-B49E-C5CF7750D1F9}"/>
-              </a:ext>
-            </a:extLst>
-          </p:cNvPr>
-          <p:cNvSpPr>
-            <a:spLocks xmlns:a="http://schemas.openxmlformats.org/drawingml/2006/main" noGrp="1"/>
-          </p:cNvSpPr>
-          <p:nvPr/>
-        </p:nvSpPr>
-        <p:spPr>
-          <a:xfrm xmlns:a="http://schemas.openxmlformats.org/drawingml/2006/main">
-            <a:off x="9144000" y="3286125"/>
-            <a:ext cx="457200" cy="266700"/>
-          </a:xfrm>
-          <a:prstGeom xmlns:a="http://schemas.openxmlformats.org/drawingml/2006/main" prst="rect">
-            <a:avLst/>
-          </a:prstGeom>
-          <a:noFill xmlns:a="http://schemas.openxmlformats.org/drawingml/2006/main"/>
-          <a:ln xmlns:a="http://schemas.openxmlformats.org/drawingml/2006/main" w="0">
-            <a:noFill/>
-            <a:prstDash val="solid"/>
-          </a:ln>
-        </p:spPr>
-        <p:txBody>
-          <a:bodyPr xmlns:a="http://schemas.openxmlformats.org/drawingml/2006/main" wrap="square" lIns="0" tIns="0" rIns="0" bIns="0" anchor="t">
-            <a:noAutofit/>
-          </a:bodyPr>
-          <a:lstStyle xmlns:a="http://schemas.openxmlformats.org/drawingml/2006/main"/>
-          <a:p xmlns:a="http://schemas.openxmlformats.org/drawingml/2006/main">
-            <a:pPr algn="ctr">
-              <a:lnSpc>
-                <a:spcPct val="100000"/>
-              </a:lnSpc>
-              <a:buNone/>
-              <a:defRPr sz="1350" b="1">
-                <a:solidFill>
-                  <a:srgbClr val="FF2B79"/>
-                </a:solidFill>
-                <a:latin typeface="Courier New"/>
-                <a:ea typeface="Courier New"/>
-                <a:cs typeface="Courier New"/>
-              </a:defRPr>
-            </a:pPr>
-            <a:r>
-              <a:rPr sz="1350" b="1">
-                <a:solidFill>
-                  <a:srgbClr val="FF2B79"/>
-                </a:solidFill>
-                <a:latin typeface="Courier New"/>
-                <a:ea typeface="Courier New"/>
-                <a:cs typeface="Courier New"/>
-              </a:rPr>
-              <a:t>04</a:t>
-            </a:r>
-          </a:p>
-        </p:txBody>
-      </p:sp>
-      <p:sp>
-        <p:nvSpPr>
-          <p:cNvPr id="52" name="step-title-3">
-            <a:extLst xmlns:a="http://schemas.openxmlformats.org/drawingml/2006/main">
-              <a:ext uri="{FF2B5EF4-FFF2-40B4-BE49-F238E27FC236}">
-                <a16:creationId xmlns:a16="http://schemas.microsoft.com/office/drawing/2014/main" id="{8BD4F706-2269-43BA-959D-BE46A3661556}"/>
-              </a:ext>
-            </a:extLst>
-          </p:cNvPr>
-          <p:cNvSpPr>
-            <a:spLocks xmlns:a="http://schemas.openxmlformats.org/drawingml/2006/main" noGrp="1"/>
-          </p:cNvSpPr>
-          <p:nvPr/>
-        </p:nvSpPr>
-        <p:spPr>
-          <a:xfrm xmlns:a="http://schemas.openxmlformats.org/drawingml/2006/main">
-            <a:off x="8553450" y="3943350"/>
-            <a:ext cx="1638300" cy="342900"/>
-          </a:xfrm>
-          <a:prstGeom xmlns:a="http://schemas.openxmlformats.org/drawingml/2006/main" prst="rect">
-            <a:avLst/>
-          </a:prstGeom>
-          <a:noFill xmlns:a="http://schemas.openxmlformats.org/drawingml/2006/main"/>
-          <a:ln xmlns:a="http://schemas.openxmlformats.org/drawingml/2006/main" w="0">
-            <a:noFill/>
-            <a:prstDash val="solid"/>
-          </a:ln>
-        </p:spPr>
-        <p:txBody>
-          <a:bodyPr xmlns:a="http://schemas.openxmlformats.org/drawingml/2006/main" wrap="square" lIns="0" tIns="0" rIns="0" bIns="0" anchor="t">
-            <a:noAutofit/>
-          </a:bodyPr>
-          <a:lstStyle xmlns:a="http://schemas.openxmlformats.org/drawingml/2006/main"/>
-          <a:p xmlns:a="http://schemas.openxmlformats.org/drawingml/2006/main">
-            <a:pPr algn="ctr">
-              <a:lnSpc>
-                <a:spcPct val="100000"/>
-              </a:lnSpc>
-              <a:buNone/>
-              <a:defRPr sz="2025" b="1">
-                <a:solidFill>
-                  <a:srgbClr val="FF2B79"/>
-                </a:solidFill>
-                <a:latin typeface="Arial Black"/>
-                <a:ea typeface="Arial Black"/>
-                <a:cs typeface="Arial Black"/>
-              </a:defRPr>
-            </a:pPr>
-            <a:r>
-              <a:rPr sz="2025" b="1">
-                <a:solidFill>
-                  <a:srgbClr val="FF2B79"/>
-                </a:solidFill>
-                <a:latin typeface="Arial Black"/>
-                <a:ea typeface="Arial Black"/>
-                <a:cs typeface="Arial Black"/>
-              </a:rPr>
-              <a:t>ATTEST</a:t>
-            </a:r>
-          </a:p>
-        </p:txBody>
-      </p:sp>
-      <p:sp>
-        <p:nvSpPr>
-          <p:cNvPr id="53" name="step-sub-3">
-            <a:extLst xmlns:a="http://schemas.openxmlformats.org/drawingml/2006/main">
-              <a:ext uri="{FF2B5EF4-FFF2-40B4-BE49-F238E27FC236}">
-                <a16:creationId xmlns:a16="http://schemas.microsoft.com/office/drawing/2014/main" id="{900F50C2-63C0-418E-8BA9-0CFFC5E7B8E9}"/>
-              </a:ext>
-            </a:extLst>
-          </p:cNvPr>
-          <p:cNvSpPr>
-            <a:spLocks xmlns:a="http://schemas.openxmlformats.org/drawingml/2006/main" noGrp="1"/>
-          </p:cNvSpPr>
-          <p:nvPr/>
-        </p:nvSpPr>
-        <p:spPr>
-          <a:xfrm xmlns:a="http://schemas.openxmlformats.org/drawingml/2006/main">
-            <a:off x="8553450" y="4371975"/>
-            <a:ext cx="1638300" cy="209550"/>
-          </a:xfrm>
-          <a:prstGeom xmlns:a="http://schemas.openxmlformats.org/drawingml/2006/main" prst="rect">
-            <a:avLst/>
-          </a:prstGeom>
-          <a:noFill xmlns:a="http://schemas.openxmlformats.org/drawingml/2006/main"/>
-          <a:ln xmlns:a="http://schemas.openxmlformats.org/drawingml/2006/main" w="0">
-            <a:noFill/>
-            <a:prstDash val="solid"/>
-          </a:ln>
-        </p:spPr>
-        <p:txBody>
-          <a:bodyPr xmlns:a="http://schemas.openxmlformats.org/drawingml/2006/main" wrap="square" lIns="0" tIns="0" rIns="0" bIns="0" anchor="t">
-            <a:noAutofit/>
-          </a:bodyPr>
-          <a:lstStyle xmlns:a="http://schemas.openxmlformats.org/drawingml/2006/main"/>
-          <a:p xmlns:a="http://schemas.openxmlformats.org/drawingml/2006/main">
-            <a:pPr algn="ctr">
-              <a:lnSpc>
-                <a:spcPct val="100000"/>
-              </a:lnSpc>
-              <a:buNone/>
-              <a:defRPr sz="1275" b="0">
-                <a:solidFill>
-                  <a:srgbClr val="858B84"/>
-                </a:solidFill>
-                <a:latin typeface="Courier New"/>
-                <a:ea typeface="Courier New"/>
-                <a:cs typeface="Courier New"/>
-              </a:defRPr>
-            </a:pPr>
-            <a:r>
-              <a:rPr sz="1275" b="0">
-                <a:solidFill>
-                  <a:srgbClr val="858B84"/>
-                </a:solidFill>
-                <a:latin typeface="Courier New"/>
-                <a:ea typeface="Courier New"/>
-                <a:cs typeface="Courier New"/>
-              </a:rPr>
-              <a:t>winner + IDs</a:t>
-            </a:r>
-          </a:p>
-        </p:txBody>
-      </p:sp>
-      <p:sp>
-        <p:nvSpPr>
-          <p:cNvPr id="54" name="commit-bracket-tl-h">
-            <a:extLst xmlns:a="http://schemas.openxmlformats.org/drawingml/2006/main">
-              <a:ext uri="{FF2B5EF4-FFF2-40B4-BE49-F238E27FC236}">
-                <a16:creationId xmlns:a16="http://schemas.microsoft.com/office/drawing/2014/main" id="{75B8DC5E-0D21-46A6-AE5C-B2BCACAD84DB}"/>
-              </a:ext>
-            </a:extLst>
-          </p:cNvPr>
-          <p:cNvSpPr>
-            <a:spLocks xmlns:a="http://schemas.openxmlformats.org/drawingml/2006/main" noGrp="1"/>
-          </p:cNvSpPr>
-          <p:nvPr/>
-        </p:nvSpPr>
-        <p:spPr>
-          <a:xfrm xmlns:a="http://schemas.openxmlformats.org/drawingml/2006/main">
-            <a:off x="3257550" y="2686050"/>
+          <p:cNvPr id="56" name="commit-bracket-tl-h">
+            <a:extLst xmlns:a="http://schemas.openxmlformats.org/drawingml/2006/main">
+              <a:ext uri="{FF2B5EF4-FFF2-40B4-BE49-F238E27FC236}">
+                <a16:creationId xmlns:a16="http://schemas.microsoft.com/office/drawing/2014/main" id="{198D281F-1549-4965-886C-9E7A5B34EB50}"/>
+              </a:ext>
+            </a:extLst>
+          </p:cNvPr>
+          <p:cNvSpPr>
+            <a:spLocks xmlns:a="http://schemas.openxmlformats.org/drawingml/2006/main" noGrp="1"/>
+          </p:cNvSpPr>
+          <p:nvPr/>
+        </p:nvSpPr>
+        <p:spPr>
+          <a:xfrm xmlns:a="http://schemas.openxmlformats.org/drawingml/2006/main">
+            <a:off x="647700" y="2857500"/>
             <a:ext cx="152400" cy="0"/>
           </a:xfrm>
           <a:prstGeom xmlns:a="http://schemas.openxmlformats.org/drawingml/2006/main" prst="line">
@@ -8986,21 +9612,21 @@
       </p:sp>
       <p:sp>
         <p:nvSpPr>
-          <p:cNvPr id="55" name="commit-bracket-tl-v">
-            <a:extLst xmlns:a="http://schemas.openxmlformats.org/drawingml/2006/main">
-              <a:ext uri="{FF2B5EF4-FFF2-40B4-BE49-F238E27FC236}">
-                <a16:creationId xmlns:a16="http://schemas.microsoft.com/office/drawing/2014/main" id="{9A44744F-8EB0-4943-BD27-F534C7DD8FA4}"/>
-              </a:ext>
-            </a:extLst>
-          </p:cNvPr>
-          <p:cNvSpPr>
-            <a:spLocks xmlns:a="http://schemas.openxmlformats.org/drawingml/2006/main" noGrp="1"/>
-          </p:cNvSpPr>
-          <p:nvPr/>
-        </p:nvSpPr>
-        <p:spPr>
-          <a:xfrm xmlns:a="http://schemas.openxmlformats.org/drawingml/2006/main">
-            <a:off x="3257550" y="2686050"/>
+          <p:cNvPr id="57" name="commit-bracket-tl-v">
+            <a:extLst xmlns:a="http://schemas.openxmlformats.org/drawingml/2006/main">
+              <a:ext uri="{FF2B5EF4-FFF2-40B4-BE49-F238E27FC236}">
+                <a16:creationId xmlns:a16="http://schemas.microsoft.com/office/drawing/2014/main" id="{6B8AF674-BF45-469A-AF77-9A73226AFCF1}"/>
+              </a:ext>
+            </a:extLst>
+          </p:cNvPr>
+          <p:cNvSpPr>
+            <a:spLocks xmlns:a="http://schemas.openxmlformats.org/drawingml/2006/main" noGrp="1"/>
+          </p:cNvSpPr>
+          <p:nvPr/>
+        </p:nvSpPr>
+        <p:spPr>
+          <a:xfrm xmlns:a="http://schemas.openxmlformats.org/drawingml/2006/main">
+            <a:off x="647700" y="2857500"/>
             <a:ext cx="0" cy="152400"/>
           </a:xfrm>
           <a:prstGeom xmlns:a="http://schemas.openxmlformats.org/drawingml/2006/main" prst="line">
@@ -9017,21 +9643,21 @@
       </p:sp>
       <p:sp>
         <p:nvSpPr>
-          <p:cNvPr id="56" name="commit-bracket-tr-h">
-            <a:extLst xmlns:a="http://schemas.openxmlformats.org/drawingml/2006/main">
-              <a:ext uri="{FF2B5EF4-FFF2-40B4-BE49-F238E27FC236}">
-                <a16:creationId xmlns:a16="http://schemas.microsoft.com/office/drawing/2014/main" id="{3942773B-3385-4409-BB9A-7DD958773E0C}"/>
-              </a:ext>
-            </a:extLst>
-          </p:cNvPr>
-          <p:cNvSpPr>
-            <a:spLocks xmlns:a="http://schemas.openxmlformats.org/drawingml/2006/main" noGrp="1"/>
-          </p:cNvSpPr>
-          <p:nvPr/>
-        </p:nvSpPr>
-        <p:spPr>
-          <a:xfrm xmlns:a="http://schemas.openxmlformats.org/drawingml/2006/main">
-            <a:off x="4972050" y="2686050"/>
+          <p:cNvPr id="58" name="commit-bracket-tr-h">
+            <a:extLst xmlns:a="http://schemas.openxmlformats.org/drawingml/2006/main">
+              <a:ext uri="{FF2B5EF4-FFF2-40B4-BE49-F238E27FC236}">
+                <a16:creationId xmlns:a16="http://schemas.microsoft.com/office/drawing/2014/main" id="{5B123E07-3959-4479-8AE3-B49FD3E10D41}"/>
+              </a:ext>
+            </a:extLst>
+          </p:cNvPr>
+          <p:cNvSpPr>
+            <a:spLocks xmlns:a="http://schemas.openxmlformats.org/drawingml/2006/main" noGrp="1"/>
+          </p:cNvSpPr>
+          <p:nvPr/>
+        </p:nvSpPr>
+        <p:spPr>
+          <a:xfrm xmlns:a="http://schemas.openxmlformats.org/drawingml/2006/main">
+            <a:off x="4972050" y="2857500"/>
             <a:ext cx="152400" cy="0"/>
           </a:xfrm>
           <a:prstGeom xmlns:a="http://schemas.openxmlformats.org/drawingml/2006/main" prst="line">
@@ -9048,21 +9674,21 @@
       </p:sp>
       <p:sp>
         <p:nvSpPr>
-          <p:cNvPr id="57" name="commit-bracket-tr-v">
-            <a:extLst xmlns:a="http://schemas.openxmlformats.org/drawingml/2006/main">
-              <a:ext uri="{FF2B5EF4-FFF2-40B4-BE49-F238E27FC236}">
-                <a16:creationId xmlns:a16="http://schemas.microsoft.com/office/drawing/2014/main" id="{BBC8AFE1-6597-4849-BC5E-CBE329D6FC75}"/>
-              </a:ext>
-            </a:extLst>
-          </p:cNvPr>
-          <p:cNvSpPr>
-            <a:spLocks xmlns:a="http://schemas.openxmlformats.org/drawingml/2006/main" noGrp="1"/>
-          </p:cNvSpPr>
-          <p:nvPr/>
-        </p:nvSpPr>
-        <p:spPr>
-          <a:xfrm xmlns:a="http://schemas.openxmlformats.org/drawingml/2006/main">
-            <a:off x="5124450" y="2686050"/>
+          <p:cNvPr id="59" name="commit-bracket-tr-v">
+            <a:extLst xmlns:a="http://schemas.openxmlformats.org/drawingml/2006/main">
+              <a:ext uri="{FF2B5EF4-FFF2-40B4-BE49-F238E27FC236}">
+                <a16:creationId xmlns:a16="http://schemas.microsoft.com/office/drawing/2014/main" id="{C8CB8066-2D9B-430B-A6F6-64367DF4A3A9}"/>
+              </a:ext>
+            </a:extLst>
+          </p:cNvPr>
+          <p:cNvSpPr>
+            <a:spLocks xmlns:a="http://schemas.openxmlformats.org/drawingml/2006/main" noGrp="1"/>
+          </p:cNvSpPr>
+          <p:nvPr/>
+        </p:nvSpPr>
+        <p:spPr>
+          <a:xfrm xmlns:a="http://schemas.openxmlformats.org/drawingml/2006/main">
+            <a:off x="5124450" y="2857500"/>
             <a:ext cx="0" cy="152400"/>
           </a:xfrm>
           <a:prstGeom xmlns:a="http://schemas.openxmlformats.org/drawingml/2006/main" prst="line">
@@ -9079,21 +9705,21 @@
       </p:sp>
       <p:sp>
         <p:nvSpPr>
-          <p:cNvPr id="58" name="commit-bracket-bl-h">
-            <a:extLst xmlns:a="http://schemas.openxmlformats.org/drawingml/2006/main">
-              <a:ext uri="{FF2B5EF4-FFF2-40B4-BE49-F238E27FC236}">
-                <a16:creationId xmlns:a16="http://schemas.microsoft.com/office/drawing/2014/main" id="{5268DD5E-889D-40B7-BA43-938E697E213C}"/>
-              </a:ext>
-            </a:extLst>
-          </p:cNvPr>
-          <p:cNvSpPr>
-            <a:spLocks xmlns:a="http://schemas.openxmlformats.org/drawingml/2006/main" noGrp="1"/>
-          </p:cNvSpPr>
-          <p:nvPr/>
-        </p:nvSpPr>
-        <p:spPr>
-          <a:xfrm xmlns:a="http://schemas.openxmlformats.org/drawingml/2006/main">
-            <a:off x="3257550" y="4933950"/>
+          <p:cNvPr id="60" name="commit-bracket-bl-h">
+            <a:extLst xmlns:a="http://schemas.openxmlformats.org/drawingml/2006/main">
+              <a:ext uri="{FF2B5EF4-FFF2-40B4-BE49-F238E27FC236}">
+                <a16:creationId xmlns:a16="http://schemas.microsoft.com/office/drawing/2014/main" id="{A6BC37A1-AEF3-4F73-BD65-1CE021FD77B1}"/>
+              </a:ext>
+            </a:extLst>
+          </p:cNvPr>
+          <p:cNvSpPr>
+            <a:spLocks xmlns:a="http://schemas.openxmlformats.org/drawingml/2006/main" noGrp="1"/>
+          </p:cNvSpPr>
+          <p:nvPr/>
+        </p:nvSpPr>
+        <p:spPr>
+          <a:xfrm xmlns:a="http://schemas.openxmlformats.org/drawingml/2006/main">
+            <a:off x="647700" y="5029200"/>
             <a:ext cx="152400" cy="0"/>
           </a:xfrm>
           <a:prstGeom xmlns:a="http://schemas.openxmlformats.org/drawingml/2006/main" prst="line">
@@ -9110,21 +9736,21 @@
       </p:sp>
       <p:sp>
         <p:nvSpPr>
-          <p:cNvPr id="59" name="commit-bracket-bl-v">
-            <a:extLst xmlns:a="http://schemas.openxmlformats.org/drawingml/2006/main">
-              <a:ext uri="{FF2B5EF4-FFF2-40B4-BE49-F238E27FC236}">
-                <a16:creationId xmlns:a16="http://schemas.microsoft.com/office/drawing/2014/main" id="{EB932C61-13C2-45AF-8B43-0AF4679F964C}"/>
-              </a:ext>
-            </a:extLst>
-          </p:cNvPr>
-          <p:cNvSpPr>
-            <a:spLocks xmlns:a="http://schemas.openxmlformats.org/drawingml/2006/main" noGrp="1"/>
-          </p:cNvSpPr>
-          <p:nvPr/>
-        </p:nvSpPr>
-        <p:spPr>
-          <a:xfrm xmlns:a="http://schemas.openxmlformats.org/drawingml/2006/main">
-            <a:off x="3257550" y="4781550"/>
+          <p:cNvPr id="61" name="commit-bracket-bl-v">
+            <a:extLst xmlns:a="http://schemas.openxmlformats.org/drawingml/2006/main">
+              <a:ext uri="{FF2B5EF4-FFF2-40B4-BE49-F238E27FC236}">
+                <a16:creationId xmlns:a16="http://schemas.microsoft.com/office/drawing/2014/main" id="{29F4490B-67C7-414E-90EE-FAC74955C566}"/>
+              </a:ext>
+            </a:extLst>
+          </p:cNvPr>
+          <p:cNvSpPr>
+            <a:spLocks xmlns:a="http://schemas.openxmlformats.org/drawingml/2006/main" noGrp="1"/>
+          </p:cNvSpPr>
+          <p:nvPr/>
+        </p:nvSpPr>
+        <p:spPr>
+          <a:xfrm xmlns:a="http://schemas.openxmlformats.org/drawingml/2006/main">
+            <a:off x="647700" y="4876800"/>
             <a:ext cx="0" cy="152400"/>
           </a:xfrm>
           <a:prstGeom xmlns:a="http://schemas.openxmlformats.org/drawingml/2006/main" prst="line">
@@ -9141,21 +9767,21 @@
       </p:sp>
       <p:sp>
         <p:nvSpPr>
-          <p:cNvPr id="60" name="commit-bracket-br-h">
-            <a:extLst xmlns:a="http://schemas.openxmlformats.org/drawingml/2006/main">
-              <a:ext uri="{FF2B5EF4-FFF2-40B4-BE49-F238E27FC236}">
-                <a16:creationId xmlns:a16="http://schemas.microsoft.com/office/drawing/2014/main" id="{1F1A1D80-817D-4E6D-A347-F023A36D759B}"/>
-              </a:ext>
-            </a:extLst>
-          </p:cNvPr>
-          <p:cNvSpPr>
-            <a:spLocks xmlns:a="http://schemas.openxmlformats.org/drawingml/2006/main" noGrp="1"/>
-          </p:cNvSpPr>
-          <p:nvPr/>
-        </p:nvSpPr>
-        <p:spPr>
-          <a:xfrm xmlns:a="http://schemas.openxmlformats.org/drawingml/2006/main">
-            <a:off x="4972050" y="4933950"/>
+          <p:cNvPr id="62" name="commit-bracket-br-h">
+            <a:extLst xmlns:a="http://schemas.openxmlformats.org/drawingml/2006/main">
+              <a:ext uri="{FF2B5EF4-FFF2-40B4-BE49-F238E27FC236}">
+                <a16:creationId xmlns:a16="http://schemas.microsoft.com/office/drawing/2014/main" id="{30261907-3CD4-4401-A9E1-00D82CD1917E}"/>
+              </a:ext>
+            </a:extLst>
+          </p:cNvPr>
+          <p:cNvSpPr>
+            <a:spLocks xmlns:a="http://schemas.openxmlformats.org/drawingml/2006/main" noGrp="1"/>
+          </p:cNvSpPr>
+          <p:nvPr/>
+        </p:nvSpPr>
+        <p:spPr>
+          <a:xfrm xmlns:a="http://schemas.openxmlformats.org/drawingml/2006/main">
+            <a:off x="4972050" y="5029200"/>
             <a:ext cx="152400" cy="0"/>
           </a:xfrm>
           <a:prstGeom xmlns:a="http://schemas.openxmlformats.org/drawingml/2006/main" prst="line">
@@ -9172,21 +9798,21 @@
       </p:sp>
       <p:sp>
         <p:nvSpPr>
-          <p:cNvPr id="61" name="commit-bracket-br-v">
-            <a:extLst xmlns:a="http://schemas.openxmlformats.org/drawingml/2006/main">
-              <a:ext uri="{FF2B5EF4-FFF2-40B4-BE49-F238E27FC236}">
-                <a16:creationId xmlns:a16="http://schemas.microsoft.com/office/drawing/2014/main" id="{F4B8CDE2-E769-4709-8E03-A99C4D27703B}"/>
-              </a:ext>
-            </a:extLst>
-          </p:cNvPr>
-          <p:cNvSpPr>
-            <a:spLocks xmlns:a="http://schemas.openxmlformats.org/drawingml/2006/main" noGrp="1"/>
-          </p:cNvSpPr>
-          <p:nvPr/>
-        </p:nvSpPr>
-        <p:spPr>
-          <a:xfrm xmlns:a="http://schemas.openxmlformats.org/drawingml/2006/main">
-            <a:off x="5124450" y="4781550"/>
+          <p:cNvPr id="63" name="commit-bracket-br-v">
+            <a:extLst xmlns:a="http://schemas.openxmlformats.org/drawingml/2006/main">
+              <a:ext uri="{FF2B5EF4-FFF2-40B4-BE49-F238E27FC236}">
+                <a16:creationId xmlns:a16="http://schemas.microsoft.com/office/drawing/2014/main" id="{230E14A7-E7DF-48A6-82E3-ED54F6BCC1D9}"/>
+              </a:ext>
+            </a:extLst>
+          </p:cNvPr>
+          <p:cNvSpPr>
+            <a:spLocks xmlns:a="http://schemas.openxmlformats.org/drawingml/2006/main" noGrp="1"/>
+          </p:cNvSpPr>
+          <p:nvPr/>
+        </p:nvSpPr>
+        <p:spPr>
+          <a:xfrm xmlns:a="http://schemas.openxmlformats.org/drawingml/2006/main">
+            <a:off x="5124450" y="4876800"/>
             <a:ext cx="0" cy="152400"/>
           </a:xfrm>
           <a:prstGeom xmlns:a="http://schemas.openxmlformats.org/drawingml/2006/main" prst="line">
@@ -9203,111 +9829,22 @@
       </p:sp>
       <p:sp>
         <p:nvSpPr>
-          <p:cNvPr id="62" name="commit-proof">
-            <a:extLst xmlns:a="http://schemas.openxmlformats.org/drawingml/2006/main">
-              <a:ext uri="{FF2B5EF4-FFF2-40B4-BE49-F238E27FC236}">
-                <a16:creationId xmlns:a16="http://schemas.microsoft.com/office/drawing/2014/main" id="{966B790F-15DC-4C61-8824-46DABF51C80B}"/>
-              </a:ext>
-            </a:extLst>
-          </p:cNvPr>
-          <p:cNvSpPr>
-            <a:spLocks xmlns:a="http://schemas.openxmlformats.org/drawingml/2006/main" noGrp="1"/>
-          </p:cNvSpPr>
-          <p:nvPr/>
-        </p:nvSpPr>
-        <p:spPr>
-          <a:xfrm xmlns:a="http://schemas.openxmlformats.org/drawingml/2006/main">
-            <a:off x="3352800" y="4914900"/>
-            <a:ext cx="1714500" cy="495300"/>
-          </a:xfrm>
-          <a:prstGeom xmlns:a="http://schemas.openxmlformats.org/drawingml/2006/main" prst="rect">
-            <a:avLst/>
-          </a:prstGeom>
-          <a:noFill xmlns:a="http://schemas.openxmlformats.org/drawingml/2006/main"/>
-          <a:ln xmlns:a="http://schemas.openxmlformats.org/drawingml/2006/main" w="0">
-            <a:noFill/>
-            <a:prstDash val="solid"/>
-          </a:ln>
-        </p:spPr>
-        <p:txBody>
-          <a:bodyPr xmlns:a="http://schemas.openxmlformats.org/drawingml/2006/main" wrap="square" lIns="0" tIns="0" rIns="0" bIns="0" anchor="t">
-            <a:noAutofit/>
-          </a:bodyPr>
-          <a:lstStyle xmlns:a="http://schemas.openxmlformats.org/drawingml/2006/main"/>
-          <a:p xmlns:a="http://schemas.openxmlformats.org/drawingml/2006/main">
-            <a:pPr algn="ctr">
-              <a:lnSpc>
-                <a:spcPct val="92000"/>
-              </a:lnSpc>
-              <a:buNone/>
-              <a:defRPr sz="1200" b="1">
-                <a:solidFill>
-                  <a:srgbClr val="C7F52F"/>
-                </a:solidFill>
-                <a:latin typeface="Courier New"/>
-                <a:ea typeface="Courier New"/>
-                <a:cs typeface="Courier New"/>
-              </a:defRPr>
-            </a:pPr>
-            <a:r>
-              <a:rPr sz="1200" b="1">
-                <a:solidFill>
-                  <a:srgbClr val="C7F52F"/>
-                </a:solidFill>
-                <a:latin typeface="Courier New"/>
-                <a:ea typeface="Courier New"/>
-                <a:cs typeface="Courier New"/>
-              </a:rPr>
-              <a:t>FINALIZED BEFORE</a:t>
-            </a:r>
-          </a:p>
-          <a:p xmlns:a="http://schemas.openxmlformats.org/drawingml/2006/main">
-            <a:pPr algn="ctr">
-              <a:lnSpc>
-                <a:spcPct val="92000"/>
-              </a:lnSpc>
-              <a:buNone/>
-              <a:defRPr sz="1200" b="1">
-                <a:solidFill>
-                  <a:srgbClr val="C7F52F"/>
-                </a:solidFill>
-                <a:latin typeface="Courier New"/>
-                <a:ea typeface="Courier New"/>
-                <a:cs typeface="Courier New"/>
-              </a:defRPr>
-            </a:pPr>
-            <a:r>
-              <a:rPr sz="1200" b="1">
-                <a:solidFill>
-                  <a:srgbClr val="C7F52F"/>
-                </a:solidFill>
-                <a:latin typeface="Courier New"/>
-                <a:ea typeface="Courier New"/>
-                <a:cs typeface="Courier New"/>
-              </a:rPr>
-              <a:t>REGISTRATION</a:t>
-            </a:r>
-          </a:p>
-        </p:txBody>
-      </p:sp>
-      <p:sp>
-        <p:nvSpPr>
-          <p:cNvPr id="63" name="public-label">
-            <a:extLst xmlns:a="http://schemas.openxmlformats.org/drawingml/2006/main">
-              <a:ext uri="{FF2B5EF4-FFF2-40B4-BE49-F238E27FC236}">
-                <a16:creationId xmlns:a16="http://schemas.microsoft.com/office/drawing/2014/main" id="{FD4F59A6-7CCD-4E5D-8A83-15F33096922A}"/>
-              </a:ext>
-            </a:extLst>
-          </p:cNvPr>
-          <p:cNvSpPr>
-            <a:spLocks xmlns:a="http://schemas.openxmlformats.org/drawingml/2006/main" noGrp="1"/>
-          </p:cNvSpPr>
-          <p:nvPr/>
-        </p:nvSpPr>
-        <p:spPr>
-          <a:xfrm xmlns:a="http://schemas.openxmlformats.org/drawingml/2006/main">
-            <a:off x="438150" y="2324100"/>
-            <a:ext cx="1809750" cy="209550"/>
+          <p:cNvPr id="64" name="commit-proof">
+            <a:extLst xmlns:a="http://schemas.openxmlformats.org/drawingml/2006/main">
+              <a:ext uri="{FF2B5EF4-FFF2-40B4-BE49-F238E27FC236}">
+                <a16:creationId xmlns:a16="http://schemas.microsoft.com/office/drawing/2014/main" id="{5E155E2C-F567-4BE4-A6FB-BCF571AB0DBE}"/>
+              </a:ext>
+            </a:extLst>
+          </p:cNvPr>
+          <p:cNvSpPr>
+            <a:spLocks xmlns:a="http://schemas.openxmlformats.org/drawingml/2006/main" noGrp="1"/>
+          </p:cNvSpPr>
+          <p:nvPr/>
+        </p:nvSpPr>
+        <p:spPr>
+          <a:xfrm xmlns:a="http://schemas.openxmlformats.org/drawingml/2006/main">
+            <a:off x="704850" y="5095875"/>
+            <a:ext cx="5905500" cy="228600"/>
           </a:xfrm>
           <a:prstGeom xmlns:a="http://schemas.openxmlformats.org/drawingml/2006/main" prst="rect">
             <a:avLst/>
@@ -9347,29 +9884,29 @@
                 <a:ea typeface="Courier New"/>
                 <a:cs typeface="Courier New"/>
               </a:rPr>
-              <a:t>TESTNET IF VERIFIED</a:t>
+              <a:t>COMMITMENT FINALIZED BEFORE ALL SIX OFFER REGISTRATIONS</a:t>
             </a:r>
           </a:p>
         </p:txBody>
       </p:sp>
       <p:sp>
         <p:nvSpPr>
-          <p:cNvPr id="64" name="public-copy">
-            <a:extLst xmlns:a="http://schemas.openxmlformats.org/drawingml/2006/main">
-              <a:ext uri="{FF2B5EF4-FFF2-40B4-BE49-F238E27FC236}">
-                <a16:creationId xmlns:a16="http://schemas.microsoft.com/office/drawing/2014/main" id="{23CD9AD1-FBEC-441C-A1EF-6FE4C46BEFA9}"/>
-              </a:ext>
-            </a:extLst>
-          </p:cNvPr>
-          <p:cNvSpPr>
-            <a:spLocks xmlns:a="http://schemas.openxmlformats.org/drawingml/2006/main" noGrp="1"/>
-          </p:cNvSpPr>
-          <p:nvPr/>
-        </p:nvSpPr>
-        <p:spPr>
-          <a:xfrm xmlns:a="http://schemas.openxmlformats.org/drawingml/2006/main">
-            <a:off x="2343150" y="2324100"/>
-            <a:ext cx="9086850" cy="209550"/>
+          <p:cNvPr id="65" name="accepted-offer">
+            <a:extLst xmlns:a="http://schemas.openxmlformats.org/drawingml/2006/main">
+              <a:ext uri="{FF2B5EF4-FFF2-40B4-BE49-F238E27FC236}">
+                <a16:creationId xmlns:a16="http://schemas.microsoft.com/office/drawing/2014/main" id="{8D147AAA-EA33-43A0-977C-9B9A0672EF3F}"/>
+              </a:ext>
+            </a:extLst>
+          </p:cNvPr>
+          <p:cNvSpPr>
+            <a:spLocks xmlns:a="http://schemas.openxmlformats.org/drawingml/2006/main" noGrp="1"/>
+          </p:cNvSpPr>
+          <p:nvPr/>
+        </p:nvSpPr>
+        <p:spPr>
+          <a:xfrm xmlns:a="http://schemas.openxmlformats.org/drawingml/2006/main">
+            <a:off x="6953250" y="5095875"/>
+            <a:ext cx="2857500" cy="209550"/>
           </a:xfrm>
           <a:prstGeom xmlns:a="http://schemas.openxmlformats.org/drawingml/2006/main" prst="rect">
             <a:avLst/>
@@ -9386,12 +9923,169 @@
           </a:bodyPr>
           <a:lstStyle xmlns:a="http://schemas.openxmlformats.org/drawingml/2006/main"/>
           <a:p xmlns:a="http://schemas.openxmlformats.org/drawingml/2006/main">
+            <a:pPr algn="r">
+              <a:lnSpc>
+                <a:spcPct val="100000"/>
+              </a:lnSpc>
+              <a:buNone/>
+              <a:defRPr sz="975" b="0">
+                <a:solidFill>
+                  <a:srgbClr val="D3D1C8"/>
+                </a:solidFill>
+                <a:latin typeface="Courier New"/>
+                <a:ea typeface="Courier New"/>
+                <a:cs typeface="Courier New"/>
+              </a:defRPr>
+            </a:pPr>
+            <a:r>
+              <a:rPr sz="975" b="0">
+                <a:solidFill>
+                  <a:srgbClr val="D3D1C8"/>
+                </a:solidFill>
+                <a:latin typeface="Courier New"/>
+                <a:ea typeface="Courier New"/>
+                <a:cs typeface="Courier New"/>
+              </a:rPr>
+              <a:t>ACCEPTED OFFER 0xda4e…b89f</a:t>
+            </a:r>
+          </a:p>
+        </p:txBody>
+      </p:sp>
+      <p:sp>
+        <p:nvSpPr>
+          <p:cNvPr id="66" name="rain-hash">
+            <a:extLst xmlns:a="http://schemas.openxmlformats.org/drawingml/2006/main">
+              <a:ext uri="{FF2B5EF4-FFF2-40B4-BE49-F238E27FC236}">
+                <a16:creationId xmlns:a16="http://schemas.microsoft.com/office/drawing/2014/main" id="{3ADF142A-0A41-4748-AB76-CBAE0633F366}"/>
+              </a:ext>
+            </a:extLst>
+          </p:cNvPr>
+          <p:cNvSpPr>
+            <a:spLocks xmlns:a="http://schemas.openxmlformats.org/drawingml/2006/main" noGrp="1"/>
+          </p:cNvSpPr>
+          <p:nvPr/>
+        </p:nvSpPr>
+        <p:spPr>
+          <a:xfrm xmlns:a="http://schemas.openxmlformats.org/drawingml/2006/main">
+            <a:off x="9886950" y="5095875"/>
+            <a:ext cx="1905000" cy="209550"/>
+          </a:xfrm>
+          <a:prstGeom xmlns:a="http://schemas.openxmlformats.org/drawingml/2006/main" prst="rect">
+            <a:avLst/>
+          </a:prstGeom>
+          <a:noFill xmlns:a="http://schemas.openxmlformats.org/drawingml/2006/main"/>
+          <a:ln xmlns:a="http://schemas.openxmlformats.org/drawingml/2006/main" w="0">
+            <a:noFill/>
+            <a:prstDash val="solid"/>
+          </a:ln>
+        </p:spPr>
+        <p:txBody>
+          <a:bodyPr xmlns:a="http://schemas.openxmlformats.org/drawingml/2006/main" wrap="square" lIns="0" tIns="0" rIns="0" bIns="0" anchor="t">
+            <a:noAutofit/>
+          </a:bodyPr>
+          <a:lstStyle xmlns:a="http://schemas.openxmlformats.org/drawingml/2006/main"/>
+          <a:p xmlns:a="http://schemas.openxmlformats.org/drawingml/2006/main">
+            <a:pPr algn="r">
+              <a:lnSpc>
+                <a:spcPct val="100000"/>
+              </a:lnSpc>
+              <a:buNone/>
+              <a:defRPr sz="975" b="0">
+                <a:solidFill>
+                  <a:srgbClr val="FF2B79"/>
+                </a:solidFill>
+                <a:latin typeface="Courier New"/>
+                <a:ea typeface="Courier New"/>
+                <a:cs typeface="Courier New"/>
+              </a:defRPr>
+            </a:pPr>
+            <a:r>
+              <a:rPr sz="975" b="0">
+                <a:solidFill>
+                  <a:srgbClr val="FF2B79"/>
+                </a:solidFill>
+                <a:latin typeface="Courier New"/>
+                <a:ea typeface="Courier New"/>
+                <a:cs typeface="Courier New"/>
+              </a:rPr>
+              <a:t>RAIN HASH 0x9a33…df3a</a:t>
+            </a:r>
+          </a:p>
+        </p:txBody>
+      </p:sp>
+      <p:sp>
+        <p:nvSpPr>
+          <p:cNvPr id="67" name="registry-boundary-bg">
+            <a:extLst xmlns:a="http://schemas.openxmlformats.org/drawingml/2006/main">
+              <a:ext uri="{FF2B5EF4-FFF2-40B4-BE49-F238E27FC236}">
+                <a16:creationId xmlns:a16="http://schemas.microsoft.com/office/drawing/2014/main" id="{851B834A-55E3-4865-BF0B-F98E309EC1CD}"/>
+              </a:ext>
+            </a:extLst>
+          </p:cNvPr>
+          <p:cNvSpPr>
+            <a:spLocks xmlns:a="http://schemas.openxmlformats.org/drawingml/2006/main" noGrp="1"/>
+          </p:cNvSpPr>
+          <p:nvPr/>
+        </p:nvSpPr>
+        <p:spPr>
+          <a:xfrm xmlns:a="http://schemas.openxmlformats.org/drawingml/2006/main">
+            <a:off x="419100" y="5600700"/>
+            <a:ext cx="11391900" cy="400050"/>
+          </a:xfrm>
+          <a:prstGeom xmlns:a="http://schemas.openxmlformats.org/drawingml/2006/main" prst="rect">
+            <a:avLst/>
+          </a:prstGeom>
+          <a:solidFill xmlns:a="http://schemas.openxmlformats.org/drawingml/2006/main">
+            <a:srgbClr val="2A101A"/>
+          </a:solidFill>
+          <a:ln xmlns:a="http://schemas.openxmlformats.org/drawingml/2006/main" w="11430">
+            <a:solidFill>
+              <a:srgbClr val="FF2B79"/>
+            </a:solidFill>
+            <a:prstDash val="solid"/>
+          </a:ln>
+        </p:spPr>
+      </p:sp>
+      <p:sp>
+        <p:nvSpPr>
+          <p:cNvPr id="68" name="registry-proof-label">
+            <a:extLst xmlns:a="http://schemas.openxmlformats.org/drawingml/2006/main">
+              <a:ext uri="{FF2B5EF4-FFF2-40B4-BE49-F238E27FC236}">
+                <a16:creationId xmlns:a16="http://schemas.microsoft.com/office/drawing/2014/main" id="{69CFCECD-AD62-4677-B651-10428270CFDC}"/>
+              </a:ext>
+            </a:extLst>
+          </p:cNvPr>
+          <p:cNvSpPr>
+            <a:spLocks xmlns:a="http://schemas.openxmlformats.org/drawingml/2006/main" noGrp="1"/>
+          </p:cNvSpPr>
+          <p:nvPr/>
+        </p:nvSpPr>
+        <p:spPr>
+          <a:xfrm xmlns:a="http://schemas.openxmlformats.org/drawingml/2006/main">
+            <a:off x="590550" y="5705475"/>
+            <a:ext cx="4000500" cy="190500"/>
+          </a:xfrm>
+          <a:prstGeom xmlns:a="http://schemas.openxmlformats.org/drawingml/2006/main" prst="rect">
+            <a:avLst/>
+          </a:prstGeom>
+          <a:noFill xmlns:a="http://schemas.openxmlformats.org/drawingml/2006/main"/>
+          <a:ln xmlns:a="http://schemas.openxmlformats.org/drawingml/2006/main" w="0">
+            <a:noFill/>
+            <a:prstDash val="solid"/>
+          </a:ln>
+        </p:spPr>
+        <p:txBody>
+          <a:bodyPr xmlns:a="http://schemas.openxmlformats.org/drawingml/2006/main" wrap="square" lIns="0" tIns="0" rIns="0" bIns="0" anchor="t">
+            <a:noAutofit/>
+          </a:bodyPr>
+          <a:lstStyle xmlns:a="http://schemas.openxmlformats.org/drawingml/2006/main"/>
+          <a:p xmlns:a="http://schemas.openxmlformats.org/drawingml/2006/main">
             <a:pPr algn="l">
               <a:lnSpc>
                 <a:spcPct val="100000"/>
               </a:lnSpc>
               <a:buNone/>
-              <a:defRPr sz="1125" b="0">
+              <a:defRPr sz="1050" b="1">
                 <a:solidFill>
                   <a:srgbClr val="D3D1C8"/>
                 </a:solidFill>
@@ -9401,7 +10095,7 @@
               </a:defRPr>
             </a:pPr>
             <a:r>
-              <a:rPr sz="1125" b="0">
+              <a:rPr sz="1050" b="1">
                 <a:solidFill>
                   <a:srgbClr val="D3D1C8"/>
                 </a:solidFill>
@@ -9409,29 +10103,29 @@
                 <a:ea typeface="Courier New"/>
                 <a:cs typeface="Courier New"/>
               </a:rPr>
-              <a:t>FUNDING ROOT · PUBLIC TERMS · OFFER HASH SET · ACCEPTED OFFER + RECEIPT DIGEST</a:t>
+              <a:t>FINALIZED OPERATOR-ATTESTED ORDERING</a:t>
             </a:r>
           </a:p>
         </p:txBody>
       </p:sp>
       <p:sp>
         <p:nvSpPr>
-          <p:cNvPr id="65" name="private-label">
-            <a:extLst xmlns:a="http://schemas.openxmlformats.org/drawingml/2006/main">
-              <a:ext uri="{FF2B5EF4-FFF2-40B4-BE49-F238E27FC236}">
-                <a16:creationId xmlns:a16="http://schemas.microsoft.com/office/drawing/2014/main" id="{DB182552-CB02-4A32-B5A5-C1C79C3E794F}"/>
-              </a:ext>
-            </a:extLst>
-          </p:cNvPr>
-          <p:cNvSpPr>
-            <a:spLocks xmlns:a="http://schemas.openxmlformats.org/drawingml/2006/main" noGrp="1"/>
-          </p:cNvSpPr>
-          <p:nvPr/>
-        </p:nvSpPr>
-        <p:spPr>
-          <a:xfrm xmlns:a="http://schemas.openxmlformats.org/drawingml/2006/main">
-            <a:off x="438150" y="5638800"/>
-            <a:ext cx="1714500" cy="209550"/>
+          <p:cNvPr id="69" name="registry-boundary">
+            <a:extLst xmlns:a="http://schemas.openxmlformats.org/drawingml/2006/main">
+              <a:ext uri="{FF2B5EF4-FFF2-40B4-BE49-F238E27FC236}">
+                <a16:creationId xmlns:a16="http://schemas.microsoft.com/office/drawing/2014/main" id="{AB97A762-0431-42F9-9C35-09ABDD601ED7}"/>
+              </a:ext>
+            </a:extLst>
+          </p:cNvPr>
+          <p:cNvSpPr>
+            <a:spLocks xmlns:a="http://schemas.openxmlformats.org/drawingml/2006/main" noGrp="1"/>
+          </p:cNvSpPr>
+          <p:nvPr/>
+        </p:nvSpPr>
+        <p:spPr>
+          <a:xfrm xmlns:a="http://schemas.openxmlformats.org/drawingml/2006/main">
+            <a:off x="4762500" y="5705475"/>
+            <a:ext cx="6819900" cy="190500"/>
           </a:xfrm>
           <a:prstGeom xmlns:a="http://schemas.openxmlformats.org/drawingml/2006/main" prst="rect">
             <a:avLst/>
@@ -9448,138 +10142,14 @@
           </a:bodyPr>
           <a:lstStyle xmlns:a="http://schemas.openxmlformats.org/drawingml/2006/main"/>
           <a:p xmlns:a="http://schemas.openxmlformats.org/drawingml/2006/main">
-            <a:pPr algn="l">
-              <a:lnSpc>
-                <a:spcPct val="100000"/>
-              </a:lnSpc>
-              <a:buNone/>
-              <a:defRPr sz="1125" b="1">
-                <a:solidFill>
-                  <a:srgbClr val="FF2B79"/>
-                </a:solidFill>
-                <a:latin typeface="Courier New"/>
-                <a:ea typeface="Courier New"/>
-                <a:cs typeface="Courier New"/>
-              </a:defRPr>
-            </a:pPr>
-            <a:r>
-              <a:rPr sz="1125" b="1">
-                <a:solidFill>
-                  <a:srgbClr val="FF2B79"/>
-                </a:solidFill>
-                <a:latin typeface="Courier New"/>
-                <a:ea typeface="Courier New"/>
-                <a:cs typeface="Courier New"/>
-              </a:rPr>
-              <a:t>PRIVATE OFFCHAIN</a:t>
-            </a:r>
-          </a:p>
-        </p:txBody>
-      </p:sp>
-      <p:sp>
-        <p:nvSpPr>
-          <p:cNvPr id="66" name="private-copy">
-            <a:extLst xmlns:a="http://schemas.openxmlformats.org/drawingml/2006/main">
-              <a:ext uri="{FF2B5EF4-FFF2-40B4-BE49-F238E27FC236}">
-                <a16:creationId xmlns:a16="http://schemas.microsoft.com/office/drawing/2014/main" id="{858117F5-F8D4-4539-A609-C19A819BC8C0}"/>
-              </a:ext>
-            </a:extLst>
-          </p:cNvPr>
-          <p:cNvSpPr>
-            <a:spLocks xmlns:a="http://schemas.openxmlformats.org/drawingml/2006/main" noGrp="1"/>
-          </p:cNvSpPr>
-          <p:nvPr/>
-        </p:nvSpPr>
-        <p:spPr>
-          <a:xfrm xmlns:a="http://schemas.openxmlformats.org/drawingml/2006/main">
-            <a:off x="2114550" y="5638800"/>
-            <a:ext cx="4552950" cy="209550"/>
-          </a:xfrm>
-          <a:prstGeom xmlns:a="http://schemas.openxmlformats.org/drawingml/2006/main" prst="rect">
-            <a:avLst/>
-          </a:prstGeom>
-          <a:noFill xmlns:a="http://schemas.openxmlformats.org/drawingml/2006/main"/>
-          <a:ln xmlns:a="http://schemas.openxmlformats.org/drawingml/2006/main" w="0">
-            <a:noFill/>
-            <a:prstDash val="solid"/>
-          </a:ln>
-        </p:spPr>
-        <p:txBody>
-          <a:bodyPr xmlns:a="http://schemas.openxmlformats.org/drawingml/2006/main" wrap="square" lIns="0" tIns="0" rIns="0" bIns="0" anchor="t">
-            <a:noAutofit/>
-          </a:bodyPr>
-          <a:lstStyle xmlns:a="http://schemas.openxmlformats.org/drawingml/2006/main"/>
-          <a:p xmlns:a="http://schemas.openxmlformats.org/drawingml/2006/main">
-            <a:pPr algn="l">
-              <a:lnSpc>
-                <a:spcPct val="100000"/>
-              </a:lnSpc>
-              <a:buNone/>
-              <a:defRPr sz="1125" b="0">
-                <a:solidFill>
-                  <a:srgbClr val="D3D1C8"/>
-                </a:solidFill>
-                <a:latin typeface="Courier New"/>
-                <a:ea typeface="Courier New"/>
-                <a:cs typeface="Courier New"/>
-              </a:defRPr>
-            </a:pPr>
-            <a:r>
-              <a:rPr sz="1125" b="0">
-                <a:solidFill>
-                  <a:srgbClr val="D3D1C8"/>
-                </a:solidFill>
-                <a:latin typeface="Courier New"/>
-                <a:ea typeface="Courier New"/>
-                <a:cs typeface="Courier New"/>
-              </a:rPr>
-              <a:t>BUYER CEILINGS · MERCHANT FLOORS · MANDATES</a:t>
-            </a:r>
-          </a:p>
-        </p:txBody>
-      </p:sp>
-      <p:sp>
-        <p:nvSpPr>
-          <p:cNvPr id="67" name="monad-boundary">
-            <a:extLst xmlns:a="http://schemas.openxmlformats.org/drawingml/2006/main">
-              <a:ext uri="{FF2B5EF4-FFF2-40B4-BE49-F238E27FC236}">
-                <a16:creationId xmlns:a16="http://schemas.microsoft.com/office/drawing/2014/main" id="{E8A39BEB-CAB8-4339-A6E4-D3CF2E5083D2}"/>
-              </a:ext>
-            </a:extLst>
-          </p:cNvPr>
-          <p:cNvSpPr>
-            <a:spLocks xmlns:a="http://schemas.openxmlformats.org/drawingml/2006/main" noGrp="1"/>
-          </p:cNvSpPr>
-          <p:nvPr/>
-        </p:nvSpPr>
-        <p:spPr>
-          <a:xfrm xmlns:a="http://schemas.openxmlformats.org/drawingml/2006/main">
-            <a:off x="6762750" y="5638800"/>
-            <a:ext cx="5048250" cy="209550"/>
-          </a:xfrm>
-          <a:prstGeom xmlns:a="http://schemas.openxmlformats.org/drawingml/2006/main" prst="rect">
-            <a:avLst/>
-          </a:prstGeom>
-          <a:noFill xmlns:a="http://schemas.openxmlformats.org/drawingml/2006/main"/>
-          <a:ln xmlns:a="http://schemas.openxmlformats.org/drawingml/2006/main" w="0">
-            <a:noFill/>
-            <a:prstDash val="solid"/>
-          </a:ln>
-        </p:spPr>
-        <p:txBody>
-          <a:bodyPr xmlns:a="http://schemas.openxmlformats.org/drawingml/2006/main" wrap="square" lIns="0" tIns="0" rIns="0" bIns="0" anchor="t">
-            <a:noAutofit/>
-          </a:bodyPr>
-          <a:lstStyle xmlns:a="http://schemas.openxmlformats.org/drawingml/2006/main"/>
-          <a:p xmlns:a="http://schemas.openxmlformats.org/drawingml/2006/main">
             <a:pPr algn="r">
               <a:lnSpc>
                 <a:spcPct val="100000"/>
               </a:lnSpc>
               <a:buNone/>
-              <a:defRPr sz="1125" b="0">
-                <a:solidFill>
-                  <a:srgbClr val="858B84"/>
+              <a:defRPr sz="975" b="1">
+                <a:solidFill>
+                  <a:srgbClr val="FF2B79"/>
                 </a:solidFill>
                 <a:latin typeface="Courier New"/>
                 <a:ea typeface="Courier New"/>
@@ -9587,15 +10157,15 @@
               </a:defRPr>
             </a:pPr>
             <a:r>
-              <a:rPr sz="1125" b="0">
-                <a:solidFill>
-                  <a:srgbClr val="858B84"/>
+              <a:rPr sz="975" b="1">
+                <a:solidFill>
+                  <a:srgbClr val="FF2B79"/>
                 </a:solidFill>
                 <a:latin typeface="Courier New"/>
                 <a:ea typeface="Courier New"/>
                 <a:cs typeface="Courier New"/>
               </a:rPr>
-              <a:t>Orders recorded claims — not offchain visibility or funds.</a:t>
+              <a:t>NOT CUSTODY · NOT INDEPENDENT RAIN VERIFICATION · NOT SELLER VISIBILITY</a:t>
             </a:r>
           </a:p>
         </p:txBody>
@@ -9603,7 +10173,7 @@
     </p:spTree>
     <p:extLst>
       <p:ext uri="{BB962C8B-B14F-4D97-AF65-F5344CB8AC3E}">
-        <p14:creationId xmlns:p14="http://schemas.microsoft.com/office/powerpoint/2010/main" val="1347847792"/>
+        <p14:creationId xmlns:p14="http://schemas.microsoft.com/office/powerpoint/2010/main" val="1957757994"/>
       </p:ext>
     </p:extLst>
   </p:cSld>
@@ -9631,10 +10201,10 @@
       </p:grpSpPr>
       <p:sp>
         <p:nvSpPr>
-          <p:cNvPr id="65" name="grid-v-40">
-            <a:extLst xmlns:a="http://schemas.openxmlformats.org/drawingml/2006/main">
-              <a:ext uri="{FF2B5EF4-FFF2-40B4-BE49-F238E27FC236}">
-                <a16:creationId xmlns:a16="http://schemas.microsoft.com/office/drawing/2014/main" id="{667D25D3-FF70-428C-A96D-69941B1C25CA}"/>
+          <p:cNvPr id="71" name="grid-v-40">
+            <a:extLst xmlns:a="http://schemas.openxmlformats.org/drawingml/2006/main">
+              <a:ext uri="{FF2B5EF4-FFF2-40B4-BE49-F238E27FC236}">
+                <a16:creationId xmlns:a16="http://schemas.microsoft.com/office/drawing/2014/main" id="{73902D8B-5E9D-4224-BED8-31FF477AA8D6}"/>
               </a:ext>
             </a:extLst>
           </p:cNvPr>
@@ -9665,7 +10235,7 @@
           <p:cNvPr id="2" name="grid-v-104">
             <a:extLst xmlns:a="http://schemas.openxmlformats.org/drawingml/2006/main">
               <a:ext uri="{FF2B5EF4-FFF2-40B4-BE49-F238E27FC236}">
-                <a16:creationId xmlns:a16="http://schemas.microsoft.com/office/drawing/2014/main" id="{E6C96E05-8154-4045-B6B6-23E689A49922}"/>
+                <a16:creationId xmlns:a16="http://schemas.microsoft.com/office/drawing/2014/main" id="{78B8A3EC-A03E-48AD-A968-97748EBBE14E}"/>
               </a:ext>
             </a:extLst>
           </p:cNvPr>
@@ -9696,7 +10266,7 @@
           <p:cNvPr id="3" name="grid-v-168">
             <a:extLst xmlns:a="http://schemas.openxmlformats.org/drawingml/2006/main">
               <a:ext uri="{FF2B5EF4-FFF2-40B4-BE49-F238E27FC236}">
-                <a16:creationId xmlns:a16="http://schemas.microsoft.com/office/drawing/2014/main" id="{D3BF4819-FD7C-4706-A747-2879B3E8F0FC}"/>
+                <a16:creationId xmlns:a16="http://schemas.microsoft.com/office/drawing/2014/main" id="{C05A2B46-5D09-44B3-9E37-668AE7742B84}"/>
               </a:ext>
             </a:extLst>
           </p:cNvPr>
@@ -9727,7 +10297,7 @@
           <p:cNvPr id="4" name="grid-v-232">
             <a:extLst xmlns:a="http://schemas.openxmlformats.org/drawingml/2006/main">
               <a:ext uri="{FF2B5EF4-FFF2-40B4-BE49-F238E27FC236}">
-                <a16:creationId xmlns:a16="http://schemas.microsoft.com/office/drawing/2014/main" id="{EC46A079-4A3D-401F-B311-D1622EBB1070}"/>
+                <a16:creationId xmlns:a16="http://schemas.microsoft.com/office/drawing/2014/main" id="{4D08FF4D-8A27-4068-BA37-553C36916973}"/>
               </a:ext>
             </a:extLst>
           </p:cNvPr>
@@ -9758,7 +10328,7 @@
           <p:cNvPr id="5" name="grid-v-296">
             <a:extLst xmlns:a="http://schemas.openxmlformats.org/drawingml/2006/main">
               <a:ext uri="{FF2B5EF4-FFF2-40B4-BE49-F238E27FC236}">
-                <a16:creationId xmlns:a16="http://schemas.microsoft.com/office/drawing/2014/main" id="{42C1747D-546D-4E2D-9390-CF0FF6A447D7}"/>
+                <a16:creationId xmlns:a16="http://schemas.microsoft.com/office/drawing/2014/main" id="{155BD7A7-448C-40F5-A395-D0605161FCFE}"/>
               </a:ext>
             </a:extLst>
           </p:cNvPr>
@@ -9789,7 +10359,7 @@
           <p:cNvPr id="6" name="grid-v-360">
             <a:extLst xmlns:a="http://schemas.openxmlformats.org/drawingml/2006/main">
               <a:ext uri="{FF2B5EF4-FFF2-40B4-BE49-F238E27FC236}">
-                <a16:creationId xmlns:a16="http://schemas.microsoft.com/office/drawing/2014/main" id="{9AEFE9C0-BB38-41B9-B881-22DA205BA792}"/>
+                <a16:creationId xmlns:a16="http://schemas.microsoft.com/office/drawing/2014/main" id="{21AD6EE7-EB8C-4DB2-B674-EF144F71EB2B}"/>
               </a:ext>
             </a:extLst>
           </p:cNvPr>
@@ -9820,7 +10390,7 @@
           <p:cNvPr id="7" name="grid-v-424">
             <a:extLst xmlns:a="http://schemas.openxmlformats.org/drawingml/2006/main">
               <a:ext uri="{FF2B5EF4-FFF2-40B4-BE49-F238E27FC236}">
-                <a16:creationId xmlns:a16="http://schemas.microsoft.com/office/drawing/2014/main" id="{51B8402F-320B-456E-BFAF-786745543D1A}"/>
+                <a16:creationId xmlns:a16="http://schemas.microsoft.com/office/drawing/2014/main" id="{34E072B4-4F8E-4178-A593-905BB541CAAA}"/>
               </a:ext>
             </a:extLst>
           </p:cNvPr>
@@ -9851,7 +10421,7 @@
           <p:cNvPr id="8" name="grid-v-488">
             <a:extLst xmlns:a="http://schemas.openxmlformats.org/drawingml/2006/main">
               <a:ext uri="{FF2B5EF4-FFF2-40B4-BE49-F238E27FC236}">
-                <a16:creationId xmlns:a16="http://schemas.microsoft.com/office/drawing/2014/main" id="{CA0ABDFF-DA7A-426D-95BE-356D0933AF1A}"/>
+                <a16:creationId xmlns:a16="http://schemas.microsoft.com/office/drawing/2014/main" id="{F8299EBE-D65F-454D-98BE-8E78B8FAFB15}"/>
               </a:ext>
             </a:extLst>
           </p:cNvPr>
@@ -9882,7 +10452,7 @@
           <p:cNvPr id="9" name="grid-v-552">
             <a:extLst xmlns:a="http://schemas.openxmlformats.org/drawingml/2006/main">
               <a:ext uri="{FF2B5EF4-FFF2-40B4-BE49-F238E27FC236}">
-                <a16:creationId xmlns:a16="http://schemas.microsoft.com/office/drawing/2014/main" id="{5413E559-A332-4A41-BDC7-658354447759}"/>
+                <a16:creationId xmlns:a16="http://schemas.microsoft.com/office/drawing/2014/main" id="{04E64AA0-D13F-4CD0-843B-6BC37791BE35}"/>
               </a:ext>
             </a:extLst>
           </p:cNvPr>
@@ -9913,7 +10483,7 @@
           <p:cNvPr id="10" name="grid-v-616">
             <a:extLst xmlns:a="http://schemas.openxmlformats.org/drawingml/2006/main">
               <a:ext uri="{FF2B5EF4-FFF2-40B4-BE49-F238E27FC236}">
-                <a16:creationId xmlns:a16="http://schemas.microsoft.com/office/drawing/2014/main" id="{7E67C7A3-8822-4FF6-B304-D42D200580D2}"/>
+                <a16:creationId xmlns:a16="http://schemas.microsoft.com/office/drawing/2014/main" id="{F249B50B-2199-4AC5-9F43-6CE76C385648}"/>
               </a:ext>
             </a:extLst>
           </p:cNvPr>
@@ -9944,7 +10514,7 @@
           <p:cNvPr id="11" name="grid-v-680">
             <a:extLst xmlns:a="http://schemas.openxmlformats.org/drawingml/2006/main">
               <a:ext uri="{FF2B5EF4-FFF2-40B4-BE49-F238E27FC236}">
-                <a16:creationId xmlns:a16="http://schemas.microsoft.com/office/drawing/2014/main" id="{B91B2B58-E04D-42B6-8248-F5533E9F6366}"/>
+                <a16:creationId xmlns:a16="http://schemas.microsoft.com/office/drawing/2014/main" id="{171F2914-BFC0-4500-99DA-E615DA7CA075}"/>
               </a:ext>
             </a:extLst>
           </p:cNvPr>
@@ -9975,7 +10545,7 @@
           <p:cNvPr id="12" name="grid-v-744">
             <a:extLst xmlns:a="http://schemas.openxmlformats.org/drawingml/2006/main">
               <a:ext uri="{FF2B5EF4-FFF2-40B4-BE49-F238E27FC236}">
-                <a16:creationId xmlns:a16="http://schemas.microsoft.com/office/drawing/2014/main" id="{EF01D53D-FB4C-4BBD-8F25-2C149EDC2E26}"/>
+                <a16:creationId xmlns:a16="http://schemas.microsoft.com/office/drawing/2014/main" id="{FBE8DEA5-F525-445B-8C02-1C03F93A7E6F}"/>
               </a:ext>
             </a:extLst>
           </p:cNvPr>
@@ -10006,7 +10576,7 @@
           <p:cNvPr id="13" name="grid-v-808">
             <a:extLst xmlns:a="http://schemas.openxmlformats.org/drawingml/2006/main">
               <a:ext uri="{FF2B5EF4-FFF2-40B4-BE49-F238E27FC236}">
-                <a16:creationId xmlns:a16="http://schemas.microsoft.com/office/drawing/2014/main" id="{A13749CE-AD3B-4270-8AC9-E5756676293B}"/>
+                <a16:creationId xmlns:a16="http://schemas.microsoft.com/office/drawing/2014/main" id="{0E684E88-2F77-49D3-AD7C-1DEF3E472C01}"/>
               </a:ext>
             </a:extLst>
           </p:cNvPr>
@@ -10037,7 +10607,7 @@
           <p:cNvPr id="14" name="grid-v-872">
             <a:extLst xmlns:a="http://schemas.openxmlformats.org/drawingml/2006/main">
               <a:ext uri="{FF2B5EF4-FFF2-40B4-BE49-F238E27FC236}">
-                <a16:creationId xmlns:a16="http://schemas.microsoft.com/office/drawing/2014/main" id="{815E23A4-7569-4BCE-9D4C-1B03CD250DB6}"/>
+                <a16:creationId xmlns:a16="http://schemas.microsoft.com/office/drawing/2014/main" id="{E800BD1C-4242-426B-9864-2530F980B5C0}"/>
               </a:ext>
             </a:extLst>
           </p:cNvPr>
@@ -10068,7 +10638,7 @@
           <p:cNvPr id="15" name="grid-v-936">
             <a:extLst xmlns:a="http://schemas.openxmlformats.org/drawingml/2006/main">
               <a:ext uri="{FF2B5EF4-FFF2-40B4-BE49-F238E27FC236}">
-                <a16:creationId xmlns:a16="http://schemas.microsoft.com/office/drawing/2014/main" id="{AF687AFF-DD25-4E79-938B-1EFBF9EB409A}"/>
+                <a16:creationId xmlns:a16="http://schemas.microsoft.com/office/drawing/2014/main" id="{BAB9E867-53E7-49F5-965A-91931170EC9E}"/>
               </a:ext>
             </a:extLst>
           </p:cNvPr>
@@ -10099,7 +10669,7 @@
           <p:cNvPr id="16" name="grid-v-1000">
             <a:extLst xmlns:a="http://schemas.openxmlformats.org/drawingml/2006/main">
               <a:ext uri="{FF2B5EF4-FFF2-40B4-BE49-F238E27FC236}">
-                <a16:creationId xmlns:a16="http://schemas.microsoft.com/office/drawing/2014/main" id="{E5CC4169-67B6-4F4C-A327-916A116588C7}"/>
+                <a16:creationId xmlns:a16="http://schemas.microsoft.com/office/drawing/2014/main" id="{BEF2ACFD-F529-4D82-9A5D-43F97D05FBB0}"/>
               </a:ext>
             </a:extLst>
           </p:cNvPr>
@@ -10130,7 +10700,7 @@
           <p:cNvPr id="17" name="grid-v-1064">
             <a:extLst xmlns:a="http://schemas.openxmlformats.org/drawingml/2006/main">
               <a:ext uri="{FF2B5EF4-FFF2-40B4-BE49-F238E27FC236}">
-                <a16:creationId xmlns:a16="http://schemas.microsoft.com/office/drawing/2014/main" id="{9F2956E3-0014-4F14-8975-B3DCC5AD5A79}"/>
+                <a16:creationId xmlns:a16="http://schemas.microsoft.com/office/drawing/2014/main" id="{E0C566CA-0AF3-4397-917A-8D01083ECF36}"/>
               </a:ext>
             </a:extLst>
           </p:cNvPr>
@@ -10161,7 +10731,7 @@
           <p:cNvPr id="18" name="grid-v-1128">
             <a:extLst xmlns:a="http://schemas.openxmlformats.org/drawingml/2006/main">
               <a:ext uri="{FF2B5EF4-FFF2-40B4-BE49-F238E27FC236}">
-                <a16:creationId xmlns:a16="http://schemas.microsoft.com/office/drawing/2014/main" id="{F9322652-9249-4A4C-A527-1747E04CD120}"/>
+                <a16:creationId xmlns:a16="http://schemas.microsoft.com/office/drawing/2014/main" id="{7FFC77B4-4177-47A2-9B72-F6C5EC931FC0}"/>
               </a:ext>
             </a:extLst>
           </p:cNvPr>
@@ -10192,7 +10762,7 @@
           <p:cNvPr id="19" name="grid-v-1192">
             <a:extLst xmlns:a="http://schemas.openxmlformats.org/drawingml/2006/main">
               <a:ext uri="{FF2B5EF4-FFF2-40B4-BE49-F238E27FC236}">
-                <a16:creationId xmlns:a16="http://schemas.microsoft.com/office/drawing/2014/main" id="{B0FE5273-B00C-4BA4-B722-3EAF9B1A750D}"/>
+                <a16:creationId xmlns:a16="http://schemas.microsoft.com/office/drawing/2014/main" id="{EE190343-A3C7-45AF-831E-8A8BC6605AB5}"/>
               </a:ext>
             </a:extLst>
           </p:cNvPr>
@@ -10223,7 +10793,7 @@
           <p:cNvPr id="20" name="grid-h-112">
             <a:extLst xmlns:a="http://schemas.openxmlformats.org/drawingml/2006/main">
               <a:ext uri="{FF2B5EF4-FFF2-40B4-BE49-F238E27FC236}">
-                <a16:creationId xmlns:a16="http://schemas.microsoft.com/office/drawing/2014/main" id="{C1885282-9A1F-430C-B173-734E85B70B8F}"/>
+                <a16:creationId xmlns:a16="http://schemas.microsoft.com/office/drawing/2014/main" id="{40011140-5F40-45E8-AAAD-216BD078A794}"/>
               </a:ext>
             </a:extLst>
           </p:cNvPr>
@@ -10254,7 +10824,7 @@
           <p:cNvPr id="21" name="grid-h-176">
             <a:extLst xmlns:a="http://schemas.openxmlformats.org/drawingml/2006/main">
               <a:ext uri="{FF2B5EF4-FFF2-40B4-BE49-F238E27FC236}">
-                <a16:creationId xmlns:a16="http://schemas.microsoft.com/office/drawing/2014/main" id="{15E10A16-345F-4221-9416-D95BB71D6C5E}"/>
+                <a16:creationId xmlns:a16="http://schemas.microsoft.com/office/drawing/2014/main" id="{AFD63523-C5FB-437D-8B93-4B9ADD38526A}"/>
               </a:ext>
             </a:extLst>
           </p:cNvPr>
@@ -10285,7 +10855,7 @@
           <p:cNvPr id="22" name="grid-h-240">
             <a:extLst xmlns:a="http://schemas.openxmlformats.org/drawingml/2006/main">
               <a:ext uri="{FF2B5EF4-FFF2-40B4-BE49-F238E27FC236}">
-                <a16:creationId xmlns:a16="http://schemas.microsoft.com/office/drawing/2014/main" id="{12597A3A-353D-4E31-8675-B37B384C225C}"/>
+                <a16:creationId xmlns:a16="http://schemas.microsoft.com/office/drawing/2014/main" id="{89FFF826-39AF-4FCB-9946-FE9D5BEAFE96}"/>
               </a:ext>
             </a:extLst>
           </p:cNvPr>
@@ -10316,7 +10886,7 @@
           <p:cNvPr id="23" name="grid-h-304">
             <a:extLst xmlns:a="http://schemas.openxmlformats.org/drawingml/2006/main">
               <a:ext uri="{FF2B5EF4-FFF2-40B4-BE49-F238E27FC236}">
-                <a16:creationId xmlns:a16="http://schemas.microsoft.com/office/drawing/2014/main" id="{2F6EE05E-22AA-4BDD-8C0A-3126CBBE9D6D}"/>
+                <a16:creationId xmlns:a16="http://schemas.microsoft.com/office/drawing/2014/main" id="{449F9B5D-1F3D-40E4-8A97-00EFAA676275}"/>
               </a:ext>
             </a:extLst>
           </p:cNvPr>
@@ -10347,7 +10917,7 @@
           <p:cNvPr id="24" name="grid-h-368">
             <a:extLst xmlns:a="http://schemas.openxmlformats.org/drawingml/2006/main">
               <a:ext uri="{FF2B5EF4-FFF2-40B4-BE49-F238E27FC236}">
-                <a16:creationId xmlns:a16="http://schemas.microsoft.com/office/drawing/2014/main" id="{938CBDEA-7C88-4E6B-9D84-F6EF230960ED}"/>
+                <a16:creationId xmlns:a16="http://schemas.microsoft.com/office/drawing/2014/main" id="{CFDE767E-7C6F-4E1B-8FB7-CA22940CF907}"/>
               </a:ext>
             </a:extLst>
           </p:cNvPr>
@@ -10378,7 +10948,7 @@
           <p:cNvPr id="25" name="grid-h-432">
             <a:extLst xmlns:a="http://schemas.openxmlformats.org/drawingml/2006/main">
               <a:ext uri="{FF2B5EF4-FFF2-40B4-BE49-F238E27FC236}">
-                <a16:creationId xmlns:a16="http://schemas.microsoft.com/office/drawing/2014/main" id="{D1ADCBBB-C70B-465C-83B2-7494DDFEDD40}"/>
+                <a16:creationId xmlns:a16="http://schemas.microsoft.com/office/drawing/2014/main" id="{ED9046DC-425F-4A91-9E4C-51B31CC6BA4C}"/>
               </a:ext>
             </a:extLst>
           </p:cNvPr>
@@ -10409,7 +10979,7 @@
           <p:cNvPr id="26" name="grid-h-496">
             <a:extLst xmlns:a="http://schemas.openxmlformats.org/drawingml/2006/main">
               <a:ext uri="{FF2B5EF4-FFF2-40B4-BE49-F238E27FC236}">
-                <a16:creationId xmlns:a16="http://schemas.microsoft.com/office/drawing/2014/main" id="{EA2CB313-3439-41CF-A725-EE70AE0341B8}"/>
+                <a16:creationId xmlns:a16="http://schemas.microsoft.com/office/drawing/2014/main" id="{6C22D097-7B48-4317-954A-043C2318CFBD}"/>
               </a:ext>
             </a:extLst>
           </p:cNvPr>
@@ -10440,7 +11010,7 @@
           <p:cNvPr id="27" name="grid-h-560">
             <a:extLst xmlns:a="http://schemas.openxmlformats.org/drawingml/2006/main">
               <a:ext uri="{FF2B5EF4-FFF2-40B4-BE49-F238E27FC236}">
-                <a16:creationId xmlns:a16="http://schemas.microsoft.com/office/drawing/2014/main" id="{27204A9A-C3C3-4E1E-A290-68AF00EADC5D}"/>
+                <a16:creationId xmlns:a16="http://schemas.microsoft.com/office/drawing/2014/main" id="{557AC51B-624A-46D6-9151-55A0C22A0D8C}"/>
               </a:ext>
             </a:extLst>
           </p:cNvPr>
@@ -10471,7 +11041,7 @@
           <p:cNvPr id="28" name="grid-h-624">
             <a:extLst xmlns:a="http://schemas.openxmlformats.org/drawingml/2006/main">
               <a:ext uri="{FF2B5EF4-FFF2-40B4-BE49-F238E27FC236}">
-                <a16:creationId xmlns:a16="http://schemas.microsoft.com/office/drawing/2014/main" id="{4BC99AB7-8A96-4E9E-8628-8A35C1577495}"/>
+                <a16:creationId xmlns:a16="http://schemas.microsoft.com/office/drawing/2014/main" id="{8CE55BD1-9F19-4ED9-926B-C806CBE4675A}"/>
               </a:ext>
             </a:extLst>
           </p:cNvPr>
@@ -10502,7 +11072,7 @@
           <p:cNvPr id="29" name="top-rule">
             <a:extLst xmlns:a="http://schemas.openxmlformats.org/drawingml/2006/main">
               <a:ext uri="{FF2B5EF4-FFF2-40B4-BE49-F238E27FC236}">
-                <a16:creationId xmlns:a16="http://schemas.microsoft.com/office/drawing/2014/main" id="{2B3FE039-834E-4807-B809-0851E89C17F9}"/>
+                <a16:creationId xmlns:a16="http://schemas.microsoft.com/office/drawing/2014/main" id="{500D0551-5698-47D1-B571-D7DBB3E73966}"/>
               </a:ext>
             </a:extLst>
           </p:cNvPr>
@@ -10533,7 +11103,7 @@
           <p:cNvPr id="30" name="wordmark">
             <a:extLst xmlns:a="http://schemas.openxmlformats.org/drawingml/2006/main">
               <a:ext uri="{FF2B5EF4-FFF2-40B4-BE49-F238E27FC236}">
-                <a16:creationId xmlns:a16="http://schemas.microsoft.com/office/drawing/2014/main" id="{732FD54F-CB3C-4F48-8583-91E94F0CA718}"/>
+                <a16:creationId xmlns:a16="http://schemas.microsoft.com/office/drawing/2014/main" id="{650C8BD6-7C37-4762-9D3B-4DC0C14F6BA9}"/>
               </a:ext>
             </a:extLst>
           </p:cNvPr>
@@ -10595,7 +11165,7 @@
           <p:cNvPr id="31" name="environment-label">
             <a:extLst xmlns:a="http://schemas.openxmlformats.org/drawingml/2006/main">
               <a:ext uri="{FF2B5EF4-FFF2-40B4-BE49-F238E27FC236}">
-                <a16:creationId xmlns:a16="http://schemas.microsoft.com/office/drawing/2014/main" id="{22ACFD77-8F1C-489E-83A0-F108EC78FE9F}"/>
+                <a16:creationId xmlns:a16="http://schemas.microsoft.com/office/drawing/2014/main" id="{87495799-9C7B-48DE-9D34-446D51727FF5}"/>
               </a:ext>
             </a:extLst>
           </p:cNvPr>
@@ -10647,7 +11217,7 @@
                 <a:ea typeface="Courier New"/>
                 <a:cs typeface="Courier New"/>
               </a:rPr>
-              <a:t>SIMULATED SELLER COMPETITION</a:t>
+              <a:t>SELLER PILOT · SIMULATED COMPETITION</a:t>
             </a:r>
           </a:p>
         </p:txBody>
@@ -10657,7 +11227,7 @@
           <p:cNvPr id="32" name="slide-index">
             <a:extLst xmlns:a="http://schemas.openxmlformats.org/drawingml/2006/main">
               <a:ext uri="{FF2B5EF4-FFF2-40B4-BE49-F238E27FC236}">
-                <a16:creationId xmlns:a16="http://schemas.microsoft.com/office/drawing/2014/main" id="{ACA01510-8C05-4B95-B0EE-BA161AD03C09}"/>
+                <a16:creationId xmlns:a16="http://schemas.microsoft.com/office/drawing/2014/main" id="{4431ECC2-11AD-4AA2-A5A2-BE712547E55B}"/>
               </a:ext>
             </a:extLst>
           </p:cNvPr>
@@ -10719,7 +11289,7 @@
           <p:cNvPr id="33" name="event-footer">
             <a:extLst xmlns:a="http://schemas.openxmlformats.org/drawingml/2006/main">
               <a:ext uri="{FF2B5EF4-FFF2-40B4-BE49-F238E27FC236}">
-                <a16:creationId xmlns:a16="http://schemas.microsoft.com/office/drawing/2014/main" id="{FC146A77-EC40-4069-AFD7-E6BD17DD00FE}"/>
+                <a16:creationId xmlns:a16="http://schemas.microsoft.com/office/drawing/2014/main" id="{11D0312E-3DDC-4CFB-97CD-9AD830C90177}"/>
               </a:ext>
             </a:extLst>
           </p:cNvPr>
@@ -10781,7 +11351,7 @@
           <p:cNvPr id="34" name="honesty-footer">
             <a:extLst xmlns:a="http://schemas.openxmlformats.org/drawingml/2006/main">
               <a:ext uri="{FF2B5EF4-FFF2-40B4-BE49-F238E27FC236}">
-                <a16:creationId xmlns:a16="http://schemas.microsoft.com/office/drawing/2014/main" id="{39E8D377-C18B-42A0-987A-8EBCA78C2B95}"/>
+                <a16:creationId xmlns:a16="http://schemas.microsoft.com/office/drawing/2014/main" id="{FF8A91A1-008E-4F97-AAD5-3E8FF79AAF00}"/>
               </a:ext>
             </a:extLst>
           </p:cNvPr>
@@ -10843,7 +11413,7 @@
           <p:cNvPr id="35" name="eyebrow">
             <a:extLst xmlns:a="http://schemas.openxmlformats.org/drawingml/2006/main">
               <a:ext uri="{FF2B5EF4-FFF2-40B4-BE49-F238E27FC236}">
-                <a16:creationId xmlns:a16="http://schemas.microsoft.com/office/drawing/2014/main" id="{0AE85C1A-AED5-4C10-B322-F5AF7700C2DF}"/>
+                <a16:creationId xmlns:a16="http://schemas.microsoft.com/office/drawing/2014/main" id="{BD68C20E-074F-415E-9970-6750E232F859}"/>
               </a:ext>
             </a:extLst>
           </p:cNvPr>
@@ -10905,7 +11475,7 @@
           <p:cNvPr id="36" name="slide-title">
             <a:extLst xmlns:a="http://schemas.openxmlformats.org/drawingml/2006/main">
               <a:ext uri="{FF2B5EF4-FFF2-40B4-BE49-F238E27FC236}">
-                <a16:creationId xmlns:a16="http://schemas.microsoft.com/office/drawing/2014/main" id="{86E43172-DE23-4946-85FB-23CBFEB8E191}"/>
+                <a16:creationId xmlns:a16="http://schemas.microsoft.com/office/drawing/2014/main" id="{32EB7AA4-02C7-44A6-9A3B-4FA1159CEF0D}"/>
               </a:ext>
             </a:extLst>
           </p:cNvPr>
@@ -10964,22 +11534,22 @@
       </p:sp>
       <p:sp>
         <p:nvSpPr>
-          <p:cNvPr id="37" name="frozen-quantity">
-            <a:extLst xmlns:a="http://schemas.openxmlformats.org/drawingml/2006/main">
-              <a:ext uri="{FF2B5EF4-FFF2-40B4-BE49-F238E27FC236}">
-                <a16:creationId xmlns:a16="http://schemas.microsoft.com/office/drawing/2014/main" id="{1BBA788B-96F7-4FA7-91E4-BD7F65A2FB9F}"/>
-              </a:ext>
-            </a:extLst>
-          </p:cNvPr>
-          <p:cNvSpPr>
-            <a:spLocks xmlns:a="http://schemas.openxmlformats.org/drawingml/2006/main" noGrp="1"/>
-          </p:cNvSpPr>
-          <p:nvPr/>
-        </p:nvSpPr>
-        <p:spPr>
-          <a:xfrm xmlns:a="http://schemas.openxmlformats.org/drawingml/2006/main">
-            <a:off x="400050" y="2667000"/>
-            <a:ext cx="2095500" cy="1181100"/>
+          <p:cNvPr id="37" name="seller-route">
+            <a:extLst xmlns:a="http://schemas.openxmlformats.org/drawingml/2006/main">
+              <a:ext uri="{FF2B5EF4-FFF2-40B4-BE49-F238E27FC236}">
+                <a16:creationId xmlns:a16="http://schemas.microsoft.com/office/drawing/2014/main" id="{8834CB39-A4F9-407D-AE1E-D0E50881B369}"/>
+              </a:ext>
+            </a:extLst>
+          </p:cNvPr>
+          <p:cNvSpPr>
+            <a:spLocks xmlns:a="http://schemas.openxmlformats.org/drawingml/2006/main" noGrp="1"/>
+          </p:cNvSpPr>
+          <p:nvPr/>
+        </p:nvSpPr>
+        <p:spPr>
+          <a:xfrm xmlns:a="http://schemas.openxmlformats.org/drawingml/2006/main">
+            <a:off x="419100" y="2381250"/>
+            <a:ext cx="2000250" cy="209550"/>
           </a:xfrm>
           <a:prstGeom xmlns:a="http://schemas.openxmlformats.org/drawingml/2006/main" prst="rect">
             <a:avLst/>
@@ -11001,7 +11571,69 @@
                 <a:spcPct val="100000"/>
               </a:lnSpc>
               <a:buNone/>
-              <a:defRPr sz="7800" b="1">
+              <a:defRPr sz="1125" b="1">
+                <a:solidFill>
+                  <a:srgbClr val="C7F52F"/>
+                </a:solidFill>
+                <a:latin typeface="Courier New"/>
+                <a:ea typeface="Courier New"/>
+                <a:cs typeface="Courier New"/>
+              </a:defRPr>
+            </a:pPr>
+            <a:r>
+              <a:rPr sz="1125" b="1">
+                <a:solidFill>
+                  <a:srgbClr val="C7F52F"/>
+                </a:solidFill>
+                <a:latin typeface="Courier New"/>
+                <a:ea typeface="Courier New"/>
+                <a:cs typeface="Courier New"/>
+              </a:rPr>
+              <a:t>/MERCHANT</a:t>
+            </a:r>
+          </a:p>
+        </p:txBody>
+      </p:sp>
+      <p:sp>
+        <p:nvSpPr>
+          <p:cNvPr id="38" name="frozen-quantity">
+            <a:extLst xmlns:a="http://schemas.openxmlformats.org/drawingml/2006/main">
+              <a:ext uri="{FF2B5EF4-FFF2-40B4-BE49-F238E27FC236}">
+                <a16:creationId xmlns:a16="http://schemas.microsoft.com/office/drawing/2014/main" id="{F67324CD-3F7C-4DC1-BFBB-EE9FB9918D9C}"/>
+              </a:ext>
+            </a:extLst>
+          </p:cNvPr>
+          <p:cNvSpPr>
+            <a:spLocks xmlns:a="http://schemas.openxmlformats.org/drawingml/2006/main" noGrp="1"/>
+          </p:cNvSpPr>
+          <p:nvPr/>
+        </p:nvSpPr>
+        <p:spPr>
+          <a:xfrm xmlns:a="http://schemas.openxmlformats.org/drawingml/2006/main">
+            <a:off x="400050" y="2667000"/>
+            <a:ext cx="1714500" cy="1066800"/>
+          </a:xfrm>
+          <a:prstGeom xmlns:a="http://schemas.openxmlformats.org/drawingml/2006/main" prst="rect">
+            <a:avLst/>
+          </a:prstGeom>
+          <a:noFill xmlns:a="http://schemas.openxmlformats.org/drawingml/2006/main"/>
+          <a:ln xmlns:a="http://schemas.openxmlformats.org/drawingml/2006/main" w="0">
+            <a:noFill/>
+            <a:prstDash val="solid"/>
+          </a:ln>
+        </p:spPr>
+        <p:txBody>
+          <a:bodyPr xmlns:a="http://schemas.openxmlformats.org/drawingml/2006/main" wrap="square" lIns="0" tIns="0" rIns="0" bIns="0" anchor="t">
+            <a:noAutofit/>
+          </a:bodyPr>
+          <a:lstStyle xmlns:a="http://schemas.openxmlformats.org/drawingml/2006/main"/>
+          <a:p xmlns:a="http://schemas.openxmlformats.org/drawingml/2006/main">
+            <a:pPr algn="l">
+              <a:lnSpc>
+                <a:spcPct val="100000"/>
+              </a:lnSpc>
+              <a:buNone/>
+              <a:defRPr sz="6900" b="1">
                 <a:solidFill>
                   <a:srgbClr val="C7F52F"/>
                 </a:solidFill>
@@ -11011,7 +11643,7 @@
               </a:defRPr>
             </a:pPr>
             <a:r>
-              <a:rPr sz="7800" b="1">
+              <a:rPr sz="6900" b="1">
                 <a:solidFill>
                   <a:srgbClr val="C7F52F"/>
                 </a:solidFill>
@@ -11026,22 +11658,22 @@
       </p:sp>
       <p:sp>
         <p:nvSpPr>
-          <p:cNvPr id="38" name="frozen-label">
-            <a:extLst xmlns:a="http://schemas.openxmlformats.org/drawingml/2006/main">
-              <a:ext uri="{FF2B5EF4-FFF2-40B4-BE49-F238E27FC236}">
-                <a16:creationId xmlns:a16="http://schemas.microsoft.com/office/drawing/2014/main" id="{128151E1-1A5F-42AB-B300-DAB3FC584DA2}"/>
-              </a:ext>
-            </a:extLst>
-          </p:cNvPr>
-          <p:cNvSpPr>
-            <a:spLocks xmlns:a="http://schemas.openxmlformats.org/drawingml/2006/main" noGrp="1"/>
-          </p:cNvSpPr>
-          <p:nvPr/>
-        </p:nvSpPr>
-        <p:spPr>
-          <a:xfrm xmlns:a="http://schemas.openxmlformats.org/drawingml/2006/main">
-            <a:off x="457200" y="3867150"/>
-            <a:ext cx="2095500" cy="266700"/>
+          <p:cNvPr id="39" name="frozen-label">
+            <a:extLst xmlns:a="http://schemas.openxmlformats.org/drawingml/2006/main">
+              <a:ext uri="{FF2B5EF4-FFF2-40B4-BE49-F238E27FC236}">
+                <a16:creationId xmlns:a16="http://schemas.microsoft.com/office/drawing/2014/main" id="{AD907F93-8AC2-4B99-9484-61C9C30F369C}"/>
+              </a:ext>
+            </a:extLst>
+          </p:cNvPr>
+          <p:cNvSpPr>
+            <a:spLocks xmlns:a="http://schemas.openxmlformats.org/drawingml/2006/main" noGrp="1"/>
+          </p:cNvSpPr>
+          <p:nvPr/>
+        </p:nvSpPr>
+        <p:spPr>
+          <a:xfrm xmlns:a="http://schemas.openxmlformats.org/drawingml/2006/main">
+            <a:off x="457200" y="3752850"/>
+            <a:ext cx="2667000" cy="266700"/>
           </a:xfrm>
           <a:prstGeom xmlns:a="http://schemas.openxmlformats.org/drawingml/2006/main" prst="rect">
             <a:avLst/>
@@ -11063,7 +11695,7 @@
                 <a:spcPct val="100000"/>
               </a:lnSpc>
               <a:buNone/>
-              <a:defRPr sz="1350" b="0">
+              <a:defRPr sz="1275" b="0">
                 <a:solidFill>
                   <a:srgbClr val="D3D1C8"/>
                 </a:solidFill>
@@ -11073,7 +11705,7 @@
               </a:defRPr>
             </a:pPr>
             <a:r>
-              <a:rPr sz="1350" b="0">
+              <a:rPr sz="1275" b="0">
                 <a:solidFill>
                   <a:srgbClr val="D3D1C8"/>
                 </a:solidFill>
@@ -11081,29 +11713,29 @@
                 <a:ea typeface="Courier New"/>
                 <a:cs typeface="Courier New"/>
               </a:rPr>
-              <a:t>UNITS FROZEN</a:t>
+              <a:t>UNITS · BLINDED RFP</a:t>
             </a:r>
           </a:p>
         </p:txBody>
       </p:sp>
       <p:sp>
         <p:nvSpPr>
-          <p:cNvPr id="39" name="frozen-copy">
-            <a:extLst xmlns:a="http://schemas.openxmlformats.org/drawingml/2006/main">
-              <a:ext uri="{FF2B5EF4-FFF2-40B4-BE49-F238E27FC236}">
-                <a16:creationId xmlns:a16="http://schemas.microsoft.com/office/drawing/2014/main" id="{94C95AEE-EF9B-43F2-9329-AE01C28F9176}"/>
-              </a:ext>
-            </a:extLst>
-          </p:cNvPr>
-          <p:cNvSpPr>
-            <a:spLocks xmlns:a="http://schemas.openxmlformats.org/drawingml/2006/main" noGrp="1"/>
-          </p:cNvSpPr>
-          <p:nvPr/>
-        </p:nvSpPr>
-        <p:spPr>
-          <a:xfrm xmlns:a="http://schemas.openxmlformats.org/drawingml/2006/main">
-            <a:off x="457200" y="4362450"/>
-            <a:ext cx="2762250" cy="628650"/>
+          <p:cNvPr id="40" name="frozen-copy">
+            <a:extLst xmlns:a="http://schemas.openxmlformats.org/drawingml/2006/main">
+              <a:ext uri="{FF2B5EF4-FFF2-40B4-BE49-F238E27FC236}">
+                <a16:creationId xmlns:a16="http://schemas.microsoft.com/office/drawing/2014/main" id="{C158580D-545C-48E6-8804-FDCB23C486CF}"/>
+              </a:ext>
+            </a:extLst>
+          </p:cNvPr>
+          <p:cNvSpPr>
+            <a:spLocks xmlns:a="http://schemas.openxmlformats.org/drawingml/2006/main" noGrp="1"/>
+          </p:cNvSpPr>
+          <p:nvPr/>
+        </p:nvSpPr>
+        <p:spPr>
+          <a:xfrm xmlns:a="http://schemas.openxmlformats.org/drawingml/2006/main">
+            <a:off x="457200" y="4171950"/>
+            <a:ext cx="2762250" cy="552450"/>
           </a:xfrm>
           <a:prstGeom xmlns:a="http://schemas.openxmlformats.org/drawingml/2006/main" prst="rect">
             <a:avLst/>
@@ -11125,7 +11757,7 @@
                 <a:spcPct val="112000"/>
               </a:lnSpc>
               <a:buNone/>
-              <a:defRPr sz="1425" b="0">
+              <a:defRPr sz="1350" b="0">
                 <a:solidFill>
                   <a:srgbClr val="858B84"/>
                 </a:solidFill>
@@ -11135,7 +11767,7 @@
               </a:defRPr>
             </a:pPr>
             <a:r>
-              <a:rPr sz="1425" b="0">
+              <a:rPr sz="1350" b="0">
                 <a:solidFill>
                   <a:srgbClr val="858B84"/>
                 </a:solidFill>
@@ -11143,7 +11775,7 @@
                 <a:ea typeface="Arial"/>
                 <a:cs typeface="Arial"/>
               </a:rPr>
-              <a:t>Quantity stays server-pinned</a:t>
+              <a:t>Quantity stays server-pinned.</a:t>
             </a:r>
           </a:p>
           <a:p xmlns:a="http://schemas.openxmlformats.org/drawingml/2006/main">
@@ -11152,7 +11784,7 @@
                 <a:spcPct val="112000"/>
               </a:lnSpc>
               <a:buNone/>
-              <a:defRPr sz="1425" b="0">
+              <a:defRPr sz="1350" b="0">
                 <a:solidFill>
                   <a:srgbClr val="858B84"/>
                 </a:solidFill>
@@ -11162,7 +11794,7 @@
               </a:defRPr>
             </a:pPr>
             <a:r>
-              <a:rPr sz="1425" b="0">
+              <a:rPr sz="1350" b="0">
                 <a:solidFill>
                   <a:srgbClr val="858B84"/>
                 </a:solidFill>
@@ -11170,17 +11802,265 @@
                 <a:ea typeface="Arial"/>
                 <a:cs typeface="Arial"/>
               </a:rPr>
-              <a:t>through every merchant round.</a:t>
+              <a:t>Private ceilings exposed: 0.</a:t>
             </a:r>
           </a:p>
         </p:txBody>
       </p:sp>
       <p:sp>
         <p:nvSpPr>
-          <p:cNvPr id="40" name="market-divider">
-            <a:extLst xmlns:a="http://schemas.openxmlformats.org/drawingml/2006/main">
-              <a:ext uri="{FF2B5EF4-FFF2-40B4-BE49-F238E27FC236}">
-                <a16:creationId xmlns:a16="http://schemas.microsoft.com/office/drawing/2014/main" id="{362C2781-895C-4971-A507-49153B4C75E2}"/>
+          <p:cNvPr id="41" name="seller-live-label">
+            <a:extLst xmlns:a="http://schemas.openxmlformats.org/drawingml/2006/main">
+              <a:ext uri="{FF2B5EF4-FFF2-40B4-BE49-F238E27FC236}">
+                <a16:creationId xmlns:a16="http://schemas.microsoft.com/office/drawing/2014/main" id="{17519AA6-2175-4692-AD4E-7CB8B29B7B86}"/>
+              </a:ext>
+            </a:extLst>
+          </p:cNvPr>
+          <p:cNvSpPr>
+            <a:spLocks xmlns:a="http://schemas.openxmlformats.org/drawingml/2006/main" noGrp="1"/>
+          </p:cNvSpPr>
+          <p:nvPr/>
+        </p:nvSpPr>
+        <p:spPr>
+          <a:xfrm xmlns:a="http://schemas.openxmlformats.org/drawingml/2006/main">
+            <a:off x="457200" y="4953000"/>
+            <a:ext cx="1543050" cy="171450"/>
+          </a:xfrm>
+          <a:prstGeom xmlns:a="http://schemas.openxmlformats.org/drawingml/2006/main" prst="rect">
+            <a:avLst/>
+          </a:prstGeom>
+          <a:noFill xmlns:a="http://schemas.openxmlformats.org/drawingml/2006/main"/>
+          <a:ln xmlns:a="http://schemas.openxmlformats.org/drawingml/2006/main" w="0">
+            <a:noFill/>
+            <a:prstDash val="solid"/>
+          </a:ln>
+        </p:spPr>
+        <p:txBody>
+          <a:bodyPr xmlns:a="http://schemas.openxmlformats.org/drawingml/2006/main" wrap="square" lIns="0" tIns="0" rIns="0" bIns="0" anchor="t">
+            <a:noAutofit/>
+          </a:bodyPr>
+          <a:lstStyle xmlns:a="http://schemas.openxmlformats.org/drawingml/2006/main"/>
+          <a:p xmlns:a="http://schemas.openxmlformats.org/drawingml/2006/main">
+            <a:pPr algn="l">
+              <a:lnSpc>
+                <a:spcPct val="100000"/>
+              </a:lnSpc>
+              <a:buNone/>
+              <a:defRPr sz="900" b="0">
+                <a:solidFill>
+                  <a:srgbClr val="858B84"/>
+                </a:solidFill>
+                <a:latin typeface="Courier New"/>
+                <a:ea typeface="Courier New"/>
+                <a:cs typeface="Courier New"/>
+              </a:defRPr>
+            </a:pPr>
+            <a:r>
+              <a:rPr sz="900" b="0">
+                <a:solidFill>
+                  <a:srgbClr val="858B84"/>
+                </a:solidFill>
+                <a:latin typeface="Courier New"/>
+                <a:ea typeface="Courier New"/>
+                <a:cs typeface="Courier New"/>
+              </a:rPr>
+              <a:t>LIVE RETAILERS</a:t>
+            </a:r>
+          </a:p>
+        </p:txBody>
+      </p:sp>
+      <p:sp>
+        <p:nvSpPr>
+          <p:cNvPr id="42" name="seller-live-value">
+            <a:extLst xmlns:a="http://schemas.openxmlformats.org/drawingml/2006/main">
+              <a:ext uri="{FF2B5EF4-FFF2-40B4-BE49-F238E27FC236}">
+                <a16:creationId xmlns:a16="http://schemas.microsoft.com/office/drawing/2014/main" id="{5189F7F7-ACCF-4B47-9C29-35DB46927F51}"/>
+              </a:ext>
+            </a:extLst>
+          </p:cNvPr>
+          <p:cNvSpPr>
+            <a:spLocks xmlns:a="http://schemas.openxmlformats.org/drawingml/2006/main" noGrp="1"/>
+          </p:cNvSpPr>
+          <p:nvPr/>
+        </p:nvSpPr>
+        <p:spPr>
+          <a:xfrm xmlns:a="http://schemas.openxmlformats.org/drawingml/2006/main">
+            <a:off x="1943100" y="4810125"/>
+            <a:ext cx="419100" cy="400050"/>
+          </a:xfrm>
+          <a:prstGeom xmlns:a="http://schemas.openxmlformats.org/drawingml/2006/main" prst="rect">
+            <a:avLst/>
+          </a:prstGeom>
+          <a:noFill xmlns:a="http://schemas.openxmlformats.org/drawingml/2006/main"/>
+          <a:ln xmlns:a="http://schemas.openxmlformats.org/drawingml/2006/main" w="0">
+            <a:noFill/>
+            <a:prstDash val="solid"/>
+          </a:ln>
+        </p:spPr>
+        <p:txBody>
+          <a:bodyPr xmlns:a="http://schemas.openxmlformats.org/drawingml/2006/main" wrap="square" lIns="0" tIns="0" rIns="0" bIns="0" anchor="t">
+            <a:noAutofit/>
+          </a:bodyPr>
+          <a:lstStyle xmlns:a="http://schemas.openxmlformats.org/drawingml/2006/main"/>
+          <a:p xmlns:a="http://schemas.openxmlformats.org/drawingml/2006/main">
+            <a:pPr algn="r">
+              <a:lnSpc>
+                <a:spcPct val="100000"/>
+              </a:lnSpc>
+              <a:buNone/>
+              <a:defRPr sz="2400" b="1">
+                <a:solidFill>
+                  <a:srgbClr val="FF2B79"/>
+                </a:solidFill>
+                <a:latin typeface="Arial Black"/>
+                <a:ea typeface="Arial Black"/>
+                <a:cs typeface="Arial Black"/>
+              </a:defRPr>
+            </a:pPr>
+            <a:r>
+              <a:rPr sz="2400" b="1">
+                <a:solidFill>
+                  <a:srgbClr val="FF2B79"/>
+                </a:solidFill>
+                <a:latin typeface="Arial Black"/>
+                <a:ea typeface="Arial Black"/>
+                <a:cs typeface="Arial Black"/>
+              </a:rPr>
+              <a:t>0</a:t>
+            </a:r>
+          </a:p>
+        </p:txBody>
+      </p:sp>
+      <p:sp>
+        <p:nvSpPr>
+          <p:cNvPr id="43" name="seller-write-label">
+            <a:extLst xmlns:a="http://schemas.openxmlformats.org/drawingml/2006/main">
+              <a:ext uri="{FF2B5EF4-FFF2-40B4-BE49-F238E27FC236}">
+                <a16:creationId xmlns:a16="http://schemas.microsoft.com/office/drawing/2014/main" id="{B9ACF762-E7CF-4AAF-B047-D2EDF31DDB4E}"/>
+              </a:ext>
+            </a:extLst>
+          </p:cNvPr>
+          <p:cNvSpPr>
+            <a:spLocks xmlns:a="http://schemas.openxmlformats.org/drawingml/2006/main" noGrp="1"/>
+          </p:cNvSpPr>
+          <p:nvPr/>
+        </p:nvSpPr>
+        <p:spPr>
+          <a:xfrm xmlns:a="http://schemas.openxmlformats.org/drawingml/2006/main">
+            <a:off x="457200" y="5276850"/>
+            <a:ext cx="1543050" cy="171450"/>
+          </a:xfrm>
+          <a:prstGeom xmlns:a="http://schemas.openxmlformats.org/drawingml/2006/main" prst="rect">
+            <a:avLst/>
+          </a:prstGeom>
+          <a:noFill xmlns:a="http://schemas.openxmlformats.org/drawingml/2006/main"/>
+          <a:ln xmlns:a="http://schemas.openxmlformats.org/drawingml/2006/main" w="0">
+            <a:noFill/>
+            <a:prstDash val="solid"/>
+          </a:ln>
+        </p:spPr>
+        <p:txBody>
+          <a:bodyPr xmlns:a="http://schemas.openxmlformats.org/drawingml/2006/main" wrap="square" lIns="0" tIns="0" rIns="0" bIns="0" anchor="t">
+            <a:noAutofit/>
+          </a:bodyPr>
+          <a:lstStyle xmlns:a="http://schemas.openxmlformats.org/drawingml/2006/main"/>
+          <a:p xmlns:a="http://schemas.openxmlformats.org/drawingml/2006/main">
+            <a:pPr algn="l">
+              <a:lnSpc>
+                <a:spcPct val="100000"/>
+              </a:lnSpc>
+              <a:buNone/>
+              <a:defRPr sz="900" b="0">
+                <a:solidFill>
+                  <a:srgbClr val="858B84"/>
+                </a:solidFill>
+                <a:latin typeface="Courier New"/>
+                <a:ea typeface="Courier New"/>
+                <a:cs typeface="Courier New"/>
+              </a:defRPr>
+            </a:pPr>
+            <a:r>
+              <a:rPr sz="900" b="0">
+                <a:solidFill>
+                  <a:srgbClr val="858B84"/>
+                </a:solidFill>
+                <a:latin typeface="Courier New"/>
+                <a:ea typeface="Courier New"/>
+                <a:cs typeface="Courier New"/>
+              </a:rPr>
+              <a:t>EXTERNAL WRITES</a:t>
+            </a:r>
+          </a:p>
+        </p:txBody>
+      </p:sp>
+      <p:sp>
+        <p:nvSpPr>
+          <p:cNvPr id="44" name="seller-write-value">
+            <a:extLst xmlns:a="http://schemas.openxmlformats.org/drawingml/2006/main">
+              <a:ext uri="{FF2B5EF4-FFF2-40B4-BE49-F238E27FC236}">
+                <a16:creationId xmlns:a16="http://schemas.microsoft.com/office/drawing/2014/main" id="{ED00601A-F12F-4A90-8815-AA6E29740A05}"/>
+              </a:ext>
+            </a:extLst>
+          </p:cNvPr>
+          <p:cNvSpPr>
+            <a:spLocks xmlns:a="http://schemas.openxmlformats.org/drawingml/2006/main" noGrp="1"/>
+          </p:cNvSpPr>
+          <p:nvPr/>
+        </p:nvSpPr>
+        <p:spPr>
+          <a:xfrm xmlns:a="http://schemas.openxmlformats.org/drawingml/2006/main">
+            <a:off x="1943100" y="5133975"/>
+            <a:ext cx="419100" cy="400050"/>
+          </a:xfrm>
+          <a:prstGeom xmlns:a="http://schemas.openxmlformats.org/drawingml/2006/main" prst="rect">
+            <a:avLst/>
+          </a:prstGeom>
+          <a:noFill xmlns:a="http://schemas.openxmlformats.org/drawingml/2006/main"/>
+          <a:ln xmlns:a="http://schemas.openxmlformats.org/drawingml/2006/main" w="0">
+            <a:noFill/>
+            <a:prstDash val="solid"/>
+          </a:ln>
+        </p:spPr>
+        <p:txBody>
+          <a:bodyPr xmlns:a="http://schemas.openxmlformats.org/drawingml/2006/main" wrap="square" lIns="0" tIns="0" rIns="0" bIns="0" anchor="t">
+            <a:noAutofit/>
+          </a:bodyPr>
+          <a:lstStyle xmlns:a="http://schemas.openxmlformats.org/drawingml/2006/main"/>
+          <a:p xmlns:a="http://schemas.openxmlformats.org/drawingml/2006/main">
+            <a:pPr algn="r">
+              <a:lnSpc>
+                <a:spcPct val="100000"/>
+              </a:lnSpc>
+              <a:buNone/>
+              <a:defRPr sz="2400" b="1">
+                <a:solidFill>
+                  <a:srgbClr val="FF2B79"/>
+                </a:solidFill>
+                <a:latin typeface="Arial Black"/>
+                <a:ea typeface="Arial Black"/>
+                <a:cs typeface="Arial Black"/>
+              </a:defRPr>
+            </a:pPr>
+            <a:r>
+              <a:rPr sz="2400" b="1">
+                <a:solidFill>
+                  <a:srgbClr val="FF2B79"/>
+                </a:solidFill>
+                <a:latin typeface="Arial Black"/>
+                <a:ea typeface="Arial Black"/>
+                <a:cs typeface="Arial Black"/>
+              </a:rPr>
+              <a:t>0</a:t>
+            </a:r>
+          </a:p>
+        </p:txBody>
+      </p:sp>
+      <p:sp>
+        <p:nvSpPr>
+          <p:cNvPr id="45" name="market-divider">
+            <a:extLst xmlns:a="http://schemas.openxmlformats.org/drawingml/2006/main">
+              <a:ext uri="{FF2B5EF4-FFF2-40B4-BE49-F238E27FC236}">
+                <a16:creationId xmlns:a16="http://schemas.microsoft.com/office/drawing/2014/main" id="{C321AD61-9F89-49AA-96D0-A4A94A59A98B}"/>
               </a:ext>
             </a:extLst>
           </p:cNvPr>
@@ -11208,10 +12088,10 @@
       </p:sp>
       <p:sp>
         <p:nvSpPr>
-          <p:cNvPr id="41" name="offer-index-0">
-            <a:extLst xmlns:a="http://schemas.openxmlformats.org/drawingml/2006/main">
-              <a:ext uri="{FF2B5EF4-FFF2-40B4-BE49-F238E27FC236}">
-                <a16:creationId xmlns:a16="http://schemas.microsoft.com/office/drawing/2014/main" id="{386752D5-4B38-4045-818E-C3C0625C8642}"/>
+          <p:cNvPr id="46" name="offer-index-0">
+            <a:extLst xmlns:a="http://schemas.openxmlformats.org/drawingml/2006/main">
+              <a:ext uri="{FF2B5EF4-FFF2-40B4-BE49-F238E27FC236}">
+                <a16:creationId xmlns:a16="http://schemas.microsoft.com/office/drawing/2014/main" id="{E954075B-D57C-4EF6-AA6B-CDAD57970FDA}"/>
               </a:ext>
             </a:extLst>
           </p:cNvPr>
@@ -11270,10 +12150,10 @@
       </p:sp>
       <p:sp>
         <p:nvSpPr>
-          <p:cNvPr id="42" name="offer-merchant-0">
-            <a:extLst xmlns:a="http://schemas.openxmlformats.org/drawingml/2006/main">
-              <a:ext uri="{FF2B5EF4-FFF2-40B4-BE49-F238E27FC236}">
-                <a16:creationId xmlns:a16="http://schemas.microsoft.com/office/drawing/2014/main" id="{67C622A4-EC49-45DB-ACF1-485F32B84AD2}"/>
+          <p:cNvPr id="47" name="offer-merchant-0">
+            <a:extLst xmlns:a="http://schemas.openxmlformats.org/drawingml/2006/main">
+              <a:ext uri="{FF2B5EF4-FFF2-40B4-BE49-F238E27FC236}">
+                <a16:creationId xmlns:a16="http://schemas.microsoft.com/office/drawing/2014/main" id="{44C7438A-9D6E-499D-9344-30C7C1D01115}"/>
               </a:ext>
             </a:extLst>
           </p:cNvPr>
@@ -11332,10 +12212,10 @@
       </p:sp>
       <p:sp>
         <p:nvSpPr>
-          <p:cNvPr id="43" name="offer-initial-0">
-            <a:extLst xmlns:a="http://schemas.openxmlformats.org/drawingml/2006/main">
-              <a:ext uri="{FF2B5EF4-FFF2-40B4-BE49-F238E27FC236}">
-                <a16:creationId xmlns:a16="http://schemas.microsoft.com/office/drawing/2014/main" id="{2E852748-CF6A-460C-B830-F4F150F97FC7}"/>
+          <p:cNvPr id="48" name="offer-initial-0">
+            <a:extLst xmlns:a="http://schemas.openxmlformats.org/drawingml/2006/main">
+              <a:ext uri="{FF2B5EF4-FFF2-40B4-BE49-F238E27FC236}">
+                <a16:creationId xmlns:a16="http://schemas.microsoft.com/office/drawing/2014/main" id="{DC13412E-D0D7-4FB5-B19E-2B9B003BB0EA}"/>
               </a:ext>
             </a:extLst>
           </p:cNvPr>
@@ -11394,10 +12274,10 @@
       </p:sp>
       <p:sp>
         <p:nvSpPr>
-          <p:cNvPr id="44" name="offer-arrow-0-shaft">
-            <a:extLst xmlns:a="http://schemas.openxmlformats.org/drawingml/2006/main">
-              <a:ext uri="{FF2B5EF4-FFF2-40B4-BE49-F238E27FC236}">
-                <a16:creationId xmlns:a16="http://schemas.microsoft.com/office/drawing/2014/main" id="{8B2B4BA9-AF69-454D-8AC4-5679A084BAB9}"/>
+          <p:cNvPr id="49" name="offer-arrow-0-shaft">
+            <a:extLst xmlns:a="http://schemas.openxmlformats.org/drawingml/2006/main">
+              <a:ext uri="{FF2B5EF4-FFF2-40B4-BE49-F238E27FC236}">
+                <a16:creationId xmlns:a16="http://schemas.microsoft.com/office/drawing/2014/main" id="{E992A82D-0ACA-473D-98DA-E1E9F5B2854E}"/>
               </a:ext>
             </a:extLst>
           </p:cNvPr>
@@ -11425,10 +12305,10 @@
       </p:sp>
       <p:sp>
         <p:nvSpPr>
-          <p:cNvPr id="45" name="offer-arrow-0-head">
-            <a:extLst xmlns:a="http://schemas.openxmlformats.org/drawingml/2006/main">
-              <a:ext uri="{FF2B5EF4-FFF2-40B4-BE49-F238E27FC236}">
-                <a16:creationId xmlns:a16="http://schemas.microsoft.com/office/drawing/2014/main" id="{18E8C54A-72CD-4D15-8756-99F4FE64E418}"/>
+          <p:cNvPr id="50" name="offer-arrow-0-head">
+            <a:extLst xmlns:a="http://schemas.openxmlformats.org/drawingml/2006/main">
+              <a:ext uri="{FF2B5EF4-FFF2-40B4-BE49-F238E27FC236}">
+                <a16:creationId xmlns:a16="http://schemas.microsoft.com/office/drawing/2014/main" id="{17F73553-FEA9-4B17-8FDC-1AD9B2F8085C}"/>
               </a:ext>
             </a:extLst>
           </p:cNvPr>
@@ -11456,10 +12336,10 @@
       </p:sp>
       <p:sp>
         <p:nvSpPr>
-          <p:cNvPr id="46" name="offer-final-0">
-            <a:extLst xmlns:a="http://schemas.openxmlformats.org/drawingml/2006/main">
-              <a:ext uri="{FF2B5EF4-FFF2-40B4-BE49-F238E27FC236}">
-                <a16:creationId xmlns:a16="http://schemas.microsoft.com/office/drawing/2014/main" id="{6B3A8DB5-293A-4D05-A2C7-4F249E118B8F}"/>
+          <p:cNvPr id="51" name="offer-final-0">
+            <a:extLst xmlns:a="http://schemas.openxmlformats.org/drawingml/2006/main">
+              <a:ext uri="{FF2B5EF4-FFF2-40B4-BE49-F238E27FC236}">
+                <a16:creationId xmlns:a16="http://schemas.microsoft.com/office/drawing/2014/main" id="{2A4BFA45-06FE-4F7A-B4F4-312039558D19}"/>
               </a:ext>
             </a:extLst>
           </p:cNvPr>
@@ -11518,10 +12398,10 @@
       </p:sp>
       <p:sp>
         <p:nvSpPr>
-          <p:cNvPr id="47" name="winner-label">
-            <a:extLst xmlns:a="http://schemas.openxmlformats.org/drawingml/2006/main">
-              <a:ext uri="{FF2B5EF4-FFF2-40B4-BE49-F238E27FC236}">
-                <a16:creationId xmlns:a16="http://schemas.microsoft.com/office/drawing/2014/main" id="{480B36D0-FCF7-41C3-8B30-9BA85225DAC2}"/>
+          <p:cNvPr id="52" name="winner-label">
+            <a:extLst xmlns:a="http://schemas.openxmlformats.org/drawingml/2006/main">
+              <a:ext uri="{FF2B5EF4-FFF2-40B4-BE49-F238E27FC236}">
+                <a16:creationId xmlns:a16="http://schemas.microsoft.com/office/drawing/2014/main" id="{CF4FBF47-01FB-4A2F-81C7-1DE488383414}"/>
               </a:ext>
             </a:extLst>
           </p:cNvPr>
@@ -11580,10 +12460,10 @@
       </p:sp>
       <p:sp>
         <p:nvSpPr>
-          <p:cNvPr id="48" name="offer-rule-0">
-            <a:extLst xmlns:a="http://schemas.openxmlformats.org/drawingml/2006/main">
-              <a:ext uri="{FF2B5EF4-FFF2-40B4-BE49-F238E27FC236}">
-                <a16:creationId xmlns:a16="http://schemas.microsoft.com/office/drawing/2014/main" id="{880011BD-50AB-4749-88A1-7944F2201CF7}"/>
+          <p:cNvPr id="53" name="offer-rule-0">
+            <a:extLst xmlns:a="http://schemas.openxmlformats.org/drawingml/2006/main">
+              <a:ext uri="{FF2B5EF4-FFF2-40B4-BE49-F238E27FC236}">
+                <a16:creationId xmlns:a16="http://schemas.microsoft.com/office/drawing/2014/main" id="{9DA58E4C-0511-4F75-8EF5-44ACD98B8E41}"/>
               </a:ext>
             </a:extLst>
           </p:cNvPr>
@@ -11611,10 +12491,10 @@
       </p:sp>
       <p:sp>
         <p:nvSpPr>
-          <p:cNvPr id="49" name="offer-index-1">
-            <a:extLst xmlns:a="http://schemas.openxmlformats.org/drawingml/2006/main">
-              <a:ext uri="{FF2B5EF4-FFF2-40B4-BE49-F238E27FC236}">
-                <a16:creationId xmlns:a16="http://schemas.microsoft.com/office/drawing/2014/main" id="{BBE99B68-E9B8-4A6E-80A0-8B063F62A1CA}"/>
+          <p:cNvPr id="54" name="offer-index-1">
+            <a:extLst xmlns:a="http://schemas.openxmlformats.org/drawingml/2006/main">
+              <a:ext uri="{FF2B5EF4-FFF2-40B4-BE49-F238E27FC236}">
+                <a16:creationId xmlns:a16="http://schemas.microsoft.com/office/drawing/2014/main" id="{120F9016-D75A-4EC6-866A-97302B7F6B13}"/>
               </a:ext>
             </a:extLst>
           </p:cNvPr>
@@ -11673,10 +12553,10 @@
       </p:sp>
       <p:sp>
         <p:nvSpPr>
-          <p:cNvPr id="50" name="offer-merchant-1">
-            <a:extLst xmlns:a="http://schemas.openxmlformats.org/drawingml/2006/main">
-              <a:ext uri="{FF2B5EF4-FFF2-40B4-BE49-F238E27FC236}">
-                <a16:creationId xmlns:a16="http://schemas.microsoft.com/office/drawing/2014/main" id="{67379469-72A9-43D6-A86B-2F7D81E08450}"/>
+          <p:cNvPr id="55" name="offer-merchant-1">
+            <a:extLst xmlns:a="http://schemas.openxmlformats.org/drawingml/2006/main">
+              <a:ext uri="{FF2B5EF4-FFF2-40B4-BE49-F238E27FC236}">
+                <a16:creationId xmlns:a16="http://schemas.microsoft.com/office/drawing/2014/main" id="{A6CC26B9-E5C9-4A1D-A45E-84853DE56F99}"/>
               </a:ext>
             </a:extLst>
           </p:cNvPr>
@@ -11735,10 +12615,10 @@
       </p:sp>
       <p:sp>
         <p:nvSpPr>
-          <p:cNvPr id="51" name="offer-initial-1">
-            <a:extLst xmlns:a="http://schemas.openxmlformats.org/drawingml/2006/main">
-              <a:ext uri="{FF2B5EF4-FFF2-40B4-BE49-F238E27FC236}">
-                <a16:creationId xmlns:a16="http://schemas.microsoft.com/office/drawing/2014/main" id="{5631C953-C1E9-4F35-918F-75E6BC0600BD}"/>
+          <p:cNvPr id="56" name="offer-initial-1">
+            <a:extLst xmlns:a="http://schemas.openxmlformats.org/drawingml/2006/main">
+              <a:ext uri="{FF2B5EF4-FFF2-40B4-BE49-F238E27FC236}">
+                <a16:creationId xmlns:a16="http://schemas.microsoft.com/office/drawing/2014/main" id="{36745BA5-E9F5-4C58-BF05-49BDB4BBD6F2}"/>
               </a:ext>
             </a:extLst>
           </p:cNvPr>
@@ -11797,10 +12677,10 @@
       </p:sp>
       <p:sp>
         <p:nvSpPr>
-          <p:cNvPr id="52" name="offer-arrow-1-shaft">
-            <a:extLst xmlns:a="http://schemas.openxmlformats.org/drawingml/2006/main">
-              <a:ext uri="{FF2B5EF4-FFF2-40B4-BE49-F238E27FC236}">
-                <a16:creationId xmlns:a16="http://schemas.microsoft.com/office/drawing/2014/main" id="{725D061B-FFB3-4903-8C97-AD9B61D441EA}"/>
+          <p:cNvPr id="57" name="offer-arrow-1-shaft">
+            <a:extLst xmlns:a="http://schemas.openxmlformats.org/drawingml/2006/main">
+              <a:ext uri="{FF2B5EF4-FFF2-40B4-BE49-F238E27FC236}">
+                <a16:creationId xmlns:a16="http://schemas.microsoft.com/office/drawing/2014/main" id="{C2D859C6-512A-40B6-AF6F-C0314D7BAF91}"/>
               </a:ext>
             </a:extLst>
           </p:cNvPr>
@@ -11828,10 +12708,10 @@
       </p:sp>
       <p:sp>
         <p:nvSpPr>
-          <p:cNvPr id="53" name="offer-arrow-1-head">
-            <a:extLst xmlns:a="http://schemas.openxmlformats.org/drawingml/2006/main">
-              <a:ext uri="{FF2B5EF4-FFF2-40B4-BE49-F238E27FC236}">
-                <a16:creationId xmlns:a16="http://schemas.microsoft.com/office/drawing/2014/main" id="{6C00B895-6501-4C10-B8E5-7CF78DDE9962}"/>
+          <p:cNvPr id="58" name="offer-arrow-1-head">
+            <a:extLst xmlns:a="http://schemas.openxmlformats.org/drawingml/2006/main">
+              <a:ext uri="{FF2B5EF4-FFF2-40B4-BE49-F238E27FC236}">
+                <a16:creationId xmlns:a16="http://schemas.microsoft.com/office/drawing/2014/main" id="{592A92A9-69E6-4EEB-AA37-673BEFC0BB2A}"/>
               </a:ext>
             </a:extLst>
           </p:cNvPr>
@@ -11859,10 +12739,10 @@
       </p:sp>
       <p:sp>
         <p:nvSpPr>
-          <p:cNvPr id="54" name="offer-final-1">
-            <a:extLst xmlns:a="http://schemas.openxmlformats.org/drawingml/2006/main">
-              <a:ext uri="{FF2B5EF4-FFF2-40B4-BE49-F238E27FC236}">
-                <a16:creationId xmlns:a16="http://schemas.microsoft.com/office/drawing/2014/main" id="{36BF27FF-9202-4001-A1CF-222A4F9A8404}"/>
+          <p:cNvPr id="59" name="offer-final-1">
+            <a:extLst xmlns:a="http://schemas.openxmlformats.org/drawingml/2006/main">
+              <a:ext uri="{FF2B5EF4-FFF2-40B4-BE49-F238E27FC236}">
+                <a16:creationId xmlns:a16="http://schemas.microsoft.com/office/drawing/2014/main" id="{7929ECAA-0DE4-46F6-8DCC-A0F4E32B98C4}"/>
               </a:ext>
             </a:extLst>
           </p:cNvPr>
@@ -11921,10 +12801,10 @@
       </p:sp>
       <p:sp>
         <p:nvSpPr>
-          <p:cNvPr id="55" name="offer-rule-1">
-            <a:extLst xmlns:a="http://schemas.openxmlformats.org/drawingml/2006/main">
-              <a:ext uri="{FF2B5EF4-FFF2-40B4-BE49-F238E27FC236}">
-                <a16:creationId xmlns:a16="http://schemas.microsoft.com/office/drawing/2014/main" id="{9995E8B5-F853-4CE0-B7A6-7B452893D1FD}"/>
+          <p:cNvPr id="60" name="offer-rule-1">
+            <a:extLst xmlns:a="http://schemas.openxmlformats.org/drawingml/2006/main">
+              <a:ext uri="{FF2B5EF4-FFF2-40B4-BE49-F238E27FC236}">
+                <a16:creationId xmlns:a16="http://schemas.microsoft.com/office/drawing/2014/main" id="{70F929A2-F868-4973-9867-6AB913601140}"/>
               </a:ext>
             </a:extLst>
           </p:cNvPr>
@@ -11952,10 +12832,10 @@
       </p:sp>
       <p:sp>
         <p:nvSpPr>
-          <p:cNvPr id="56" name="offer-index-2">
-            <a:extLst xmlns:a="http://schemas.openxmlformats.org/drawingml/2006/main">
-              <a:ext uri="{FF2B5EF4-FFF2-40B4-BE49-F238E27FC236}">
-                <a16:creationId xmlns:a16="http://schemas.microsoft.com/office/drawing/2014/main" id="{8FFA1E36-DB2D-417C-89D6-27AFC5CAAC94}"/>
+          <p:cNvPr id="61" name="offer-index-2">
+            <a:extLst xmlns:a="http://schemas.openxmlformats.org/drawingml/2006/main">
+              <a:ext uri="{FF2B5EF4-FFF2-40B4-BE49-F238E27FC236}">
+                <a16:creationId xmlns:a16="http://schemas.microsoft.com/office/drawing/2014/main" id="{54B5450D-EFB0-4EB2-9998-291190C5EA8D}"/>
               </a:ext>
             </a:extLst>
           </p:cNvPr>
@@ -12014,10 +12894,10 @@
       </p:sp>
       <p:sp>
         <p:nvSpPr>
-          <p:cNvPr id="57" name="offer-merchant-2">
-            <a:extLst xmlns:a="http://schemas.openxmlformats.org/drawingml/2006/main">
-              <a:ext uri="{FF2B5EF4-FFF2-40B4-BE49-F238E27FC236}">
-                <a16:creationId xmlns:a16="http://schemas.microsoft.com/office/drawing/2014/main" id="{5881E874-4C26-4484-BAE1-B26E70D5B805}"/>
+          <p:cNvPr id="62" name="offer-merchant-2">
+            <a:extLst xmlns:a="http://schemas.openxmlformats.org/drawingml/2006/main">
+              <a:ext uri="{FF2B5EF4-FFF2-40B4-BE49-F238E27FC236}">
+                <a16:creationId xmlns:a16="http://schemas.microsoft.com/office/drawing/2014/main" id="{11147E4E-14ED-4C0D-B783-01946189BE58}"/>
               </a:ext>
             </a:extLst>
           </p:cNvPr>
@@ -12076,10 +12956,10 @@
       </p:sp>
       <p:sp>
         <p:nvSpPr>
-          <p:cNvPr id="58" name="offer-initial-2">
-            <a:extLst xmlns:a="http://schemas.openxmlformats.org/drawingml/2006/main">
-              <a:ext uri="{FF2B5EF4-FFF2-40B4-BE49-F238E27FC236}">
-                <a16:creationId xmlns:a16="http://schemas.microsoft.com/office/drawing/2014/main" id="{37D9459D-9CCE-4690-86AC-1F11324054B0}"/>
+          <p:cNvPr id="63" name="offer-initial-2">
+            <a:extLst xmlns:a="http://schemas.openxmlformats.org/drawingml/2006/main">
+              <a:ext uri="{FF2B5EF4-FFF2-40B4-BE49-F238E27FC236}">
+                <a16:creationId xmlns:a16="http://schemas.microsoft.com/office/drawing/2014/main" id="{EC9AAD47-50D6-4FB3-AE40-3CDDF50C6822}"/>
               </a:ext>
             </a:extLst>
           </p:cNvPr>
@@ -12138,10 +13018,10 @@
       </p:sp>
       <p:sp>
         <p:nvSpPr>
-          <p:cNvPr id="59" name="offer-arrow-2-shaft">
-            <a:extLst xmlns:a="http://schemas.openxmlformats.org/drawingml/2006/main">
-              <a:ext uri="{FF2B5EF4-FFF2-40B4-BE49-F238E27FC236}">
-                <a16:creationId xmlns:a16="http://schemas.microsoft.com/office/drawing/2014/main" id="{728DB453-7758-46E4-BFD9-13FD995D52A8}"/>
+          <p:cNvPr id="64" name="offer-arrow-2-shaft">
+            <a:extLst xmlns:a="http://schemas.openxmlformats.org/drawingml/2006/main">
+              <a:ext uri="{FF2B5EF4-FFF2-40B4-BE49-F238E27FC236}">
+                <a16:creationId xmlns:a16="http://schemas.microsoft.com/office/drawing/2014/main" id="{913A38BC-EFF5-4B76-919F-5EF714FE9EF4}"/>
               </a:ext>
             </a:extLst>
           </p:cNvPr>
@@ -12169,10 +13049,10 @@
       </p:sp>
       <p:sp>
         <p:nvSpPr>
-          <p:cNvPr id="60" name="offer-arrow-2-head">
-            <a:extLst xmlns:a="http://schemas.openxmlformats.org/drawingml/2006/main">
-              <a:ext uri="{FF2B5EF4-FFF2-40B4-BE49-F238E27FC236}">
-                <a16:creationId xmlns:a16="http://schemas.microsoft.com/office/drawing/2014/main" id="{F4344DDA-A1D2-4502-A0D9-6B9BD74143CB}"/>
+          <p:cNvPr id="65" name="offer-arrow-2-head">
+            <a:extLst xmlns:a="http://schemas.openxmlformats.org/drawingml/2006/main">
+              <a:ext uri="{FF2B5EF4-FFF2-40B4-BE49-F238E27FC236}">
+                <a16:creationId xmlns:a16="http://schemas.microsoft.com/office/drawing/2014/main" id="{A236F2EF-9640-4158-92E5-B73AB9BABDD8}"/>
               </a:ext>
             </a:extLst>
           </p:cNvPr>
@@ -12200,10 +13080,10 @@
       </p:sp>
       <p:sp>
         <p:nvSpPr>
-          <p:cNvPr id="61" name="offer-final-2">
-            <a:extLst xmlns:a="http://schemas.openxmlformats.org/drawingml/2006/main">
-              <a:ext uri="{FF2B5EF4-FFF2-40B4-BE49-F238E27FC236}">
-                <a16:creationId xmlns:a16="http://schemas.microsoft.com/office/drawing/2014/main" id="{BE96BEE9-43F4-4860-A775-CBE91C17ACA9}"/>
+          <p:cNvPr id="66" name="offer-final-2">
+            <a:extLst xmlns:a="http://schemas.openxmlformats.org/drawingml/2006/main">
+              <a:ext uri="{FF2B5EF4-FFF2-40B4-BE49-F238E27FC236}">
+                <a16:creationId xmlns:a16="http://schemas.microsoft.com/office/drawing/2014/main" id="{242370C8-8FAB-4215-BF02-DD9E62947AD5}"/>
               </a:ext>
             </a:extLst>
           </p:cNvPr>
@@ -12262,10 +13142,10 @@
       </p:sp>
       <p:sp>
         <p:nvSpPr>
-          <p:cNvPr id="62" name="offer-rule-2">
-            <a:extLst xmlns:a="http://schemas.openxmlformats.org/drawingml/2006/main">
-              <a:ext uri="{FF2B5EF4-FFF2-40B4-BE49-F238E27FC236}">
-                <a16:creationId xmlns:a16="http://schemas.microsoft.com/office/drawing/2014/main" id="{65343888-FE97-441B-8324-5F9AB3F894E0}"/>
+          <p:cNvPr id="67" name="offer-rule-2">
+            <a:extLst xmlns:a="http://schemas.openxmlformats.org/drawingml/2006/main">
+              <a:ext uri="{FF2B5EF4-FFF2-40B4-BE49-F238E27FC236}">
+                <a16:creationId xmlns:a16="http://schemas.microsoft.com/office/drawing/2014/main" id="{5589B4A7-E2B4-4F7A-BA0C-AFD67C8749DE}"/>
               </a:ext>
             </a:extLst>
           </p:cNvPr>
@@ -12293,22 +13173,55 @@
       </p:sp>
       <p:sp>
         <p:nvSpPr>
-          <p:cNvPr id="63" name="rfp-label">
-            <a:extLst xmlns:a="http://schemas.openxmlformats.org/drawingml/2006/main">
-              <a:ext uri="{FF2B5EF4-FFF2-40B4-BE49-F238E27FC236}">
-                <a16:creationId xmlns:a16="http://schemas.microsoft.com/office/drawing/2014/main" id="{A0B3383D-86C2-4EA2-BFA7-4DF2089E3760}"/>
-              </a:ext>
-            </a:extLst>
-          </p:cNvPr>
-          <p:cNvSpPr>
-            <a:spLocks xmlns:a="http://schemas.openxmlformats.org/drawingml/2006/main" noGrp="1"/>
-          </p:cNvSpPr>
-          <p:nvPr/>
-        </p:nvSpPr>
-        <p:spPr>
-          <a:xfrm xmlns:a="http://schemas.openxmlformats.org/drawingml/2006/main">
-            <a:off x="3733800" y="5772150"/>
-            <a:ext cx="1809750" cy="190500"/>
+          <p:cNvPr id="68" name="seller-boundary-bg">
+            <a:extLst xmlns:a="http://schemas.openxmlformats.org/drawingml/2006/main">
+              <a:ext uri="{FF2B5EF4-FFF2-40B4-BE49-F238E27FC236}">
+                <a16:creationId xmlns:a16="http://schemas.microsoft.com/office/drawing/2014/main" id="{DB23EC4E-4955-49C3-9E94-5D3D44299900}"/>
+              </a:ext>
+            </a:extLst>
+          </p:cNvPr>
+          <p:cNvSpPr>
+            <a:spLocks xmlns:a="http://schemas.openxmlformats.org/drawingml/2006/main" noGrp="1"/>
+          </p:cNvSpPr>
+          <p:nvPr/>
+        </p:nvSpPr>
+        <p:spPr>
+          <a:xfrm xmlns:a="http://schemas.openxmlformats.org/drawingml/2006/main">
+            <a:off x="3733800" y="5695950"/>
+            <a:ext cx="8077200" cy="342900"/>
+          </a:xfrm>
+          <a:prstGeom xmlns:a="http://schemas.openxmlformats.org/drawingml/2006/main" prst="rect">
+            <a:avLst/>
+          </a:prstGeom>
+          <a:solidFill xmlns:a="http://schemas.openxmlformats.org/drawingml/2006/main">
+            <a:srgbClr val="2A101A"/>
+          </a:solidFill>
+          <a:ln xmlns:a="http://schemas.openxmlformats.org/drawingml/2006/main" w="9525">
+            <a:solidFill>
+              <a:srgbClr val="FF2B79"/>
+            </a:solidFill>
+            <a:prstDash val="solid"/>
+          </a:ln>
+        </p:spPr>
+      </p:sp>
+      <p:sp>
+        <p:nvSpPr>
+          <p:cNvPr id="69" name="rfp-label">
+            <a:extLst xmlns:a="http://schemas.openxmlformats.org/drawingml/2006/main">
+              <a:ext uri="{FF2B5EF4-FFF2-40B4-BE49-F238E27FC236}">
+                <a16:creationId xmlns:a16="http://schemas.microsoft.com/office/drawing/2014/main" id="{386E8816-C280-489B-BF08-73C3AEFE9DB7}"/>
+              </a:ext>
+            </a:extLst>
+          </p:cNvPr>
+          <p:cNvSpPr>
+            <a:spLocks xmlns:a="http://schemas.openxmlformats.org/drawingml/2006/main" noGrp="1"/>
+          </p:cNvSpPr>
+          <p:nvPr/>
+        </p:nvSpPr>
+        <p:spPr>
+          <a:xfrm xmlns:a="http://schemas.openxmlformats.org/drawingml/2006/main">
+            <a:off x="3886200" y="5791200"/>
+            <a:ext cx="3333750" cy="171450"/>
           </a:xfrm>
           <a:prstGeom xmlns:a="http://schemas.openxmlformats.org/drawingml/2006/main" prst="rect">
             <a:avLst/>
@@ -12330,9 +13243,9 @@
                 <a:spcPct val="100000"/>
               </a:lnSpc>
               <a:buNone/>
-              <a:defRPr sz="1125" b="1">
-                <a:solidFill>
-                  <a:srgbClr val="C7F52F"/>
+              <a:defRPr sz="900" b="1">
+                <a:solidFill>
+                  <a:srgbClr val="D3D1C8"/>
                 </a:solidFill>
                 <a:latin typeface="Courier New"/>
                 <a:ea typeface="Courier New"/>
@@ -12340,37 +13253,37 @@
               </a:defRPr>
             </a:pPr>
             <a:r>
-              <a:rPr sz="1125" b="1">
-                <a:solidFill>
-                  <a:srgbClr val="C7F52F"/>
+              <a:rPr sz="900" b="1">
+                <a:solidFill>
+                  <a:srgbClr val="D3D1C8"/>
                 </a:solidFill>
                 <a:latin typeface="Courier New"/>
                 <a:ea typeface="Courier New"/>
                 <a:cs typeface="Courier New"/>
               </a:rPr>
-              <a:t>ANONYMIZED RFP</a:t>
+              <a:t>SELLER PILOT = Q&amp;A CONTRACT ARTIFACT</a:t>
             </a:r>
           </a:p>
         </p:txBody>
       </p:sp>
       <p:sp>
         <p:nvSpPr>
-          <p:cNvPr id="64" name="policy-list">
-            <a:extLst xmlns:a="http://schemas.openxmlformats.org/drawingml/2006/main">
-              <a:ext uri="{FF2B5EF4-FFF2-40B4-BE49-F238E27FC236}">
-                <a16:creationId xmlns:a16="http://schemas.microsoft.com/office/drawing/2014/main" id="{EA9FB647-971B-4775-9CAC-A493E3771506}"/>
-              </a:ext>
-            </a:extLst>
-          </p:cNvPr>
-          <p:cNvSpPr>
-            <a:spLocks xmlns:a="http://schemas.openxmlformats.org/drawingml/2006/main" noGrp="1"/>
-          </p:cNvSpPr>
-          <p:nvPr/>
-        </p:nvSpPr>
-        <p:spPr>
-          <a:xfrm xmlns:a="http://schemas.openxmlformats.org/drawingml/2006/main">
-            <a:off x="5638800" y="5772150"/>
-            <a:ext cx="6172200" cy="190500"/>
+          <p:cNvPr id="70" name="policy-list">
+            <a:extLst xmlns:a="http://schemas.openxmlformats.org/drawingml/2006/main">
+              <a:ext uri="{FF2B5EF4-FFF2-40B4-BE49-F238E27FC236}">
+                <a16:creationId xmlns:a16="http://schemas.microsoft.com/office/drawing/2014/main" id="{ECBE3A68-FA14-4804-BCE2-E7E2F8D8E827}"/>
+              </a:ext>
+            </a:extLst>
+          </p:cNvPr>
+          <p:cNvSpPr>
+            <a:spLocks xmlns:a="http://schemas.openxmlformats.org/drawingml/2006/main" noGrp="1"/>
+          </p:cNvSpPr>
+          <p:nvPr/>
+        </p:nvSpPr>
+        <p:spPr>
+          <a:xfrm xmlns:a="http://schemas.openxmlformats.org/drawingml/2006/main">
+            <a:off x="7239000" y="5791200"/>
+            <a:ext cx="4419600" cy="171450"/>
           </a:xfrm>
           <a:prstGeom xmlns:a="http://schemas.openxmlformats.org/drawingml/2006/main" prst="rect">
             <a:avLst/>
@@ -12392,9 +13305,9 @@
                 <a:spcPct val="100000"/>
               </a:lnSpc>
               <a:buNone/>
-              <a:defRPr sz="1125" b="0">
-                <a:solidFill>
-                  <a:srgbClr val="858B84"/>
+              <a:defRPr sz="825" b="1">
+                <a:solidFill>
+                  <a:srgbClr val="FF2B79"/>
                 </a:solidFill>
                 <a:latin typeface="Courier New"/>
                 <a:ea typeface="Courier New"/>
@@ -12402,15 +13315,15 @@
               </a:defRPr>
             </a:pPr>
             <a:r>
-              <a:rPr sz="1125" b="0">
-                <a:solidFill>
-                  <a:srgbClr val="858B84"/>
+              <a:rPr sz="825" b="1">
+                <a:solidFill>
+                  <a:srgbClr val="FF2B79"/>
                 </a:solidFill>
                 <a:latin typeface="Courier New"/>
                 <a:ea typeface="Courier New"/>
                 <a:cs typeface="Courier New"/>
               </a:rPr>
-              <a:t>PRICE · DELIVERY · WARRANTY · QUANTITY · FRESHNESS · PRIVATE MANDATES</a:t>
+              <a:t>NO TRACTION · NO BINDING BID · NO ORDER · NO PROVIDER CALL</a:t>
             </a:r>
           </a:p>
         </p:txBody>
@@ -12418,7 +13331,7 @@
     </p:spTree>
     <p:extLst>
       <p:ext uri="{BB962C8B-B14F-4D97-AF65-F5344CB8AC3E}">
-        <p14:creationId xmlns:p14="http://schemas.microsoft.com/office/powerpoint/2010/main" val="1308508673"/>
+        <p14:creationId xmlns:p14="http://schemas.microsoft.com/office/powerpoint/2010/main" val="1707242127"/>
       </p:ext>
     </p:extLst>
   </p:cSld>
@@ -12446,10 +13359,10 @@
       </p:grpSpPr>
       <p:sp>
         <p:nvSpPr>
-          <p:cNvPr id="71" name="grid-v-40">
-            <a:extLst xmlns:a="http://schemas.openxmlformats.org/drawingml/2006/main">
-              <a:ext uri="{FF2B5EF4-FFF2-40B4-BE49-F238E27FC236}">
-                <a16:creationId xmlns:a16="http://schemas.microsoft.com/office/drawing/2014/main" id="{4BF098D6-45AF-4443-B79C-4AAEAB694463}"/>
+          <p:cNvPr id="72" name="grid-v-40">
+            <a:extLst xmlns:a="http://schemas.openxmlformats.org/drawingml/2006/main">
+              <a:ext uri="{FF2B5EF4-FFF2-40B4-BE49-F238E27FC236}">
+                <a16:creationId xmlns:a16="http://schemas.microsoft.com/office/drawing/2014/main" id="{E5E88428-B909-4D65-9E5F-DFEF2CA3F3C4}"/>
               </a:ext>
             </a:extLst>
           </p:cNvPr>
@@ -12480,7 +13393,7 @@
           <p:cNvPr id="2" name="grid-v-104">
             <a:extLst xmlns:a="http://schemas.openxmlformats.org/drawingml/2006/main">
               <a:ext uri="{FF2B5EF4-FFF2-40B4-BE49-F238E27FC236}">
-                <a16:creationId xmlns:a16="http://schemas.microsoft.com/office/drawing/2014/main" id="{275AD967-11EF-4CB7-A850-41269BD4254F}"/>
+                <a16:creationId xmlns:a16="http://schemas.microsoft.com/office/drawing/2014/main" id="{85117301-A283-496F-9E67-3B8E844ADA77}"/>
               </a:ext>
             </a:extLst>
           </p:cNvPr>
@@ -12511,7 +13424,7 @@
           <p:cNvPr id="3" name="grid-v-168">
             <a:extLst xmlns:a="http://schemas.openxmlformats.org/drawingml/2006/main">
               <a:ext uri="{FF2B5EF4-FFF2-40B4-BE49-F238E27FC236}">
-                <a16:creationId xmlns:a16="http://schemas.microsoft.com/office/drawing/2014/main" id="{B4A4AB80-4799-4D77-BBDD-34BB417B170B}"/>
+                <a16:creationId xmlns:a16="http://schemas.microsoft.com/office/drawing/2014/main" id="{5C32576E-D75C-40F8-B009-5320783459EB}"/>
               </a:ext>
             </a:extLst>
           </p:cNvPr>
@@ -12542,7 +13455,7 @@
           <p:cNvPr id="4" name="grid-v-232">
             <a:extLst xmlns:a="http://schemas.openxmlformats.org/drawingml/2006/main">
               <a:ext uri="{FF2B5EF4-FFF2-40B4-BE49-F238E27FC236}">
-                <a16:creationId xmlns:a16="http://schemas.microsoft.com/office/drawing/2014/main" id="{A4DB3FE2-93B3-4DE7-8866-92FBD975C9F6}"/>
+                <a16:creationId xmlns:a16="http://schemas.microsoft.com/office/drawing/2014/main" id="{587DAB94-31CD-4962-B23C-62EE1D2B132D}"/>
               </a:ext>
             </a:extLst>
           </p:cNvPr>
@@ -12573,7 +13486,7 @@
           <p:cNvPr id="5" name="grid-v-296">
             <a:extLst xmlns:a="http://schemas.openxmlformats.org/drawingml/2006/main">
               <a:ext uri="{FF2B5EF4-FFF2-40B4-BE49-F238E27FC236}">
-                <a16:creationId xmlns:a16="http://schemas.microsoft.com/office/drawing/2014/main" id="{824473C7-BFEA-4194-BB56-A09985AA07BB}"/>
+                <a16:creationId xmlns:a16="http://schemas.microsoft.com/office/drawing/2014/main" id="{B64D5B16-12A3-478F-A481-A05C5B893B7F}"/>
               </a:ext>
             </a:extLst>
           </p:cNvPr>
@@ -12604,7 +13517,7 @@
           <p:cNvPr id="6" name="grid-v-360">
             <a:extLst xmlns:a="http://schemas.openxmlformats.org/drawingml/2006/main">
               <a:ext uri="{FF2B5EF4-FFF2-40B4-BE49-F238E27FC236}">
-                <a16:creationId xmlns:a16="http://schemas.microsoft.com/office/drawing/2014/main" id="{309D6248-1625-48AE-A750-3426BE3299E6}"/>
+                <a16:creationId xmlns:a16="http://schemas.microsoft.com/office/drawing/2014/main" id="{23CDFEB2-14C0-44FF-801C-DEBDE8B2243A}"/>
               </a:ext>
             </a:extLst>
           </p:cNvPr>
@@ -12635,7 +13548,7 @@
           <p:cNvPr id="7" name="grid-v-424">
             <a:extLst xmlns:a="http://schemas.openxmlformats.org/drawingml/2006/main">
               <a:ext uri="{FF2B5EF4-FFF2-40B4-BE49-F238E27FC236}">
-                <a16:creationId xmlns:a16="http://schemas.microsoft.com/office/drawing/2014/main" id="{0B4617EC-0EDB-4960-A65E-D7712E4B2064}"/>
+                <a16:creationId xmlns:a16="http://schemas.microsoft.com/office/drawing/2014/main" id="{7249F16B-F762-4ED9-AC2B-57E07686EE84}"/>
               </a:ext>
             </a:extLst>
           </p:cNvPr>
@@ -12666,7 +13579,7 @@
           <p:cNvPr id="8" name="grid-v-488">
             <a:extLst xmlns:a="http://schemas.openxmlformats.org/drawingml/2006/main">
               <a:ext uri="{FF2B5EF4-FFF2-40B4-BE49-F238E27FC236}">
-                <a16:creationId xmlns:a16="http://schemas.microsoft.com/office/drawing/2014/main" id="{ADD2C986-D9AB-442A-8723-60466A4364AC}"/>
+                <a16:creationId xmlns:a16="http://schemas.microsoft.com/office/drawing/2014/main" id="{B12C35D6-B351-45ED-B0CC-F4463970C3B5}"/>
               </a:ext>
             </a:extLst>
           </p:cNvPr>
@@ -12697,7 +13610,7 @@
           <p:cNvPr id="9" name="grid-v-552">
             <a:extLst xmlns:a="http://schemas.openxmlformats.org/drawingml/2006/main">
               <a:ext uri="{FF2B5EF4-FFF2-40B4-BE49-F238E27FC236}">
-                <a16:creationId xmlns:a16="http://schemas.microsoft.com/office/drawing/2014/main" id="{0D39E43D-7559-4692-A02E-763E1CFDC4D3}"/>
+                <a16:creationId xmlns:a16="http://schemas.microsoft.com/office/drawing/2014/main" id="{41D7EE0E-89ED-4193-B4D5-B04ADDB231DC}"/>
               </a:ext>
             </a:extLst>
           </p:cNvPr>
@@ -12728,7 +13641,7 @@
           <p:cNvPr id="10" name="grid-v-616">
             <a:extLst xmlns:a="http://schemas.openxmlformats.org/drawingml/2006/main">
               <a:ext uri="{FF2B5EF4-FFF2-40B4-BE49-F238E27FC236}">
-                <a16:creationId xmlns:a16="http://schemas.microsoft.com/office/drawing/2014/main" id="{FCA69753-E104-4BCD-82F2-6FB3C7466523}"/>
+                <a16:creationId xmlns:a16="http://schemas.microsoft.com/office/drawing/2014/main" id="{5744B4D6-69D8-46BB-B216-6F3FC0962660}"/>
               </a:ext>
             </a:extLst>
           </p:cNvPr>
@@ -12759,7 +13672,7 @@
           <p:cNvPr id="11" name="grid-v-680">
             <a:extLst xmlns:a="http://schemas.openxmlformats.org/drawingml/2006/main">
               <a:ext uri="{FF2B5EF4-FFF2-40B4-BE49-F238E27FC236}">
-                <a16:creationId xmlns:a16="http://schemas.microsoft.com/office/drawing/2014/main" id="{BCEACF70-1187-401B-8413-C35F27808D69}"/>
+                <a16:creationId xmlns:a16="http://schemas.microsoft.com/office/drawing/2014/main" id="{9D7BF19D-89DF-414B-90E8-89E54564A2EC}"/>
               </a:ext>
             </a:extLst>
           </p:cNvPr>
@@ -12790,7 +13703,7 @@
           <p:cNvPr id="12" name="grid-v-744">
             <a:extLst xmlns:a="http://schemas.openxmlformats.org/drawingml/2006/main">
               <a:ext uri="{FF2B5EF4-FFF2-40B4-BE49-F238E27FC236}">
-                <a16:creationId xmlns:a16="http://schemas.microsoft.com/office/drawing/2014/main" id="{E9C9A232-AAAC-4361-9752-1ABFE3245C73}"/>
+                <a16:creationId xmlns:a16="http://schemas.microsoft.com/office/drawing/2014/main" id="{33DB937F-4E7F-4816-B194-C6284B34B609}"/>
               </a:ext>
             </a:extLst>
           </p:cNvPr>
@@ -12821,7 +13734,7 @@
           <p:cNvPr id="13" name="grid-v-808">
             <a:extLst xmlns:a="http://schemas.openxmlformats.org/drawingml/2006/main">
               <a:ext uri="{FF2B5EF4-FFF2-40B4-BE49-F238E27FC236}">
-                <a16:creationId xmlns:a16="http://schemas.microsoft.com/office/drawing/2014/main" id="{1D20C73E-8C93-4BE6-A445-30094ECB7515}"/>
+                <a16:creationId xmlns:a16="http://schemas.microsoft.com/office/drawing/2014/main" id="{AA83CBC6-2D88-45B7-BC62-A0F4A68CFAD7}"/>
               </a:ext>
             </a:extLst>
           </p:cNvPr>
@@ -12852,7 +13765,7 @@
           <p:cNvPr id="14" name="grid-v-872">
             <a:extLst xmlns:a="http://schemas.openxmlformats.org/drawingml/2006/main">
               <a:ext uri="{FF2B5EF4-FFF2-40B4-BE49-F238E27FC236}">
-                <a16:creationId xmlns:a16="http://schemas.microsoft.com/office/drawing/2014/main" id="{99626C9C-2044-4FB9-9BBE-B6E78CA92F90}"/>
+                <a16:creationId xmlns:a16="http://schemas.microsoft.com/office/drawing/2014/main" id="{19FD2245-EE38-4E23-9231-E01C33907058}"/>
               </a:ext>
             </a:extLst>
           </p:cNvPr>
@@ -12883,7 +13796,7 @@
           <p:cNvPr id="15" name="grid-v-936">
             <a:extLst xmlns:a="http://schemas.openxmlformats.org/drawingml/2006/main">
               <a:ext uri="{FF2B5EF4-FFF2-40B4-BE49-F238E27FC236}">
-                <a16:creationId xmlns:a16="http://schemas.microsoft.com/office/drawing/2014/main" id="{98203A86-DC48-4D86-9048-89F0DAC2627F}"/>
+                <a16:creationId xmlns:a16="http://schemas.microsoft.com/office/drawing/2014/main" id="{AB977005-FA30-435D-A4B5-83BDDD6BEC89}"/>
               </a:ext>
             </a:extLst>
           </p:cNvPr>
@@ -12914,7 +13827,7 @@
           <p:cNvPr id="16" name="grid-v-1000">
             <a:extLst xmlns:a="http://schemas.openxmlformats.org/drawingml/2006/main">
               <a:ext uri="{FF2B5EF4-FFF2-40B4-BE49-F238E27FC236}">
-                <a16:creationId xmlns:a16="http://schemas.microsoft.com/office/drawing/2014/main" id="{1EDE3CFB-14BE-4FF8-9844-E73D12E97B8A}"/>
+                <a16:creationId xmlns:a16="http://schemas.microsoft.com/office/drawing/2014/main" id="{B575A7C4-30D8-4EB4-9364-D40F5D8E5E06}"/>
               </a:ext>
             </a:extLst>
           </p:cNvPr>
@@ -12945,7 +13858,7 @@
           <p:cNvPr id="17" name="grid-v-1064">
             <a:extLst xmlns:a="http://schemas.openxmlformats.org/drawingml/2006/main">
               <a:ext uri="{FF2B5EF4-FFF2-40B4-BE49-F238E27FC236}">
-                <a16:creationId xmlns:a16="http://schemas.microsoft.com/office/drawing/2014/main" id="{8C2E4A6A-EFA3-46A1-8A99-5A68C23A9F4C}"/>
+                <a16:creationId xmlns:a16="http://schemas.microsoft.com/office/drawing/2014/main" id="{539B9465-65C9-45B7-96E9-2C410964A9F8}"/>
               </a:ext>
             </a:extLst>
           </p:cNvPr>
@@ -12976,7 +13889,7 @@
           <p:cNvPr id="18" name="grid-v-1128">
             <a:extLst xmlns:a="http://schemas.openxmlformats.org/drawingml/2006/main">
               <a:ext uri="{FF2B5EF4-FFF2-40B4-BE49-F238E27FC236}">
-                <a16:creationId xmlns:a16="http://schemas.microsoft.com/office/drawing/2014/main" id="{F3E7D7AB-7A79-4519-98EB-0B297F096825}"/>
+                <a16:creationId xmlns:a16="http://schemas.microsoft.com/office/drawing/2014/main" id="{32F9EF37-1F70-4E0A-BC21-DDC74F01FC00}"/>
               </a:ext>
             </a:extLst>
           </p:cNvPr>
@@ -13007,7 +13920,7 @@
           <p:cNvPr id="19" name="grid-v-1192">
             <a:extLst xmlns:a="http://schemas.openxmlformats.org/drawingml/2006/main">
               <a:ext uri="{FF2B5EF4-FFF2-40B4-BE49-F238E27FC236}">
-                <a16:creationId xmlns:a16="http://schemas.microsoft.com/office/drawing/2014/main" id="{654513D9-D7C1-4D72-84F8-818CF396A59F}"/>
+                <a16:creationId xmlns:a16="http://schemas.microsoft.com/office/drawing/2014/main" id="{B853415F-F193-4793-AAB9-EB1A8CB67CFD}"/>
               </a:ext>
             </a:extLst>
           </p:cNvPr>
@@ -13038,7 +13951,7 @@
           <p:cNvPr id="20" name="grid-h-112">
             <a:extLst xmlns:a="http://schemas.openxmlformats.org/drawingml/2006/main">
               <a:ext uri="{FF2B5EF4-FFF2-40B4-BE49-F238E27FC236}">
-                <a16:creationId xmlns:a16="http://schemas.microsoft.com/office/drawing/2014/main" id="{B0F058A1-4B1B-42EC-9FFD-D1DD0872C13D}"/>
+                <a16:creationId xmlns:a16="http://schemas.microsoft.com/office/drawing/2014/main" id="{4DC5638F-9683-4621-A4F0-14A1695CFF5E}"/>
               </a:ext>
             </a:extLst>
           </p:cNvPr>
@@ -13069,7 +13982,7 @@
           <p:cNvPr id="21" name="grid-h-176">
             <a:extLst xmlns:a="http://schemas.openxmlformats.org/drawingml/2006/main">
               <a:ext uri="{FF2B5EF4-FFF2-40B4-BE49-F238E27FC236}">
-                <a16:creationId xmlns:a16="http://schemas.microsoft.com/office/drawing/2014/main" id="{35FC6788-0B3E-4945-9DD2-4888F59E0509}"/>
+                <a16:creationId xmlns:a16="http://schemas.microsoft.com/office/drawing/2014/main" id="{C22CAC37-ACFD-4683-ACAA-D51120E81E14}"/>
               </a:ext>
             </a:extLst>
           </p:cNvPr>
@@ -13100,7 +14013,7 @@
           <p:cNvPr id="22" name="grid-h-240">
             <a:extLst xmlns:a="http://schemas.openxmlformats.org/drawingml/2006/main">
               <a:ext uri="{FF2B5EF4-FFF2-40B4-BE49-F238E27FC236}">
-                <a16:creationId xmlns:a16="http://schemas.microsoft.com/office/drawing/2014/main" id="{E88D6847-B2D8-4034-A3EB-FEF6035F5B30}"/>
+                <a16:creationId xmlns:a16="http://schemas.microsoft.com/office/drawing/2014/main" id="{6054A260-3EB9-44BB-AADE-438E992286E2}"/>
               </a:ext>
             </a:extLst>
           </p:cNvPr>
@@ -13131,7 +14044,7 @@
           <p:cNvPr id="23" name="grid-h-304">
             <a:extLst xmlns:a="http://schemas.openxmlformats.org/drawingml/2006/main">
               <a:ext uri="{FF2B5EF4-FFF2-40B4-BE49-F238E27FC236}">
-                <a16:creationId xmlns:a16="http://schemas.microsoft.com/office/drawing/2014/main" id="{A9D7ADB0-E43F-4802-8BBA-9C29B64452B3}"/>
+                <a16:creationId xmlns:a16="http://schemas.microsoft.com/office/drawing/2014/main" id="{C9B4D3F4-5BA2-4478-933D-9DEC906AE7E9}"/>
               </a:ext>
             </a:extLst>
           </p:cNvPr>
@@ -13162,7 +14075,7 @@
           <p:cNvPr id="24" name="grid-h-368">
             <a:extLst xmlns:a="http://schemas.openxmlformats.org/drawingml/2006/main">
               <a:ext uri="{FF2B5EF4-FFF2-40B4-BE49-F238E27FC236}">
-                <a16:creationId xmlns:a16="http://schemas.microsoft.com/office/drawing/2014/main" id="{12A3D2B9-7ED2-49EF-9B5E-F3A2E708D0E1}"/>
+                <a16:creationId xmlns:a16="http://schemas.microsoft.com/office/drawing/2014/main" id="{9FBC59DE-C003-4BEB-AB05-0366FD64F80B}"/>
               </a:ext>
             </a:extLst>
           </p:cNvPr>
@@ -13193,7 +14106,7 @@
           <p:cNvPr id="25" name="grid-h-432">
             <a:extLst xmlns:a="http://schemas.openxmlformats.org/drawingml/2006/main">
               <a:ext uri="{FF2B5EF4-FFF2-40B4-BE49-F238E27FC236}">
-                <a16:creationId xmlns:a16="http://schemas.microsoft.com/office/drawing/2014/main" id="{EDFFCD5E-EF2C-4AD3-85B9-993761A430F4}"/>
+                <a16:creationId xmlns:a16="http://schemas.microsoft.com/office/drawing/2014/main" id="{4FB9D043-5644-4232-AD34-69A1F51622A1}"/>
               </a:ext>
             </a:extLst>
           </p:cNvPr>
@@ -13224,7 +14137,7 @@
           <p:cNvPr id="26" name="grid-h-496">
             <a:extLst xmlns:a="http://schemas.openxmlformats.org/drawingml/2006/main">
               <a:ext uri="{FF2B5EF4-FFF2-40B4-BE49-F238E27FC236}">
-                <a16:creationId xmlns:a16="http://schemas.microsoft.com/office/drawing/2014/main" id="{9893D021-141E-49FB-924F-A56DA330578F}"/>
+                <a16:creationId xmlns:a16="http://schemas.microsoft.com/office/drawing/2014/main" id="{4E008F20-85B2-4BDF-95F4-531E360C8F10}"/>
               </a:ext>
             </a:extLst>
           </p:cNvPr>
@@ -13255,7 +14168,7 @@
           <p:cNvPr id="27" name="grid-h-560">
             <a:extLst xmlns:a="http://schemas.openxmlformats.org/drawingml/2006/main">
               <a:ext uri="{FF2B5EF4-FFF2-40B4-BE49-F238E27FC236}">
-                <a16:creationId xmlns:a16="http://schemas.microsoft.com/office/drawing/2014/main" id="{7003A60C-D03B-4A92-9A78-76FE2DD48E31}"/>
+                <a16:creationId xmlns:a16="http://schemas.microsoft.com/office/drawing/2014/main" id="{205C3B7A-8454-400D-9A96-B2DCEF992E11}"/>
               </a:ext>
             </a:extLst>
           </p:cNvPr>
@@ -13286,7 +14199,7 @@
           <p:cNvPr id="28" name="grid-h-624">
             <a:extLst xmlns:a="http://schemas.openxmlformats.org/drawingml/2006/main">
               <a:ext uri="{FF2B5EF4-FFF2-40B4-BE49-F238E27FC236}">
-                <a16:creationId xmlns:a16="http://schemas.microsoft.com/office/drawing/2014/main" id="{6356B0EB-231A-408F-982A-46FD7F0F5D99}"/>
+                <a16:creationId xmlns:a16="http://schemas.microsoft.com/office/drawing/2014/main" id="{CE1C6D9D-6FBA-4353-89D5-A3FD2A71CCA8}"/>
               </a:ext>
             </a:extLst>
           </p:cNvPr>
@@ -13317,7 +14230,7 @@
           <p:cNvPr id="29" name="top-rule">
             <a:extLst xmlns:a="http://schemas.openxmlformats.org/drawingml/2006/main">
               <a:ext uri="{FF2B5EF4-FFF2-40B4-BE49-F238E27FC236}">
-                <a16:creationId xmlns:a16="http://schemas.microsoft.com/office/drawing/2014/main" id="{0591E168-40D5-4781-ADEA-0349AD251479}"/>
+                <a16:creationId xmlns:a16="http://schemas.microsoft.com/office/drawing/2014/main" id="{176AF705-4CB0-47D4-99B4-4B259969B18A}"/>
               </a:ext>
             </a:extLst>
           </p:cNvPr>
@@ -13348,7 +14261,7 @@
           <p:cNvPr id="30" name="wordmark">
             <a:extLst xmlns:a="http://schemas.openxmlformats.org/drawingml/2006/main">
               <a:ext uri="{FF2B5EF4-FFF2-40B4-BE49-F238E27FC236}">
-                <a16:creationId xmlns:a16="http://schemas.microsoft.com/office/drawing/2014/main" id="{7F6D21B2-412A-455E-AB38-EA5BF9082191}"/>
+                <a16:creationId xmlns:a16="http://schemas.microsoft.com/office/drawing/2014/main" id="{B4BA3A17-5B2E-468D-902E-37030F2DF76B}"/>
               </a:ext>
             </a:extLst>
           </p:cNvPr>
@@ -13410,7 +14323,7 @@
           <p:cNvPr id="31" name="environment-label">
             <a:extLst xmlns:a="http://schemas.openxmlformats.org/drawingml/2006/main">
               <a:ext uri="{FF2B5EF4-FFF2-40B4-BE49-F238E27FC236}">
-                <a16:creationId xmlns:a16="http://schemas.microsoft.com/office/drawing/2014/main" id="{CB2D230D-686A-466F-9E77-0655E19B5846}"/>
+                <a16:creationId xmlns:a16="http://schemas.microsoft.com/office/drawing/2014/main" id="{E721FCE2-F239-42D8-A98E-B434395FD357}"/>
               </a:ext>
             </a:extLst>
           </p:cNvPr>
@@ -13462,7 +14375,7 @@
                 <a:ea typeface="Courier New"/>
                 <a:cs typeface="Courier New"/>
               </a:rPr>
-              <a:t>RAIN BOUNDED EXECUTION</a:t>
+              <a:t>RAIN SANDBOX RECORD</a:t>
             </a:r>
           </a:p>
         </p:txBody>
@@ -13472,7 +14385,7 @@
           <p:cNvPr id="32" name="slide-index">
             <a:extLst xmlns:a="http://schemas.openxmlformats.org/drawingml/2006/main">
               <a:ext uri="{FF2B5EF4-FFF2-40B4-BE49-F238E27FC236}">
-                <a16:creationId xmlns:a16="http://schemas.microsoft.com/office/drawing/2014/main" id="{F7229977-C447-4165-AA95-B25F3F9EDB97}"/>
+                <a16:creationId xmlns:a16="http://schemas.microsoft.com/office/drawing/2014/main" id="{CF1295B3-E413-475F-9EE9-36537F3F1FC8}"/>
               </a:ext>
             </a:extLst>
           </p:cNvPr>
@@ -13534,7 +14447,7 @@
           <p:cNvPr id="33" name="event-footer">
             <a:extLst xmlns:a="http://schemas.openxmlformats.org/drawingml/2006/main">
               <a:ext uri="{FF2B5EF4-FFF2-40B4-BE49-F238E27FC236}">
-                <a16:creationId xmlns:a16="http://schemas.microsoft.com/office/drawing/2014/main" id="{9507B8E8-5C8C-48DB-9EF5-D29D3BA3F9CE}"/>
+                <a16:creationId xmlns:a16="http://schemas.microsoft.com/office/drawing/2014/main" id="{FA6D1206-59B6-421F-880A-B47AF9571003}"/>
               </a:ext>
             </a:extLst>
           </p:cNvPr>
@@ -13596,7 +14509,7 @@
           <p:cNvPr id="34" name="honesty-footer">
             <a:extLst xmlns:a="http://schemas.openxmlformats.org/drawingml/2006/main">
               <a:ext uri="{FF2B5EF4-FFF2-40B4-BE49-F238E27FC236}">
-                <a16:creationId xmlns:a16="http://schemas.microsoft.com/office/drawing/2014/main" id="{0BEA1EA7-A4C4-467F-831F-90915DCB37AE}"/>
+                <a16:creationId xmlns:a16="http://schemas.microsoft.com/office/drawing/2014/main" id="{061C754C-F85B-4928-874F-886C14356A8A}"/>
               </a:ext>
             </a:extLst>
           </p:cNvPr>
@@ -13658,7 +14571,7 @@
           <p:cNvPr id="35" name="eyebrow">
             <a:extLst xmlns:a="http://schemas.openxmlformats.org/drawingml/2006/main">
               <a:ext uri="{FF2B5EF4-FFF2-40B4-BE49-F238E27FC236}">
-                <a16:creationId xmlns:a16="http://schemas.microsoft.com/office/drawing/2014/main" id="{AB915BE7-5CC1-46FB-A702-23BF375C1005}"/>
+                <a16:creationId xmlns:a16="http://schemas.microsoft.com/office/drawing/2014/main" id="{04FE980A-E203-4B7B-97C4-345EA54C8A75}"/>
               </a:ext>
             </a:extLst>
           </p:cNvPr>
@@ -13720,7 +14633,7 @@
           <p:cNvPr id="36" name="slide-title">
             <a:extLst xmlns:a="http://schemas.openxmlformats.org/drawingml/2006/main">
               <a:ext uri="{FF2B5EF4-FFF2-40B4-BE49-F238E27FC236}">
-                <a16:creationId xmlns:a16="http://schemas.microsoft.com/office/drawing/2014/main" id="{18A4E49F-8C0D-44C4-870C-FB89CD2CE7B9}"/>
+                <a16:creationId xmlns:a16="http://schemas.microsoft.com/office/drawing/2014/main" id="{C14790BB-062A-4622-91AE-51863B4D6126}"/>
               </a:ext>
             </a:extLst>
           </p:cNvPr>
@@ -13779,10 +14692,72 @@
       </p:sp>
       <p:sp>
         <p:nvSpPr>
-          <p:cNvPr id="37" name="capture-label">
-            <a:extLst xmlns:a="http://schemas.openxmlformats.org/drawingml/2006/main">
-              <a:ext uri="{FF2B5EF4-FFF2-40B4-BE49-F238E27FC236}">
-                <a16:creationId xmlns:a16="http://schemas.microsoft.com/office/drawing/2014/main" id="{BD24E876-391D-4A31-874B-7BC5E7BE3539}"/>
+          <p:cNvPr id="37" name="rain-record-boundary">
+            <a:extLst xmlns:a="http://schemas.openxmlformats.org/drawingml/2006/main">
+              <a:ext uri="{FF2B5EF4-FFF2-40B4-BE49-F238E27FC236}">
+                <a16:creationId xmlns:a16="http://schemas.microsoft.com/office/drawing/2014/main" id="{DC296945-286F-4B5B-9A35-2C6EB195D761}"/>
+              </a:ext>
+            </a:extLst>
+          </p:cNvPr>
+          <p:cNvSpPr>
+            <a:spLocks xmlns:a="http://schemas.openxmlformats.org/drawingml/2006/main" noGrp="1"/>
+          </p:cNvSpPr>
+          <p:nvPr/>
+        </p:nvSpPr>
+        <p:spPr>
+          <a:xfrm xmlns:a="http://schemas.openxmlformats.org/drawingml/2006/main">
+            <a:off x="419100" y="2095500"/>
+            <a:ext cx="11391900" cy="171450"/>
+          </a:xfrm>
+          <a:prstGeom xmlns:a="http://schemas.openxmlformats.org/drawingml/2006/main" prst="rect">
+            <a:avLst/>
+          </a:prstGeom>
+          <a:noFill xmlns:a="http://schemas.openxmlformats.org/drawingml/2006/main"/>
+          <a:ln xmlns:a="http://schemas.openxmlformats.org/drawingml/2006/main" w="0">
+            <a:noFill/>
+            <a:prstDash val="solid"/>
+          </a:ln>
+        </p:spPr>
+        <p:txBody>
+          <a:bodyPr xmlns:a="http://schemas.openxmlformats.org/drawingml/2006/main" wrap="square" lIns="0" tIns="0" rIns="0" bIns="0" anchor="t">
+            <a:noAutofit/>
+          </a:bodyPr>
+          <a:lstStyle xmlns:a="http://schemas.openxmlformats.org/drawingml/2006/main"/>
+          <a:p xmlns:a="http://schemas.openxmlformats.org/drawingml/2006/main">
+            <a:pPr algn="l">
+              <a:lnSpc>
+                <a:spcPct val="100000"/>
+              </a:lnSpc>
+              <a:buNone/>
+              <a:defRPr sz="900" b="1">
+                <a:solidFill>
+                  <a:srgbClr val="FF2B79"/>
+                </a:solidFill>
+                <a:latin typeface="Courier New"/>
+                <a:ea typeface="Courier New"/>
+                <a:cs typeface="Courier New"/>
+              </a:defRPr>
+            </a:pPr>
+            <a:r>
+              <a:rPr sz="900" b="1">
+                <a:solidFill>
+                  <a:srgbClr val="FF2B79"/>
+                </a:solidFill>
+                <a:latin typeface="Courier New"/>
+                <a:ea typeface="Courier New"/>
+                <a:cs typeface="Courier New"/>
+              </a:rPr>
+              <a:t>SOURCE 246d81a · SAME 3 IDS · SAME-DAY IDEMPOTENT REPLAY · NO REAL MONEY</a:t>
+            </a:r>
+          </a:p>
+        </p:txBody>
+      </p:sp>
+      <p:sp>
+        <p:nvSpPr>
+          <p:cNvPr id="38" name="capture-label">
+            <a:extLst xmlns:a="http://schemas.openxmlformats.org/drawingml/2006/main">
+              <a:ext uri="{FF2B5EF4-FFF2-40B4-BE49-F238E27FC236}">
+                <a16:creationId xmlns:a16="http://schemas.microsoft.com/office/drawing/2014/main" id="{CE5E954D-D48C-48B6-88A2-68E2253965AA}"/>
               </a:ext>
             </a:extLst>
           </p:cNvPr>
@@ -13841,10 +14816,10 @@
       </p:sp>
       <p:sp>
         <p:nvSpPr>
-          <p:cNvPr id="38" name="mcc-label">
-            <a:extLst xmlns:a="http://schemas.openxmlformats.org/drawingml/2006/main">
-              <a:ext uri="{FF2B5EF4-FFF2-40B4-BE49-F238E27FC236}">
-                <a16:creationId xmlns:a16="http://schemas.microsoft.com/office/drawing/2014/main" id="{A9C337DF-9F99-48EF-93F8-6ACB4D750DBD}"/>
+          <p:cNvPr id="39" name="mcc-label">
+            <a:extLst xmlns:a="http://schemas.openxmlformats.org/drawingml/2006/main">
+              <a:ext uri="{FF2B5EF4-FFF2-40B4-BE49-F238E27FC236}">
+                <a16:creationId xmlns:a16="http://schemas.microsoft.com/office/drawing/2014/main" id="{AA715B44-C2FA-44FF-B86E-BFB6D5ABAE57}"/>
               </a:ext>
             </a:extLst>
           </p:cNvPr>
@@ -13903,10 +14878,10 @@
       </p:sp>
       <p:sp>
         <p:nvSpPr>
-          <p:cNvPr id="39" name="authority-label">
-            <a:extLst xmlns:a="http://schemas.openxmlformats.org/drawingml/2006/main">
-              <a:ext uri="{FF2B5EF4-FFF2-40B4-BE49-F238E27FC236}">
-                <a16:creationId xmlns:a16="http://schemas.microsoft.com/office/drawing/2014/main" id="{DF7D956E-4ED0-464B-8BEF-985FB210F87F}"/>
+          <p:cNvPr id="40" name="authority-label">
+            <a:extLst xmlns:a="http://schemas.openxmlformats.org/drawingml/2006/main">
+              <a:ext uri="{FF2B5EF4-FFF2-40B4-BE49-F238E27FC236}">
+                <a16:creationId xmlns:a16="http://schemas.microsoft.com/office/drawing/2014/main" id="{38069102-33CE-4C99-B3FD-CC8303262FC7}"/>
               </a:ext>
             </a:extLst>
           </p:cNvPr>
@@ -13965,10 +14940,10 @@
       </p:sp>
       <p:sp>
         <p:nvSpPr>
-          <p:cNvPr id="40" name="capture-index-0">
-            <a:extLst xmlns:a="http://schemas.openxmlformats.org/drawingml/2006/main">
-              <a:ext uri="{FF2B5EF4-FFF2-40B4-BE49-F238E27FC236}">
-                <a16:creationId xmlns:a16="http://schemas.microsoft.com/office/drawing/2014/main" id="{BBBC2692-A5E0-47C3-BAEF-63C8D3A4EDC4}"/>
+          <p:cNvPr id="41" name="capture-index-0">
+            <a:extLst xmlns:a="http://schemas.openxmlformats.org/drawingml/2006/main">
+              <a:ext uri="{FF2B5EF4-FFF2-40B4-BE49-F238E27FC236}">
+                <a16:creationId xmlns:a16="http://schemas.microsoft.com/office/drawing/2014/main" id="{10DEA684-DB11-4A61-B4C8-4814B00F67EB}"/>
               </a:ext>
             </a:extLst>
           </p:cNvPr>
@@ -14027,10 +15002,10 @@
       </p:sp>
       <p:sp>
         <p:nvSpPr>
-          <p:cNvPr id="41" name="capture-who-0">
-            <a:extLst xmlns:a="http://schemas.openxmlformats.org/drawingml/2006/main">
-              <a:ext uri="{FF2B5EF4-FFF2-40B4-BE49-F238E27FC236}">
-                <a16:creationId xmlns:a16="http://schemas.microsoft.com/office/drawing/2014/main" id="{6410C402-17F3-4DDE-B8FE-3DA0F4160E5A}"/>
+          <p:cNvPr id="42" name="capture-who-0">
+            <a:extLst xmlns:a="http://schemas.openxmlformats.org/drawingml/2006/main">
+              <a:ext uri="{FF2B5EF4-FFF2-40B4-BE49-F238E27FC236}">
+                <a16:creationId xmlns:a16="http://schemas.microsoft.com/office/drawing/2014/main" id="{16A664C9-35BF-4FC9-ABD9-B062F1A64CDC}"/>
               </a:ext>
             </a:extLst>
           </p:cNvPr>
@@ -14089,10 +15064,10 @@
       </p:sp>
       <p:sp>
         <p:nvSpPr>
-          <p:cNvPr id="42" name="capture-amount-0">
-            <a:extLst xmlns:a="http://schemas.openxmlformats.org/drawingml/2006/main">
-              <a:ext uri="{FF2B5EF4-FFF2-40B4-BE49-F238E27FC236}">
-                <a16:creationId xmlns:a16="http://schemas.microsoft.com/office/drawing/2014/main" id="{9DE39D51-08E6-49AB-9CB3-66E0D157FD4B}"/>
+          <p:cNvPr id="43" name="capture-amount-0">
+            <a:extLst xmlns:a="http://schemas.openxmlformats.org/drawingml/2006/main">
+              <a:ext uri="{FF2B5EF4-FFF2-40B4-BE49-F238E27FC236}">
+                <a16:creationId xmlns:a16="http://schemas.microsoft.com/office/drawing/2014/main" id="{2BEF6938-1629-488A-9766-AB2EF4B0DB09}"/>
               </a:ext>
             </a:extLst>
           </p:cNvPr>
@@ -14151,10 +15126,10 @@
       </p:sp>
       <p:sp>
         <p:nvSpPr>
-          <p:cNvPr id="43" name="capture-scope-0">
-            <a:extLst xmlns:a="http://schemas.openxmlformats.org/drawingml/2006/main">
-              <a:ext uri="{FF2B5EF4-FFF2-40B4-BE49-F238E27FC236}">
-                <a16:creationId xmlns:a16="http://schemas.microsoft.com/office/drawing/2014/main" id="{3B0EC4DD-C7EE-4AC4-8621-14E02B9851CE}"/>
+          <p:cNvPr id="44" name="capture-scope-0">
+            <a:extLst xmlns:a="http://schemas.openxmlformats.org/drawingml/2006/main">
+              <a:ext uri="{FF2B5EF4-FFF2-40B4-BE49-F238E27FC236}">
+                <a16:creationId xmlns:a16="http://schemas.microsoft.com/office/drawing/2014/main" id="{85BF101A-61FD-47ED-890E-75817EE9CA9F}"/>
               </a:ext>
             </a:extLst>
           </p:cNvPr>
@@ -14182,10 +15157,10 @@
       </p:sp>
       <p:sp>
         <p:nvSpPr>
-          <p:cNvPr id="44" name="capture-node-0">
-            <a:extLst xmlns:a="http://schemas.openxmlformats.org/drawingml/2006/main">
-              <a:ext uri="{FF2B5EF4-FFF2-40B4-BE49-F238E27FC236}">
-                <a16:creationId xmlns:a16="http://schemas.microsoft.com/office/drawing/2014/main" id="{F6398B6B-DE6F-4449-B4FE-2180F7AC4A02}"/>
+          <p:cNvPr id="45" name="capture-node-0">
+            <a:extLst xmlns:a="http://schemas.openxmlformats.org/drawingml/2006/main">
+              <a:ext uri="{FF2B5EF4-FFF2-40B4-BE49-F238E27FC236}">
+                <a16:creationId xmlns:a16="http://schemas.microsoft.com/office/drawing/2014/main" id="{4DDE7046-48ED-48AD-9B77-3962CA75A451}"/>
               </a:ext>
             </a:extLst>
           </p:cNvPr>
@@ -14213,10 +15188,10 @@
       </p:sp>
       <p:sp>
         <p:nvSpPr>
-          <p:cNvPr id="45" name="capture-mcc-0">
-            <a:extLst xmlns:a="http://schemas.openxmlformats.org/drawingml/2006/main">
-              <a:ext uri="{FF2B5EF4-FFF2-40B4-BE49-F238E27FC236}">
-                <a16:creationId xmlns:a16="http://schemas.microsoft.com/office/drawing/2014/main" id="{61C1B294-F825-4E81-BE18-C83BC178AF42}"/>
+          <p:cNvPr id="46" name="capture-mcc-0">
+            <a:extLst xmlns:a="http://schemas.openxmlformats.org/drawingml/2006/main">
+              <a:ext uri="{FF2B5EF4-FFF2-40B4-BE49-F238E27FC236}">
+                <a16:creationId xmlns:a16="http://schemas.microsoft.com/office/drawing/2014/main" id="{B3C1D924-AF8D-4880-A2A4-43AC035DB2F1}"/>
               </a:ext>
             </a:extLst>
           </p:cNvPr>
@@ -14275,10 +15250,10 @@
       </p:sp>
       <p:sp>
         <p:nvSpPr>
-          <p:cNvPr id="46" name="capture-scope-label-0">
-            <a:extLst xmlns:a="http://schemas.openxmlformats.org/drawingml/2006/main">
-              <a:ext uri="{FF2B5EF4-FFF2-40B4-BE49-F238E27FC236}">
-                <a16:creationId xmlns:a16="http://schemas.microsoft.com/office/drawing/2014/main" id="{EEE2CDC9-8C6D-46E8-9387-B3E73F2C8F49}"/>
+          <p:cNvPr id="47" name="capture-scope-label-0">
+            <a:extLst xmlns:a="http://schemas.openxmlformats.org/drawingml/2006/main">
+              <a:ext uri="{FF2B5EF4-FFF2-40B4-BE49-F238E27FC236}">
+                <a16:creationId xmlns:a16="http://schemas.microsoft.com/office/drawing/2014/main" id="{968E35B4-6D53-4E7B-8633-334B89669F99}"/>
               </a:ext>
             </a:extLst>
           </p:cNvPr>
@@ -14337,10 +15312,10 @@
       </p:sp>
       <p:sp>
         <p:nvSpPr>
-          <p:cNvPr id="47" name="capture-rule-0">
-            <a:extLst xmlns:a="http://schemas.openxmlformats.org/drawingml/2006/main">
-              <a:ext uri="{FF2B5EF4-FFF2-40B4-BE49-F238E27FC236}">
-                <a16:creationId xmlns:a16="http://schemas.microsoft.com/office/drawing/2014/main" id="{86348B51-AF78-4FF9-B5C0-FE36F86A720E}"/>
+          <p:cNvPr id="48" name="capture-rule-0">
+            <a:extLst xmlns:a="http://schemas.openxmlformats.org/drawingml/2006/main">
+              <a:ext uri="{FF2B5EF4-FFF2-40B4-BE49-F238E27FC236}">
+                <a16:creationId xmlns:a16="http://schemas.microsoft.com/office/drawing/2014/main" id="{08BFA445-FF86-4200-945C-59D0EAAAA28B}"/>
               </a:ext>
             </a:extLst>
           </p:cNvPr>
@@ -14368,10 +15343,10 @@
       </p:sp>
       <p:sp>
         <p:nvSpPr>
-          <p:cNvPr id="48" name="capture-index-1">
-            <a:extLst xmlns:a="http://schemas.openxmlformats.org/drawingml/2006/main">
-              <a:ext uri="{FF2B5EF4-FFF2-40B4-BE49-F238E27FC236}">
-                <a16:creationId xmlns:a16="http://schemas.microsoft.com/office/drawing/2014/main" id="{E7FA7C64-8BF6-4A1E-981A-B728B42D0B00}"/>
+          <p:cNvPr id="49" name="capture-index-1">
+            <a:extLst xmlns:a="http://schemas.openxmlformats.org/drawingml/2006/main">
+              <a:ext uri="{FF2B5EF4-FFF2-40B4-BE49-F238E27FC236}">
+                <a16:creationId xmlns:a16="http://schemas.microsoft.com/office/drawing/2014/main" id="{2D161DE0-76D8-4A9D-ABC9-5616D09BB830}"/>
               </a:ext>
             </a:extLst>
           </p:cNvPr>
@@ -14430,10 +15405,10 @@
       </p:sp>
       <p:sp>
         <p:nvSpPr>
-          <p:cNvPr id="49" name="capture-who-1">
-            <a:extLst xmlns:a="http://schemas.openxmlformats.org/drawingml/2006/main">
-              <a:ext uri="{FF2B5EF4-FFF2-40B4-BE49-F238E27FC236}">
-                <a16:creationId xmlns:a16="http://schemas.microsoft.com/office/drawing/2014/main" id="{69EB93BB-550D-4EE1-8EBC-A5CA4E200DA0}"/>
+          <p:cNvPr id="50" name="capture-who-1">
+            <a:extLst xmlns:a="http://schemas.openxmlformats.org/drawingml/2006/main">
+              <a:ext uri="{FF2B5EF4-FFF2-40B4-BE49-F238E27FC236}">
+                <a16:creationId xmlns:a16="http://schemas.microsoft.com/office/drawing/2014/main" id="{14EF5257-25A6-41F3-B5CD-CDD57F52050E}"/>
               </a:ext>
             </a:extLst>
           </p:cNvPr>
@@ -14492,10 +15467,10 @@
       </p:sp>
       <p:sp>
         <p:nvSpPr>
-          <p:cNvPr id="50" name="capture-amount-1">
-            <a:extLst xmlns:a="http://schemas.openxmlformats.org/drawingml/2006/main">
-              <a:ext uri="{FF2B5EF4-FFF2-40B4-BE49-F238E27FC236}">
-                <a16:creationId xmlns:a16="http://schemas.microsoft.com/office/drawing/2014/main" id="{E313192F-2EC9-4A78-AB01-5F8BB448FB2F}"/>
+          <p:cNvPr id="51" name="capture-amount-1">
+            <a:extLst xmlns:a="http://schemas.openxmlformats.org/drawingml/2006/main">
+              <a:ext uri="{FF2B5EF4-FFF2-40B4-BE49-F238E27FC236}">
+                <a16:creationId xmlns:a16="http://schemas.microsoft.com/office/drawing/2014/main" id="{BCD79376-4E2E-4528-AF63-848C61F211A2}"/>
               </a:ext>
             </a:extLst>
           </p:cNvPr>
@@ -14554,10 +15529,10 @@
       </p:sp>
       <p:sp>
         <p:nvSpPr>
-          <p:cNvPr id="51" name="capture-scope-1">
-            <a:extLst xmlns:a="http://schemas.openxmlformats.org/drawingml/2006/main">
-              <a:ext uri="{FF2B5EF4-FFF2-40B4-BE49-F238E27FC236}">
-                <a16:creationId xmlns:a16="http://schemas.microsoft.com/office/drawing/2014/main" id="{C7233791-7CEF-4926-9AAE-23E4C065D030}"/>
+          <p:cNvPr id="52" name="capture-scope-1">
+            <a:extLst xmlns:a="http://schemas.openxmlformats.org/drawingml/2006/main">
+              <a:ext uri="{FF2B5EF4-FFF2-40B4-BE49-F238E27FC236}">
+                <a16:creationId xmlns:a16="http://schemas.microsoft.com/office/drawing/2014/main" id="{584E52CE-9B16-475B-965B-1BE46F2BAD19}"/>
               </a:ext>
             </a:extLst>
           </p:cNvPr>
@@ -14585,10 +15560,10 @@
       </p:sp>
       <p:sp>
         <p:nvSpPr>
-          <p:cNvPr id="52" name="capture-node-1">
-            <a:extLst xmlns:a="http://schemas.openxmlformats.org/drawingml/2006/main">
-              <a:ext uri="{FF2B5EF4-FFF2-40B4-BE49-F238E27FC236}">
-                <a16:creationId xmlns:a16="http://schemas.microsoft.com/office/drawing/2014/main" id="{37873B78-6430-4D54-9EC9-CFD5199B5C45}"/>
+          <p:cNvPr id="53" name="capture-node-1">
+            <a:extLst xmlns:a="http://schemas.openxmlformats.org/drawingml/2006/main">
+              <a:ext uri="{FF2B5EF4-FFF2-40B4-BE49-F238E27FC236}">
+                <a16:creationId xmlns:a16="http://schemas.microsoft.com/office/drawing/2014/main" id="{5822D9A5-B529-488C-B337-92E627AB65C2}"/>
               </a:ext>
             </a:extLst>
           </p:cNvPr>
@@ -14616,10 +15591,10 @@
       </p:sp>
       <p:sp>
         <p:nvSpPr>
-          <p:cNvPr id="53" name="capture-mcc-1">
-            <a:extLst xmlns:a="http://schemas.openxmlformats.org/drawingml/2006/main">
-              <a:ext uri="{FF2B5EF4-FFF2-40B4-BE49-F238E27FC236}">
-                <a16:creationId xmlns:a16="http://schemas.microsoft.com/office/drawing/2014/main" id="{D20AFD3D-635C-4EB4-A66B-F958903327E0}"/>
+          <p:cNvPr id="54" name="capture-mcc-1">
+            <a:extLst xmlns:a="http://schemas.openxmlformats.org/drawingml/2006/main">
+              <a:ext uri="{FF2B5EF4-FFF2-40B4-BE49-F238E27FC236}">
+                <a16:creationId xmlns:a16="http://schemas.microsoft.com/office/drawing/2014/main" id="{C8FA14F7-5ED5-4A56-9687-32238546F99F}"/>
               </a:ext>
             </a:extLst>
           </p:cNvPr>
@@ -14678,10 +15653,10 @@
       </p:sp>
       <p:sp>
         <p:nvSpPr>
-          <p:cNvPr id="54" name="capture-scope-label-1">
-            <a:extLst xmlns:a="http://schemas.openxmlformats.org/drawingml/2006/main">
-              <a:ext uri="{FF2B5EF4-FFF2-40B4-BE49-F238E27FC236}">
-                <a16:creationId xmlns:a16="http://schemas.microsoft.com/office/drawing/2014/main" id="{2E5CF901-CA3B-4AED-B480-54159A62E256}"/>
+          <p:cNvPr id="55" name="capture-scope-label-1">
+            <a:extLst xmlns:a="http://schemas.openxmlformats.org/drawingml/2006/main">
+              <a:ext uri="{FF2B5EF4-FFF2-40B4-BE49-F238E27FC236}">
+                <a16:creationId xmlns:a16="http://schemas.microsoft.com/office/drawing/2014/main" id="{C0C886F0-D7F8-4098-8C00-E0B04504C21A}"/>
               </a:ext>
             </a:extLst>
           </p:cNvPr>
@@ -14740,10 +15715,10 @@
       </p:sp>
       <p:sp>
         <p:nvSpPr>
-          <p:cNvPr id="55" name="capture-rule-1">
-            <a:extLst xmlns:a="http://schemas.openxmlformats.org/drawingml/2006/main">
-              <a:ext uri="{FF2B5EF4-FFF2-40B4-BE49-F238E27FC236}">
-                <a16:creationId xmlns:a16="http://schemas.microsoft.com/office/drawing/2014/main" id="{8E7F6291-424E-44FC-B1E4-205CC896F275}"/>
+          <p:cNvPr id="56" name="capture-rule-1">
+            <a:extLst xmlns:a="http://schemas.openxmlformats.org/drawingml/2006/main">
+              <a:ext uri="{FF2B5EF4-FFF2-40B4-BE49-F238E27FC236}">
+                <a16:creationId xmlns:a16="http://schemas.microsoft.com/office/drawing/2014/main" id="{57D6B32C-137A-4B2F-925F-18297973F807}"/>
               </a:ext>
             </a:extLst>
           </p:cNvPr>
@@ -14771,10 +15746,10 @@
       </p:sp>
       <p:sp>
         <p:nvSpPr>
-          <p:cNvPr id="56" name="capture-index-2">
-            <a:extLst xmlns:a="http://schemas.openxmlformats.org/drawingml/2006/main">
-              <a:ext uri="{FF2B5EF4-FFF2-40B4-BE49-F238E27FC236}">
-                <a16:creationId xmlns:a16="http://schemas.microsoft.com/office/drawing/2014/main" id="{675EE40C-3BF6-402E-9C10-6D5967E142F3}"/>
+          <p:cNvPr id="57" name="capture-index-2">
+            <a:extLst xmlns:a="http://schemas.openxmlformats.org/drawingml/2006/main">
+              <a:ext uri="{FF2B5EF4-FFF2-40B4-BE49-F238E27FC236}">
+                <a16:creationId xmlns:a16="http://schemas.microsoft.com/office/drawing/2014/main" id="{7B03DA59-9DB2-450E-B901-C8B5FC61945F}"/>
               </a:ext>
             </a:extLst>
           </p:cNvPr>
@@ -14833,10 +15808,10 @@
       </p:sp>
       <p:sp>
         <p:nvSpPr>
-          <p:cNvPr id="57" name="capture-who-2">
-            <a:extLst xmlns:a="http://schemas.openxmlformats.org/drawingml/2006/main">
-              <a:ext uri="{FF2B5EF4-FFF2-40B4-BE49-F238E27FC236}">
-                <a16:creationId xmlns:a16="http://schemas.microsoft.com/office/drawing/2014/main" id="{7D324636-381D-4445-A65C-24D58E7160A2}"/>
+          <p:cNvPr id="58" name="capture-who-2">
+            <a:extLst xmlns:a="http://schemas.openxmlformats.org/drawingml/2006/main">
+              <a:ext uri="{FF2B5EF4-FFF2-40B4-BE49-F238E27FC236}">
+                <a16:creationId xmlns:a16="http://schemas.microsoft.com/office/drawing/2014/main" id="{910710AE-4C2A-4031-82F3-32327069E454}"/>
               </a:ext>
             </a:extLst>
           </p:cNvPr>
@@ -14895,10 +15870,10 @@
       </p:sp>
       <p:sp>
         <p:nvSpPr>
-          <p:cNvPr id="58" name="capture-amount-2">
-            <a:extLst xmlns:a="http://schemas.openxmlformats.org/drawingml/2006/main">
-              <a:ext uri="{FF2B5EF4-FFF2-40B4-BE49-F238E27FC236}">
-                <a16:creationId xmlns:a16="http://schemas.microsoft.com/office/drawing/2014/main" id="{4EC91665-0362-453C-BC76-F2E72843D99E}"/>
+          <p:cNvPr id="59" name="capture-amount-2">
+            <a:extLst xmlns:a="http://schemas.openxmlformats.org/drawingml/2006/main">
+              <a:ext uri="{FF2B5EF4-FFF2-40B4-BE49-F238E27FC236}">
+                <a16:creationId xmlns:a16="http://schemas.microsoft.com/office/drawing/2014/main" id="{E9E62D17-4B04-47B4-A7B6-F66E8E547F70}"/>
               </a:ext>
             </a:extLst>
           </p:cNvPr>
@@ -14957,10 +15932,10 @@
       </p:sp>
       <p:sp>
         <p:nvSpPr>
-          <p:cNvPr id="59" name="capture-scope-2">
-            <a:extLst xmlns:a="http://schemas.openxmlformats.org/drawingml/2006/main">
-              <a:ext uri="{FF2B5EF4-FFF2-40B4-BE49-F238E27FC236}">
-                <a16:creationId xmlns:a16="http://schemas.microsoft.com/office/drawing/2014/main" id="{EB2D367F-9EF6-448A-8711-3F69889B31D6}"/>
+          <p:cNvPr id="60" name="capture-scope-2">
+            <a:extLst xmlns:a="http://schemas.openxmlformats.org/drawingml/2006/main">
+              <a:ext uri="{FF2B5EF4-FFF2-40B4-BE49-F238E27FC236}">
+                <a16:creationId xmlns:a16="http://schemas.microsoft.com/office/drawing/2014/main" id="{0E619D79-3DF3-451E-A39F-015A9803B2C6}"/>
               </a:ext>
             </a:extLst>
           </p:cNvPr>
@@ -14988,10 +15963,10 @@
       </p:sp>
       <p:sp>
         <p:nvSpPr>
-          <p:cNvPr id="60" name="capture-node-2">
-            <a:extLst xmlns:a="http://schemas.openxmlformats.org/drawingml/2006/main">
-              <a:ext uri="{FF2B5EF4-FFF2-40B4-BE49-F238E27FC236}">
-                <a16:creationId xmlns:a16="http://schemas.microsoft.com/office/drawing/2014/main" id="{9510CAE5-F786-4ACE-A370-5FB5C1449890}"/>
+          <p:cNvPr id="61" name="capture-node-2">
+            <a:extLst xmlns:a="http://schemas.openxmlformats.org/drawingml/2006/main">
+              <a:ext uri="{FF2B5EF4-FFF2-40B4-BE49-F238E27FC236}">
+                <a16:creationId xmlns:a16="http://schemas.microsoft.com/office/drawing/2014/main" id="{9154C7D3-C33A-46C9-BD32-01FD6BC3E536}"/>
               </a:ext>
             </a:extLst>
           </p:cNvPr>
@@ -15019,10 +15994,10 @@
       </p:sp>
       <p:sp>
         <p:nvSpPr>
-          <p:cNvPr id="61" name="capture-mcc-2">
-            <a:extLst xmlns:a="http://schemas.openxmlformats.org/drawingml/2006/main">
-              <a:ext uri="{FF2B5EF4-FFF2-40B4-BE49-F238E27FC236}">
-                <a16:creationId xmlns:a16="http://schemas.microsoft.com/office/drawing/2014/main" id="{77F22303-76E9-47A8-A300-168EC8506DDC}"/>
+          <p:cNvPr id="62" name="capture-mcc-2">
+            <a:extLst xmlns:a="http://schemas.openxmlformats.org/drawingml/2006/main">
+              <a:ext uri="{FF2B5EF4-FFF2-40B4-BE49-F238E27FC236}">
+                <a16:creationId xmlns:a16="http://schemas.microsoft.com/office/drawing/2014/main" id="{5023635F-EA72-4FBE-829A-97DD7EADA898}"/>
               </a:ext>
             </a:extLst>
           </p:cNvPr>
@@ -15081,10 +16056,10 @@
       </p:sp>
       <p:sp>
         <p:nvSpPr>
-          <p:cNvPr id="62" name="capture-scope-label-2">
-            <a:extLst xmlns:a="http://schemas.openxmlformats.org/drawingml/2006/main">
-              <a:ext uri="{FF2B5EF4-FFF2-40B4-BE49-F238E27FC236}">
-                <a16:creationId xmlns:a16="http://schemas.microsoft.com/office/drawing/2014/main" id="{5536C4E9-03B8-49EC-8382-3DCB3BB4F9FA}"/>
+          <p:cNvPr id="63" name="capture-scope-label-2">
+            <a:extLst xmlns:a="http://schemas.openxmlformats.org/drawingml/2006/main">
+              <a:ext uri="{FF2B5EF4-FFF2-40B4-BE49-F238E27FC236}">
+                <a16:creationId xmlns:a16="http://schemas.microsoft.com/office/drawing/2014/main" id="{348AAF1F-305C-41C9-A767-A6EA0CD016EB}"/>
               </a:ext>
             </a:extLst>
           </p:cNvPr>
@@ -15143,10 +16118,10 @@
       </p:sp>
       <p:sp>
         <p:nvSpPr>
-          <p:cNvPr id="63" name="capture-rule-2">
-            <a:extLst xmlns:a="http://schemas.openxmlformats.org/drawingml/2006/main">
-              <a:ext uri="{FF2B5EF4-FFF2-40B4-BE49-F238E27FC236}">
-                <a16:creationId xmlns:a16="http://schemas.microsoft.com/office/drawing/2014/main" id="{6A0CC27F-2D1F-4313-A8A2-9CC1793C21B8}"/>
+          <p:cNvPr id="64" name="capture-rule-2">
+            <a:extLst xmlns:a="http://schemas.openxmlformats.org/drawingml/2006/main">
+              <a:ext uri="{FF2B5EF4-FFF2-40B4-BE49-F238E27FC236}">
+                <a16:creationId xmlns:a16="http://schemas.microsoft.com/office/drawing/2014/main" id="{8F2073BF-4565-4F62-BBB8-9EC3A67A80C2}"/>
               </a:ext>
             </a:extLst>
           </p:cNvPr>
@@ -15174,10 +16149,10 @@
       </p:sp>
       <p:sp>
         <p:nvSpPr>
-          <p:cNvPr id="64" name="decline-strip">
-            <a:extLst xmlns:a="http://schemas.openxmlformats.org/drawingml/2006/main">
-              <a:ext uri="{FF2B5EF4-FFF2-40B4-BE49-F238E27FC236}">
-                <a16:creationId xmlns:a16="http://schemas.microsoft.com/office/drawing/2014/main" id="{0872F7A4-6850-443F-9199-88140622DF04}"/>
+          <p:cNvPr id="65" name="decline-strip">
+            <a:extLst xmlns:a="http://schemas.openxmlformats.org/drawingml/2006/main">
+              <a:ext uri="{FF2B5EF4-FFF2-40B4-BE49-F238E27FC236}">
+                <a16:creationId xmlns:a16="http://schemas.microsoft.com/office/drawing/2014/main" id="{2C80CE16-8A51-426E-ABA7-1E86050FB40A}"/>
               </a:ext>
             </a:extLst>
           </p:cNvPr>
@@ -15207,10 +16182,10 @@
       </p:sp>
       <p:sp>
         <p:nvSpPr>
-          <p:cNvPr id="65" name="challenge-label">
-            <a:extLst xmlns:a="http://schemas.openxmlformats.org/drawingml/2006/main">
-              <a:ext uri="{FF2B5EF4-FFF2-40B4-BE49-F238E27FC236}">
-                <a16:creationId xmlns:a16="http://schemas.microsoft.com/office/drawing/2014/main" id="{CBF77B5E-E45A-4CA7-99A6-8A8C41CFB4E9}"/>
+          <p:cNvPr id="66" name="challenge-label">
+            <a:extLst xmlns:a="http://schemas.openxmlformats.org/drawingml/2006/main">
+              <a:ext uri="{FF2B5EF4-FFF2-40B4-BE49-F238E27FC236}">
+                <a16:creationId xmlns:a16="http://schemas.microsoft.com/office/drawing/2014/main" id="{FAC3DCCD-09EE-4FEA-9C20-F2019566ACF4}"/>
               </a:ext>
             </a:extLst>
           </p:cNvPr>
@@ -15269,10 +16244,10 @@
       </p:sp>
       <p:sp>
         <p:nvSpPr>
-          <p:cNvPr id="66" name="blocked-mcc">
-            <a:extLst xmlns:a="http://schemas.openxmlformats.org/drawingml/2006/main">
-              <a:ext uri="{FF2B5EF4-FFF2-40B4-BE49-F238E27FC236}">
-                <a16:creationId xmlns:a16="http://schemas.microsoft.com/office/drawing/2014/main" id="{E4CCC7B7-33EF-4B43-8C7A-DE858ED4A0FE}"/>
+          <p:cNvPr id="67" name="blocked-mcc">
+            <a:extLst xmlns:a="http://schemas.openxmlformats.org/drawingml/2006/main">
+              <a:ext uri="{FF2B5EF4-FFF2-40B4-BE49-F238E27FC236}">
+                <a16:creationId xmlns:a16="http://schemas.microsoft.com/office/drawing/2014/main" id="{EC05BF9D-B7B1-4771-901A-C17907A89F91}"/>
               </a:ext>
             </a:extLst>
           </p:cNvPr>
@@ -15331,10 +16306,10 @@
       </p:sp>
       <p:sp>
         <p:nvSpPr>
-          <p:cNvPr id="67" name="decline-reason">
-            <a:extLst xmlns:a="http://schemas.openxmlformats.org/drawingml/2006/main">
-              <a:ext uri="{FF2B5EF4-FFF2-40B4-BE49-F238E27FC236}">
-                <a16:creationId xmlns:a16="http://schemas.microsoft.com/office/drawing/2014/main" id="{774CA66B-91C5-486F-8DCB-587969249E99}"/>
+          <p:cNvPr id="68" name="decline-reason">
+            <a:extLst xmlns:a="http://schemas.openxmlformats.org/drawingml/2006/main">
+              <a:ext uri="{FF2B5EF4-FFF2-40B4-BE49-F238E27FC236}">
+                <a16:creationId xmlns:a16="http://schemas.microsoft.com/office/drawing/2014/main" id="{C2908174-C38A-4BE2-BEFB-F262279DED1A}"/>
               </a:ext>
             </a:extLst>
           </p:cNvPr>
@@ -15393,10 +16368,10 @@
       </p:sp>
       <p:sp>
         <p:nvSpPr>
-          <p:cNvPr id="68" name="decline-result">
-            <a:extLst xmlns:a="http://schemas.openxmlformats.org/drawingml/2006/main">
-              <a:ext uri="{FF2B5EF4-FFF2-40B4-BE49-F238E27FC236}">
-                <a16:creationId xmlns:a16="http://schemas.microsoft.com/office/drawing/2014/main" id="{6240D89D-C9E3-47A0-BB9B-80D6DBECF6C6}"/>
+          <p:cNvPr id="69" name="decline-result">
+            <a:extLst xmlns:a="http://schemas.openxmlformats.org/drawingml/2006/main">
+              <a:ext uri="{FF2B5EF4-FFF2-40B4-BE49-F238E27FC236}">
+                <a16:creationId xmlns:a16="http://schemas.microsoft.com/office/drawing/2014/main" id="{8A4B752B-EBAD-4E83-83F0-F3DA1A396026}"/>
               </a:ext>
             </a:extLst>
           </p:cNvPr>
@@ -15455,10 +16430,10 @@
       </p:sp>
       <p:sp>
         <p:nvSpPr>
-          <p:cNvPr id="69" name="decline-arrow-shaft">
-            <a:extLst xmlns:a="http://schemas.openxmlformats.org/drawingml/2006/main">
-              <a:ext uri="{FF2B5EF4-FFF2-40B4-BE49-F238E27FC236}">
-                <a16:creationId xmlns:a16="http://schemas.microsoft.com/office/drawing/2014/main" id="{351603C2-5075-4583-AA88-F8F5EEDA6982}"/>
+          <p:cNvPr id="70" name="decline-arrow-shaft">
+            <a:extLst xmlns:a="http://schemas.openxmlformats.org/drawingml/2006/main">
+              <a:ext uri="{FF2B5EF4-FFF2-40B4-BE49-F238E27FC236}">
+                <a16:creationId xmlns:a16="http://schemas.microsoft.com/office/drawing/2014/main" id="{E544705A-38B2-4545-ABC8-E655726CB122}"/>
               </a:ext>
             </a:extLst>
           </p:cNvPr>
@@ -15486,10 +16461,10 @@
       </p:sp>
       <p:sp>
         <p:nvSpPr>
-          <p:cNvPr id="70" name="decline-arrow-head">
-            <a:extLst xmlns:a="http://schemas.openxmlformats.org/drawingml/2006/main">
-              <a:ext uri="{FF2B5EF4-FFF2-40B4-BE49-F238E27FC236}">
-                <a16:creationId xmlns:a16="http://schemas.microsoft.com/office/drawing/2014/main" id="{FD899870-FBC7-49F1-9040-84946C687DC8}"/>
+          <p:cNvPr id="71" name="decline-arrow-head">
+            <a:extLst xmlns:a="http://schemas.openxmlformats.org/drawingml/2006/main">
+              <a:ext uri="{FF2B5EF4-FFF2-40B4-BE49-F238E27FC236}">
+                <a16:creationId xmlns:a16="http://schemas.microsoft.com/office/drawing/2014/main" id="{23E733CC-0AB1-4BCE-ABF1-D1ED0A3B9182}"/>
               </a:ext>
             </a:extLst>
           </p:cNvPr>
@@ -15518,7 +16493,7 @@
     </p:spTree>
     <p:extLst>
       <p:ext uri="{BB962C8B-B14F-4D97-AF65-F5344CB8AC3E}">
-        <p14:creationId xmlns:p14="http://schemas.microsoft.com/office/powerpoint/2010/main" val="2074783947"/>
+        <p14:creationId xmlns:p14="http://schemas.microsoft.com/office/powerpoint/2010/main" val="956928848"/>
       </p:ext>
     </p:extLst>
   </p:cSld>
@@ -15549,7 +16524,7 @@
           <p:cNvPr id="67" name="grid-v-40">
             <a:extLst xmlns:a="http://schemas.openxmlformats.org/drawingml/2006/main">
               <a:ext uri="{FF2B5EF4-FFF2-40B4-BE49-F238E27FC236}">
-                <a16:creationId xmlns:a16="http://schemas.microsoft.com/office/drawing/2014/main" id="{10F2A29C-001E-4BA5-AF02-8FC0967FF1B3}"/>
+                <a16:creationId xmlns:a16="http://schemas.microsoft.com/office/drawing/2014/main" id="{998A8268-BCA1-48DB-BD40-381C519E806A}"/>
               </a:ext>
             </a:extLst>
           </p:cNvPr>
@@ -15580,7 +16555,7 @@
           <p:cNvPr id="2" name="grid-v-104">
             <a:extLst xmlns:a="http://schemas.openxmlformats.org/drawingml/2006/main">
               <a:ext uri="{FF2B5EF4-FFF2-40B4-BE49-F238E27FC236}">
-                <a16:creationId xmlns:a16="http://schemas.microsoft.com/office/drawing/2014/main" id="{803A2DAF-FBE4-4F8D-BE6F-451EA4B845FF}"/>
+                <a16:creationId xmlns:a16="http://schemas.microsoft.com/office/drawing/2014/main" id="{066E2498-B384-4C01-AE97-DFFDFB9FED61}"/>
               </a:ext>
             </a:extLst>
           </p:cNvPr>
@@ -15611,7 +16586,7 @@
           <p:cNvPr id="3" name="grid-v-168">
             <a:extLst xmlns:a="http://schemas.openxmlformats.org/drawingml/2006/main">
               <a:ext uri="{FF2B5EF4-FFF2-40B4-BE49-F238E27FC236}">
-                <a16:creationId xmlns:a16="http://schemas.microsoft.com/office/drawing/2014/main" id="{C2CD632E-A555-4DF0-857E-78EC8DC287D2}"/>
+                <a16:creationId xmlns:a16="http://schemas.microsoft.com/office/drawing/2014/main" id="{68B56062-EACD-4B8D-BE89-CFBFA5EFA44C}"/>
               </a:ext>
             </a:extLst>
           </p:cNvPr>
@@ -15642,7 +16617,7 @@
           <p:cNvPr id="4" name="grid-v-232">
             <a:extLst xmlns:a="http://schemas.openxmlformats.org/drawingml/2006/main">
               <a:ext uri="{FF2B5EF4-FFF2-40B4-BE49-F238E27FC236}">
-                <a16:creationId xmlns:a16="http://schemas.microsoft.com/office/drawing/2014/main" id="{05D95FED-7619-4B85-B322-38637323B547}"/>
+                <a16:creationId xmlns:a16="http://schemas.microsoft.com/office/drawing/2014/main" id="{251C76E8-CE88-43BD-8229-DBAABB536D2E}"/>
               </a:ext>
             </a:extLst>
           </p:cNvPr>
@@ -15673,7 +16648,7 @@
           <p:cNvPr id="5" name="grid-v-296">
             <a:extLst xmlns:a="http://schemas.openxmlformats.org/drawingml/2006/main">
               <a:ext uri="{FF2B5EF4-FFF2-40B4-BE49-F238E27FC236}">
-                <a16:creationId xmlns:a16="http://schemas.microsoft.com/office/drawing/2014/main" id="{08E9AD59-F7D3-4918-BCC2-9AF04B15FE5D}"/>
+                <a16:creationId xmlns:a16="http://schemas.microsoft.com/office/drawing/2014/main" id="{865A1393-C3A8-42E1-B199-C1C4DDF09C9A}"/>
               </a:ext>
             </a:extLst>
           </p:cNvPr>
@@ -15704,7 +16679,7 @@
           <p:cNvPr id="6" name="grid-v-360">
             <a:extLst xmlns:a="http://schemas.openxmlformats.org/drawingml/2006/main">
               <a:ext uri="{FF2B5EF4-FFF2-40B4-BE49-F238E27FC236}">
-                <a16:creationId xmlns:a16="http://schemas.microsoft.com/office/drawing/2014/main" id="{82D78B3C-0B43-4959-8B07-EA0BD5A91FF3}"/>
+                <a16:creationId xmlns:a16="http://schemas.microsoft.com/office/drawing/2014/main" id="{309E6DB0-04F3-4DA6-AA77-A1E46B8D1090}"/>
               </a:ext>
             </a:extLst>
           </p:cNvPr>
@@ -15735,7 +16710,7 @@
           <p:cNvPr id="7" name="grid-v-424">
             <a:extLst xmlns:a="http://schemas.openxmlformats.org/drawingml/2006/main">
               <a:ext uri="{FF2B5EF4-FFF2-40B4-BE49-F238E27FC236}">
-                <a16:creationId xmlns:a16="http://schemas.microsoft.com/office/drawing/2014/main" id="{61849BBB-3C46-40CB-94E3-9B8629FE85D9}"/>
+                <a16:creationId xmlns:a16="http://schemas.microsoft.com/office/drawing/2014/main" id="{21DC4304-DCE3-4F1F-AF6E-B7F6D572F788}"/>
               </a:ext>
             </a:extLst>
           </p:cNvPr>
@@ -15766,7 +16741,7 @@
           <p:cNvPr id="8" name="grid-v-488">
             <a:extLst xmlns:a="http://schemas.openxmlformats.org/drawingml/2006/main">
               <a:ext uri="{FF2B5EF4-FFF2-40B4-BE49-F238E27FC236}">
-                <a16:creationId xmlns:a16="http://schemas.microsoft.com/office/drawing/2014/main" id="{1E73F61C-A701-4988-8242-3952F8F66431}"/>
+                <a16:creationId xmlns:a16="http://schemas.microsoft.com/office/drawing/2014/main" id="{9E8B8684-E032-415B-8D6C-B6CBDADA7CEF}"/>
               </a:ext>
             </a:extLst>
           </p:cNvPr>
@@ -15797,7 +16772,7 @@
           <p:cNvPr id="9" name="grid-v-552">
             <a:extLst xmlns:a="http://schemas.openxmlformats.org/drawingml/2006/main">
               <a:ext uri="{FF2B5EF4-FFF2-40B4-BE49-F238E27FC236}">
-                <a16:creationId xmlns:a16="http://schemas.microsoft.com/office/drawing/2014/main" id="{004A3999-BD4E-4758-9375-B84432C87C28}"/>
+                <a16:creationId xmlns:a16="http://schemas.microsoft.com/office/drawing/2014/main" id="{FB94A2A0-2EED-4B27-9AE7-139863EA8065}"/>
               </a:ext>
             </a:extLst>
           </p:cNvPr>
@@ -15828,7 +16803,7 @@
           <p:cNvPr id="10" name="grid-v-616">
             <a:extLst xmlns:a="http://schemas.openxmlformats.org/drawingml/2006/main">
               <a:ext uri="{FF2B5EF4-FFF2-40B4-BE49-F238E27FC236}">
-                <a16:creationId xmlns:a16="http://schemas.microsoft.com/office/drawing/2014/main" id="{8D8DDF6D-F8D2-4F67-9D42-17AB17885E11}"/>
+                <a16:creationId xmlns:a16="http://schemas.microsoft.com/office/drawing/2014/main" id="{81B0944B-61AA-4B00-A397-0DD52DD9F4E3}"/>
               </a:ext>
             </a:extLst>
           </p:cNvPr>
@@ -15859,7 +16834,7 @@
           <p:cNvPr id="11" name="grid-v-680">
             <a:extLst xmlns:a="http://schemas.openxmlformats.org/drawingml/2006/main">
               <a:ext uri="{FF2B5EF4-FFF2-40B4-BE49-F238E27FC236}">
-                <a16:creationId xmlns:a16="http://schemas.microsoft.com/office/drawing/2014/main" id="{1AF7FD58-11A0-42BA-9F23-DB5471900D9F}"/>
+                <a16:creationId xmlns:a16="http://schemas.microsoft.com/office/drawing/2014/main" id="{65830409-4D8E-482D-BFDC-484E87F5F61D}"/>
               </a:ext>
             </a:extLst>
           </p:cNvPr>
@@ -15890,7 +16865,7 @@
           <p:cNvPr id="12" name="grid-v-744">
             <a:extLst xmlns:a="http://schemas.openxmlformats.org/drawingml/2006/main">
               <a:ext uri="{FF2B5EF4-FFF2-40B4-BE49-F238E27FC236}">
-                <a16:creationId xmlns:a16="http://schemas.microsoft.com/office/drawing/2014/main" id="{CD9F0EC4-F887-473A-B108-4712FFD5E974}"/>
+                <a16:creationId xmlns:a16="http://schemas.microsoft.com/office/drawing/2014/main" id="{A43B57AE-4072-44E9-9009-11FC900AFE46}"/>
               </a:ext>
             </a:extLst>
           </p:cNvPr>
@@ -15921,7 +16896,7 @@
           <p:cNvPr id="13" name="grid-v-808">
             <a:extLst xmlns:a="http://schemas.openxmlformats.org/drawingml/2006/main">
               <a:ext uri="{FF2B5EF4-FFF2-40B4-BE49-F238E27FC236}">
-                <a16:creationId xmlns:a16="http://schemas.microsoft.com/office/drawing/2014/main" id="{EFC0F841-9859-4E5E-9C5C-028F2F630431}"/>
+                <a16:creationId xmlns:a16="http://schemas.microsoft.com/office/drawing/2014/main" id="{93D6E879-3E42-42D2-81E8-E5DC941E1F7F}"/>
               </a:ext>
             </a:extLst>
           </p:cNvPr>
@@ -15952,7 +16927,7 @@
           <p:cNvPr id="14" name="grid-v-872">
             <a:extLst xmlns:a="http://schemas.openxmlformats.org/drawingml/2006/main">
               <a:ext uri="{FF2B5EF4-FFF2-40B4-BE49-F238E27FC236}">
-                <a16:creationId xmlns:a16="http://schemas.microsoft.com/office/drawing/2014/main" id="{19B88D7A-1B8C-4C25-BD3E-8CB5DC596675}"/>
+                <a16:creationId xmlns:a16="http://schemas.microsoft.com/office/drawing/2014/main" id="{F6AF1039-C1AE-4168-9A7A-96BD03AB7D28}"/>
               </a:ext>
             </a:extLst>
           </p:cNvPr>
@@ -15983,7 +16958,7 @@
           <p:cNvPr id="15" name="grid-v-936">
             <a:extLst xmlns:a="http://schemas.openxmlformats.org/drawingml/2006/main">
               <a:ext uri="{FF2B5EF4-FFF2-40B4-BE49-F238E27FC236}">
-                <a16:creationId xmlns:a16="http://schemas.microsoft.com/office/drawing/2014/main" id="{F5072DBA-97CB-49D8-8769-00A7253A7CDB}"/>
+                <a16:creationId xmlns:a16="http://schemas.microsoft.com/office/drawing/2014/main" id="{CAE725E8-C7FB-4B36-80A3-8C619505DD95}"/>
               </a:ext>
             </a:extLst>
           </p:cNvPr>
@@ -16014,7 +16989,7 @@
           <p:cNvPr id="16" name="grid-v-1000">
             <a:extLst xmlns:a="http://schemas.openxmlformats.org/drawingml/2006/main">
               <a:ext uri="{FF2B5EF4-FFF2-40B4-BE49-F238E27FC236}">
-                <a16:creationId xmlns:a16="http://schemas.microsoft.com/office/drawing/2014/main" id="{3B3CBA8A-CD77-44CA-8B9A-7CFA8C441EB7}"/>
+                <a16:creationId xmlns:a16="http://schemas.microsoft.com/office/drawing/2014/main" id="{5ABA4F35-DC92-4823-AF02-6A9DC1433FEF}"/>
               </a:ext>
             </a:extLst>
           </p:cNvPr>
@@ -16045,7 +17020,7 @@
           <p:cNvPr id="17" name="grid-v-1064">
             <a:extLst xmlns:a="http://schemas.openxmlformats.org/drawingml/2006/main">
               <a:ext uri="{FF2B5EF4-FFF2-40B4-BE49-F238E27FC236}">
-                <a16:creationId xmlns:a16="http://schemas.microsoft.com/office/drawing/2014/main" id="{7CD85197-5183-4BE5-9CCC-010F60A9963A}"/>
+                <a16:creationId xmlns:a16="http://schemas.microsoft.com/office/drawing/2014/main" id="{6B17E82F-6E9D-4819-8186-77C92964284F}"/>
               </a:ext>
             </a:extLst>
           </p:cNvPr>
@@ -16076,7 +17051,7 @@
           <p:cNvPr id="18" name="grid-v-1128">
             <a:extLst xmlns:a="http://schemas.openxmlformats.org/drawingml/2006/main">
               <a:ext uri="{FF2B5EF4-FFF2-40B4-BE49-F238E27FC236}">
-                <a16:creationId xmlns:a16="http://schemas.microsoft.com/office/drawing/2014/main" id="{28EA5546-0520-45A8-A748-41316597945B}"/>
+                <a16:creationId xmlns:a16="http://schemas.microsoft.com/office/drawing/2014/main" id="{BD1544B6-B24F-4DEE-BE4C-54E3B08F0C79}"/>
               </a:ext>
             </a:extLst>
           </p:cNvPr>
@@ -16107,7 +17082,7 @@
           <p:cNvPr id="19" name="grid-v-1192">
             <a:extLst xmlns:a="http://schemas.openxmlformats.org/drawingml/2006/main">
               <a:ext uri="{FF2B5EF4-FFF2-40B4-BE49-F238E27FC236}">
-                <a16:creationId xmlns:a16="http://schemas.microsoft.com/office/drawing/2014/main" id="{3CF34211-9E0C-4B1B-AE45-1B34C1B03329}"/>
+                <a16:creationId xmlns:a16="http://schemas.microsoft.com/office/drawing/2014/main" id="{42605941-EE9A-45F9-977D-E4E7B0110257}"/>
               </a:ext>
             </a:extLst>
           </p:cNvPr>
@@ -16138,7 +17113,7 @@
           <p:cNvPr id="20" name="grid-h-112">
             <a:extLst xmlns:a="http://schemas.openxmlformats.org/drawingml/2006/main">
               <a:ext uri="{FF2B5EF4-FFF2-40B4-BE49-F238E27FC236}">
-                <a16:creationId xmlns:a16="http://schemas.microsoft.com/office/drawing/2014/main" id="{E5D9D76D-66A7-4BD4-9436-ED4E7BAADF3C}"/>
+                <a16:creationId xmlns:a16="http://schemas.microsoft.com/office/drawing/2014/main" id="{43F47157-EAF9-4B67-9EC3-0FD7E2EE168F}"/>
               </a:ext>
             </a:extLst>
           </p:cNvPr>
@@ -16169,7 +17144,7 @@
           <p:cNvPr id="21" name="grid-h-176">
             <a:extLst xmlns:a="http://schemas.openxmlformats.org/drawingml/2006/main">
               <a:ext uri="{FF2B5EF4-FFF2-40B4-BE49-F238E27FC236}">
-                <a16:creationId xmlns:a16="http://schemas.microsoft.com/office/drawing/2014/main" id="{9BF41BC0-8FF8-4EC1-B90D-B23C9E24B9FF}"/>
+                <a16:creationId xmlns:a16="http://schemas.microsoft.com/office/drawing/2014/main" id="{CFDE5CE0-0040-46D3-AAE3-885297CB5E60}"/>
               </a:ext>
             </a:extLst>
           </p:cNvPr>
@@ -16200,7 +17175,7 @@
           <p:cNvPr id="22" name="grid-h-240">
             <a:extLst xmlns:a="http://schemas.openxmlformats.org/drawingml/2006/main">
               <a:ext uri="{FF2B5EF4-FFF2-40B4-BE49-F238E27FC236}">
-                <a16:creationId xmlns:a16="http://schemas.microsoft.com/office/drawing/2014/main" id="{D7D3AFC6-7D06-4F25-8BD4-D3B2BD8FDE31}"/>
+                <a16:creationId xmlns:a16="http://schemas.microsoft.com/office/drawing/2014/main" id="{E90DFE43-4731-4746-A167-20A3EE629E3E}"/>
               </a:ext>
             </a:extLst>
           </p:cNvPr>
@@ -16231,7 +17206,7 @@
           <p:cNvPr id="23" name="grid-h-304">
             <a:extLst xmlns:a="http://schemas.openxmlformats.org/drawingml/2006/main">
               <a:ext uri="{FF2B5EF4-FFF2-40B4-BE49-F238E27FC236}">
-                <a16:creationId xmlns:a16="http://schemas.microsoft.com/office/drawing/2014/main" id="{25556949-281E-4A7D-9C23-5BF1B011DDA3}"/>
+                <a16:creationId xmlns:a16="http://schemas.microsoft.com/office/drawing/2014/main" id="{A19CED85-40C5-4A73-8329-DBB30935E06A}"/>
               </a:ext>
             </a:extLst>
           </p:cNvPr>
@@ -16262,7 +17237,7 @@
           <p:cNvPr id="24" name="grid-h-368">
             <a:extLst xmlns:a="http://schemas.openxmlformats.org/drawingml/2006/main">
               <a:ext uri="{FF2B5EF4-FFF2-40B4-BE49-F238E27FC236}">
-                <a16:creationId xmlns:a16="http://schemas.microsoft.com/office/drawing/2014/main" id="{3D29E2EA-F63E-4E10-A3FA-594701EE0821}"/>
+                <a16:creationId xmlns:a16="http://schemas.microsoft.com/office/drawing/2014/main" id="{2D49AF0E-60FD-4425-B95E-5A1CA4EF278B}"/>
               </a:ext>
             </a:extLst>
           </p:cNvPr>
@@ -16293,7 +17268,7 @@
           <p:cNvPr id="25" name="grid-h-432">
             <a:extLst xmlns:a="http://schemas.openxmlformats.org/drawingml/2006/main">
               <a:ext uri="{FF2B5EF4-FFF2-40B4-BE49-F238E27FC236}">
-                <a16:creationId xmlns:a16="http://schemas.microsoft.com/office/drawing/2014/main" id="{D424C929-6455-42AB-B399-373083985E15}"/>
+                <a16:creationId xmlns:a16="http://schemas.microsoft.com/office/drawing/2014/main" id="{909C382C-FFDF-4AD3-ADD3-6491E59CFCCB}"/>
               </a:ext>
             </a:extLst>
           </p:cNvPr>
@@ -16324,7 +17299,7 @@
           <p:cNvPr id="26" name="grid-h-496">
             <a:extLst xmlns:a="http://schemas.openxmlformats.org/drawingml/2006/main">
               <a:ext uri="{FF2B5EF4-FFF2-40B4-BE49-F238E27FC236}">
-                <a16:creationId xmlns:a16="http://schemas.microsoft.com/office/drawing/2014/main" id="{52F35317-4A4C-4EA9-8CF3-EAE22E380C1D}"/>
+                <a16:creationId xmlns:a16="http://schemas.microsoft.com/office/drawing/2014/main" id="{9249C5D8-8DD3-4B6A-9D34-7B34AE05AF95}"/>
               </a:ext>
             </a:extLst>
           </p:cNvPr>
@@ -16355,7 +17330,7 @@
           <p:cNvPr id="27" name="grid-h-560">
             <a:extLst xmlns:a="http://schemas.openxmlformats.org/drawingml/2006/main">
               <a:ext uri="{FF2B5EF4-FFF2-40B4-BE49-F238E27FC236}">
-                <a16:creationId xmlns:a16="http://schemas.microsoft.com/office/drawing/2014/main" id="{3ED106FF-359A-490C-AFA8-338D2F7BB1AF}"/>
+                <a16:creationId xmlns:a16="http://schemas.microsoft.com/office/drawing/2014/main" id="{6714DDDD-245B-482D-B3F8-39DF76FCB285}"/>
               </a:ext>
             </a:extLst>
           </p:cNvPr>
@@ -16386,7 +17361,7 @@
           <p:cNvPr id="28" name="grid-h-624">
             <a:extLst xmlns:a="http://schemas.openxmlformats.org/drawingml/2006/main">
               <a:ext uri="{FF2B5EF4-FFF2-40B4-BE49-F238E27FC236}">
-                <a16:creationId xmlns:a16="http://schemas.microsoft.com/office/drawing/2014/main" id="{AAE9DA4E-1252-4CDD-8ED5-FBB8C793ADA4}"/>
+                <a16:creationId xmlns:a16="http://schemas.microsoft.com/office/drawing/2014/main" id="{7B9751A7-5490-4ECB-9E0D-CC0E76E15826}"/>
               </a:ext>
             </a:extLst>
           </p:cNvPr>
@@ -16417,7 +17392,7 @@
           <p:cNvPr id="29" name="top-rule">
             <a:extLst xmlns:a="http://schemas.openxmlformats.org/drawingml/2006/main">
               <a:ext uri="{FF2B5EF4-FFF2-40B4-BE49-F238E27FC236}">
-                <a16:creationId xmlns:a16="http://schemas.microsoft.com/office/drawing/2014/main" id="{CE5D94C2-25ED-4314-9447-BB97EDD181F1}"/>
+                <a16:creationId xmlns:a16="http://schemas.microsoft.com/office/drawing/2014/main" id="{6AED6646-95D5-4595-B090-0FB0F4481A3E}"/>
               </a:ext>
             </a:extLst>
           </p:cNvPr>
@@ -16448,7 +17423,7 @@
           <p:cNvPr id="30" name="wordmark">
             <a:extLst xmlns:a="http://schemas.openxmlformats.org/drawingml/2006/main">
               <a:ext uri="{FF2B5EF4-FFF2-40B4-BE49-F238E27FC236}">
-                <a16:creationId xmlns:a16="http://schemas.microsoft.com/office/drawing/2014/main" id="{71CFD499-BB87-4F78-90D4-9F24F539F647}"/>
+                <a16:creationId xmlns:a16="http://schemas.microsoft.com/office/drawing/2014/main" id="{AF6263A8-E0BF-4559-BA96-A9E927C39032}"/>
               </a:ext>
             </a:extLst>
           </p:cNvPr>
@@ -16510,7 +17485,7 @@
           <p:cNvPr id="31" name="environment-label">
             <a:extLst xmlns:a="http://schemas.openxmlformats.org/drawingml/2006/main">
               <a:ext uri="{FF2B5EF4-FFF2-40B4-BE49-F238E27FC236}">
-                <a16:creationId xmlns:a16="http://schemas.microsoft.com/office/drawing/2014/main" id="{C1F32514-CBD6-45A1-89E3-DAFE8D90A34C}"/>
+                <a16:creationId xmlns:a16="http://schemas.microsoft.com/office/drawing/2014/main" id="{4447C738-BBCE-4AB6-BCFA-DC4674DAD432}"/>
               </a:ext>
             </a:extLst>
           </p:cNvPr>
@@ -16572,7 +17547,7 @@
           <p:cNvPr id="32" name="slide-index">
             <a:extLst xmlns:a="http://schemas.openxmlformats.org/drawingml/2006/main">
               <a:ext uri="{FF2B5EF4-FFF2-40B4-BE49-F238E27FC236}">
-                <a16:creationId xmlns:a16="http://schemas.microsoft.com/office/drawing/2014/main" id="{FCD02BB7-3A41-46D5-9366-52235F58E175}"/>
+                <a16:creationId xmlns:a16="http://schemas.microsoft.com/office/drawing/2014/main" id="{55CFBC96-D2B9-4B35-A803-477BA275441D}"/>
               </a:ext>
             </a:extLst>
           </p:cNvPr>
@@ -16634,7 +17609,7 @@
           <p:cNvPr id="33" name="event-footer">
             <a:extLst xmlns:a="http://schemas.openxmlformats.org/drawingml/2006/main">
               <a:ext uri="{FF2B5EF4-FFF2-40B4-BE49-F238E27FC236}">
-                <a16:creationId xmlns:a16="http://schemas.microsoft.com/office/drawing/2014/main" id="{084E905E-A744-446F-8F2E-9C0F0ED5C454}"/>
+                <a16:creationId xmlns:a16="http://schemas.microsoft.com/office/drawing/2014/main" id="{73905131-AF19-48CF-9497-1CDC4A773C7F}"/>
               </a:ext>
             </a:extLst>
           </p:cNvPr>
@@ -16696,7 +17671,7 @@
           <p:cNvPr id="34" name="honesty-footer">
             <a:extLst xmlns:a="http://schemas.openxmlformats.org/drawingml/2006/main">
               <a:ext uri="{FF2B5EF4-FFF2-40B4-BE49-F238E27FC236}">
-                <a16:creationId xmlns:a16="http://schemas.microsoft.com/office/drawing/2014/main" id="{214C5AAD-D150-47BA-99EB-062852DA84DF}"/>
+                <a16:creationId xmlns:a16="http://schemas.microsoft.com/office/drawing/2014/main" id="{A081D51A-C091-43C0-923D-4FB26BA00302}"/>
               </a:ext>
             </a:extLst>
           </p:cNvPr>
@@ -16758,7 +17733,7 @@
           <p:cNvPr id="35" name="eyebrow">
             <a:extLst xmlns:a="http://schemas.openxmlformats.org/drawingml/2006/main">
               <a:ext uri="{FF2B5EF4-FFF2-40B4-BE49-F238E27FC236}">
-                <a16:creationId xmlns:a16="http://schemas.microsoft.com/office/drawing/2014/main" id="{E7389826-B09C-41FD-B845-E47137E109AD}"/>
+                <a16:creationId xmlns:a16="http://schemas.microsoft.com/office/drawing/2014/main" id="{7D09D294-A538-4117-ABA8-E16883127FD9}"/>
               </a:ext>
             </a:extLst>
           </p:cNvPr>
@@ -16820,7 +17795,7 @@
           <p:cNvPr id="36" name="slide-title">
             <a:extLst xmlns:a="http://schemas.openxmlformats.org/drawingml/2006/main">
               <a:ext uri="{FF2B5EF4-FFF2-40B4-BE49-F238E27FC236}">
-                <a16:creationId xmlns:a16="http://schemas.microsoft.com/office/drawing/2014/main" id="{0119820B-D14C-4D4B-B72B-CB6D5B9502E0}"/>
+                <a16:creationId xmlns:a16="http://schemas.microsoft.com/office/drawing/2014/main" id="{DEE6C50C-67F7-4127-B5FB-1F5AD094954C}"/>
               </a:ext>
             </a:extLst>
           </p:cNvPr>
@@ -16882,7 +17857,7 @@
           <p:cNvPr id="37" name="result-reserved">
             <a:extLst xmlns:a="http://schemas.openxmlformats.org/drawingml/2006/main">
               <a:ext uri="{FF2B5EF4-FFF2-40B4-BE49-F238E27FC236}">
-                <a16:creationId xmlns:a16="http://schemas.microsoft.com/office/drawing/2014/main" id="{B87BCBA8-3E73-48E4-8834-9E14AB096B76}"/>
+                <a16:creationId xmlns:a16="http://schemas.microsoft.com/office/drawing/2014/main" id="{15B63515-1A96-421E-B7E8-D0CC97F52DA8}"/>
               </a:ext>
             </a:extLst>
           </p:cNvPr>
@@ -16944,7 +17919,7 @@
           <p:cNvPr id="38" name="result-reserved-label">
             <a:extLst xmlns:a="http://schemas.openxmlformats.org/drawingml/2006/main">
               <a:ext uri="{FF2B5EF4-FFF2-40B4-BE49-F238E27FC236}">
-                <a16:creationId xmlns:a16="http://schemas.microsoft.com/office/drawing/2014/main" id="{A1F8D161-E0D5-4091-B54E-10B480B6DB5D}"/>
+                <a16:creationId xmlns:a16="http://schemas.microsoft.com/office/drawing/2014/main" id="{A3568D32-739C-4AA4-B8A1-F2A2A803F34B}"/>
               </a:ext>
             </a:extLst>
           </p:cNvPr>
@@ -17006,7 +17981,7 @@
           <p:cNvPr id="39" name="result-arrow-1-shaft">
             <a:extLst xmlns:a="http://schemas.openxmlformats.org/drawingml/2006/main">
               <a:ext uri="{FF2B5EF4-FFF2-40B4-BE49-F238E27FC236}">
-                <a16:creationId xmlns:a16="http://schemas.microsoft.com/office/drawing/2014/main" id="{6A197F05-DC6E-4B6C-95D9-17BF5FEED17C}"/>
+                <a16:creationId xmlns:a16="http://schemas.microsoft.com/office/drawing/2014/main" id="{A6EB0F7A-4DB4-4A3A-B638-9CCB9E7B0139}"/>
               </a:ext>
             </a:extLst>
           </p:cNvPr>
@@ -17037,7 +18012,7 @@
           <p:cNvPr id="40" name="result-arrow-1-head">
             <a:extLst xmlns:a="http://schemas.openxmlformats.org/drawingml/2006/main">
               <a:ext uri="{FF2B5EF4-FFF2-40B4-BE49-F238E27FC236}">
-                <a16:creationId xmlns:a16="http://schemas.microsoft.com/office/drawing/2014/main" id="{B70F1378-ADD3-44EA-90E5-E1E84B82B644}"/>
+                <a16:creationId xmlns:a16="http://schemas.microsoft.com/office/drawing/2014/main" id="{9607795D-64F2-40A6-A71C-13CAFB8724B4}"/>
               </a:ext>
             </a:extLst>
           </p:cNvPr>
@@ -17068,7 +18043,7 @@
           <p:cNvPr id="41" name="result-captured">
             <a:extLst xmlns:a="http://schemas.openxmlformats.org/drawingml/2006/main">
               <a:ext uri="{FF2B5EF4-FFF2-40B4-BE49-F238E27FC236}">
-                <a16:creationId xmlns:a16="http://schemas.microsoft.com/office/drawing/2014/main" id="{732885A1-4DB4-4C66-AF43-C0CA279D28C5}"/>
+                <a16:creationId xmlns:a16="http://schemas.microsoft.com/office/drawing/2014/main" id="{3254D606-94AB-471E-ACC2-08D1838883BF}"/>
               </a:ext>
             </a:extLst>
           </p:cNvPr>
@@ -17130,7 +18105,7 @@
           <p:cNvPr id="42" name="result-captured-label">
             <a:extLst xmlns:a="http://schemas.openxmlformats.org/drawingml/2006/main">
               <a:ext uri="{FF2B5EF4-FFF2-40B4-BE49-F238E27FC236}">
-                <a16:creationId xmlns:a16="http://schemas.microsoft.com/office/drawing/2014/main" id="{203FA258-47EC-4533-A8D4-438C0740539D}"/>
+                <a16:creationId xmlns:a16="http://schemas.microsoft.com/office/drawing/2014/main" id="{A3EEE720-6740-4942-B0F9-52E9A555744C}"/>
               </a:ext>
             </a:extLst>
           </p:cNvPr>
@@ -17192,7 +18167,7 @@
           <p:cNvPr id="43" name="result-plus">
             <a:extLst xmlns:a="http://schemas.openxmlformats.org/drawingml/2006/main">
               <a:ext uri="{FF2B5EF4-FFF2-40B4-BE49-F238E27FC236}">
-                <a16:creationId xmlns:a16="http://schemas.microsoft.com/office/drawing/2014/main" id="{A6C42869-D41F-4969-91FC-3F093F179816}"/>
+                <a16:creationId xmlns:a16="http://schemas.microsoft.com/office/drawing/2014/main" id="{F0DF36C9-10FB-4A47-A2F7-9C713E580442}"/>
               </a:ext>
             </a:extLst>
           </p:cNvPr>
@@ -17254,7 +18229,7 @@
           <p:cNvPr id="44" name="result-released">
             <a:extLst xmlns:a="http://schemas.openxmlformats.org/drawingml/2006/main">
               <a:ext uri="{FF2B5EF4-FFF2-40B4-BE49-F238E27FC236}">
-                <a16:creationId xmlns:a16="http://schemas.microsoft.com/office/drawing/2014/main" id="{952716EC-77E2-4420-A170-F743FBCA9D6B}"/>
+                <a16:creationId xmlns:a16="http://schemas.microsoft.com/office/drawing/2014/main" id="{DB1EAB1F-7BCD-469F-8A1E-AB4C1E7C730A}"/>
               </a:ext>
             </a:extLst>
           </p:cNvPr>
@@ -17316,7 +18291,7 @@
           <p:cNvPr id="45" name="result-released-label">
             <a:extLst xmlns:a="http://schemas.openxmlformats.org/drawingml/2006/main">
               <a:ext uri="{FF2B5EF4-FFF2-40B4-BE49-F238E27FC236}">
-                <a16:creationId xmlns:a16="http://schemas.microsoft.com/office/drawing/2014/main" id="{9C890187-5980-4C3E-80E5-97E89B309BDD}"/>
+                <a16:creationId xmlns:a16="http://schemas.microsoft.com/office/drawing/2014/main" id="{7D786A45-AF0D-4299-B521-E993C69C0DD6}"/>
               </a:ext>
             </a:extLst>
           </p:cNvPr>
@@ -17378,7 +18353,7 @@
           <p:cNvPr id="46" name="result-equation-bracket-tl-h">
             <a:extLst xmlns:a="http://schemas.openxmlformats.org/drawingml/2006/main">
               <a:ext uri="{FF2B5EF4-FFF2-40B4-BE49-F238E27FC236}">
-                <a16:creationId xmlns:a16="http://schemas.microsoft.com/office/drawing/2014/main" id="{C5CB1A80-90D6-4601-BFA6-9F7A5913E005}"/>
+                <a16:creationId xmlns:a16="http://schemas.microsoft.com/office/drawing/2014/main" id="{05F905F6-5394-44CE-A164-CFDF0759B529}"/>
               </a:ext>
             </a:extLst>
           </p:cNvPr>
@@ -17409,7 +18384,7 @@
           <p:cNvPr id="47" name="result-equation-bracket-tl-v">
             <a:extLst xmlns:a="http://schemas.openxmlformats.org/drawingml/2006/main">
               <a:ext uri="{FF2B5EF4-FFF2-40B4-BE49-F238E27FC236}">
-                <a16:creationId xmlns:a16="http://schemas.microsoft.com/office/drawing/2014/main" id="{510F7567-C1BF-46E0-912C-5538103AEA9E}"/>
+                <a16:creationId xmlns:a16="http://schemas.microsoft.com/office/drawing/2014/main" id="{3DA11767-67AE-4E60-839E-169A0B4F8C68}"/>
               </a:ext>
             </a:extLst>
           </p:cNvPr>
@@ -17440,7 +18415,7 @@
           <p:cNvPr id="48" name="result-equation-bracket-tr-h">
             <a:extLst xmlns:a="http://schemas.openxmlformats.org/drawingml/2006/main">
               <a:ext uri="{FF2B5EF4-FFF2-40B4-BE49-F238E27FC236}">
-                <a16:creationId xmlns:a16="http://schemas.microsoft.com/office/drawing/2014/main" id="{24BC941C-C7DC-498F-B8BC-0B7C22DF5ACC}"/>
+                <a16:creationId xmlns:a16="http://schemas.microsoft.com/office/drawing/2014/main" id="{3F315D39-C518-4EE1-8E5A-0B00D964AC50}"/>
               </a:ext>
             </a:extLst>
           </p:cNvPr>
@@ -17471,7 +18446,7 @@
           <p:cNvPr id="49" name="result-equation-bracket-tr-v">
             <a:extLst xmlns:a="http://schemas.openxmlformats.org/drawingml/2006/main">
               <a:ext uri="{FF2B5EF4-FFF2-40B4-BE49-F238E27FC236}">
-                <a16:creationId xmlns:a16="http://schemas.microsoft.com/office/drawing/2014/main" id="{CFE37C1E-0038-40E3-9F22-DF1A0261A777}"/>
+                <a16:creationId xmlns:a16="http://schemas.microsoft.com/office/drawing/2014/main" id="{A5FC84B9-4C10-4E5D-BB2C-DDCC17CE89DC}"/>
               </a:ext>
             </a:extLst>
           </p:cNvPr>
@@ -17502,7 +18477,7 @@
           <p:cNvPr id="50" name="result-equation-bracket-bl-h">
             <a:extLst xmlns:a="http://schemas.openxmlformats.org/drawingml/2006/main">
               <a:ext uri="{FF2B5EF4-FFF2-40B4-BE49-F238E27FC236}">
-                <a16:creationId xmlns:a16="http://schemas.microsoft.com/office/drawing/2014/main" id="{6CF5B02A-E545-4CA7-B05F-8CB9169ADE3B}"/>
+                <a16:creationId xmlns:a16="http://schemas.microsoft.com/office/drawing/2014/main" id="{7AB4D326-D6C2-4841-B9A7-62C160F6F319}"/>
               </a:ext>
             </a:extLst>
           </p:cNvPr>
@@ -17533,7 +18508,7 @@
           <p:cNvPr id="51" name="result-equation-bracket-bl-v">
             <a:extLst xmlns:a="http://schemas.openxmlformats.org/drawingml/2006/main">
               <a:ext uri="{FF2B5EF4-FFF2-40B4-BE49-F238E27FC236}">
-                <a16:creationId xmlns:a16="http://schemas.microsoft.com/office/drawing/2014/main" id="{8BFF12C0-86AF-40C6-8DE7-969AAA981125}"/>
+                <a16:creationId xmlns:a16="http://schemas.microsoft.com/office/drawing/2014/main" id="{D27E2A1F-BCA7-4451-A678-94705E3A719A}"/>
               </a:ext>
             </a:extLst>
           </p:cNvPr>
@@ -17564,7 +18539,7 @@
           <p:cNvPr id="52" name="result-equation-bracket-br-h">
             <a:extLst xmlns:a="http://schemas.openxmlformats.org/drawingml/2006/main">
               <a:ext uri="{FF2B5EF4-FFF2-40B4-BE49-F238E27FC236}">
-                <a16:creationId xmlns:a16="http://schemas.microsoft.com/office/drawing/2014/main" id="{E0B10EF3-F1CE-4153-9C55-663B92E46F08}"/>
+                <a16:creationId xmlns:a16="http://schemas.microsoft.com/office/drawing/2014/main" id="{71C55FC9-BAF6-4571-9A80-244BC13A9FFB}"/>
               </a:ext>
             </a:extLst>
           </p:cNvPr>
@@ -17595,7 +18570,7 @@
           <p:cNvPr id="53" name="result-equation-bracket-br-v">
             <a:extLst xmlns:a="http://schemas.openxmlformats.org/drawingml/2006/main">
               <a:ext uri="{FF2B5EF4-FFF2-40B4-BE49-F238E27FC236}">
-                <a16:creationId xmlns:a16="http://schemas.microsoft.com/office/drawing/2014/main" id="{AE5BA223-7736-4949-8CB3-98AC81A3B254}"/>
+                <a16:creationId xmlns:a16="http://schemas.microsoft.com/office/drawing/2014/main" id="{3B41CEE8-D89E-4398-AAD0-C9EC3B070D89}"/>
               </a:ext>
             </a:extLst>
           </p:cNvPr>
@@ -17626,7 +18601,7 @@
           <p:cNvPr id="54" name="result-improvement">
             <a:extLst xmlns:a="http://schemas.openxmlformats.org/drawingml/2006/main">
               <a:ext uri="{FF2B5EF4-FFF2-40B4-BE49-F238E27FC236}">
-                <a16:creationId xmlns:a16="http://schemas.microsoft.com/office/drawing/2014/main" id="{A88FBFF2-20C5-42A9-B779-88FB9DAD7727}"/>
+                <a16:creationId xmlns:a16="http://schemas.microsoft.com/office/drawing/2014/main" id="{DC585B2F-1359-48FC-AA50-889A84843D82}"/>
               </a:ext>
             </a:extLst>
           </p:cNvPr>
@@ -17688,7 +18663,7 @@
           <p:cNvPr id="55" name="result-improvement-label">
             <a:extLst xmlns:a="http://schemas.openxmlformats.org/drawingml/2006/main">
               <a:ext uri="{FF2B5EF4-FFF2-40B4-BE49-F238E27FC236}">
-                <a16:creationId xmlns:a16="http://schemas.microsoft.com/office/drawing/2014/main" id="{A791F711-ABAC-4201-80AB-AE66B5DFE7CB}"/>
+                <a16:creationId xmlns:a16="http://schemas.microsoft.com/office/drawing/2014/main" id="{96C00959-D58C-4DFA-B0DA-35DD96F602AB}"/>
               </a:ext>
             </a:extLst>
           </p:cNvPr>
@@ -17750,7 +18725,7 @@
           <p:cNvPr id="56" name="result-divider-1">
             <a:extLst xmlns:a="http://schemas.openxmlformats.org/drawingml/2006/main">
               <a:ext uri="{FF2B5EF4-FFF2-40B4-BE49-F238E27FC236}">
-                <a16:creationId xmlns:a16="http://schemas.microsoft.com/office/drawing/2014/main" id="{1DADAEB7-A095-4552-A803-D13CCFB311F4}"/>
+                <a16:creationId xmlns:a16="http://schemas.microsoft.com/office/drawing/2014/main" id="{117262DA-BE9F-4AF7-9BCC-DA40DB9BB976}"/>
               </a:ext>
             </a:extLst>
           </p:cNvPr>
@@ -17781,7 +18756,7 @@
           <p:cNvPr id="57" name="result-zero">
             <a:extLst xmlns:a="http://schemas.openxmlformats.org/drawingml/2006/main">
               <a:ext uri="{FF2B5EF4-FFF2-40B4-BE49-F238E27FC236}">
-                <a16:creationId xmlns:a16="http://schemas.microsoft.com/office/drawing/2014/main" id="{3B7D95DB-BAAD-4AD9-8309-B2C8B80EA46E}"/>
+                <a16:creationId xmlns:a16="http://schemas.microsoft.com/office/drawing/2014/main" id="{96AF7BE5-3B43-479F-A405-9CCBD0530AAD}"/>
               </a:ext>
             </a:extLst>
           </p:cNvPr>
@@ -17843,7 +18818,7 @@
           <p:cNvPr id="58" name="result-zero-label">
             <a:extLst xmlns:a="http://schemas.openxmlformats.org/drawingml/2006/main">
               <a:ext uri="{FF2B5EF4-FFF2-40B4-BE49-F238E27FC236}">
-                <a16:creationId xmlns:a16="http://schemas.microsoft.com/office/drawing/2014/main" id="{00BC1B3E-7F15-4BED-A0C1-0AD056C36C6C}"/>
+                <a16:creationId xmlns:a16="http://schemas.microsoft.com/office/drawing/2014/main" id="{E49513D1-0E1C-4323-84BA-AD36CD9B49D8}"/>
               </a:ext>
             </a:extLst>
           </p:cNvPr>
@@ -17905,7 +18880,7 @@
           <p:cNvPr id="59" name="result-divider-2">
             <a:extLst xmlns:a="http://schemas.openxmlformats.org/drawingml/2006/main">
               <a:ext uri="{FF2B5EF4-FFF2-40B4-BE49-F238E27FC236}">
-                <a16:creationId xmlns:a16="http://schemas.microsoft.com/office/drawing/2014/main" id="{0209E466-C59D-4C4F-B33F-CCF617202D10}"/>
+                <a16:creationId xmlns:a16="http://schemas.microsoft.com/office/drawing/2014/main" id="{64E7C0D2-D520-4A4F-98EA-F45CF3A77711}"/>
               </a:ext>
             </a:extLst>
           </p:cNvPr>
@@ -17936,7 +18911,7 @@
           <p:cNvPr id="60" name="result-monad">
             <a:extLst xmlns:a="http://schemas.openxmlformats.org/drawingml/2006/main">
               <a:ext uri="{FF2B5EF4-FFF2-40B4-BE49-F238E27FC236}">
-                <a16:creationId xmlns:a16="http://schemas.microsoft.com/office/drawing/2014/main" id="{57759DD6-E129-4CC6-806C-B98737ECCED1}"/>
+                <a16:creationId xmlns:a16="http://schemas.microsoft.com/office/drawing/2014/main" id="{68D46790-7D1B-49C7-9FC5-4AAF8217E2A1}"/>
               </a:ext>
             </a:extLst>
           </p:cNvPr>
@@ -17998,7 +18973,7 @@
           <p:cNvPr id="61" name="result-monad-label">
             <a:extLst xmlns:a="http://schemas.openxmlformats.org/drawingml/2006/main">
               <a:ext uri="{FF2B5EF4-FFF2-40B4-BE49-F238E27FC236}">
-                <a16:creationId xmlns:a16="http://schemas.microsoft.com/office/drawing/2014/main" id="{9BEF213D-F54C-4E1C-9906-85AEFD9BBB97}"/>
+                <a16:creationId xmlns:a16="http://schemas.microsoft.com/office/drawing/2014/main" id="{75D526C8-BC19-4D5D-941B-EB761A8DBA3B}"/>
               </a:ext>
             </a:extLst>
           </p:cNvPr>
@@ -18032,7 +19007,7 @@
                 <a:spcPct val="100000"/>
               </a:lnSpc>
               <a:buNone/>
-              <a:defRPr sz="1050" b="0">
+              <a:defRPr sz="975" b="0">
                 <a:solidFill>
                   <a:srgbClr val="858B84"/>
                 </a:solidFill>
@@ -18042,7 +19017,7 @@
               </a:defRPr>
             </a:pPr>
             <a:r>
-              <a:rPr sz="1050" b="0">
+              <a:rPr sz="975" b="0">
                 <a:solidFill>
                   <a:srgbClr val="858B84"/>
                 </a:solidFill>
@@ -18050,7 +19025,7 @@
                 <a:ea typeface="Courier New"/>
                 <a:cs typeface="Courier New"/>
               </a:rPr>
-              <a:t>ORDERS RECORDED CLAIMS</a:t>
+              <a:t>FINALIZES RECORDED ORDER</a:t>
             </a:r>
           </a:p>
         </p:txBody>
@@ -18060,7 +19035,7 @@
           <p:cNvPr id="62" name="result-rain">
             <a:extLst xmlns:a="http://schemas.openxmlformats.org/drawingml/2006/main">
               <a:ext uri="{FF2B5EF4-FFF2-40B4-BE49-F238E27FC236}">
-                <a16:creationId xmlns:a16="http://schemas.microsoft.com/office/drawing/2014/main" id="{F502DEF4-F4FA-4754-95E8-4C1D5B89C504}"/>
+                <a16:creationId xmlns:a16="http://schemas.microsoft.com/office/drawing/2014/main" id="{0138993B-A110-4268-B6A8-67AB88731D66}"/>
               </a:ext>
             </a:extLst>
           </p:cNvPr>
@@ -18122,7 +19097,7 @@
           <p:cNvPr id="63" name="result-rain-label">
             <a:extLst xmlns:a="http://schemas.openxmlformats.org/drawingml/2006/main">
               <a:ext uri="{FF2B5EF4-FFF2-40B4-BE49-F238E27FC236}">
-                <a16:creationId xmlns:a16="http://schemas.microsoft.com/office/drawing/2014/main" id="{D0E2E827-DA08-4335-84E6-07B9C9BF006A}"/>
+                <a16:creationId xmlns:a16="http://schemas.microsoft.com/office/drawing/2014/main" id="{9FC1CC25-9A00-486E-93EB-609F12EC2182}"/>
               </a:ext>
             </a:extLst>
           </p:cNvPr>
@@ -18184,7 +19159,7 @@
           <p:cNvPr id="64" name="closing-rule">
             <a:extLst xmlns:a="http://schemas.openxmlformats.org/drawingml/2006/main">
               <a:ext uri="{FF2B5EF4-FFF2-40B4-BE49-F238E27FC236}">
-                <a16:creationId xmlns:a16="http://schemas.microsoft.com/office/drawing/2014/main" id="{658C4B18-0C6C-4B9A-A1B1-E11A701E5C4D}"/>
+                <a16:creationId xmlns:a16="http://schemas.microsoft.com/office/drawing/2014/main" id="{99C5A557-D956-4B25-963B-7E733396CA0F}"/>
               </a:ext>
             </a:extLst>
           </p:cNvPr>
@@ -18215,7 +19190,7 @@
           <p:cNvPr id="65" name="closing-thesis">
             <a:extLst xmlns:a="http://schemas.openxmlformats.org/drawingml/2006/main">
               <a:ext uri="{FF2B5EF4-FFF2-40B4-BE49-F238E27FC236}">
-                <a16:creationId xmlns:a16="http://schemas.microsoft.com/office/drawing/2014/main" id="{159623C1-905F-4082-A072-67E5680678A9}"/>
+                <a16:creationId xmlns:a16="http://schemas.microsoft.com/office/drawing/2014/main" id="{13BACCFD-7CF9-4F6E-979E-25A5FA72C160}"/>
               </a:ext>
             </a:extLst>
           </p:cNvPr>
@@ -18277,19 +19252,19 @@
           <p:cNvPr id="66" name="closing-action">
             <a:extLst xmlns:a="http://schemas.openxmlformats.org/drawingml/2006/main">
               <a:ext uri="{FF2B5EF4-FFF2-40B4-BE49-F238E27FC236}">
-                <a16:creationId xmlns:a16="http://schemas.microsoft.com/office/drawing/2014/main" id="{73BE9794-8F73-4E7B-AEBA-7982233CD41A}"/>
-              </a:ext>
-            </a:extLst>
-          </p:cNvPr>
-          <p:cNvSpPr>
-            <a:spLocks xmlns:a="http://schemas.openxmlformats.org/drawingml/2006/main" noGrp="1"/>
-          </p:cNvSpPr>
-          <p:nvPr/>
-        </p:nvSpPr>
-        <p:spPr>
-          <a:xfrm xmlns:a="http://schemas.openxmlformats.org/drawingml/2006/main">
-            <a:off x="8915400" y="5905500"/>
-            <a:ext cx="2895600" cy="285750"/>
+                <a16:creationId xmlns:a16="http://schemas.microsoft.com/office/drawing/2014/main" id="{E58B512A-21AC-4093-84A7-B7136A8AABD0}"/>
+              </a:ext>
+            </a:extLst>
+          </p:cNvPr>
+          <p:cNvSpPr>
+            <a:spLocks xmlns:a="http://schemas.openxmlformats.org/drawingml/2006/main" noGrp="1"/>
+          </p:cNvSpPr>
+          <p:nvPr/>
+        </p:nvSpPr>
+        <p:spPr>
+          <a:xfrm xmlns:a="http://schemas.openxmlformats.org/drawingml/2006/main">
+            <a:off x="8629650" y="5905500"/>
+            <a:ext cx="3181350" cy="285750"/>
           </a:xfrm>
           <a:prstGeom xmlns:a="http://schemas.openxmlformats.org/drawingml/2006/main" prst="rect">
             <a:avLst/>
@@ -18311,7 +19286,7 @@
                 <a:spcPct val="100000"/>
               </a:lnSpc>
               <a:buNone/>
-              <a:defRPr sz="1050" b="1">
+              <a:defRPr sz="975" b="1">
                 <a:solidFill>
                   <a:srgbClr val="C7F52F"/>
                 </a:solidFill>
@@ -18321,7 +19296,7 @@
               </a:defRPr>
             </a:pPr>
             <a:r>
-              <a:rPr sz="1050" b="1">
+              <a:rPr sz="975" b="1">
                 <a:solidFill>
                   <a:srgbClr val="C7F52F"/>
                 </a:solidFill>
@@ -18329,7 +19304,7 @@
                 <a:ea typeface="Courier New"/>
                 <a:cs typeface="Courier New"/>
               </a:rPr>
-              <a:t>RAIN VERIFIED · MONAD LOCAL</a:t>
+              <a:t>RAIN VERIFIED · MONAD FINALIZED</a:t>
             </a:r>
           </a:p>
         </p:txBody>
@@ -18337,7 +19312,7 @@
     </p:spTree>
     <p:extLst>
       <p:ext uri="{BB962C8B-B14F-4D97-AF65-F5344CB8AC3E}">
-        <p14:creationId xmlns:p14="http://schemas.microsoft.com/office/powerpoint/2010/main" val="663984931"/>
+        <p14:creationId xmlns:p14="http://schemas.microsoft.com/office/powerpoint/2010/main" val="1062618566"/>
       </p:ext>
     </p:extLst>
   </p:cSld>

--- a/POOL_PITCH.pptx
+++ b/POOL_PITCH.pptx
@@ -2,18 +2,18 @@
 <file path=ppt/presentation.xml><?xml version="1.0" encoding="utf-8"?>
 <p:presentation xmlns:p="http://schemas.openxmlformats.org/presentationml/2006/main">
   <p:sldMasterIdLst>
-    <p:sldMasterId xmlns:r="http://schemas.openxmlformats.org/officeDocument/2006/relationships" id="2147483648" r:id="R92ccbcae0ed1408e"/>
+    <p:sldMasterId xmlns:r="http://schemas.openxmlformats.org/officeDocument/2006/relationships" id="2147483648" r:id="R8a50b600345741c0"/>
   </p:sldMasterIdLst>
   <p:notesMasterIdLst>
-    <p:notesMasterId xmlns:r="http://schemas.openxmlformats.org/officeDocument/2006/relationships" r:id="Rddf2c521edd448af"/>
+    <p:notesMasterId xmlns:r="http://schemas.openxmlformats.org/officeDocument/2006/relationships" r:id="R99e4d98591e54190"/>
   </p:notesMasterIdLst>
   <p:sldIdLst>
-    <p:sldId xmlns:r="http://schemas.openxmlformats.org/officeDocument/2006/relationships" id="256" r:id="R4d61c8d1e3af49c9"/>
-    <p:sldId xmlns:r="http://schemas.openxmlformats.org/officeDocument/2006/relationships" id="257" r:id="Ref80c8dccab5402d"/>
-    <p:sldId xmlns:r="http://schemas.openxmlformats.org/officeDocument/2006/relationships" id="258" r:id="Rf1cb46d3d4ca4c0a"/>
-    <p:sldId xmlns:r="http://schemas.openxmlformats.org/officeDocument/2006/relationships" id="259" r:id="Rc641e8dbe2124420"/>
-    <p:sldId xmlns:r="http://schemas.openxmlformats.org/officeDocument/2006/relationships" id="260" r:id="R6974aa24acf643cc"/>
-    <p:sldId xmlns:r="http://schemas.openxmlformats.org/officeDocument/2006/relationships" id="261" r:id="Rc040778fb0d84379"/>
+    <p:sldId xmlns:r="http://schemas.openxmlformats.org/officeDocument/2006/relationships" id="256" r:id="Rc462db9edd404ff8"/>
+    <p:sldId xmlns:r="http://schemas.openxmlformats.org/officeDocument/2006/relationships" id="257" r:id="R12b1035d417e48e9"/>
+    <p:sldId xmlns:r="http://schemas.openxmlformats.org/officeDocument/2006/relationships" id="258" r:id="R534dec90622f4779"/>
+    <p:sldId xmlns:r="http://schemas.openxmlformats.org/officeDocument/2006/relationships" id="259" r:id="Rf837021939e14849"/>
+    <p:sldId xmlns:r="http://schemas.openxmlformats.org/officeDocument/2006/relationships" id="260" r:id="Rd0e22e0c9f59414d"/>
+    <p:sldId xmlns:r="http://schemas.openxmlformats.org/officeDocument/2006/relationships" id="261" r:id="R6c3140eb495447b0"/>
   </p:sldIdLst>
   <p:sldSz cx="12192000" cy="6858000"/>
   <p:notesSz cx="6858000" cy="9144000"/>
@@ -632,7 +632,7 @@
           <a:lstStyle xmlns:a="http://schemas.openxmlformats.org/drawingml/2006/main"/>
           <a:p xmlns:a="http://schemas.openxmlformats.org/drawingml/2006/main">
             <a:r>
-              <a:t>The public /evidence record is source-bound to overnight@246d81a. Registry 0xE1b75A905Cab4005623AA8912AF4a67b9c29b217 deployed on Monad Testnet chain 10143 at finalized block 52198045. Commitment 0x12f3…543f finalized before six offer-registration transactions. After Rain, attestation 0x9abe…9807e finalized at block 52198437, naming one registered offer and binding the digest of the exact three Rain settlement IDs. This proves POOL's operator-attested ordering, not custody, offchain seller visibility, independent verification of Rain, or real-money movement.</a:t>
+              <a:t>The public proof is source-bound to overnight@246d81a; the later product runtime is 8b1cee8. The release-provenance manifest makes that lineage explicit instead of implying the historical run came from the later runtime. Registry 0xE1b75A905Cab4005623AA8912AF4a67b9c29b217 deployed on Monad Testnet chain 10143 at finalized block 52198045. Commitment 0x12f3…543f finalized before six offer-registration transactions. After Rain, attestation 0x9abe…9807e finalized at block 52198437, naming one registered offer and binding the exact three-ID digest. GET /api/evidence/verify is a read-only current-chain check when available in the deployed runtime: it creates no financial authorization or external write and is not a fresh Rain execution or independent Rain oracle.</a:t>
             </a:r>
           </a:p>
           <a:p xmlns:a="http://schemas.openxmlformats.org/drawingml/2006/main">
@@ -658,6 +658,11 @@
           <a:p xmlns:a="http://schemas.openxmlformats.org/drawingml/2006/main">
             <a:r>
               <a:t>- /Applications/Personal App/Pool/public/evidence/rain-monad-testnet-2026-08-09.png</a:t>
+            </a:r>
+          </a:p>
+          <a:p xmlns:a="http://schemas.openxmlformats.org/drawingml/2006/main">
+            <a:r>
+              <a:t>- /Applications/Personal App/Pool/public/evidence/release-provenance-2026-08-09.json</a:t>
             </a:r>
           </a:p>
           <a:p xmlns:a="http://schemas.openxmlformats.org/drawingml/2006/main">
@@ -962,7 +967,7 @@
           <a:lstStyle xmlns:a="http://schemas.openxmlformats.org/drawingml/2006/main"/>
           <a:p xmlns:a="http://schemas.openxmlformats.org/drawingml/2006/main">
             <a:r>
-              <a:t>Close: the fixed fixture ledger reserves $5,748, the source-bound Rain sandbox record totals $4,668, and the fixture makes $1,080 available again—an 18.8% price improvement with zero human negotiation. The current record preserves the same three Rain IDs through same-day idempotent replay and finalized Monad Testnet ordering from commitment through six offer registrations to the post-Rain attestation. No real money moved. The consumer product market is still a modeled-quote rehearsal only: it creates no capture, order, payment, Rain mutation, or Monad mutation. The Seller Pilot is a zero-write Q&amp;A artifact, not traction.</a:t>
+              <a:t>Close on value and label the economics as a decision model, not observed revenue. The fixed fixture ledger reserves $5,748, the source-bound Rain sandbox record totals $4,668, and the fixture makes $1,080 available again—18.8% gross savings. If a future POOL charged 5%, 10%, or 15% of realized savings, this single fixture would imply $54, $108, or $162 of platform revenue before costs while buyers retain 17.8%, 16.9%, or 16.0% net savings versus MSRP. No fee is implemented or present in the fixed record; no merchant has validated this model; tax, shipping, payment, returns, fraud, support, and custody costs are excluded. No real money moved. The consumer product market remains modeled-quote rehearsal only.</a:t>
             </a:r>
           </a:p>
           <a:p xmlns:a="http://schemas.openxmlformats.org/drawingml/2006/main">
@@ -1070,7 +1075,7 @@
   </p:cSld>
   <p:clrMap bg1="lt1" tx1="dk1" bg2="lt2" tx2="dk2" accent1="accent1" accent2="accent2" accent3="accent3" accent4="accent4" accent5="accent5" accent6="accent6" hlink="hlink" folHlink="folHlink"/>
   <p:sldLayoutIdLst>
-    <p:sldLayoutId xmlns:r="http://schemas.openxmlformats.org/officeDocument/2006/relationships" id="2147483649" r:id="R17678ee8253e4769"/>
+    <p:sldLayoutId xmlns:r="http://schemas.openxmlformats.org/officeDocument/2006/relationships" id="2147483649" r:id="R353b0a5706e841d2"/>
   </p:sldLayoutIdLst>
   <p:txStyles>
     <p:titleStyle>
@@ -1621,7 +1626,7 @@
           <p:cNvPr id="56" name="grid-v-40">
             <a:extLst xmlns:a="http://schemas.openxmlformats.org/drawingml/2006/main">
               <a:ext uri="{FF2B5EF4-FFF2-40B4-BE49-F238E27FC236}">
-                <a16:creationId xmlns:a16="http://schemas.microsoft.com/office/drawing/2014/main" id="{B37176A5-12E5-41A9-ABDE-A8B79ED953B9}"/>
+                <a16:creationId xmlns:a16="http://schemas.microsoft.com/office/drawing/2014/main" id="{90C42DBD-A265-41EB-A9C0-35D9A08797B4}"/>
               </a:ext>
             </a:extLst>
           </p:cNvPr>
@@ -1652,7 +1657,7 @@
           <p:cNvPr id="2" name="grid-v-104">
             <a:extLst xmlns:a="http://schemas.openxmlformats.org/drawingml/2006/main">
               <a:ext uri="{FF2B5EF4-FFF2-40B4-BE49-F238E27FC236}">
-                <a16:creationId xmlns:a16="http://schemas.microsoft.com/office/drawing/2014/main" id="{F5A97FD0-1C20-42A5-A913-32A6B1725B7C}"/>
+                <a16:creationId xmlns:a16="http://schemas.microsoft.com/office/drawing/2014/main" id="{C2C053FB-A7D5-436F-9984-74D2303CDC34}"/>
               </a:ext>
             </a:extLst>
           </p:cNvPr>
@@ -1683,7 +1688,7 @@
           <p:cNvPr id="3" name="grid-v-168">
             <a:extLst xmlns:a="http://schemas.openxmlformats.org/drawingml/2006/main">
               <a:ext uri="{FF2B5EF4-FFF2-40B4-BE49-F238E27FC236}">
-                <a16:creationId xmlns:a16="http://schemas.microsoft.com/office/drawing/2014/main" id="{55CB818C-1C3F-4A15-9C9F-A1FD8EE66EDC}"/>
+                <a16:creationId xmlns:a16="http://schemas.microsoft.com/office/drawing/2014/main" id="{56E9B12F-865E-4FA1-87EC-9DA94390F785}"/>
               </a:ext>
             </a:extLst>
           </p:cNvPr>
@@ -1714,7 +1719,7 @@
           <p:cNvPr id="4" name="grid-v-232">
             <a:extLst xmlns:a="http://schemas.openxmlformats.org/drawingml/2006/main">
               <a:ext uri="{FF2B5EF4-FFF2-40B4-BE49-F238E27FC236}">
-                <a16:creationId xmlns:a16="http://schemas.microsoft.com/office/drawing/2014/main" id="{192209EC-493A-4AEF-95A6-B2AE5524BEEB}"/>
+                <a16:creationId xmlns:a16="http://schemas.microsoft.com/office/drawing/2014/main" id="{0DA70453-1DE7-44FA-B991-4B019A0DDFA3}"/>
               </a:ext>
             </a:extLst>
           </p:cNvPr>
@@ -1745,7 +1750,7 @@
           <p:cNvPr id="5" name="grid-v-296">
             <a:extLst xmlns:a="http://schemas.openxmlformats.org/drawingml/2006/main">
               <a:ext uri="{FF2B5EF4-FFF2-40B4-BE49-F238E27FC236}">
-                <a16:creationId xmlns:a16="http://schemas.microsoft.com/office/drawing/2014/main" id="{53067B5A-CD71-4498-B9A3-1969F71FCF79}"/>
+                <a16:creationId xmlns:a16="http://schemas.microsoft.com/office/drawing/2014/main" id="{E39A2A3D-54BD-41C8-824C-5EC694AF0551}"/>
               </a:ext>
             </a:extLst>
           </p:cNvPr>
@@ -1776,7 +1781,7 @@
           <p:cNvPr id="6" name="grid-v-360">
             <a:extLst xmlns:a="http://schemas.openxmlformats.org/drawingml/2006/main">
               <a:ext uri="{FF2B5EF4-FFF2-40B4-BE49-F238E27FC236}">
-                <a16:creationId xmlns:a16="http://schemas.microsoft.com/office/drawing/2014/main" id="{99BD57AC-334E-4323-A933-4FE544F31914}"/>
+                <a16:creationId xmlns:a16="http://schemas.microsoft.com/office/drawing/2014/main" id="{2528B0ED-23F8-4BBF-BE7C-E51C4348BB22}"/>
               </a:ext>
             </a:extLst>
           </p:cNvPr>
@@ -1807,7 +1812,7 @@
           <p:cNvPr id="7" name="grid-v-424">
             <a:extLst xmlns:a="http://schemas.openxmlformats.org/drawingml/2006/main">
               <a:ext uri="{FF2B5EF4-FFF2-40B4-BE49-F238E27FC236}">
-                <a16:creationId xmlns:a16="http://schemas.microsoft.com/office/drawing/2014/main" id="{8592C408-9CA8-49C1-AE2F-C2A21056F24D}"/>
+                <a16:creationId xmlns:a16="http://schemas.microsoft.com/office/drawing/2014/main" id="{E4B5491A-397A-4930-9EDC-EE4B1219296C}"/>
               </a:ext>
             </a:extLst>
           </p:cNvPr>
@@ -1838,7 +1843,7 @@
           <p:cNvPr id="8" name="grid-v-488">
             <a:extLst xmlns:a="http://schemas.openxmlformats.org/drawingml/2006/main">
               <a:ext uri="{FF2B5EF4-FFF2-40B4-BE49-F238E27FC236}">
-                <a16:creationId xmlns:a16="http://schemas.microsoft.com/office/drawing/2014/main" id="{7F2E8274-EBCA-4E2A-B9FA-2EEC97C3993E}"/>
+                <a16:creationId xmlns:a16="http://schemas.microsoft.com/office/drawing/2014/main" id="{0F961B90-1C07-4031-9A0D-D40208042284}"/>
               </a:ext>
             </a:extLst>
           </p:cNvPr>
@@ -1869,7 +1874,7 @@
           <p:cNvPr id="9" name="grid-v-552">
             <a:extLst xmlns:a="http://schemas.openxmlformats.org/drawingml/2006/main">
               <a:ext uri="{FF2B5EF4-FFF2-40B4-BE49-F238E27FC236}">
-                <a16:creationId xmlns:a16="http://schemas.microsoft.com/office/drawing/2014/main" id="{60268F24-C44C-49A5-A0A5-33B03AAE2BFC}"/>
+                <a16:creationId xmlns:a16="http://schemas.microsoft.com/office/drawing/2014/main" id="{8047F5C5-68C4-4A84-8AD9-7F7AC37C7B6F}"/>
               </a:ext>
             </a:extLst>
           </p:cNvPr>
@@ -1900,7 +1905,7 @@
           <p:cNvPr id="10" name="grid-v-616">
             <a:extLst xmlns:a="http://schemas.openxmlformats.org/drawingml/2006/main">
               <a:ext uri="{FF2B5EF4-FFF2-40B4-BE49-F238E27FC236}">
-                <a16:creationId xmlns:a16="http://schemas.microsoft.com/office/drawing/2014/main" id="{18498CF1-4A87-42D2-BA7B-9CD4EE398EAE}"/>
+                <a16:creationId xmlns:a16="http://schemas.microsoft.com/office/drawing/2014/main" id="{C1525BB2-9E59-490B-A80F-FE471A9F3F30}"/>
               </a:ext>
             </a:extLst>
           </p:cNvPr>
@@ -1931,7 +1936,7 @@
           <p:cNvPr id="11" name="grid-v-680">
             <a:extLst xmlns:a="http://schemas.openxmlformats.org/drawingml/2006/main">
               <a:ext uri="{FF2B5EF4-FFF2-40B4-BE49-F238E27FC236}">
-                <a16:creationId xmlns:a16="http://schemas.microsoft.com/office/drawing/2014/main" id="{BB4E3FAB-B842-4AB8-AACD-9373081D04E9}"/>
+                <a16:creationId xmlns:a16="http://schemas.microsoft.com/office/drawing/2014/main" id="{0EBF6DA7-DDF4-4148-92A2-051F57F45F18}"/>
               </a:ext>
             </a:extLst>
           </p:cNvPr>
@@ -1962,7 +1967,7 @@
           <p:cNvPr id="12" name="grid-v-744">
             <a:extLst xmlns:a="http://schemas.openxmlformats.org/drawingml/2006/main">
               <a:ext uri="{FF2B5EF4-FFF2-40B4-BE49-F238E27FC236}">
-                <a16:creationId xmlns:a16="http://schemas.microsoft.com/office/drawing/2014/main" id="{0396BFD1-D9F9-4ECA-858B-96BEE62A0AFC}"/>
+                <a16:creationId xmlns:a16="http://schemas.microsoft.com/office/drawing/2014/main" id="{A40F757B-DF87-4874-B3B8-2F9A718CEBA1}"/>
               </a:ext>
             </a:extLst>
           </p:cNvPr>
@@ -1993,7 +1998,7 @@
           <p:cNvPr id="13" name="grid-v-808">
             <a:extLst xmlns:a="http://schemas.openxmlformats.org/drawingml/2006/main">
               <a:ext uri="{FF2B5EF4-FFF2-40B4-BE49-F238E27FC236}">
-                <a16:creationId xmlns:a16="http://schemas.microsoft.com/office/drawing/2014/main" id="{EBC34038-FA41-476C-88D8-2680369A34D0}"/>
+                <a16:creationId xmlns:a16="http://schemas.microsoft.com/office/drawing/2014/main" id="{34F8DC01-28A6-4022-96C5-A23FDC784158}"/>
               </a:ext>
             </a:extLst>
           </p:cNvPr>
@@ -2024,7 +2029,7 @@
           <p:cNvPr id="14" name="grid-v-872">
             <a:extLst xmlns:a="http://schemas.openxmlformats.org/drawingml/2006/main">
               <a:ext uri="{FF2B5EF4-FFF2-40B4-BE49-F238E27FC236}">
-                <a16:creationId xmlns:a16="http://schemas.microsoft.com/office/drawing/2014/main" id="{DCBB655E-6562-4F81-9C40-67A669935CB9}"/>
+                <a16:creationId xmlns:a16="http://schemas.microsoft.com/office/drawing/2014/main" id="{0D891DD0-5C45-4DBC-A0BD-62873F9EBB2A}"/>
               </a:ext>
             </a:extLst>
           </p:cNvPr>
@@ -2055,7 +2060,7 @@
           <p:cNvPr id="15" name="grid-v-936">
             <a:extLst xmlns:a="http://schemas.openxmlformats.org/drawingml/2006/main">
               <a:ext uri="{FF2B5EF4-FFF2-40B4-BE49-F238E27FC236}">
-                <a16:creationId xmlns:a16="http://schemas.microsoft.com/office/drawing/2014/main" id="{E1A55F45-A9E5-4E9F-8EC8-C9485005170E}"/>
+                <a16:creationId xmlns:a16="http://schemas.microsoft.com/office/drawing/2014/main" id="{7DE37B6A-F9DF-4366-B84E-BA432B7B1B17}"/>
               </a:ext>
             </a:extLst>
           </p:cNvPr>
@@ -2086,7 +2091,7 @@
           <p:cNvPr id="16" name="grid-v-1000">
             <a:extLst xmlns:a="http://schemas.openxmlformats.org/drawingml/2006/main">
               <a:ext uri="{FF2B5EF4-FFF2-40B4-BE49-F238E27FC236}">
-                <a16:creationId xmlns:a16="http://schemas.microsoft.com/office/drawing/2014/main" id="{09DF4DB3-1C30-4357-8581-0A9FB3A12555}"/>
+                <a16:creationId xmlns:a16="http://schemas.microsoft.com/office/drawing/2014/main" id="{6D02FCE6-8577-4A4C-A277-14917695EC59}"/>
               </a:ext>
             </a:extLst>
           </p:cNvPr>
@@ -2117,7 +2122,7 @@
           <p:cNvPr id="17" name="grid-v-1064">
             <a:extLst xmlns:a="http://schemas.openxmlformats.org/drawingml/2006/main">
               <a:ext uri="{FF2B5EF4-FFF2-40B4-BE49-F238E27FC236}">
-                <a16:creationId xmlns:a16="http://schemas.microsoft.com/office/drawing/2014/main" id="{DE7D4A69-C0EF-4483-A2AD-929AAE481C16}"/>
+                <a16:creationId xmlns:a16="http://schemas.microsoft.com/office/drawing/2014/main" id="{EE585AB6-7373-4983-A00F-8E4D898612A1}"/>
               </a:ext>
             </a:extLst>
           </p:cNvPr>
@@ -2148,7 +2153,7 @@
           <p:cNvPr id="18" name="grid-v-1128">
             <a:extLst xmlns:a="http://schemas.openxmlformats.org/drawingml/2006/main">
               <a:ext uri="{FF2B5EF4-FFF2-40B4-BE49-F238E27FC236}">
-                <a16:creationId xmlns:a16="http://schemas.microsoft.com/office/drawing/2014/main" id="{EAC008B0-B3BC-45B4-856F-32E9AD2F02FC}"/>
+                <a16:creationId xmlns:a16="http://schemas.microsoft.com/office/drawing/2014/main" id="{293D93A7-993F-46AC-8B86-241C635CCA63}"/>
               </a:ext>
             </a:extLst>
           </p:cNvPr>
@@ -2179,7 +2184,7 @@
           <p:cNvPr id="19" name="grid-v-1192">
             <a:extLst xmlns:a="http://schemas.openxmlformats.org/drawingml/2006/main">
               <a:ext uri="{FF2B5EF4-FFF2-40B4-BE49-F238E27FC236}">
-                <a16:creationId xmlns:a16="http://schemas.microsoft.com/office/drawing/2014/main" id="{670ADAD5-5CDA-4421-9B9B-8138B0AB5AE3}"/>
+                <a16:creationId xmlns:a16="http://schemas.microsoft.com/office/drawing/2014/main" id="{932EC2AC-612B-4862-A567-15E5E8F22EFC}"/>
               </a:ext>
             </a:extLst>
           </p:cNvPr>
@@ -2210,7 +2215,7 @@
           <p:cNvPr id="20" name="grid-h-112">
             <a:extLst xmlns:a="http://schemas.openxmlformats.org/drawingml/2006/main">
               <a:ext uri="{FF2B5EF4-FFF2-40B4-BE49-F238E27FC236}">
-                <a16:creationId xmlns:a16="http://schemas.microsoft.com/office/drawing/2014/main" id="{A7EC567C-6906-4586-B972-7915F0DD789D}"/>
+                <a16:creationId xmlns:a16="http://schemas.microsoft.com/office/drawing/2014/main" id="{58548BB5-0EEB-4B28-B039-38D4007B49E8}"/>
               </a:ext>
             </a:extLst>
           </p:cNvPr>
@@ -2241,7 +2246,7 @@
           <p:cNvPr id="21" name="grid-h-176">
             <a:extLst xmlns:a="http://schemas.openxmlformats.org/drawingml/2006/main">
               <a:ext uri="{FF2B5EF4-FFF2-40B4-BE49-F238E27FC236}">
-                <a16:creationId xmlns:a16="http://schemas.microsoft.com/office/drawing/2014/main" id="{249D2C6C-DCAE-44BE-98BC-A5B20B1A16E1}"/>
+                <a16:creationId xmlns:a16="http://schemas.microsoft.com/office/drawing/2014/main" id="{DC8B985C-DBF5-4DDA-BFE7-6808BF3F10BE}"/>
               </a:ext>
             </a:extLst>
           </p:cNvPr>
@@ -2272,7 +2277,7 @@
           <p:cNvPr id="22" name="grid-h-240">
             <a:extLst xmlns:a="http://schemas.openxmlformats.org/drawingml/2006/main">
               <a:ext uri="{FF2B5EF4-FFF2-40B4-BE49-F238E27FC236}">
-                <a16:creationId xmlns:a16="http://schemas.microsoft.com/office/drawing/2014/main" id="{FAA657E2-BE16-4664-8D74-3728C1F04140}"/>
+                <a16:creationId xmlns:a16="http://schemas.microsoft.com/office/drawing/2014/main" id="{8B15EDEE-4627-4C64-B655-B13920DA55CA}"/>
               </a:ext>
             </a:extLst>
           </p:cNvPr>
@@ -2303,7 +2308,7 @@
           <p:cNvPr id="23" name="grid-h-304">
             <a:extLst xmlns:a="http://schemas.openxmlformats.org/drawingml/2006/main">
               <a:ext uri="{FF2B5EF4-FFF2-40B4-BE49-F238E27FC236}">
-                <a16:creationId xmlns:a16="http://schemas.microsoft.com/office/drawing/2014/main" id="{44A8F6AD-1DC7-4321-9875-62D21C0A10D2}"/>
+                <a16:creationId xmlns:a16="http://schemas.microsoft.com/office/drawing/2014/main" id="{8A04CF69-7E42-42BF-8AFA-3562DC02DFA8}"/>
               </a:ext>
             </a:extLst>
           </p:cNvPr>
@@ -2334,7 +2339,7 @@
           <p:cNvPr id="24" name="grid-h-368">
             <a:extLst xmlns:a="http://schemas.openxmlformats.org/drawingml/2006/main">
               <a:ext uri="{FF2B5EF4-FFF2-40B4-BE49-F238E27FC236}">
-                <a16:creationId xmlns:a16="http://schemas.microsoft.com/office/drawing/2014/main" id="{DB69C701-1A44-4ECB-AE33-085386815E97}"/>
+                <a16:creationId xmlns:a16="http://schemas.microsoft.com/office/drawing/2014/main" id="{5443D425-4BAE-4BB4-900B-DE86F650C6A7}"/>
               </a:ext>
             </a:extLst>
           </p:cNvPr>
@@ -2365,7 +2370,7 @@
           <p:cNvPr id="25" name="grid-h-432">
             <a:extLst xmlns:a="http://schemas.openxmlformats.org/drawingml/2006/main">
               <a:ext uri="{FF2B5EF4-FFF2-40B4-BE49-F238E27FC236}">
-                <a16:creationId xmlns:a16="http://schemas.microsoft.com/office/drawing/2014/main" id="{88A8D569-1B72-43EC-BB2D-78AE6685A415}"/>
+                <a16:creationId xmlns:a16="http://schemas.microsoft.com/office/drawing/2014/main" id="{E20BC475-9827-4D46-9382-3EE24E215D29}"/>
               </a:ext>
             </a:extLst>
           </p:cNvPr>
@@ -2396,7 +2401,7 @@
           <p:cNvPr id="26" name="grid-h-496">
             <a:extLst xmlns:a="http://schemas.openxmlformats.org/drawingml/2006/main">
               <a:ext uri="{FF2B5EF4-FFF2-40B4-BE49-F238E27FC236}">
-                <a16:creationId xmlns:a16="http://schemas.microsoft.com/office/drawing/2014/main" id="{8B5FC4C9-E4F1-4094-9788-16874B51743E}"/>
+                <a16:creationId xmlns:a16="http://schemas.microsoft.com/office/drawing/2014/main" id="{8D73A421-5BA5-47A4-B9E7-B6C9B8855199}"/>
               </a:ext>
             </a:extLst>
           </p:cNvPr>
@@ -2427,7 +2432,7 @@
           <p:cNvPr id="27" name="grid-h-560">
             <a:extLst xmlns:a="http://schemas.openxmlformats.org/drawingml/2006/main">
               <a:ext uri="{FF2B5EF4-FFF2-40B4-BE49-F238E27FC236}">
-                <a16:creationId xmlns:a16="http://schemas.microsoft.com/office/drawing/2014/main" id="{A6D9CB3F-15DE-45E1-A900-C853C42E0001}"/>
+                <a16:creationId xmlns:a16="http://schemas.microsoft.com/office/drawing/2014/main" id="{F2A72AFE-6228-4ED3-A88D-610213FFA4DC}"/>
               </a:ext>
             </a:extLst>
           </p:cNvPr>
@@ -2458,7 +2463,7 @@
           <p:cNvPr id="28" name="grid-h-624">
             <a:extLst xmlns:a="http://schemas.openxmlformats.org/drawingml/2006/main">
               <a:ext uri="{FF2B5EF4-FFF2-40B4-BE49-F238E27FC236}">
-                <a16:creationId xmlns:a16="http://schemas.microsoft.com/office/drawing/2014/main" id="{7BAD83B8-7CD9-4D70-97DC-2947FF9983D9}"/>
+                <a16:creationId xmlns:a16="http://schemas.microsoft.com/office/drawing/2014/main" id="{3A3ED015-C22E-4566-8DF5-210BCCBF8C19}"/>
               </a:ext>
             </a:extLst>
           </p:cNvPr>
@@ -2489,7 +2494,7 @@
           <p:cNvPr id="29" name="top-rule">
             <a:extLst xmlns:a="http://schemas.openxmlformats.org/drawingml/2006/main">
               <a:ext uri="{FF2B5EF4-FFF2-40B4-BE49-F238E27FC236}">
-                <a16:creationId xmlns:a16="http://schemas.microsoft.com/office/drawing/2014/main" id="{EBCB6D6F-B677-452F-B097-C19C850FAD59}"/>
+                <a16:creationId xmlns:a16="http://schemas.microsoft.com/office/drawing/2014/main" id="{342599D7-1EAC-4522-9FFB-4B2AAAD9B824}"/>
               </a:ext>
             </a:extLst>
           </p:cNvPr>
@@ -2520,7 +2525,7 @@
           <p:cNvPr id="30" name="wordmark">
             <a:extLst xmlns:a="http://schemas.openxmlformats.org/drawingml/2006/main">
               <a:ext uri="{FF2B5EF4-FFF2-40B4-BE49-F238E27FC236}">
-                <a16:creationId xmlns:a16="http://schemas.microsoft.com/office/drawing/2014/main" id="{6AF66360-571F-4661-B0BF-652A99D3D7C5}"/>
+                <a16:creationId xmlns:a16="http://schemas.microsoft.com/office/drawing/2014/main" id="{6D322745-9E01-4779-A98D-CA3A464C9957}"/>
               </a:ext>
             </a:extLst>
           </p:cNvPr>
@@ -2582,7 +2587,7 @@
           <p:cNvPr id="31" name="environment-label">
             <a:extLst xmlns:a="http://schemas.openxmlformats.org/drawingml/2006/main">
               <a:ext uri="{FF2B5EF4-FFF2-40B4-BE49-F238E27FC236}">
-                <a16:creationId xmlns:a16="http://schemas.microsoft.com/office/drawing/2014/main" id="{1442EB29-D5F7-45E2-B7F2-74409D372888}"/>
+                <a16:creationId xmlns:a16="http://schemas.microsoft.com/office/drawing/2014/main" id="{76434612-4041-4EB4-B846-06F9B207A5D1}"/>
               </a:ext>
             </a:extLst>
           </p:cNvPr>
@@ -2644,7 +2649,7 @@
           <p:cNvPr id="32" name="slide-index">
             <a:extLst xmlns:a="http://schemas.openxmlformats.org/drawingml/2006/main">
               <a:ext uri="{FF2B5EF4-FFF2-40B4-BE49-F238E27FC236}">
-                <a16:creationId xmlns:a16="http://schemas.microsoft.com/office/drawing/2014/main" id="{B51294CC-EA61-450D-93E1-0BF1C98FF37D}"/>
+                <a16:creationId xmlns:a16="http://schemas.microsoft.com/office/drawing/2014/main" id="{04A19817-F817-4FAA-9D70-7A6F665250F8}"/>
               </a:ext>
             </a:extLst>
           </p:cNvPr>
@@ -2706,7 +2711,7 @@
           <p:cNvPr id="33" name="event-footer">
             <a:extLst xmlns:a="http://schemas.openxmlformats.org/drawingml/2006/main">
               <a:ext uri="{FF2B5EF4-FFF2-40B4-BE49-F238E27FC236}">
-                <a16:creationId xmlns:a16="http://schemas.microsoft.com/office/drawing/2014/main" id="{7681396D-276C-43B0-93CE-92561CF14F10}"/>
+                <a16:creationId xmlns:a16="http://schemas.microsoft.com/office/drawing/2014/main" id="{BFE74D05-E49F-40BA-8FB2-6FFDCDFC9D2C}"/>
               </a:ext>
             </a:extLst>
           </p:cNvPr>
@@ -2768,7 +2773,7 @@
           <p:cNvPr id="34" name="honesty-footer">
             <a:extLst xmlns:a="http://schemas.openxmlformats.org/drawingml/2006/main">
               <a:ext uri="{FF2B5EF4-FFF2-40B4-BE49-F238E27FC236}">
-                <a16:creationId xmlns:a16="http://schemas.microsoft.com/office/drawing/2014/main" id="{20E7E667-8751-41A8-A1A2-057C1F9D937D}"/>
+                <a16:creationId xmlns:a16="http://schemas.microsoft.com/office/drawing/2014/main" id="{477D8DB7-8C35-42A4-BA57-68CDBF73C444}"/>
               </a:ext>
             </a:extLst>
           </p:cNvPr>
@@ -2830,7 +2835,7 @@
           <p:cNvPr id="35" name="hero-headline">
             <a:extLst xmlns:a="http://schemas.openxmlformats.org/drawingml/2006/main">
               <a:ext uri="{FF2B5EF4-FFF2-40B4-BE49-F238E27FC236}">
-                <a16:creationId xmlns:a16="http://schemas.microsoft.com/office/drawing/2014/main" id="{D7EDAD4B-4FBF-4470-AB9D-E1DD2A7D34E5}"/>
+                <a16:creationId xmlns:a16="http://schemas.microsoft.com/office/drawing/2014/main" id="{E4BD3183-84FE-41D7-AB01-3AE43D24F8BF}"/>
               </a:ext>
             </a:extLst>
           </p:cNvPr>
@@ -2919,7 +2924,7 @@
           <p:cNvPr id="36" name="hero-subhead">
             <a:extLst xmlns:a="http://schemas.openxmlformats.org/drawingml/2006/main">
               <a:ext uri="{FF2B5EF4-FFF2-40B4-BE49-F238E27FC236}">
-                <a16:creationId xmlns:a16="http://schemas.microsoft.com/office/drawing/2014/main" id="{AE10BF18-16AB-4D44-B2C8-A25E71EA0F07}"/>
+                <a16:creationId xmlns:a16="http://schemas.microsoft.com/office/drawing/2014/main" id="{345B69FC-F095-4A9C-8A61-EFC7EE974E63}"/>
               </a:ext>
             </a:extLst>
           </p:cNvPr>
@@ -2981,7 +2986,7 @@
           <p:cNvPr id="37" name="hero-flow-1-shaft">
             <a:extLst xmlns:a="http://schemas.openxmlformats.org/drawingml/2006/main">
               <a:ext uri="{FF2B5EF4-FFF2-40B4-BE49-F238E27FC236}">
-                <a16:creationId xmlns:a16="http://schemas.microsoft.com/office/drawing/2014/main" id="{F24E6046-5EA0-4795-8A90-CCA949BF4A7C}"/>
+                <a16:creationId xmlns:a16="http://schemas.microsoft.com/office/drawing/2014/main" id="{BA0FFA96-57CC-4D07-BE28-17679A89D6CE}"/>
               </a:ext>
             </a:extLst>
           </p:cNvPr>
@@ -3012,7 +3017,7 @@
           <p:cNvPr id="38" name="hero-flow-1-head">
             <a:extLst xmlns:a="http://schemas.openxmlformats.org/drawingml/2006/main">
               <a:ext uri="{FF2B5EF4-FFF2-40B4-BE49-F238E27FC236}">
-                <a16:creationId xmlns:a16="http://schemas.microsoft.com/office/drawing/2014/main" id="{353C85CF-A66A-4882-B62F-D1B0A1AB7E27}"/>
+                <a16:creationId xmlns:a16="http://schemas.microsoft.com/office/drawing/2014/main" id="{313979DE-93EE-440B-8556-5990CEA63F49}"/>
               </a:ext>
             </a:extLst>
           </p:cNvPr>
@@ -3043,7 +3048,7 @@
           <p:cNvPr id="39" name="hero-flow-2-shaft">
             <a:extLst xmlns:a="http://schemas.openxmlformats.org/drawingml/2006/main">
               <a:ext uri="{FF2B5EF4-FFF2-40B4-BE49-F238E27FC236}">
-                <a16:creationId xmlns:a16="http://schemas.microsoft.com/office/drawing/2014/main" id="{B1C45571-88B6-40A9-9207-BF1A27A8AC8B}"/>
+                <a16:creationId xmlns:a16="http://schemas.microsoft.com/office/drawing/2014/main" id="{A4B71536-E5B4-459B-890C-6535F4EFB867}"/>
               </a:ext>
             </a:extLst>
           </p:cNvPr>
@@ -3074,7 +3079,7 @@
           <p:cNvPr id="40" name="hero-flow-2-head">
             <a:extLst xmlns:a="http://schemas.openxmlformats.org/drawingml/2006/main">
               <a:ext uri="{FF2B5EF4-FFF2-40B4-BE49-F238E27FC236}">
-                <a16:creationId xmlns:a16="http://schemas.microsoft.com/office/drawing/2014/main" id="{2281E92B-B13B-4F0D-8A49-83D456CCACF7}"/>
+                <a16:creationId xmlns:a16="http://schemas.microsoft.com/office/drawing/2014/main" id="{25F2B5F1-C8C1-476A-B36E-973B80A2ECB7}"/>
               </a:ext>
             </a:extLst>
           </p:cNvPr>
@@ -3105,7 +3110,7 @@
           <p:cNvPr id="41" name="hero-units">
             <a:extLst xmlns:a="http://schemas.openxmlformats.org/drawingml/2006/main">
               <a:ext uri="{FF2B5EF4-FFF2-40B4-BE49-F238E27FC236}">
-                <a16:creationId xmlns:a16="http://schemas.microsoft.com/office/drawing/2014/main" id="{A24457E1-86CF-49B7-B422-503249CE6762}"/>
+                <a16:creationId xmlns:a16="http://schemas.microsoft.com/office/drawing/2014/main" id="{8CE4C9D0-93A8-4485-B51C-98EB7A385B64}"/>
               </a:ext>
             </a:extLst>
           </p:cNvPr>
@@ -3167,7 +3172,7 @@
           <p:cNvPr id="42" name="hero-units-label">
             <a:extLst xmlns:a="http://schemas.openxmlformats.org/drawingml/2006/main">
               <a:ext uri="{FF2B5EF4-FFF2-40B4-BE49-F238E27FC236}">
-                <a16:creationId xmlns:a16="http://schemas.microsoft.com/office/drawing/2014/main" id="{8BC9C9DD-5B28-4019-8A81-D856AA425D36}"/>
+                <a16:creationId xmlns:a16="http://schemas.microsoft.com/office/drawing/2014/main" id="{F721BFEE-8EBC-4A7F-A0B0-DAFAB301718E}"/>
               </a:ext>
             </a:extLst>
           </p:cNvPr>
@@ -3256,7 +3261,7 @@
           <p:cNvPr id="43" name="hero-price">
             <a:extLst xmlns:a="http://schemas.openxmlformats.org/drawingml/2006/main">
               <a:ext uri="{FF2B5EF4-FFF2-40B4-BE49-F238E27FC236}">
-                <a16:creationId xmlns:a16="http://schemas.microsoft.com/office/drawing/2014/main" id="{E89400FD-FF06-4483-9BC7-3C03EAB42598}"/>
+                <a16:creationId xmlns:a16="http://schemas.microsoft.com/office/drawing/2014/main" id="{993E1339-B416-41C4-BAAA-CB7B06BD6BDA}"/>
               </a:ext>
             </a:extLst>
           </p:cNvPr>
@@ -3318,7 +3323,7 @@
           <p:cNvPr id="44" name="hero-price-label">
             <a:extLst xmlns:a="http://schemas.openxmlformats.org/drawingml/2006/main">
               <a:ext uri="{FF2B5EF4-FFF2-40B4-BE49-F238E27FC236}">
-                <a16:creationId xmlns:a16="http://schemas.microsoft.com/office/drawing/2014/main" id="{1204C43E-5CC7-4CB0-BE95-8D1D947AF299}"/>
+                <a16:creationId xmlns:a16="http://schemas.microsoft.com/office/drawing/2014/main" id="{8A2DF7BF-AC81-4B86-81B0-2043464AC994}"/>
               </a:ext>
             </a:extLst>
           </p:cNvPr>
@@ -3380,7 +3385,7 @@
           <p:cNvPr id="45" name="hero-savings">
             <a:extLst xmlns:a="http://schemas.openxmlformats.org/drawingml/2006/main">
               <a:ext uri="{FF2B5EF4-FFF2-40B4-BE49-F238E27FC236}">
-                <a16:creationId xmlns:a16="http://schemas.microsoft.com/office/drawing/2014/main" id="{DC8C006C-AEAC-411C-842C-F9A089C130F1}"/>
+                <a16:creationId xmlns:a16="http://schemas.microsoft.com/office/drawing/2014/main" id="{19DD5E07-12B6-43A7-8A6F-9E26AC5BE45D}"/>
               </a:ext>
             </a:extLst>
           </p:cNvPr>
@@ -3442,7 +3447,7 @@
           <p:cNvPr id="46" name="hero-savings-label">
             <a:extLst xmlns:a="http://schemas.openxmlformats.org/drawingml/2006/main">
               <a:ext uri="{FF2B5EF4-FFF2-40B4-BE49-F238E27FC236}">
-                <a16:creationId xmlns:a16="http://schemas.microsoft.com/office/drawing/2014/main" id="{CA7AEC89-409B-463F-A8C1-4AAC4C4BC70C}"/>
+                <a16:creationId xmlns:a16="http://schemas.microsoft.com/office/drawing/2014/main" id="{3FB180A9-C0D9-405B-BB66-CA4F98788DE4}"/>
               </a:ext>
             </a:extLst>
           </p:cNvPr>
@@ -3504,7 +3509,7 @@
           <p:cNvPr id="47" name="hero-proof-bracket-tl-h">
             <a:extLst xmlns:a="http://schemas.openxmlformats.org/drawingml/2006/main">
               <a:ext uri="{FF2B5EF4-FFF2-40B4-BE49-F238E27FC236}">
-                <a16:creationId xmlns:a16="http://schemas.microsoft.com/office/drawing/2014/main" id="{2895AD29-1909-46D1-8320-B06250B6BFA1}"/>
+                <a16:creationId xmlns:a16="http://schemas.microsoft.com/office/drawing/2014/main" id="{1FA64CD1-18BE-4357-81B7-4F70C66C821A}"/>
               </a:ext>
             </a:extLst>
           </p:cNvPr>
@@ -3535,7 +3540,7 @@
           <p:cNvPr id="48" name="hero-proof-bracket-tl-v">
             <a:extLst xmlns:a="http://schemas.openxmlformats.org/drawingml/2006/main">
               <a:ext uri="{FF2B5EF4-FFF2-40B4-BE49-F238E27FC236}">
-                <a16:creationId xmlns:a16="http://schemas.microsoft.com/office/drawing/2014/main" id="{247D9B27-F31B-4267-B611-D19EADA58817}"/>
+                <a16:creationId xmlns:a16="http://schemas.microsoft.com/office/drawing/2014/main" id="{65CAB213-E5C8-4EB2-BBC3-E327FBC7DF13}"/>
               </a:ext>
             </a:extLst>
           </p:cNvPr>
@@ -3566,7 +3571,7 @@
           <p:cNvPr id="49" name="hero-proof-bracket-tr-h">
             <a:extLst xmlns:a="http://schemas.openxmlformats.org/drawingml/2006/main">
               <a:ext uri="{FF2B5EF4-FFF2-40B4-BE49-F238E27FC236}">
-                <a16:creationId xmlns:a16="http://schemas.microsoft.com/office/drawing/2014/main" id="{35BB5324-9307-4EC5-8848-464884318EFC}"/>
+                <a16:creationId xmlns:a16="http://schemas.microsoft.com/office/drawing/2014/main" id="{A21FA00B-D977-4AAC-8637-32FB59DB0574}"/>
               </a:ext>
             </a:extLst>
           </p:cNvPr>
@@ -3597,7 +3602,7 @@
           <p:cNvPr id="50" name="hero-proof-bracket-tr-v">
             <a:extLst xmlns:a="http://schemas.openxmlformats.org/drawingml/2006/main">
               <a:ext uri="{FF2B5EF4-FFF2-40B4-BE49-F238E27FC236}">
-                <a16:creationId xmlns:a16="http://schemas.microsoft.com/office/drawing/2014/main" id="{25DC1A70-F532-468A-89D9-79A785D0D888}"/>
+                <a16:creationId xmlns:a16="http://schemas.microsoft.com/office/drawing/2014/main" id="{498B7ECC-E5AD-4977-B475-D9CE7C14918E}"/>
               </a:ext>
             </a:extLst>
           </p:cNvPr>
@@ -3628,7 +3633,7 @@
           <p:cNvPr id="51" name="hero-proof-bracket-bl-h">
             <a:extLst xmlns:a="http://schemas.openxmlformats.org/drawingml/2006/main">
               <a:ext uri="{FF2B5EF4-FFF2-40B4-BE49-F238E27FC236}">
-                <a16:creationId xmlns:a16="http://schemas.microsoft.com/office/drawing/2014/main" id="{D78F40DE-F793-4597-8563-C17B91E6DB7E}"/>
+                <a16:creationId xmlns:a16="http://schemas.microsoft.com/office/drawing/2014/main" id="{0666FFE5-134D-4DF8-83F8-AE49B02C305D}"/>
               </a:ext>
             </a:extLst>
           </p:cNvPr>
@@ -3659,7 +3664,7 @@
           <p:cNvPr id="52" name="hero-proof-bracket-bl-v">
             <a:extLst xmlns:a="http://schemas.openxmlformats.org/drawingml/2006/main">
               <a:ext uri="{FF2B5EF4-FFF2-40B4-BE49-F238E27FC236}">
-                <a16:creationId xmlns:a16="http://schemas.microsoft.com/office/drawing/2014/main" id="{A93B24F0-7C71-4329-B659-1E871CCDB355}"/>
+                <a16:creationId xmlns:a16="http://schemas.microsoft.com/office/drawing/2014/main" id="{DE23E582-1264-4846-AD04-870D6FD4E846}"/>
               </a:ext>
             </a:extLst>
           </p:cNvPr>
@@ -3690,7 +3695,7 @@
           <p:cNvPr id="53" name="hero-proof-bracket-br-h">
             <a:extLst xmlns:a="http://schemas.openxmlformats.org/drawingml/2006/main">
               <a:ext uri="{FF2B5EF4-FFF2-40B4-BE49-F238E27FC236}">
-                <a16:creationId xmlns:a16="http://schemas.microsoft.com/office/drawing/2014/main" id="{2C552CEC-1C0D-4BFA-8EA6-24D1C014B303}"/>
+                <a16:creationId xmlns:a16="http://schemas.microsoft.com/office/drawing/2014/main" id="{01A02554-C423-4D70-BA40-A3A311E8FDC1}"/>
               </a:ext>
             </a:extLst>
           </p:cNvPr>
@@ -3721,7 +3726,7 @@
           <p:cNvPr id="54" name="hero-proof-bracket-br-v">
             <a:extLst xmlns:a="http://schemas.openxmlformats.org/drawingml/2006/main">
               <a:ext uri="{FF2B5EF4-FFF2-40B4-BE49-F238E27FC236}">
-                <a16:creationId xmlns:a16="http://schemas.microsoft.com/office/drawing/2014/main" id="{E08B4CD9-9499-43F3-9782-2F0F7961E6FF}"/>
+                <a16:creationId xmlns:a16="http://schemas.microsoft.com/office/drawing/2014/main" id="{8E25C3D1-8310-4EDC-B753-B341C87490A6}"/>
               </a:ext>
             </a:extLst>
           </p:cNvPr>
@@ -3752,7 +3757,7 @@
           <p:cNvPr id="55" name="hero-thesis">
             <a:extLst xmlns:a="http://schemas.openxmlformats.org/drawingml/2006/main">
               <a:ext uri="{FF2B5EF4-FFF2-40B4-BE49-F238E27FC236}">
-                <a16:creationId xmlns:a16="http://schemas.microsoft.com/office/drawing/2014/main" id="{86E1506D-417D-4A74-8265-EA06E3808A86}"/>
+                <a16:creationId xmlns:a16="http://schemas.microsoft.com/office/drawing/2014/main" id="{06EF12E4-CF7A-4750-8E7A-746A8ED15A24}"/>
               </a:ext>
             </a:extLst>
           </p:cNvPr>
@@ -3812,7 +3817,7 @@
     </p:spTree>
     <p:extLst>
       <p:ext uri="{BB962C8B-B14F-4D97-AF65-F5344CB8AC3E}">
-        <p14:creationId xmlns:p14="http://schemas.microsoft.com/office/powerpoint/2010/main" val="941715720"/>
+        <p14:creationId xmlns:p14="http://schemas.microsoft.com/office/powerpoint/2010/main" val="876092255"/>
       </p:ext>
     </p:extLst>
   </p:cSld>
@@ -3843,7 +3848,7 @@
           <p:cNvPr id="75" name="grid-v-40">
             <a:extLst xmlns:a="http://schemas.openxmlformats.org/drawingml/2006/main">
               <a:ext uri="{FF2B5EF4-FFF2-40B4-BE49-F238E27FC236}">
-                <a16:creationId xmlns:a16="http://schemas.microsoft.com/office/drawing/2014/main" id="{97272970-7543-4F7B-A407-886AFF3ACB77}"/>
+                <a16:creationId xmlns:a16="http://schemas.microsoft.com/office/drawing/2014/main" id="{0A26F23A-5FF5-4728-8E59-CDC5E3BA74B5}"/>
               </a:ext>
             </a:extLst>
           </p:cNvPr>
@@ -3874,7 +3879,7 @@
           <p:cNvPr id="2" name="grid-v-104">
             <a:extLst xmlns:a="http://schemas.openxmlformats.org/drawingml/2006/main">
               <a:ext uri="{FF2B5EF4-FFF2-40B4-BE49-F238E27FC236}">
-                <a16:creationId xmlns:a16="http://schemas.microsoft.com/office/drawing/2014/main" id="{23BFA757-5EE6-4B0F-A66F-F9A1A48ECD2A}"/>
+                <a16:creationId xmlns:a16="http://schemas.microsoft.com/office/drawing/2014/main" id="{3F7B5601-9E48-44A6-80A2-7F64B8434128}"/>
               </a:ext>
             </a:extLst>
           </p:cNvPr>
@@ -3905,7 +3910,7 @@
           <p:cNvPr id="3" name="grid-v-168">
             <a:extLst xmlns:a="http://schemas.openxmlformats.org/drawingml/2006/main">
               <a:ext uri="{FF2B5EF4-FFF2-40B4-BE49-F238E27FC236}">
-                <a16:creationId xmlns:a16="http://schemas.microsoft.com/office/drawing/2014/main" id="{B75BA833-E066-4098-92F5-6C2615CC7B99}"/>
+                <a16:creationId xmlns:a16="http://schemas.microsoft.com/office/drawing/2014/main" id="{05539111-6E15-4902-A6E7-37B10D46D423}"/>
               </a:ext>
             </a:extLst>
           </p:cNvPr>
@@ -3936,7 +3941,7 @@
           <p:cNvPr id="4" name="grid-v-232">
             <a:extLst xmlns:a="http://schemas.openxmlformats.org/drawingml/2006/main">
               <a:ext uri="{FF2B5EF4-FFF2-40B4-BE49-F238E27FC236}">
-                <a16:creationId xmlns:a16="http://schemas.microsoft.com/office/drawing/2014/main" id="{6B6AA561-DB7C-4E6B-A5A8-EB63386C06EB}"/>
+                <a16:creationId xmlns:a16="http://schemas.microsoft.com/office/drawing/2014/main" id="{4E4BCC13-FF97-453D-BADB-27AD4B8ACC1E}"/>
               </a:ext>
             </a:extLst>
           </p:cNvPr>
@@ -3967,7 +3972,7 @@
           <p:cNvPr id="5" name="grid-v-296">
             <a:extLst xmlns:a="http://schemas.openxmlformats.org/drawingml/2006/main">
               <a:ext uri="{FF2B5EF4-FFF2-40B4-BE49-F238E27FC236}">
-                <a16:creationId xmlns:a16="http://schemas.microsoft.com/office/drawing/2014/main" id="{A5E0B1A3-6834-4F4D-A78E-1E6F4B15463A}"/>
+                <a16:creationId xmlns:a16="http://schemas.microsoft.com/office/drawing/2014/main" id="{F8C9D237-464E-448E-8103-391BCDD46A76}"/>
               </a:ext>
             </a:extLst>
           </p:cNvPr>
@@ -3998,7 +4003,7 @@
           <p:cNvPr id="6" name="grid-v-360">
             <a:extLst xmlns:a="http://schemas.openxmlformats.org/drawingml/2006/main">
               <a:ext uri="{FF2B5EF4-FFF2-40B4-BE49-F238E27FC236}">
-                <a16:creationId xmlns:a16="http://schemas.microsoft.com/office/drawing/2014/main" id="{17F06FDA-4657-464F-99CC-000F4719C1FE}"/>
+                <a16:creationId xmlns:a16="http://schemas.microsoft.com/office/drawing/2014/main" id="{E74BC4D6-4A33-4C87-8433-C66022287D3C}"/>
               </a:ext>
             </a:extLst>
           </p:cNvPr>
@@ -4029,7 +4034,7 @@
           <p:cNvPr id="7" name="grid-v-424">
             <a:extLst xmlns:a="http://schemas.openxmlformats.org/drawingml/2006/main">
               <a:ext uri="{FF2B5EF4-FFF2-40B4-BE49-F238E27FC236}">
-                <a16:creationId xmlns:a16="http://schemas.microsoft.com/office/drawing/2014/main" id="{C8AF3088-E63A-479E-AD6C-8B6B02092C09}"/>
+                <a16:creationId xmlns:a16="http://schemas.microsoft.com/office/drawing/2014/main" id="{56D4F3A6-B7FF-4EAB-A011-ADA9DB018C09}"/>
               </a:ext>
             </a:extLst>
           </p:cNvPr>
@@ -4060,7 +4065,7 @@
           <p:cNvPr id="8" name="grid-v-488">
             <a:extLst xmlns:a="http://schemas.openxmlformats.org/drawingml/2006/main">
               <a:ext uri="{FF2B5EF4-FFF2-40B4-BE49-F238E27FC236}">
-                <a16:creationId xmlns:a16="http://schemas.microsoft.com/office/drawing/2014/main" id="{DC54824D-C867-4675-9824-18D9623DF576}"/>
+                <a16:creationId xmlns:a16="http://schemas.microsoft.com/office/drawing/2014/main" id="{36EEE5D1-35FB-4EB8-B940-36B544315690}"/>
               </a:ext>
             </a:extLst>
           </p:cNvPr>
@@ -4091,7 +4096,7 @@
           <p:cNvPr id="9" name="grid-v-552">
             <a:extLst xmlns:a="http://schemas.openxmlformats.org/drawingml/2006/main">
               <a:ext uri="{FF2B5EF4-FFF2-40B4-BE49-F238E27FC236}">
-                <a16:creationId xmlns:a16="http://schemas.microsoft.com/office/drawing/2014/main" id="{67E0944E-2F49-45F0-BC7B-B42EC571FCB7}"/>
+                <a16:creationId xmlns:a16="http://schemas.microsoft.com/office/drawing/2014/main" id="{3CA7DF45-3418-4715-A0E0-2F8196730B19}"/>
               </a:ext>
             </a:extLst>
           </p:cNvPr>
@@ -4122,7 +4127,7 @@
           <p:cNvPr id="10" name="grid-v-616">
             <a:extLst xmlns:a="http://schemas.openxmlformats.org/drawingml/2006/main">
               <a:ext uri="{FF2B5EF4-FFF2-40B4-BE49-F238E27FC236}">
-                <a16:creationId xmlns:a16="http://schemas.microsoft.com/office/drawing/2014/main" id="{2235693C-A6FA-46D5-B374-B4BBDD096F74}"/>
+                <a16:creationId xmlns:a16="http://schemas.microsoft.com/office/drawing/2014/main" id="{DA6ACD25-4FA5-4281-BC00-D61A99BF087E}"/>
               </a:ext>
             </a:extLst>
           </p:cNvPr>
@@ -4153,7 +4158,7 @@
           <p:cNvPr id="11" name="grid-v-680">
             <a:extLst xmlns:a="http://schemas.openxmlformats.org/drawingml/2006/main">
               <a:ext uri="{FF2B5EF4-FFF2-40B4-BE49-F238E27FC236}">
-                <a16:creationId xmlns:a16="http://schemas.microsoft.com/office/drawing/2014/main" id="{021477CE-0E78-4E4C-AF1A-71B2D6ACD610}"/>
+                <a16:creationId xmlns:a16="http://schemas.microsoft.com/office/drawing/2014/main" id="{5390E576-B30F-42C8-8228-D7E1F22C8B49}"/>
               </a:ext>
             </a:extLst>
           </p:cNvPr>
@@ -4184,7 +4189,7 @@
           <p:cNvPr id="12" name="grid-v-744">
             <a:extLst xmlns:a="http://schemas.openxmlformats.org/drawingml/2006/main">
               <a:ext uri="{FF2B5EF4-FFF2-40B4-BE49-F238E27FC236}">
-                <a16:creationId xmlns:a16="http://schemas.microsoft.com/office/drawing/2014/main" id="{8E66B166-746C-4405-84AA-84448837DC44}"/>
+                <a16:creationId xmlns:a16="http://schemas.microsoft.com/office/drawing/2014/main" id="{C066B8AC-ED28-480F-BF1A-E312482CB57F}"/>
               </a:ext>
             </a:extLst>
           </p:cNvPr>
@@ -4215,7 +4220,7 @@
           <p:cNvPr id="13" name="grid-v-808">
             <a:extLst xmlns:a="http://schemas.openxmlformats.org/drawingml/2006/main">
               <a:ext uri="{FF2B5EF4-FFF2-40B4-BE49-F238E27FC236}">
-                <a16:creationId xmlns:a16="http://schemas.microsoft.com/office/drawing/2014/main" id="{879A3E4B-9664-4E26-8BB1-0A9147149E62}"/>
+                <a16:creationId xmlns:a16="http://schemas.microsoft.com/office/drawing/2014/main" id="{98C5BAFA-3BEE-49F8-AA34-0AAE1AC5C34D}"/>
               </a:ext>
             </a:extLst>
           </p:cNvPr>
@@ -4246,7 +4251,7 @@
           <p:cNvPr id="14" name="grid-v-872">
             <a:extLst xmlns:a="http://schemas.openxmlformats.org/drawingml/2006/main">
               <a:ext uri="{FF2B5EF4-FFF2-40B4-BE49-F238E27FC236}">
-                <a16:creationId xmlns:a16="http://schemas.microsoft.com/office/drawing/2014/main" id="{A67283E8-9DCA-40DC-8378-8911B259E190}"/>
+                <a16:creationId xmlns:a16="http://schemas.microsoft.com/office/drawing/2014/main" id="{40F5416E-CA23-4D94-96BA-1CBB9AF64B74}"/>
               </a:ext>
             </a:extLst>
           </p:cNvPr>
@@ -4277,7 +4282,7 @@
           <p:cNvPr id="15" name="grid-v-936">
             <a:extLst xmlns:a="http://schemas.openxmlformats.org/drawingml/2006/main">
               <a:ext uri="{FF2B5EF4-FFF2-40B4-BE49-F238E27FC236}">
-                <a16:creationId xmlns:a16="http://schemas.microsoft.com/office/drawing/2014/main" id="{BC0798ED-4DB2-437B-B86A-789DB79A5DC2}"/>
+                <a16:creationId xmlns:a16="http://schemas.microsoft.com/office/drawing/2014/main" id="{BB40E88F-4BDB-46D6-B318-D2C5A387BD98}"/>
               </a:ext>
             </a:extLst>
           </p:cNvPr>
@@ -4308,7 +4313,7 @@
           <p:cNvPr id="16" name="grid-v-1000">
             <a:extLst xmlns:a="http://schemas.openxmlformats.org/drawingml/2006/main">
               <a:ext uri="{FF2B5EF4-FFF2-40B4-BE49-F238E27FC236}">
-                <a16:creationId xmlns:a16="http://schemas.microsoft.com/office/drawing/2014/main" id="{E3E6E2FA-91F9-4557-ADB1-4A3AF2BF9877}"/>
+                <a16:creationId xmlns:a16="http://schemas.microsoft.com/office/drawing/2014/main" id="{9294C8B9-5829-4478-BE15-4DC9E97BC9E1}"/>
               </a:ext>
             </a:extLst>
           </p:cNvPr>
@@ -4339,7 +4344,7 @@
           <p:cNvPr id="17" name="grid-v-1064">
             <a:extLst xmlns:a="http://schemas.openxmlformats.org/drawingml/2006/main">
               <a:ext uri="{FF2B5EF4-FFF2-40B4-BE49-F238E27FC236}">
-                <a16:creationId xmlns:a16="http://schemas.microsoft.com/office/drawing/2014/main" id="{CE03462C-EA7A-4635-B0CD-DEE0EA8F04CC}"/>
+                <a16:creationId xmlns:a16="http://schemas.microsoft.com/office/drawing/2014/main" id="{CB24E421-1A72-4878-B6F7-ED27C27F1455}"/>
               </a:ext>
             </a:extLst>
           </p:cNvPr>
@@ -4370,7 +4375,7 @@
           <p:cNvPr id="18" name="grid-v-1128">
             <a:extLst xmlns:a="http://schemas.openxmlformats.org/drawingml/2006/main">
               <a:ext uri="{FF2B5EF4-FFF2-40B4-BE49-F238E27FC236}">
-                <a16:creationId xmlns:a16="http://schemas.microsoft.com/office/drawing/2014/main" id="{36CCDB64-C60E-4546-B219-45F4AB44B29D}"/>
+                <a16:creationId xmlns:a16="http://schemas.microsoft.com/office/drawing/2014/main" id="{11A5539C-645C-4C9F-9152-60D7D2AA1D31}"/>
               </a:ext>
             </a:extLst>
           </p:cNvPr>
@@ -4401,7 +4406,7 @@
           <p:cNvPr id="19" name="grid-v-1192">
             <a:extLst xmlns:a="http://schemas.openxmlformats.org/drawingml/2006/main">
               <a:ext uri="{FF2B5EF4-FFF2-40B4-BE49-F238E27FC236}">
-                <a16:creationId xmlns:a16="http://schemas.microsoft.com/office/drawing/2014/main" id="{D4A37551-7F46-44EE-9650-2E691311A7CB}"/>
+                <a16:creationId xmlns:a16="http://schemas.microsoft.com/office/drawing/2014/main" id="{9E2EAB1C-9FE3-4193-8CAA-3E6FD1DC57BB}"/>
               </a:ext>
             </a:extLst>
           </p:cNvPr>
@@ -4432,7 +4437,7 @@
           <p:cNvPr id="20" name="grid-h-112">
             <a:extLst xmlns:a="http://schemas.openxmlformats.org/drawingml/2006/main">
               <a:ext uri="{FF2B5EF4-FFF2-40B4-BE49-F238E27FC236}">
-                <a16:creationId xmlns:a16="http://schemas.microsoft.com/office/drawing/2014/main" id="{229D210A-DEC0-4436-BFBF-C0AB0B0F6175}"/>
+                <a16:creationId xmlns:a16="http://schemas.microsoft.com/office/drawing/2014/main" id="{0A27691D-3766-4CEA-B26C-A77F12B4100B}"/>
               </a:ext>
             </a:extLst>
           </p:cNvPr>
@@ -4463,7 +4468,7 @@
           <p:cNvPr id="21" name="grid-h-176">
             <a:extLst xmlns:a="http://schemas.openxmlformats.org/drawingml/2006/main">
               <a:ext uri="{FF2B5EF4-FFF2-40B4-BE49-F238E27FC236}">
-                <a16:creationId xmlns:a16="http://schemas.microsoft.com/office/drawing/2014/main" id="{341A304B-92CA-4A42-A54E-8A969D3B69AC}"/>
+                <a16:creationId xmlns:a16="http://schemas.microsoft.com/office/drawing/2014/main" id="{39900E32-52F6-42BA-A73F-BFA55B2512FE}"/>
               </a:ext>
             </a:extLst>
           </p:cNvPr>
@@ -4494,7 +4499,7 @@
           <p:cNvPr id="22" name="grid-h-240">
             <a:extLst xmlns:a="http://schemas.openxmlformats.org/drawingml/2006/main">
               <a:ext uri="{FF2B5EF4-FFF2-40B4-BE49-F238E27FC236}">
-                <a16:creationId xmlns:a16="http://schemas.microsoft.com/office/drawing/2014/main" id="{2580AB83-94E7-49E3-A6BD-81C49A877774}"/>
+                <a16:creationId xmlns:a16="http://schemas.microsoft.com/office/drawing/2014/main" id="{32A1B94E-1D22-4E3D-A231-84C110557947}"/>
               </a:ext>
             </a:extLst>
           </p:cNvPr>
@@ -4525,7 +4530,7 @@
           <p:cNvPr id="23" name="grid-h-304">
             <a:extLst xmlns:a="http://schemas.openxmlformats.org/drawingml/2006/main">
               <a:ext uri="{FF2B5EF4-FFF2-40B4-BE49-F238E27FC236}">
-                <a16:creationId xmlns:a16="http://schemas.microsoft.com/office/drawing/2014/main" id="{FBA38BF6-160B-4422-838F-B2A517EE3598}"/>
+                <a16:creationId xmlns:a16="http://schemas.microsoft.com/office/drawing/2014/main" id="{468C0925-25CE-4474-B994-C028482649A2}"/>
               </a:ext>
             </a:extLst>
           </p:cNvPr>
@@ -4556,7 +4561,7 @@
           <p:cNvPr id="24" name="grid-h-368">
             <a:extLst xmlns:a="http://schemas.openxmlformats.org/drawingml/2006/main">
               <a:ext uri="{FF2B5EF4-FFF2-40B4-BE49-F238E27FC236}">
-                <a16:creationId xmlns:a16="http://schemas.microsoft.com/office/drawing/2014/main" id="{048B99EF-2217-40F4-999A-C4FF60137122}"/>
+                <a16:creationId xmlns:a16="http://schemas.microsoft.com/office/drawing/2014/main" id="{A20783CC-8584-4CF9-809F-211BEB4F52AF}"/>
               </a:ext>
             </a:extLst>
           </p:cNvPr>
@@ -4587,7 +4592,7 @@
           <p:cNvPr id="25" name="grid-h-432">
             <a:extLst xmlns:a="http://schemas.openxmlformats.org/drawingml/2006/main">
               <a:ext uri="{FF2B5EF4-FFF2-40B4-BE49-F238E27FC236}">
-                <a16:creationId xmlns:a16="http://schemas.microsoft.com/office/drawing/2014/main" id="{B824E690-71B4-462F-979F-0C42B39157E7}"/>
+                <a16:creationId xmlns:a16="http://schemas.microsoft.com/office/drawing/2014/main" id="{042DEA8C-3923-4C19-8DB6-915E7FBE4D78}"/>
               </a:ext>
             </a:extLst>
           </p:cNvPr>
@@ -4618,7 +4623,7 @@
           <p:cNvPr id="26" name="grid-h-496">
             <a:extLst xmlns:a="http://schemas.openxmlformats.org/drawingml/2006/main">
               <a:ext uri="{FF2B5EF4-FFF2-40B4-BE49-F238E27FC236}">
-                <a16:creationId xmlns:a16="http://schemas.microsoft.com/office/drawing/2014/main" id="{C48763CF-41F1-45CD-9131-8CF98E6CA69C}"/>
+                <a16:creationId xmlns:a16="http://schemas.microsoft.com/office/drawing/2014/main" id="{3960FF1A-C4A9-427B-B7F9-EECAF6A65C98}"/>
               </a:ext>
             </a:extLst>
           </p:cNvPr>
@@ -4649,7 +4654,7 @@
           <p:cNvPr id="27" name="grid-h-560">
             <a:extLst xmlns:a="http://schemas.openxmlformats.org/drawingml/2006/main">
               <a:ext uri="{FF2B5EF4-FFF2-40B4-BE49-F238E27FC236}">
-                <a16:creationId xmlns:a16="http://schemas.microsoft.com/office/drawing/2014/main" id="{1B22030E-8F92-4119-A4F9-4900AE780847}"/>
+                <a16:creationId xmlns:a16="http://schemas.microsoft.com/office/drawing/2014/main" id="{EF0AB798-5B16-45D2-AFE1-627705FAA4A0}"/>
               </a:ext>
             </a:extLst>
           </p:cNvPr>
@@ -4680,7 +4685,7 @@
           <p:cNvPr id="28" name="grid-h-624">
             <a:extLst xmlns:a="http://schemas.openxmlformats.org/drawingml/2006/main">
               <a:ext uri="{FF2B5EF4-FFF2-40B4-BE49-F238E27FC236}">
-                <a16:creationId xmlns:a16="http://schemas.microsoft.com/office/drawing/2014/main" id="{EEC79C12-C37E-4972-B78A-D22E281A83C0}"/>
+                <a16:creationId xmlns:a16="http://schemas.microsoft.com/office/drawing/2014/main" id="{8346EBC8-D7B2-44EB-B309-8DF75273B6A8}"/>
               </a:ext>
             </a:extLst>
           </p:cNvPr>
@@ -4711,7 +4716,7 @@
           <p:cNvPr id="29" name="top-rule">
             <a:extLst xmlns:a="http://schemas.openxmlformats.org/drawingml/2006/main">
               <a:ext uri="{FF2B5EF4-FFF2-40B4-BE49-F238E27FC236}">
-                <a16:creationId xmlns:a16="http://schemas.microsoft.com/office/drawing/2014/main" id="{A1A5CC30-D01F-4F3D-B2F6-9B4EE1513921}"/>
+                <a16:creationId xmlns:a16="http://schemas.microsoft.com/office/drawing/2014/main" id="{56D5FCD6-610C-4DBE-BBD5-7A6BCECB4A1F}"/>
               </a:ext>
             </a:extLst>
           </p:cNvPr>
@@ -4742,7 +4747,7 @@
           <p:cNvPr id="30" name="wordmark">
             <a:extLst xmlns:a="http://schemas.openxmlformats.org/drawingml/2006/main">
               <a:ext uri="{FF2B5EF4-FFF2-40B4-BE49-F238E27FC236}">
-                <a16:creationId xmlns:a16="http://schemas.microsoft.com/office/drawing/2014/main" id="{933D7994-2010-4FBF-936B-43E71628B756}"/>
+                <a16:creationId xmlns:a16="http://schemas.microsoft.com/office/drawing/2014/main" id="{AC85C8ED-D897-4B95-BFCA-54BFA188AC20}"/>
               </a:ext>
             </a:extLst>
           </p:cNvPr>
@@ -4804,7 +4809,7 @@
           <p:cNvPr id="31" name="environment-label">
             <a:extLst xmlns:a="http://schemas.openxmlformats.org/drawingml/2006/main">
               <a:ext uri="{FF2B5EF4-FFF2-40B4-BE49-F238E27FC236}">
-                <a16:creationId xmlns:a16="http://schemas.microsoft.com/office/drawing/2014/main" id="{CBB788D8-E4F6-40FC-8826-10E7A582AEF2}"/>
+                <a16:creationId xmlns:a16="http://schemas.microsoft.com/office/drawing/2014/main" id="{CCC10E62-48F8-45BA-A829-D8A922A28279}"/>
               </a:ext>
             </a:extLst>
           </p:cNvPr>
@@ -4866,7 +4871,7 @@
           <p:cNvPr id="32" name="slide-index">
             <a:extLst xmlns:a="http://schemas.openxmlformats.org/drawingml/2006/main">
               <a:ext uri="{FF2B5EF4-FFF2-40B4-BE49-F238E27FC236}">
-                <a16:creationId xmlns:a16="http://schemas.microsoft.com/office/drawing/2014/main" id="{5CD1373B-E27E-4B43-8D16-148813D83D32}"/>
+                <a16:creationId xmlns:a16="http://schemas.microsoft.com/office/drawing/2014/main" id="{BCDA6908-E44F-421C-954A-1F64CEDEDA26}"/>
               </a:ext>
             </a:extLst>
           </p:cNvPr>
@@ -4928,7 +4933,7 @@
           <p:cNvPr id="33" name="event-footer">
             <a:extLst xmlns:a="http://schemas.openxmlformats.org/drawingml/2006/main">
               <a:ext uri="{FF2B5EF4-FFF2-40B4-BE49-F238E27FC236}">
-                <a16:creationId xmlns:a16="http://schemas.microsoft.com/office/drawing/2014/main" id="{67F7718D-CF72-4DFD-B1EE-580ABF436A8D}"/>
+                <a16:creationId xmlns:a16="http://schemas.microsoft.com/office/drawing/2014/main" id="{B7150D88-ABF1-44C0-B6FA-A0FF9D122B15}"/>
               </a:ext>
             </a:extLst>
           </p:cNvPr>
@@ -4990,7 +4995,7 @@
           <p:cNvPr id="34" name="honesty-footer">
             <a:extLst xmlns:a="http://schemas.openxmlformats.org/drawingml/2006/main">
               <a:ext uri="{FF2B5EF4-FFF2-40B4-BE49-F238E27FC236}">
-                <a16:creationId xmlns:a16="http://schemas.microsoft.com/office/drawing/2014/main" id="{305DE237-214E-4F3D-B08F-0756698414E9}"/>
+                <a16:creationId xmlns:a16="http://schemas.microsoft.com/office/drawing/2014/main" id="{220B6DBB-2F0C-4FE8-95B5-8AF244AFCA09}"/>
               </a:ext>
             </a:extLst>
           </p:cNvPr>
@@ -5052,7 +5057,7 @@
           <p:cNvPr id="35" name="eyebrow">
             <a:extLst xmlns:a="http://schemas.openxmlformats.org/drawingml/2006/main">
               <a:ext uri="{FF2B5EF4-FFF2-40B4-BE49-F238E27FC236}">
-                <a16:creationId xmlns:a16="http://schemas.microsoft.com/office/drawing/2014/main" id="{2A9FAFD7-05E4-41B3-B80B-06F082F8D4CD}"/>
+                <a16:creationId xmlns:a16="http://schemas.microsoft.com/office/drawing/2014/main" id="{576981F6-D2D8-4B78-A1D2-283EB3F83C4F}"/>
               </a:ext>
             </a:extLst>
           </p:cNvPr>
@@ -5114,7 +5119,7 @@
           <p:cNvPr id="36" name="slide-title">
             <a:extLst xmlns:a="http://schemas.openxmlformats.org/drawingml/2006/main">
               <a:ext uri="{FF2B5EF4-FFF2-40B4-BE49-F238E27FC236}">
-                <a16:creationId xmlns:a16="http://schemas.microsoft.com/office/drawing/2014/main" id="{04DCE5E8-C32D-4230-97A5-A5AAFD5FE3D5}"/>
+                <a16:creationId xmlns:a16="http://schemas.microsoft.com/office/drawing/2014/main" id="{3385961E-9282-4A0B-B473-DB2FD92AB1E2}"/>
               </a:ext>
             </a:extLst>
           </p:cNvPr>
@@ -5176,7 +5181,7 @@
           <p:cNvPr id="37" name="agent-request-label">
             <a:extLst xmlns:a="http://schemas.openxmlformats.org/drawingml/2006/main">
               <a:ext uri="{FF2B5EF4-FFF2-40B4-BE49-F238E27FC236}">
-                <a16:creationId xmlns:a16="http://schemas.microsoft.com/office/drawing/2014/main" id="{98AA1C75-C7DD-4981-A07F-E24392FAD52A}"/>
+                <a16:creationId xmlns:a16="http://schemas.microsoft.com/office/drawing/2014/main" id="{0DF07DE9-4C68-498E-8512-DAD9A40748FD}"/>
               </a:ext>
             </a:extLst>
           </p:cNvPr>
@@ -5238,7 +5243,7 @@
           <p:cNvPr id="38" name="agent-request">
             <a:extLst xmlns:a="http://schemas.openxmlformats.org/drawingml/2006/main">
               <a:ext uri="{FF2B5EF4-FFF2-40B4-BE49-F238E27FC236}">
-                <a16:creationId xmlns:a16="http://schemas.microsoft.com/office/drawing/2014/main" id="{5AF5444F-BD82-4381-99A5-A0C2DB78A66F}"/>
+                <a16:creationId xmlns:a16="http://schemas.microsoft.com/office/drawing/2014/main" id="{517B1285-8064-462D-BF6D-3E29038E051A}"/>
               </a:ext>
             </a:extLst>
           </p:cNvPr>
@@ -5327,7 +5332,7 @@
           <p:cNvPr id="39" name="agent-stage-number-0">
             <a:extLst xmlns:a="http://schemas.openxmlformats.org/drawingml/2006/main">
               <a:ext uri="{FF2B5EF4-FFF2-40B4-BE49-F238E27FC236}">
-                <a16:creationId xmlns:a16="http://schemas.microsoft.com/office/drawing/2014/main" id="{779D79D0-E77B-436B-85B6-9B097A9E12EA}"/>
+                <a16:creationId xmlns:a16="http://schemas.microsoft.com/office/drawing/2014/main" id="{56FFE7DC-2E2B-46BF-BF98-CDE60A1E26D3}"/>
               </a:ext>
             </a:extLst>
           </p:cNvPr>
@@ -5389,7 +5394,7 @@
           <p:cNvPr id="40" name="agent-stage-label-0">
             <a:extLst xmlns:a="http://schemas.openxmlformats.org/drawingml/2006/main">
               <a:ext uri="{FF2B5EF4-FFF2-40B4-BE49-F238E27FC236}">
-                <a16:creationId xmlns:a16="http://schemas.microsoft.com/office/drawing/2014/main" id="{AD6781F6-163A-4A4A-A5B7-857F72ECBD36}"/>
+                <a16:creationId xmlns:a16="http://schemas.microsoft.com/office/drawing/2014/main" id="{DB35084E-5747-46E0-9BED-1ADD6DAA6ADF}"/>
               </a:ext>
             </a:extLst>
           </p:cNvPr>
@@ -5451,7 +5456,7 @@
           <p:cNvPr id="41" name="agent-stage-arrow-0-shaft">
             <a:extLst xmlns:a="http://schemas.openxmlformats.org/drawingml/2006/main">
               <a:ext uri="{FF2B5EF4-FFF2-40B4-BE49-F238E27FC236}">
-                <a16:creationId xmlns:a16="http://schemas.microsoft.com/office/drawing/2014/main" id="{77FCBE8D-9401-4A9C-B88D-A722FDEC2A57}"/>
+                <a16:creationId xmlns:a16="http://schemas.microsoft.com/office/drawing/2014/main" id="{D7FC7EF4-A665-4290-A602-5A1E7ADF2E0B}"/>
               </a:ext>
             </a:extLst>
           </p:cNvPr>
@@ -5482,7 +5487,7 @@
           <p:cNvPr id="42" name="agent-stage-arrow-0-head">
             <a:extLst xmlns:a="http://schemas.openxmlformats.org/drawingml/2006/main">
               <a:ext uri="{FF2B5EF4-FFF2-40B4-BE49-F238E27FC236}">
-                <a16:creationId xmlns:a16="http://schemas.microsoft.com/office/drawing/2014/main" id="{6BB01455-7024-4AAB-A7DA-C45ADDAF5BCA}"/>
+                <a16:creationId xmlns:a16="http://schemas.microsoft.com/office/drawing/2014/main" id="{439BE4FF-CAA2-48AA-AA79-27DE97730B24}"/>
               </a:ext>
             </a:extLst>
           </p:cNvPr>
@@ -5513,7 +5518,7 @@
           <p:cNvPr id="43" name="agent-stage-number-1">
             <a:extLst xmlns:a="http://schemas.openxmlformats.org/drawingml/2006/main">
               <a:ext uri="{FF2B5EF4-FFF2-40B4-BE49-F238E27FC236}">
-                <a16:creationId xmlns:a16="http://schemas.microsoft.com/office/drawing/2014/main" id="{E1A4C648-5B4F-4C78-A71B-5CB920311341}"/>
+                <a16:creationId xmlns:a16="http://schemas.microsoft.com/office/drawing/2014/main" id="{0A5CA94D-A4F7-43B6-838E-89F27600D9AC}"/>
               </a:ext>
             </a:extLst>
           </p:cNvPr>
@@ -5575,7 +5580,7 @@
           <p:cNvPr id="44" name="agent-stage-label-1">
             <a:extLst xmlns:a="http://schemas.openxmlformats.org/drawingml/2006/main">
               <a:ext uri="{FF2B5EF4-FFF2-40B4-BE49-F238E27FC236}">
-                <a16:creationId xmlns:a16="http://schemas.microsoft.com/office/drawing/2014/main" id="{EAE67378-E306-4C39-A349-D3DA9EDB48F7}"/>
+                <a16:creationId xmlns:a16="http://schemas.microsoft.com/office/drawing/2014/main" id="{147D5BDD-C77E-45A4-AA4D-361387F42BE5}"/>
               </a:ext>
             </a:extLst>
           </p:cNvPr>
@@ -5637,7 +5642,7 @@
           <p:cNvPr id="45" name="agent-stage-arrow-1-shaft">
             <a:extLst xmlns:a="http://schemas.openxmlformats.org/drawingml/2006/main">
               <a:ext uri="{FF2B5EF4-FFF2-40B4-BE49-F238E27FC236}">
-                <a16:creationId xmlns:a16="http://schemas.microsoft.com/office/drawing/2014/main" id="{724C7EE6-12FE-4CA0-AE31-A9E76D5CFFB4}"/>
+                <a16:creationId xmlns:a16="http://schemas.microsoft.com/office/drawing/2014/main" id="{392796FF-726D-4207-86D1-6FE1A8110F39}"/>
               </a:ext>
             </a:extLst>
           </p:cNvPr>
@@ -5668,7 +5673,7 @@
           <p:cNvPr id="46" name="agent-stage-arrow-1-head">
             <a:extLst xmlns:a="http://schemas.openxmlformats.org/drawingml/2006/main">
               <a:ext uri="{FF2B5EF4-FFF2-40B4-BE49-F238E27FC236}">
-                <a16:creationId xmlns:a16="http://schemas.microsoft.com/office/drawing/2014/main" id="{FE2F7F95-3D30-41B5-982F-E97FE3A9B33E}"/>
+                <a16:creationId xmlns:a16="http://schemas.microsoft.com/office/drawing/2014/main" id="{BD5DA078-BDB4-4684-ADCA-C19873BE8E70}"/>
               </a:ext>
             </a:extLst>
           </p:cNvPr>
@@ -5699,7 +5704,7 @@
           <p:cNvPr id="47" name="agent-stage-number-2">
             <a:extLst xmlns:a="http://schemas.openxmlformats.org/drawingml/2006/main">
               <a:ext uri="{FF2B5EF4-FFF2-40B4-BE49-F238E27FC236}">
-                <a16:creationId xmlns:a16="http://schemas.microsoft.com/office/drawing/2014/main" id="{2B4B104C-4521-4381-A063-9CD5CA53F4BA}"/>
+                <a16:creationId xmlns:a16="http://schemas.microsoft.com/office/drawing/2014/main" id="{13A675CB-73D8-442E-A232-2F064EA0FF62}"/>
               </a:ext>
             </a:extLst>
           </p:cNvPr>
@@ -5761,7 +5766,7 @@
           <p:cNvPr id="48" name="agent-stage-label-2">
             <a:extLst xmlns:a="http://schemas.openxmlformats.org/drawingml/2006/main">
               <a:ext uri="{FF2B5EF4-FFF2-40B4-BE49-F238E27FC236}">
-                <a16:creationId xmlns:a16="http://schemas.microsoft.com/office/drawing/2014/main" id="{1F746994-8BBB-45EE-AC79-766A7E4F7EF7}"/>
+                <a16:creationId xmlns:a16="http://schemas.microsoft.com/office/drawing/2014/main" id="{C3FEC795-FF15-4D1E-AA76-FD7B604C5E9C}"/>
               </a:ext>
             </a:extLst>
           </p:cNvPr>
@@ -5823,7 +5828,7 @@
           <p:cNvPr id="49" name="agent-stage-arrow-2-shaft">
             <a:extLst xmlns:a="http://schemas.openxmlformats.org/drawingml/2006/main">
               <a:ext uri="{FF2B5EF4-FFF2-40B4-BE49-F238E27FC236}">
-                <a16:creationId xmlns:a16="http://schemas.microsoft.com/office/drawing/2014/main" id="{9E1C1826-5C97-4D5D-AF3C-3C8F98EC3A8A}"/>
+                <a16:creationId xmlns:a16="http://schemas.microsoft.com/office/drawing/2014/main" id="{B85B85AE-8B0B-41B3-8E99-98BB3B85A0A8}"/>
               </a:ext>
             </a:extLst>
           </p:cNvPr>
@@ -5854,7 +5859,7 @@
           <p:cNvPr id="50" name="agent-stage-arrow-2-head">
             <a:extLst xmlns:a="http://schemas.openxmlformats.org/drawingml/2006/main">
               <a:ext uri="{FF2B5EF4-FFF2-40B4-BE49-F238E27FC236}">
-                <a16:creationId xmlns:a16="http://schemas.microsoft.com/office/drawing/2014/main" id="{C2ADF2FE-A7F7-4D43-A4D5-91EA982CC6E0}"/>
+                <a16:creationId xmlns:a16="http://schemas.microsoft.com/office/drawing/2014/main" id="{7D2BCD2F-858E-479B-94D4-5CDED2929CDD}"/>
               </a:ext>
             </a:extLst>
           </p:cNvPr>
@@ -5885,7 +5890,7 @@
           <p:cNvPr id="51" name="agent-stage-number-3">
             <a:extLst xmlns:a="http://schemas.openxmlformats.org/drawingml/2006/main">
               <a:ext uri="{FF2B5EF4-FFF2-40B4-BE49-F238E27FC236}">
-                <a16:creationId xmlns:a16="http://schemas.microsoft.com/office/drawing/2014/main" id="{13685AB7-EC7B-4AC4-AFE2-F86A2458056B}"/>
+                <a16:creationId xmlns:a16="http://schemas.microsoft.com/office/drawing/2014/main" id="{6A5615A9-5091-407E-AB66-052822F1090E}"/>
               </a:ext>
             </a:extLst>
           </p:cNvPr>
@@ -5947,7 +5952,7 @@
           <p:cNvPr id="52" name="agent-stage-label-3">
             <a:extLst xmlns:a="http://schemas.openxmlformats.org/drawingml/2006/main">
               <a:ext uri="{FF2B5EF4-FFF2-40B4-BE49-F238E27FC236}">
-                <a16:creationId xmlns:a16="http://schemas.microsoft.com/office/drawing/2014/main" id="{B28FF42F-4901-421B-AEC8-D97C65D475F7}"/>
+                <a16:creationId xmlns:a16="http://schemas.microsoft.com/office/drawing/2014/main" id="{6841B66B-5039-40E0-8F1A-B69D583955FF}"/>
               </a:ext>
             </a:extLst>
           </p:cNvPr>
@@ -6009,7 +6014,7 @@
           <p:cNvPr id="53" name="receipt-frame">
             <a:extLst xmlns:a="http://schemas.openxmlformats.org/drawingml/2006/main">
               <a:ext uri="{FF2B5EF4-FFF2-40B4-BE49-F238E27FC236}">
-                <a16:creationId xmlns:a16="http://schemas.microsoft.com/office/drawing/2014/main" id="{D5C88238-40AF-4186-8F95-85BE56060338}"/>
+                <a16:creationId xmlns:a16="http://schemas.microsoft.com/office/drawing/2014/main" id="{E9D0725E-1AF3-4C40-9EAB-948315AFEB89}"/>
               </a:ext>
             </a:extLst>
           </p:cNvPr>
@@ -6042,7 +6047,7 @@
           <p:cNvPr id="54" name="receipt-label">
             <a:extLst xmlns:a="http://schemas.openxmlformats.org/drawingml/2006/main">
               <a:ext uri="{FF2B5EF4-FFF2-40B4-BE49-F238E27FC236}">
-                <a16:creationId xmlns:a16="http://schemas.microsoft.com/office/drawing/2014/main" id="{D03A15F1-663F-4599-BFE5-51D1A49A465A}"/>
+                <a16:creationId xmlns:a16="http://schemas.microsoft.com/office/drawing/2014/main" id="{EBCBB9D1-1CE3-4821-8920-FA3B5C3722DD}"/>
               </a:ext>
             </a:extLst>
           </p:cNvPr>
@@ -6104,7 +6109,7 @@
           <p:cNvPr id="55" name="receipt-status">
             <a:extLst xmlns:a="http://schemas.openxmlformats.org/drawingml/2006/main">
               <a:ext uri="{FF2B5EF4-FFF2-40B4-BE49-F238E27FC236}">
-                <a16:creationId xmlns:a16="http://schemas.microsoft.com/office/drawing/2014/main" id="{1E1448F7-FC0B-4167-AA48-A1C9001E5968}"/>
+                <a16:creationId xmlns:a16="http://schemas.microsoft.com/office/drawing/2014/main" id="{4D094E82-E0C1-42AD-9624-2FAE053EA973}"/>
               </a:ext>
             </a:extLst>
           </p:cNvPr>
@@ -6166,7 +6171,7 @@
           <p:cNvPr id="56" name="receipt-row-label-0">
             <a:extLst xmlns:a="http://schemas.openxmlformats.org/drawingml/2006/main">
               <a:ext uri="{FF2B5EF4-FFF2-40B4-BE49-F238E27FC236}">
-                <a16:creationId xmlns:a16="http://schemas.microsoft.com/office/drawing/2014/main" id="{31C2DB99-6D39-4202-BC80-3D284D844FF9}"/>
+                <a16:creationId xmlns:a16="http://schemas.microsoft.com/office/drawing/2014/main" id="{5FD73255-477A-4193-8A78-236ED7D1F57B}"/>
               </a:ext>
             </a:extLst>
           </p:cNvPr>
@@ -6228,7 +6233,7 @@
           <p:cNvPr id="57" name="receipt-row-value-0">
             <a:extLst xmlns:a="http://schemas.openxmlformats.org/drawingml/2006/main">
               <a:ext uri="{FF2B5EF4-FFF2-40B4-BE49-F238E27FC236}">
-                <a16:creationId xmlns:a16="http://schemas.microsoft.com/office/drawing/2014/main" id="{3253E129-FDFA-4E5C-B57B-55B708604F21}"/>
+                <a16:creationId xmlns:a16="http://schemas.microsoft.com/office/drawing/2014/main" id="{1A48FBF3-6A30-47B4-ADC8-DDF2A6F5318C}"/>
               </a:ext>
             </a:extLst>
           </p:cNvPr>
@@ -6290,7 +6295,7 @@
           <p:cNvPr id="58" name="receipt-row-detail-0">
             <a:extLst xmlns:a="http://schemas.openxmlformats.org/drawingml/2006/main">
               <a:ext uri="{FF2B5EF4-FFF2-40B4-BE49-F238E27FC236}">
-                <a16:creationId xmlns:a16="http://schemas.microsoft.com/office/drawing/2014/main" id="{EA23FAE6-29AE-47E8-A302-02624AAE1F0E}"/>
+                <a16:creationId xmlns:a16="http://schemas.microsoft.com/office/drawing/2014/main" id="{BFD00BB8-17F8-433B-974D-9DEE68029E12}"/>
               </a:ext>
             </a:extLst>
           </p:cNvPr>
@@ -6352,7 +6357,7 @@
           <p:cNvPr id="59" name="receipt-row-rule-0">
             <a:extLst xmlns:a="http://schemas.openxmlformats.org/drawingml/2006/main">
               <a:ext uri="{FF2B5EF4-FFF2-40B4-BE49-F238E27FC236}">
-                <a16:creationId xmlns:a16="http://schemas.microsoft.com/office/drawing/2014/main" id="{1E484E01-E9F5-489D-B57E-B6F533E2ECC8}"/>
+                <a16:creationId xmlns:a16="http://schemas.microsoft.com/office/drawing/2014/main" id="{DB1196ED-E879-4089-9557-722B74DB1D87}"/>
               </a:ext>
             </a:extLst>
           </p:cNvPr>
@@ -6383,7 +6388,7 @@
           <p:cNvPr id="60" name="receipt-row-label-1">
             <a:extLst xmlns:a="http://schemas.openxmlformats.org/drawingml/2006/main">
               <a:ext uri="{FF2B5EF4-FFF2-40B4-BE49-F238E27FC236}">
-                <a16:creationId xmlns:a16="http://schemas.microsoft.com/office/drawing/2014/main" id="{7F691DC3-8B16-4C19-B060-FD16C36C741B}"/>
+                <a16:creationId xmlns:a16="http://schemas.microsoft.com/office/drawing/2014/main" id="{B088F7C8-4755-4F7B-A129-144F33636297}"/>
               </a:ext>
             </a:extLst>
           </p:cNvPr>
@@ -6445,7 +6450,7 @@
           <p:cNvPr id="61" name="receipt-row-value-1">
             <a:extLst xmlns:a="http://schemas.openxmlformats.org/drawingml/2006/main">
               <a:ext uri="{FF2B5EF4-FFF2-40B4-BE49-F238E27FC236}">
-                <a16:creationId xmlns:a16="http://schemas.microsoft.com/office/drawing/2014/main" id="{52381610-3EC9-4849-A79F-416EA9F16602}"/>
+                <a16:creationId xmlns:a16="http://schemas.microsoft.com/office/drawing/2014/main" id="{57FE977E-EB47-4551-A41B-67D33E909276}"/>
               </a:ext>
             </a:extLst>
           </p:cNvPr>
@@ -6507,7 +6512,7 @@
           <p:cNvPr id="62" name="receipt-row-detail-1">
             <a:extLst xmlns:a="http://schemas.openxmlformats.org/drawingml/2006/main">
               <a:ext uri="{FF2B5EF4-FFF2-40B4-BE49-F238E27FC236}">
-                <a16:creationId xmlns:a16="http://schemas.microsoft.com/office/drawing/2014/main" id="{56A89428-57D8-4A59-A5F1-644C1CAFC663}"/>
+                <a16:creationId xmlns:a16="http://schemas.microsoft.com/office/drawing/2014/main" id="{19D32FD1-AD11-48BA-93AD-9178FD04C0F7}"/>
               </a:ext>
             </a:extLst>
           </p:cNvPr>
@@ -6569,7 +6574,7 @@
           <p:cNvPr id="63" name="receipt-row-rule-1">
             <a:extLst xmlns:a="http://schemas.openxmlformats.org/drawingml/2006/main">
               <a:ext uri="{FF2B5EF4-FFF2-40B4-BE49-F238E27FC236}">
-                <a16:creationId xmlns:a16="http://schemas.microsoft.com/office/drawing/2014/main" id="{FD5B5E16-9306-4633-8196-5DAF903A41F8}"/>
+                <a16:creationId xmlns:a16="http://schemas.microsoft.com/office/drawing/2014/main" id="{F212DC08-5FAB-4E20-B564-48BDE646FC0D}"/>
               </a:ext>
             </a:extLst>
           </p:cNvPr>
@@ -6600,7 +6605,7 @@
           <p:cNvPr id="64" name="receipt-row-label-2">
             <a:extLst xmlns:a="http://schemas.openxmlformats.org/drawingml/2006/main">
               <a:ext uri="{FF2B5EF4-FFF2-40B4-BE49-F238E27FC236}">
-                <a16:creationId xmlns:a16="http://schemas.microsoft.com/office/drawing/2014/main" id="{F8D7526C-57F7-4976-917F-401703A6768D}"/>
+                <a16:creationId xmlns:a16="http://schemas.microsoft.com/office/drawing/2014/main" id="{F7B83B63-9C93-475D-A532-9EE3C56BAF8F}"/>
               </a:ext>
             </a:extLst>
           </p:cNvPr>
@@ -6662,7 +6667,7 @@
           <p:cNvPr id="65" name="receipt-row-value-2">
             <a:extLst xmlns:a="http://schemas.openxmlformats.org/drawingml/2006/main">
               <a:ext uri="{FF2B5EF4-FFF2-40B4-BE49-F238E27FC236}">
-                <a16:creationId xmlns:a16="http://schemas.microsoft.com/office/drawing/2014/main" id="{CD33781C-552F-4F43-98A7-8983C24B0F09}"/>
+                <a16:creationId xmlns:a16="http://schemas.microsoft.com/office/drawing/2014/main" id="{F6D10337-E6F7-478D-813F-C814F32FBC05}"/>
               </a:ext>
             </a:extLst>
           </p:cNvPr>
@@ -6724,7 +6729,7 @@
           <p:cNvPr id="66" name="receipt-row-detail-2">
             <a:extLst xmlns:a="http://schemas.openxmlformats.org/drawingml/2006/main">
               <a:ext uri="{FF2B5EF4-FFF2-40B4-BE49-F238E27FC236}">
-                <a16:creationId xmlns:a16="http://schemas.microsoft.com/office/drawing/2014/main" id="{0A3BD091-E47D-4B9E-97C0-C7E3A08F75D1}"/>
+                <a16:creationId xmlns:a16="http://schemas.microsoft.com/office/drawing/2014/main" id="{3482C752-E719-4108-9FFF-4378E90CC4C1}"/>
               </a:ext>
             </a:extLst>
           </p:cNvPr>
@@ -6786,7 +6791,7 @@
           <p:cNvPr id="67" name="receipt-row-rule-2">
             <a:extLst xmlns:a="http://schemas.openxmlformats.org/drawingml/2006/main">
               <a:ext uri="{FF2B5EF4-FFF2-40B4-BE49-F238E27FC236}">
-                <a16:creationId xmlns:a16="http://schemas.microsoft.com/office/drawing/2014/main" id="{DD140540-80FF-49FF-B0A8-BAF652289663}"/>
+                <a16:creationId xmlns:a16="http://schemas.microsoft.com/office/drawing/2014/main" id="{20A79BDE-C219-4BC4-8AF7-A194E223ED31}"/>
               </a:ext>
             </a:extLst>
           </p:cNvPr>
@@ -6817,7 +6822,7 @@
           <p:cNvPr id="68" name="receipt-row-label-3">
             <a:extLst xmlns:a="http://schemas.openxmlformats.org/drawingml/2006/main">
               <a:ext uri="{FF2B5EF4-FFF2-40B4-BE49-F238E27FC236}">
-                <a16:creationId xmlns:a16="http://schemas.microsoft.com/office/drawing/2014/main" id="{9DD1A4C0-2D22-4C5D-9A25-3AECAE437F9F}"/>
+                <a16:creationId xmlns:a16="http://schemas.microsoft.com/office/drawing/2014/main" id="{75659E55-5E42-4AA0-8550-E2A345724D18}"/>
               </a:ext>
             </a:extLst>
           </p:cNvPr>
@@ -6879,7 +6884,7 @@
           <p:cNvPr id="69" name="receipt-row-value-3">
             <a:extLst xmlns:a="http://schemas.openxmlformats.org/drawingml/2006/main">
               <a:ext uri="{FF2B5EF4-FFF2-40B4-BE49-F238E27FC236}">
-                <a16:creationId xmlns:a16="http://schemas.microsoft.com/office/drawing/2014/main" id="{E0885D4E-E400-4733-B886-80ACAD348305}"/>
+                <a16:creationId xmlns:a16="http://schemas.microsoft.com/office/drawing/2014/main" id="{A3617AF8-BF31-4934-B084-8A892DA2F25F}"/>
               </a:ext>
             </a:extLst>
           </p:cNvPr>
@@ -6941,7 +6946,7 @@
           <p:cNvPr id="70" name="receipt-row-detail-3">
             <a:extLst xmlns:a="http://schemas.openxmlformats.org/drawingml/2006/main">
               <a:ext uri="{FF2B5EF4-FFF2-40B4-BE49-F238E27FC236}">
-                <a16:creationId xmlns:a16="http://schemas.microsoft.com/office/drawing/2014/main" id="{6B090285-986E-4215-BF86-C4FC052576E0}"/>
+                <a16:creationId xmlns:a16="http://schemas.microsoft.com/office/drawing/2014/main" id="{B35E51CD-AFF8-41F2-9301-9F0F91559B36}"/>
               </a:ext>
             </a:extLst>
           </p:cNvPr>
@@ -7003,7 +7008,7 @@
           <p:cNvPr id="71" name="receipt-row-rule-3">
             <a:extLst xmlns:a="http://schemas.openxmlformats.org/drawingml/2006/main">
               <a:ext uri="{FF2B5EF4-FFF2-40B4-BE49-F238E27FC236}">
-                <a16:creationId xmlns:a16="http://schemas.microsoft.com/office/drawing/2014/main" id="{AAE897C6-02EC-4083-A47E-CCC5CE006CBB}"/>
+                <a16:creationId xmlns:a16="http://schemas.microsoft.com/office/drawing/2014/main" id="{F46941BA-3A74-4A7B-AF1F-8C9BAF3F3B6B}"/>
               </a:ext>
             </a:extLst>
           </p:cNvPr>
@@ -7034,7 +7039,7 @@
           <p:cNvPr id="72" name="agent-boundary-bg">
             <a:extLst xmlns:a="http://schemas.openxmlformats.org/drawingml/2006/main">
               <a:ext uri="{FF2B5EF4-FFF2-40B4-BE49-F238E27FC236}">
-                <a16:creationId xmlns:a16="http://schemas.microsoft.com/office/drawing/2014/main" id="{F58AF1BE-6DEF-4F93-A5F2-56E5600F8B1E}"/>
+                <a16:creationId xmlns:a16="http://schemas.microsoft.com/office/drawing/2014/main" id="{C79138B8-C823-4C9C-9948-F3E3C1C06F32}"/>
               </a:ext>
             </a:extLst>
           </p:cNvPr>
@@ -7067,7 +7072,7 @@
           <p:cNvPr id="73" name="agent-save-boundary">
             <a:extLst xmlns:a="http://schemas.openxmlformats.org/drawingml/2006/main">
               <a:ext uri="{FF2B5EF4-FFF2-40B4-BE49-F238E27FC236}">
-                <a16:creationId xmlns:a16="http://schemas.microsoft.com/office/drawing/2014/main" id="{13A5864C-C4F3-49F1-9D6C-260F266E8D34}"/>
+                <a16:creationId xmlns:a16="http://schemas.microsoft.com/office/drawing/2014/main" id="{1850CAC9-F220-4A86-BBAA-A85B09BF2D5F}"/>
               </a:ext>
             </a:extLst>
           </p:cNvPr>
@@ -7129,7 +7134,7 @@
           <p:cNvPr id="74" name="agent-money-boundary">
             <a:extLst xmlns:a="http://schemas.openxmlformats.org/drawingml/2006/main">
               <a:ext uri="{FF2B5EF4-FFF2-40B4-BE49-F238E27FC236}">
-                <a16:creationId xmlns:a16="http://schemas.microsoft.com/office/drawing/2014/main" id="{3F3AD424-FB38-4E75-A42D-9C45704F6CAF}"/>
+                <a16:creationId xmlns:a16="http://schemas.microsoft.com/office/drawing/2014/main" id="{2B189961-F5F5-467F-AEDB-C5571B2AD993}"/>
               </a:ext>
             </a:extLst>
           </p:cNvPr>
@@ -7189,7 +7194,7 @@
     </p:spTree>
     <p:extLst>
       <p:ext uri="{BB962C8B-B14F-4D97-AF65-F5344CB8AC3E}">
-        <p14:creationId xmlns:p14="http://schemas.microsoft.com/office/powerpoint/2010/main" val="1497849821"/>
+        <p14:creationId xmlns:p14="http://schemas.microsoft.com/office/powerpoint/2010/main" val="975093133"/>
       </p:ext>
     </p:extLst>
   </p:cSld>
@@ -7217,10 +7222,10 @@
       </p:grpSpPr>
       <p:sp>
         <p:nvSpPr>
-          <p:cNvPr id="70" name="grid-v-40">
-            <a:extLst xmlns:a="http://schemas.openxmlformats.org/drawingml/2006/main">
-              <a:ext uri="{FF2B5EF4-FFF2-40B4-BE49-F238E27FC236}">
-                <a16:creationId xmlns:a16="http://schemas.microsoft.com/office/drawing/2014/main" id="{C5A78E0A-07C8-409A-B533-2FC7E377BB5A}"/>
+          <p:cNvPr id="71" name="grid-v-40">
+            <a:extLst xmlns:a="http://schemas.openxmlformats.org/drawingml/2006/main">
+              <a:ext uri="{FF2B5EF4-FFF2-40B4-BE49-F238E27FC236}">
+                <a16:creationId xmlns:a16="http://schemas.microsoft.com/office/drawing/2014/main" id="{72AAB050-7AD4-45EA-9E7D-5E99BF8A3A1F}"/>
               </a:ext>
             </a:extLst>
           </p:cNvPr>
@@ -7251,7 +7256,7 @@
           <p:cNvPr id="2" name="grid-v-104">
             <a:extLst xmlns:a="http://schemas.openxmlformats.org/drawingml/2006/main">
               <a:ext uri="{FF2B5EF4-FFF2-40B4-BE49-F238E27FC236}">
-                <a16:creationId xmlns:a16="http://schemas.microsoft.com/office/drawing/2014/main" id="{FAA914C3-1A37-4BF6-A53F-B340EC3AB4B1}"/>
+                <a16:creationId xmlns:a16="http://schemas.microsoft.com/office/drawing/2014/main" id="{E7BE7BA6-22AE-43B7-BF3D-4FF89270F682}"/>
               </a:ext>
             </a:extLst>
           </p:cNvPr>
@@ -7282,7 +7287,7 @@
           <p:cNvPr id="3" name="grid-v-168">
             <a:extLst xmlns:a="http://schemas.openxmlformats.org/drawingml/2006/main">
               <a:ext uri="{FF2B5EF4-FFF2-40B4-BE49-F238E27FC236}">
-                <a16:creationId xmlns:a16="http://schemas.microsoft.com/office/drawing/2014/main" id="{CB39CDAC-6CE8-452A-96BF-C18F19ABDF25}"/>
+                <a16:creationId xmlns:a16="http://schemas.microsoft.com/office/drawing/2014/main" id="{6F96BC4E-2D20-4708-819B-7944CF8D5D73}"/>
               </a:ext>
             </a:extLst>
           </p:cNvPr>
@@ -7313,7 +7318,7 @@
           <p:cNvPr id="4" name="grid-v-232">
             <a:extLst xmlns:a="http://schemas.openxmlformats.org/drawingml/2006/main">
               <a:ext uri="{FF2B5EF4-FFF2-40B4-BE49-F238E27FC236}">
-                <a16:creationId xmlns:a16="http://schemas.microsoft.com/office/drawing/2014/main" id="{CEFBDC70-2B6B-4D32-B60C-3EDA9A6E4C69}"/>
+                <a16:creationId xmlns:a16="http://schemas.microsoft.com/office/drawing/2014/main" id="{C81C7242-DAD4-4926-AA15-433BC17274EB}"/>
               </a:ext>
             </a:extLst>
           </p:cNvPr>
@@ -7344,7 +7349,7 @@
           <p:cNvPr id="5" name="grid-v-296">
             <a:extLst xmlns:a="http://schemas.openxmlformats.org/drawingml/2006/main">
               <a:ext uri="{FF2B5EF4-FFF2-40B4-BE49-F238E27FC236}">
-                <a16:creationId xmlns:a16="http://schemas.microsoft.com/office/drawing/2014/main" id="{5FFC9840-E654-4556-8740-2A67ED60E84D}"/>
+                <a16:creationId xmlns:a16="http://schemas.microsoft.com/office/drawing/2014/main" id="{8731D2EF-FF7B-496C-80F3-B19343DBDED4}"/>
               </a:ext>
             </a:extLst>
           </p:cNvPr>
@@ -7375,7 +7380,7 @@
           <p:cNvPr id="6" name="grid-v-360">
             <a:extLst xmlns:a="http://schemas.openxmlformats.org/drawingml/2006/main">
               <a:ext uri="{FF2B5EF4-FFF2-40B4-BE49-F238E27FC236}">
-                <a16:creationId xmlns:a16="http://schemas.microsoft.com/office/drawing/2014/main" id="{9FCFEE58-E5A5-47B9-A3B7-896EDEB613CD}"/>
+                <a16:creationId xmlns:a16="http://schemas.microsoft.com/office/drawing/2014/main" id="{68BD297F-B095-4627-B078-45361C4DDB0F}"/>
               </a:ext>
             </a:extLst>
           </p:cNvPr>
@@ -7406,7 +7411,7 @@
           <p:cNvPr id="7" name="grid-v-424">
             <a:extLst xmlns:a="http://schemas.openxmlformats.org/drawingml/2006/main">
               <a:ext uri="{FF2B5EF4-FFF2-40B4-BE49-F238E27FC236}">
-                <a16:creationId xmlns:a16="http://schemas.microsoft.com/office/drawing/2014/main" id="{2FB10CDF-AE6A-4EF3-8548-68076417B19C}"/>
+                <a16:creationId xmlns:a16="http://schemas.microsoft.com/office/drawing/2014/main" id="{735382BA-84D9-4732-88D6-EECF191A0E81}"/>
               </a:ext>
             </a:extLst>
           </p:cNvPr>
@@ -7437,7 +7442,7 @@
           <p:cNvPr id="8" name="grid-v-488">
             <a:extLst xmlns:a="http://schemas.openxmlformats.org/drawingml/2006/main">
               <a:ext uri="{FF2B5EF4-FFF2-40B4-BE49-F238E27FC236}">
-                <a16:creationId xmlns:a16="http://schemas.microsoft.com/office/drawing/2014/main" id="{5DAF60DF-EC2F-4293-A0A3-D5B099C9CB74}"/>
+                <a16:creationId xmlns:a16="http://schemas.microsoft.com/office/drawing/2014/main" id="{11659215-46AF-416A-88C8-F06016C1C5E2}"/>
               </a:ext>
             </a:extLst>
           </p:cNvPr>
@@ -7468,7 +7473,7 @@
           <p:cNvPr id="9" name="grid-v-552">
             <a:extLst xmlns:a="http://schemas.openxmlformats.org/drawingml/2006/main">
               <a:ext uri="{FF2B5EF4-FFF2-40B4-BE49-F238E27FC236}">
-                <a16:creationId xmlns:a16="http://schemas.microsoft.com/office/drawing/2014/main" id="{CF825111-5978-41F1-B281-9DFBB8E9FFE8}"/>
+                <a16:creationId xmlns:a16="http://schemas.microsoft.com/office/drawing/2014/main" id="{90B4FCD1-26C2-41E3-809C-17DE9F9D8BEF}"/>
               </a:ext>
             </a:extLst>
           </p:cNvPr>
@@ -7499,7 +7504,7 @@
           <p:cNvPr id="10" name="grid-v-616">
             <a:extLst xmlns:a="http://schemas.openxmlformats.org/drawingml/2006/main">
               <a:ext uri="{FF2B5EF4-FFF2-40B4-BE49-F238E27FC236}">
-                <a16:creationId xmlns:a16="http://schemas.microsoft.com/office/drawing/2014/main" id="{C965BE53-28EB-4762-993E-24FF03A8105A}"/>
+                <a16:creationId xmlns:a16="http://schemas.microsoft.com/office/drawing/2014/main" id="{14E07066-6A48-47A5-BC6E-302C6FA81EE5}"/>
               </a:ext>
             </a:extLst>
           </p:cNvPr>
@@ -7530,7 +7535,7 @@
           <p:cNvPr id="11" name="grid-v-680">
             <a:extLst xmlns:a="http://schemas.openxmlformats.org/drawingml/2006/main">
               <a:ext uri="{FF2B5EF4-FFF2-40B4-BE49-F238E27FC236}">
-                <a16:creationId xmlns:a16="http://schemas.microsoft.com/office/drawing/2014/main" id="{6D10F0BF-98B3-4C06-A7CA-248B510D9AF2}"/>
+                <a16:creationId xmlns:a16="http://schemas.microsoft.com/office/drawing/2014/main" id="{3FF4D2DC-CFBF-4867-9FD3-9D512B47374C}"/>
               </a:ext>
             </a:extLst>
           </p:cNvPr>
@@ -7561,7 +7566,7 @@
           <p:cNvPr id="12" name="grid-v-744">
             <a:extLst xmlns:a="http://schemas.openxmlformats.org/drawingml/2006/main">
               <a:ext uri="{FF2B5EF4-FFF2-40B4-BE49-F238E27FC236}">
-                <a16:creationId xmlns:a16="http://schemas.microsoft.com/office/drawing/2014/main" id="{DE4E745F-997C-48C6-89D7-E0799275ACA0}"/>
+                <a16:creationId xmlns:a16="http://schemas.microsoft.com/office/drawing/2014/main" id="{EC724B02-80F0-4672-A106-1C4E563BDD6F}"/>
               </a:ext>
             </a:extLst>
           </p:cNvPr>
@@ -7592,7 +7597,7 @@
           <p:cNvPr id="13" name="grid-v-808">
             <a:extLst xmlns:a="http://schemas.openxmlformats.org/drawingml/2006/main">
               <a:ext uri="{FF2B5EF4-FFF2-40B4-BE49-F238E27FC236}">
-                <a16:creationId xmlns:a16="http://schemas.microsoft.com/office/drawing/2014/main" id="{91982C0A-A125-45FD-BC18-6F3FD5E64C5E}"/>
+                <a16:creationId xmlns:a16="http://schemas.microsoft.com/office/drawing/2014/main" id="{45AB6282-352A-4973-A9AF-5B0CF8DFA1B5}"/>
               </a:ext>
             </a:extLst>
           </p:cNvPr>
@@ -7623,7 +7628,7 @@
           <p:cNvPr id="14" name="grid-v-872">
             <a:extLst xmlns:a="http://schemas.openxmlformats.org/drawingml/2006/main">
               <a:ext uri="{FF2B5EF4-FFF2-40B4-BE49-F238E27FC236}">
-                <a16:creationId xmlns:a16="http://schemas.microsoft.com/office/drawing/2014/main" id="{6FE93D15-3B75-4334-8D46-8F182064B6EA}"/>
+                <a16:creationId xmlns:a16="http://schemas.microsoft.com/office/drawing/2014/main" id="{D7209665-1F09-4052-8EBD-79663673D02F}"/>
               </a:ext>
             </a:extLst>
           </p:cNvPr>
@@ -7654,7 +7659,7 @@
           <p:cNvPr id="15" name="grid-v-936">
             <a:extLst xmlns:a="http://schemas.openxmlformats.org/drawingml/2006/main">
               <a:ext uri="{FF2B5EF4-FFF2-40B4-BE49-F238E27FC236}">
-                <a16:creationId xmlns:a16="http://schemas.microsoft.com/office/drawing/2014/main" id="{275F905F-26E1-4141-B76E-D3113391EE57}"/>
+                <a16:creationId xmlns:a16="http://schemas.microsoft.com/office/drawing/2014/main" id="{76FA5342-AC81-4167-AE62-256D76318D4C}"/>
               </a:ext>
             </a:extLst>
           </p:cNvPr>
@@ -7685,7 +7690,7 @@
           <p:cNvPr id="16" name="grid-v-1000">
             <a:extLst xmlns:a="http://schemas.openxmlformats.org/drawingml/2006/main">
               <a:ext uri="{FF2B5EF4-FFF2-40B4-BE49-F238E27FC236}">
-                <a16:creationId xmlns:a16="http://schemas.microsoft.com/office/drawing/2014/main" id="{5830BA63-2F30-4C38-A18D-55AAE71DB8DF}"/>
+                <a16:creationId xmlns:a16="http://schemas.microsoft.com/office/drawing/2014/main" id="{CB0B3221-8D7F-4561-986F-F08C6EEE203B}"/>
               </a:ext>
             </a:extLst>
           </p:cNvPr>
@@ -7716,7 +7721,7 @@
           <p:cNvPr id="17" name="grid-v-1064">
             <a:extLst xmlns:a="http://schemas.openxmlformats.org/drawingml/2006/main">
               <a:ext uri="{FF2B5EF4-FFF2-40B4-BE49-F238E27FC236}">
-                <a16:creationId xmlns:a16="http://schemas.microsoft.com/office/drawing/2014/main" id="{68210D3B-0C62-467F-AE6C-9FE95AE52E02}"/>
+                <a16:creationId xmlns:a16="http://schemas.microsoft.com/office/drawing/2014/main" id="{70B30E28-5E9A-455B-80F8-032A9371A612}"/>
               </a:ext>
             </a:extLst>
           </p:cNvPr>
@@ -7747,7 +7752,7 @@
           <p:cNvPr id="18" name="grid-v-1128">
             <a:extLst xmlns:a="http://schemas.openxmlformats.org/drawingml/2006/main">
               <a:ext uri="{FF2B5EF4-FFF2-40B4-BE49-F238E27FC236}">
-                <a16:creationId xmlns:a16="http://schemas.microsoft.com/office/drawing/2014/main" id="{B17A7BF4-E6C1-4802-AFAB-3D4662094B4F}"/>
+                <a16:creationId xmlns:a16="http://schemas.microsoft.com/office/drawing/2014/main" id="{16F5C029-B3E6-4AFA-8F54-E0B5B2A5C31F}"/>
               </a:ext>
             </a:extLst>
           </p:cNvPr>
@@ -7778,7 +7783,7 @@
           <p:cNvPr id="19" name="grid-v-1192">
             <a:extLst xmlns:a="http://schemas.openxmlformats.org/drawingml/2006/main">
               <a:ext uri="{FF2B5EF4-FFF2-40B4-BE49-F238E27FC236}">
-                <a16:creationId xmlns:a16="http://schemas.microsoft.com/office/drawing/2014/main" id="{0170BEE5-D6FB-472D-BA55-AE3D89FC7766}"/>
+                <a16:creationId xmlns:a16="http://schemas.microsoft.com/office/drawing/2014/main" id="{570980B8-DFBB-4D24-8CBC-0C6541DCC190}"/>
               </a:ext>
             </a:extLst>
           </p:cNvPr>
@@ -7809,7 +7814,7 @@
           <p:cNvPr id="20" name="grid-h-112">
             <a:extLst xmlns:a="http://schemas.openxmlformats.org/drawingml/2006/main">
               <a:ext uri="{FF2B5EF4-FFF2-40B4-BE49-F238E27FC236}">
-                <a16:creationId xmlns:a16="http://schemas.microsoft.com/office/drawing/2014/main" id="{84C8036A-4AEB-4C56-A093-0BF78EC1F798}"/>
+                <a16:creationId xmlns:a16="http://schemas.microsoft.com/office/drawing/2014/main" id="{DEC319A8-37D4-4AC7-9CFE-1187D053C556}"/>
               </a:ext>
             </a:extLst>
           </p:cNvPr>
@@ -7840,7 +7845,7 @@
           <p:cNvPr id="21" name="grid-h-176">
             <a:extLst xmlns:a="http://schemas.openxmlformats.org/drawingml/2006/main">
               <a:ext uri="{FF2B5EF4-FFF2-40B4-BE49-F238E27FC236}">
-                <a16:creationId xmlns:a16="http://schemas.microsoft.com/office/drawing/2014/main" id="{D5DF61D1-1F31-4504-AD8D-EFF3DE70FCA5}"/>
+                <a16:creationId xmlns:a16="http://schemas.microsoft.com/office/drawing/2014/main" id="{CC384EEE-F5A8-44DF-91C5-4393868A532B}"/>
               </a:ext>
             </a:extLst>
           </p:cNvPr>
@@ -7871,7 +7876,7 @@
           <p:cNvPr id="22" name="grid-h-240">
             <a:extLst xmlns:a="http://schemas.openxmlformats.org/drawingml/2006/main">
               <a:ext uri="{FF2B5EF4-FFF2-40B4-BE49-F238E27FC236}">
-                <a16:creationId xmlns:a16="http://schemas.microsoft.com/office/drawing/2014/main" id="{CEE0142A-E98B-48BC-9C77-05D17278F3DD}"/>
+                <a16:creationId xmlns:a16="http://schemas.microsoft.com/office/drawing/2014/main" id="{94FC2AC1-CB3C-46F1-A965-DB94A1A2CE15}"/>
               </a:ext>
             </a:extLst>
           </p:cNvPr>
@@ -7902,7 +7907,7 @@
           <p:cNvPr id="23" name="grid-h-304">
             <a:extLst xmlns:a="http://schemas.openxmlformats.org/drawingml/2006/main">
               <a:ext uri="{FF2B5EF4-FFF2-40B4-BE49-F238E27FC236}">
-                <a16:creationId xmlns:a16="http://schemas.microsoft.com/office/drawing/2014/main" id="{98F0A885-ADA7-4D90-B459-04416E3BC6CE}"/>
+                <a16:creationId xmlns:a16="http://schemas.microsoft.com/office/drawing/2014/main" id="{12732F3A-C310-4F75-A5D9-0AE7C94B97EE}"/>
               </a:ext>
             </a:extLst>
           </p:cNvPr>
@@ -7933,7 +7938,7 @@
           <p:cNvPr id="24" name="grid-h-368">
             <a:extLst xmlns:a="http://schemas.openxmlformats.org/drawingml/2006/main">
               <a:ext uri="{FF2B5EF4-FFF2-40B4-BE49-F238E27FC236}">
-                <a16:creationId xmlns:a16="http://schemas.microsoft.com/office/drawing/2014/main" id="{6E2FD44C-5B29-44FF-9A13-E6B934E18738}"/>
+                <a16:creationId xmlns:a16="http://schemas.microsoft.com/office/drawing/2014/main" id="{C58FC476-DCEA-497A-A7E2-9B11B9C84561}"/>
               </a:ext>
             </a:extLst>
           </p:cNvPr>
@@ -7964,7 +7969,7 @@
           <p:cNvPr id="25" name="grid-h-432">
             <a:extLst xmlns:a="http://schemas.openxmlformats.org/drawingml/2006/main">
               <a:ext uri="{FF2B5EF4-FFF2-40B4-BE49-F238E27FC236}">
-                <a16:creationId xmlns:a16="http://schemas.microsoft.com/office/drawing/2014/main" id="{2BB87591-39AE-4F65-ABAC-6DF94C7C9F44}"/>
+                <a16:creationId xmlns:a16="http://schemas.microsoft.com/office/drawing/2014/main" id="{E22E7107-7971-4CD6-A33E-70999A7AE511}"/>
               </a:ext>
             </a:extLst>
           </p:cNvPr>
@@ -7995,7 +8000,7 @@
           <p:cNvPr id="26" name="grid-h-496">
             <a:extLst xmlns:a="http://schemas.openxmlformats.org/drawingml/2006/main">
               <a:ext uri="{FF2B5EF4-FFF2-40B4-BE49-F238E27FC236}">
-                <a16:creationId xmlns:a16="http://schemas.microsoft.com/office/drawing/2014/main" id="{F5874A49-0CEC-4B3B-A3C5-8EC0405F43BF}"/>
+                <a16:creationId xmlns:a16="http://schemas.microsoft.com/office/drawing/2014/main" id="{DAB2D1F9-243F-430E-A684-C598BB9048A5}"/>
               </a:ext>
             </a:extLst>
           </p:cNvPr>
@@ -8026,7 +8031,7 @@
           <p:cNvPr id="27" name="grid-h-560">
             <a:extLst xmlns:a="http://schemas.openxmlformats.org/drawingml/2006/main">
               <a:ext uri="{FF2B5EF4-FFF2-40B4-BE49-F238E27FC236}">
-                <a16:creationId xmlns:a16="http://schemas.microsoft.com/office/drawing/2014/main" id="{2F22D1A5-F3D7-42F0-885B-EB07A6A9E277}"/>
+                <a16:creationId xmlns:a16="http://schemas.microsoft.com/office/drawing/2014/main" id="{E682DC54-9E29-43B2-B8D3-13F7A160192A}"/>
               </a:ext>
             </a:extLst>
           </p:cNvPr>
@@ -8057,7 +8062,7 @@
           <p:cNvPr id="28" name="grid-h-624">
             <a:extLst xmlns:a="http://schemas.openxmlformats.org/drawingml/2006/main">
               <a:ext uri="{FF2B5EF4-FFF2-40B4-BE49-F238E27FC236}">
-                <a16:creationId xmlns:a16="http://schemas.microsoft.com/office/drawing/2014/main" id="{4C41C2B4-1C47-49E4-9201-D52BFE3F4B68}"/>
+                <a16:creationId xmlns:a16="http://schemas.microsoft.com/office/drawing/2014/main" id="{5F871D2A-92C5-4699-B99B-B94E70916A48}"/>
               </a:ext>
             </a:extLst>
           </p:cNvPr>
@@ -8088,7 +8093,7 @@
           <p:cNvPr id="29" name="top-rule">
             <a:extLst xmlns:a="http://schemas.openxmlformats.org/drawingml/2006/main">
               <a:ext uri="{FF2B5EF4-FFF2-40B4-BE49-F238E27FC236}">
-                <a16:creationId xmlns:a16="http://schemas.microsoft.com/office/drawing/2014/main" id="{4D4E9F6D-955C-4447-937C-E2E636814236}"/>
+                <a16:creationId xmlns:a16="http://schemas.microsoft.com/office/drawing/2014/main" id="{6F01A290-6823-4265-96FF-D3C5D3D85EEC}"/>
               </a:ext>
             </a:extLst>
           </p:cNvPr>
@@ -8119,7 +8124,7 @@
           <p:cNvPr id="30" name="wordmark">
             <a:extLst xmlns:a="http://schemas.openxmlformats.org/drawingml/2006/main">
               <a:ext uri="{FF2B5EF4-FFF2-40B4-BE49-F238E27FC236}">
-                <a16:creationId xmlns:a16="http://schemas.microsoft.com/office/drawing/2014/main" id="{791AE2E3-02DB-4AEC-AF89-0FB85915C34F}"/>
+                <a16:creationId xmlns:a16="http://schemas.microsoft.com/office/drawing/2014/main" id="{3164A742-1016-41F5-B85D-77162B2CBEA4}"/>
               </a:ext>
             </a:extLst>
           </p:cNvPr>
@@ -8181,7 +8186,7 @@
           <p:cNvPr id="31" name="environment-label">
             <a:extLst xmlns:a="http://schemas.openxmlformats.org/drawingml/2006/main">
               <a:ext uri="{FF2B5EF4-FFF2-40B4-BE49-F238E27FC236}">
-                <a16:creationId xmlns:a16="http://schemas.microsoft.com/office/drawing/2014/main" id="{8D21025A-90E8-409C-B554-D0437580C0FD}"/>
+                <a16:creationId xmlns:a16="http://schemas.microsoft.com/office/drawing/2014/main" id="{B2BC4670-956A-4A00-AF8F-B5676E3E6C0F}"/>
               </a:ext>
             </a:extLst>
           </p:cNvPr>
@@ -8243,7 +8248,7 @@
           <p:cNvPr id="32" name="slide-index">
             <a:extLst xmlns:a="http://schemas.openxmlformats.org/drawingml/2006/main">
               <a:ext uri="{FF2B5EF4-FFF2-40B4-BE49-F238E27FC236}">
-                <a16:creationId xmlns:a16="http://schemas.microsoft.com/office/drawing/2014/main" id="{EFB789DA-D095-46C4-8488-DC867343C842}"/>
+                <a16:creationId xmlns:a16="http://schemas.microsoft.com/office/drawing/2014/main" id="{F661A0FB-086F-4443-8F1D-B4F9BCE93CA2}"/>
               </a:ext>
             </a:extLst>
           </p:cNvPr>
@@ -8305,7 +8310,7 @@
           <p:cNvPr id="33" name="event-footer">
             <a:extLst xmlns:a="http://schemas.openxmlformats.org/drawingml/2006/main">
               <a:ext uri="{FF2B5EF4-FFF2-40B4-BE49-F238E27FC236}">
-                <a16:creationId xmlns:a16="http://schemas.microsoft.com/office/drawing/2014/main" id="{11D67114-D129-4D2A-B0E1-C35F3854DB22}"/>
+                <a16:creationId xmlns:a16="http://schemas.microsoft.com/office/drawing/2014/main" id="{7BF0C3AC-B03C-4B0D-91B9-1B8948922438}"/>
               </a:ext>
             </a:extLst>
           </p:cNvPr>
@@ -8367,7 +8372,7 @@
           <p:cNvPr id="34" name="honesty-footer">
             <a:extLst xmlns:a="http://schemas.openxmlformats.org/drawingml/2006/main">
               <a:ext uri="{FF2B5EF4-FFF2-40B4-BE49-F238E27FC236}">
-                <a16:creationId xmlns:a16="http://schemas.microsoft.com/office/drawing/2014/main" id="{9C13EDD0-908E-4100-A1EC-CE794ED25057}"/>
+                <a16:creationId xmlns:a16="http://schemas.microsoft.com/office/drawing/2014/main" id="{B0101B65-0112-4D3F-A855-6A8660EEC0D9}"/>
               </a:ext>
             </a:extLst>
           </p:cNvPr>
@@ -8429,7 +8434,7 @@
           <p:cNvPr id="35" name="eyebrow">
             <a:extLst xmlns:a="http://schemas.openxmlformats.org/drawingml/2006/main">
               <a:ext uri="{FF2B5EF4-FFF2-40B4-BE49-F238E27FC236}">
-                <a16:creationId xmlns:a16="http://schemas.microsoft.com/office/drawing/2014/main" id="{1D483372-6B7E-49E2-90C0-013AAE4AD50E}"/>
+                <a16:creationId xmlns:a16="http://schemas.microsoft.com/office/drawing/2014/main" id="{21F9C419-49BA-4D87-BE65-1DDE0C85117F}"/>
               </a:ext>
             </a:extLst>
           </p:cNvPr>
@@ -8491,7 +8496,7 @@
           <p:cNvPr id="36" name="slide-title">
             <a:extLst xmlns:a="http://schemas.openxmlformats.org/drawingml/2006/main">
               <a:ext uri="{FF2B5EF4-FFF2-40B4-BE49-F238E27FC236}">
-                <a16:creationId xmlns:a16="http://schemas.microsoft.com/office/drawing/2014/main" id="{6D248E69-726D-42D5-8C02-6683E05BFFE0}"/>
+                <a16:creationId xmlns:a16="http://schemas.microsoft.com/office/drawing/2014/main" id="{A48B931A-3DB5-49CA-85E5-EE38800F76A5}"/>
               </a:ext>
             </a:extLst>
           </p:cNvPr>
@@ -8553,18 +8558,18 @@
           <p:cNvPr id="37" name="registry-source">
             <a:extLst xmlns:a="http://schemas.openxmlformats.org/drawingml/2006/main">
               <a:ext uri="{FF2B5EF4-FFF2-40B4-BE49-F238E27FC236}">
-                <a16:creationId xmlns:a16="http://schemas.microsoft.com/office/drawing/2014/main" id="{1738EF20-56CF-4901-AA32-114B74D5017D}"/>
-              </a:ext>
-            </a:extLst>
-          </p:cNvPr>
-          <p:cNvSpPr>
-            <a:spLocks xmlns:a="http://schemas.openxmlformats.org/drawingml/2006/main" noGrp="1"/>
-          </p:cNvSpPr>
-          <p:nvPr/>
-        </p:nvSpPr>
-        <p:spPr>
-          <a:xfrm xmlns:a="http://schemas.openxmlformats.org/drawingml/2006/main">
-            <a:off x="419100" y="2266950"/>
+                <a16:creationId xmlns:a16="http://schemas.microsoft.com/office/drawing/2014/main" id="{41D1719B-FD9A-49F2-B8D0-9897B84850FA}"/>
+              </a:ext>
+            </a:extLst>
+          </p:cNvPr>
+          <p:cNvSpPr>
+            <a:spLocks xmlns:a="http://schemas.openxmlformats.org/drawingml/2006/main" noGrp="1"/>
+          </p:cNvSpPr>
+          <p:nvPr/>
+        </p:nvSpPr>
+        <p:spPr>
+          <a:xfrm xmlns:a="http://schemas.openxmlformats.org/drawingml/2006/main">
+            <a:off x="419100" y="2190750"/>
             <a:ext cx="6191250" cy="209550"/>
           </a:xfrm>
           <a:prstGeom xmlns:a="http://schemas.openxmlformats.org/drawingml/2006/main" prst="rect">
@@ -8605,7 +8610,7 @@
                 <a:ea typeface="Courier New"/>
                 <a:cs typeface="Courier New"/>
               </a:rPr>
-              <a:t>/EVIDENCE · SOURCE 246d81a · MONAD TESTNET 10143</a:t>
+              <a:t>/EVIDENCE · PROOF 246d81a · RUNTIME 8b1cee8</a:t>
             </a:r>
           </a:p>
         </p:txBody>
@@ -8615,18 +8620,18 @@
           <p:cNvPr id="38" name="registry-address">
             <a:extLst xmlns:a="http://schemas.openxmlformats.org/drawingml/2006/main">
               <a:ext uri="{FF2B5EF4-FFF2-40B4-BE49-F238E27FC236}">
-                <a16:creationId xmlns:a16="http://schemas.microsoft.com/office/drawing/2014/main" id="{BE24F104-16B9-4B40-8FEC-F8DE7E0AA16F}"/>
-              </a:ext>
-            </a:extLst>
-          </p:cNvPr>
-          <p:cNvSpPr>
-            <a:spLocks xmlns:a="http://schemas.openxmlformats.org/drawingml/2006/main" noGrp="1"/>
-          </p:cNvSpPr>
-          <p:nvPr/>
-        </p:nvSpPr>
-        <p:spPr>
-          <a:xfrm xmlns:a="http://schemas.openxmlformats.org/drawingml/2006/main">
-            <a:off x="6724650" y="2266950"/>
+                <a16:creationId xmlns:a16="http://schemas.microsoft.com/office/drawing/2014/main" id="{032E7814-846D-4030-B3E8-5A90EAA3475C}"/>
+              </a:ext>
+            </a:extLst>
+          </p:cNvPr>
+          <p:cNvSpPr>
+            <a:spLocks xmlns:a="http://schemas.openxmlformats.org/drawingml/2006/main" noGrp="1"/>
+          </p:cNvSpPr>
+          <p:nvPr/>
+        </p:nvSpPr>
+        <p:spPr>
+          <a:xfrm xmlns:a="http://schemas.openxmlformats.org/drawingml/2006/main">
+            <a:off x="6724650" y="2190750"/>
             <a:ext cx="5067300" cy="209550"/>
           </a:xfrm>
           <a:prstGeom xmlns:a="http://schemas.openxmlformats.org/drawingml/2006/main" prst="rect">
@@ -8667,17 +8672,79 @@
                 <a:ea typeface="Courier New"/>
                 <a:cs typeface="Courier New"/>
               </a:rPr>
-              <a:t>REGISTRY 0xE1b7…b217 · DEPLOY BLOCK 52198045</a:t>
+              <a:t>MONAD TESTNET 10143 · REGISTRY 0xE1b7…b217</a:t>
             </a:r>
           </a:p>
         </p:txBody>
       </p:sp>
       <p:sp>
         <p:nvSpPr>
-          <p:cNvPr id="39" name="sequence-rail">
-            <a:extLst xmlns:a="http://schemas.openxmlformats.org/drawingml/2006/main">
-              <a:ext uri="{FF2B5EF4-FFF2-40B4-BE49-F238E27FC236}">
-                <a16:creationId xmlns:a16="http://schemas.microsoft.com/office/drawing/2014/main" id="{7B349B6D-4753-489B-BB47-DDC159BD1201}"/>
+          <p:cNvPr id="39" name="registry-verifier">
+            <a:extLst xmlns:a="http://schemas.openxmlformats.org/drawingml/2006/main">
+              <a:ext uri="{FF2B5EF4-FFF2-40B4-BE49-F238E27FC236}">
+                <a16:creationId xmlns:a16="http://schemas.microsoft.com/office/drawing/2014/main" id="{1DB28186-BE97-4031-BBF4-76838DCAB256}"/>
+              </a:ext>
+            </a:extLst>
+          </p:cNvPr>
+          <p:cNvSpPr>
+            <a:spLocks xmlns:a="http://schemas.openxmlformats.org/drawingml/2006/main" noGrp="1"/>
+          </p:cNvSpPr>
+          <p:nvPr/>
+        </p:nvSpPr>
+        <p:spPr>
+          <a:xfrm xmlns:a="http://schemas.openxmlformats.org/drawingml/2006/main">
+            <a:off x="419100" y="2457450"/>
+            <a:ext cx="11391900" cy="190500"/>
+          </a:xfrm>
+          <a:prstGeom xmlns:a="http://schemas.openxmlformats.org/drawingml/2006/main" prst="rect">
+            <a:avLst/>
+          </a:prstGeom>
+          <a:noFill xmlns:a="http://schemas.openxmlformats.org/drawingml/2006/main"/>
+          <a:ln xmlns:a="http://schemas.openxmlformats.org/drawingml/2006/main" w="0">
+            <a:noFill/>
+            <a:prstDash val="solid"/>
+          </a:ln>
+        </p:spPr>
+        <p:txBody>
+          <a:bodyPr xmlns:a="http://schemas.openxmlformats.org/drawingml/2006/main" wrap="square" lIns="0" tIns="0" rIns="0" bIns="0" anchor="t">
+            <a:noAutofit/>
+          </a:bodyPr>
+          <a:lstStyle xmlns:a="http://schemas.openxmlformats.org/drawingml/2006/main"/>
+          <a:p xmlns:a="http://schemas.openxmlformats.org/drawingml/2006/main">
+            <a:pPr algn="l">
+              <a:lnSpc>
+                <a:spcPct val="100000"/>
+              </a:lnSpc>
+              <a:buNone/>
+              <a:defRPr sz="975" b="1">
+                <a:solidFill>
+                  <a:srgbClr val="FF2B79"/>
+                </a:solidFill>
+                <a:latin typeface="Courier New"/>
+                <a:ea typeface="Courier New"/>
+                <a:cs typeface="Courier New"/>
+              </a:defRPr>
+            </a:pPr>
+            <a:r>
+              <a:rPr sz="975" b="1">
+                <a:solidFill>
+                  <a:srgbClr val="FF2B79"/>
+                </a:solidFill>
+                <a:latin typeface="Courier New"/>
+                <a:ea typeface="Courier New"/>
+                <a:cs typeface="Courier New"/>
+              </a:rPr>
+              <a:t>READ-ONLY CHECK  /api/evidence/verify  ·  0 WRITES  ·  0 FINANCIAL AUTH</a:t>
+            </a:r>
+          </a:p>
+        </p:txBody>
+      </p:sp>
+      <p:sp>
+        <p:nvSpPr>
+          <p:cNvPr id="40" name="sequence-rail">
+            <a:extLst xmlns:a="http://schemas.openxmlformats.org/drawingml/2006/main">
+              <a:ext uri="{FF2B5EF4-FFF2-40B4-BE49-F238E27FC236}">
+                <a16:creationId xmlns:a16="http://schemas.microsoft.com/office/drawing/2014/main" id="{28CCA0DD-5444-431B-A379-85BBDF8611F1}"/>
               </a:ext>
             </a:extLst>
           </p:cNvPr>
@@ -8705,10 +8772,10 @@
       </p:sp>
       <p:sp>
         <p:nvSpPr>
-          <p:cNvPr id="40" name="step-node-0">
-            <a:extLst xmlns:a="http://schemas.openxmlformats.org/drawingml/2006/main">
-              <a:ext uri="{FF2B5EF4-FFF2-40B4-BE49-F238E27FC236}">
-                <a16:creationId xmlns:a16="http://schemas.microsoft.com/office/drawing/2014/main" id="{8F85DB2E-8218-437E-948E-2B12F3895D6F}"/>
+          <p:cNvPr id="41" name="step-node-0">
+            <a:extLst xmlns:a="http://schemas.openxmlformats.org/drawingml/2006/main">
+              <a:ext uri="{FF2B5EF4-FFF2-40B4-BE49-F238E27FC236}">
+                <a16:creationId xmlns:a16="http://schemas.microsoft.com/office/drawing/2014/main" id="{2A6A1FD6-BACD-419F-9B79-EC51AB74136F}"/>
               </a:ext>
             </a:extLst>
           </p:cNvPr>
@@ -8738,10 +8805,10 @@
       </p:sp>
       <p:sp>
         <p:nvSpPr>
-          <p:cNvPr id="41" name="step-number-0">
-            <a:extLst xmlns:a="http://schemas.openxmlformats.org/drawingml/2006/main">
-              <a:ext uri="{FF2B5EF4-FFF2-40B4-BE49-F238E27FC236}">
-                <a16:creationId xmlns:a16="http://schemas.microsoft.com/office/drawing/2014/main" id="{2AA2A624-9669-4B78-97DA-B70E59E9C18A}"/>
+          <p:cNvPr id="42" name="step-number-0">
+            <a:extLst xmlns:a="http://schemas.openxmlformats.org/drawingml/2006/main">
+              <a:ext uri="{FF2B5EF4-FFF2-40B4-BE49-F238E27FC236}">
+                <a16:creationId xmlns:a16="http://schemas.microsoft.com/office/drawing/2014/main" id="{3286B4C1-87DC-47B4-AA99-E12ACBFA6388}"/>
               </a:ext>
             </a:extLst>
           </p:cNvPr>
@@ -8800,10 +8867,10 @@
       </p:sp>
       <p:sp>
         <p:nvSpPr>
-          <p:cNvPr id="42" name="step-title-0">
-            <a:extLst xmlns:a="http://schemas.openxmlformats.org/drawingml/2006/main">
-              <a:ext uri="{FF2B5EF4-FFF2-40B4-BE49-F238E27FC236}">
-                <a16:creationId xmlns:a16="http://schemas.microsoft.com/office/drawing/2014/main" id="{4E21F968-8F9F-42E4-835B-2D54E84DE9BD}"/>
+          <p:cNvPr id="43" name="step-title-0">
+            <a:extLst xmlns:a="http://schemas.openxmlformats.org/drawingml/2006/main">
+              <a:ext uri="{FF2B5EF4-FFF2-40B4-BE49-F238E27FC236}">
+                <a16:creationId xmlns:a16="http://schemas.microsoft.com/office/drawing/2014/main" id="{C60EDF76-D458-4221-B0CB-8CF545DD84CD}"/>
               </a:ext>
             </a:extLst>
           </p:cNvPr>
@@ -8862,10 +8929,10 @@
       </p:sp>
       <p:sp>
         <p:nvSpPr>
-          <p:cNvPr id="43" name="step-sub-0">
-            <a:extLst xmlns:a="http://schemas.openxmlformats.org/drawingml/2006/main">
-              <a:ext uri="{FF2B5EF4-FFF2-40B4-BE49-F238E27FC236}">
-                <a16:creationId xmlns:a16="http://schemas.microsoft.com/office/drawing/2014/main" id="{B1854A60-54A3-4699-9B51-57AC3FAB3C73}"/>
+          <p:cNvPr id="44" name="step-sub-0">
+            <a:extLst xmlns:a="http://schemas.openxmlformats.org/drawingml/2006/main">
+              <a:ext uri="{FF2B5EF4-FFF2-40B4-BE49-F238E27FC236}">
+                <a16:creationId xmlns:a16="http://schemas.microsoft.com/office/drawing/2014/main" id="{AF45172D-9400-44AC-BF94-8A98CFB358FC}"/>
               </a:ext>
             </a:extLst>
           </p:cNvPr>
@@ -8924,10 +8991,10 @@
       </p:sp>
       <p:sp>
         <p:nvSpPr>
-          <p:cNvPr id="44" name="step-node-1">
-            <a:extLst xmlns:a="http://schemas.openxmlformats.org/drawingml/2006/main">
-              <a:ext uri="{FF2B5EF4-FFF2-40B4-BE49-F238E27FC236}">
-                <a16:creationId xmlns:a16="http://schemas.microsoft.com/office/drawing/2014/main" id="{9A680A2C-1D5A-4756-9E38-85A064422BA1}"/>
+          <p:cNvPr id="45" name="step-node-1">
+            <a:extLst xmlns:a="http://schemas.openxmlformats.org/drawingml/2006/main">
+              <a:ext uri="{FF2B5EF4-FFF2-40B4-BE49-F238E27FC236}">
+                <a16:creationId xmlns:a16="http://schemas.microsoft.com/office/drawing/2014/main" id="{06681404-A9ED-4CD8-8297-284F052C54B7}"/>
               </a:ext>
             </a:extLst>
           </p:cNvPr>
@@ -8957,10 +9024,10 @@
       </p:sp>
       <p:sp>
         <p:nvSpPr>
-          <p:cNvPr id="45" name="step-number-1">
-            <a:extLst xmlns:a="http://schemas.openxmlformats.org/drawingml/2006/main">
-              <a:ext uri="{FF2B5EF4-FFF2-40B4-BE49-F238E27FC236}">
-                <a16:creationId xmlns:a16="http://schemas.microsoft.com/office/drawing/2014/main" id="{3784D419-C60B-40FD-A66E-F28F66D6EBAF}"/>
+          <p:cNvPr id="46" name="step-number-1">
+            <a:extLst xmlns:a="http://schemas.openxmlformats.org/drawingml/2006/main">
+              <a:ext uri="{FF2B5EF4-FFF2-40B4-BE49-F238E27FC236}">
+                <a16:creationId xmlns:a16="http://schemas.microsoft.com/office/drawing/2014/main" id="{99CF7BEC-3AF6-49C9-9D57-41718107F0B1}"/>
               </a:ext>
             </a:extLst>
           </p:cNvPr>
@@ -9019,10 +9086,10 @@
       </p:sp>
       <p:sp>
         <p:nvSpPr>
-          <p:cNvPr id="46" name="step-title-1">
-            <a:extLst xmlns:a="http://schemas.openxmlformats.org/drawingml/2006/main">
-              <a:ext uri="{FF2B5EF4-FFF2-40B4-BE49-F238E27FC236}">
-                <a16:creationId xmlns:a16="http://schemas.microsoft.com/office/drawing/2014/main" id="{3841B5DF-CC6E-4355-B63F-56B607635B99}"/>
+          <p:cNvPr id="47" name="step-title-1">
+            <a:extLst xmlns:a="http://schemas.openxmlformats.org/drawingml/2006/main">
+              <a:ext uri="{FF2B5EF4-FFF2-40B4-BE49-F238E27FC236}">
+                <a16:creationId xmlns:a16="http://schemas.microsoft.com/office/drawing/2014/main" id="{A96CF8E4-09BF-4E89-AF65-C09A0EBA30CE}"/>
               </a:ext>
             </a:extLst>
           </p:cNvPr>
@@ -9081,10 +9148,10 @@
       </p:sp>
       <p:sp>
         <p:nvSpPr>
-          <p:cNvPr id="47" name="step-sub-1">
-            <a:extLst xmlns:a="http://schemas.openxmlformats.org/drawingml/2006/main">
-              <a:ext uri="{FF2B5EF4-FFF2-40B4-BE49-F238E27FC236}">
-                <a16:creationId xmlns:a16="http://schemas.microsoft.com/office/drawing/2014/main" id="{1D7CC96B-B346-4753-9584-299A5A1CB761}"/>
+          <p:cNvPr id="48" name="step-sub-1">
+            <a:extLst xmlns:a="http://schemas.openxmlformats.org/drawingml/2006/main">
+              <a:ext uri="{FF2B5EF4-FFF2-40B4-BE49-F238E27FC236}">
+                <a16:creationId xmlns:a16="http://schemas.microsoft.com/office/drawing/2014/main" id="{8BC66B76-54F8-420F-85A9-96ED1B90901B}"/>
               </a:ext>
             </a:extLst>
           </p:cNvPr>
@@ -9143,10 +9210,10 @@
       </p:sp>
       <p:sp>
         <p:nvSpPr>
-          <p:cNvPr id="48" name="step-node-2">
-            <a:extLst xmlns:a="http://schemas.openxmlformats.org/drawingml/2006/main">
-              <a:ext uri="{FF2B5EF4-FFF2-40B4-BE49-F238E27FC236}">
-                <a16:creationId xmlns:a16="http://schemas.microsoft.com/office/drawing/2014/main" id="{C41084BE-3B25-4364-BA99-19369CADD614}"/>
+          <p:cNvPr id="49" name="step-node-2">
+            <a:extLst xmlns:a="http://schemas.openxmlformats.org/drawingml/2006/main">
+              <a:ext uri="{FF2B5EF4-FFF2-40B4-BE49-F238E27FC236}">
+                <a16:creationId xmlns:a16="http://schemas.microsoft.com/office/drawing/2014/main" id="{E2D8EEF7-673A-4D81-A9A3-70499F272E30}"/>
               </a:ext>
             </a:extLst>
           </p:cNvPr>
@@ -9176,10 +9243,10 @@
       </p:sp>
       <p:sp>
         <p:nvSpPr>
-          <p:cNvPr id="49" name="step-number-2">
-            <a:extLst xmlns:a="http://schemas.openxmlformats.org/drawingml/2006/main">
-              <a:ext uri="{FF2B5EF4-FFF2-40B4-BE49-F238E27FC236}">
-                <a16:creationId xmlns:a16="http://schemas.microsoft.com/office/drawing/2014/main" id="{5EE14929-86C3-4564-B57A-86459F829469}"/>
+          <p:cNvPr id="50" name="step-number-2">
+            <a:extLst xmlns:a="http://schemas.openxmlformats.org/drawingml/2006/main">
+              <a:ext uri="{FF2B5EF4-FFF2-40B4-BE49-F238E27FC236}">
+                <a16:creationId xmlns:a16="http://schemas.microsoft.com/office/drawing/2014/main" id="{1EBCA108-A10B-4D63-9C61-22087BF0B557}"/>
               </a:ext>
             </a:extLst>
           </p:cNvPr>
@@ -9238,10 +9305,10 @@
       </p:sp>
       <p:sp>
         <p:nvSpPr>
-          <p:cNvPr id="50" name="step-title-2">
-            <a:extLst xmlns:a="http://schemas.openxmlformats.org/drawingml/2006/main">
-              <a:ext uri="{FF2B5EF4-FFF2-40B4-BE49-F238E27FC236}">
-                <a16:creationId xmlns:a16="http://schemas.microsoft.com/office/drawing/2014/main" id="{28D168D0-0015-4716-8BAF-61C42B3B9F33}"/>
+          <p:cNvPr id="51" name="step-title-2">
+            <a:extLst xmlns:a="http://schemas.openxmlformats.org/drawingml/2006/main">
+              <a:ext uri="{FF2B5EF4-FFF2-40B4-BE49-F238E27FC236}">
+                <a16:creationId xmlns:a16="http://schemas.microsoft.com/office/drawing/2014/main" id="{836E7196-EA20-4745-A320-C78ED17DBCED}"/>
               </a:ext>
             </a:extLst>
           </p:cNvPr>
@@ -9300,10 +9367,10 @@
       </p:sp>
       <p:sp>
         <p:nvSpPr>
-          <p:cNvPr id="51" name="step-sub-2">
-            <a:extLst xmlns:a="http://schemas.openxmlformats.org/drawingml/2006/main">
-              <a:ext uri="{FF2B5EF4-FFF2-40B4-BE49-F238E27FC236}">
-                <a16:creationId xmlns:a16="http://schemas.microsoft.com/office/drawing/2014/main" id="{7E68092B-1441-40A2-B8B4-80240890152E}"/>
+          <p:cNvPr id="52" name="step-sub-2">
+            <a:extLst xmlns:a="http://schemas.openxmlformats.org/drawingml/2006/main">
+              <a:ext uri="{FF2B5EF4-FFF2-40B4-BE49-F238E27FC236}">
+                <a16:creationId xmlns:a16="http://schemas.microsoft.com/office/drawing/2014/main" id="{94479209-2DB5-4166-83E6-003D57A4A5B8}"/>
               </a:ext>
             </a:extLst>
           </p:cNvPr>
@@ -9362,10 +9429,10 @@
       </p:sp>
       <p:sp>
         <p:nvSpPr>
-          <p:cNvPr id="52" name="step-node-3">
-            <a:extLst xmlns:a="http://schemas.openxmlformats.org/drawingml/2006/main">
-              <a:ext uri="{FF2B5EF4-FFF2-40B4-BE49-F238E27FC236}">
-                <a16:creationId xmlns:a16="http://schemas.microsoft.com/office/drawing/2014/main" id="{E4091DED-E396-41AE-942A-0272D62A3600}"/>
+          <p:cNvPr id="53" name="step-node-3">
+            <a:extLst xmlns:a="http://schemas.openxmlformats.org/drawingml/2006/main">
+              <a:ext uri="{FF2B5EF4-FFF2-40B4-BE49-F238E27FC236}">
+                <a16:creationId xmlns:a16="http://schemas.microsoft.com/office/drawing/2014/main" id="{D61DD002-E0D0-4A94-85E2-FFD53A8373A7}"/>
               </a:ext>
             </a:extLst>
           </p:cNvPr>
@@ -9395,10 +9462,10 @@
       </p:sp>
       <p:sp>
         <p:nvSpPr>
-          <p:cNvPr id="53" name="step-number-3">
-            <a:extLst xmlns:a="http://schemas.openxmlformats.org/drawingml/2006/main">
-              <a:ext uri="{FF2B5EF4-FFF2-40B4-BE49-F238E27FC236}">
-                <a16:creationId xmlns:a16="http://schemas.microsoft.com/office/drawing/2014/main" id="{3C61F244-EF0C-4730-8E5B-5C5B25A06A7A}"/>
+          <p:cNvPr id="54" name="step-number-3">
+            <a:extLst xmlns:a="http://schemas.openxmlformats.org/drawingml/2006/main">
+              <a:ext uri="{FF2B5EF4-FFF2-40B4-BE49-F238E27FC236}">
+                <a16:creationId xmlns:a16="http://schemas.microsoft.com/office/drawing/2014/main" id="{2A6E92D2-8249-4C20-8D4C-CD2BB383C42B}"/>
               </a:ext>
             </a:extLst>
           </p:cNvPr>
@@ -9457,10 +9524,10 @@
       </p:sp>
       <p:sp>
         <p:nvSpPr>
-          <p:cNvPr id="54" name="step-title-3">
-            <a:extLst xmlns:a="http://schemas.openxmlformats.org/drawingml/2006/main">
-              <a:ext uri="{FF2B5EF4-FFF2-40B4-BE49-F238E27FC236}">
-                <a16:creationId xmlns:a16="http://schemas.microsoft.com/office/drawing/2014/main" id="{3173BC1F-6D3B-40E6-ABBA-C54F17477F45}"/>
+          <p:cNvPr id="55" name="step-title-3">
+            <a:extLst xmlns:a="http://schemas.openxmlformats.org/drawingml/2006/main">
+              <a:ext uri="{FF2B5EF4-FFF2-40B4-BE49-F238E27FC236}">
+                <a16:creationId xmlns:a16="http://schemas.microsoft.com/office/drawing/2014/main" id="{7E83C155-DF85-462F-ADDA-B97056168C0C}"/>
               </a:ext>
             </a:extLst>
           </p:cNvPr>
@@ -9519,10 +9586,10 @@
       </p:sp>
       <p:sp>
         <p:nvSpPr>
-          <p:cNvPr id="55" name="step-sub-3">
-            <a:extLst xmlns:a="http://schemas.openxmlformats.org/drawingml/2006/main">
-              <a:ext uri="{FF2B5EF4-FFF2-40B4-BE49-F238E27FC236}">
-                <a16:creationId xmlns:a16="http://schemas.microsoft.com/office/drawing/2014/main" id="{01A4DA61-4E34-4A49-9642-986F8A34838B}"/>
+          <p:cNvPr id="56" name="step-sub-3">
+            <a:extLst xmlns:a="http://schemas.openxmlformats.org/drawingml/2006/main">
+              <a:ext uri="{FF2B5EF4-FFF2-40B4-BE49-F238E27FC236}">
+                <a16:creationId xmlns:a16="http://schemas.microsoft.com/office/drawing/2014/main" id="{CDCD9247-DDBC-48F8-97D5-0679CCC77FBC}"/>
               </a:ext>
             </a:extLst>
           </p:cNvPr>
@@ -9581,10 +9648,10 @@
       </p:sp>
       <p:sp>
         <p:nvSpPr>
-          <p:cNvPr id="56" name="commit-bracket-tl-h">
-            <a:extLst xmlns:a="http://schemas.openxmlformats.org/drawingml/2006/main">
-              <a:ext uri="{FF2B5EF4-FFF2-40B4-BE49-F238E27FC236}">
-                <a16:creationId xmlns:a16="http://schemas.microsoft.com/office/drawing/2014/main" id="{198D281F-1549-4965-886C-9E7A5B34EB50}"/>
+          <p:cNvPr id="57" name="commit-bracket-tl-h">
+            <a:extLst xmlns:a="http://schemas.openxmlformats.org/drawingml/2006/main">
+              <a:ext uri="{FF2B5EF4-FFF2-40B4-BE49-F238E27FC236}">
+                <a16:creationId xmlns:a16="http://schemas.microsoft.com/office/drawing/2014/main" id="{0D1F1286-2406-42D6-BA58-A2B97B43B63D}"/>
               </a:ext>
             </a:extLst>
           </p:cNvPr>
@@ -9612,10 +9679,10 @@
       </p:sp>
       <p:sp>
         <p:nvSpPr>
-          <p:cNvPr id="57" name="commit-bracket-tl-v">
-            <a:extLst xmlns:a="http://schemas.openxmlformats.org/drawingml/2006/main">
-              <a:ext uri="{FF2B5EF4-FFF2-40B4-BE49-F238E27FC236}">
-                <a16:creationId xmlns:a16="http://schemas.microsoft.com/office/drawing/2014/main" id="{6B8AF674-BF45-469A-AF77-9A73226AFCF1}"/>
+          <p:cNvPr id="58" name="commit-bracket-tl-v">
+            <a:extLst xmlns:a="http://schemas.openxmlformats.org/drawingml/2006/main">
+              <a:ext uri="{FF2B5EF4-FFF2-40B4-BE49-F238E27FC236}">
+                <a16:creationId xmlns:a16="http://schemas.microsoft.com/office/drawing/2014/main" id="{EF9426D9-BC69-4743-B787-B5F7EB9DBAEC}"/>
               </a:ext>
             </a:extLst>
           </p:cNvPr>
@@ -9643,10 +9710,10 @@
       </p:sp>
       <p:sp>
         <p:nvSpPr>
-          <p:cNvPr id="58" name="commit-bracket-tr-h">
-            <a:extLst xmlns:a="http://schemas.openxmlformats.org/drawingml/2006/main">
-              <a:ext uri="{FF2B5EF4-FFF2-40B4-BE49-F238E27FC236}">
-                <a16:creationId xmlns:a16="http://schemas.microsoft.com/office/drawing/2014/main" id="{5B123E07-3959-4479-8AE3-B49FD3E10D41}"/>
+          <p:cNvPr id="59" name="commit-bracket-tr-h">
+            <a:extLst xmlns:a="http://schemas.openxmlformats.org/drawingml/2006/main">
+              <a:ext uri="{FF2B5EF4-FFF2-40B4-BE49-F238E27FC236}">
+                <a16:creationId xmlns:a16="http://schemas.microsoft.com/office/drawing/2014/main" id="{A747974B-BE8E-42BD-8BBB-ACBBA48BE1F1}"/>
               </a:ext>
             </a:extLst>
           </p:cNvPr>
@@ -9674,10 +9741,10 @@
       </p:sp>
       <p:sp>
         <p:nvSpPr>
-          <p:cNvPr id="59" name="commit-bracket-tr-v">
-            <a:extLst xmlns:a="http://schemas.openxmlformats.org/drawingml/2006/main">
-              <a:ext uri="{FF2B5EF4-FFF2-40B4-BE49-F238E27FC236}">
-                <a16:creationId xmlns:a16="http://schemas.microsoft.com/office/drawing/2014/main" id="{C8CB8066-2D9B-430B-A6F6-64367DF4A3A9}"/>
+          <p:cNvPr id="60" name="commit-bracket-tr-v">
+            <a:extLst xmlns:a="http://schemas.openxmlformats.org/drawingml/2006/main">
+              <a:ext uri="{FF2B5EF4-FFF2-40B4-BE49-F238E27FC236}">
+                <a16:creationId xmlns:a16="http://schemas.microsoft.com/office/drawing/2014/main" id="{C0C95B3D-D508-4DF7-A6A0-02B8840D8674}"/>
               </a:ext>
             </a:extLst>
           </p:cNvPr>
@@ -9705,10 +9772,10 @@
       </p:sp>
       <p:sp>
         <p:nvSpPr>
-          <p:cNvPr id="60" name="commit-bracket-bl-h">
-            <a:extLst xmlns:a="http://schemas.openxmlformats.org/drawingml/2006/main">
-              <a:ext uri="{FF2B5EF4-FFF2-40B4-BE49-F238E27FC236}">
-                <a16:creationId xmlns:a16="http://schemas.microsoft.com/office/drawing/2014/main" id="{A6BC37A1-AEF3-4F73-BD65-1CE021FD77B1}"/>
+          <p:cNvPr id="61" name="commit-bracket-bl-h">
+            <a:extLst xmlns:a="http://schemas.openxmlformats.org/drawingml/2006/main">
+              <a:ext uri="{FF2B5EF4-FFF2-40B4-BE49-F238E27FC236}">
+                <a16:creationId xmlns:a16="http://schemas.microsoft.com/office/drawing/2014/main" id="{EC16AE5E-4FD8-4286-91EB-0092A76A560B}"/>
               </a:ext>
             </a:extLst>
           </p:cNvPr>
@@ -9736,10 +9803,10 @@
       </p:sp>
       <p:sp>
         <p:nvSpPr>
-          <p:cNvPr id="61" name="commit-bracket-bl-v">
-            <a:extLst xmlns:a="http://schemas.openxmlformats.org/drawingml/2006/main">
-              <a:ext uri="{FF2B5EF4-FFF2-40B4-BE49-F238E27FC236}">
-                <a16:creationId xmlns:a16="http://schemas.microsoft.com/office/drawing/2014/main" id="{29F4490B-67C7-414E-90EE-FAC74955C566}"/>
+          <p:cNvPr id="62" name="commit-bracket-bl-v">
+            <a:extLst xmlns:a="http://schemas.openxmlformats.org/drawingml/2006/main">
+              <a:ext uri="{FF2B5EF4-FFF2-40B4-BE49-F238E27FC236}">
+                <a16:creationId xmlns:a16="http://schemas.microsoft.com/office/drawing/2014/main" id="{E54151BD-EE94-4D96-933F-5AD61E347E59}"/>
               </a:ext>
             </a:extLst>
           </p:cNvPr>
@@ -9767,10 +9834,10 @@
       </p:sp>
       <p:sp>
         <p:nvSpPr>
-          <p:cNvPr id="62" name="commit-bracket-br-h">
-            <a:extLst xmlns:a="http://schemas.openxmlformats.org/drawingml/2006/main">
-              <a:ext uri="{FF2B5EF4-FFF2-40B4-BE49-F238E27FC236}">
-                <a16:creationId xmlns:a16="http://schemas.microsoft.com/office/drawing/2014/main" id="{30261907-3CD4-4401-A9E1-00D82CD1917E}"/>
+          <p:cNvPr id="63" name="commit-bracket-br-h">
+            <a:extLst xmlns:a="http://schemas.openxmlformats.org/drawingml/2006/main">
+              <a:ext uri="{FF2B5EF4-FFF2-40B4-BE49-F238E27FC236}">
+                <a16:creationId xmlns:a16="http://schemas.microsoft.com/office/drawing/2014/main" id="{3B789163-C587-4977-8838-39221ED4C0A4}"/>
               </a:ext>
             </a:extLst>
           </p:cNvPr>
@@ -9798,10 +9865,10 @@
       </p:sp>
       <p:sp>
         <p:nvSpPr>
-          <p:cNvPr id="63" name="commit-bracket-br-v">
-            <a:extLst xmlns:a="http://schemas.openxmlformats.org/drawingml/2006/main">
-              <a:ext uri="{FF2B5EF4-FFF2-40B4-BE49-F238E27FC236}">
-                <a16:creationId xmlns:a16="http://schemas.microsoft.com/office/drawing/2014/main" id="{230E14A7-E7DF-48A6-82E3-ED54F6BCC1D9}"/>
+          <p:cNvPr id="64" name="commit-bracket-br-v">
+            <a:extLst xmlns:a="http://schemas.openxmlformats.org/drawingml/2006/main">
+              <a:ext uri="{FF2B5EF4-FFF2-40B4-BE49-F238E27FC236}">
+                <a16:creationId xmlns:a16="http://schemas.microsoft.com/office/drawing/2014/main" id="{6250D2A4-7A55-4E2A-9C3A-51BFAD7CF2AF}"/>
               </a:ext>
             </a:extLst>
           </p:cNvPr>
@@ -9829,10 +9896,10 @@
       </p:sp>
       <p:sp>
         <p:nvSpPr>
-          <p:cNvPr id="64" name="commit-proof">
-            <a:extLst xmlns:a="http://schemas.openxmlformats.org/drawingml/2006/main">
-              <a:ext uri="{FF2B5EF4-FFF2-40B4-BE49-F238E27FC236}">
-                <a16:creationId xmlns:a16="http://schemas.microsoft.com/office/drawing/2014/main" id="{5E155E2C-F567-4BE4-A6FB-BCF571AB0DBE}"/>
+          <p:cNvPr id="65" name="commit-proof">
+            <a:extLst xmlns:a="http://schemas.openxmlformats.org/drawingml/2006/main">
+              <a:ext uri="{FF2B5EF4-FFF2-40B4-BE49-F238E27FC236}">
+                <a16:creationId xmlns:a16="http://schemas.microsoft.com/office/drawing/2014/main" id="{884C7919-0C73-475D-876D-82CD3BC99221}"/>
               </a:ext>
             </a:extLst>
           </p:cNvPr>
@@ -9891,10 +9958,10 @@
       </p:sp>
       <p:sp>
         <p:nvSpPr>
-          <p:cNvPr id="65" name="accepted-offer">
-            <a:extLst xmlns:a="http://schemas.openxmlformats.org/drawingml/2006/main">
-              <a:ext uri="{FF2B5EF4-FFF2-40B4-BE49-F238E27FC236}">
-                <a16:creationId xmlns:a16="http://schemas.microsoft.com/office/drawing/2014/main" id="{8D147AAA-EA33-43A0-977C-9B9A0672EF3F}"/>
+          <p:cNvPr id="66" name="accepted-offer">
+            <a:extLst xmlns:a="http://schemas.openxmlformats.org/drawingml/2006/main">
+              <a:ext uri="{FF2B5EF4-FFF2-40B4-BE49-F238E27FC236}">
+                <a16:creationId xmlns:a16="http://schemas.microsoft.com/office/drawing/2014/main" id="{6B809783-6190-4F08-9160-C7FF1A346BEF}"/>
               </a:ext>
             </a:extLst>
           </p:cNvPr>
@@ -9953,10 +10020,10 @@
       </p:sp>
       <p:sp>
         <p:nvSpPr>
-          <p:cNvPr id="66" name="rain-hash">
-            <a:extLst xmlns:a="http://schemas.openxmlformats.org/drawingml/2006/main">
-              <a:ext uri="{FF2B5EF4-FFF2-40B4-BE49-F238E27FC236}">
-                <a16:creationId xmlns:a16="http://schemas.microsoft.com/office/drawing/2014/main" id="{3ADF142A-0A41-4748-AB76-CBAE0633F366}"/>
+          <p:cNvPr id="67" name="rain-hash">
+            <a:extLst xmlns:a="http://schemas.openxmlformats.org/drawingml/2006/main">
+              <a:ext uri="{FF2B5EF4-FFF2-40B4-BE49-F238E27FC236}">
+                <a16:creationId xmlns:a16="http://schemas.microsoft.com/office/drawing/2014/main" id="{5CAD590B-DD24-44EC-A8E0-F411168E07DA}"/>
               </a:ext>
             </a:extLst>
           </p:cNvPr>
@@ -10015,10 +10082,10 @@
       </p:sp>
       <p:sp>
         <p:nvSpPr>
-          <p:cNvPr id="67" name="registry-boundary-bg">
-            <a:extLst xmlns:a="http://schemas.openxmlformats.org/drawingml/2006/main">
-              <a:ext uri="{FF2B5EF4-FFF2-40B4-BE49-F238E27FC236}">
-                <a16:creationId xmlns:a16="http://schemas.microsoft.com/office/drawing/2014/main" id="{851B834A-55E3-4865-BF0B-F98E309EC1CD}"/>
+          <p:cNvPr id="68" name="registry-boundary-bg">
+            <a:extLst xmlns:a="http://schemas.openxmlformats.org/drawingml/2006/main">
+              <a:ext uri="{FF2B5EF4-FFF2-40B4-BE49-F238E27FC236}">
+                <a16:creationId xmlns:a16="http://schemas.microsoft.com/office/drawing/2014/main" id="{920FD9CD-BEB0-4F37-9572-A13FEF311562}"/>
               </a:ext>
             </a:extLst>
           </p:cNvPr>
@@ -10048,10 +10115,10 @@
       </p:sp>
       <p:sp>
         <p:nvSpPr>
-          <p:cNvPr id="68" name="registry-proof-label">
-            <a:extLst xmlns:a="http://schemas.openxmlformats.org/drawingml/2006/main">
-              <a:ext uri="{FF2B5EF4-FFF2-40B4-BE49-F238E27FC236}">
-                <a16:creationId xmlns:a16="http://schemas.microsoft.com/office/drawing/2014/main" id="{69CFCECD-AD62-4677-B651-10428270CFDC}"/>
+          <p:cNvPr id="69" name="registry-proof-label">
+            <a:extLst xmlns:a="http://schemas.openxmlformats.org/drawingml/2006/main">
+              <a:ext uri="{FF2B5EF4-FFF2-40B4-BE49-F238E27FC236}">
+                <a16:creationId xmlns:a16="http://schemas.microsoft.com/office/drawing/2014/main" id="{F6346DC9-9BF8-4476-AC5E-D6EA0B0DCF30}"/>
               </a:ext>
             </a:extLst>
           </p:cNvPr>
@@ -10063,7 +10130,7 @@
         <p:spPr>
           <a:xfrm xmlns:a="http://schemas.openxmlformats.org/drawingml/2006/main">
             <a:off x="590550" y="5705475"/>
-            <a:ext cx="4000500" cy="190500"/>
+            <a:ext cx="4572000" cy="190500"/>
           </a:xfrm>
           <a:prstGeom xmlns:a="http://schemas.openxmlformats.org/drawingml/2006/main" prst="rect">
             <a:avLst/>
@@ -10085,7 +10152,7 @@
                 <a:spcPct val="100000"/>
               </a:lnSpc>
               <a:buNone/>
-              <a:defRPr sz="1050" b="1">
+              <a:defRPr sz="975" b="1">
                 <a:solidFill>
                   <a:srgbClr val="D3D1C8"/>
                 </a:solidFill>
@@ -10095,7 +10162,7 @@
               </a:defRPr>
             </a:pPr>
             <a:r>
-              <a:rPr sz="1050" b="1">
+              <a:rPr sz="975" b="1">
                 <a:solidFill>
                   <a:srgbClr val="D3D1C8"/>
                 </a:solidFill>
@@ -10103,29 +10170,29 @@
                 <a:ea typeface="Courier New"/>
                 <a:cs typeface="Courier New"/>
               </a:rPr>
-              <a:t>FINALIZED OPERATOR-ATTESTED ORDERING</a:t>
+              <a:t>CURRENT-CHAIN READS · FINALIZED OPERATOR CLAIMS</a:t>
             </a:r>
           </a:p>
         </p:txBody>
       </p:sp>
       <p:sp>
         <p:nvSpPr>
-          <p:cNvPr id="69" name="registry-boundary">
-            <a:extLst xmlns:a="http://schemas.openxmlformats.org/drawingml/2006/main">
-              <a:ext uri="{FF2B5EF4-FFF2-40B4-BE49-F238E27FC236}">
-                <a16:creationId xmlns:a16="http://schemas.microsoft.com/office/drawing/2014/main" id="{AB97A762-0431-42F9-9C35-09ABDD601ED7}"/>
-              </a:ext>
-            </a:extLst>
-          </p:cNvPr>
-          <p:cNvSpPr>
-            <a:spLocks xmlns:a="http://schemas.openxmlformats.org/drawingml/2006/main" noGrp="1"/>
-          </p:cNvSpPr>
-          <p:nvPr/>
-        </p:nvSpPr>
-        <p:spPr>
-          <a:xfrm xmlns:a="http://schemas.openxmlformats.org/drawingml/2006/main">
-            <a:off x="4762500" y="5705475"/>
-            <a:ext cx="6819900" cy="190500"/>
+          <p:cNvPr id="70" name="registry-boundary">
+            <a:extLst xmlns:a="http://schemas.openxmlformats.org/drawingml/2006/main">
+              <a:ext uri="{FF2B5EF4-FFF2-40B4-BE49-F238E27FC236}">
+                <a16:creationId xmlns:a16="http://schemas.microsoft.com/office/drawing/2014/main" id="{0B101451-BC20-45CE-A98F-D8347621AFD3}"/>
+              </a:ext>
+            </a:extLst>
+          </p:cNvPr>
+          <p:cNvSpPr>
+            <a:spLocks xmlns:a="http://schemas.openxmlformats.org/drawingml/2006/main" noGrp="1"/>
+          </p:cNvSpPr>
+          <p:nvPr/>
+        </p:nvSpPr>
+        <p:spPr>
+          <a:xfrm xmlns:a="http://schemas.openxmlformats.org/drawingml/2006/main">
+            <a:off x="5314950" y="5705475"/>
+            <a:ext cx="6267450" cy="190500"/>
           </a:xfrm>
           <a:prstGeom xmlns:a="http://schemas.openxmlformats.org/drawingml/2006/main" prst="rect">
             <a:avLst/>
@@ -10165,7 +10232,7 @@
                 <a:ea typeface="Courier New"/>
                 <a:cs typeface="Courier New"/>
               </a:rPr>
-              <a:t>NOT CUSTODY · NOT INDEPENDENT RAIN VERIFICATION · NOT SELLER VISIBILITY</a:t>
+              <a:t>NOT CUSTODY · NOT A RAIN ORACLE · NOT SELLER VISIBILITY</a:t>
             </a:r>
           </a:p>
         </p:txBody>
@@ -10173,7 +10240,7 @@
     </p:spTree>
     <p:extLst>
       <p:ext uri="{BB962C8B-B14F-4D97-AF65-F5344CB8AC3E}">
-        <p14:creationId xmlns:p14="http://schemas.microsoft.com/office/powerpoint/2010/main" val="1957757994"/>
+        <p14:creationId xmlns:p14="http://schemas.microsoft.com/office/powerpoint/2010/main" val="1910766590"/>
       </p:ext>
     </p:extLst>
   </p:cSld>
@@ -10204,7 +10271,7 @@
           <p:cNvPr id="71" name="grid-v-40">
             <a:extLst xmlns:a="http://schemas.openxmlformats.org/drawingml/2006/main">
               <a:ext uri="{FF2B5EF4-FFF2-40B4-BE49-F238E27FC236}">
-                <a16:creationId xmlns:a16="http://schemas.microsoft.com/office/drawing/2014/main" id="{73902D8B-5E9D-4224-BED8-31FF477AA8D6}"/>
+                <a16:creationId xmlns:a16="http://schemas.microsoft.com/office/drawing/2014/main" id="{0F282B68-6026-4320-AD5B-B19F12D19C91}"/>
               </a:ext>
             </a:extLst>
           </p:cNvPr>
@@ -10235,7 +10302,7 @@
           <p:cNvPr id="2" name="grid-v-104">
             <a:extLst xmlns:a="http://schemas.openxmlformats.org/drawingml/2006/main">
               <a:ext uri="{FF2B5EF4-FFF2-40B4-BE49-F238E27FC236}">
-                <a16:creationId xmlns:a16="http://schemas.microsoft.com/office/drawing/2014/main" id="{78B8A3EC-A03E-48AD-A968-97748EBBE14E}"/>
+                <a16:creationId xmlns:a16="http://schemas.microsoft.com/office/drawing/2014/main" id="{AEF2E912-A117-448D-8E84-BC3FB3DA02F4}"/>
               </a:ext>
             </a:extLst>
           </p:cNvPr>
@@ -10266,7 +10333,7 @@
           <p:cNvPr id="3" name="grid-v-168">
             <a:extLst xmlns:a="http://schemas.openxmlformats.org/drawingml/2006/main">
               <a:ext uri="{FF2B5EF4-FFF2-40B4-BE49-F238E27FC236}">
-                <a16:creationId xmlns:a16="http://schemas.microsoft.com/office/drawing/2014/main" id="{C05A2B46-5D09-44B3-9E37-668AE7742B84}"/>
+                <a16:creationId xmlns:a16="http://schemas.microsoft.com/office/drawing/2014/main" id="{6D89343F-CE2D-439C-BD4A-B5102341FF1D}"/>
               </a:ext>
             </a:extLst>
           </p:cNvPr>
@@ -10297,7 +10364,7 @@
           <p:cNvPr id="4" name="grid-v-232">
             <a:extLst xmlns:a="http://schemas.openxmlformats.org/drawingml/2006/main">
               <a:ext uri="{FF2B5EF4-FFF2-40B4-BE49-F238E27FC236}">
-                <a16:creationId xmlns:a16="http://schemas.microsoft.com/office/drawing/2014/main" id="{4D08FF4D-8A27-4068-BA37-553C36916973}"/>
+                <a16:creationId xmlns:a16="http://schemas.microsoft.com/office/drawing/2014/main" id="{CFD76E2E-EC97-46B5-893F-BE45192A8E3D}"/>
               </a:ext>
             </a:extLst>
           </p:cNvPr>
@@ -10328,7 +10395,7 @@
           <p:cNvPr id="5" name="grid-v-296">
             <a:extLst xmlns:a="http://schemas.openxmlformats.org/drawingml/2006/main">
               <a:ext uri="{FF2B5EF4-FFF2-40B4-BE49-F238E27FC236}">
-                <a16:creationId xmlns:a16="http://schemas.microsoft.com/office/drawing/2014/main" id="{155BD7A7-448C-40F5-A395-D0605161FCFE}"/>
+                <a16:creationId xmlns:a16="http://schemas.microsoft.com/office/drawing/2014/main" id="{AC79CE5B-DD89-4A52-87A4-6E847EF61414}"/>
               </a:ext>
             </a:extLst>
           </p:cNvPr>
@@ -10359,7 +10426,7 @@
           <p:cNvPr id="6" name="grid-v-360">
             <a:extLst xmlns:a="http://schemas.openxmlformats.org/drawingml/2006/main">
               <a:ext uri="{FF2B5EF4-FFF2-40B4-BE49-F238E27FC236}">
-                <a16:creationId xmlns:a16="http://schemas.microsoft.com/office/drawing/2014/main" id="{21AD6EE7-EB8C-4DB2-B674-EF144F71EB2B}"/>
+                <a16:creationId xmlns:a16="http://schemas.microsoft.com/office/drawing/2014/main" id="{DBC880E9-CB58-47E8-93D2-D74A072DB1FA}"/>
               </a:ext>
             </a:extLst>
           </p:cNvPr>
@@ -10390,7 +10457,7 @@
           <p:cNvPr id="7" name="grid-v-424">
             <a:extLst xmlns:a="http://schemas.openxmlformats.org/drawingml/2006/main">
               <a:ext uri="{FF2B5EF4-FFF2-40B4-BE49-F238E27FC236}">
-                <a16:creationId xmlns:a16="http://schemas.microsoft.com/office/drawing/2014/main" id="{34E072B4-4F8E-4178-A593-905BB541CAAA}"/>
+                <a16:creationId xmlns:a16="http://schemas.microsoft.com/office/drawing/2014/main" id="{B6B2AEE4-3477-42FA-9B74-A6C78A721760}"/>
               </a:ext>
             </a:extLst>
           </p:cNvPr>
@@ -10421,7 +10488,7 @@
           <p:cNvPr id="8" name="grid-v-488">
             <a:extLst xmlns:a="http://schemas.openxmlformats.org/drawingml/2006/main">
               <a:ext uri="{FF2B5EF4-FFF2-40B4-BE49-F238E27FC236}">
-                <a16:creationId xmlns:a16="http://schemas.microsoft.com/office/drawing/2014/main" id="{F8299EBE-D65F-454D-98BE-8E78B8FAFB15}"/>
+                <a16:creationId xmlns:a16="http://schemas.microsoft.com/office/drawing/2014/main" id="{7D706EB8-E4A2-4494-B5FA-4D216B68EF4C}"/>
               </a:ext>
             </a:extLst>
           </p:cNvPr>
@@ -10452,7 +10519,7 @@
           <p:cNvPr id="9" name="grid-v-552">
             <a:extLst xmlns:a="http://schemas.openxmlformats.org/drawingml/2006/main">
               <a:ext uri="{FF2B5EF4-FFF2-40B4-BE49-F238E27FC236}">
-                <a16:creationId xmlns:a16="http://schemas.microsoft.com/office/drawing/2014/main" id="{04E64AA0-D13F-4CD0-843B-6BC37791BE35}"/>
+                <a16:creationId xmlns:a16="http://schemas.microsoft.com/office/drawing/2014/main" id="{FB2B59F5-FA73-4426-9728-93266B60B55B}"/>
               </a:ext>
             </a:extLst>
           </p:cNvPr>
@@ -10483,7 +10550,7 @@
           <p:cNvPr id="10" name="grid-v-616">
             <a:extLst xmlns:a="http://schemas.openxmlformats.org/drawingml/2006/main">
               <a:ext uri="{FF2B5EF4-FFF2-40B4-BE49-F238E27FC236}">
-                <a16:creationId xmlns:a16="http://schemas.microsoft.com/office/drawing/2014/main" id="{F249B50B-2199-4AC5-9F43-6CE76C385648}"/>
+                <a16:creationId xmlns:a16="http://schemas.microsoft.com/office/drawing/2014/main" id="{86FF5569-6FBF-4C3F-BF9C-154E88F2642E}"/>
               </a:ext>
             </a:extLst>
           </p:cNvPr>
@@ -10514,7 +10581,7 @@
           <p:cNvPr id="11" name="grid-v-680">
             <a:extLst xmlns:a="http://schemas.openxmlformats.org/drawingml/2006/main">
               <a:ext uri="{FF2B5EF4-FFF2-40B4-BE49-F238E27FC236}">
-                <a16:creationId xmlns:a16="http://schemas.microsoft.com/office/drawing/2014/main" id="{171F2914-BFC0-4500-99DA-E615DA7CA075}"/>
+                <a16:creationId xmlns:a16="http://schemas.microsoft.com/office/drawing/2014/main" id="{24630DB2-7312-4BF0-94DF-7EECE4194ADC}"/>
               </a:ext>
             </a:extLst>
           </p:cNvPr>
@@ -10545,7 +10612,7 @@
           <p:cNvPr id="12" name="grid-v-744">
             <a:extLst xmlns:a="http://schemas.openxmlformats.org/drawingml/2006/main">
               <a:ext uri="{FF2B5EF4-FFF2-40B4-BE49-F238E27FC236}">
-                <a16:creationId xmlns:a16="http://schemas.microsoft.com/office/drawing/2014/main" id="{FBE8DEA5-F525-445B-8C02-1C03F93A7E6F}"/>
+                <a16:creationId xmlns:a16="http://schemas.microsoft.com/office/drawing/2014/main" id="{2EE5AF09-C470-460C-826C-839F6DB604B6}"/>
               </a:ext>
             </a:extLst>
           </p:cNvPr>
@@ -10576,7 +10643,7 @@
           <p:cNvPr id="13" name="grid-v-808">
             <a:extLst xmlns:a="http://schemas.openxmlformats.org/drawingml/2006/main">
               <a:ext uri="{FF2B5EF4-FFF2-40B4-BE49-F238E27FC236}">
-                <a16:creationId xmlns:a16="http://schemas.microsoft.com/office/drawing/2014/main" id="{0E684E88-2F77-49D3-AD7C-1DEF3E472C01}"/>
+                <a16:creationId xmlns:a16="http://schemas.microsoft.com/office/drawing/2014/main" id="{EC37D1D0-EC66-4815-98B5-89AD2E75FD9A}"/>
               </a:ext>
             </a:extLst>
           </p:cNvPr>
@@ -10607,7 +10674,7 @@
           <p:cNvPr id="14" name="grid-v-872">
             <a:extLst xmlns:a="http://schemas.openxmlformats.org/drawingml/2006/main">
               <a:ext uri="{FF2B5EF4-FFF2-40B4-BE49-F238E27FC236}">
-                <a16:creationId xmlns:a16="http://schemas.microsoft.com/office/drawing/2014/main" id="{E800BD1C-4242-426B-9864-2530F980B5C0}"/>
+                <a16:creationId xmlns:a16="http://schemas.microsoft.com/office/drawing/2014/main" id="{EAAC1BA5-DA1B-44FD-900E-C36A3DE0A409}"/>
               </a:ext>
             </a:extLst>
           </p:cNvPr>
@@ -10638,7 +10705,7 @@
           <p:cNvPr id="15" name="grid-v-936">
             <a:extLst xmlns:a="http://schemas.openxmlformats.org/drawingml/2006/main">
               <a:ext uri="{FF2B5EF4-FFF2-40B4-BE49-F238E27FC236}">
-                <a16:creationId xmlns:a16="http://schemas.microsoft.com/office/drawing/2014/main" id="{BAB9E867-53E7-49F5-965A-91931170EC9E}"/>
+                <a16:creationId xmlns:a16="http://schemas.microsoft.com/office/drawing/2014/main" id="{435F4471-3DC6-4E8D-9A66-44B010FA14F3}"/>
               </a:ext>
             </a:extLst>
           </p:cNvPr>
@@ -10669,7 +10736,7 @@
           <p:cNvPr id="16" name="grid-v-1000">
             <a:extLst xmlns:a="http://schemas.openxmlformats.org/drawingml/2006/main">
               <a:ext uri="{FF2B5EF4-FFF2-40B4-BE49-F238E27FC236}">
-                <a16:creationId xmlns:a16="http://schemas.microsoft.com/office/drawing/2014/main" id="{BEF2ACFD-F529-4D82-9A5D-43F97D05FBB0}"/>
+                <a16:creationId xmlns:a16="http://schemas.microsoft.com/office/drawing/2014/main" id="{6AB878EB-8B1F-47E3-A510-8EB933879E4F}"/>
               </a:ext>
             </a:extLst>
           </p:cNvPr>
@@ -10700,7 +10767,7 @@
           <p:cNvPr id="17" name="grid-v-1064">
             <a:extLst xmlns:a="http://schemas.openxmlformats.org/drawingml/2006/main">
               <a:ext uri="{FF2B5EF4-FFF2-40B4-BE49-F238E27FC236}">
-                <a16:creationId xmlns:a16="http://schemas.microsoft.com/office/drawing/2014/main" id="{E0C566CA-0AF3-4397-917A-8D01083ECF36}"/>
+                <a16:creationId xmlns:a16="http://schemas.microsoft.com/office/drawing/2014/main" id="{D4CBDAB9-C235-4719-97A9-9E66F919424A}"/>
               </a:ext>
             </a:extLst>
           </p:cNvPr>
@@ -10731,7 +10798,7 @@
           <p:cNvPr id="18" name="grid-v-1128">
             <a:extLst xmlns:a="http://schemas.openxmlformats.org/drawingml/2006/main">
               <a:ext uri="{FF2B5EF4-FFF2-40B4-BE49-F238E27FC236}">
-                <a16:creationId xmlns:a16="http://schemas.microsoft.com/office/drawing/2014/main" id="{7FFC77B4-4177-47A2-9B72-F6C5EC931FC0}"/>
+                <a16:creationId xmlns:a16="http://schemas.microsoft.com/office/drawing/2014/main" id="{EA2D421D-9EBB-4725-BB39-09B468D641DF}"/>
               </a:ext>
             </a:extLst>
           </p:cNvPr>
@@ -10762,7 +10829,7 @@
           <p:cNvPr id="19" name="grid-v-1192">
             <a:extLst xmlns:a="http://schemas.openxmlformats.org/drawingml/2006/main">
               <a:ext uri="{FF2B5EF4-FFF2-40B4-BE49-F238E27FC236}">
-                <a16:creationId xmlns:a16="http://schemas.microsoft.com/office/drawing/2014/main" id="{EE190343-A3C7-45AF-831E-8A8BC6605AB5}"/>
+                <a16:creationId xmlns:a16="http://schemas.microsoft.com/office/drawing/2014/main" id="{100A1D4D-596E-4341-90D3-66EB3C24B584}"/>
               </a:ext>
             </a:extLst>
           </p:cNvPr>
@@ -10793,7 +10860,7 @@
           <p:cNvPr id="20" name="grid-h-112">
             <a:extLst xmlns:a="http://schemas.openxmlformats.org/drawingml/2006/main">
               <a:ext uri="{FF2B5EF4-FFF2-40B4-BE49-F238E27FC236}">
-                <a16:creationId xmlns:a16="http://schemas.microsoft.com/office/drawing/2014/main" id="{40011140-5F40-45E8-AAAD-216BD078A794}"/>
+                <a16:creationId xmlns:a16="http://schemas.microsoft.com/office/drawing/2014/main" id="{DFB025D5-40C2-422D-9E50-2094ED741AD9}"/>
               </a:ext>
             </a:extLst>
           </p:cNvPr>
@@ -10824,7 +10891,7 @@
           <p:cNvPr id="21" name="grid-h-176">
             <a:extLst xmlns:a="http://schemas.openxmlformats.org/drawingml/2006/main">
               <a:ext uri="{FF2B5EF4-FFF2-40B4-BE49-F238E27FC236}">
-                <a16:creationId xmlns:a16="http://schemas.microsoft.com/office/drawing/2014/main" id="{AFD63523-C5FB-437D-8B93-4B9ADD38526A}"/>
+                <a16:creationId xmlns:a16="http://schemas.microsoft.com/office/drawing/2014/main" id="{C7FCC9D4-AE6F-4764-A4D9-980B5D2D13DD}"/>
               </a:ext>
             </a:extLst>
           </p:cNvPr>
@@ -10855,7 +10922,7 @@
           <p:cNvPr id="22" name="grid-h-240">
             <a:extLst xmlns:a="http://schemas.openxmlformats.org/drawingml/2006/main">
               <a:ext uri="{FF2B5EF4-FFF2-40B4-BE49-F238E27FC236}">
-                <a16:creationId xmlns:a16="http://schemas.microsoft.com/office/drawing/2014/main" id="{89FFF826-39AF-4FCB-9946-FE9D5BEAFE96}"/>
+                <a16:creationId xmlns:a16="http://schemas.microsoft.com/office/drawing/2014/main" id="{A34E7420-D46E-47FE-A2F6-723DE964AA91}"/>
               </a:ext>
             </a:extLst>
           </p:cNvPr>
@@ -10886,7 +10953,7 @@
           <p:cNvPr id="23" name="grid-h-304">
             <a:extLst xmlns:a="http://schemas.openxmlformats.org/drawingml/2006/main">
               <a:ext uri="{FF2B5EF4-FFF2-40B4-BE49-F238E27FC236}">
-                <a16:creationId xmlns:a16="http://schemas.microsoft.com/office/drawing/2014/main" id="{449F9B5D-1F3D-40E4-8A97-00EFAA676275}"/>
+                <a16:creationId xmlns:a16="http://schemas.microsoft.com/office/drawing/2014/main" id="{384BF935-678C-4E81-821A-9C65C3528DF4}"/>
               </a:ext>
             </a:extLst>
           </p:cNvPr>
@@ -10917,7 +10984,7 @@
           <p:cNvPr id="24" name="grid-h-368">
             <a:extLst xmlns:a="http://schemas.openxmlformats.org/drawingml/2006/main">
               <a:ext uri="{FF2B5EF4-FFF2-40B4-BE49-F238E27FC236}">
-                <a16:creationId xmlns:a16="http://schemas.microsoft.com/office/drawing/2014/main" id="{CFDE767E-7C6F-4E1B-8FB7-CA22940CF907}"/>
+                <a16:creationId xmlns:a16="http://schemas.microsoft.com/office/drawing/2014/main" id="{FD74EF66-1F16-437E-9383-3526597508A3}"/>
               </a:ext>
             </a:extLst>
           </p:cNvPr>
@@ -10948,7 +11015,7 @@
           <p:cNvPr id="25" name="grid-h-432">
             <a:extLst xmlns:a="http://schemas.openxmlformats.org/drawingml/2006/main">
               <a:ext uri="{FF2B5EF4-FFF2-40B4-BE49-F238E27FC236}">
-                <a16:creationId xmlns:a16="http://schemas.microsoft.com/office/drawing/2014/main" id="{ED9046DC-425F-4A91-9E4C-51B31CC6BA4C}"/>
+                <a16:creationId xmlns:a16="http://schemas.microsoft.com/office/drawing/2014/main" id="{AD62503C-CFE8-4C73-8B00-69966F116345}"/>
               </a:ext>
             </a:extLst>
           </p:cNvPr>
@@ -10979,7 +11046,7 @@
           <p:cNvPr id="26" name="grid-h-496">
             <a:extLst xmlns:a="http://schemas.openxmlformats.org/drawingml/2006/main">
               <a:ext uri="{FF2B5EF4-FFF2-40B4-BE49-F238E27FC236}">
-                <a16:creationId xmlns:a16="http://schemas.microsoft.com/office/drawing/2014/main" id="{6C22D097-7B48-4317-954A-043C2318CFBD}"/>
+                <a16:creationId xmlns:a16="http://schemas.microsoft.com/office/drawing/2014/main" id="{9C4EB73E-6EC8-4ABD-AAED-50CF58AFDE13}"/>
               </a:ext>
             </a:extLst>
           </p:cNvPr>
@@ -11010,7 +11077,7 @@
           <p:cNvPr id="27" name="grid-h-560">
             <a:extLst xmlns:a="http://schemas.openxmlformats.org/drawingml/2006/main">
               <a:ext uri="{FF2B5EF4-FFF2-40B4-BE49-F238E27FC236}">
-                <a16:creationId xmlns:a16="http://schemas.microsoft.com/office/drawing/2014/main" id="{557AC51B-624A-46D6-9151-55A0C22A0D8C}"/>
+                <a16:creationId xmlns:a16="http://schemas.microsoft.com/office/drawing/2014/main" id="{7D7A134C-4DE3-43DC-9786-4F899C225D20}"/>
               </a:ext>
             </a:extLst>
           </p:cNvPr>
@@ -11041,7 +11108,7 @@
           <p:cNvPr id="28" name="grid-h-624">
             <a:extLst xmlns:a="http://schemas.openxmlformats.org/drawingml/2006/main">
               <a:ext uri="{FF2B5EF4-FFF2-40B4-BE49-F238E27FC236}">
-                <a16:creationId xmlns:a16="http://schemas.microsoft.com/office/drawing/2014/main" id="{8CE55BD1-9F19-4ED9-926B-C806CBE4675A}"/>
+                <a16:creationId xmlns:a16="http://schemas.microsoft.com/office/drawing/2014/main" id="{8CF6F503-5035-4042-B58B-0BF10CFC25A0}"/>
               </a:ext>
             </a:extLst>
           </p:cNvPr>
@@ -11072,7 +11139,7 @@
           <p:cNvPr id="29" name="top-rule">
             <a:extLst xmlns:a="http://schemas.openxmlformats.org/drawingml/2006/main">
               <a:ext uri="{FF2B5EF4-FFF2-40B4-BE49-F238E27FC236}">
-                <a16:creationId xmlns:a16="http://schemas.microsoft.com/office/drawing/2014/main" id="{500D0551-5698-47D1-B571-D7DBB3E73966}"/>
+                <a16:creationId xmlns:a16="http://schemas.microsoft.com/office/drawing/2014/main" id="{6FC19DFA-221E-4D03-8A9C-907B61902F25}"/>
               </a:ext>
             </a:extLst>
           </p:cNvPr>
@@ -11103,7 +11170,7 @@
           <p:cNvPr id="30" name="wordmark">
             <a:extLst xmlns:a="http://schemas.openxmlformats.org/drawingml/2006/main">
               <a:ext uri="{FF2B5EF4-FFF2-40B4-BE49-F238E27FC236}">
-                <a16:creationId xmlns:a16="http://schemas.microsoft.com/office/drawing/2014/main" id="{650C8BD6-7C37-4762-9D3B-4DC0C14F6BA9}"/>
+                <a16:creationId xmlns:a16="http://schemas.microsoft.com/office/drawing/2014/main" id="{041748AF-F386-4245-B077-2BE9069E7146}"/>
               </a:ext>
             </a:extLst>
           </p:cNvPr>
@@ -11165,7 +11232,7 @@
           <p:cNvPr id="31" name="environment-label">
             <a:extLst xmlns:a="http://schemas.openxmlformats.org/drawingml/2006/main">
               <a:ext uri="{FF2B5EF4-FFF2-40B4-BE49-F238E27FC236}">
-                <a16:creationId xmlns:a16="http://schemas.microsoft.com/office/drawing/2014/main" id="{87495799-9C7B-48DE-9D34-446D51727FF5}"/>
+                <a16:creationId xmlns:a16="http://schemas.microsoft.com/office/drawing/2014/main" id="{A76E1AF8-B9B2-47CC-AA46-F5712C1C36DB}"/>
               </a:ext>
             </a:extLst>
           </p:cNvPr>
@@ -11227,7 +11294,7 @@
           <p:cNvPr id="32" name="slide-index">
             <a:extLst xmlns:a="http://schemas.openxmlformats.org/drawingml/2006/main">
               <a:ext uri="{FF2B5EF4-FFF2-40B4-BE49-F238E27FC236}">
-                <a16:creationId xmlns:a16="http://schemas.microsoft.com/office/drawing/2014/main" id="{4431ECC2-11AD-4AA2-A5A2-BE712547E55B}"/>
+                <a16:creationId xmlns:a16="http://schemas.microsoft.com/office/drawing/2014/main" id="{35CB92D4-2E5A-4244-AFFA-D068B61A85E1}"/>
               </a:ext>
             </a:extLst>
           </p:cNvPr>
@@ -11289,7 +11356,7 @@
           <p:cNvPr id="33" name="event-footer">
             <a:extLst xmlns:a="http://schemas.openxmlformats.org/drawingml/2006/main">
               <a:ext uri="{FF2B5EF4-FFF2-40B4-BE49-F238E27FC236}">
-                <a16:creationId xmlns:a16="http://schemas.microsoft.com/office/drawing/2014/main" id="{11D0312E-3DDC-4CFB-97CD-9AD830C90177}"/>
+                <a16:creationId xmlns:a16="http://schemas.microsoft.com/office/drawing/2014/main" id="{513E6045-E3E1-4215-8DB8-603F140D5F19}"/>
               </a:ext>
             </a:extLst>
           </p:cNvPr>
@@ -11351,7 +11418,7 @@
           <p:cNvPr id="34" name="honesty-footer">
             <a:extLst xmlns:a="http://schemas.openxmlformats.org/drawingml/2006/main">
               <a:ext uri="{FF2B5EF4-FFF2-40B4-BE49-F238E27FC236}">
-                <a16:creationId xmlns:a16="http://schemas.microsoft.com/office/drawing/2014/main" id="{FF8A91A1-008E-4F97-AAD5-3E8FF79AAF00}"/>
+                <a16:creationId xmlns:a16="http://schemas.microsoft.com/office/drawing/2014/main" id="{CA85BE8E-F4F7-4947-B82B-763D3609AAC6}"/>
               </a:ext>
             </a:extLst>
           </p:cNvPr>
@@ -11413,7 +11480,7 @@
           <p:cNvPr id="35" name="eyebrow">
             <a:extLst xmlns:a="http://schemas.openxmlformats.org/drawingml/2006/main">
               <a:ext uri="{FF2B5EF4-FFF2-40B4-BE49-F238E27FC236}">
-                <a16:creationId xmlns:a16="http://schemas.microsoft.com/office/drawing/2014/main" id="{BD68C20E-074F-415E-9970-6750E232F859}"/>
+                <a16:creationId xmlns:a16="http://schemas.microsoft.com/office/drawing/2014/main" id="{4A357383-DE06-4F7A-AFCE-17653315DFF9}"/>
               </a:ext>
             </a:extLst>
           </p:cNvPr>
@@ -11475,7 +11542,7 @@
           <p:cNvPr id="36" name="slide-title">
             <a:extLst xmlns:a="http://schemas.openxmlformats.org/drawingml/2006/main">
               <a:ext uri="{FF2B5EF4-FFF2-40B4-BE49-F238E27FC236}">
-                <a16:creationId xmlns:a16="http://schemas.microsoft.com/office/drawing/2014/main" id="{32EB7AA4-02C7-44A6-9A3B-4FA1159CEF0D}"/>
+                <a16:creationId xmlns:a16="http://schemas.microsoft.com/office/drawing/2014/main" id="{D27B6175-E4FF-44C5-AA3E-38B09D1EA3C2}"/>
               </a:ext>
             </a:extLst>
           </p:cNvPr>
@@ -11537,7 +11604,7 @@
           <p:cNvPr id="37" name="seller-route">
             <a:extLst xmlns:a="http://schemas.openxmlformats.org/drawingml/2006/main">
               <a:ext uri="{FF2B5EF4-FFF2-40B4-BE49-F238E27FC236}">
-                <a16:creationId xmlns:a16="http://schemas.microsoft.com/office/drawing/2014/main" id="{8834CB39-A4F9-407D-AE1E-D0E50881B369}"/>
+                <a16:creationId xmlns:a16="http://schemas.microsoft.com/office/drawing/2014/main" id="{BCECD629-80DA-4BE7-B3BE-54F15F08566C}"/>
               </a:ext>
             </a:extLst>
           </p:cNvPr>
@@ -11599,7 +11666,7 @@
           <p:cNvPr id="38" name="frozen-quantity">
             <a:extLst xmlns:a="http://schemas.openxmlformats.org/drawingml/2006/main">
               <a:ext uri="{FF2B5EF4-FFF2-40B4-BE49-F238E27FC236}">
-                <a16:creationId xmlns:a16="http://schemas.microsoft.com/office/drawing/2014/main" id="{F67324CD-3F7C-4DC1-BFBB-EE9FB9918D9C}"/>
+                <a16:creationId xmlns:a16="http://schemas.microsoft.com/office/drawing/2014/main" id="{2B45C70C-F65C-42F3-A6EF-4D741DE5F058}"/>
               </a:ext>
             </a:extLst>
           </p:cNvPr>
@@ -11661,7 +11728,7 @@
           <p:cNvPr id="39" name="frozen-label">
             <a:extLst xmlns:a="http://schemas.openxmlformats.org/drawingml/2006/main">
               <a:ext uri="{FF2B5EF4-FFF2-40B4-BE49-F238E27FC236}">
-                <a16:creationId xmlns:a16="http://schemas.microsoft.com/office/drawing/2014/main" id="{AD907F93-8AC2-4B99-9484-61C9C30F369C}"/>
+                <a16:creationId xmlns:a16="http://schemas.microsoft.com/office/drawing/2014/main" id="{913796D2-D6D7-4CD4-BD62-0296AA3E6DD2}"/>
               </a:ext>
             </a:extLst>
           </p:cNvPr>
@@ -11723,7 +11790,7 @@
           <p:cNvPr id="40" name="frozen-copy">
             <a:extLst xmlns:a="http://schemas.openxmlformats.org/drawingml/2006/main">
               <a:ext uri="{FF2B5EF4-FFF2-40B4-BE49-F238E27FC236}">
-                <a16:creationId xmlns:a16="http://schemas.microsoft.com/office/drawing/2014/main" id="{C158580D-545C-48E6-8804-FDCB23C486CF}"/>
+                <a16:creationId xmlns:a16="http://schemas.microsoft.com/office/drawing/2014/main" id="{B1C65158-0C6B-409D-BC21-2BFE1D78A8B5}"/>
               </a:ext>
             </a:extLst>
           </p:cNvPr>
@@ -11812,7 +11879,7 @@
           <p:cNvPr id="41" name="seller-live-label">
             <a:extLst xmlns:a="http://schemas.openxmlformats.org/drawingml/2006/main">
               <a:ext uri="{FF2B5EF4-FFF2-40B4-BE49-F238E27FC236}">
-                <a16:creationId xmlns:a16="http://schemas.microsoft.com/office/drawing/2014/main" id="{17519AA6-2175-4692-AD4E-7CB8B29B7B86}"/>
+                <a16:creationId xmlns:a16="http://schemas.microsoft.com/office/drawing/2014/main" id="{CE12CDB8-78E4-4C7F-883F-2AC254CF6B8E}"/>
               </a:ext>
             </a:extLst>
           </p:cNvPr>
@@ -11874,7 +11941,7 @@
           <p:cNvPr id="42" name="seller-live-value">
             <a:extLst xmlns:a="http://schemas.openxmlformats.org/drawingml/2006/main">
               <a:ext uri="{FF2B5EF4-FFF2-40B4-BE49-F238E27FC236}">
-                <a16:creationId xmlns:a16="http://schemas.microsoft.com/office/drawing/2014/main" id="{5189F7F7-ACCF-4B47-9C29-35DB46927F51}"/>
+                <a16:creationId xmlns:a16="http://schemas.microsoft.com/office/drawing/2014/main" id="{2FBA08DB-4BF4-4D01-87FC-B52AD3DC6974}"/>
               </a:ext>
             </a:extLst>
           </p:cNvPr>
@@ -11936,7 +12003,7 @@
           <p:cNvPr id="43" name="seller-write-label">
             <a:extLst xmlns:a="http://schemas.openxmlformats.org/drawingml/2006/main">
               <a:ext uri="{FF2B5EF4-FFF2-40B4-BE49-F238E27FC236}">
-                <a16:creationId xmlns:a16="http://schemas.microsoft.com/office/drawing/2014/main" id="{B9ACF762-E7CF-4AAF-B047-D2EDF31DDB4E}"/>
+                <a16:creationId xmlns:a16="http://schemas.microsoft.com/office/drawing/2014/main" id="{EE7DCBAF-F83A-4278-9FBE-37CEA8D6FED0}"/>
               </a:ext>
             </a:extLst>
           </p:cNvPr>
@@ -11998,7 +12065,7 @@
           <p:cNvPr id="44" name="seller-write-value">
             <a:extLst xmlns:a="http://schemas.openxmlformats.org/drawingml/2006/main">
               <a:ext uri="{FF2B5EF4-FFF2-40B4-BE49-F238E27FC236}">
-                <a16:creationId xmlns:a16="http://schemas.microsoft.com/office/drawing/2014/main" id="{ED00601A-F12F-4A90-8815-AA6E29740A05}"/>
+                <a16:creationId xmlns:a16="http://schemas.microsoft.com/office/drawing/2014/main" id="{99B6E84C-6B2F-422F-8AB3-C77F287541CD}"/>
               </a:ext>
             </a:extLst>
           </p:cNvPr>
@@ -12060,7 +12127,7 @@
           <p:cNvPr id="45" name="market-divider">
             <a:extLst xmlns:a="http://schemas.openxmlformats.org/drawingml/2006/main">
               <a:ext uri="{FF2B5EF4-FFF2-40B4-BE49-F238E27FC236}">
-                <a16:creationId xmlns:a16="http://schemas.microsoft.com/office/drawing/2014/main" id="{C321AD61-9F89-49AA-96D0-A4A94A59A98B}"/>
+                <a16:creationId xmlns:a16="http://schemas.microsoft.com/office/drawing/2014/main" id="{D005BCE6-5709-46E7-863B-04C191FCD8AF}"/>
               </a:ext>
             </a:extLst>
           </p:cNvPr>
@@ -12091,7 +12158,7 @@
           <p:cNvPr id="46" name="offer-index-0">
             <a:extLst xmlns:a="http://schemas.openxmlformats.org/drawingml/2006/main">
               <a:ext uri="{FF2B5EF4-FFF2-40B4-BE49-F238E27FC236}">
-                <a16:creationId xmlns:a16="http://schemas.microsoft.com/office/drawing/2014/main" id="{E954075B-D57C-4EF6-AA6B-CDAD57970FDA}"/>
+                <a16:creationId xmlns:a16="http://schemas.microsoft.com/office/drawing/2014/main" id="{65D9C05E-BF28-4A43-AAA7-6DE253B114AE}"/>
               </a:ext>
             </a:extLst>
           </p:cNvPr>
@@ -12153,7 +12220,7 @@
           <p:cNvPr id="47" name="offer-merchant-0">
             <a:extLst xmlns:a="http://schemas.openxmlformats.org/drawingml/2006/main">
               <a:ext uri="{FF2B5EF4-FFF2-40B4-BE49-F238E27FC236}">
-                <a16:creationId xmlns:a16="http://schemas.microsoft.com/office/drawing/2014/main" id="{44C7438A-9D6E-499D-9344-30C7C1D01115}"/>
+                <a16:creationId xmlns:a16="http://schemas.microsoft.com/office/drawing/2014/main" id="{403C12A6-9C63-4D3E-A88A-55792F7BFF3E}"/>
               </a:ext>
             </a:extLst>
           </p:cNvPr>
@@ -12215,7 +12282,7 @@
           <p:cNvPr id="48" name="offer-initial-0">
             <a:extLst xmlns:a="http://schemas.openxmlformats.org/drawingml/2006/main">
               <a:ext uri="{FF2B5EF4-FFF2-40B4-BE49-F238E27FC236}">
-                <a16:creationId xmlns:a16="http://schemas.microsoft.com/office/drawing/2014/main" id="{DC13412E-D0D7-4FB5-B19E-2B9B003BB0EA}"/>
+                <a16:creationId xmlns:a16="http://schemas.microsoft.com/office/drawing/2014/main" id="{6D18E46E-1BD9-4874-8380-1139419CA4B5}"/>
               </a:ext>
             </a:extLst>
           </p:cNvPr>
@@ -12277,7 +12344,7 @@
           <p:cNvPr id="49" name="offer-arrow-0-shaft">
             <a:extLst xmlns:a="http://schemas.openxmlformats.org/drawingml/2006/main">
               <a:ext uri="{FF2B5EF4-FFF2-40B4-BE49-F238E27FC236}">
-                <a16:creationId xmlns:a16="http://schemas.microsoft.com/office/drawing/2014/main" id="{E992A82D-0ACA-473D-98DA-E1E9F5B2854E}"/>
+                <a16:creationId xmlns:a16="http://schemas.microsoft.com/office/drawing/2014/main" id="{5CEE95D6-83DF-4BCA-860F-DED82D50E922}"/>
               </a:ext>
             </a:extLst>
           </p:cNvPr>
@@ -12308,7 +12375,7 @@
           <p:cNvPr id="50" name="offer-arrow-0-head">
             <a:extLst xmlns:a="http://schemas.openxmlformats.org/drawingml/2006/main">
               <a:ext uri="{FF2B5EF4-FFF2-40B4-BE49-F238E27FC236}">
-                <a16:creationId xmlns:a16="http://schemas.microsoft.com/office/drawing/2014/main" id="{17F73553-FEA9-4B17-8FDC-1AD9B2F8085C}"/>
+                <a16:creationId xmlns:a16="http://schemas.microsoft.com/office/drawing/2014/main" id="{A2CEC9E1-DE53-42F5-8C53-4C447EE27F86}"/>
               </a:ext>
             </a:extLst>
           </p:cNvPr>
@@ -12339,7 +12406,7 @@
           <p:cNvPr id="51" name="offer-final-0">
             <a:extLst xmlns:a="http://schemas.openxmlformats.org/drawingml/2006/main">
               <a:ext uri="{FF2B5EF4-FFF2-40B4-BE49-F238E27FC236}">
-                <a16:creationId xmlns:a16="http://schemas.microsoft.com/office/drawing/2014/main" id="{2A4BFA45-06FE-4F7A-B4F4-312039558D19}"/>
+                <a16:creationId xmlns:a16="http://schemas.microsoft.com/office/drawing/2014/main" id="{AE20F2F9-0630-4FEC-ADB8-632433619070}"/>
               </a:ext>
             </a:extLst>
           </p:cNvPr>
@@ -12401,7 +12468,7 @@
           <p:cNvPr id="52" name="winner-label">
             <a:extLst xmlns:a="http://schemas.openxmlformats.org/drawingml/2006/main">
               <a:ext uri="{FF2B5EF4-FFF2-40B4-BE49-F238E27FC236}">
-                <a16:creationId xmlns:a16="http://schemas.microsoft.com/office/drawing/2014/main" id="{CF4FBF47-01FB-4A2F-81C7-1DE488383414}"/>
+                <a16:creationId xmlns:a16="http://schemas.microsoft.com/office/drawing/2014/main" id="{DA673CD8-5C7E-454B-9E73-68027893075E}"/>
               </a:ext>
             </a:extLst>
           </p:cNvPr>
@@ -12463,7 +12530,7 @@
           <p:cNvPr id="53" name="offer-rule-0">
             <a:extLst xmlns:a="http://schemas.openxmlformats.org/drawingml/2006/main">
               <a:ext uri="{FF2B5EF4-FFF2-40B4-BE49-F238E27FC236}">
-                <a16:creationId xmlns:a16="http://schemas.microsoft.com/office/drawing/2014/main" id="{9DA58E4C-0511-4F75-8EF5-44ACD98B8E41}"/>
+                <a16:creationId xmlns:a16="http://schemas.microsoft.com/office/drawing/2014/main" id="{925DA0D9-292D-4849-BC1E-3B5DD60DD546}"/>
               </a:ext>
             </a:extLst>
           </p:cNvPr>
@@ -12494,7 +12561,7 @@
           <p:cNvPr id="54" name="offer-index-1">
             <a:extLst xmlns:a="http://schemas.openxmlformats.org/drawingml/2006/main">
               <a:ext uri="{FF2B5EF4-FFF2-40B4-BE49-F238E27FC236}">
-                <a16:creationId xmlns:a16="http://schemas.microsoft.com/office/drawing/2014/main" id="{120F9016-D75A-4EC6-866A-97302B7F6B13}"/>
+                <a16:creationId xmlns:a16="http://schemas.microsoft.com/office/drawing/2014/main" id="{449CDE48-094D-4376-A5B0-44592003B3EA}"/>
               </a:ext>
             </a:extLst>
           </p:cNvPr>
@@ -12556,7 +12623,7 @@
           <p:cNvPr id="55" name="offer-merchant-1">
             <a:extLst xmlns:a="http://schemas.openxmlformats.org/drawingml/2006/main">
               <a:ext uri="{FF2B5EF4-FFF2-40B4-BE49-F238E27FC236}">
-                <a16:creationId xmlns:a16="http://schemas.microsoft.com/office/drawing/2014/main" id="{A6CC26B9-E5C9-4A1D-A45E-84853DE56F99}"/>
+                <a16:creationId xmlns:a16="http://schemas.microsoft.com/office/drawing/2014/main" id="{BE1EDFF8-C160-4B25-AD86-5F516E23FD6D}"/>
               </a:ext>
             </a:extLst>
           </p:cNvPr>
@@ -12618,7 +12685,7 @@
           <p:cNvPr id="56" name="offer-initial-1">
             <a:extLst xmlns:a="http://schemas.openxmlformats.org/drawingml/2006/main">
               <a:ext uri="{FF2B5EF4-FFF2-40B4-BE49-F238E27FC236}">
-                <a16:creationId xmlns:a16="http://schemas.microsoft.com/office/drawing/2014/main" id="{36745BA5-E9F5-4C58-BF05-49BDB4BBD6F2}"/>
+                <a16:creationId xmlns:a16="http://schemas.microsoft.com/office/drawing/2014/main" id="{C6D83D1A-B0F1-4EE5-8B63-EC9B9169405E}"/>
               </a:ext>
             </a:extLst>
           </p:cNvPr>
@@ -12680,7 +12747,7 @@
           <p:cNvPr id="57" name="offer-arrow-1-shaft">
             <a:extLst xmlns:a="http://schemas.openxmlformats.org/drawingml/2006/main">
               <a:ext uri="{FF2B5EF4-FFF2-40B4-BE49-F238E27FC236}">
-                <a16:creationId xmlns:a16="http://schemas.microsoft.com/office/drawing/2014/main" id="{C2D859C6-512A-40B6-AF6F-C0314D7BAF91}"/>
+                <a16:creationId xmlns:a16="http://schemas.microsoft.com/office/drawing/2014/main" id="{A33AC764-9F36-419F-8F18-B3D2CA418698}"/>
               </a:ext>
             </a:extLst>
           </p:cNvPr>
@@ -12711,7 +12778,7 @@
           <p:cNvPr id="58" name="offer-arrow-1-head">
             <a:extLst xmlns:a="http://schemas.openxmlformats.org/drawingml/2006/main">
               <a:ext uri="{FF2B5EF4-FFF2-40B4-BE49-F238E27FC236}">
-                <a16:creationId xmlns:a16="http://schemas.microsoft.com/office/drawing/2014/main" id="{592A92A9-69E6-4EEB-AA37-673BEFC0BB2A}"/>
+                <a16:creationId xmlns:a16="http://schemas.microsoft.com/office/drawing/2014/main" id="{CA78D8DD-14D3-41C3-8DE2-E47CCE9F4162}"/>
               </a:ext>
             </a:extLst>
           </p:cNvPr>
@@ -12742,7 +12809,7 @@
           <p:cNvPr id="59" name="offer-final-1">
             <a:extLst xmlns:a="http://schemas.openxmlformats.org/drawingml/2006/main">
               <a:ext uri="{FF2B5EF4-FFF2-40B4-BE49-F238E27FC236}">
-                <a16:creationId xmlns:a16="http://schemas.microsoft.com/office/drawing/2014/main" id="{7929ECAA-0DE4-46F6-8DCC-A0F4E32B98C4}"/>
+                <a16:creationId xmlns:a16="http://schemas.microsoft.com/office/drawing/2014/main" id="{85425EB8-B284-4B42-8310-78323E9405EA}"/>
               </a:ext>
             </a:extLst>
           </p:cNvPr>
@@ -12804,7 +12871,7 @@
           <p:cNvPr id="60" name="offer-rule-1">
             <a:extLst xmlns:a="http://schemas.openxmlformats.org/drawingml/2006/main">
               <a:ext uri="{FF2B5EF4-FFF2-40B4-BE49-F238E27FC236}">
-                <a16:creationId xmlns:a16="http://schemas.microsoft.com/office/drawing/2014/main" id="{70F929A2-F868-4973-9867-6AB913601140}"/>
+                <a16:creationId xmlns:a16="http://schemas.microsoft.com/office/drawing/2014/main" id="{7372CE83-BAAA-4390-85D6-80CF594C1FFA}"/>
               </a:ext>
             </a:extLst>
           </p:cNvPr>
@@ -12835,7 +12902,7 @@
           <p:cNvPr id="61" name="offer-index-2">
             <a:extLst xmlns:a="http://schemas.openxmlformats.org/drawingml/2006/main">
               <a:ext uri="{FF2B5EF4-FFF2-40B4-BE49-F238E27FC236}">
-                <a16:creationId xmlns:a16="http://schemas.microsoft.com/office/drawing/2014/main" id="{54B5450D-EFB0-4EB2-9998-291190C5EA8D}"/>
+                <a16:creationId xmlns:a16="http://schemas.microsoft.com/office/drawing/2014/main" id="{7190FA2E-BEED-4535-B5DA-FA03349F8EE3}"/>
               </a:ext>
             </a:extLst>
           </p:cNvPr>
@@ -12897,7 +12964,7 @@
           <p:cNvPr id="62" name="offer-merchant-2">
             <a:extLst xmlns:a="http://schemas.openxmlformats.org/drawingml/2006/main">
               <a:ext uri="{FF2B5EF4-FFF2-40B4-BE49-F238E27FC236}">
-                <a16:creationId xmlns:a16="http://schemas.microsoft.com/office/drawing/2014/main" id="{11147E4E-14ED-4C0D-B783-01946189BE58}"/>
+                <a16:creationId xmlns:a16="http://schemas.microsoft.com/office/drawing/2014/main" id="{55079F92-BF32-473C-806D-B1793C38644F}"/>
               </a:ext>
             </a:extLst>
           </p:cNvPr>
@@ -12959,7 +13026,7 @@
           <p:cNvPr id="63" name="offer-initial-2">
             <a:extLst xmlns:a="http://schemas.openxmlformats.org/drawingml/2006/main">
               <a:ext uri="{FF2B5EF4-FFF2-40B4-BE49-F238E27FC236}">
-                <a16:creationId xmlns:a16="http://schemas.microsoft.com/office/drawing/2014/main" id="{EC9AAD47-50D6-4FB3-AE40-3CDDF50C6822}"/>
+                <a16:creationId xmlns:a16="http://schemas.microsoft.com/office/drawing/2014/main" id="{1004BC97-5945-4599-A456-C7C89AC27379}"/>
               </a:ext>
             </a:extLst>
           </p:cNvPr>
@@ -13021,7 +13088,7 @@
           <p:cNvPr id="64" name="offer-arrow-2-shaft">
             <a:extLst xmlns:a="http://schemas.openxmlformats.org/drawingml/2006/main">
               <a:ext uri="{FF2B5EF4-FFF2-40B4-BE49-F238E27FC236}">
-                <a16:creationId xmlns:a16="http://schemas.microsoft.com/office/drawing/2014/main" id="{913A38BC-EFF5-4B76-919F-5EF714FE9EF4}"/>
+                <a16:creationId xmlns:a16="http://schemas.microsoft.com/office/drawing/2014/main" id="{2D9982F1-7B13-4716-935C-C3A1674B6023}"/>
               </a:ext>
             </a:extLst>
           </p:cNvPr>
@@ -13052,7 +13119,7 @@
           <p:cNvPr id="65" name="offer-arrow-2-head">
             <a:extLst xmlns:a="http://schemas.openxmlformats.org/drawingml/2006/main">
               <a:ext uri="{FF2B5EF4-FFF2-40B4-BE49-F238E27FC236}">
-                <a16:creationId xmlns:a16="http://schemas.microsoft.com/office/drawing/2014/main" id="{A236F2EF-9640-4158-92E5-B73AB9BABDD8}"/>
+                <a16:creationId xmlns:a16="http://schemas.microsoft.com/office/drawing/2014/main" id="{A714AB18-CAE1-4F7E-83FF-66335466F4D3}"/>
               </a:ext>
             </a:extLst>
           </p:cNvPr>
@@ -13083,7 +13150,7 @@
           <p:cNvPr id="66" name="offer-final-2">
             <a:extLst xmlns:a="http://schemas.openxmlformats.org/drawingml/2006/main">
               <a:ext uri="{FF2B5EF4-FFF2-40B4-BE49-F238E27FC236}">
-                <a16:creationId xmlns:a16="http://schemas.microsoft.com/office/drawing/2014/main" id="{242370C8-8FAB-4215-BF02-DD9E62947AD5}"/>
+                <a16:creationId xmlns:a16="http://schemas.microsoft.com/office/drawing/2014/main" id="{B6A4C9C4-AC3E-4996-A387-5951525FC410}"/>
               </a:ext>
             </a:extLst>
           </p:cNvPr>
@@ -13145,7 +13212,7 @@
           <p:cNvPr id="67" name="offer-rule-2">
             <a:extLst xmlns:a="http://schemas.openxmlformats.org/drawingml/2006/main">
               <a:ext uri="{FF2B5EF4-FFF2-40B4-BE49-F238E27FC236}">
-                <a16:creationId xmlns:a16="http://schemas.microsoft.com/office/drawing/2014/main" id="{5589B4A7-E2B4-4F7A-BA0C-AFD67C8749DE}"/>
+                <a16:creationId xmlns:a16="http://schemas.microsoft.com/office/drawing/2014/main" id="{72034B58-709B-4A7F-94A3-A0D540CFEBFB}"/>
               </a:ext>
             </a:extLst>
           </p:cNvPr>
@@ -13176,7 +13243,7 @@
           <p:cNvPr id="68" name="seller-boundary-bg">
             <a:extLst xmlns:a="http://schemas.openxmlformats.org/drawingml/2006/main">
               <a:ext uri="{FF2B5EF4-FFF2-40B4-BE49-F238E27FC236}">
-                <a16:creationId xmlns:a16="http://schemas.microsoft.com/office/drawing/2014/main" id="{DB23EC4E-4955-49C3-9E94-5D3D44299900}"/>
+                <a16:creationId xmlns:a16="http://schemas.microsoft.com/office/drawing/2014/main" id="{4C8520CD-2AA8-4D8B-9966-A1E188032120}"/>
               </a:ext>
             </a:extLst>
           </p:cNvPr>
@@ -13209,7 +13276,7 @@
           <p:cNvPr id="69" name="rfp-label">
             <a:extLst xmlns:a="http://schemas.openxmlformats.org/drawingml/2006/main">
               <a:ext uri="{FF2B5EF4-FFF2-40B4-BE49-F238E27FC236}">
-                <a16:creationId xmlns:a16="http://schemas.microsoft.com/office/drawing/2014/main" id="{386E8816-C280-489B-BF08-73C3AEFE9DB7}"/>
+                <a16:creationId xmlns:a16="http://schemas.microsoft.com/office/drawing/2014/main" id="{F68D55DA-2132-4CE0-A493-0192DECC4813}"/>
               </a:ext>
             </a:extLst>
           </p:cNvPr>
@@ -13271,7 +13338,7 @@
           <p:cNvPr id="70" name="policy-list">
             <a:extLst xmlns:a="http://schemas.openxmlformats.org/drawingml/2006/main">
               <a:ext uri="{FF2B5EF4-FFF2-40B4-BE49-F238E27FC236}">
-                <a16:creationId xmlns:a16="http://schemas.microsoft.com/office/drawing/2014/main" id="{ECBE3A68-FA14-4804-BCE2-E7E2F8D8E827}"/>
+                <a16:creationId xmlns:a16="http://schemas.microsoft.com/office/drawing/2014/main" id="{A968D816-A402-43FE-8CC9-965F1D7E4A4A}"/>
               </a:ext>
             </a:extLst>
           </p:cNvPr>
@@ -13331,7 +13398,7 @@
     </p:spTree>
     <p:extLst>
       <p:ext uri="{BB962C8B-B14F-4D97-AF65-F5344CB8AC3E}">
-        <p14:creationId xmlns:p14="http://schemas.microsoft.com/office/powerpoint/2010/main" val="1707242127"/>
+        <p14:creationId xmlns:p14="http://schemas.microsoft.com/office/powerpoint/2010/main" val="1764752452"/>
       </p:ext>
     </p:extLst>
   </p:cSld>
@@ -13362,7 +13429,7 @@
           <p:cNvPr id="72" name="grid-v-40">
             <a:extLst xmlns:a="http://schemas.openxmlformats.org/drawingml/2006/main">
               <a:ext uri="{FF2B5EF4-FFF2-40B4-BE49-F238E27FC236}">
-                <a16:creationId xmlns:a16="http://schemas.microsoft.com/office/drawing/2014/main" id="{E5E88428-B909-4D65-9E5F-DFEF2CA3F3C4}"/>
+                <a16:creationId xmlns:a16="http://schemas.microsoft.com/office/drawing/2014/main" id="{0A3CBFA0-A947-4B28-97E0-06ED7A8275A4}"/>
               </a:ext>
             </a:extLst>
           </p:cNvPr>
@@ -13393,7 +13460,7 @@
           <p:cNvPr id="2" name="grid-v-104">
             <a:extLst xmlns:a="http://schemas.openxmlformats.org/drawingml/2006/main">
               <a:ext uri="{FF2B5EF4-FFF2-40B4-BE49-F238E27FC236}">
-                <a16:creationId xmlns:a16="http://schemas.microsoft.com/office/drawing/2014/main" id="{85117301-A283-496F-9E67-3B8E844ADA77}"/>
+                <a16:creationId xmlns:a16="http://schemas.microsoft.com/office/drawing/2014/main" id="{D5503E88-787F-4F54-AE67-BD8FB2176E29}"/>
               </a:ext>
             </a:extLst>
           </p:cNvPr>
@@ -13424,7 +13491,7 @@
           <p:cNvPr id="3" name="grid-v-168">
             <a:extLst xmlns:a="http://schemas.openxmlformats.org/drawingml/2006/main">
               <a:ext uri="{FF2B5EF4-FFF2-40B4-BE49-F238E27FC236}">
-                <a16:creationId xmlns:a16="http://schemas.microsoft.com/office/drawing/2014/main" id="{5C32576E-D75C-40F8-B009-5320783459EB}"/>
+                <a16:creationId xmlns:a16="http://schemas.microsoft.com/office/drawing/2014/main" id="{7A93BEDB-E2B9-4E4E-B3B2-FF863DF2C666}"/>
               </a:ext>
             </a:extLst>
           </p:cNvPr>
@@ -13455,7 +13522,7 @@
           <p:cNvPr id="4" name="grid-v-232">
             <a:extLst xmlns:a="http://schemas.openxmlformats.org/drawingml/2006/main">
               <a:ext uri="{FF2B5EF4-FFF2-40B4-BE49-F238E27FC236}">
-                <a16:creationId xmlns:a16="http://schemas.microsoft.com/office/drawing/2014/main" id="{587DAB94-31CD-4962-B23C-62EE1D2B132D}"/>
+                <a16:creationId xmlns:a16="http://schemas.microsoft.com/office/drawing/2014/main" id="{94A6EFFD-6D40-49A0-9062-14BCCAED83D8}"/>
               </a:ext>
             </a:extLst>
           </p:cNvPr>
@@ -13486,7 +13553,7 @@
           <p:cNvPr id="5" name="grid-v-296">
             <a:extLst xmlns:a="http://schemas.openxmlformats.org/drawingml/2006/main">
               <a:ext uri="{FF2B5EF4-FFF2-40B4-BE49-F238E27FC236}">
-                <a16:creationId xmlns:a16="http://schemas.microsoft.com/office/drawing/2014/main" id="{B64D5B16-12A3-478F-A481-A05C5B893B7F}"/>
+                <a16:creationId xmlns:a16="http://schemas.microsoft.com/office/drawing/2014/main" id="{D14E99C9-26DD-4180-9E00-EB1AB37683CE}"/>
               </a:ext>
             </a:extLst>
           </p:cNvPr>
@@ -13517,7 +13584,7 @@
           <p:cNvPr id="6" name="grid-v-360">
             <a:extLst xmlns:a="http://schemas.openxmlformats.org/drawingml/2006/main">
               <a:ext uri="{FF2B5EF4-FFF2-40B4-BE49-F238E27FC236}">
-                <a16:creationId xmlns:a16="http://schemas.microsoft.com/office/drawing/2014/main" id="{23CDFEB2-14C0-44FF-801C-DEBDE8B2243A}"/>
+                <a16:creationId xmlns:a16="http://schemas.microsoft.com/office/drawing/2014/main" id="{EC2B454E-3E88-4F64-9657-19A85D52BC87}"/>
               </a:ext>
             </a:extLst>
           </p:cNvPr>
@@ -13548,7 +13615,7 @@
           <p:cNvPr id="7" name="grid-v-424">
             <a:extLst xmlns:a="http://schemas.openxmlformats.org/drawingml/2006/main">
               <a:ext uri="{FF2B5EF4-FFF2-40B4-BE49-F238E27FC236}">
-                <a16:creationId xmlns:a16="http://schemas.microsoft.com/office/drawing/2014/main" id="{7249F16B-F762-4ED9-AC2B-57E07686EE84}"/>
+                <a16:creationId xmlns:a16="http://schemas.microsoft.com/office/drawing/2014/main" id="{12FB9B7B-347B-42D8-8A9E-BE73EE3AA807}"/>
               </a:ext>
             </a:extLst>
           </p:cNvPr>
@@ -13579,7 +13646,7 @@
           <p:cNvPr id="8" name="grid-v-488">
             <a:extLst xmlns:a="http://schemas.openxmlformats.org/drawingml/2006/main">
               <a:ext uri="{FF2B5EF4-FFF2-40B4-BE49-F238E27FC236}">
-                <a16:creationId xmlns:a16="http://schemas.microsoft.com/office/drawing/2014/main" id="{B12C35D6-B351-45ED-B0CC-F4463970C3B5}"/>
+                <a16:creationId xmlns:a16="http://schemas.microsoft.com/office/drawing/2014/main" id="{FFFAD776-9FDE-43BC-B045-BDB9F6EA3285}"/>
               </a:ext>
             </a:extLst>
           </p:cNvPr>
@@ -13610,7 +13677,7 @@
           <p:cNvPr id="9" name="grid-v-552">
             <a:extLst xmlns:a="http://schemas.openxmlformats.org/drawingml/2006/main">
               <a:ext uri="{FF2B5EF4-FFF2-40B4-BE49-F238E27FC236}">
-                <a16:creationId xmlns:a16="http://schemas.microsoft.com/office/drawing/2014/main" id="{41D7EE0E-89ED-4193-B4D5-B04ADDB231DC}"/>
+                <a16:creationId xmlns:a16="http://schemas.microsoft.com/office/drawing/2014/main" id="{AEFFE742-4578-4979-8D8A-06011B72118D}"/>
               </a:ext>
             </a:extLst>
           </p:cNvPr>
@@ -13641,7 +13708,7 @@
           <p:cNvPr id="10" name="grid-v-616">
             <a:extLst xmlns:a="http://schemas.openxmlformats.org/drawingml/2006/main">
               <a:ext uri="{FF2B5EF4-FFF2-40B4-BE49-F238E27FC236}">
-                <a16:creationId xmlns:a16="http://schemas.microsoft.com/office/drawing/2014/main" id="{5744B4D6-69D8-46BB-B216-6F3FC0962660}"/>
+                <a16:creationId xmlns:a16="http://schemas.microsoft.com/office/drawing/2014/main" id="{DFF46F92-55E4-4E9A-88FA-BD41899CB815}"/>
               </a:ext>
             </a:extLst>
           </p:cNvPr>
@@ -13672,7 +13739,7 @@
           <p:cNvPr id="11" name="grid-v-680">
             <a:extLst xmlns:a="http://schemas.openxmlformats.org/drawingml/2006/main">
               <a:ext uri="{FF2B5EF4-FFF2-40B4-BE49-F238E27FC236}">
-                <a16:creationId xmlns:a16="http://schemas.microsoft.com/office/drawing/2014/main" id="{9D7BF19D-89DF-414B-90E8-89E54564A2EC}"/>
+                <a16:creationId xmlns:a16="http://schemas.microsoft.com/office/drawing/2014/main" id="{0177EE5A-F723-4821-917F-2CABCC8074AA}"/>
               </a:ext>
             </a:extLst>
           </p:cNvPr>
@@ -13703,7 +13770,7 @@
           <p:cNvPr id="12" name="grid-v-744">
             <a:extLst xmlns:a="http://schemas.openxmlformats.org/drawingml/2006/main">
               <a:ext uri="{FF2B5EF4-FFF2-40B4-BE49-F238E27FC236}">
-                <a16:creationId xmlns:a16="http://schemas.microsoft.com/office/drawing/2014/main" id="{33DB937F-4E7F-4816-B194-C6284B34B609}"/>
+                <a16:creationId xmlns:a16="http://schemas.microsoft.com/office/drawing/2014/main" id="{F5A4E03B-4D76-4A2E-A76C-30696B0D3C99}"/>
               </a:ext>
             </a:extLst>
           </p:cNvPr>
@@ -13734,7 +13801,7 @@
           <p:cNvPr id="13" name="grid-v-808">
             <a:extLst xmlns:a="http://schemas.openxmlformats.org/drawingml/2006/main">
               <a:ext uri="{FF2B5EF4-FFF2-40B4-BE49-F238E27FC236}">
-                <a16:creationId xmlns:a16="http://schemas.microsoft.com/office/drawing/2014/main" id="{AA83CBC6-2D88-45B7-BC62-A0F4A68CFAD7}"/>
+                <a16:creationId xmlns:a16="http://schemas.microsoft.com/office/drawing/2014/main" id="{BD4D8069-DF5C-4544-952C-7B3B3D07AD3F}"/>
               </a:ext>
             </a:extLst>
           </p:cNvPr>
@@ -13765,7 +13832,7 @@
           <p:cNvPr id="14" name="grid-v-872">
             <a:extLst xmlns:a="http://schemas.openxmlformats.org/drawingml/2006/main">
               <a:ext uri="{FF2B5EF4-FFF2-40B4-BE49-F238E27FC236}">
-                <a16:creationId xmlns:a16="http://schemas.microsoft.com/office/drawing/2014/main" id="{19FD2245-EE38-4E23-9231-E01C33907058}"/>
+                <a16:creationId xmlns:a16="http://schemas.microsoft.com/office/drawing/2014/main" id="{AB9EDA91-2883-43AC-B2BE-492FAFEAB97E}"/>
               </a:ext>
             </a:extLst>
           </p:cNvPr>
@@ -13796,7 +13863,7 @@
           <p:cNvPr id="15" name="grid-v-936">
             <a:extLst xmlns:a="http://schemas.openxmlformats.org/drawingml/2006/main">
               <a:ext uri="{FF2B5EF4-FFF2-40B4-BE49-F238E27FC236}">
-                <a16:creationId xmlns:a16="http://schemas.microsoft.com/office/drawing/2014/main" id="{AB977005-FA30-435D-A4B5-83BDDD6BEC89}"/>
+                <a16:creationId xmlns:a16="http://schemas.microsoft.com/office/drawing/2014/main" id="{A86C751D-D5C4-4CCE-B806-6463F0D06A62}"/>
               </a:ext>
             </a:extLst>
           </p:cNvPr>
@@ -13827,7 +13894,7 @@
           <p:cNvPr id="16" name="grid-v-1000">
             <a:extLst xmlns:a="http://schemas.openxmlformats.org/drawingml/2006/main">
               <a:ext uri="{FF2B5EF4-FFF2-40B4-BE49-F238E27FC236}">
-                <a16:creationId xmlns:a16="http://schemas.microsoft.com/office/drawing/2014/main" id="{B575A7C4-30D8-4EB4-9364-D40F5D8E5E06}"/>
+                <a16:creationId xmlns:a16="http://schemas.microsoft.com/office/drawing/2014/main" id="{C3F0BE6E-391C-4333-8073-04854AD0B354}"/>
               </a:ext>
             </a:extLst>
           </p:cNvPr>
@@ -13858,7 +13925,7 @@
           <p:cNvPr id="17" name="grid-v-1064">
             <a:extLst xmlns:a="http://schemas.openxmlformats.org/drawingml/2006/main">
               <a:ext uri="{FF2B5EF4-FFF2-40B4-BE49-F238E27FC236}">
-                <a16:creationId xmlns:a16="http://schemas.microsoft.com/office/drawing/2014/main" id="{539B9465-65C9-45B7-96E9-2C410964A9F8}"/>
+                <a16:creationId xmlns:a16="http://schemas.microsoft.com/office/drawing/2014/main" id="{0B011294-3368-4BBE-ABF8-E195E787C528}"/>
               </a:ext>
             </a:extLst>
           </p:cNvPr>
@@ -13889,7 +13956,7 @@
           <p:cNvPr id="18" name="grid-v-1128">
             <a:extLst xmlns:a="http://schemas.openxmlformats.org/drawingml/2006/main">
               <a:ext uri="{FF2B5EF4-FFF2-40B4-BE49-F238E27FC236}">
-                <a16:creationId xmlns:a16="http://schemas.microsoft.com/office/drawing/2014/main" id="{32F9EF37-1F70-4E0A-BC21-DDC74F01FC00}"/>
+                <a16:creationId xmlns:a16="http://schemas.microsoft.com/office/drawing/2014/main" id="{AE6776A7-1905-40AB-AE1F-6BD5A866D347}"/>
               </a:ext>
             </a:extLst>
           </p:cNvPr>
@@ -13920,7 +13987,7 @@
           <p:cNvPr id="19" name="grid-v-1192">
             <a:extLst xmlns:a="http://schemas.openxmlformats.org/drawingml/2006/main">
               <a:ext uri="{FF2B5EF4-FFF2-40B4-BE49-F238E27FC236}">
-                <a16:creationId xmlns:a16="http://schemas.microsoft.com/office/drawing/2014/main" id="{B853415F-F193-4793-AAB9-EB1A8CB67CFD}"/>
+                <a16:creationId xmlns:a16="http://schemas.microsoft.com/office/drawing/2014/main" id="{16ED3B25-1C89-4E68-A909-9EA3DBD171BD}"/>
               </a:ext>
             </a:extLst>
           </p:cNvPr>
@@ -13951,7 +14018,7 @@
           <p:cNvPr id="20" name="grid-h-112">
             <a:extLst xmlns:a="http://schemas.openxmlformats.org/drawingml/2006/main">
               <a:ext uri="{FF2B5EF4-FFF2-40B4-BE49-F238E27FC236}">
-                <a16:creationId xmlns:a16="http://schemas.microsoft.com/office/drawing/2014/main" id="{4DC5638F-9683-4621-A4F0-14A1695CFF5E}"/>
+                <a16:creationId xmlns:a16="http://schemas.microsoft.com/office/drawing/2014/main" id="{6FEA5D5D-B756-46DA-ACC2-F59E8C34F162}"/>
               </a:ext>
             </a:extLst>
           </p:cNvPr>
@@ -13982,7 +14049,7 @@
           <p:cNvPr id="21" name="grid-h-176">
             <a:extLst xmlns:a="http://schemas.openxmlformats.org/drawingml/2006/main">
               <a:ext uri="{FF2B5EF4-FFF2-40B4-BE49-F238E27FC236}">
-                <a16:creationId xmlns:a16="http://schemas.microsoft.com/office/drawing/2014/main" id="{C22CAC37-ACFD-4683-ACAA-D51120E81E14}"/>
+                <a16:creationId xmlns:a16="http://schemas.microsoft.com/office/drawing/2014/main" id="{0835CA7C-D166-4B70-9015-A9C1B4EB5583}"/>
               </a:ext>
             </a:extLst>
           </p:cNvPr>
@@ -14013,7 +14080,7 @@
           <p:cNvPr id="22" name="grid-h-240">
             <a:extLst xmlns:a="http://schemas.openxmlformats.org/drawingml/2006/main">
               <a:ext uri="{FF2B5EF4-FFF2-40B4-BE49-F238E27FC236}">
-                <a16:creationId xmlns:a16="http://schemas.microsoft.com/office/drawing/2014/main" id="{6054A260-3EB9-44BB-AADE-438E992286E2}"/>
+                <a16:creationId xmlns:a16="http://schemas.microsoft.com/office/drawing/2014/main" id="{C3F18B69-3768-4D8F-8E98-A957E7C3002C}"/>
               </a:ext>
             </a:extLst>
           </p:cNvPr>
@@ -14044,7 +14111,7 @@
           <p:cNvPr id="23" name="grid-h-304">
             <a:extLst xmlns:a="http://schemas.openxmlformats.org/drawingml/2006/main">
               <a:ext uri="{FF2B5EF4-FFF2-40B4-BE49-F238E27FC236}">
-                <a16:creationId xmlns:a16="http://schemas.microsoft.com/office/drawing/2014/main" id="{C9B4D3F4-5BA2-4478-933D-9DEC906AE7E9}"/>
+                <a16:creationId xmlns:a16="http://schemas.microsoft.com/office/drawing/2014/main" id="{0C9CB1C6-1D98-42DB-8A27-D37CC0093BCD}"/>
               </a:ext>
             </a:extLst>
           </p:cNvPr>
@@ -14075,7 +14142,7 @@
           <p:cNvPr id="24" name="grid-h-368">
             <a:extLst xmlns:a="http://schemas.openxmlformats.org/drawingml/2006/main">
               <a:ext uri="{FF2B5EF4-FFF2-40B4-BE49-F238E27FC236}">
-                <a16:creationId xmlns:a16="http://schemas.microsoft.com/office/drawing/2014/main" id="{9FBC59DE-C003-4BEB-AB05-0366FD64F80B}"/>
+                <a16:creationId xmlns:a16="http://schemas.microsoft.com/office/drawing/2014/main" id="{0FAC36AB-98D7-4029-9B2D-B4E4AA0D6F33}"/>
               </a:ext>
             </a:extLst>
           </p:cNvPr>
@@ -14106,7 +14173,7 @@
           <p:cNvPr id="25" name="grid-h-432">
             <a:extLst xmlns:a="http://schemas.openxmlformats.org/drawingml/2006/main">
               <a:ext uri="{FF2B5EF4-FFF2-40B4-BE49-F238E27FC236}">
-                <a16:creationId xmlns:a16="http://schemas.microsoft.com/office/drawing/2014/main" id="{4FB9D043-5644-4232-AD34-69A1F51622A1}"/>
+                <a16:creationId xmlns:a16="http://schemas.microsoft.com/office/drawing/2014/main" id="{3F538871-16FB-4F17-B467-144636D94823}"/>
               </a:ext>
             </a:extLst>
           </p:cNvPr>
@@ -14137,7 +14204,7 @@
           <p:cNvPr id="26" name="grid-h-496">
             <a:extLst xmlns:a="http://schemas.openxmlformats.org/drawingml/2006/main">
               <a:ext uri="{FF2B5EF4-FFF2-40B4-BE49-F238E27FC236}">
-                <a16:creationId xmlns:a16="http://schemas.microsoft.com/office/drawing/2014/main" id="{4E008F20-85B2-4BDF-95F4-531E360C8F10}"/>
+                <a16:creationId xmlns:a16="http://schemas.microsoft.com/office/drawing/2014/main" id="{2A80580C-5DD9-410C-A14E-C9FBA786E127}"/>
               </a:ext>
             </a:extLst>
           </p:cNvPr>
@@ -14168,7 +14235,7 @@
           <p:cNvPr id="27" name="grid-h-560">
             <a:extLst xmlns:a="http://schemas.openxmlformats.org/drawingml/2006/main">
               <a:ext uri="{FF2B5EF4-FFF2-40B4-BE49-F238E27FC236}">
-                <a16:creationId xmlns:a16="http://schemas.microsoft.com/office/drawing/2014/main" id="{205C3B7A-8454-400D-9A96-B2DCEF992E11}"/>
+                <a16:creationId xmlns:a16="http://schemas.microsoft.com/office/drawing/2014/main" id="{BF1F69D1-BEEB-4299-96BF-4360A7FA550B}"/>
               </a:ext>
             </a:extLst>
           </p:cNvPr>
@@ -14199,7 +14266,7 @@
           <p:cNvPr id="28" name="grid-h-624">
             <a:extLst xmlns:a="http://schemas.openxmlformats.org/drawingml/2006/main">
               <a:ext uri="{FF2B5EF4-FFF2-40B4-BE49-F238E27FC236}">
-                <a16:creationId xmlns:a16="http://schemas.microsoft.com/office/drawing/2014/main" id="{CE1C6D9D-6FBA-4353-89D5-A3FD2A71CCA8}"/>
+                <a16:creationId xmlns:a16="http://schemas.microsoft.com/office/drawing/2014/main" id="{E8A3E560-E07E-41AB-9FE1-2B3EE47B6D53}"/>
               </a:ext>
             </a:extLst>
           </p:cNvPr>
@@ -14230,7 +14297,7 @@
           <p:cNvPr id="29" name="top-rule">
             <a:extLst xmlns:a="http://schemas.openxmlformats.org/drawingml/2006/main">
               <a:ext uri="{FF2B5EF4-FFF2-40B4-BE49-F238E27FC236}">
-                <a16:creationId xmlns:a16="http://schemas.microsoft.com/office/drawing/2014/main" id="{176AF705-4CB0-47D4-99B4-4B259969B18A}"/>
+                <a16:creationId xmlns:a16="http://schemas.microsoft.com/office/drawing/2014/main" id="{ED150423-F59B-4C25-8F87-D3406F63D395}"/>
               </a:ext>
             </a:extLst>
           </p:cNvPr>
@@ -14261,7 +14328,7 @@
           <p:cNvPr id="30" name="wordmark">
             <a:extLst xmlns:a="http://schemas.openxmlformats.org/drawingml/2006/main">
               <a:ext uri="{FF2B5EF4-FFF2-40B4-BE49-F238E27FC236}">
-                <a16:creationId xmlns:a16="http://schemas.microsoft.com/office/drawing/2014/main" id="{B4BA3A17-5B2E-468D-902E-37030F2DF76B}"/>
+                <a16:creationId xmlns:a16="http://schemas.microsoft.com/office/drawing/2014/main" id="{557E0E22-20BD-49BC-9892-B3783D2BF478}"/>
               </a:ext>
             </a:extLst>
           </p:cNvPr>
@@ -14323,7 +14390,7 @@
           <p:cNvPr id="31" name="environment-label">
             <a:extLst xmlns:a="http://schemas.openxmlformats.org/drawingml/2006/main">
               <a:ext uri="{FF2B5EF4-FFF2-40B4-BE49-F238E27FC236}">
-                <a16:creationId xmlns:a16="http://schemas.microsoft.com/office/drawing/2014/main" id="{E721FCE2-F239-42D8-A98E-B434395FD357}"/>
+                <a16:creationId xmlns:a16="http://schemas.microsoft.com/office/drawing/2014/main" id="{F7243CAC-4250-420C-8323-3181E89C4846}"/>
               </a:ext>
             </a:extLst>
           </p:cNvPr>
@@ -14385,7 +14452,7 @@
           <p:cNvPr id="32" name="slide-index">
             <a:extLst xmlns:a="http://schemas.openxmlformats.org/drawingml/2006/main">
               <a:ext uri="{FF2B5EF4-FFF2-40B4-BE49-F238E27FC236}">
-                <a16:creationId xmlns:a16="http://schemas.microsoft.com/office/drawing/2014/main" id="{CF1295B3-E413-475F-9EE9-36537F3F1FC8}"/>
+                <a16:creationId xmlns:a16="http://schemas.microsoft.com/office/drawing/2014/main" id="{6FC7554F-FB31-4121-9C58-7EF9D857CA81}"/>
               </a:ext>
             </a:extLst>
           </p:cNvPr>
@@ -14447,7 +14514,7 @@
           <p:cNvPr id="33" name="event-footer">
             <a:extLst xmlns:a="http://schemas.openxmlformats.org/drawingml/2006/main">
               <a:ext uri="{FF2B5EF4-FFF2-40B4-BE49-F238E27FC236}">
-                <a16:creationId xmlns:a16="http://schemas.microsoft.com/office/drawing/2014/main" id="{FA6D1206-59B6-421F-880A-B47AF9571003}"/>
+                <a16:creationId xmlns:a16="http://schemas.microsoft.com/office/drawing/2014/main" id="{A1F5668F-8A31-48BB-9FBB-720D9950EF2F}"/>
               </a:ext>
             </a:extLst>
           </p:cNvPr>
@@ -14509,7 +14576,7 @@
           <p:cNvPr id="34" name="honesty-footer">
             <a:extLst xmlns:a="http://schemas.openxmlformats.org/drawingml/2006/main">
               <a:ext uri="{FF2B5EF4-FFF2-40B4-BE49-F238E27FC236}">
-                <a16:creationId xmlns:a16="http://schemas.microsoft.com/office/drawing/2014/main" id="{061C754C-F85B-4928-874F-886C14356A8A}"/>
+                <a16:creationId xmlns:a16="http://schemas.microsoft.com/office/drawing/2014/main" id="{30F6F5D9-A3CA-4B4E-94D4-03BB64C27A03}"/>
               </a:ext>
             </a:extLst>
           </p:cNvPr>
@@ -14571,7 +14638,7 @@
           <p:cNvPr id="35" name="eyebrow">
             <a:extLst xmlns:a="http://schemas.openxmlformats.org/drawingml/2006/main">
               <a:ext uri="{FF2B5EF4-FFF2-40B4-BE49-F238E27FC236}">
-                <a16:creationId xmlns:a16="http://schemas.microsoft.com/office/drawing/2014/main" id="{04FE980A-E203-4B7B-97C4-345EA54C8A75}"/>
+                <a16:creationId xmlns:a16="http://schemas.microsoft.com/office/drawing/2014/main" id="{23BA7367-CF34-40F4-A7CE-FBF29333C1E8}"/>
               </a:ext>
             </a:extLst>
           </p:cNvPr>
@@ -14633,7 +14700,7 @@
           <p:cNvPr id="36" name="slide-title">
             <a:extLst xmlns:a="http://schemas.openxmlformats.org/drawingml/2006/main">
               <a:ext uri="{FF2B5EF4-FFF2-40B4-BE49-F238E27FC236}">
-                <a16:creationId xmlns:a16="http://schemas.microsoft.com/office/drawing/2014/main" id="{C14790BB-062A-4622-91AE-51863B4D6126}"/>
+                <a16:creationId xmlns:a16="http://schemas.microsoft.com/office/drawing/2014/main" id="{9A086670-6879-4DC8-9892-D14946579E7E}"/>
               </a:ext>
             </a:extLst>
           </p:cNvPr>
@@ -14695,7 +14762,7 @@
           <p:cNvPr id="37" name="rain-record-boundary">
             <a:extLst xmlns:a="http://schemas.openxmlformats.org/drawingml/2006/main">
               <a:ext uri="{FF2B5EF4-FFF2-40B4-BE49-F238E27FC236}">
-                <a16:creationId xmlns:a16="http://schemas.microsoft.com/office/drawing/2014/main" id="{DC296945-286F-4B5B-9A35-2C6EB195D761}"/>
+                <a16:creationId xmlns:a16="http://schemas.microsoft.com/office/drawing/2014/main" id="{DD81C99E-3F2E-46F6-8276-809CC3EA4FAF}"/>
               </a:ext>
             </a:extLst>
           </p:cNvPr>
@@ -14757,7 +14824,7 @@
           <p:cNvPr id="38" name="capture-label">
             <a:extLst xmlns:a="http://schemas.openxmlformats.org/drawingml/2006/main">
               <a:ext uri="{FF2B5EF4-FFF2-40B4-BE49-F238E27FC236}">
-                <a16:creationId xmlns:a16="http://schemas.microsoft.com/office/drawing/2014/main" id="{CE5E954D-D48C-48B6-88A2-68E2253965AA}"/>
+                <a16:creationId xmlns:a16="http://schemas.microsoft.com/office/drawing/2014/main" id="{4E957EED-2A1A-4433-B2BD-E9557BFF0776}"/>
               </a:ext>
             </a:extLst>
           </p:cNvPr>
@@ -14819,7 +14886,7 @@
           <p:cNvPr id="39" name="mcc-label">
             <a:extLst xmlns:a="http://schemas.openxmlformats.org/drawingml/2006/main">
               <a:ext uri="{FF2B5EF4-FFF2-40B4-BE49-F238E27FC236}">
-                <a16:creationId xmlns:a16="http://schemas.microsoft.com/office/drawing/2014/main" id="{AA715B44-C2FA-44FF-B86E-BFB6D5ABAE57}"/>
+                <a16:creationId xmlns:a16="http://schemas.microsoft.com/office/drawing/2014/main" id="{7252A3C7-709D-46BD-B73D-5DC39E9DEDE8}"/>
               </a:ext>
             </a:extLst>
           </p:cNvPr>
@@ -14881,7 +14948,7 @@
           <p:cNvPr id="40" name="authority-label">
             <a:extLst xmlns:a="http://schemas.openxmlformats.org/drawingml/2006/main">
               <a:ext uri="{FF2B5EF4-FFF2-40B4-BE49-F238E27FC236}">
-                <a16:creationId xmlns:a16="http://schemas.microsoft.com/office/drawing/2014/main" id="{38069102-33CE-4C99-B3FD-CC8303262FC7}"/>
+                <a16:creationId xmlns:a16="http://schemas.microsoft.com/office/drawing/2014/main" id="{56BDF205-809B-4516-A74E-0030EB77B344}"/>
               </a:ext>
             </a:extLst>
           </p:cNvPr>
@@ -14943,7 +15010,7 @@
           <p:cNvPr id="41" name="capture-index-0">
             <a:extLst xmlns:a="http://schemas.openxmlformats.org/drawingml/2006/main">
               <a:ext uri="{FF2B5EF4-FFF2-40B4-BE49-F238E27FC236}">
-                <a16:creationId xmlns:a16="http://schemas.microsoft.com/office/drawing/2014/main" id="{10DEA684-DB11-4A61-B4C8-4814B00F67EB}"/>
+                <a16:creationId xmlns:a16="http://schemas.microsoft.com/office/drawing/2014/main" id="{0C7F20AF-4D42-4037-AFDC-A99E8F50AEA3}"/>
               </a:ext>
             </a:extLst>
           </p:cNvPr>
@@ -15005,7 +15072,7 @@
           <p:cNvPr id="42" name="capture-who-0">
             <a:extLst xmlns:a="http://schemas.openxmlformats.org/drawingml/2006/main">
               <a:ext uri="{FF2B5EF4-FFF2-40B4-BE49-F238E27FC236}">
-                <a16:creationId xmlns:a16="http://schemas.microsoft.com/office/drawing/2014/main" id="{16A664C9-35BF-4FC9-ABD9-B062F1A64CDC}"/>
+                <a16:creationId xmlns:a16="http://schemas.microsoft.com/office/drawing/2014/main" id="{35D33418-1D34-4594-B1F1-862A2CC96285}"/>
               </a:ext>
             </a:extLst>
           </p:cNvPr>
@@ -15067,7 +15134,7 @@
           <p:cNvPr id="43" name="capture-amount-0">
             <a:extLst xmlns:a="http://schemas.openxmlformats.org/drawingml/2006/main">
               <a:ext uri="{FF2B5EF4-FFF2-40B4-BE49-F238E27FC236}">
-                <a16:creationId xmlns:a16="http://schemas.microsoft.com/office/drawing/2014/main" id="{2BEF6938-1629-488A-9766-AB2EF4B0DB09}"/>
+                <a16:creationId xmlns:a16="http://schemas.microsoft.com/office/drawing/2014/main" id="{4706FE72-12BA-41C6-B1C7-2657A80065B8}"/>
               </a:ext>
             </a:extLst>
           </p:cNvPr>
@@ -15129,7 +15196,7 @@
           <p:cNvPr id="44" name="capture-scope-0">
             <a:extLst xmlns:a="http://schemas.openxmlformats.org/drawingml/2006/main">
               <a:ext uri="{FF2B5EF4-FFF2-40B4-BE49-F238E27FC236}">
-                <a16:creationId xmlns:a16="http://schemas.microsoft.com/office/drawing/2014/main" id="{85BF101A-61FD-47ED-890E-75817EE9CA9F}"/>
+                <a16:creationId xmlns:a16="http://schemas.microsoft.com/office/drawing/2014/main" id="{E84D46EF-259A-4752-8DA4-A53B6999CD51}"/>
               </a:ext>
             </a:extLst>
           </p:cNvPr>
@@ -15160,7 +15227,7 @@
           <p:cNvPr id="45" name="capture-node-0">
             <a:extLst xmlns:a="http://schemas.openxmlformats.org/drawingml/2006/main">
               <a:ext uri="{FF2B5EF4-FFF2-40B4-BE49-F238E27FC236}">
-                <a16:creationId xmlns:a16="http://schemas.microsoft.com/office/drawing/2014/main" id="{4DDE7046-48ED-48AD-9B77-3962CA75A451}"/>
+                <a16:creationId xmlns:a16="http://schemas.microsoft.com/office/drawing/2014/main" id="{052BED27-6EF0-41EA-895E-6BE27AB8BAB5}"/>
               </a:ext>
             </a:extLst>
           </p:cNvPr>
@@ -15191,7 +15258,7 @@
           <p:cNvPr id="46" name="capture-mcc-0">
             <a:extLst xmlns:a="http://schemas.openxmlformats.org/drawingml/2006/main">
               <a:ext uri="{FF2B5EF4-FFF2-40B4-BE49-F238E27FC236}">
-                <a16:creationId xmlns:a16="http://schemas.microsoft.com/office/drawing/2014/main" id="{B3C1D924-AF8D-4880-A2A4-43AC035DB2F1}"/>
+                <a16:creationId xmlns:a16="http://schemas.microsoft.com/office/drawing/2014/main" id="{57CEBD74-8C8D-49C1-B4E8-B224AF91657D}"/>
               </a:ext>
             </a:extLst>
           </p:cNvPr>
@@ -15253,7 +15320,7 @@
           <p:cNvPr id="47" name="capture-scope-label-0">
             <a:extLst xmlns:a="http://schemas.openxmlformats.org/drawingml/2006/main">
               <a:ext uri="{FF2B5EF4-FFF2-40B4-BE49-F238E27FC236}">
-                <a16:creationId xmlns:a16="http://schemas.microsoft.com/office/drawing/2014/main" id="{968E35B4-6D53-4E7B-8633-334B89669F99}"/>
+                <a16:creationId xmlns:a16="http://schemas.microsoft.com/office/drawing/2014/main" id="{7F6CE1B6-20F0-4E20-9E48-FF4DDE3CE671}"/>
               </a:ext>
             </a:extLst>
           </p:cNvPr>
@@ -15315,7 +15382,7 @@
           <p:cNvPr id="48" name="capture-rule-0">
             <a:extLst xmlns:a="http://schemas.openxmlformats.org/drawingml/2006/main">
               <a:ext uri="{FF2B5EF4-FFF2-40B4-BE49-F238E27FC236}">
-                <a16:creationId xmlns:a16="http://schemas.microsoft.com/office/drawing/2014/main" id="{08BFA445-FF86-4200-945C-59D0EAAAA28B}"/>
+                <a16:creationId xmlns:a16="http://schemas.microsoft.com/office/drawing/2014/main" id="{F3A31090-24EB-4A57-BD1A-427E7FF58E01}"/>
               </a:ext>
             </a:extLst>
           </p:cNvPr>
@@ -15346,7 +15413,7 @@
           <p:cNvPr id="49" name="capture-index-1">
             <a:extLst xmlns:a="http://schemas.openxmlformats.org/drawingml/2006/main">
               <a:ext uri="{FF2B5EF4-FFF2-40B4-BE49-F238E27FC236}">
-                <a16:creationId xmlns:a16="http://schemas.microsoft.com/office/drawing/2014/main" id="{2D161DE0-76D8-4A9D-ABC9-5616D09BB830}"/>
+                <a16:creationId xmlns:a16="http://schemas.microsoft.com/office/drawing/2014/main" id="{40746F40-A4E1-4E91-BC28-A7B21521067F}"/>
               </a:ext>
             </a:extLst>
           </p:cNvPr>
@@ -15408,7 +15475,7 @@
           <p:cNvPr id="50" name="capture-who-1">
             <a:extLst xmlns:a="http://schemas.openxmlformats.org/drawingml/2006/main">
               <a:ext uri="{FF2B5EF4-FFF2-40B4-BE49-F238E27FC236}">
-                <a16:creationId xmlns:a16="http://schemas.microsoft.com/office/drawing/2014/main" id="{14EF5257-25A6-41F3-B5CD-CDD57F52050E}"/>
+                <a16:creationId xmlns:a16="http://schemas.microsoft.com/office/drawing/2014/main" id="{8EAA37DA-56DD-4C9C-BD0D-DA8195A7A66B}"/>
               </a:ext>
             </a:extLst>
           </p:cNvPr>
@@ -15470,7 +15537,7 @@
           <p:cNvPr id="51" name="capture-amount-1">
             <a:extLst xmlns:a="http://schemas.openxmlformats.org/drawingml/2006/main">
               <a:ext uri="{FF2B5EF4-FFF2-40B4-BE49-F238E27FC236}">
-                <a16:creationId xmlns:a16="http://schemas.microsoft.com/office/drawing/2014/main" id="{BCD79376-4E2E-4528-AF63-848C61F211A2}"/>
+                <a16:creationId xmlns:a16="http://schemas.microsoft.com/office/drawing/2014/main" id="{5FFC4DEC-EC71-4F40-81F5-A2F43E65C42D}"/>
               </a:ext>
             </a:extLst>
           </p:cNvPr>
@@ -15532,7 +15599,7 @@
           <p:cNvPr id="52" name="capture-scope-1">
             <a:extLst xmlns:a="http://schemas.openxmlformats.org/drawingml/2006/main">
               <a:ext uri="{FF2B5EF4-FFF2-40B4-BE49-F238E27FC236}">
-                <a16:creationId xmlns:a16="http://schemas.microsoft.com/office/drawing/2014/main" id="{584E52CE-9B16-475B-965B-1BE46F2BAD19}"/>
+                <a16:creationId xmlns:a16="http://schemas.microsoft.com/office/drawing/2014/main" id="{CEA8A312-4677-408F-9A60-441925AB6741}"/>
               </a:ext>
             </a:extLst>
           </p:cNvPr>
@@ -15563,7 +15630,7 @@
           <p:cNvPr id="53" name="capture-node-1">
             <a:extLst xmlns:a="http://schemas.openxmlformats.org/drawingml/2006/main">
               <a:ext uri="{FF2B5EF4-FFF2-40B4-BE49-F238E27FC236}">
-                <a16:creationId xmlns:a16="http://schemas.microsoft.com/office/drawing/2014/main" id="{5822D9A5-B529-488C-B337-92E627AB65C2}"/>
+                <a16:creationId xmlns:a16="http://schemas.microsoft.com/office/drawing/2014/main" id="{538B6B40-1009-41C1-ADE2-13BEAF2607E8}"/>
               </a:ext>
             </a:extLst>
           </p:cNvPr>
@@ -15594,7 +15661,7 @@
           <p:cNvPr id="54" name="capture-mcc-1">
             <a:extLst xmlns:a="http://schemas.openxmlformats.org/drawingml/2006/main">
               <a:ext uri="{FF2B5EF4-FFF2-40B4-BE49-F238E27FC236}">
-                <a16:creationId xmlns:a16="http://schemas.microsoft.com/office/drawing/2014/main" id="{C8FA14F7-5ED5-4A56-9687-32238546F99F}"/>
+                <a16:creationId xmlns:a16="http://schemas.microsoft.com/office/drawing/2014/main" id="{6DDD3010-ECEF-47D8-AE42-287443DB522E}"/>
               </a:ext>
             </a:extLst>
           </p:cNvPr>
@@ -15656,7 +15723,7 @@
           <p:cNvPr id="55" name="capture-scope-label-1">
             <a:extLst xmlns:a="http://schemas.openxmlformats.org/drawingml/2006/main">
               <a:ext uri="{FF2B5EF4-FFF2-40B4-BE49-F238E27FC236}">
-                <a16:creationId xmlns:a16="http://schemas.microsoft.com/office/drawing/2014/main" id="{C0C886F0-D7F8-4098-8C00-E0B04504C21A}"/>
+                <a16:creationId xmlns:a16="http://schemas.microsoft.com/office/drawing/2014/main" id="{3CFDC28A-C09B-4EDB-AB0D-B17D16B0253E}"/>
               </a:ext>
             </a:extLst>
           </p:cNvPr>
@@ -15718,7 +15785,7 @@
           <p:cNvPr id="56" name="capture-rule-1">
             <a:extLst xmlns:a="http://schemas.openxmlformats.org/drawingml/2006/main">
               <a:ext uri="{FF2B5EF4-FFF2-40B4-BE49-F238E27FC236}">
-                <a16:creationId xmlns:a16="http://schemas.microsoft.com/office/drawing/2014/main" id="{57D6B32C-137A-4B2F-925F-18297973F807}"/>
+                <a16:creationId xmlns:a16="http://schemas.microsoft.com/office/drawing/2014/main" id="{21F3454F-B26D-437A-A9D6-6E0B89409954}"/>
               </a:ext>
             </a:extLst>
           </p:cNvPr>
@@ -15749,7 +15816,7 @@
           <p:cNvPr id="57" name="capture-index-2">
             <a:extLst xmlns:a="http://schemas.openxmlformats.org/drawingml/2006/main">
               <a:ext uri="{FF2B5EF4-FFF2-40B4-BE49-F238E27FC236}">
-                <a16:creationId xmlns:a16="http://schemas.microsoft.com/office/drawing/2014/main" id="{7B03DA59-9DB2-450E-B901-C8B5FC61945F}"/>
+                <a16:creationId xmlns:a16="http://schemas.microsoft.com/office/drawing/2014/main" id="{9EC9A399-B5F8-4F4F-B332-BB4A3008C85E}"/>
               </a:ext>
             </a:extLst>
           </p:cNvPr>
@@ -15811,7 +15878,7 @@
           <p:cNvPr id="58" name="capture-who-2">
             <a:extLst xmlns:a="http://schemas.openxmlformats.org/drawingml/2006/main">
               <a:ext uri="{FF2B5EF4-FFF2-40B4-BE49-F238E27FC236}">
-                <a16:creationId xmlns:a16="http://schemas.microsoft.com/office/drawing/2014/main" id="{910710AE-4C2A-4031-82F3-32327069E454}"/>
+                <a16:creationId xmlns:a16="http://schemas.microsoft.com/office/drawing/2014/main" id="{B7D780D2-6891-4B66-ADAF-5A914B75EC24}"/>
               </a:ext>
             </a:extLst>
           </p:cNvPr>
@@ -15873,7 +15940,7 @@
           <p:cNvPr id="59" name="capture-amount-2">
             <a:extLst xmlns:a="http://schemas.openxmlformats.org/drawingml/2006/main">
               <a:ext uri="{FF2B5EF4-FFF2-40B4-BE49-F238E27FC236}">
-                <a16:creationId xmlns:a16="http://schemas.microsoft.com/office/drawing/2014/main" id="{E9E62D17-4B04-47B4-A7B6-F66E8E547F70}"/>
+                <a16:creationId xmlns:a16="http://schemas.microsoft.com/office/drawing/2014/main" id="{EF7D1D49-139C-482F-8555-A5038BFE835F}"/>
               </a:ext>
             </a:extLst>
           </p:cNvPr>
@@ -15935,7 +16002,7 @@
           <p:cNvPr id="60" name="capture-scope-2">
             <a:extLst xmlns:a="http://schemas.openxmlformats.org/drawingml/2006/main">
               <a:ext uri="{FF2B5EF4-FFF2-40B4-BE49-F238E27FC236}">
-                <a16:creationId xmlns:a16="http://schemas.microsoft.com/office/drawing/2014/main" id="{0E619D79-3DF3-451E-A39F-015A9803B2C6}"/>
+                <a16:creationId xmlns:a16="http://schemas.microsoft.com/office/drawing/2014/main" id="{8690869F-F2A4-4E1F-B9A2-46568C06B70D}"/>
               </a:ext>
             </a:extLst>
           </p:cNvPr>
@@ -15966,7 +16033,7 @@
           <p:cNvPr id="61" name="capture-node-2">
             <a:extLst xmlns:a="http://schemas.openxmlformats.org/drawingml/2006/main">
               <a:ext uri="{FF2B5EF4-FFF2-40B4-BE49-F238E27FC236}">
-                <a16:creationId xmlns:a16="http://schemas.microsoft.com/office/drawing/2014/main" id="{9154C7D3-C33A-46C9-BD32-01FD6BC3E536}"/>
+                <a16:creationId xmlns:a16="http://schemas.microsoft.com/office/drawing/2014/main" id="{CC7C7C18-1D60-4B87-8761-C3ECA95FA2D5}"/>
               </a:ext>
             </a:extLst>
           </p:cNvPr>
@@ -15997,7 +16064,7 @@
           <p:cNvPr id="62" name="capture-mcc-2">
             <a:extLst xmlns:a="http://schemas.openxmlformats.org/drawingml/2006/main">
               <a:ext uri="{FF2B5EF4-FFF2-40B4-BE49-F238E27FC236}">
-                <a16:creationId xmlns:a16="http://schemas.microsoft.com/office/drawing/2014/main" id="{5023635F-EA72-4FBE-829A-97DD7EADA898}"/>
+                <a16:creationId xmlns:a16="http://schemas.microsoft.com/office/drawing/2014/main" id="{13C958A3-0CC4-4F48-826C-BA75F65A4B08}"/>
               </a:ext>
             </a:extLst>
           </p:cNvPr>
@@ -16059,7 +16126,7 @@
           <p:cNvPr id="63" name="capture-scope-label-2">
             <a:extLst xmlns:a="http://schemas.openxmlformats.org/drawingml/2006/main">
               <a:ext uri="{FF2B5EF4-FFF2-40B4-BE49-F238E27FC236}">
-                <a16:creationId xmlns:a16="http://schemas.microsoft.com/office/drawing/2014/main" id="{348AAF1F-305C-41C9-A767-A6EA0CD016EB}"/>
+                <a16:creationId xmlns:a16="http://schemas.microsoft.com/office/drawing/2014/main" id="{630BF796-BC4D-4B7B-AED2-79563F477AE7}"/>
               </a:ext>
             </a:extLst>
           </p:cNvPr>
@@ -16121,7 +16188,7 @@
           <p:cNvPr id="64" name="capture-rule-2">
             <a:extLst xmlns:a="http://schemas.openxmlformats.org/drawingml/2006/main">
               <a:ext uri="{FF2B5EF4-FFF2-40B4-BE49-F238E27FC236}">
-                <a16:creationId xmlns:a16="http://schemas.microsoft.com/office/drawing/2014/main" id="{8F2073BF-4565-4F62-BBB8-9EC3A67A80C2}"/>
+                <a16:creationId xmlns:a16="http://schemas.microsoft.com/office/drawing/2014/main" id="{856EEEFB-F9D9-4D2E-BA20-5172B7A95452}"/>
               </a:ext>
             </a:extLst>
           </p:cNvPr>
@@ -16152,7 +16219,7 @@
           <p:cNvPr id="65" name="decline-strip">
             <a:extLst xmlns:a="http://schemas.openxmlformats.org/drawingml/2006/main">
               <a:ext uri="{FF2B5EF4-FFF2-40B4-BE49-F238E27FC236}">
-                <a16:creationId xmlns:a16="http://schemas.microsoft.com/office/drawing/2014/main" id="{2C80CE16-8A51-426E-ABA7-1E86050FB40A}"/>
+                <a16:creationId xmlns:a16="http://schemas.microsoft.com/office/drawing/2014/main" id="{6D2367D6-DD93-4E37-9731-6885BE016339}"/>
               </a:ext>
             </a:extLst>
           </p:cNvPr>
@@ -16185,7 +16252,7 @@
           <p:cNvPr id="66" name="challenge-label">
             <a:extLst xmlns:a="http://schemas.openxmlformats.org/drawingml/2006/main">
               <a:ext uri="{FF2B5EF4-FFF2-40B4-BE49-F238E27FC236}">
-                <a16:creationId xmlns:a16="http://schemas.microsoft.com/office/drawing/2014/main" id="{FAC3DCCD-09EE-4FEA-9C20-F2019566ACF4}"/>
+                <a16:creationId xmlns:a16="http://schemas.microsoft.com/office/drawing/2014/main" id="{D64ABEE2-41E6-4E05-BACD-720E9DCD9A43}"/>
               </a:ext>
             </a:extLst>
           </p:cNvPr>
@@ -16247,7 +16314,7 @@
           <p:cNvPr id="67" name="blocked-mcc">
             <a:extLst xmlns:a="http://schemas.openxmlformats.org/drawingml/2006/main">
               <a:ext uri="{FF2B5EF4-FFF2-40B4-BE49-F238E27FC236}">
-                <a16:creationId xmlns:a16="http://schemas.microsoft.com/office/drawing/2014/main" id="{EC05BF9D-B7B1-4771-901A-C17907A89F91}"/>
+                <a16:creationId xmlns:a16="http://schemas.microsoft.com/office/drawing/2014/main" id="{3EC76DA6-C44A-412C-8473-40719918C415}"/>
               </a:ext>
             </a:extLst>
           </p:cNvPr>
@@ -16309,7 +16376,7 @@
           <p:cNvPr id="68" name="decline-reason">
             <a:extLst xmlns:a="http://schemas.openxmlformats.org/drawingml/2006/main">
               <a:ext uri="{FF2B5EF4-FFF2-40B4-BE49-F238E27FC236}">
-                <a16:creationId xmlns:a16="http://schemas.microsoft.com/office/drawing/2014/main" id="{C2908174-C38A-4BE2-BEFB-F262279DED1A}"/>
+                <a16:creationId xmlns:a16="http://schemas.microsoft.com/office/drawing/2014/main" id="{CD1F4A9D-514E-41EF-A65E-4B15938686A1}"/>
               </a:ext>
             </a:extLst>
           </p:cNvPr>
@@ -16371,7 +16438,7 @@
           <p:cNvPr id="69" name="decline-result">
             <a:extLst xmlns:a="http://schemas.openxmlformats.org/drawingml/2006/main">
               <a:ext uri="{FF2B5EF4-FFF2-40B4-BE49-F238E27FC236}">
-                <a16:creationId xmlns:a16="http://schemas.microsoft.com/office/drawing/2014/main" id="{8A4B752B-EBAD-4E83-83F0-F3DA1A396026}"/>
+                <a16:creationId xmlns:a16="http://schemas.microsoft.com/office/drawing/2014/main" id="{4A33CD8C-2A2F-4931-AD46-FE18AC6808D7}"/>
               </a:ext>
             </a:extLst>
           </p:cNvPr>
@@ -16433,7 +16500,7 @@
           <p:cNvPr id="70" name="decline-arrow-shaft">
             <a:extLst xmlns:a="http://schemas.openxmlformats.org/drawingml/2006/main">
               <a:ext uri="{FF2B5EF4-FFF2-40B4-BE49-F238E27FC236}">
-                <a16:creationId xmlns:a16="http://schemas.microsoft.com/office/drawing/2014/main" id="{E544705A-38B2-4545-ABC8-E655726CB122}"/>
+                <a16:creationId xmlns:a16="http://schemas.microsoft.com/office/drawing/2014/main" id="{B628F001-0259-4AC8-8FAF-23D802A0D1AF}"/>
               </a:ext>
             </a:extLst>
           </p:cNvPr>
@@ -16464,7 +16531,7 @@
           <p:cNvPr id="71" name="decline-arrow-head">
             <a:extLst xmlns:a="http://schemas.openxmlformats.org/drawingml/2006/main">
               <a:ext uri="{FF2B5EF4-FFF2-40B4-BE49-F238E27FC236}">
-                <a16:creationId xmlns:a16="http://schemas.microsoft.com/office/drawing/2014/main" id="{23E733CC-0AB1-4BCE-ABF1-D1ED0A3B9182}"/>
+                <a16:creationId xmlns:a16="http://schemas.microsoft.com/office/drawing/2014/main" id="{DB271B9B-15DC-44C7-9F3E-E2D5B7FF10E6}"/>
               </a:ext>
             </a:extLst>
           </p:cNvPr>
@@ -16493,7 +16560,7 @@
     </p:spTree>
     <p:extLst>
       <p:ext uri="{BB962C8B-B14F-4D97-AF65-F5344CB8AC3E}">
-        <p14:creationId xmlns:p14="http://schemas.microsoft.com/office/powerpoint/2010/main" val="956928848"/>
+        <p14:creationId xmlns:p14="http://schemas.microsoft.com/office/powerpoint/2010/main" val="20357171"/>
       </p:ext>
     </p:extLst>
   </p:cSld>
@@ -16521,10 +16588,10 @@
       </p:grpSpPr>
       <p:sp>
         <p:nvSpPr>
-          <p:cNvPr id="67" name="grid-v-40">
-            <a:extLst xmlns:a="http://schemas.openxmlformats.org/drawingml/2006/main">
-              <a:ext uri="{FF2B5EF4-FFF2-40B4-BE49-F238E27FC236}">
-                <a16:creationId xmlns:a16="http://schemas.microsoft.com/office/drawing/2014/main" id="{998A8268-BCA1-48DB-BD40-381C519E806A}"/>
+          <p:cNvPr id="72" name="grid-v-40">
+            <a:extLst xmlns:a="http://schemas.openxmlformats.org/drawingml/2006/main">
+              <a:ext uri="{FF2B5EF4-FFF2-40B4-BE49-F238E27FC236}">
+                <a16:creationId xmlns:a16="http://schemas.microsoft.com/office/drawing/2014/main" id="{6C875279-47E5-4201-B04D-D70F28F43FED}"/>
               </a:ext>
             </a:extLst>
           </p:cNvPr>
@@ -16555,7 +16622,7 @@
           <p:cNvPr id="2" name="grid-v-104">
             <a:extLst xmlns:a="http://schemas.openxmlformats.org/drawingml/2006/main">
               <a:ext uri="{FF2B5EF4-FFF2-40B4-BE49-F238E27FC236}">
-                <a16:creationId xmlns:a16="http://schemas.microsoft.com/office/drawing/2014/main" id="{066E2498-B384-4C01-AE97-DFFDFB9FED61}"/>
+                <a16:creationId xmlns:a16="http://schemas.microsoft.com/office/drawing/2014/main" id="{65F09E42-D602-4643-98E3-74F3360BDFC0}"/>
               </a:ext>
             </a:extLst>
           </p:cNvPr>
@@ -16586,7 +16653,7 @@
           <p:cNvPr id="3" name="grid-v-168">
             <a:extLst xmlns:a="http://schemas.openxmlformats.org/drawingml/2006/main">
               <a:ext uri="{FF2B5EF4-FFF2-40B4-BE49-F238E27FC236}">
-                <a16:creationId xmlns:a16="http://schemas.microsoft.com/office/drawing/2014/main" id="{68B56062-EACD-4B8D-BE89-CFBFA5EFA44C}"/>
+                <a16:creationId xmlns:a16="http://schemas.microsoft.com/office/drawing/2014/main" id="{E957A7CD-3FE7-444A-B3A6-6FE1B5B1410B}"/>
               </a:ext>
             </a:extLst>
           </p:cNvPr>
@@ -16617,7 +16684,7 @@
           <p:cNvPr id="4" name="grid-v-232">
             <a:extLst xmlns:a="http://schemas.openxmlformats.org/drawingml/2006/main">
               <a:ext uri="{FF2B5EF4-FFF2-40B4-BE49-F238E27FC236}">
-                <a16:creationId xmlns:a16="http://schemas.microsoft.com/office/drawing/2014/main" id="{251C76E8-CE88-43BD-8229-DBAABB536D2E}"/>
+                <a16:creationId xmlns:a16="http://schemas.microsoft.com/office/drawing/2014/main" id="{D609410B-D1B3-4CD0-BBE2-E8563152F286}"/>
               </a:ext>
             </a:extLst>
           </p:cNvPr>
@@ -16648,7 +16715,7 @@
           <p:cNvPr id="5" name="grid-v-296">
             <a:extLst xmlns:a="http://schemas.openxmlformats.org/drawingml/2006/main">
               <a:ext uri="{FF2B5EF4-FFF2-40B4-BE49-F238E27FC236}">
-                <a16:creationId xmlns:a16="http://schemas.microsoft.com/office/drawing/2014/main" id="{865A1393-C3A8-42E1-B199-C1C4DDF09C9A}"/>
+                <a16:creationId xmlns:a16="http://schemas.microsoft.com/office/drawing/2014/main" id="{CF07C903-4A56-4243-8C2F-F00691314704}"/>
               </a:ext>
             </a:extLst>
           </p:cNvPr>
@@ -16679,7 +16746,7 @@
           <p:cNvPr id="6" name="grid-v-360">
             <a:extLst xmlns:a="http://schemas.openxmlformats.org/drawingml/2006/main">
               <a:ext uri="{FF2B5EF4-FFF2-40B4-BE49-F238E27FC236}">
-                <a16:creationId xmlns:a16="http://schemas.microsoft.com/office/drawing/2014/main" id="{309E6DB0-04F3-4DA6-AA77-A1E46B8D1090}"/>
+                <a16:creationId xmlns:a16="http://schemas.microsoft.com/office/drawing/2014/main" id="{281A4BD5-A9A5-43CB-8886-68E2687ACB55}"/>
               </a:ext>
             </a:extLst>
           </p:cNvPr>
@@ -16710,7 +16777,7 @@
           <p:cNvPr id="7" name="grid-v-424">
             <a:extLst xmlns:a="http://schemas.openxmlformats.org/drawingml/2006/main">
               <a:ext uri="{FF2B5EF4-FFF2-40B4-BE49-F238E27FC236}">
-                <a16:creationId xmlns:a16="http://schemas.microsoft.com/office/drawing/2014/main" id="{21DC4304-DCE3-4F1F-AF6E-B7F6D572F788}"/>
+                <a16:creationId xmlns:a16="http://schemas.microsoft.com/office/drawing/2014/main" id="{A90274DD-BD13-4AF8-A91D-21D5DB2BD238}"/>
               </a:ext>
             </a:extLst>
           </p:cNvPr>
@@ -16741,7 +16808,7 @@
           <p:cNvPr id="8" name="grid-v-488">
             <a:extLst xmlns:a="http://schemas.openxmlformats.org/drawingml/2006/main">
               <a:ext uri="{FF2B5EF4-FFF2-40B4-BE49-F238E27FC236}">
-                <a16:creationId xmlns:a16="http://schemas.microsoft.com/office/drawing/2014/main" id="{9E8B8684-E032-415B-8D6C-B6CBDADA7CEF}"/>
+                <a16:creationId xmlns:a16="http://schemas.microsoft.com/office/drawing/2014/main" id="{3B7D1281-23F0-48B2-9149-452EE136CE27}"/>
               </a:ext>
             </a:extLst>
           </p:cNvPr>
@@ -16772,7 +16839,7 @@
           <p:cNvPr id="9" name="grid-v-552">
             <a:extLst xmlns:a="http://schemas.openxmlformats.org/drawingml/2006/main">
               <a:ext uri="{FF2B5EF4-FFF2-40B4-BE49-F238E27FC236}">
-                <a16:creationId xmlns:a16="http://schemas.microsoft.com/office/drawing/2014/main" id="{FB94A2A0-2EED-4B27-9AE7-139863EA8065}"/>
+                <a16:creationId xmlns:a16="http://schemas.microsoft.com/office/drawing/2014/main" id="{93DD34AB-BD2C-4E69-8377-7653664C7857}"/>
               </a:ext>
             </a:extLst>
           </p:cNvPr>
@@ -16803,7 +16870,7 @@
           <p:cNvPr id="10" name="grid-v-616">
             <a:extLst xmlns:a="http://schemas.openxmlformats.org/drawingml/2006/main">
               <a:ext uri="{FF2B5EF4-FFF2-40B4-BE49-F238E27FC236}">
-                <a16:creationId xmlns:a16="http://schemas.microsoft.com/office/drawing/2014/main" id="{81B0944B-61AA-4B00-A397-0DD52DD9F4E3}"/>
+                <a16:creationId xmlns:a16="http://schemas.microsoft.com/office/drawing/2014/main" id="{FF8DE686-7941-429F-B0FA-0BDA1714C861}"/>
               </a:ext>
             </a:extLst>
           </p:cNvPr>
@@ -16834,7 +16901,7 @@
           <p:cNvPr id="11" name="grid-v-680">
             <a:extLst xmlns:a="http://schemas.openxmlformats.org/drawingml/2006/main">
               <a:ext uri="{FF2B5EF4-FFF2-40B4-BE49-F238E27FC236}">
-                <a16:creationId xmlns:a16="http://schemas.microsoft.com/office/drawing/2014/main" id="{65830409-4D8E-482D-BFDC-484E87F5F61D}"/>
+                <a16:creationId xmlns:a16="http://schemas.microsoft.com/office/drawing/2014/main" id="{B47AE505-EC0E-4588-B7EA-B264D2FBEB88}"/>
               </a:ext>
             </a:extLst>
           </p:cNvPr>
@@ -16865,7 +16932,7 @@
           <p:cNvPr id="12" name="grid-v-744">
             <a:extLst xmlns:a="http://schemas.openxmlformats.org/drawingml/2006/main">
               <a:ext uri="{FF2B5EF4-FFF2-40B4-BE49-F238E27FC236}">
-                <a16:creationId xmlns:a16="http://schemas.microsoft.com/office/drawing/2014/main" id="{A43B57AE-4072-44E9-9009-11FC900AFE46}"/>
+                <a16:creationId xmlns:a16="http://schemas.microsoft.com/office/drawing/2014/main" id="{46A8FBCB-C628-449F-9D7D-41997812F110}"/>
               </a:ext>
             </a:extLst>
           </p:cNvPr>
@@ -16896,7 +16963,7 @@
           <p:cNvPr id="13" name="grid-v-808">
             <a:extLst xmlns:a="http://schemas.openxmlformats.org/drawingml/2006/main">
               <a:ext uri="{FF2B5EF4-FFF2-40B4-BE49-F238E27FC236}">
-                <a16:creationId xmlns:a16="http://schemas.microsoft.com/office/drawing/2014/main" id="{93D6E879-3E42-42D2-81E8-E5DC941E1F7F}"/>
+                <a16:creationId xmlns:a16="http://schemas.microsoft.com/office/drawing/2014/main" id="{4A1DDDFD-9F0F-4081-9AB9-AF150E98591A}"/>
               </a:ext>
             </a:extLst>
           </p:cNvPr>
@@ -16927,7 +16994,7 @@
           <p:cNvPr id="14" name="grid-v-872">
             <a:extLst xmlns:a="http://schemas.openxmlformats.org/drawingml/2006/main">
               <a:ext uri="{FF2B5EF4-FFF2-40B4-BE49-F238E27FC236}">
-                <a16:creationId xmlns:a16="http://schemas.microsoft.com/office/drawing/2014/main" id="{F6AF1039-C1AE-4168-9A7A-96BD03AB7D28}"/>
+                <a16:creationId xmlns:a16="http://schemas.microsoft.com/office/drawing/2014/main" id="{9429F701-E16C-42A7-9D91-844E24292137}"/>
               </a:ext>
             </a:extLst>
           </p:cNvPr>
@@ -16958,7 +17025,7 @@
           <p:cNvPr id="15" name="grid-v-936">
             <a:extLst xmlns:a="http://schemas.openxmlformats.org/drawingml/2006/main">
               <a:ext uri="{FF2B5EF4-FFF2-40B4-BE49-F238E27FC236}">
-                <a16:creationId xmlns:a16="http://schemas.microsoft.com/office/drawing/2014/main" id="{CAE725E8-C7FB-4B36-80A3-8C619505DD95}"/>
+                <a16:creationId xmlns:a16="http://schemas.microsoft.com/office/drawing/2014/main" id="{437CA376-B20B-4E83-A50C-D5414AA730C5}"/>
               </a:ext>
             </a:extLst>
           </p:cNvPr>
@@ -16989,7 +17056,7 @@
           <p:cNvPr id="16" name="grid-v-1000">
             <a:extLst xmlns:a="http://schemas.openxmlformats.org/drawingml/2006/main">
               <a:ext uri="{FF2B5EF4-FFF2-40B4-BE49-F238E27FC236}">
-                <a16:creationId xmlns:a16="http://schemas.microsoft.com/office/drawing/2014/main" id="{5ABA4F35-DC92-4823-AF02-6A9DC1433FEF}"/>
+                <a16:creationId xmlns:a16="http://schemas.microsoft.com/office/drawing/2014/main" id="{E74FC184-EB2D-4231-B194-D0990404A8D6}"/>
               </a:ext>
             </a:extLst>
           </p:cNvPr>
@@ -17020,7 +17087,7 @@
           <p:cNvPr id="17" name="grid-v-1064">
             <a:extLst xmlns:a="http://schemas.openxmlformats.org/drawingml/2006/main">
               <a:ext uri="{FF2B5EF4-FFF2-40B4-BE49-F238E27FC236}">
-                <a16:creationId xmlns:a16="http://schemas.microsoft.com/office/drawing/2014/main" id="{6B17E82F-6E9D-4819-8186-77C92964284F}"/>
+                <a16:creationId xmlns:a16="http://schemas.microsoft.com/office/drawing/2014/main" id="{7ECC9437-28AA-46C2-9512-C656E76A26E8}"/>
               </a:ext>
             </a:extLst>
           </p:cNvPr>
@@ -17051,7 +17118,7 @@
           <p:cNvPr id="18" name="grid-v-1128">
             <a:extLst xmlns:a="http://schemas.openxmlformats.org/drawingml/2006/main">
               <a:ext uri="{FF2B5EF4-FFF2-40B4-BE49-F238E27FC236}">
-                <a16:creationId xmlns:a16="http://schemas.microsoft.com/office/drawing/2014/main" id="{BD1544B6-B24F-4DEE-BE4C-54E3B08F0C79}"/>
+                <a16:creationId xmlns:a16="http://schemas.microsoft.com/office/drawing/2014/main" id="{C6461B6B-6901-4472-8D84-213AE2A4784A}"/>
               </a:ext>
             </a:extLst>
           </p:cNvPr>
@@ -17082,7 +17149,7 @@
           <p:cNvPr id="19" name="grid-v-1192">
             <a:extLst xmlns:a="http://schemas.openxmlformats.org/drawingml/2006/main">
               <a:ext uri="{FF2B5EF4-FFF2-40B4-BE49-F238E27FC236}">
-                <a16:creationId xmlns:a16="http://schemas.microsoft.com/office/drawing/2014/main" id="{42605941-EE9A-45F9-977D-E4E7B0110257}"/>
+                <a16:creationId xmlns:a16="http://schemas.microsoft.com/office/drawing/2014/main" id="{51FD8772-7F6C-4BD2-BFCF-EFDBC75EA664}"/>
               </a:ext>
             </a:extLst>
           </p:cNvPr>
@@ -17113,7 +17180,7 @@
           <p:cNvPr id="20" name="grid-h-112">
             <a:extLst xmlns:a="http://schemas.openxmlformats.org/drawingml/2006/main">
               <a:ext uri="{FF2B5EF4-FFF2-40B4-BE49-F238E27FC236}">
-                <a16:creationId xmlns:a16="http://schemas.microsoft.com/office/drawing/2014/main" id="{43F47157-EAF9-4B67-9EC3-0FD7E2EE168F}"/>
+                <a16:creationId xmlns:a16="http://schemas.microsoft.com/office/drawing/2014/main" id="{C0E418AA-ADE2-464A-B43B-F89C3842E1A9}"/>
               </a:ext>
             </a:extLst>
           </p:cNvPr>
@@ -17144,7 +17211,7 @@
           <p:cNvPr id="21" name="grid-h-176">
             <a:extLst xmlns:a="http://schemas.openxmlformats.org/drawingml/2006/main">
               <a:ext uri="{FF2B5EF4-FFF2-40B4-BE49-F238E27FC236}">
-                <a16:creationId xmlns:a16="http://schemas.microsoft.com/office/drawing/2014/main" id="{CFDE5CE0-0040-46D3-AAE3-885297CB5E60}"/>
+                <a16:creationId xmlns:a16="http://schemas.microsoft.com/office/drawing/2014/main" id="{8C4C77C6-800A-4A09-9A82-8270BA9270AA}"/>
               </a:ext>
             </a:extLst>
           </p:cNvPr>
@@ -17175,7 +17242,7 @@
           <p:cNvPr id="22" name="grid-h-240">
             <a:extLst xmlns:a="http://schemas.openxmlformats.org/drawingml/2006/main">
               <a:ext uri="{FF2B5EF4-FFF2-40B4-BE49-F238E27FC236}">
-                <a16:creationId xmlns:a16="http://schemas.microsoft.com/office/drawing/2014/main" id="{E90DFE43-4731-4746-A167-20A3EE629E3E}"/>
+                <a16:creationId xmlns:a16="http://schemas.microsoft.com/office/drawing/2014/main" id="{8CE7373A-7627-4B89-AF06-972CA2502921}"/>
               </a:ext>
             </a:extLst>
           </p:cNvPr>
@@ -17206,7 +17273,7 @@
           <p:cNvPr id="23" name="grid-h-304">
             <a:extLst xmlns:a="http://schemas.openxmlformats.org/drawingml/2006/main">
               <a:ext uri="{FF2B5EF4-FFF2-40B4-BE49-F238E27FC236}">
-                <a16:creationId xmlns:a16="http://schemas.microsoft.com/office/drawing/2014/main" id="{A19CED85-40C5-4A73-8329-DBB30935E06A}"/>
+                <a16:creationId xmlns:a16="http://schemas.microsoft.com/office/drawing/2014/main" id="{5DD2090A-C81C-48A7-9E2C-5341D2B4658E}"/>
               </a:ext>
             </a:extLst>
           </p:cNvPr>
@@ -17237,7 +17304,7 @@
           <p:cNvPr id="24" name="grid-h-368">
             <a:extLst xmlns:a="http://schemas.openxmlformats.org/drawingml/2006/main">
               <a:ext uri="{FF2B5EF4-FFF2-40B4-BE49-F238E27FC236}">
-                <a16:creationId xmlns:a16="http://schemas.microsoft.com/office/drawing/2014/main" id="{2D49AF0E-60FD-4425-B95E-5A1CA4EF278B}"/>
+                <a16:creationId xmlns:a16="http://schemas.microsoft.com/office/drawing/2014/main" id="{69F918E2-788A-4930-80C4-B4D909E94F75}"/>
               </a:ext>
             </a:extLst>
           </p:cNvPr>
@@ -17268,7 +17335,7 @@
           <p:cNvPr id="25" name="grid-h-432">
             <a:extLst xmlns:a="http://schemas.openxmlformats.org/drawingml/2006/main">
               <a:ext uri="{FF2B5EF4-FFF2-40B4-BE49-F238E27FC236}">
-                <a16:creationId xmlns:a16="http://schemas.microsoft.com/office/drawing/2014/main" id="{909C382C-FFDF-4AD3-ADD3-6491E59CFCCB}"/>
+                <a16:creationId xmlns:a16="http://schemas.microsoft.com/office/drawing/2014/main" id="{7FC69472-BC69-4271-8637-679A9F6028C8}"/>
               </a:ext>
             </a:extLst>
           </p:cNvPr>
@@ -17299,7 +17366,7 @@
           <p:cNvPr id="26" name="grid-h-496">
             <a:extLst xmlns:a="http://schemas.openxmlformats.org/drawingml/2006/main">
               <a:ext uri="{FF2B5EF4-FFF2-40B4-BE49-F238E27FC236}">
-                <a16:creationId xmlns:a16="http://schemas.microsoft.com/office/drawing/2014/main" id="{9249C5D8-8DD3-4B6A-9D34-7B34AE05AF95}"/>
+                <a16:creationId xmlns:a16="http://schemas.microsoft.com/office/drawing/2014/main" id="{810656F2-F442-44AF-8AFF-98C99ACC8143}"/>
               </a:ext>
             </a:extLst>
           </p:cNvPr>
@@ -17330,7 +17397,7 @@
           <p:cNvPr id="27" name="grid-h-560">
             <a:extLst xmlns:a="http://schemas.openxmlformats.org/drawingml/2006/main">
               <a:ext uri="{FF2B5EF4-FFF2-40B4-BE49-F238E27FC236}">
-                <a16:creationId xmlns:a16="http://schemas.microsoft.com/office/drawing/2014/main" id="{6714DDDD-245B-482D-B3F8-39DF76FCB285}"/>
+                <a16:creationId xmlns:a16="http://schemas.microsoft.com/office/drawing/2014/main" id="{31F6F535-C6C4-498D-9D99-DB7D0A16A18B}"/>
               </a:ext>
             </a:extLst>
           </p:cNvPr>
@@ -17361,7 +17428,7 @@
           <p:cNvPr id="28" name="grid-h-624">
             <a:extLst xmlns:a="http://schemas.openxmlformats.org/drawingml/2006/main">
               <a:ext uri="{FF2B5EF4-FFF2-40B4-BE49-F238E27FC236}">
-                <a16:creationId xmlns:a16="http://schemas.microsoft.com/office/drawing/2014/main" id="{7B9751A7-5490-4ECB-9E0D-CC0E76E15826}"/>
+                <a16:creationId xmlns:a16="http://schemas.microsoft.com/office/drawing/2014/main" id="{C32C0AB4-7124-4F25-AC19-8302113AB658}"/>
               </a:ext>
             </a:extLst>
           </p:cNvPr>
@@ -17392,7 +17459,7 @@
           <p:cNvPr id="29" name="top-rule">
             <a:extLst xmlns:a="http://schemas.openxmlformats.org/drawingml/2006/main">
               <a:ext uri="{FF2B5EF4-FFF2-40B4-BE49-F238E27FC236}">
-                <a16:creationId xmlns:a16="http://schemas.microsoft.com/office/drawing/2014/main" id="{6AED6646-95D5-4595-B090-0FB0F4481A3E}"/>
+                <a16:creationId xmlns:a16="http://schemas.microsoft.com/office/drawing/2014/main" id="{27CA3F9C-250E-4481-BABC-1D9A9FC8F552}"/>
               </a:ext>
             </a:extLst>
           </p:cNvPr>
@@ -17423,7 +17490,7 @@
           <p:cNvPr id="30" name="wordmark">
             <a:extLst xmlns:a="http://schemas.openxmlformats.org/drawingml/2006/main">
               <a:ext uri="{FF2B5EF4-FFF2-40B4-BE49-F238E27FC236}">
-                <a16:creationId xmlns:a16="http://schemas.microsoft.com/office/drawing/2014/main" id="{AF6263A8-E0BF-4559-BA96-A9E927C39032}"/>
+                <a16:creationId xmlns:a16="http://schemas.microsoft.com/office/drawing/2014/main" id="{BC91B356-2A89-459D-9865-1873816453D7}"/>
               </a:ext>
             </a:extLst>
           </p:cNvPr>
@@ -17485,7 +17552,7 @@
           <p:cNvPr id="31" name="environment-label">
             <a:extLst xmlns:a="http://schemas.openxmlformats.org/drawingml/2006/main">
               <a:ext uri="{FF2B5EF4-FFF2-40B4-BE49-F238E27FC236}">
-                <a16:creationId xmlns:a16="http://schemas.microsoft.com/office/drawing/2014/main" id="{4447C738-BBCE-4AB6-BCFA-DC4674DAD432}"/>
+                <a16:creationId xmlns:a16="http://schemas.microsoft.com/office/drawing/2014/main" id="{8B996DCD-79D1-4AA3-9C86-F5832707FBB4}"/>
               </a:ext>
             </a:extLst>
           </p:cNvPr>
@@ -17537,7 +17604,7 @@
                 <a:ea typeface="Courier New"/>
                 <a:cs typeface="Courier New"/>
               </a:rPr>
-              <a:t>THE MARKET OUTCOME</a:t>
+              <a:t>OUTCOME + ILLUSTRATIVE ECONOMICS</a:t>
             </a:r>
           </a:p>
         </p:txBody>
@@ -17547,7 +17614,7 @@
           <p:cNvPr id="32" name="slide-index">
             <a:extLst xmlns:a="http://schemas.openxmlformats.org/drawingml/2006/main">
               <a:ext uri="{FF2B5EF4-FFF2-40B4-BE49-F238E27FC236}">
-                <a16:creationId xmlns:a16="http://schemas.microsoft.com/office/drawing/2014/main" id="{55CFBC96-D2B9-4B35-A803-477BA275441D}"/>
+                <a16:creationId xmlns:a16="http://schemas.microsoft.com/office/drawing/2014/main" id="{D631F9B5-9973-4E9E-8FD4-8A047DCFBD7E}"/>
               </a:ext>
             </a:extLst>
           </p:cNvPr>
@@ -17609,7 +17676,7 @@
           <p:cNvPr id="33" name="event-footer">
             <a:extLst xmlns:a="http://schemas.openxmlformats.org/drawingml/2006/main">
               <a:ext uri="{FF2B5EF4-FFF2-40B4-BE49-F238E27FC236}">
-                <a16:creationId xmlns:a16="http://schemas.microsoft.com/office/drawing/2014/main" id="{73905131-AF19-48CF-9497-1CDC4A773C7F}"/>
+                <a16:creationId xmlns:a16="http://schemas.microsoft.com/office/drawing/2014/main" id="{68B6FB01-3F8E-4939-AC6B-F5D6BDC463E3}"/>
               </a:ext>
             </a:extLst>
           </p:cNvPr>
@@ -17671,7 +17738,7 @@
           <p:cNvPr id="34" name="honesty-footer">
             <a:extLst xmlns:a="http://schemas.openxmlformats.org/drawingml/2006/main">
               <a:ext uri="{FF2B5EF4-FFF2-40B4-BE49-F238E27FC236}">
-                <a16:creationId xmlns:a16="http://schemas.microsoft.com/office/drawing/2014/main" id="{A081D51A-C091-43C0-923D-4FB26BA00302}"/>
+                <a16:creationId xmlns:a16="http://schemas.microsoft.com/office/drawing/2014/main" id="{C1FFD38A-1D04-47B6-B11E-38FE4EF9EEBB}"/>
               </a:ext>
             </a:extLst>
           </p:cNvPr>
@@ -17733,7 +17800,7 @@
           <p:cNvPr id="35" name="eyebrow">
             <a:extLst xmlns:a="http://schemas.openxmlformats.org/drawingml/2006/main">
               <a:ext uri="{FF2B5EF4-FFF2-40B4-BE49-F238E27FC236}">
-                <a16:creationId xmlns:a16="http://schemas.microsoft.com/office/drawing/2014/main" id="{7D09D294-A538-4117-ABA8-E16883127FD9}"/>
+                <a16:creationId xmlns:a16="http://schemas.microsoft.com/office/drawing/2014/main" id="{BCB651A4-4038-4D43-A84E-D661B096C994}"/>
               </a:ext>
             </a:extLst>
           </p:cNvPr>
@@ -17785,7 +17852,7 @@
                 <a:ea typeface="Courier New"/>
                 <a:cs typeface="Courier New"/>
               </a:rPr>
-              <a:t>05 / SETTLE</a:t>
+              <a:t>05 / VALUE</a:t>
             </a:r>
           </a:p>
         </p:txBody>
@@ -17795,7 +17862,7 @@
           <p:cNvPr id="36" name="slide-title">
             <a:extLst xmlns:a="http://schemas.openxmlformats.org/drawingml/2006/main">
               <a:ext uri="{FF2B5EF4-FFF2-40B4-BE49-F238E27FC236}">
-                <a16:creationId xmlns:a16="http://schemas.microsoft.com/office/drawing/2014/main" id="{DEE6C50C-67F7-4127-B5FB-1F5AD094954C}"/>
+                <a16:creationId xmlns:a16="http://schemas.microsoft.com/office/drawing/2014/main" id="{4BFC9F02-FEC6-4184-BAC7-0F982AE90BD6}"/>
               </a:ext>
             </a:extLst>
           </p:cNvPr>
@@ -17829,7 +17896,7 @@
                 <a:spcPct val="100000"/>
               </a:lnSpc>
               <a:buNone/>
-              <a:defRPr sz="3900" b="1">
+              <a:defRPr sz="3525" b="1">
                 <a:solidFill>
                   <a:srgbClr val="F1EFE5"/>
                 </a:solidFill>
@@ -17839,7 +17906,7 @@
               </a:defRPr>
             </a:pPr>
             <a:r>
-              <a:rPr sz="3900" b="1">
+              <a:rPr sz="3525" b="1">
                 <a:solidFill>
                   <a:srgbClr val="F1EFE5"/>
                 </a:solidFill>
@@ -17847,7 +17914,7 @@
                 <a:ea typeface="Arial Black"/>
                 <a:cs typeface="Arial Black"/>
               </a:rPr>
-              <a:t>PATIENCE BECOMES LEVERAGE.</a:t>
+              <a:t>SAVINGS CREATE ROOM FOR A BUSINESS.</a:t>
             </a:r>
           </a:p>
         </p:txBody>
@@ -17857,7 +17924,7 @@
           <p:cNvPr id="37" name="result-reserved">
             <a:extLst xmlns:a="http://schemas.openxmlformats.org/drawingml/2006/main">
               <a:ext uri="{FF2B5EF4-FFF2-40B4-BE49-F238E27FC236}">
-                <a16:creationId xmlns:a16="http://schemas.microsoft.com/office/drawing/2014/main" id="{15B63515-1A96-421E-B7E8-D0CC97F52DA8}"/>
+                <a16:creationId xmlns:a16="http://schemas.microsoft.com/office/drawing/2014/main" id="{A486D608-0701-4E9D-97DB-03995FDA2058}"/>
               </a:ext>
             </a:extLst>
           </p:cNvPr>
@@ -17919,7 +17986,7 @@
           <p:cNvPr id="38" name="result-reserved-label">
             <a:extLst xmlns:a="http://schemas.openxmlformats.org/drawingml/2006/main">
               <a:ext uri="{FF2B5EF4-FFF2-40B4-BE49-F238E27FC236}">
-                <a16:creationId xmlns:a16="http://schemas.microsoft.com/office/drawing/2014/main" id="{A3568D32-739C-4AA4-B8A1-F2A2A803F34B}"/>
+                <a16:creationId xmlns:a16="http://schemas.microsoft.com/office/drawing/2014/main" id="{4B287870-85DD-4EBB-A90D-36F7F8BB7365}"/>
               </a:ext>
             </a:extLst>
           </p:cNvPr>
@@ -17981,7 +18048,7 @@
           <p:cNvPr id="39" name="result-arrow-1-shaft">
             <a:extLst xmlns:a="http://schemas.openxmlformats.org/drawingml/2006/main">
               <a:ext uri="{FF2B5EF4-FFF2-40B4-BE49-F238E27FC236}">
-                <a16:creationId xmlns:a16="http://schemas.microsoft.com/office/drawing/2014/main" id="{A6EB0F7A-4DB4-4A3A-B638-9CCB9E7B0139}"/>
+                <a16:creationId xmlns:a16="http://schemas.microsoft.com/office/drawing/2014/main" id="{DA545501-DB82-43B3-B609-5F3BFF2AC650}"/>
               </a:ext>
             </a:extLst>
           </p:cNvPr>
@@ -18012,7 +18079,7 @@
           <p:cNvPr id="40" name="result-arrow-1-head">
             <a:extLst xmlns:a="http://schemas.openxmlformats.org/drawingml/2006/main">
               <a:ext uri="{FF2B5EF4-FFF2-40B4-BE49-F238E27FC236}">
-                <a16:creationId xmlns:a16="http://schemas.microsoft.com/office/drawing/2014/main" id="{9607795D-64F2-40A6-A71C-13CAFB8724B4}"/>
+                <a16:creationId xmlns:a16="http://schemas.microsoft.com/office/drawing/2014/main" id="{B391B2B5-75A5-46AF-A7EF-29114F17A3AF}"/>
               </a:ext>
             </a:extLst>
           </p:cNvPr>
@@ -18043,7 +18110,7 @@
           <p:cNvPr id="41" name="result-captured">
             <a:extLst xmlns:a="http://schemas.openxmlformats.org/drawingml/2006/main">
               <a:ext uri="{FF2B5EF4-FFF2-40B4-BE49-F238E27FC236}">
-                <a16:creationId xmlns:a16="http://schemas.microsoft.com/office/drawing/2014/main" id="{3254D606-94AB-471E-ACC2-08D1838883BF}"/>
+                <a16:creationId xmlns:a16="http://schemas.microsoft.com/office/drawing/2014/main" id="{00A440A6-08A3-4479-B039-911786AD23A6}"/>
               </a:ext>
             </a:extLst>
           </p:cNvPr>
@@ -18105,7 +18172,7 @@
           <p:cNvPr id="42" name="result-captured-label">
             <a:extLst xmlns:a="http://schemas.openxmlformats.org/drawingml/2006/main">
               <a:ext uri="{FF2B5EF4-FFF2-40B4-BE49-F238E27FC236}">
-                <a16:creationId xmlns:a16="http://schemas.microsoft.com/office/drawing/2014/main" id="{A3EEE720-6740-4942-B0F9-52E9A555744C}"/>
+                <a16:creationId xmlns:a16="http://schemas.microsoft.com/office/drawing/2014/main" id="{878FA2AD-2EFA-4952-8FAB-B71D8F004F31}"/>
               </a:ext>
             </a:extLst>
           </p:cNvPr>
@@ -18167,7 +18234,7 @@
           <p:cNvPr id="43" name="result-plus">
             <a:extLst xmlns:a="http://schemas.openxmlformats.org/drawingml/2006/main">
               <a:ext uri="{FF2B5EF4-FFF2-40B4-BE49-F238E27FC236}">
-                <a16:creationId xmlns:a16="http://schemas.microsoft.com/office/drawing/2014/main" id="{F0DF36C9-10FB-4A47-A2F7-9C713E580442}"/>
+                <a16:creationId xmlns:a16="http://schemas.microsoft.com/office/drawing/2014/main" id="{D1509AD9-4F5C-43FF-9D80-722BCF75D77C}"/>
               </a:ext>
             </a:extLst>
           </p:cNvPr>
@@ -18229,7 +18296,7 @@
           <p:cNvPr id="44" name="result-released">
             <a:extLst xmlns:a="http://schemas.openxmlformats.org/drawingml/2006/main">
               <a:ext uri="{FF2B5EF4-FFF2-40B4-BE49-F238E27FC236}">
-                <a16:creationId xmlns:a16="http://schemas.microsoft.com/office/drawing/2014/main" id="{DB1EAB1F-7BCD-469F-8A1E-AB4C1E7C730A}"/>
+                <a16:creationId xmlns:a16="http://schemas.microsoft.com/office/drawing/2014/main" id="{C919532E-38CC-46F1-8CA1-6C07C13E1597}"/>
               </a:ext>
             </a:extLst>
           </p:cNvPr>
@@ -18291,7 +18358,7 @@
           <p:cNvPr id="45" name="result-released-label">
             <a:extLst xmlns:a="http://schemas.openxmlformats.org/drawingml/2006/main">
               <a:ext uri="{FF2B5EF4-FFF2-40B4-BE49-F238E27FC236}">
-                <a16:creationId xmlns:a16="http://schemas.microsoft.com/office/drawing/2014/main" id="{7D786A45-AF0D-4299-B521-E993C69C0DD6}"/>
+                <a16:creationId xmlns:a16="http://schemas.microsoft.com/office/drawing/2014/main" id="{0637DB41-6B18-41AC-870C-FFA4B06BBC4E}"/>
               </a:ext>
             </a:extLst>
           </p:cNvPr>
@@ -18353,7 +18420,7 @@
           <p:cNvPr id="46" name="result-equation-bracket-tl-h">
             <a:extLst xmlns:a="http://schemas.openxmlformats.org/drawingml/2006/main">
               <a:ext uri="{FF2B5EF4-FFF2-40B4-BE49-F238E27FC236}">
-                <a16:creationId xmlns:a16="http://schemas.microsoft.com/office/drawing/2014/main" id="{05F905F6-5394-44CE-A164-CFDF0759B529}"/>
+                <a16:creationId xmlns:a16="http://schemas.microsoft.com/office/drawing/2014/main" id="{5BAF6096-6585-4C7A-992F-91C83007777B}"/>
               </a:ext>
             </a:extLst>
           </p:cNvPr>
@@ -18384,7 +18451,7 @@
           <p:cNvPr id="47" name="result-equation-bracket-tl-v">
             <a:extLst xmlns:a="http://schemas.openxmlformats.org/drawingml/2006/main">
               <a:ext uri="{FF2B5EF4-FFF2-40B4-BE49-F238E27FC236}">
-                <a16:creationId xmlns:a16="http://schemas.microsoft.com/office/drawing/2014/main" id="{3DA11767-67AE-4E60-839E-169A0B4F8C68}"/>
+                <a16:creationId xmlns:a16="http://schemas.microsoft.com/office/drawing/2014/main" id="{4548D258-8A2D-4DF9-8DDB-3AAC837E9D12}"/>
               </a:ext>
             </a:extLst>
           </p:cNvPr>
@@ -18415,7 +18482,7 @@
           <p:cNvPr id="48" name="result-equation-bracket-tr-h">
             <a:extLst xmlns:a="http://schemas.openxmlformats.org/drawingml/2006/main">
               <a:ext uri="{FF2B5EF4-FFF2-40B4-BE49-F238E27FC236}">
-                <a16:creationId xmlns:a16="http://schemas.microsoft.com/office/drawing/2014/main" id="{3F315D39-C518-4EE1-8E5A-0B00D964AC50}"/>
+                <a16:creationId xmlns:a16="http://schemas.microsoft.com/office/drawing/2014/main" id="{6E71545F-FEB9-40C9-9126-082BC54DAAAA}"/>
               </a:ext>
             </a:extLst>
           </p:cNvPr>
@@ -18446,7 +18513,7 @@
           <p:cNvPr id="49" name="result-equation-bracket-tr-v">
             <a:extLst xmlns:a="http://schemas.openxmlformats.org/drawingml/2006/main">
               <a:ext uri="{FF2B5EF4-FFF2-40B4-BE49-F238E27FC236}">
-                <a16:creationId xmlns:a16="http://schemas.microsoft.com/office/drawing/2014/main" id="{A5FC84B9-4C10-4E5D-BB2C-DDCC17CE89DC}"/>
+                <a16:creationId xmlns:a16="http://schemas.microsoft.com/office/drawing/2014/main" id="{1C1BC6BD-2449-4A14-9DFC-2045AAF948CE}"/>
               </a:ext>
             </a:extLst>
           </p:cNvPr>
@@ -18477,7 +18544,7 @@
           <p:cNvPr id="50" name="result-equation-bracket-bl-h">
             <a:extLst xmlns:a="http://schemas.openxmlformats.org/drawingml/2006/main">
               <a:ext uri="{FF2B5EF4-FFF2-40B4-BE49-F238E27FC236}">
-                <a16:creationId xmlns:a16="http://schemas.microsoft.com/office/drawing/2014/main" id="{7AB4D326-D6C2-4841-B9A7-62C160F6F319}"/>
+                <a16:creationId xmlns:a16="http://schemas.microsoft.com/office/drawing/2014/main" id="{C31134E2-0094-41F4-A3CC-7F76E345B36F}"/>
               </a:ext>
             </a:extLst>
           </p:cNvPr>
@@ -18508,7 +18575,7 @@
           <p:cNvPr id="51" name="result-equation-bracket-bl-v">
             <a:extLst xmlns:a="http://schemas.openxmlformats.org/drawingml/2006/main">
               <a:ext uri="{FF2B5EF4-FFF2-40B4-BE49-F238E27FC236}">
-                <a16:creationId xmlns:a16="http://schemas.microsoft.com/office/drawing/2014/main" id="{D27E2A1F-BCA7-4451-A678-94705E3A719A}"/>
+                <a16:creationId xmlns:a16="http://schemas.microsoft.com/office/drawing/2014/main" id="{2BC62A8F-B929-4DC7-9895-39F041EF0B03}"/>
               </a:ext>
             </a:extLst>
           </p:cNvPr>
@@ -18539,7 +18606,7 @@
           <p:cNvPr id="52" name="result-equation-bracket-br-h">
             <a:extLst xmlns:a="http://schemas.openxmlformats.org/drawingml/2006/main">
               <a:ext uri="{FF2B5EF4-FFF2-40B4-BE49-F238E27FC236}">
-                <a16:creationId xmlns:a16="http://schemas.microsoft.com/office/drawing/2014/main" id="{71C55FC9-BAF6-4571-9A80-244BC13A9FFB}"/>
+                <a16:creationId xmlns:a16="http://schemas.microsoft.com/office/drawing/2014/main" id="{B0BFE2B1-D4BE-4C4B-8926-97456711D451}"/>
               </a:ext>
             </a:extLst>
           </p:cNvPr>
@@ -18570,7 +18637,7 @@
           <p:cNvPr id="53" name="result-equation-bracket-br-v">
             <a:extLst xmlns:a="http://schemas.openxmlformats.org/drawingml/2006/main">
               <a:ext uri="{FF2B5EF4-FFF2-40B4-BE49-F238E27FC236}">
-                <a16:creationId xmlns:a16="http://schemas.microsoft.com/office/drawing/2014/main" id="{3B41CEE8-D89E-4398-AAD0-C9EC3B070D89}"/>
+                <a16:creationId xmlns:a16="http://schemas.microsoft.com/office/drawing/2014/main" id="{FDEB30B2-6867-49A8-B050-8F6A27C2ABC7}"/>
               </a:ext>
             </a:extLst>
           </p:cNvPr>
@@ -18598,22 +18665,22 @@
       </p:sp>
       <p:sp>
         <p:nvSpPr>
-          <p:cNvPr id="54" name="result-improvement">
-            <a:extLst xmlns:a="http://schemas.openxmlformats.org/drawingml/2006/main">
-              <a:ext uri="{FF2B5EF4-FFF2-40B4-BE49-F238E27FC236}">
-                <a16:creationId xmlns:a16="http://schemas.microsoft.com/office/drawing/2014/main" id="{DC585B2F-1359-48FC-AA50-889A84843D82}"/>
-              </a:ext>
-            </a:extLst>
-          </p:cNvPr>
-          <p:cNvSpPr>
-            <a:spLocks xmlns:a="http://schemas.openxmlformats.org/drawingml/2006/main" noGrp="1"/>
-          </p:cNvSpPr>
-          <p:nvPr/>
-        </p:nvSpPr>
-        <p:spPr>
-          <a:xfrm xmlns:a="http://schemas.openxmlformats.org/drawingml/2006/main">
-            <a:off x="438150" y="4381500"/>
-            <a:ext cx="2571750" cy="857250"/>
+          <p:cNvPr id="54" name="economics-share-0">
+            <a:extLst xmlns:a="http://schemas.openxmlformats.org/drawingml/2006/main">
+              <a:ext uri="{FF2B5EF4-FFF2-40B4-BE49-F238E27FC236}">
+                <a16:creationId xmlns:a16="http://schemas.microsoft.com/office/drawing/2014/main" id="{6543BF79-3669-4BE6-818F-41BCE20515F1}"/>
+              </a:ext>
+            </a:extLst>
+          </p:cNvPr>
+          <p:cNvSpPr>
+            <a:spLocks xmlns:a="http://schemas.openxmlformats.org/drawingml/2006/main" noGrp="1"/>
+          </p:cNvSpPr>
+          <p:nvPr/>
+        </p:nvSpPr>
+        <p:spPr>
+          <a:xfrm xmlns:a="http://schemas.openxmlformats.org/drawingml/2006/main">
+            <a:off x="438150" y="4267200"/>
+            <a:ext cx="2381250" cy="190500"/>
           </a:xfrm>
           <a:prstGeom xmlns:a="http://schemas.openxmlformats.org/drawingml/2006/main" prst="rect">
             <a:avLst/>
@@ -18635,9 +18702,71 @@
                 <a:spcPct val="100000"/>
               </a:lnSpc>
               <a:buNone/>
-              <a:defRPr sz="5100" b="1">
-                <a:solidFill>
-                  <a:srgbClr val="FF2B79"/>
+              <a:defRPr sz="1050" b="1">
+                <a:solidFill>
+                  <a:srgbClr val="D3D1C8"/>
+                </a:solidFill>
+                <a:latin typeface="Courier New"/>
+                <a:ea typeface="Courier New"/>
+                <a:cs typeface="Courier New"/>
+              </a:defRPr>
+            </a:pPr>
+            <a:r>
+              <a:rPr sz="1050" b="1">
+                <a:solidFill>
+                  <a:srgbClr val="D3D1C8"/>
+                </a:solidFill>
+                <a:latin typeface="Courier New"/>
+                <a:ea typeface="Courier New"/>
+                <a:cs typeface="Courier New"/>
+              </a:rPr>
+              <a:t>5% OF SAVINGS</a:t>
+            </a:r>
+          </a:p>
+        </p:txBody>
+      </p:sp>
+      <p:sp>
+        <p:nvSpPr>
+          <p:cNvPr id="55" name="economics-revenue-0">
+            <a:extLst xmlns:a="http://schemas.openxmlformats.org/drawingml/2006/main">
+              <a:ext uri="{FF2B5EF4-FFF2-40B4-BE49-F238E27FC236}">
+                <a16:creationId xmlns:a16="http://schemas.microsoft.com/office/drawing/2014/main" id="{931B4A10-6B0E-473D-86E1-7F69F58A7C59}"/>
+              </a:ext>
+            </a:extLst>
+          </p:cNvPr>
+          <p:cNvSpPr>
+            <a:spLocks xmlns:a="http://schemas.openxmlformats.org/drawingml/2006/main" noGrp="1"/>
+          </p:cNvSpPr>
+          <p:nvPr/>
+        </p:nvSpPr>
+        <p:spPr>
+          <a:xfrm xmlns:a="http://schemas.openxmlformats.org/drawingml/2006/main">
+            <a:off x="438150" y="4533900"/>
+            <a:ext cx="1676400" cy="552450"/>
+          </a:xfrm>
+          <a:prstGeom xmlns:a="http://schemas.openxmlformats.org/drawingml/2006/main" prst="rect">
+            <a:avLst/>
+          </a:prstGeom>
+          <a:noFill xmlns:a="http://schemas.openxmlformats.org/drawingml/2006/main"/>
+          <a:ln xmlns:a="http://schemas.openxmlformats.org/drawingml/2006/main" w="0">
+            <a:noFill/>
+            <a:prstDash val="solid"/>
+          </a:ln>
+        </p:spPr>
+        <p:txBody>
+          <a:bodyPr xmlns:a="http://schemas.openxmlformats.org/drawingml/2006/main" wrap="square" lIns="0" tIns="0" rIns="0" bIns="0" anchor="t">
+            <a:noAutofit/>
+          </a:bodyPr>
+          <a:lstStyle xmlns:a="http://schemas.openxmlformats.org/drawingml/2006/main"/>
+          <a:p xmlns:a="http://schemas.openxmlformats.org/drawingml/2006/main">
+            <a:pPr algn="l">
+              <a:lnSpc>
+                <a:spcPct val="100000"/>
+              </a:lnSpc>
+              <a:buNone/>
+              <a:defRPr sz="3300" b="1">
+                <a:solidFill>
+                  <a:srgbClr val="F1EFE5"/>
                 </a:solidFill>
                 <a:latin typeface="Arial Black"/>
                 <a:ea typeface="Arial Black"/>
@@ -18645,37 +18774,37 @@
               </a:defRPr>
             </a:pPr>
             <a:r>
-              <a:rPr sz="5100" b="1">
-                <a:solidFill>
-                  <a:srgbClr val="FF2B79"/>
+              <a:rPr sz="3300" b="1">
+                <a:solidFill>
+                  <a:srgbClr val="F1EFE5"/>
                 </a:solidFill>
                 <a:latin typeface="Arial Black"/>
                 <a:ea typeface="Arial Black"/>
                 <a:cs typeface="Arial Black"/>
               </a:rPr>
-              <a:t>18.8%</a:t>
+              <a:t>$54</a:t>
             </a:r>
           </a:p>
         </p:txBody>
       </p:sp>
       <p:sp>
         <p:nvSpPr>
-          <p:cNvPr id="55" name="result-improvement-label">
-            <a:extLst xmlns:a="http://schemas.openxmlformats.org/drawingml/2006/main">
-              <a:ext uri="{FF2B5EF4-FFF2-40B4-BE49-F238E27FC236}">
-                <a16:creationId xmlns:a16="http://schemas.microsoft.com/office/drawing/2014/main" id="{96C00959-D58C-4DFA-B0DA-35DD96F602AB}"/>
-              </a:ext>
-            </a:extLst>
-          </p:cNvPr>
-          <p:cNvSpPr>
-            <a:spLocks xmlns:a="http://schemas.openxmlformats.org/drawingml/2006/main" noGrp="1"/>
-          </p:cNvSpPr>
-          <p:nvPr/>
-        </p:nvSpPr>
-        <p:spPr>
-          <a:xfrm xmlns:a="http://schemas.openxmlformats.org/drawingml/2006/main">
-            <a:off x="495300" y="5219700"/>
-            <a:ext cx="2381250" cy="228600"/>
+          <p:cNvPr id="56" name="economics-revenue-label-0">
+            <a:extLst xmlns:a="http://schemas.openxmlformats.org/drawingml/2006/main">
+              <a:ext uri="{FF2B5EF4-FFF2-40B4-BE49-F238E27FC236}">
+                <a16:creationId xmlns:a16="http://schemas.microsoft.com/office/drawing/2014/main" id="{6A16BD72-177D-47F1-998D-8A7AD4A0077B}"/>
+              </a:ext>
+            </a:extLst>
+          </p:cNvPr>
+          <p:cNvSpPr>
+            <a:spLocks xmlns:a="http://schemas.openxmlformats.org/drawingml/2006/main" noGrp="1"/>
+          </p:cNvSpPr>
+          <p:nvPr/>
+        </p:nvSpPr>
+        <p:spPr>
+          <a:xfrm xmlns:a="http://schemas.openxmlformats.org/drawingml/2006/main">
+            <a:off x="2152650" y="4629150"/>
+            <a:ext cx="1257300" cy="171450"/>
           </a:xfrm>
           <a:prstGeom xmlns:a="http://schemas.openxmlformats.org/drawingml/2006/main" prst="rect">
             <a:avLst/>
@@ -18692,14 +18821,76 @@
           </a:bodyPr>
           <a:lstStyle xmlns:a="http://schemas.openxmlformats.org/drawingml/2006/main"/>
           <a:p xmlns:a="http://schemas.openxmlformats.org/drawingml/2006/main">
+            <a:pPr algn="r">
+              <a:lnSpc>
+                <a:spcPct val="100000"/>
+              </a:lnSpc>
+              <a:buNone/>
+              <a:defRPr sz="900" b="0">
+                <a:solidFill>
+                  <a:srgbClr val="858B84"/>
+                </a:solidFill>
+                <a:latin typeface="Courier New"/>
+                <a:ea typeface="Courier New"/>
+                <a:cs typeface="Courier New"/>
+              </a:defRPr>
+            </a:pPr>
+            <a:r>
+              <a:rPr sz="900" b="0">
+                <a:solidFill>
+                  <a:srgbClr val="858B84"/>
+                </a:solidFill>
+                <a:latin typeface="Courier New"/>
+                <a:ea typeface="Courier New"/>
+                <a:cs typeface="Courier New"/>
+              </a:rPr>
+              <a:t>POOL REVENUE</a:t>
+            </a:r>
+          </a:p>
+        </p:txBody>
+      </p:sp>
+      <p:sp>
+        <p:nvSpPr>
+          <p:cNvPr id="57" name="economics-buyer-0">
+            <a:extLst xmlns:a="http://schemas.openxmlformats.org/drawingml/2006/main">
+              <a:ext uri="{FF2B5EF4-FFF2-40B4-BE49-F238E27FC236}">
+                <a16:creationId xmlns:a16="http://schemas.microsoft.com/office/drawing/2014/main" id="{A1744AAD-17F8-4081-840B-6640CB053593}"/>
+              </a:ext>
+            </a:extLst>
+          </p:cNvPr>
+          <p:cNvSpPr>
+            <a:spLocks xmlns:a="http://schemas.openxmlformats.org/drawingml/2006/main" noGrp="1"/>
+          </p:cNvSpPr>
+          <p:nvPr/>
+        </p:nvSpPr>
+        <p:spPr>
+          <a:xfrm xmlns:a="http://schemas.openxmlformats.org/drawingml/2006/main">
+            <a:off x="438150" y="5181600"/>
+            <a:ext cx="2952750" cy="190500"/>
+          </a:xfrm>
+          <a:prstGeom xmlns:a="http://schemas.openxmlformats.org/drawingml/2006/main" prst="rect">
+            <a:avLst/>
+          </a:prstGeom>
+          <a:noFill xmlns:a="http://schemas.openxmlformats.org/drawingml/2006/main"/>
+          <a:ln xmlns:a="http://schemas.openxmlformats.org/drawingml/2006/main" w="0">
+            <a:noFill/>
+            <a:prstDash val="solid"/>
+          </a:ln>
+        </p:spPr>
+        <p:txBody>
+          <a:bodyPr xmlns:a="http://schemas.openxmlformats.org/drawingml/2006/main" wrap="square" lIns="0" tIns="0" rIns="0" bIns="0" anchor="t">
+            <a:noAutofit/>
+          </a:bodyPr>
+          <a:lstStyle xmlns:a="http://schemas.openxmlformats.org/drawingml/2006/main"/>
+          <a:p xmlns:a="http://schemas.openxmlformats.org/drawingml/2006/main">
             <a:pPr algn="l">
               <a:lnSpc>
                 <a:spcPct val="100000"/>
               </a:lnSpc>
               <a:buNone/>
-              <a:defRPr sz="1275" b="0">
-                <a:solidFill>
-                  <a:srgbClr val="858B84"/>
+              <a:defRPr sz="1050" b="1">
+                <a:solidFill>
+                  <a:srgbClr val="FF2B79"/>
                 </a:solidFill>
                 <a:latin typeface="Courier New"/>
                 <a:ea typeface="Courier New"/>
@@ -18707,37 +18898,37 @@
               </a:defRPr>
             </a:pPr>
             <a:r>
-              <a:rPr sz="1275" b="0">
-                <a:solidFill>
-                  <a:srgbClr val="858B84"/>
+              <a:rPr sz="1050" b="1">
+                <a:solidFill>
+                  <a:srgbClr val="FF2B79"/>
                 </a:solidFill>
                 <a:latin typeface="Courier New"/>
                 <a:ea typeface="Courier New"/>
                 <a:cs typeface="Courier New"/>
               </a:rPr>
-              <a:t>PRICE IMPROVEMENT</a:t>
+              <a:t>17.8% NET BUYER SAVINGS</a:t>
             </a:r>
           </a:p>
         </p:txBody>
       </p:sp>
       <p:sp>
         <p:nvSpPr>
-          <p:cNvPr id="56" name="result-divider-1">
-            <a:extLst xmlns:a="http://schemas.openxmlformats.org/drawingml/2006/main">
-              <a:ext uri="{FF2B5EF4-FFF2-40B4-BE49-F238E27FC236}">
-                <a16:creationId xmlns:a16="http://schemas.microsoft.com/office/drawing/2014/main" id="{117262DA-BE9F-4AF7-9BCC-DA40DB9BB976}"/>
-              </a:ext>
-            </a:extLst>
-          </p:cNvPr>
-          <p:cNvSpPr>
-            <a:spLocks xmlns:a="http://schemas.openxmlformats.org/drawingml/2006/main" noGrp="1"/>
-          </p:cNvSpPr>
-          <p:nvPr/>
-        </p:nvSpPr>
-        <p:spPr>
-          <a:xfrm xmlns:a="http://schemas.openxmlformats.org/drawingml/2006/main">
-            <a:off x="3352800" y="4343400"/>
-            <a:ext cx="0" cy="1181100"/>
+          <p:cNvPr id="58" name="economics-divider-1">
+            <a:extLst xmlns:a="http://schemas.openxmlformats.org/drawingml/2006/main">
+              <a:ext uri="{FF2B5EF4-FFF2-40B4-BE49-F238E27FC236}">
+                <a16:creationId xmlns:a16="http://schemas.microsoft.com/office/drawing/2014/main" id="{0A5543EF-4AF3-468E-8479-723131261BF4}"/>
+              </a:ext>
+            </a:extLst>
+          </p:cNvPr>
+          <p:cNvSpPr>
+            <a:spLocks xmlns:a="http://schemas.openxmlformats.org/drawingml/2006/main" noGrp="1"/>
+          </p:cNvSpPr>
+          <p:nvPr/>
+        </p:nvSpPr>
+        <p:spPr>
+          <a:xfrm xmlns:a="http://schemas.openxmlformats.org/drawingml/2006/main">
+            <a:off x="3771900" y="4267200"/>
+            <a:ext cx="0" cy="1257300"/>
           </a:xfrm>
           <a:prstGeom xmlns:a="http://schemas.openxmlformats.org/drawingml/2006/main" prst="line">
             <a:avLst/>
@@ -18753,22 +18944,22 @@
       </p:sp>
       <p:sp>
         <p:nvSpPr>
-          <p:cNvPr id="57" name="result-zero">
-            <a:extLst xmlns:a="http://schemas.openxmlformats.org/drawingml/2006/main">
-              <a:ext uri="{FF2B5EF4-FFF2-40B4-BE49-F238E27FC236}">
-                <a16:creationId xmlns:a16="http://schemas.microsoft.com/office/drawing/2014/main" id="{96AF7BE5-3B43-479F-A405-9CCBD0530AAD}"/>
-              </a:ext>
-            </a:extLst>
-          </p:cNvPr>
-          <p:cNvSpPr>
-            <a:spLocks xmlns:a="http://schemas.openxmlformats.org/drawingml/2006/main" noGrp="1"/>
-          </p:cNvSpPr>
-          <p:nvPr/>
-        </p:nvSpPr>
-        <p:spPr>
-          <a:xfrm xmlns:a="http://schemas.openxmlformats.org/drawingml/2006/main">
-            <a:off x="3848100" y="4381500"/>
-            <a:ext cx="1143000" cy="857250"/>
+          <p:cNvPr id="59" name="economics-share-1">
+            <a:extLst xmlns:a="http://schemas.openxmlformats.org/drawingml/2006/main">
+              <a:ext uri="{FF2B5EF4-FFF2-40B4-BE49-F238E27FC236}">
+                <a16:creationId xmlns:a16="http://schemas.microsoft.com/office/drawing/2014/main" id="{1A8A9962-DE38-4038-83F9-5F91DD388107}"/>
+              </a:ext>
+            </a:extLst>
+          </p:cNvPr>
+          <p:cNvSpPr>
+            <a:spLocks xmlns:a="http://schemas.openxmlformats.org/drawingml/2006/main" noGrp="1"/>
+          </p:cNvSpPr>
+          <p:nvPr/>
+        </p:nvSpPr>
+        <p:spPr>
+          <a:xfrm xmlns:a="http://schemas.openxmlformats.org/drawingml/2006/main">
+            <a:off x="4171950" y="4267200"/>
+            <a:ext cx="2381250" cy="190500"/>
           </a:xfrm>
           <a:prstGeom xmlns:a="http://schemas.openxmlformats.org/drawingml/2006/main" prst="rect">
             <a:avLst/>
@@ -18790,9 +18981,71 @@
                 <a:spcPct val="100000"/>
               </a:lnSpc>
               <a:buNone/>
-              <a:defRPr sz="5100" b="1">
-                <a:solidFill>
-                  <a:srgbClr val="F1EFE5"/>
+              <a:defRPr sz="1050" b="1">
+                <a:solidFill>
+                  <a:srgbClr val="C7F52F"/>
+                </a:solidFill>
+                <a:latin typeface="Courier New"/>
+                <a:ea typeface="Courier New"/>
+                <a:cs typeface="Courier New"/>
+              </a:defRPr>
+            </a:pPr>
+            <a:r>
+              <a:rPr sz="1050" b="1">
+                <a:solidFill>
+                  <a:srgbClr val="C7F52F"/>
+                </a:solidFill>
+                <a:latin typeface="Courier New"/>
+                <a:ea typeface="Courier New"/>
+                <a:cs typeface="Courier New"/>
+              </a:rPr>
+              <a:t>10% OF SAVINGS</a:t>
+            </a:r>
+          </a:p>
+        </p:txBody>
+      </p:sp>
+      <p:sp>
+        <p:nvSpPr>
+          <p:cNvPr id="60" name="economics-revenue-1">
+            <a:extLst xmlns:a="http://schemas.openxmlformats.org/drawingml/2006/main">
+              <a:ext uri="{FF2B5EF4-FFF2-40B4-BE49-F238E27FC236}">
+                <a16:creationId xmlns:a16="http://schemas.microsoft.com/office/drawing/2014/main" id="{112E35A4-D0E7-4003-8B9C-E124650B96DA}"/>
+              </a:ext>
+            </a:extLst>
+          </p:cNvPr>
+          <p:cNvSpPr>
+            <a:spLocks xmlns:a="http://schemas.openxmlformats.org/drawingml/2006/main" noGrp="1"/>
+          </p:cNvSpPr>
+          <p:nvPr/>
+        </p:nvSpPr>
+        <p:spPr>
+          <a:xfrm xmlns:a="http://schemas.openxmlformats.org/drawingml/2006/main">
+            <a:off x="4171950" y="4533900"/>
+            <a:ext cx="1676400" cy="552450"/>
+          </a:xfrm>
+          <a:prstGeom xmlns:a="http://schemas.openxmlformats.org/drawingml/2006/main" prst="rect">
+            <a:avLst/>
+          </a:prstGeom>
+          <a:noFill xmlns:a="http://schemas.openxmlformats.org/drawingml/2006/main"/>
+          <a:ln xmlns:a="http://schemas.openxmlformats.org/drawingml/2006/main" w="0">
+            <a:noFill/>
+            <a:prstDash val="solid"/>
+          </a:ln>
+        </p:spPr>
+        <p:txBody>
+          <a:bodyPr xmlns:a="http://schemas.openxmlformats.org/drawingml/2006/main" wrap="square" lIns="0" tIns="0" rIns="0" bIns="0" anchor="t">
+            <a:noAutofit/>
+          </a:bodyPr>
+          <a:lstStyle xmlns:a="http://schemas.openxmlformats.org/drawingml/2006/main"/>
+          <a:p xmlns:a="http://schemas.openxmlformats.org/drawingml/2006/main">
+            <a:pPr algn="l">
+              <a:lnSpc>
+                <a:spcPct val="100000"/>
+              </a:lnSpc>
+              <a:buNone/>
+              <a:defRPr sz="3300" b="1">
+                <a:solidFill>
+                  <a:srgbClr val="C7F52F"/>
                 </a:solidFill>
                 <a:latin typeface="Arial Black"/>
                 <a:ea typeface="Arial Black"/>
@@ -18800,37 +19053,37 @@
               </a:defRPr>
             </a:pPr>
             <a:r>
-              <a:rPr sz="5100" b="1">
-                <a:solidFill>
-                  <a:srgbClr val="F1EFE5"/>
+              <a:rPr sz="3300" b="1">
+                <a:solidFill>
+                  <a:srgbClr val="C7F52F"/>
                 </a:solidFill>
                 <a:latin typeface="Arial Black"/>
                 <a:ea typeface="Arial Black"/>
                 <a:cs typeface="Arial Black"/>
               </a:rPr>
-              <a:t>0</a:t>
+              <a:t>$108</a:t>
             </a:r>
           </a:p>
         </p:txBody>
       </p:sp>
       <p:sp>
         <p:nvSpPr>
-          <p:cNvPr id="58" name="result-zero-label">
-            <a:extLst xmlns:a="http://schemas.openxmlformats.org/drawingml/2006/main">
-              <a:ext uri="{FF2B5EF4-FFF2-40B4-BE49-F238E27FC236}">
-                <a16:creationId xmlns:a16="http://schemas.microsoft.com/office/drawing/2014/main" id="{E49513D1-0E1C-4323-84BA-AD36CD9B49D8}"/>
-              </a:ext>
-            </a:extLst>
-          </p:cNvPr>
-          <p:cNvSpPr>
-            <a:spLocks xmlns:a="http://schemas.openxmlformats.org/drawingml/2006/main" noGrp="1"/>
-          </p:cNvSpPr>
-          <p:nvPr/>
-        </p:nvSpPr>
-        <p:spPr>
-          <a:xfrm xmlns:a="http://schemas.openxmlformats.org/drawingml/2006/main">
-            <a:off x="3905250" y="5219700"/>
-            <a:ext cx="2571750" cy="228600"/>
+          <p:cNvPr id="61" name="economics-revenue-label-1">
+            <a:extLst xmlns:a="http://schemas.openxmlformats.org/drawingml/2006/main">
+              <a:ext uri="{FF2B5EF4-FFF2-40B4-BE49-F238E27FC236}">
+                <a16:creationId xmlns:a16="http://schemas.microsoft.com/office/drawing/2014/main" id="{7C57804E-138D-4B35-B838-F9388C551778}"/>
+              </a:ext>
+            </a:extLst>
+          </p:cNvPr>
+          <p:cNvSpPr>
+            <a:spLocks xmlns:a="http://schemas.openxmlformats.org/drawingml/2006/main" noGrp="1"/>
+          </p:cNvSpPr>
+          <p:nvPr/>
+        </p:nvSpPr>
+        <p:spPr>
+          <a:xfrm xmlns:a="http://schemas.openxmlformats.org/drawingml/2006/main">
+            <a:off x="5886450" y="4629150"/>
+            <a:ext cx="1257300" cy="171450"/>
           </a:xfrm>
           <a:prstGeom xmlns:a="http://schemas.openxmlformats.org/drawingml/2006/main" prst="rect">
             <a:avLst/>
@@ -18847,14 +19100,76 @@
           </a:bodyPr>
           <a:lstStyle xmlns:a="http://schemas.openxmlformats.org/drawingml/2006/main"/>
           <a:p xmlns:a="http://schemas.openxmlformats.org/drawingml/2006/main">
+            <a:pPr algn="r">
+              <a:lnSpc>
+                <a:spcPct val="100000"/>
+              </a:lnSpc>
+              <a:buNone/>
+              <a:defRPr sz="900" b="0">
+                <a:solidFill>
+                  <a:srgbClr val="858B84"/>
+                </a:solidFill>
+                <a:latin typeface="Courier New"/>
+                <a:ea typeface="Courier New"/>
+                <a:cs typeface="Courier New"/>
+              </a:defRPr>
+            </a:pPr>
+            <a:r>
+              <a:rPr sz="900" b="0">
+                <a:solidFill>
+                  <a:srgbClr val="858B84"/>
+                </a:solidFill>
+                <a:latin typeface="Courier New"/>
+                <a:ea typeface="Courier New"/>
+                <a:cs typeface="Courier New"/>
+              </a:rPr>
+              <a:t>POOL REVENUE</a:t>
+            </a:r>
+          </a:p>
+        </p:txBody>
+      </p:sp>
+      <p:sp>
+        <p:nvSpPr>
+          <p:cNvPr id="62" name="economics-buyer-1">
+            <a:extLst xmlns:a="http://schemas.openxmlformats.org/drawingml/2006/main">
+              <a:ext uri="{FF2B5EF4-FFF2-40B4-BE49-F238E27FC236}">
+                <a16:creationId xmlns:a16="http://schemas.microsoft.com/office/drawing/2014/main" id="{B7667A6C-A58E-4B64-B515-BFA51B981A81}"/>
+              </a:ext>
+            </a:extLst>
+          </p:cNvPr>
+          <p:cNvSpPr>
+            <a:spLocks xmlns:a="http://schemas.openxmlformats.org/drawingml/2006/main" noGrp="1"/>
+          </p:cNvSpPr>
+          <p:nvPr/>
+        </p:nvSpPr>
+        <p:spPr>
+          <a:xfrm xmlns:a="http://schemas.openxmlformats.org/drawingml/2006/main">
+            <a:off x="4171950" y="5181600"/>
+            <a:ext cx="2952750" cy="190500"/>
+          </a:xfrm>
+          <a:prstGeom xmlns:a="http://schemas.openxmlformats.org/drawingml/2006/main" prst="rect">
+            <a:avLst/>
+          </a:prstGeom>
+          <a:noFill xmlns:a="http://schemas.openxmlformats.org/drawingml/2006/main"/>
+          <a:ln xmlns:a="http://schemas.openxmlformats.org/drawingml/2006/main" w="0">
+            <a:noFill/>
+            <a:prstDash val="solid"/>
+          </a:ln>
+        </p:spPr>
+        <p:txBody>
+          <a:bodyPr xmlns:a="http://schemas.openxmlformats.org/drawingml/2006/main" wrap="square" lIns="0" tIns="0" rIns="0" bIns="0" anchor="t">
+            <a:noAutofit/>
+          </a:bodyPr>
+          <a:lstStyle xmlns:a="http://schemas.openxmlformats.org/drawingml/2006/main"/>
+          <a:p xmlns:a="http://schemas.openxmlformats.org/drawingml/2006/main">
             <a:pPr algn="l">
               <a:lnSpc>
                 <a:spcPct val="100000"/>
               </a:lnSpc>
               <a:buNone/>
-              <a:defRPr sz="1275" b="0">
-                <a:solidFill>
-                  <a:srgbClr val="858B84"/>
+              <a:defRPr sz="1050" b="1">
+                <a:solidFill>
+                  <a:srgbClr val="FF2B79"/>
                 </a:solidFill>
                 <a:latin typeface="Courier New"/>
                 <a:ea typeface="Courier New"/>
@@ -18862,37 +19177,37 @@
               </a:defRPr>
             </a:pPr>
             <a:r>
-              <a:rPr sz="1275" b="0">
-                <a:solidFill>
-                  <a:srgbClr val="858B84"/>
+              <a:rPr sz="1050" b="1">
+                <a:solidFill>
+                  <a:srgbClr val="FF2B79"/>
                 </a:solidFill>
                 <a:latin typeface="Courier New"/>
                 <a:ea typeface="Courier New"/>
                 <a:cs typeface="Courier New"/>
               </a:rPr>
-              <a:t>HUMAN NEGOTIATIONS</a:t>
+              <a:t>16.9% NET BUYER SAVINGS</a:t>
             </a:r>
           </a:p>
         </p:txBody>
       </p:sp>
       <p:sp>
         <p:nvSpPr>
-          <p:cNvPr id="59" name="result-divider-2">
-            <a:extLst xmlns:a="http://schemas.openxmlformats.org/drawingml/2006/main">
-              <a:ext uri="{FF2B5EF4-FFF2-40B4-BE49-F238E27FC236}">
-                <a16:creationId xmlns:a16="http://schemas.microsoft.com/office/drawing/2014/main" id="{64E7C0D2-D520-4A4F-98EA-F45CF3A77711}"/>
-              </a:ext>
-            </a:extLst>
-          </p:cNvPr>
-          <p:cNvSpPr>
-            <a:spLocks xmlns:a="http://schemas.openxmlformats.org/drawingml/2006/main" noGrp="1"/>
-          </p:cNvSpPr>
-          <p:nvPr/>
-        </p:nvSpPr>
-        <p:spPr>
-          <a:xfrm xmlns:a="http://schemas.openxmlformats.org/drawingml/2006/main">
-            <a:off x="6819900" y="4343400"/>
-            <a:ext cx="0" cy="1181100"/>
+          <p:cNvPr id="63" name="economics-divider-2">
+            <a:extLst xmlns:a="http://schemas.openxmlformats.org/drawingml/2006/main">
+              <a:ext uri="{FF2B5EF4-FFF2-40B4-BE49-F238E27FC236}">
+                <a16:creationId xmlns:a16="http://schemas.microsoft.com/office/drawing/2014/main" id="{08B859EF-F1E3-45B3-ACC1-3DB4AAE62693}"/>
+              </a:ext>
+            </a:extLst>
+          </p:cNvPr>
+          <p:cNvSpPr>
+            <a:spLocks xmlns:a="http://schemas.openxmlformats.org/drawingml/2006/main" noGrp="1"/>
+          </p:cNvSpPr>
+          <p:nvPr/>
+        </p:nvSpPr>
+        <p:spPr>
+          <a:xfrm xmlns:a="http://schemas.openxmlformats.org/drawingml/2006/main">
+            <a:off x="7505700" y="4267200"/>
+            <a:ext cx="0" cy="1257300"/>
           </a:xfrm>
           <a:prstGeom xmlns:a="http://schemas.openxmlformats.org/drawingml/2006/main" prst="line">
             <a:avLst/>
@@ -18908,22 +19223,22 @@
       </p:sp>
       <p:sp>
         <p:nvSpPr>
-          <p:cNvPr id="60" name="result-monad">
-            <a:extLst xmlns:a="http://schemas.openxmlformats.org/drawingml/2006/main">
-              <a:ext uri="{FF2B5EF4-FFF2-40B4-BE49-F238E27FC236}">
-                <a16:creationId xmlns:a16="http://schemas.microsoft.com/office/drawing/2014/main" id="{68D46790-7D1B-49C7-9FC5-4AAF8217E2A1}"/>
-              </a:ext>
-            </a:extLst>
-          </p:cNvPr>
-          <p:cNvSpPr>
-            <a:spLocks xmlns:a="http://schemas.openxmlformats.org/drawingml/2006/main" noGrp="1"/>
-          </p:cNvSpPr>
-          <p:nvPr/>
-        </p:nvSpPr>
-        <p:spPr>
-          <a:xfrm xmlns:a="http://schemas.openxmlformats.org/drawingml/2006/main">
-            <a:off x="7258050" y="4419600"/>
-            <a:ext cx="1676400" cy="361950"/>
+          <p:cNvPr id="64" name="economics-share-2">
+            <a:extLst xmlns:a="http://schemas.openxmlformats.org/drawingml/2006/main">
+              <a:ext uri="{FF2B5EF4-FFF2-40B4-BE49-F238E27FC236}">
+                <a16:creationId xmlns:a16="http://schemas.microsoft.com/office/drawing/2014/main" id="{FAD9FC81-157C-4111-9F59-BB74A7347764}"/>
+              </a:ext>
+            </a:extLst>
+          </p:cNvPr>
+          <p:cNvSpPr>
+            <a:spLocks xmlns:a="http://schemas.openxmlformats.org/drawingml/2006/main" noGrp="1"/>
+          </p:cNvSpPr>
+          <p:nvPr/>
+        </p:nvSpPr>
+        <p:spPr>
+          <a:xfrm xmlns:a="http://schemas.openxmlformats.org/drawingml/2006/main">
+            <a:off x="7905750" y="4267200"/>
+            <a:ext cx="2381250" cy="190500"/>
           </a:xfrm>
           <a:prstGeom xmlns:a="http://schemas.openxmlformats.org/drawingml/2006/main" prst="rect">
             <a:avLst/>
@@ -18945,9 +19260,71 @@
                 <a:spcPct val="100000"/>
               </a:lnSpc>
               <a:buNone/>
-              <a:defRPr sz="2100" b="1">
-                <a:solidFill>
-                  <a:srgbClr val="C7F52F"/>
+              <a:defRPr sz="1050" b="1">
+                <a:solidFill>
+                  <a:srgbClr val="D3D1C8"/>
+                </a:solidFill>
+                <a:latin typeface="Courier New"/>
+                <a:ea typeface="Courier New"/>
+                <a:cs typeface="Courier New"/>
+              </a:defRPr>
+            </a:pPr>
+            <a:r>
+              <a:rPr sz="1050" b="1">
+                <a:solidFill>
+                  <a:srgbClr val="D3D1C8"/>
+                </a:solidFill>
+                <a:latin typeface="Courier New"/>
+                <a:ea typeface="Courier New"/>
+                <a:cs typeface="Courier New"/>
+              </a:rPr>
+              <a:t>15% OF SAVINGS</a:t>
+            </a:r>
+          </a:p>
+        </p:txBody>
+      </p:sp>
+      <p:sp>
+        <p:nvSpPr>
+          <p:cNvPr id="65" name="economics-revenue-2">
+            <a:extLst xmlns:a="http://schemas.openxmlformats.org/drawingml/2006/main">
+              <a:ext uri="{FF2B5EF4-FFF2-40B4-BE49-F238E27FC236}">
+                <a16:creationId xmlns:a16="http://schemas.microsoft.com/office/drawing/2014/main" id="{11496DF0-293F-441E-892A-FC810A72D844}"/>
+              </a:ext>
+            </a:extLst>
+          </p:cNvPr>
+          <p:cNvSpPr>
+            <a:spLocks xmlns:a="http://schemas.openxmlformats.org/drawingml/2006/main" noGrp="1"/>
+          </p:cNvSpPr>
+          <p:nvPr/>
+        </p:nvSpPr>
+        <p:spPr>
+          <a:xfrm xmlns:a="http://schemas.openxmlformats.org/drawingml/2006/main">
+            <a:off x="7905750" y="4533900"/>
+            <a:ext cx="1676400" cy="552450"/>
+          </a:xfrm>
+          <a:prstGeom xmlns:a="http://schemas.openxmlformats.org/drawingml/2006/main" prst="rect">
+            <a:avLst/>
+          </a:prstGeom>
+          <a:noFill xmlns:a="http://schemas.openxmlformats.org/drawingml/2006/main"/>
+          <a:ln xmlns:a="http://schemas.openxmlformats.org/drawingml/2006/main" w="0">
+            <a:noFill/>
+            <a:prstDash val="solid"/>
+          </a:ln>
+        </p:spPr>
+        <p:txBody>
+          <a:bodyPr xmlns:a="http://schemas.openxmlformats.org/drawingml/2006/main" wrap="square" lIns="0" tIns="0" rIns="0" bIns="0" anchor="t">
+            <a:noAutofit/>
+          </a:bodyPr>
+          <a:lstStyle xmlns:a="http://schemas.openxmlformats.org/drawingml/2006/main"/>
+          <a:p xmlns:a="http://schemas.openxmlformats.org/drawingml/2006/main">
+            <a:pPr algn="l">
+              <a:lnSpc>
+                <a:spcPct val="100000"/>
+              </a:lnSpc>
+              <a:buNone/>
+              <a:defRPr sz="3300" b="1">
+                <a:solidFill>
+                  <a:srgbClr val="F1EFE5"/>
                 </a:solidFill>
                 <a:latin typeface="Arial Black"/>
                 <a:ea typeface="Arial Black"/>
@@ -18955,37 +19332,37 @@
               </a:defRPr>
             </a:pPr>
             <a:r>
-              <a:rPr sz="2100" b="1">
-                <a:solidFill>
-                  <a:srgbClr val="C7F52F"/>
+              <a:rPr sz="3300" b="1">
+                <a:solidFill>
+                  <a:srgbClr val="F1EFE5"/>
                 </a:solidFill>
                 <a:latin typeface="Arial Black"/>
                 <a:ea typeface="Arial Black"/>
                 <a:cs typeface="Arial Black"/>
               </a:rPr>
-              <a:t>MONAD</a:t>
+              <a:t>$162</a:t>
             </a:r>
           </a:p>
         </p:txBody>
       </p:sp>
       <p:sp>
         <p:nvSpPr>
-          <p:cNvPr id="61" name="result-monad-label">
-            <a:extLst xmlns:a="http://schemas.openxmlformats.org/drawingml/2006/main">
-              <a:ext uri="{FF2B5EF4-FFF2-40B4-BE49-F238E27FC236}">
-                <a16:creationId xmlns:a16="http://schemas.microsoft.com/office/drawing/2014/main" id="{75D526C8-BC19-4D5D-941B-EB761A8DBA3B}"/>
-              </a:ext>
-            </a:extLst>
-          </p:cNvPr>
-          <p:cNvSpPr>
-            <a:spLocks xmlns:a="http://schemas.openxmlformats.org/drawingml/2006/main" noGrp="1"/>
-          </p:cNvSpPr>
-          <p:nvPr/>
-        </p:nvSpPr>
-        <p:spPr>
-          <a:xfrm xmlns:a="http://schemas.openxmlformats.org/drawingml/2006/main">
-            <a:off x="7296150" y="4857750"/>
-            <a:ext cx="2381250" cy="209550"/>
+          <p:cNvPr id="66" name="economics-revenue-label-2">
+            <a:extLst xmlns:a="http://schemas.openxmlformats.org/drawingml/2006/main">
+              <a:ext uri="{FF2B5EF4-FFF2-40B4-BE49-F238E27FC236}">
+                <a16:creationId xmlns:a16="http://schemas.microsoft.com/office/drawing/2014/main" id="{43766AA2-4E96-42B9-ACCA-05B38ED4E3EB}"/>
+              </a:ext>
+            </a:extLst>
+          </p:cNvPr>
+          <p:cNvSpPr>
+            <a:spLocks xmlns:a="http://schemas.openxmlformats.org/drawingml/2006/main" noGrp="1"/>
+          </p:cNvSpPr>
+          <p:nvPr/>
+        </p:nvSpPr>
+        <p:spPr>
+          <a:xfrm xmlns:a="http://schemas.openxmlformats.org/drawingml/2006/main">
+            <a:off x="9620250" y="4629150"/>
+            <a:ext cx="1257300" cy="171450"/>
           </a:xfrm>
           <a:prstGeom xmlns:a="http://schemas.openxmlformats.org/drawingml/2006/main" prst="rect">
             <a:avLst/>
@@ -19002,14 +19379,76 @@
           </a:bodyPr>
           <a:lstStyle xmlns:a="http://schemas.openxmlformats.org/drawingml/2006/main"/>
           <a:p xmlns:a="http://schemas.openxmlformats.org/drawingml/2006/main">
+            <a:pPr algn="r">
+              <a:lnSpc>
+                <a:spcPct val="100000"/>
+              </a:lnSpc>
+              <a:buNone/>
+              <a:defRPr sz="900" b="0">
+                <a:solidFill>
+                  <a:srgbClr val="858B84"/>
+                </a:solidFill>
+                <a:latin typeface="Courier New"/>
+                <a:ea typeface="Courier New"/>
+                <a:cs typeface="Courier New"/>
+              </a:defRPr>
+            </a:pPr>
+            <a:r>
+              <a:rPr sz="900" b="0">
+                <a:solidFill>
+                  <a:srgbClr val="858B84"/>
+                </a:solidFill>
+                <a:latin typeface="Courier New"/>
+                <a:ea typeface="Courier New"/>
+                <a:cs typeface="Courier New"/>
+              </a:rPr>
+              <a:t>POOL REVENUE</a:t>
+            </a:r>
+          </a:p>
+        </p:txBody>
+      </p:sp>
+      <p:sp>
+        <p:nvSpPr>
+          <p:cNvPr id="67" name="economics-buyer-2">
+            <a:extLst xmlns:a="http://schemas.openxmlformats.org/drawingml/2006/main">
+              <a:ext uri="{FF2B5EF4-FFF2-40B4-BE49-F238E27FC236}">
+                <a16:creationId xmlns:a16="http://schemas.microsoft.com/office/drawing/2014/main" id="{9240022A-73BD-44A3-869F-92BD82B2D6BD}"/>
+              </a:ext>
+            </a:extLst>
+          </p:cNvPr>
+          <p:cNvSpPr>
+            <a:spLocks xmlns:a="http://schemas.openxmlformats.org/drawingml/2006/main" noGrp="1"/>
+          </p:cNvSpPr>
+          <p:nvPr/>
+        </p:nvSpPr>
+        <p:spPr>
+          <a:xfrm xmlns:a="http://schemas.openxmlformats.org/drawingml/2006/main">
+            <a:off x="7905750" y="5181600"/>
+            <a:ext cx="2952750" cy="190500"/>
+          </a:xfrm>
+          <a:prstGeom xmlns:a="http://schemas.openxmlformats.org/drawingml/2006/main" prst="rect">
+            <a:avLst/>
+          </a:prstGeom>
+          <a:noFill xmlns:a="http://schemas.openxmlformats.org/drawingml/2006/main"/>
+          <a:ln xmlns:a="http://schemas.openxmlformats.org/drawingml/2006/main" w="0">
+            <a:noFill/>
+            <a:prstDash val="solid"/>
+          </a:ln>
+        </p:spPr>
+        <p:txBody>
+          <a:bodyPr xmlns:a="http://schemas.openxmlformats.org/drawingml/2006/main" wrap="square" lIns="0" tIns="0" rIns="0" bIns="0" anchor="t">
+            <a:noAutofit/>
+          </a:bodyPr>
+          <a:lstStyle xmlns:a="http://schemas.openxmlformats.org/drawingml/2006/main"/>
+          <a:p xmlns:a="http://schemas.openxmlformats.org/drawingml/2006/main">
             <a:pPr algn="l">
               <a:lnSpc>
                 <a:spcPct val="100000"/>
               </a:lnSpc>
               <a:buNone/>
-              <a:defRPr sz="975" b="0">
-                <a:solidFill>
-                  <a:srgbClr val="858B84"/>
+              <a:defRPr sz="1050" b="1">
+                <a:solidFill>
+                  <a:srgbClr val="FF2B79"/>
                 </a:solidFill>
                 <a:latin typeface="Courier New"/>
                 <a:ea typeface="Courier New"/>
@@ -19017,37 +19456,68 @@
               </a:defRPr>
             </a:pPr>
             <a:r>
-              <a:rPr sz="975" b="0">
-                <a:solidFill>
-                  <a:srgbClr val="858B84"/>
+              <a:rPr sz="1050" b="1">
+                <a:solidFill>
+                  <a:srgbClr val="FF2B79"/>
                 </a:solidFill>
                 <a:latin typeface="Courier New"/>
                 <a:ea typeface="Courier New"/>
                 <a:cs typeface="Courier New"/>
               </a:rPr>
-              <a:t>FINALIZES RECORDED ORDER</a:t>
+              <a:t>16.0% NET BUYER SAVINGS</a:t>
             </a:r>
           </a:p>
         </p:txBody>
       </p:sp>
       <p:sp>
         <p:nvSpPr>
-          <p:cNvPr id="62" name="result-rain">
-            <a:extLst xmlns:a="http://schemas.openxmlformats.org/drawingml/2006/main">
-              <a:ext uri="{FF2B5EF4-FFF2-40B4-BE49-F238E27FC236}">
-                <a16:creationId xmlns:a16="http://schemas.microsoft.com/office/drawing/2014/main" id="{0138993B-A110-4268-B6A8-67AB88731D66}"/>
-              </a:ext>
-            </a:extLst>
-          </p:cNvPr>
-          <p:cNvSpPr>
-            <a:spLocks xmlns:a="http://schemas.openxmlformats.org/drawingml/2006/main" noGrp="1"/>
-          </p:cNvSpPr>
-          <p:nvPr/>
-        </p:nvSpPr>
-        <p:spPr>
-          <a:xfrm xmlns:a="http://schemas.openxmlformats.org/drawingml/2006/main">
-            <a:off x="9677400" y="4419600"/>
-            <a:ext cx="1733550" cy="361950"/>
+          <p:cNvPr id="68" name="closing-rule">
+            <a:extLst xmlns:a="http://schemas.openxmlformats.org/drawingml/2006/main">
+              <a:ext uri="{FF2B5EF4-FFF2-40B4-BE49-F238E27FC236}">
+                <a16:creationId xmlns:a16="http://schemas.microsoft.com/office/drawing/2014/main" id="{A74F8382-B56A-4D4B-9E2B-E48139B36813}"/>
+              </a:ext>
+            </a:extLst>
+          </p:cNvPr>
+          <p:cNvSpPr>
+            <a:spLocks xmlns:a="http://schemas.openxmlformats.org/drawingml/2006/main" noGrp="1"/>
+          </p:cNvSpPr>
+          <p:nvPr/>
+        </p:nvSpPr>
+        <p:spPr>
+          <a:xfrm xmlns:a="http://schemas.openxmlformats.org/drawingml/2006/main">
+            <a:off x="381000" y="5676900"/>
+            <a:ext cx="11430000" cy="0"/>
+          </a:xfrm>
+          <a:prstGeom xmlns:a="http://schemas.openxmlformats.org/drawingml/2006/main" prst="line">
+            <a:avLst/>
+          </a:prstGeom>
+          <a:noFill xmlns:a="http://schemas.openxmlformats.org/drawingml/2006/main"/>
+          <a:ln xmlns:a="http://schemas.openxmlformats.org/drawingml/2006/main" w="11430">
+            <a:solidFill>
+              <a:srgbClr val="252A26"/>
+            </a:solidFill>
+            <a:prstDash val="solid"/>
+          </a:ln>
+        </p:spPr>
+      </p:sp>
+      <p:sp>
+        <p:nvSpPr>
+          <p:cNvPr id="69" name="economics-boundary">
+            <a:extLst xmlns:a="http://schemas.openxmlformats.org/drawingml/2006/main">
+              <a:ext uri="{FF2B5EF4-FFF2-40B4-BE49-F238E27FC236}">
+                <a16:creationId xmlns:a16="http://schemas.microsoft.com/office/drawing/2014/main" id="{8A32BAF6-C76A-4995-964D-7D0FDB29502F}"/>
+              </a:ext>
+            </a:extLst>
+          </p:cNvPr>
+          <p:cNvSpPr>
+            <a:spLocks xmlns:a="http://schemas.openxmlformats.org/drawingml/2006/main" noGrp="1"/>
+          </p:cNvSpPr>
+          <p:nvPr/>
+        </p:nvSpPr>
+        <p:spPr>
+          <a:xfrm xmlns:a="http://schemas.openxmlformats.org/drawingml/2006/main">
+            <a:off x="381000" y="5791200"/>
+            <a:ext cx="11430000" cy="171450"/>
           </a:xfrm>
           <a:prstGeom xmlns:a="http://schemas.openxmlformats.org/drawingml/2006/main" prst="rect">
             <a:avLst/>
@@ -19064,52 +19534,52 @@
           </a:bodyPr>
           <a:lstStyle xmlns:a="http://schemas.openxmlformats.org/drawingml/2006/main"/>
           <a:p xmlns:a="http://schemas.openxmlformats.org/drawingml/2006/main">
-            <a:pPr algn="r">
+            <a:pPr algn="l">
               <a:lnSpc>
                 <a:spcPct val="100000"/>
               </a:lnSpc>
               <a:buNone/>
-              <a:defRPr sz="2100" b="1">
+              <a:defRPr sz="900" b="1">
                 <a:solidFill>
                   <a:srgbClr val="FF2B79"/>
                 </a:solidFill>
-                <a:latin typeface="Arial Black"/>
-                <a:ea typeface="Arial Black"/>
-                <a:cs typeface="Arial Black"/>
+                <a:latin typeface="Courier New"/>
+                <a:ea typeface="Courier New"/>
+                <a:cs typeface="Courier New"/>
               </a:defRPr>
             </a:pPr>
             <a:r>
-              <a:rPr sz="2100" b="1">
+              <a:rPr sz="900" b="1">
                 <a:solidFill>
                   <a:srgbClr val="FF2B79"/>
                 </a:solidFill>
-                <a:latin typeface="Arial Black"/>
-                <a:ea typeface="Arial Black"/>
-                <a:cs typeface="Arial Black"/>
+                <a:latin typeface="Courier New"/>
+                <a:ea typeface="Courier New"/>
+                <a:cs typeface="Courier New"/>
               </a:rPr>
-              <a:t>RAIN</a:t>
+              <a:t>ILLUSTRATIVE ONLY · NO FEE IN THE FIXED RECORD · EXCLUDES TAX, SHIPPING, RETURNS + COSTS</a:t>
             </a:r>
           </a:p>
         </p:txBody>
       </p:sp>
       <p:sp>
         <p:nvSpPr>
-          <p:cNvPr id="63" name="result-rain-label">
-            <a:extLst xmlns:a="http://schemas.openxmlformats.org/drawingml/2006/main">
-              <a:ext uri="{FF2B5EF4-FFF2-40B4-BE49-F238E27FC236}">
-                <a16:creationId xmlns:a16="http://schemas.microsoft.com/office/drawing/2014/main" id="{9FC1CC25-9A00-486E-93EB-609F12EC2182}"/>
-              </a:ext>
-            </a:extLst>
-          </p:cNvPr>
-          <p:cNvSpPr>
-            <a:spLocks xmlns:a="http://schemas.openxmlformats.org/drawingml/2006/main" noGrp="1"/>
-          </p:cNvSpPr>
-          <p:nvPr/>
-        </p:nvSpPr>
-        <p:spPr>
-          <a:xfrm xmlns:a="http://schemas.openxmlformats.org/drawingml/2006/main">
-            <a:off x="9467850" y="4857750"/>
-            <a:ext cx="1943100" cy="209550"/>
+          <p:cNvPr id="70" name="closing-thesis">
+            <a:extLst xmlns:a="http://schemas.openxmlformats.org/drawingml/2006/main">
+              <a:ext uri="{FF2B5EF4-FFF2-40B4-BE49-F238E27FC236}">
+                <a16:creationId xmlns:a16="http://schemas.microsoft.com/office/drawing/2014/main" id="{EAE89F8B-33EA-45DC-8041-E9A1CFA0DDC4}"/>
+              </a:ext>
+            </a:extLst>
+          </p:cNvPr>
+          <p:cNvSpPr>
+            <a:spLocks xmlns:a="http://schemas.openxmlformats.org/drawingml/2006/main" noGrp="1"/>
+          </p:cNvSpPr>
+          <p:nvPr/>
+        </p:nvSpPr>
+        <p:spPr>
+          <a:xfrm xmlns:a="http://schemas.openxmlformats.org/drawingml/2006/main">
+            <a:off x="381000" y="6048375"/>
+            <a:ext cx="8191500" cy="228600"/>
           </a:xfrm>
           <a:prstGeom xmlns:a="http://schemas.openxmlformats.org/drawingml/2006/main" prst="rect">
             <a:avLst/>
@@ -19126,105 +19596,12 @@
           </a:bodyPr>
           <a:lstStyle xmlns:a="http://schemas.openxmlformats.org/drawingml/2006/main"/>
           <a:p xmlns:a="http://schemas.openxmlformats.org/drawingml/2006/main">
-            <a:pPr algn="r">
-              <a:lnSpc>
-                <a:spcPct val="100000"/>
-              </a:lnSpc>
-              <a:buNone/>
-              <a:defRPr sz="1125" b="0">
-                <a:solidFill>
-                  <a:srgbClr val="858B84"/>
-                </a:solidFill>
-                <a:latin typeface="Courier New"/>
-                <a:ea typeface="Courier New"/>
-                <a:cs typeface="Courier New"/>
-              </a:defRPr>
-            </a:pPr>
-            <a:r>
-              <a:rPr sz="1125" b="0">
-                <a:solidFill>
-                  <a:srgbClr val="858B84"/>
-                </a:solidFill>
-                <a:latin typeface="Courier New"/>
-                <a:ea typeface="Courier New"/>
-                <a:cs typeface="Courier New"/>
-              </a:rPr>
-              <a:t>SCOPES AUTHORITY</a:t>
-            </a:r>
-          </a:p>
-        </p:txBody>
-      </p:sp>
-      <p:sp>
-        <p:nvSpPr>
-          <p:cNvPr id="64" name="closing-rule">
-            <a:extLst xmlns:a="http://schemas.openxmlformats.org/drawingml/2006/main">
-              <a:ext uri="{FF2B5EF4-FFF2-40B4-BE49-F238E27FC236}">
-                <a16:creationId xmlns:a16="http://schemas.microsoft.com/office/drawing/2014/main" id="{99C5A557-D956-4B25-963B-7E733396CA0F}"/>
-              </a:ext>
-            </a:extLst>
-          </p:cNvPr>
-          <p:cNvSpPr>
-            <a:spLocks xmlns:a="http://schemas.openxmlformats.org/drawingml/2006/main" noGrp="1"/>
-          </p:cNvSpPr>
-          <p:nvPr/>
-        </p:nvSpPr>
-        <p:spPr>
-          <a:xfrm xmlns:a="http://schemas.openxmlformats.org/drawingml/2006/main">
-            <a:off x="381000" y="5753100"/>
-            <a:ext cx="11430000" cy="0"/>
-          </a:xfrm>
-          <a:prstGeom xmlns:a="http://schemas.openxmlformats.org/drawingml/2006/main" prst="line">
-            <a:avLst/>
-          </a:prstGeom>
-          <a:noFill xmlns:a="http://schemas.openxmlformats.org/drawingml/2006/main"/>
-          <a:ln xmlns:a="http://schemas.openxmlformats.org/drawingml/2006/main" w="11430">
-            <a:solidFill>
-              <a:srgbClr val="252A26"/>
-            </a:solidFill>
-            <a:prstDash val="solid"/>
-          </a:ln>
-        </p:spPr>
-      </p:sp>
-      <p:sp>
-        <p:nvSpPr>
-          <p:cNvPr id="65" name="closing-thesis">
-            <a:extLst xmlns:a="http://schemas.openxmlformats.org/drawingml/2006/main">
-              <a:ext uri="{FF2B5EF4-FFF2-40B4-BE49-F238E27FC236}">
-                <a16:creationId xmlns:a16="http://schemas.microsoft.com/office/drawing/2014/main" id="{13BACCFD-7CF9-4F6E-979E-25A5FA72C160}"/>
-              </a:ext>
-            </a:extLst>
-          </p:cNvPr>
-          <p:cNvSpPr>
-            <a:spLocks xmlns:a="http://schemas.openxmlformats.org/drawingml/2006/main" noGrp="1"/>
-          </p:cNvSpPr>
-          <p:nvPr/>
-        </p:nvSpPr>
-        <p:spPr>
-          <a:xfrm xmlns:a="http://schemas.openxmlformats.org/drawingml/2006/main">
-            <a:off x="381000" y="5905500"/>
-            <a:ext cx="8191500" cy="285750"/>
-          </a:xfrm>
-          <a:prstGeom xmlns:a="http://schemas.openxmlformats.org/drawingml/2006/main" prst="rect">
-            <a:avLst/>
-          </a:prstGeom>
-          <a:noFill xmlns:a="http://schemas.openxmlformats.org/drawingml/2006/main"/>
-          <a:ln xmlns:a="http://schemas.openxmlformats.org/drawingml/2006/main" w="0">
-            <a:noFill/>
-            <a:prstDash val="solid"/>
-          </a:ln>
-        </p:spPr>
-        <p:txBody>
-          <a:bodyPr xmlns:a="http://schemas.openxmlformats.org/drawingml/2006/main" wrap="square" lIns="0" tIns="0" rIns="0" bIns="0" anchor="t">
-            <a:noAutofit/>
-          </a:bodyPr>
-          <a:lstStyle xmlns:a="http://schemas.openxmlformats.org/drawingml/2006/main"/>
-          <a:p xmlns:a="http://schemas.openxmlformats.org/drawingml/2006/main">
             <a:pPr algn="l">
               <a:lnSpc>
                 <a:spcPct val="100000"/>
               </a:lnSpc>
               <a:buNone/>
-              <a:defRPr sz="1500" b="1">
+              <a:defRPr sz="1350" b="1">
                 <a:solidFill>
                   <a:srgbClr val="F1EFE5"/>
                 </a:solidFill>
@@ -19234,7 +19611,7 @@
               </a:defRPr>
             </a:pPr>
             <a:r>
-              <a:rPr sz="1500" b="1">
+              <a:rPr sz="1350" b="1">
                 <a:solidFill>
                   <a:srgbClr val="F1EFE5"/>
                 </a:solidFill>
@@ -19249,22 +19626,22 @@
       </p:sp>
       <p:sp>
         <p:nvSpPr>
-          <p:cNvPr id="66" name="closing-action">
-            <a:extLst xmlns:a="http://schemas.openxmlformats.org/drawingml/2006/main">
-              <a:ext uri="{FF2B5EF4-FFF2-40B4-BE49-F238E27FC236}">
-                <a16:creationId xmlns:a16="http://schemas.microsoft.com/office/drawing/2014/main" id="{E58B512A-21AC-4093-84A7-B7136A8AABD0}"/>
-              </a:ext>
-            </a:extLst>
-          </p:cNvPr>
-          <p:cNvSpPr>
-            <a:spLocks xmlns:a="http://schemas.openxmlformats.org/drawingml/2006/main" noGrp="1"/>
-          </p:cNvSpPr>
-          <p:nvPr/>
-        </p:nvSpPr>
-        <p:spPr>
-          <a:xfrm xmlns:a="http://schemas.openxmlformats.org/drawingml/2006/main">
-            <a:off x="8629650" y="5905500"/>
-            <a:ext cx="3181350" cy="285750"/>
+          <p:cNvPr id="71" name="closing-action">
+            <a:extLst xmlns:a="http://schemas.openxmlformats.org/drawingml/2006/main">
+              <a:ext uri="{FF2B5EF4-FFF2-40B4-BE49-F238E27FC236}">
+                <a16:creationId xmlns:a16="http://schemas.microsoft.com/office/drawing/2014/main" id="{0EA24049-EEB2-48CE-8FC3-949513992E69}"/>
+              </a:ext>
+            </a:extLst>
+          </p:cNvPr>
+          <p:cNvSpPr>
+            <a:spLocks xmlns:a="http://schemas.openxmlformats.org/drawingml/2006/main" noGrp="1"/>
+          </p:cNvSpPr>
+          <p:nvPr/>
+        </p:nvSpPr>
+        <p:spPr>
+          <a:xfrm xmlns:a="http://schemas.openxmlformats.org/drawingml/2006/main">
+            <a:off x="8629650" y="6048375"/>
+            <a:ext cx="3181350" cy="228600"/>
           </a:xfrm>
           <a:prstGeom xmlns:a="http://schemas.openxmlformats.org/drawingml/2006/main" prst="rect">
             <a:avLst/>
@@ -19304,7 +19681,7 @@
                 <a:ea typeface="Courier New"/>
                 <a:cs typeface="Courier New"/>
               </a:rPr>
-              <a:t>RAIN VERIFIED · MONAD FINALIZED</a:t>
+              <a:t>10% CASE: $108 / POOL</a:t>
             </a:r>
           </a:p>
         </p:txBody>
@@ -19312,7 +19689,7 @@
     </p:spTree>
     <p:extLst>
       <p:ext uri="{BB962C8B-B14F-4D97-AF65-F5344CB8AC3E}">
-        <p14:creationId xmlns:p14="http://schemas.microsoft.com/office/powerpoint/2010/main" val="1062618566"/>
+        <p14:creationId xmlns:p14="http://schemas.microsoft.com/office/powerpoint/2010/main" val="316487413"/>
       </p:ext>
     </p:extLst>
   </p:cSld>

--- a/POOL_PITCH.pptx
+++ b/POOL_PITCH.pptx
@@ -447,7 +447,7 @@
           <a:lstStyle xmlns:a="http://schemas.openxmlformats.org/drawingml/2006/main"/>
           <a:p xmlns:a="http://schemas.openxmlformats.org/drawingml/2006/main">
             <a:r>
-              <a:t>Open: Shopping agents optimize one buyer at a time. POOL creates a different market: patient buyers organize into full-MSRP-reserved fixture demand, then simulated merchants compete for the entire order. In the fixed evidence fixture, 12 units clear at $389 instead of $479, making $1,080 available again in the fixture ledger. The fixture demonstrates the mechanism; no real money moved.</a:t>
+              <a:t>Open: Volume discounts have always existed — they were just reserved for whoever could commit a warehouse at a time. POOL democratizes that buying power. Shopping agents optimize one buyer at a time. POOL creates a different market: patient buyers organize into full-MSRP-reserved fixture demand, then simulated merchants compete for the entire order. In the fixed evidence fixture, 12 units clear at $389 instead of $479, making $1,080 available again in the fixture ledger. The fixture demonstrates the mechanism; no real money moved.</a:t>
             </a:r>
           </a:p>
           <a:p xmlns:a="http://schemas.openxmlformats.org/drawingml/2006/main">
@@ -2639,7 +2639,7 @@
                 <a:ea typeface="Courier New"/>
                 <a:cs typeface="Courier New"/>
               </a:rPr>
-              <a:t>AUTONOMOUS COLLECTIVE PURCHASING</a:t>
+              <a:t>DEMOCRATIZE BUYING POWER</a:t>
             </a:r>
           </a:p>
         </p:txBody>

--- a/POOL_PITCH.pptx
+++ b/POOL_PITCH.pptx
@@ -9,6 +9,7 @@
   </p:notesMasterIdLst>
   <p:sldIdLst>
     <p:sldId xmlns:r="http://schemas.openxmlformats.org/officeDocument/2006/relationships" id="256" r:id="Rc462db9edd404ff8"/>
+    <p:sldId xmlns:r="http://schemas.openxmlformats.org/officeDocument/2006/relationships" id="262" r:id="Rc0ffee0curve0001"/>
     <p:sldId xmlns:r="http://schemas.openxmlformats.org/officeDocument/2006/relationships" id="257" r:id="R12b1035d417e48e9"/>
     <p:sldId xmlns:r="http://schemas.openxmlformats.org/officeDocument/2006/relationships" id="258" r:id="R534dec90622f4779"/>
     <p:sldId xmlns:r="http://schemas.openxmlformats.org/officeDocument/2006/relationships" id="259" r:id="Rf837021939e14849"/>
@@ -1008,6 +1009,106 @@
           <a:p xmlns:a="http://schemas.openxmlformats.org/drawingml/2006/main">
             <a:r>
               <a:t>- https://docs.monad.xyz/developer-essentials/testnet</a:t>
+            </a:r>
+          </a:p>
+        </p:txBody>
+      </p:sp>
+      <p:sp>
+        <p:nvSpPr>
+          <p:cNvPr id="4" name="Slide Number Placeholder 3"/>
+          <p:cNvSpPr>
+            <a:spLocks xmlns:a="http://schemas.openxmlformats.org/drawingml/2006/main" noGrp="1"/>
+          </p:cNvSpPr>
+          <p:nvPr>
+            <p:ph type="sldNum" idx="5"/>
+          </p:nvPr>
+        </p:nvSpPr>
+        <p:spPr/>
+        <p:txBody>
+          <a:bodyPr xmlns:a="http://schemas.openxmlformats.org/drawingml/2006/main"/>
+          <a:lstStyle xmlns:a="http://schemas.openxmlformats.org/drawingml/2006/main"/>
+          <a:p xmlns:a="http://schemas.openxmlformats.org/drawingml/2006/main"/>
+        </p:txBody>
+      </p:sp>
+    </p:spTree>
+  </p:cSld>
+  <p:clrMapOvr>
+    <a:masterClrMapping xmlns:a="http://schemas.openxmlformats.org/drawingml/2006/main"/>
+  </p:clrMapOvr>
+</p:notes>
+</file>
+
+<file path=ppt/notesSlides/notesSlide7.xml><?xml version="1.0" encoding="utf-8"?>
+<p:notes xmlns:p="http://schemas.openxmlformats.org/presentationml/2006/main">
+  <p:cSld>
+    <p:spTree>
+      <p:nvGrpSpPr>
+        <p:cNvPr id="1" name=""/>
+        <p:cNvGrpSpPr/>
+        <p:nvPr/>
+      </p:nvGrpSpPr>
+      <p:grpSpPr>
+        <a:xfrm xmlns:a="http://schemas.openxmlformats.org/drawingml/2006/main"/>
+      </p:grpSpPr>
+      <p:sp>
+        <p:nvSpPr>
+          <p:cNvPr id="2" name="Slide Image Placeholder 1"/>
+          <p:cNvSpPr>
+            <a:spLocks xmlns:a="http://schemas.openxmlformats.org/drawingml/2006/main" noGrp="1"/>
+          </p:cNvSpPr>
+          <p:nvPr>
+            <p:ph type="sldImg" idx="0"/>
+          </p:nvPr>
+        </p:nvSpPr>
+        <p:spPr/>
+      </p:sp>
+      <p:sp>
+        <p:nvSpPr>
+          <p:cNvPr id="3" name="Notes Placeholder 2"/>
+          <p:cNvSpPr>
+            <a:spLocks xmlns:a="http://schemas.openxmlformats.org/drawingml/2006/main" noGrp="1"/>
+          </p:cNvSpPr>
+          <p:nvPr>
+            <p:ph type="body" idx="1"/>
+          </p:nvPr>
+        </p:nvSpPr>
+        <p:spPr/>
+        <p:txBody>
+          <a:bodyPr xmlns:a="http://schemas.openxmlformats.org/drawingml/2006/main"/>
+          <a:lstStyle xmlns:a="http://schemas.openxmlformats.org/drawingml/2006/main"/>
+          <a:p xmlns:a="http://schemas.openxmlformats.org/drawingml/2006/main">
+            <a:r>
+              <a:t>Buyers pledge along a curve instead of naming one price. The agent walks it down, promising each merchant the exact volume that unlocks at that rung, and stops at the deepest price a merchant will honour. All 560 activated buyers then pay that single cleared price, including the 300 who would have paid $900. The agent then buys on Rain with a scoped card for exactly the cleared amount. Live at /negotiate.</a:t>
+            </a:r>
+          </a:p>
+          <a:p xmlns:a="http://schemas.openxmlformats.org/drawingml/2006/main">
+            <a:r>
+              <a:t/>
+            </a:r>
+          </a:p>
+          <a:p xmlns:a="http://schemas.openxmlformats.org/drawingml/2006/main">
+            <a:r>
+              <a:t>[Sources]</a:t>
+            </a:r>
+          </a:p>
+          <a:p xmlns:a="http://schemas.openxmlformats.org/drawingml/2006/main">
+            <a:r>
+              <a:t>- /Applications/Personal App/Pool/app/demo/demo-experience.tsx</a:t>
+            </a:r>
+          </a:p>
+          <a:p xmlns:a="http://schemas.openxmlformats.org/drawingml/2006/main">
+            <a:r>
+              <a:t>- /Applications/Personal App/Pool/app/merchant/page.tsx</a:t>
+            </a:r>
+          </a:p>
+          <a:p xmlns:a="http://schemas.openxmlformats.org/drawingml/2006/main">
+            <a:r>
+              <a:t>- /Applications/Personal App/Pool/app/api/merchant/pilot/route.ts</a:t>
+            </a:r>
+          </a:p>
+          <a:p xmlns:a="http://schemas.openxmlformats.org/drawingml/2006/main">
+            <a:r>
+              <a:t>- /Applications/Personal App/Pool/lib/market/index.ts</a:t>
             </a:r>
           </a:p>
         </p:txBody>
@@ -2701,7 +2802,7 @@
                 <a:ea typeface="Courier New"/>
                 <a:cs typeface="Courier New"/>
               </a:rPr>
-              <a:t>01 / 06</a:t>
+              <a:t>01 / 07</a:t>
             </a:r>
           </a:p>
         </p:txBody>
@@ -4923,7 +5024,7 @@
                 <a:ea typeface="Courier New"/>
                 <a:cs typeface="Courier New"/>
               </a:rPr>
-              <a:t>02 / 06</a:t>
+              <a:t>03 / 07</a:t>
             </a:r>
           </a:p>
         </p:txBody>
@@ -8300,7 +8401,7 @@
                 <a:ea typeface="Courier New"/>
                 <a:cs typeface="Courier New"/>
               </a:rPr>
-              <a:t>03 / 06</a:t>
+              <a:t>04 / 07</a:t>
             </a:r>
           </a:p>
         </p:txBody>
@@ -11346,7 +11447,7 @@
                 <a:ea typeface="Courier New"/>
                 <a:cs typeface="Courier New"/>
               </a:rPr>
-              <a:t>04 / 06</a:t>
+              <a:t>05 / 07</a:t>
             </a:r>
           </a:p>
         </p:txBody>
@@ -14504,7 +14605,7 @@
                 <a:ea typeface="Courier New"/>
                 <a:cs typeface="Courier New"/>
               </a:rPr>
-              <a:t>05 / 06</a:t>
+              <a:t>06 / 07</a:t>
             </a:r>
           </a:p>
         </p:txBody>
@@ -17666,7 +17767,7 @@
                 <a:ea typeface="Courier New"/>
                 <a:cs typeface="Courier New"/>
               </a:rPr>
-              <a:t>06 / 06</a:t>
+              <a:t>07 / 07</a:t>
             </a:r>
           </a:p>
         </p:txBody>
@@ -19690,6 +19791,3164 @@
     <p:extLst>
       <p:ext uri="{BB962C8B-B14F-4D97-AF65-F5344CB8AC3E}">
         <p14:creationId xmlns:p14="http://schemas.microsoft.com/office/powerpoint/2010/main" val="316487413"/>
+      </p:ext>
+    </p:extLst>
+  </p:cSld>
+</p:sld>
+</file>
+
+<file path=ppt/slides/slide7.xml><?xml version="1.0" encoding="utf-8"?>
+<p:sld xmlns:p="http://schemas.openxmlformats.org/presentationml/2006/main">
+  <p:cSld>
+    <p:bg>
+      <p:bgPr>
+        <a:solidFill xmlns:a="http://schemas.openxmlformats.org/drawingml/2006/main">
+          <a:srgbClr val="080A09"/>
+        </a:solidFill>
+      </p:bgPr>
+    </p:bg>
+    <p:spTree>
+      <p:nvGrpSpPr>
+        <p:cNvPr id="1" name=""/>
+        <p:cNvGrpSpPr/>
+        <p:nvPr/>
+      </p:nvGrpSpPr>
+      <p:grpSpPr>
+        <a:xfrm xmlns:a="http://schemas.openxmlformats.org/drawingml/2006/main"/>
+      </p:grpSpPr>
+      <p:sp>
+        <p:nvSpPr>
+          <p:cNvPr id="71" name="grid-v-40">
+            <a:extLst xmlns:a="http://schemas.openxmlformats.org/drawingml/2006/main">
+              <a:ext uri="{FF2B5EF4-FFF2-40B4-BE49-F238E27FC236}">
+                <a16:creationId xmlns:a16="http://schemas.microsoft.com/office/drawing/2014/main" id="{0F282B68-6026-4320-AD5B-B19F12D19C91}"/>
+              </a:ext>
+            </a:extLst>
+          </p:cNvPr>
+          <p:cNvSpPr>
+            <a:spLocks xmlns:a="http://schemas.openxmlformats.org/drawingml/2006/main" noGrp="1"/>
+          </p:cNvSpPr>
+          <p:nvPr/>
+        </p:nvSpPr>
+        <p:spPr>
+          <a:xfrm xmlns:a="http://schemas.openxmlformats.org/drawingml/2006/main">
+            <a:off x="381000" y="990600"/>
+            <a:ext cx="0" cy="5257800"/>
+          </a:xfrm>
+          <a:prstGeom xmlns:a="http://schemas.openxmlformats.org/drawingml/2006/main" prst="line">
+            <a:avLst/>
+          </a:prstGeom>
+          <a:noFill xmlns:a="http://schemas.openxmlformats.org/drawingml/2006/main"/>
+          <a:ln xmlns:a="http://schemas.openxmlformats.org/drawingml/2006/main" w="6191">
+            <a:solidFill>
+              <a:srgbClr val="171B18"/>
+            </a:solidFill>
+            <a:prstDash val="solid"/>
+          </a:ln>
+        </p:spPr>
+      </p:sp>
+      <p:sp>
+        <p:nvSpPr>
+          <p:cNvPr id="2" name="grid-v-104">
+            <a:extLst xmlns:a="http://schemas.openxmlformats.org/drawingml/2006/main">
+              <a:ext uri="{FF2B5EF4-FFF2-40B4-BE49-F238E27FC236}">
+                <a16:creationId xmlns:a16="http://schemas.microsoft.com/office/drawing/2014/main" id="{AEF2E912-A117-448D-8E84-BC3FB3DA02F4}"/>
+              </a:ext>
+            </a:extLst>
+          </p:cNvPr>
+          <p:cNvSpPr>
+            <a:spLocks xmlns:a="http://schemas.openxmlformats.org/drawingml/2006/main" noGrp="1"/>
+          </p:cNvSpPr>
+          <p:nvPr/>
+        </p:nvSpPr>
+        <p:spPr>
+          <a:xfrm xmlns:a="http://schemas.openxmlformats.org/drawingml/2006/main">
+            <a:off x="990600" y="990600"/>
+            <a:ext cx="0" cy="5257800"/>
+          </a:xfrm>
+          <a:prstGeom xmlns:a="http://schemas.openxmlformats.org/drawingml/2006/main" prst="line">
+            <a:avLst/>
+          </a:prstGeom>
+          <a:noFill xmlns:a="http://schemas.openxmlformats.org/drawingml/2006/main"/>
+          <a:ln xmlns:a="http://schemas.openxmlformats.org/drawingml/2006/main" w="6191">
+            <a:solidFill>
+              <a:srgbClr val="171B18"/>
+            </a:solidFill>
+            <a:prstDash val="solid"/>
+          </a:ln>
+        </p:spPr>
+      </p:sp>
+      <p:sp>
+        <p:nvSpPr>
+          <p:cNvPr id="3" name="grid-v-168">
+            <a:extLst xmlns:a="http://schemas.openxmlformats.org/drawingml/2006/main">
+              <a:ext uri="{FF2B5EF4-FFF2-40B4-BE49-F238E27FC236}">
+                <a16:creationId xmlns:a16="http://schemas.microsoft.com/office/drawing/2014/main" id="{6D89343F-CE2D-439C-BD4A-B5102341FF1D}"/>
+              </a:ext>
+            </a:extLst>
+          </p:cNvPr>
+          <p:cNvSpPr>
+            <a:spLocks xmlns:a="http://schemas.openxmlformats.org/drawingml/2006/main" noGrp="1"/>
+          </p:cNvSpPr>
+          <p:nvPr/>
+        </p:nvSpPr>
+        <p:spPr>
+          <a:xfrm xmlns:a="http://schemas.openxmlformats.org/drawingml/2006/main">
+            <a:off x="1600200" y="990600"/>
+            <a:ext cx="0" cy="5257800"/>
+          </a:xfrm>
+          <a:prstGeom xmlns:a="http://schemas.openxmlformats.org/drawingml/2006/main" prst="line">
+            <a:avLst/>
+          </a:prstGeom>
+          <a:noFill xmlns:a="http://schemas.openxmlformats.org/drawingml/2006/main"/>
+          <a:ln xmlns:a="http://schemas.openxmlformats.org/drawingml/2006/main" w="6191">
+            <a:solidFill>
+              <a:srgbClr val="171B18"/>
+            </a:solidFill>
+            <a:prstDash val="solid"/>
+          </a:ln>
+        </p:spPr>
+      </p:sp>
+      <p:sp>
+        <p:nvSpPr>
+          <p:cNvPr id="4" name="grid-v-232">
+            <a:extLst xmlns:a="http://schemas.openxmlformats.org/drawingml/2006/main">
+              <a:ext uri="{FF2B5EF4-FFF2-40B4-BE49-F238E27FC236}">
+                <a16:creationId xmlns:a16="http://schemas.microsoft.com/office/drawing/2014/main" id="{CFD76E2E-EC97-46B5-893F-BE45192A8E3D}"/>
+              </a:ext>
+            </a:extLst>
+          </p:cNvPr>
+          <p:cNvSpPr>
+            <a:spLocks xmlns:a="http://schemas.openxmlformats.org/drawingml/2006/main" noGrp="1"/>
+          </p:cNvSpPr>
+          <p:nvPr/>
+        </p:nvSpPr>
+        <p:spPr>
+          <a:xfrm xmlns:a="http://schemas.openxmlformats.org/drawingml/2006/main">
+            <a:off x="2209800" y="990600"/>
+            <a:ext cx="0" cy="5257800"/>
+          </a:xfrm>
+          <a:prstGeom xmlns:a="http://schemas.openxmlformats.org/drawingml/2006/main" prst="line">
+            <a:avLst/>
+          </a:prstGeom>
+          <a:noFill xmlns:a="http://schemas.openxmlformats.org/drawingml/2006/main"/>
+          <a:ln xmlns:a="http://schemas.openxmlformats.org/drawingml/2006/main" w="6191">
+            <a:solidFill>
+              <a:srgbClr val="171B18"/>
+            </a:solidFill>
+            <a:prstDash val="solid"/>
+          </a:ln>
+        </p:spPr>
+      </p:sp>
+      <p:sp>
+        <p:nvSpPr>
+          <p:cNvPr id="5" name="grid-v-296">
+            <a:extLst xmlns:a="http://schemas.openxmlformats.org/drawingml/2006/main">
+              <a:ext uri="{FF2B5EF4-FFF2-40B4-BE49-F238E27FC236}">
+                <a16:creationId xmlns:a16="http://schemas.microsoft.com/office/drawing/2014/main" id="{AC79CE5B-DD89-4A52-87A4-6E847EF61414}"/>
+              </a:ext>
+            </a:extLst>
+          </p:cNvPr>
+          <p:cNvSpPr>
+            <a:spLocks xmlns:a="http://schemas.openxmlformats.org/drawingml/2006/main" noGrp="1"/>
+          </p:cNvSpPr>
+          <p:nvPr/>
+        </p:nvSpPr>
+        <p:spPr>
+          <a:xfrm xmlns:a="http://schemas.openxmlformats.org/drawingml/2006/main">
+            <a:off x="2819400" y="990600"/>
+            <a:ext cx="0" cy="5257800"/>
+          </a:xfrm>
+          <a:prstGeom xmlns:a="http://schemas.openxmlformats.org/drawingml/2006/main" prst="line">
+            <a:avLst/>
+          </a:prstGeom>
+          <a:noFill xmlns:a="http://schemas.openxmlformats.org/drawingml/2006/main"/>
+          <a:ln xmlns:a="http://schemas.openxmlformats.org/drawingml/2006/main" w="6191">
+            <a:solidFill>
+              <a:srgbClr val="171B18"/>
+            </a:solidFill>
+            <a:prstDash val="solid"/>
+          </a:ln>
+        </p:spPr>
+      </p:sp>
+      <p:sp>
+        <p:nvSpPr>
+          <p:cNvPr id="6" name="grid-v-360">
+            <a:extLst xmlns:a="http://schemas.openxmlformats.org/drawingml/2006/main">
+              <a:ext uri="{FF2B5EF4-FFF2-40B4-BE49-F238E27FC236}">
+                <a16:creationId xmlns:a16="http://schemas.microsoft.com/office/drawing/2014/main" id="{DBC880E9-CB58-47E8-93D2-D74A072DB1FA}"/>
+              </a:ext>
+            </a:extLst>
+          </p:cNvPr>
+          <p:cNvSpPr>
+            <a:spLocks xmlns:a="http://schemas.openxmlformats.org/drawingml/2006/main" noGrp="1"/>
+          </p:cNvSpPr>
+          <p:nvPr/>
+        </p:nvSpPr>
+        <p:spPr>
+          <a:xfrm xmlns:a="http://schemas.openxmlformats.org/drawingml/2006/main">
+            <a:off x="3429000" y="990600"/>
+            <a:ext cx="0" cy="5257800"/>
+          </a:xfrm>
+          <a:prstGeom xmlns:a="http://schemas.openxmlformats.org/drawingml/2006/main" prst="line">
+            <a:avLst/>
+          </a:prstGeom>
+          <a:noFill xmlns:a="http://schemas.openxmlformats.org/drawingml/2006/main"/>
+          <a:ln xmlns:a="http://schemas.openxmlformats.org/drawingml/2006/main" w="6191">
+            <a:solidFill>
+              <a:srgbClr val="171B18"/>
+            </a:solidFill>
+            <a:prstDash val="solid"/>
+          </a:ln>
+        </p:spPr>
+      </p:sp>
+      <p:sp>
+        <p:nvSpPr>
+          <p:cNvPr id="7" name="grid-v-424">
+            <a:extLst xmlns:a="http://schemas.openxmlformats.org/drawingml/2006/main">
+              <a:ext uri="{FF2B5EF4-FFF2-40B4-BE49-F238E27FC236}">
+                <a16:creationId xmlns:a16="http://schemas.microsoft.com/office/drawing/2014/main" id="{B6B2AEE4-3477-42FA-9B74-A6C78A721760}"/>
+              </a:ext>
+            </a:extLst>
+          </p:cNvPr>
+          <p:cNvSpPr>
+            <a:spLocks xmlns:a="http://schemas.openxmlformats.org/drawingml/2006/main" noGrp="1"/>
+          </p:cNvSpPr>
+          <p:nvPr/>
+        </p:nvSpPr>
+        <p:spPr>
+          <a:xfrm xmlns:a="http://schemas.openxmlformats.org/drawingml/2006/main">
+            <a:off x="4038600" y="990600"/>
+            <a:ext cx="0" cy="5257800"/>
+          </a:xfrm>
+          <a:prstGeom xmlns:a="http://schemas.openxmlformats.org/drawingml/2006/main" prst="line">
+            <a:avLst/>
+          </a:prstGeom>
+          <a:noFill xmlns:a="http://schemas.openxmlformats.org/drawingml/2006/main"/>
+          <a:ln xmlns:a="http://schemas.openxmlformats.org/drawingml/2006/main" w="6191">
+            <a:solidFill>
+              <a:srgbClr val="171B18"/>
+            </a:solidFill>
+            <a:prstDash val="solid"/>
+          </a:ln>
+        </p:spPr>
+      </p:sp>
+      <p:sp>
+        <p:nvSpPr>
+          <p:cNvPr id="8" name="grid-v-488">
+            <a:extLst xmlns:a="http://schemas.openxmlformats.org/drawingml/2006/main">
+              <a:ext uri="{FF2B5EF4-FFF2-40B4-BE49-F238E27FC236}">
+                <a16:creationId xmlns:a16="http://schemas.microsoft.com/office/drawing/2014/main" id="{7D706EB8-E4A2-4494-B5FA-4D216B68EF4C}"/>
+              </a:ext>
+            </a:extLst>
+          </p:cNvPr>
+          <p:cNvSpPr>
+            <a:spLocks xmlns:a="http://schemas.openxmlformats.org/drawingml/2006/main" noGrp="1"/>
+          </p:cNvSpPr>
+          <p:nvPr/>
+        </p:nvSpPr>
+        <p:spPr>
+          <a:xfrm xmlns:a="http://schemas.openxmlformats.org/drawingml/2006/main">
+            <a:off x="4648200" y="990600"/>
+            <a:ext cx="0" cy="5257800"/>
+          </a:xfrm>
+          <a:prstGeom xmlns:a="http://schemas.openxmlformats.org/drawingml/2006/main" prst="line">
+            <a:avLst/>
+          </a:prstGeom>
+          <a:noFill xmlns:a="http://schemas.openxmlformats.org/drawingml/2006/main"/>
+          <a:ln xmlns:a="http://schemas.openxmlformats.org/drawingml/2006/main" w="6191">
+            <a:solidFill>
+              <a:srgbClr val="171B18"/>
+            </a:solidFill>
+            <a:prstDash val="solid"/>
+          </a:ln>
+        </p:spPr>
+      </p:sp>
+      <p:sp>
+        <p:nvSpPr>
+          <p:cNvPr id="9" name="grid-v-552">
+            <a:extLst xmlns:a="http://schemas.openxmlformats.org/drawingml/2006/main">
+              <a:ext uri="{FF2B5EF4-FFF2-40B4-BE49-F238E27FC236}">
+                <a16:creationId xmlns:a16="http://schemas.microsoft.com/office/drawing/2014/main" id="{FB2B59F5-FA73-4426-9728-93266B60B55B}"/>
+              </a:ext>
+            </a:extLst>
+          </p:cNvPr>
+          <p:cNvSpPr>
+            <a:spLocks xmlns:a="http://schemas.openxmlformats.org/drawingml/2006/main" noGrp="1"/>
+          </p:cNvSpPr>
+          <p:nvPr/>
+        </p:nvSpPr>
+        <p:spPr>
+          <a:xfrm xmlns:a="http://schemas.openxmlformats.org/drawingml/2006/main">
+            <a:off x="5257800" y="990600"/>
+            <a:ext cx="0" cy="5257800"/>
+          </a:xfrm>
+          <a:prstGeom xmlns:a="http://schemas.openxmlformats.org/drawingml/2006/main" prst="line">
+            <a:avLst/>
+          </a:prstGeom>
+          <a:noFill xmlns:a="http://schemas.openxmlformats.org/drawingml/2006/main"/>
+          <a:ln xmlns:a="http://schemas.openxmlformats.org/drawingml/2006/main" w="6191">
+            <a:solidFill>
+              <a:srgbClr val="171B18"/>
+            </a:solidFill>
+            <a:prstDash val="solid"/>
+          </a:ln>
+        </p:spPr>
+      </p:sp>
+      <p:sp>
+        <p:nvSpPr>
+          <p:cNvPr id="10" name="grid-v-616">
+            <a:extLst xmlns:a="http://schemas.openxmlformats.org/drawingml/2006/main">
+              <a:ext uri="{FF2B5EF4-FFF2-40B4-BE49-F238E27FC236}">
+                <a16:creationId xmlns:a16="http://schemas.microsoft.com/office/drawing/2014/main" id="{86FF5569-6FBF-4C3F-BF9C-154E88F2642E}"/>
+              </a:ext>
+            </a:extLst>
+          </p:cNvPr>
+          <p:cNvSpPr>
+            <a:spLocks xmlns:a="http://schemas.openxmlformats.org/drawingml/2006/main" noGrp="1"/>
+          </p:cNvSpPr>
+          <p:nvPr/>
+        </p:nvSpPr>
+        <p:spPr>
+          <a:xfrm xmlns:a="http://schemas.openxmlformats.org/drawingml/2006/main">
+            <a:off x="5867400" y="990600"/>
+            <a:ext cx="0" cy="5257800"/>
+          </a:xfrm>
+          <a:prstGeom xmlns:a="http://schemas.openxmlformats.org/drawingml/2006/main" prst="line">
+            <a:avLst/>
+          </a:prstGeom>
+          <a:noFill xmlns:a="http://schemas.openxmlformats.org/drawingml/2006/main"/>
+          <a:ln xmlns:a="http://schemas.openxmlformats.org/drawingml/2006/main" w="6191">
+            <a:solidFill>
+              <a:srgbClr val="171B18"/>
+            </a:solidFill>
+            <a:prstDash val="solid"/>
+          </a:ln>
+        </p:spPr>
+      </p:sp>
+      <p:sp>
+        <p:nvSpPr>
+          <p:cNvPr id="11" name="grid-v-680">
+            <a:extLst xmlns:a="http://schemas.openxmlformats.org/drawingml/2006/main">
+              <a:ext uri="{FF2B5EF4-FFF2-40B4-BE49-F238E27FC236}">
+                <a16:creationId xmlns:a16="http://schemas.microsoft.com/office/drawing/2014/main" id="{24630DB2-7312-4BF0-94DF-7EECE4194ADC}"/>
+              </a:ext>
+            </a:extLst>
+          </p:cNvPr>
+          <p:cNvSpPr>
+            <a:spLocks xmlns:a="http://schemas.openxmlformats.org/drawingml/2006/main" noGrp="1"/>
+          </p:cNvSpPr>
+          <p:nvPr/>
+        </p:nvSpPr>
+        <p:spPr>
+          <a:xfrm xmlns:a="http://schemas.openxmlformats.org/drawingml/2006/main">
+            <a:off x="6477000" y="990600"/>
+            <a:ext cx="0" cy="5257800"/>
+          </a:xfrm>
+          <a:prstGeom xmlns:a="http://schemas.openxmlformats.org/drawingml/2006/main" prst="line">
+            <a:avLst/>
+          </a:prstGeom>
+          <a:noFill xmlns:a="http://schemas.openxmlformats.org/drawingml/2006/main"/>
+          <a:ln xmlns:a="http://schemas.openxmlformats.org/drawingml/2006/main" w="6191">
+            <a:solidFill>
+              <a:srgbClr val="171B18"/>
+            </a:solidFill>
+            <a:prstDash val="solid"/>
+          </a:ln>
+        </p:spPr>
+      </p:sp>
+      <p:sp>
+        <p:nvSpPr>
+          <p:cNvPr id="12" name="grid-v-744">
+            <a:extLst xmlns:a="http://schemas.openxmlformats.org/drawingml/2006/main">
+              <a:ext uri="{FF2B5EF4-FFF2-40B4-BE49-F238E27FC236}">
+                <a16:creationId xmlns:a16="http://schemas.microsoft.com/office/drawing/2014/main" id="{2EE5AF09-C470-460C-826C-839F6DB604B6}"/>
+              </a:ext>
+            </a:extLst>
+          </p:cNvPr>
+          <p:cNvSpPr>
+            <a:spLocks xmlns:a="http://schemas.openxmlformats.org/drawingml/2006/main" noGrp="1"/>
+          </p:cNvSpPr>
+          <p:nvPr/>
+        </p:nvSpPr>
+        <p:spPr>
+          <a:xfrm xmlns:a="http://schemas.openxmlformats.org/drawingml/2006/main">
+            <a:off x="7086600" y="990600"/>
+            <a:ext cx="0" cy="5257800"/>
+          </a:xfrm>
+          <a:prstGeom xmlns:a="http://schemas.openxmlformats.org/drawingml/2006/main" prst="line">
+            <a:avLst/>
+          </a:prstGeom>
+          <a:noFill xmlns:a="http://schemas.openxmlformats.org/drawingml/2006/main"/>
+          <a:ln xmlns:a="http://schemas.openxmlformats.org/drawingml/2006/main" w="6191">
+            <a:solidFill>
+              <a:srgbClr val="171B18"/>
+            </a:solidFill>
+            <a:prstDash val="solid"/>
+          </a:ln>
+        </p:spPr>
+      </p:sp>
+      <p:sp>
+        <p:nvSpPr>
+          <p:cNvPr id="13" name="grid-v-808">
+            <a:extLst xmlns:a="http://schemas.openxmlformats.org/drawingml/2006/main">
+              <a:ext uri="{FF2B5EF4-FFF2-40B4-BE49-F238E27FC236}">
+                <a16:creationId xmlns:a16="http://schemas.microsoft.com/office/drawing/2014/main" id="{EC37D1D0-EC66-4815-98B5-89AD2E75FD9A}"/>
+              </a:ext>
+            </a:extLst>
+          </p:cNvPr>
+          <p:cNvSpPr>
+            <a:spLocks xmlns:a="http://schemas.openxmlformats.org/drawingml/2006/main" noGrp="1"/>
+          </p:cNvSpPr>
+          <p:nvPr/>
+        </p:nvSpPr>
+        <p:spPr>
+          <a:xfrm xmlns:a="http://schemas.openxmlformats.org/drawingml/2006/main">
+            <a:off x="7696200" y="990600"/>
+            <a:ext cx="0" cy="5257800"/>
+          </a:xfrm>
+          <a:prstGeom xmlns:a="http://schemas.openxmlformats.org/drawingml/2006/main" prst="line">
+            <a:avLst/>
+          </a:prstGeom>
+          <a:noFill xmlns:a="http://schemas.openxmlformats.org/drawingml/2006/main"/>
+          <a:ln xmlns:a="http://schemas.openxmlformats.org/drawingml/2006/main" w="6191">
+            <a:solidFill>
+              <a:srgbClr val="171B18"/>
+            </a:solidFill>
+            <a:prstDash val="solid"/>
+          </a:ln>
+        </p:spPr>
+      </p:sp>
+      <p:sp>
+        <p:nvSpPr>
+          <p:cNvPr id="14" name="grid-v-872">
+            <a:extLst xmlns:a="http://schemas.openxmlformats.org/drawingml/2006/main">
+              <a:ext uri="{FF2B5EF4-FFF2-40B4-BE49-F238E27FC236}">
+                <a16:creationId xmlns:a16="http://schemas.microsoft.com/office/drawing/2014/main" id="{EAAC1BA5-DA1B-44FD-900E-C36A3DE0A409}"/>
+              </a:ext>
+            </a:extLst>
+          </p:cNvPr>
+          <p:cNvSpPr>
+            <a:spLocks xmlns:a="http://schemas.openxmlformats.org/drawingml/2006/main" noGrp="1"/>
+          </p:cNvSpPr>
+          <p:nvPr/>
+        </p:nvSpPr>
+        <p:spPr>
+          <a:xfrm xmlns:a="http://schemas.openxmlformats.org/drawingml/2006/main">
+            <a:off x="8305800" y="990600"/>
+            <a:ext cx="0" cy="5257800"/>
+          </a:xfrm>
+          <a:prstGeom xmlns:a="http://schemas.openxmlformats.org/drawingml/2006/main" prst="line">
+            <a:avLst/>
+          </a:prstGeom>
+          <a:noFill xmlns:a="http://schemas.openxmlformats.org/drawingml/2006/main"/>
+          <a:ln xmlns:a="http://schemas.openxmlformats.org/drawingml/2006/main" w="6191">
+            <a:solidFill>
+              <a:srgbClr val="171B18"/>
+            </a:solidFill>
+            <a:prstDash val="solid"/>
+          </a:ln>
+        </p:spPr>
+      </p:sp>
+      <p:sp>
+        <p:nvSpPr>
+          <p:cNvPr id="15" name="grid-v-936">
+            <a:extLst xmlns:a="http://schemas.openxmlformats.org/drawingml/2006/main">
+              <a:ext uri="{FF2B5EF4-FFF2-40B4-BE49-F238E27FC236}">
+                <a16:creationId xmlns:a16="http://schemas.microsoft.com/office/drawing/2014/main" id="{435F4471-3DC6-4E8D-9A66-44B010FA14F3}"/>
+              </a:ext>
+            </a:extLst>
+          </p:cNvPr>
+          <p:cNvSpPr>
+            <a:spLocks xmlns:a="http://schemas.openxmlformats.org/drawingml/2006/main" noGrp="1"/>
+          </p:cNvSpPr>
+          <p:nvPr/>
+        </p:nvSpPr>
+        <p:spPr>
+          <a:xfrm xmlns:a="http://schemas.openxmlformats.org/drawingml/2006/main">
+            <a:off x="8915400" y="990600"/>
+            <a:ext cx="0" cy="5257800"/>
+          </a:xfrm>
+          <a:prstGeom xmlns:a="http://schemas.openxmlformats.org/drawingml/2006/main" prst="line">
+            <a:avLst/>
+          </a:prstGeom>
+          <a:noFill xmlns:a="http://schemas.openxmlformats.org/drawingml/2006/main"/>
+          <a:ln xmlns:a="http://schemas.openxmlformats.org/drawingml/2006/main" w="6191">
+            <a:solidFill>
+              <a:srgbClr val="171B18"/>
+            </a:solidFill>
+            <a:prstDash val="solid"/>
+          </a:ln>
+        </p:spPr>
+      </p:sp>
+      <p:sp>
+        <p:nvSpPr>
+          <p:cNvPr id="16" name="grid-v-1000">
+            <a:extLst xmlns:a="http://schemas.openxmlformats.org/drawingml/2006/main">
+              <a:ext uri="{FF2B5EF4-FFF2-40B4-BE49-F238E27FC236}">
+                <a16:creationId xmlns:a16="http://schemas.microsoft.com/office/drawing/2014/main" id="{6AB878EB-8B1F-47E3-A510-8EB933879E4F}"/>
+              </a:ext>
+            </a:extLst>
+          </p:cNvPr>
+          <p:cNvSpPr>
+            <a:spLocks xmlns:a="http://schemas.openxmlformats.org/drawingml/2006/main" noGrp="1"/>
+          </p:cNvSpPr>
+          <p:nvPr/>
+        </p:nvSpPr>
+        <p:spPr>
+          <a:xfrm xmlns:a="http://schemas.openxmlformats.org/drawingml/2006/main">
+            <a:off x="9525000" y="990600"/>
+            <a:ext cx="0" cy="5257800"/>
+          </a:xfrm>
+          <a:prstGeom xmlns:a="http://schemas.openxmlformats.org/drawingml/2006/main" prst="line">
+            <a:avLst/>
+          </a:prstGeom>
+          <a:noFill xmlns:a="http://schemas.openxmlformats.org/drawingml/2006/main"/>
+          <a:ln xmlns:a="http://schemas.openxmlformats.org/drawingml/2006/main" w="6191">
+            <a:solidFill>
+              <a:srgbClr val="171B18"/>
+            </a:solidFill>
+            <a:prstDash val="solid"/>
+          </a:ln>
+        </p:spPr>
+      </p:sp>
+      <p:sp>
+        <p:nvSpPr>
+          <p:cNvPr id="17" name="grid-v-1064">
+            <a:extLst xmlns:a="http://schemas.openxmlformats.org/drawingml/2006/main">
+              <a:ext uri="{FF2B5EF4-FFF2-40B4-BE49-F238E27FC236}">
+                <a16:creationId xmlns:a16="http://schemas.microsoft.com/office/drawing/2014/main" id="{D4CBDAB9-C235-4719-97A9-9E66F919424A}"/>
+              </a:ext>
+            </a:extLst>
+          </p:cNvPr>
+          <p:cNvSpPr>
+            <a:spLocks xmlns:a="http://schemas.openxmlformats.org/drawingml/2006/main" noGrp="1"/>
+          </p:cNvSpPr>
+          <p:nvPr/>
+        </p:nvSpPr>
+        <p:spPr>
+          <a:xfrm xmlns:a="http://schemas.openxmlformats.org/drawingml/2006/main">
+            <a:off x="10134600" y="990600"/>
+            <a:ext cx="0" cy="5257800"/>
+          </a:xfrm>
+          <a:prstGeom xmlns:a="http://schemas.openxmlformats.org/drawingml/2006/main" prst="line">
+            <a:avLst/>
+          </a:prstGeom>
+          <a:noFill xmlns:a="http://schemas.openxmlformats.org/drawingml/2006/main"/>
+          <a:ln xmlns:a="http://schemas.openxmlformats.org/drawingml/2006/main" w="6191">
+            <a:solidFill>
+              <a:srgbClr val="171B18"/>
+            </a:solidFill>
+            <a:prstDash val="solid"/>
+          </a:ln>
+        </p:spPr>
+      </p:sp>
+      <p:sp>
+        <p:nvSpPr>
+          <p:cNvPr id="18" name="grid-v-1128">
+            <a:extLst xmlns:a="http://schemas.openxmlformats.org/drawingml/2006/main">
+              <a:ext uri="{FF2B5EF4-FFF2-40B4-BE49-F238E27FC236}">
+                <a16:creationId xmlns:a16="http://schemas.microsoft.com/office/drawing/2014/main" id="{EA2D421D-9EBB-4725-BB39-09B468D641DF}"/>
+              </a:ext>
+            </a:extLst>
+          </p:cNvPr>
+          <p:cNvSpPr>
+            <a:spLocks xmlns:a="http://schemas.openxmlformats.org/drawingml/2006/main" noGrp="1"/>
+          </p:cNvSpPr>
+          <p:nvPr/>
+        </p:nvSpPr>
+        <p:spPr>
+          <a:xfrm xmlns:a="http://schemas.openxmlformats.org/drawingml/2006/main">
+            <a:off x="10744200" y="990600"/>
+            <a:ext cx="0" cy="5257800"/>
+          </a:xfrm>
+          <a:prstGeom xmlns:a="http://schemas.openxmlformats.org/drawingml/2006/main" prst="line">
+            <a:avLst/>
+          </a:prstGeom>
+          <a:noFill xmlns:a="http://schemas.openxmlformats.org/drawingml/2006/main"/>
+          <a:ln xmlns:a="http://schemas.openxmlformats.org/drawingml/2006/main" w="6191">
+            <a:solidFill>
+              <a:srgbClr val="171B18"/>
+            </a:solidFill>
+            <a:prstDash val="solid"/>
+          </a:ln>
+        </p:spPr>
+      </p:sp>
+      <p:sp>
+        <p:nvSpPr>
+          <p:cNvPr id="19" name="grid-v-1192">
+            <a:extLst xmlns:a="http://schemas.openxmlformats.org/drawingml/2006/main">
+              <a:ext uri="{FF2B5EF4-FFF2-40B4-BE49-F238E27FC236}">
+                <a16:creationId xmlns:a16="http://schemas.microsoft.com/office/drawing/2014/main" id="{100A1D4D-596E-4341-90D3-66EB3C24B584}"/>
+              </a:ext>
+            </a:extLst>
+          </p:cNvPr>
+          <p:cNvSpPr>
+            <a:spLocks xmlns:a="http://schemas.openxmlformats.org/drawingml/2006/main" noGrp="1"/>
+          </p:cNvSpPr>
+          <p:nvPr/>
+        </p:nvSpPr>
+        <p:spPr>
+          <a:xfrm xmlns:a="http://schemas.openxmlformats.org/drawingml/2006/main">
+            <a:off x="11353800" y="990600"/>
+            <a:ext cx="0" cy="5257800"/>
+          </a:xfrm>
+          <a:prstGeom xmlns:a="http://schemas.openxmlformats.org/drawingml/2006/main" prst="line">
+            <a:avLst/>
+          </a:prstGeom>
+          <a:noFill xmlns:a="http://schemas.openxmlformats.org/drawingml/2006/main"/>
+          <a:ln xmlns:a="http://schemas.openxmlformats.org/drawingml/2006/main" w="6191">
+            <a:solidFill>
+              <a:srgbClr val="171B18"/>
+            </a:solidFill>
+            <a:prstDash val="solid"/>
+          </a:ln>
+        </p:spPr>
+      </p:sp>
+      <p:sp>
+        <p:nvSpPr>
+          <p:cNvPr id="20" name="grid-h-112">
+            <a:extLst xmlns:a="http://schemas.openxmlformats.org/drawingml/2006/main">
+              <a:ext uri="{FF2B5EF4-FFF2-40B4-BE49-F238E27FC236}">
+                <a16:creationId xmlns:a16="http://schemas.microsoft.com/office/drawing/2014/main" id="{DFB025D5-40C2-422D-9E50-2094ED741AD9}"/>
+              </a:ext>
+            </a:extLst>
+          </p:cNvPr>
+          <p:cNvSpPr>
+            <a:spLocks xmlns:a="http://schemas.openxmlformats.org/drawingml/2006/main" noGrp="1"/>
+          </p:cNvSpPr>
+          <p:nvPr/>
+        </p:nvSpPr>
+        <p:spPr>
+          <a:xfrm xmlns:a="http://schemas.openxmlformats.org/drawingml/2006/main">
+            <a:off x="381000" y="1066800"/>
+            <a:ext cx="11430000" cy="0"/>
+          </a:xfrm>
+          <a:prstGeom xmlns:a="http://schemas.openxmlformats.org/drawingml/2006/main" prst="line">
+            <a:avLst/>
+          </a:prstGeom>
+          <a:noFill xmlns:a="http://schemas.openxmlformats.org/drawingml/2006/main"/>
+          <a:ln xmlns:a="http://schemas.openxmlformats.org/drawingml/2006/main" w="6191">
+            <a:solidFill>
+              <a:srgbClr val="171B18"/>
+            </a:solidFill>
+            <a:prstDash val="solid"/>
+          </a:ln>
+        </p:spPr>
+      </p:sp>
+      <p:sp>
+        <p:nvSpPr>
+          <p:cNvPr id="21" name="grid-h-176">
+            <a:extLst xmlns:a="http://schemas.openxmlformats.org/drawingml/2006/main">
+              <a:ext uri="{FF2B5EF4-FFF2-40B4-BE49-F238E27FC236}">
+                <a16:creationId xmlns:a16="http://schemas.microsoft.com/office/drawing/2014/main" id="{C7FCC9D4-AE6F-4764-A4D9-980B5D2D13DD}"/>
+              </a:ext>
+            </a:extLst>
+          </p:cNvPr>
+          <p:cNvSpPr>
+            <a:spLocks xmlns:a="http://schemas.openxmlformats.org/drawingml/2006/main" noGrp="1"/>
+          </p:cNvSpPr>
+          <p:nvPr/>
+        </p:nvSpPr>
+        <p:spPr>
+          <a:xfrm xmlns:a="http://schemas.openxmlformats.org/drawingml/2006/main">
+            <a:off x="381000" y="1676400"/>
+            <a:ext cx="11430000" cy="0"/>
+          </a:xfrm>
+          <a:prstGeom xmlns:a="http://schemas.openxmlformats.org/drawingml/2006/main" prst="line">
+            <a:avLst/>
+          </a:prstGeom>
+          <a:noFill xmlns:a="http://schemas.openxmlformats.org/drawingml/2006/main"/>
+          <a:ln xmlns:a="http://schemas.openxmlformats.org/drawingml/2006/main" w="6191">
+            <a:solidFill>
+              <a:srgbClr val="171B18"/>
+            </a:solidFill>
+            <a:prstDash val="solid"/>
+          </a:ln>
+        </p:spPr>
+      </p:sp>
+      <p:sp>
+        <p:nvSpPr>
+          <p:cNvPr id="22" name="grid-h-240">
+            <a:extLst xmlns:a="http://schemas.openxmlformats.org/drawingml/2006/main">
+              <a:ext uri="{FF2B5EF4-FFF2-40B4-BE49-F238E27FC236}">
+                <a16:creationId xmlns:a16="http://schemas.microsoft.com/office/drawing/2014/main" id="{A34E7420-D46E-47FE-A2F6-723DE964AA91}"/>
+              </a:ext>
+            </a:extLst>
+          </p:cNvPr>
+          <p:cNvSpPr>
+            <a:spLocks xmlns:a="http://schemas.openxmlformats.org/drawingml/2006/main" noGrp="1"/>
+          </p:cNvSpPr>
+          <p:nvPr/>
+        </p:nvSpPr>
+        <p:spPr>
+          <a:xfrm xmlns:a="http://schemas.openxmlformats.org/drawingml/2006/main">
+            <a:off x="381000" y="2286000"/>
+            <a:ext cx="11430000" cy="0"/>
+          </a:xfrm>
+          <a:prstGeom xmlns:a="http://schemas.openxmlformats.org/drawingml/2006/main" prst="line">
+            <a:avLst/>
+          </a:prstGeom>
+          <a:noFill xmlns:a="http://schemas.openxmlformats.org/drawingml/2006/main"/>
+          <a:ln xmlns:a="http://schemas.openxmlformats.org/drawingml/2006/main" w="6191">
+            <a:solidFill>
+              <a:srgbClr val="171B18"/>
+            </a:solidFill>
+            <a:prstDash val="solid"/>
+          </a:ln>
+        </p:spPr>
+      </p:sp>
+      <p:sp>
+        <p:nvSpPr>
+          <p:cNvPr id="23" name="grid-h-304">
+            <a:extLst xmlns:a="http://schemas.openxmlformats.org/drawingml/2006/main">
+              <a:ext uri="{FF2B5EF4-FFF2-40B4-BE49-F238E27FC236}">
+                <a16:creationId xmlns:a16="http://schemas.microsoft.com/office/drawing/2014/main" id="{384BF935-678C-4E81-821A-9C65C3528DF4}"/>
+              </a:ext>
+            </a:extLst>
+          </p:cNvPr>
+          <p:cNvSpPr>
+            <a:spLocks xmlns:a="http://schemas.openxmlformats.org/drawingml/2006/main" noGrp="1"/>
+          </p:cNvSpPr>
+          <p:nvPr/>
+        </p:nvSpPr>
+        <p:spPr>
+          <a:xfrm xmlns:a="http://schemas.openxmlformats.org/drawingml/2006/main">
+            <a:off x="381000" y="2895600"/>
+            <a:ext cx="11430000" cy="0"/>
+          </a:xfrm>
+          <a:prstGeom xmlns:a="http://schemas.openxmlformats.org/drawingml/2006/main" prst="line">
+            <a:avLst/>
+          </a:prstGeom>
+          <a:noFill xmlns:a="http://schemas.openxmlformats.org/drawingml/2006/main"/>
+          <a:ln xmlns:a="http://schemas.openxmlformats.org/drawingml/2006/main" w="6191">
+            <a:solidFill>
+              <a:srgbClr val="171B18"/>
+            </a:solidFill>
+            <a:prstDash val="solid"/>
+          </a:ln>
+        </p:spPr>
+      </p:sp>
+      <p:sp>
+        <p:nvSpPr>
+          <p:cNvPr id="24" name="grid-h-368">
+            <a:extLst xmlns:a="http://schemas.openxmlformats.org/drawingml/2006/main">
+              <a:ext uri="{FF2B5EF4-FFF2-40B4-BE49-F238E27FC236}">
+                <a16:creationId xmlns:a16="http://schemas.microsoft.com/office/drawing/2014/main" id="{FD74EF66-1F16-437E-9383-3526597508A3}"/>
+              </a:ext>
+            </a:extLst>
+          </p:cNvPr>
+          <p:cNvSpPr>
+            <a:spLocks xmlns:a="http://schemas.openxmlformats.org/drawingml/2006/main" noGrp="1"/>
+          </p:cNvSpPr>
+          <p:nvPr/>
+        </p:nvSpPr>
+        <p:spPr>
+          <a:xfrm xmlns:a="http://schemas.openxmlformats.org/drawingml/2006/main">
+            <a:off x="381000" y="3505200"/>
+            <a:ext cx="11430000" cy="0"/>
+          </a:xfrm>
+          <a:prstGeom xmlns:a="http://schemas.openxmlformats.org/drawingml/2006/main" prst="line">
+            <a:avLst/>
+          </a:prstGeom>
+          <a:noFill xmlns:a="http://schemas.openxmlformats.org/drawingml/2006/main"/>
+          <a:ln xmlns:a="http://schemas.openxmlformats.org/drawingml/2006/main" w="6191">
+            <a:solidFill>
+              <a:srgbClr val="171B18"/>
+            </a:solidFill>
+            <a:prstDash val="solid"/>
+          </a:ln>
+        </p:spPr>
+      </p:sp>
+      <p:sp>
+        <p:nvSpPr>
+          <p:cNvPr id="25" name="grid-h-432">
+            <a:extLst xmlns:a="http://schemas.openxmlformats.org/drawingml/2006/main">
+              <a:ext uri="{FF2B5EF4-FFF2-40B4-BE49-F238E27FC236}">
+                <a16:creationId xmlns:a16="http://schemas.microsoft.com/office/drawing/2014/main" id="{AD62503C-CFE8-4C73-8B00-69966F116345}"/>
+              </a:ext>
+            </a:extLst>
+          </p:cNvPr>
+          <p:cNvSpPr>
+            <a:spLocks xmlns:a="http://schemas.openxmlformats.org/drawingml/2006/main" noGrp="1"/>
+          </p:cNvSpPr>
+          <p:nvPr/>
+        </p:nvSpPr>
+        <p:spPr>
+          <a:xfrm xmlns:a="http://schemas.openxmlformats.org/drawingml/2006/main">
+            <a:off x="381000" y="4114800"/>
+            <a:ext cx="11430000" cy="0"/>
+          </a:xfrm>
+          <a:prstGeom xmlns:a="http://schemas.openxmlformats.org/drawingml/2006/main" prst="line">
+            <a:avLst/>
+          </a:prstGeom>
+          <a:noFill xmlns:a="http://schemas.openxmlformats.org/drawingml/2006/main"/>
+          <a:ln xmlns:a="http://schemas.openxmlformats.org/drawingml/2006/main" w="6191">
+            <a:solidFill>
+              <a:srgbClr val="171B18"/>
+            </a:solidFill>
+            <a:prstDash val="solid"/>
+          </a:ln>
+        </p:spPr>
+      </p:sp>
+      <p:sp>
+        <p:nvSpPr>
+          <p:cNvPr id="26" name="grid-h-496">
+            <a:extLst xmlns:a="http://schemas.openxmlformats.org/drawingml/2006/main">
+              <a:ext uri="{FF2B5EF4-FFF2-40B4-BE49-F238E27FC236}">
+                <a16:creationId xmlns:a16="http://schemas.microsoft.com/office/drawing/2014/main" id="{9C4EB73E-6EC8-4ABD-AAED-50CF58AFDE13}"/>
+              </a:ext>
+            </a:extLst>
+          </p:cNvPr>
+          <p:cNvSpPr>
+            <a:spLocks xmlns:a="http://schemas.openxmlformats.org/drawingml/2006/main" noGrp="1"/>
+          </p:cNvSpPr>
+          <p:nvPr/>
+        </p:nvSpPr>
+        <p:spPr>
+          <a:xfrm xmlns:a="http://schemas.openxmlformats.org/drawingml/2006/main">
+            <a:off x="381000" y="4724400"/>
+            <a:ext cx="11430000" cy="0"/>
+          </a:xfrm>
+          <a:prstGeom xmlns:a="http://schemas.openxmlformats.org/drawingml/2006/main" prst="line">
+            <a:avLst/>
+          </a:prstGeom>
+          <a:noFill xmlns:a="http://schemas.openxmlformats.org/drawingml/2006/main"/>
+          <a:ln xmlns:a="http://schemas.openxmlformats.org/drawingml/2006/main" w="6191">
+            <a:solidFill>
+              <a:srgbClr val="171B18"/>
+            </a:solidFill>
+            <a:prstDash val="solid"/>
+          </a:ln>
+        </p:spPr>
+      </p:sp>
+      <p:sp>
+        <p:nvSpPr>
+          <p:cNvPr id="27" name="grid-h-560">
+            <a:extLst xmlns:a="http://schemas.openxmlformats.org/drawingml/2006/main">
+              <a:ext uri="{FF2B5EF4-FFF2-40B4-BE49-F238E27FC236}">
+                <a16:creationId xmlns:a16="http://schemas.microsoft.com/office/drawing/2014/main" id="{7D7A134C-4DE3-43DC-9786-4F899C225D20}"/>
+              </a:ext>
+            </a:extLst>
+          </p:cNvPr>
+          <p:cNvSpPr>
+            <a:spLocks xmlns:a="http://schemas.openxmlformats.org/drawingml/2006/main" noGrp="1"/>
+          </p:cNvSpPr>
+          <p:nvPr/>
+        </p:nvSpPr>
+        <p:spPr>
+          <a:xfrm xmlns:a="http://schemas.openxmlformats.org/drawingml/2006/main">
+            <a:off x="381000" y="5334000"/>
+            <a:ext cx="11430000" cy="0"/>
+          </a:xfrm>
+          <a:prstGeom xmlns:a="http://schemas.openxmlformats.org/drawingml/2006/main" prst="line">
+            <a:avLst/>
+          </a:prstGeom>
+          <a:noFill xmlns:a="http://schemas.openxmlformats.org/drawingml/2006/main"/>
+          <a:ln xmlns:a="http://schemas.openxmlformats.org/drawingml/2006/main" w="6191">
+            <a:solidFill>
+              <a:srgbClr val="171B18"/>
+            </a:solidFill>
+            <a:prstDash val="solid"/>
+          </a:ln>
+        </p:spPr>
+      </p:sp>
+      <p:sp>
+        <p:nvSpPr>
+          <p:cNvPr id="28" name="grid-h-624">
+            <a:extLst xmlns:a="http://schemas.openxmlformats.org/drawingml/2006/main">
+              <a:ext uri="{FF2B5EF4-FFF2-40B4-BE49-F238E27FC236}">
+                <a16:creationId xmlns:a16="http://schemas.microsoft.com/office/drawing/2014/main" id="{8CF6F503-5035-4042-B58B-0BF10CFC25A0}"/>
+              </a:ext>
+            </a:extLst>
+          </p:cNvPr>
+          <p:cNvSpPr>
+            <a:spLocks xmlns:a="http://schemas.openxmlformats.org/drawingml/2006/main" noGrp="1"/>
+          </p:cNvSpPr>
+          <p:nvPr/>
+        </p:nvSpPr>
+        <p:spPr>
+          <a:xfrm xmlns:a="http://schemas.openxmlformats.org/drawingml/2006/main">
+            <a:off x="381000" y="5943600"/>
+            <a:ext cx="11430000" cy="0"/>
+          </a:xfrm>
+          <a:prstGeom xmlns:a="http://schemas.openxmlformats.org/drawingml/2006/main" prst="line">
+            <a:avLst/>
+          </a:prstGeom>
+          <a:noFill xmlns:a="http://schemas.openxmlformats.org/drawingml/2006/main"/>
+          <a:ln xmlns:a="http://schemas.openxmlformats.org/drawingml/2006/main" w="6191">
+            <a:solidFill>
+              <a:srgbClr val="171B18"/>
+            </a:solidFill>
+            <a:prstDash val="solid"/>
+          </a:ln>
+        </p:spPr>
+      </p:sp>
+      <p:sp>
+        <p:nvSpPr>
+          <p:cNvPr id="29" name="top-rule">
+            <a:extLst xmlns:a="http://schemas.openxmlformats.org/drawingml/2006/main">
+              <a:ext uri="{FF2B5EF4-FFF2-40B4-BE49-F238E27FC236}">
+                <a16:creationId xmlns:a16="http://schemas.microsoft.com/office/drawing/2014/main" id="{6FC19DFA-221E-4D03-8A9C-907B61902F25}"/>
+              </a:ext>
+            </a:extLst>
+          </p:cNvPr>
+          <p:cNvSpPr>
+            <a:spLocks xmlns:a="http://schemas.openxmlformats.org/drawingml/2006/main" noGrp="1"/>
+          </p:cNvSpPr>
+          <p:nvPr/>
+        </p:nvSpPr>
+        <p:spPr>
+          <a:xfrm xmlns:a="http://schemas.openxmlformats.org/drawingml/2006/main">
+            <a:off x="381000" y="876300"/>
+            <a:ext cx="11430000" cy="0"/>
+          </a:xfrm>
+          <a:prstGeom xmlns:a="http://schemas.openxmlformats.org/drawingml/2006/main" prst="line">
+            <a:avLst/>
+          </a:prstGeom>
+          <a:noFill xmlns:a="http://schemas.openxmlformats.org/drawingml/2006/main"/>
+          <a:ln xmlns:a="http://schemas.openxmlformats.org/drawingml/2006/main" w="11430">
+            <a:solidFill>
+              <a:srgbClr val="252A26"/>
+            </a:solidFill>
+            <a:prstDash val="solid"/>
+          </a:ln>
+        </p:spPr>
+      </p:sp>
+      <p:sp>
+        <p:nvSpPr>
+          <p:cNvPr id="30" name="wordmark">
+            <a:extLst xmlns:a="http://schemas.openxmlformats.org/drawingml/2006/main">
+              <a:ext uri="{FF2B5EF4-FFF2-40B4-BE49-F238E27FC236}">
+                <a16:creationId xmlns:a16="http://schemas.microsoft.com/office/drawing/2014/main" id="{041748AF-F386-4245-B077-2BE9069E7146}"/>
+              </a:ext>
+            </a:extLst>
+          </p:cNvPr>
+          <p:cNvSpPr>
+            <a:spLocks xmlns:a="http://schemas.openxmlformats.org/drawingml/2006/main" noGrp="1"/>
+          </p:cNvSpPr>
+          <p:nvPr/>
+        </p:nvSpPr>
+        <p:spPr>
+          <a:xfrm xmlns:a="http://schemas.openxmlformats.org/drawingml/2006/main">
+            <a:off x="381000" y="228600"/>
+            <a:ext cx="1714500" cy="457200"/>
+          </a:xfrm>
+          <a:prstGeom xmlns:a="http://schemas.openxmlformats.org/drawingml/2006/main" prst="rect">
+            <a:avLst/>
+          </a:prstGeom>
+          <a:noFill xmlns:a="http://schemas.openxmlformats.org/drawingml/2006/main"/>
+          <a:ln xmlns:a="http://schemas.openxmlformats.org/drawingml/2006/main" w="0">
+            <a:noFill/>
+            <a:prstDash val="solid"/>
+          </a:ln>
+        </p:spPr>
+        <p:txBody>
+          <a:bodyPr xmlns:a="http://schemas.openxmlformats.org/drawingml/2006/main" wrap="square" lIns="0" tIns="0" rIns="0" bIns="0" anchor="t">
+            <a:noAutofit/>
+          </a:bodyPr>
+          <a:lstStyle xmlns:a="http://schemas.openxmlformats.org/drawingml/2006/main"/>
+          <a:p xmlns:a="http://schemas.openxmlformats.org/drawingml/2006/main">
+            <a:pPr algn="l">
+              <a:lnSpc>
+                <a:spcPct val="100000"/>
+              </a:lnSpc>
+              <a:buNone/>
+              <a:defRPr sz="2550" b="1">
+                <a:solidFill>
+                  <a:srgbClr val="F1EFE5"/>
+                </a:solidFill>
+                <a:latin typeface="Arial Black"/>
+                <a:ea typeface="Arial Black"/>
+                <a:cs typeface="Arial Black"/>
+              </a:defRPr>
+            </a:pPr>
+            <a:r>
+              <a:rPr sz="2550" b="1">
+                <a:solidFill>
+                  <a:srgbClr val="F1EFE5"/>
+                </a:solidFill>
+                <a:latin typeface="Arial Black"/>
+                <a:ea typeface="Arial Black"/>
+                <a:cs typeface="Arial Black"/>
+              </a:rPr>
+              <a:t>POOL</a:t>
+            </a:r>
+          </a:p>
+        </p:txBody>
+      </p:sp>
+      <p:sp>
+        <p:nvSpPr>
+          <p:cNvPr id="31" name="environment-label">
+            <a:extLst xmlns:a="http://schemas.openxmlformats.org/drawingml/2006/main">
+              <a:ext uri="{FF2B5EF4-FFF2-40B4-BE49-F238E27FC236}">
+                <a16:creationId xmlns:a16="http://schemas.microsoft.com/office/drawing/2014/main" id="{A76E1AF8-B9B2-47CC-AA46-F5712C1C36DB}"/>
+              </a:ext>
+            </a:extLst>
+          </p:cNvPr>
+          <p:cNvSpPr>
+            <a:spLocks xmlns:a="http://schemas.openxmlformats.org/drawingml/2006/main" noGrp="1"/>
+          </p:cNvSpPr>
+          <p:nvPr/>
+        </p:nvSpPr>
+        <p:spPr>
+          <a:xfrm xmlns:a="http://schemas.openxmlformats.org/drawingml/2006/main">
+            <a:off x="4705350" y="352425"/>
+            <a:ext cx="3429000" cy="228600"/>
+          </a:xfrm>
+          <a:prstGeom xmlns:a="http://schemas.openxmlformats.org/drawingml/2006/main" prst="rect">
+            <a:avLst/>
+          </a:prstGeom>
+          <a:noFill xmlns:a="http://schemas.openxmlformats.org/drawingml/2006/main"/>
+          <a:ln xmlns:a="http://schemas.openxmlformats.org/drawingml/2006/main" w="0">
+            <a:noFill/>
+            <a:prstDash val="solid"/>
+          </a:ln>
+        </p:spPr>
+        <p:txBody>
+          <a:bodyPr xmlns:a="http://schemas.openxmlformats.org/drawingml/2006/main" wrap="square" lIns="0" tIns="0" rIns="0" bIns="0" anchor="t">
+            <a:noAutofit/>
+          </a:bodyPr>
+          <a:lstStyle xmlns:a="http://schemas.openxmlformats.org/drawingml/2006/main"/>
+          <a:p xmlns:a="http://schemas.openxmlformats.org/drawingml/2006/main">
+            <a:pPr algn="ctr">
+              <a:lnSpc>
+                <a:spcPct val="100000"/>
+              </a:lnSpc>
+              <a:buNone/>
+              <a:defRPr sz="1050" b="0">
+                <a:solidFill>
+                  <a:srgbClr val="858B84"/>
+                </a:solidFill>
+                <a:latin typeface="Courier New"/>
+                <a:ea typeface="Courier New"/>
+                <a:cs typeface="Courier New"/>
+              </a:defRPr>
+            </a:pPr>
+            <a:r>
+              <a:rPr sz="1050" b="0">
+                <a:solidFill>
+                  <a:srgbClr val="858B84"/>
+                </a:solidFill>
+                <a:latin typeface="Courier New"/>
+                <a:ea typeface="Courier New"/>
+                <a:cs typeface="Courier New"/>
+              </a:rPr>
+              <a:t>DEMAND CURVE · AGENT NEGOTIATION</a:t>
+            </a:r>
+          </a:p>
+        </p:txBody>
+      </p:sp>
+      <p:sp>
+        <p:nvSpPr>
+          <p:cNvPr id="32" name="slide-index">
+            <a:extLst xmlns:a="http://schemas.openxmlformats.org/drawingml/2006/main">
+              <a:ext uri="{FF2B5EF4-FFF2-40B4-BE49-F238E27FC236}">
+                <a16:creationId xmlns:a16="http://schemas.microsoft.com/office/drawing/2014/main" id="{35CB92D4-2E5A-4244-AFFA-D068B61A85E1}"/>
+              </a:ext>
+            </a:extLst>
+          </p:cNvPr>
+          <p:cNvSpPr>
+            <a:spLocks xmlns:a="http://schemas.openxmlformats.org/drawingml/2006/main" noGrp="1"/>
+          </p:cNvSpPr>
+          <p:nvPr/>
+        </p:nvSpPr>
+        <p:spPr>
+          <a:xfrm xmlns:a="http://schemas.openxmlformats.org/drawingml/2006/main">
+            <a:off x="10572750" y="352425"/>
+            <a:ext cx="1238250" cy="228600"/>
+          </a:xfrm>
+          <a:prstGeom xmlns:a="http://schemas.openxmlformats.org/drawingml/2006/main" prst="rect">
+            <a:avLst/>
+          </a:prstGeom>
+          <a:noFill xmlns:a="http://schemas.openxmlformats.org/drawingml/2006/main"/>
+          <a:ln xmlns:a="http://schemas.openxmlformats.org/drawingml/2006/main" w="0">
+            <a:noFill/>
+            <a:prstDash val="solid"/>
+          </a:ln>
+        </p:spPr>
+        <p:txBody>
+          <a:bodyPr xmlns:a="http://schemas.openxmlformats.org/drawingml/2006/main" wrap="square" lIns="0" tIns="0" rIns="0" bIns="0" anchor="t">
+            <a:noAutofit/>
+          </a:bodyPr>
+          <a:lstStyle xmlns:a="http://schemas.openxmlformats.org/drawingml/2006/main"/>
+          <a:p xmlns:a="http://schemas.openxmlformats.org/drawingml/2006/main">
+            <a:pPr algn="r">
+              <a:lnSpc>
+                <a:spcPct val="100000"/>
+              </a:lnSpc>
+              <a:buNone/>
+              <a:defRPr sz="1050" b="0">
+                <a:solidFill>
+                  <a:srgbClr val="858B84"/>
+                </a:solidFill>
+                <a:latin typeface="Courier New"/>
+                <a:ea typeface="Courier New"/>
+                <a:cs typeface="Courier New"/>
+              </a:defRPr>
+            </a:pPr>
+            <a:r>
+              <a:rPr sz="1050" b="0">
+                <a:solidFill>
+                  <a:srgbClr val="858B84"/>
+                </a:solidFill>
+                <a:latin typeface="Courier New"/>
+                <a:ea typeface="Courier New"/>
+                <a:cs typeface="Courier New"/>
+              </a:rPr>
+              <a:t>02 / 07</a:t>
+            </a:r>
+          </a:p>
+        </p:txBody>
+      </p:sp>
+      <p:sp>
+        <p:nvSpPr>
+          <p:cNvPr id="33" name="event-footer">
+            <a:extLst xmlns:a="http://schemas.openxmlformats.org/drawingml/2006/main">
+              <a:ext uri="{FF2B5EF4-FFF2-40B4-BE49-F238E27FC236}">
+                <a16:creationId xmlns:a16="http://schemas.microsoft.com/office/drawing/2014/main" id="{513E6045-E3E1-4215-8DB8-603F140D5F19}"/>
+              </a:ext>
+            </a:extLst>
+          </p:cNvPr>
+          <p:cNvSpPr>
+            <a:spLocks xmlns:a="http://schemas.openxmlformats.org/drawingml/2006/main" noGrp="1"/>
+          </p:cNvSpPr>
+          <p:nvPr/>
+        </p:nvSpPr>
+        <p:spPr>
+          <a:xfrm xmlns:a="http://schemas.openxmlformats.org/drawingml/2006/main">
+            <a:off x="381000" y="6467475"/>
+            <a:ext cx="4572000" cy="171450"/>
+          </a:xfrm>
+          <a:prstGeom xmlns:a="http://schemas.openxmlformats.org/drawingml/2006/main" prst="rect">
+            <a:avLst/>
+          </a:prstGeom>
+          <a:noFill xmlns:a="http://schemas.openxmlformats.org/drawingml/2006/main"/>
+          <a:ln xmlns:a="http://schemas.openxmlformats.org/drawingml/2006/main" w="0">
+            <a:noFill/>
+            <a:prstDash val="solid"/>
+          </a:ln>
+        </p:spPr>
+        <p:txBody>
+          <a:bodyPr xmlns:a="http://schemas.openxmlformats.org/drawingml/2006/main" wrap="square" lIns="0" tIns="0" rIns="0" bIns="0" anchor="t">
+            <a:noAutofit/>
+          </a:bodyPr>
+          <a:lstStyle xmlns:a="http://schemas.openxmlformats.org/drawingml/2006/main"/>
+          <a:p xmlns:a="http://schemas.openxmlformats.org/drawingml/2006/main">
+            <a:pPr algn="l">
+              <a:lnSpc>
+                <a:spcPct val="100000"/>
+              </a:lnSpc>
+              <a:buNone/>
+              <a:defRPr sz="900" b="0">
+                <a:solidFill>
+                  <a:srgbClr val="858B84"/>
+                </a:solidFill>
+                <a:latin typeface="Courier New"/>
+                <a:ea typeface="Courier New"/>
+                <a:cs typeface="Courier New"/>
+              </a:defRPr>
+            </a:pPr>
+            <a:r>
+              <a:rPr sz="900" b="0">
+                <a:solidFill>
+                  <a:srgbClr val="858B84"/>
+                </a:solidFill>
+                <a:latin typeface="Courier New"/>
+                <a:ea typeface="Courier New"/>
+                <a:cs typeface="Courier New"/>
+              </a:rPr>
+              <a:t>RAINGENTIC COMMERCE · RAIN + MONAD</a:t>
+            </a:r>
+          </a:p>
+        </p:txBody>
+      </p:sp>
+      <p:sp>
+        <p:nvSpPr>
+          <p:cNvPr id="34" name="honesty-footer">
+            <a:extLst xmlns:a="http://schemas.openxmlformats.org/drawingml/2006/main">
+              <a:ext uri="{FF2B5EF4-FFF2-40B4-BE49-F238E27FC236}">
+                <a16:creationId xmlns:a16="http://schemas.microsoft.com/office/drawing/2014/main" id="{CA85BE8E-F4F7-4947-B82B-763D3609AAC6}"/>
+              </a:ext>
+            </a:extLst>
+          </p:cNvPr>
+          <p:cNvSpPr>
+            <a:spLocks xmlns:a="http://schemas.openxmlformats.org/drawingml/2006/main" noGrp="1"/>
+          </p:cNvSpPr>
+          <p:nvPr/>
+        </p:nvSpPr>
+        <p:spPr>
+          <a:xfrm xmlns:a="http://schemas.openxmlformats.org/drawingml/2006/main">
+            <a:off x="6934200" y="6467475"/>
+            <a:ext cx="4876800" cy="171450"/>
+          </a:xfrm>
+          <a:prstGeom xmlns:a="http://schemas.openxmlformats.org/drawingml/2006/main" prst="rect">
+            <a:avLst/>
+          </a:prstGeom>
+          <a:noFill xmlns:a="http://schemas.openxmlformats.org/drawingml/2006/main"/>
+          <a:ln xmlns:a="http://schemas.openxmlformats.org/drawingml/2006/main" w="0">
+            <a:noFill/>
+            <a:prstDash val="solid"/>
+          </a:ln>
+        </p:spPr>
+        <p:txBody>
+          <a:bodyPr xmlns:a="http://schemas.openxmlformats.org/drawingml/2006/main" wrap="square" lIns="0" tIns="0" rIns="0" bIns="0" anchor="t">
+            <a:noAutofit/>
+          </a:bodyPr>
+          <a:lstStyle xmlns:a="http://schemas.openxmlformats.org/drawingml/2006/main"/>
+          <a:p xmlns:a="http://schemas.openxmlformats.org/drawingml/2006/main">
+            <a:pPr algn="r">
+              <a:lnSpc>
+                <a:spcPct val="100000"/>
+              </a:lnSpc>
+              <a:buNone/>
+              <a:defRPr sz="900" b="0">
+                <a:solidFill>
+                  <a:srgbClr val="858B84"/>
+                </a:solidFill>
+                <a:latin typeface="Courier New"/>
+                <a:ea typeface="Courier New"/>
+                <a:cs typeface="Courier New"/>
+              </a:defRPr>
+            </a:pPr>
+            <a:r>
+              <a:rPr sz="900" b="0">
+                <a:solidFill>
+                  <a:srgbClr val="858B84"/>
+                </a:solidFill>
+                <a:latin typeface="Courier New"/>
+                <a:ea typeface="Courier New"/>
+                <a:cs typeface="Courier New"/>
+              </a:rPr>
+              <a:t>SANDBOX / TESTNET CLAIMS REQUIRE RENDERED EVIDENCE</a:t>
+            </a:r>
+          </a:p>
+        </p:txBody>
+      </p:sp>
+      <p:sp>
+        <p:nvSpPr>
+          <p:cNvPr id="35" name="eyebrow">
+            <a:extLst xmlns:a="http://schemas.openxmlformats.org/drawingml/2006/main">
+              <a:ext uri="{FF2B5EF4-FFF2-40B4-BE49-F238E27FC236}">
+                <a16:creationId xmlns:a16="http://schemas.microsoft.com/office/drawing/2014/main" id="{4A357383-DE06-4F7A-AFCE-17653315DFF9}"/>
+              </a:ext>
+            </a:extLst>
+          </p:cNvPr>
+          <p:cNvSpPr>
+            <a:spLocks xmlns:a="http://schemas.openxmlformats.org/drawingml/2006/main" noGrp="1"/>
+          </p:cNvSpPr>
+          <p:nvPr/>
+        </p:nvSpPr>
+        <p:spPr>
+          <a:xfrm xmlns:a="http://schemas.openxmlformats.org/drawingml/2006/main">
+            <a:off x="381000" y="1123950"/>
+            <a:ext cx="5334000" cy="228600"/>
+          </a:xfrm>
+          <a:prstGeom xmlns:a="http://schemas.openxmlformats.org/drawingml/2006/main" prst="rect">
+            <a:avLst/>
+          </a:prstGeom>
+          <a:noFill xmlns:a="http://schemas.openxmlformats.org/drawingml/2006/main"/>
+          <a:ln xmlns:a="http://schemas.openxmlformats.org/drawingml/2006/main" w="0">
+            <a:noFill/>
+            <a:prstDash val="solid"/>
+          </a:ln>
+        </p:spPr>
+        <p:txBody>
+          <a:bodyPr xmlns:a="http://schemas.openxmlformats.org/drawingml/2006/main" wrap="square" lIns="0" tIns="0" rIns="0" bIns="0" anchor="t">
+            <a:noAutofit/>
+          </a:bodyPr>
+          <a:lstStyle xmlns:a="http://schemas.openxmlformats.org/drawingml/2006/main"/>
+          <a:p xmlns:a="http://schemas.openxmlformats.org/drawingml/2006/main">
+            <a:pPr algn="l">
+              <a:lnSpc>
+                <a:spcPct val="100000"/>
+              </a:lnSpc>
+              <a:buNone/>
+              <a:defRPr sz="1125" b="1">
+                <a:solidFill>
+                  <a:srgbClr val="C7F52F"/>
+                </a:solidFill>
+                <a:latin typeface="Courier New"/>
+                <a:ea typeface="Courier New"/>
+                <a:cs typeface="Courier New"/>
+              </a:defRPr>
+            </a:pPr>
+            <a:r>
+              <a:rPr sz="1125" b="1">
+                <a:solidFill>
+                  <a:srgbClr val="C7F52F"/>
+                </a:solidFill>
+                <a:latin typeface="Courier New"/>
+                <a:ea typeface="Courier New"/>
+                <a:cs typeface="Courier New"/>
+              </a:rPr>
+              <a:t>02 / POOL</a:t>
+            </a:r>
+          </a:p>
+        </p:txBody>
+      </p:sp>
+      <p:sp>
+        <p:nvSpPr>
+          <p:cNvPr id="36" name="slide-title">
+            <a:extLst xmlns:a="http://schemas.openxmlformats.org/drawingml/2006/main">
+              <a:ext uri="{FF2B5EF4-FFF2-40B4-BE49-F238E27FC236}">
+                <a16:creationId xmlns:a16="http://schemas.microsoft.com/office/drawing/2014/main" id="{D27B6175-E4FF-44C5-AA3E-38B09D1EA3C2}"/>
+              </a:ext>
+            </a:extLst>
+          </p:cNvPr>
+          <p:cNvSpPr>
+            <a:spLocks xmlns:a="http://schemas.openxmlformats.org/drawingml/2006/main" noGrp="1"/>
+          </p:cNvSpPr>
+          <p:nvPr/>
+        </p:nvSpPr>
+        <p:spPr>
+          <a:xfrm xmlns:a="http://schemas.openxmlformats.org/drawingml/2006/main">
+            <a:off x="381000" y="1409700"/>
+            <a:ext cx="10858500" cy="685800"/>
+          </a:xfrm>
+          <a:prstGeom xmlns:a="http://schemas.openxmlformats.org/drawingml/2006/main" prst="rect">
+            <a:avLst/>
+          </a:prstGeom>
+          <a:noFill xmlns:a="http://schemas.openxmlformats.org/drawingml/2006/main"/>
+          <a:ln xmlns:a="http://schemas.openxmlformats.org/drawingml/2006/main" w="0">
+            <a:noFill/>
+            <a:prstDash val="solid"/>
+          </a:ln>
+        </p:spPr>
+        <p:txBody>
+          <a:bodyPr xmlns:a="http://schemas.openxmlformats.org/drawingml/2006/main" wrap="square" lIns="0" tIns="0" rIns="0" bIns="0" anchor="t">
+            <a:noAutofit/>
+          </a:bodyPr>
+          <a:lstStyle xmlns:a="http://schemas.openxmlformats.org/drawingml/2006/main"/>
+          <a:p xmlns:a="http://schemas.openxmlformats.org/drawingml/2006/main">
+            <a:pPr algn="l">
+              <a:lnSpc>
+                <a:spcPct val="100000"/>
+              </a:lnSpc>
+              <a:buNone/>
+              <a:defRPr sz="3750" b="1">
+                <a:solidFill>
+                  <a:srgbClr val="F1EFE5"/>
+                </a:solidFill>
+                <a:latin typeface="Arial Black"/>
+                <a:ea typeface="Arial Black"/>
+                <a:cs typeface="Arial Black"/>
+              </a:defRPr>
+            </a:pPr>
+            <a:r>
+              <a:rPr sz="3750" b="1">
+                <a:solidFill>
+                  <a:srgbClr val="F1EFE5"/>
+                </a:solidFill>
+                <a:latin typeface="Arial Black"/>
+                <a:ea typeface="Arial Black"/>
+                <a:cs typeface="Arial Black"/>
+              </a:rPr>
+              <a:t>EVERYONE PAYS THE FLOOR.</a:t>
+            </a:r>
+          </a:p>
+        </p:txBody>
+      </p:sp>
+      <p:sp>
+        <p:nvSpPr>
+          <p:cNvPr id="37" name="seller-route">
+            <a:extLst xmlns:a="http://schemas.openxmlformats.org/drawingml/2006/main">
+              <a:ext uri="{FF2B5EF4-FFF2-40B4-BE49-F238E27FC236}">
+                <a16:creationId xmlns:a16="http://schemas.microsoft.com/office/drawing/2014/main" id="{BCECD629-80DA-4BE7-B3BE-54F15F08566C}"/>
+              </a:ext>
+            </a:extLst>
+          </p:cNvPr>
+          <p:cNvSpPr>
+            <a:spLocks xmlns:a="http://schemas.openxmlformats.org/drawingml/2006/main" noGrp="1"/>
+          </p:cNvSpPr>
+          <p:nvPr/>
+        </p:nvSpPr>
+        <p:spPr>
+          <a:xfrm xmlns:a="http://schemas.openxmlformats.org/drawingml/2006/main">
+            <a:off x="419100" y="2381250"/>
+            <a:ext cx="2000250" cy="209550"/>
+          </a:xfrm>
+          <a:prstGeom xmlns:a="http://schemas.openxmlformats.org/drawingml/2006/main" prst="rect">
+            <a:avLst/>
+          </a:prstGeom>
+          <a:noFill xmlns:a="http://schemas.openxmlformats.org/drawingml/2006/main"/>
+          <a:ln xmlns:a="http://schemas.openxmlformats.org/drawingml/2006/main" w="0">
+            <a:noFill/>
+            <a:prstDash val="solid"/>
+          </a:ln>
+        </p:spPr>
+        <p:txBody>
+          <a:bodyPr xmlns:a="http://schemas.openxmlformats.org/drawingml/2006/main" wrap="square" lIns="0" tIns="0" rIns="0" bIns="0" anchor="t">
+            <a:noAutofit/>
+          </a:bodyPr>
+          <a:lstStyle xmlns:a="http://schemas.openxmlformats.org/drawingml/2006/main"/>
+          <a:p xmlns:a="http://schemas.openxmlformats.org/drawingml/2006/main">
+            <a:pPr algn="l">
+              <a:lnSpc>
+                <a:spcPct val="100000"/>
+              </a:lnSpc>
+              <a:buNone/>
+              <a:defRPr sz="1125" b="1">
+                <a:solidFill>
+                  <a:srgbClr val="C7F52F"/>
+                </a:solidFill>
+                <a:latin typeface="Courier New"/>
+                <a:ea typeface="Courier New"/>
+                <a:cs typeface="Courier New"/>
+              </a:defRPr>
+            </a:pPr>
+            <a:r>
+              <a:rPr sz="1125" b="1">
+                <a:solidFill>
+                  <a:srgbClr val="C7F52F"/>
+                </a:solidFill>
+                <a:latin typeface="Courier New"/>
+                <a:ea typeface="Courier New"/>
+                <a:cs typeface="Courier New"/>
+              </a:rPr>
+              <a:t>/NEGOTIATE</a:t>
+            </a:r>
+          </a:p>
+        </p:txBody>
+      </p:sp>
+      <p:sp>
+        <p:nvSpPr>
+          <p:cNvPr id="38" name="frozen-quantity">
+            <a:extLst xmlns:a="http://schemas.openxmlformats.org/drawingml/2006/main">
+              <a:ext uri="{FF2B5EF4-FFF2-40B4-BE49-F238E27FC236}">
+                <a16:creationId xmlns:a16="http://schemas.microsoft.com/office/drawing/2014/main" id="{2B45C70C-F65C-42F3-A6EF-4D741DE5F058}"/>
+              </a:ext>
+            </a:extLst>
+          </p:cNvPr>
+          <p:cNvSpPr>
+            <a:spLocks xmlns:a="http://schemas.openxmlformats.org/drawingml/2006/main" noGrp="1"/>
+          </p:cNvSpPr>
+          <p:nvPr/>
+        </p:nvSpPr>
+        <p:spPr>
+          <a:xfrm xmlns:a="http://schemas.openxmlformats.org/drawingml/2006/main">
+            <a:off x="400050" y="2667000"/>
+            <a:ext cx="1714500" cy="1066800"/>
+          </a:xfrm>
+          <a:prstGeom xmlns:a="http://schemas.openxmlformats.org/drawingml/2006/main" prst="rect">
+            <a:avLst/>
+          </a:prstGeom>
+          <a:noFill xmlns:a="http://schemas.openxmlformats.org/drawingml/2006/main"/>
+          <a:ln xmlns:a="http://schemas.openxmlformats.org/drawingml/2006/main" w="0">
+            <a:noFill/>
+            <a:prstDash val="solid"/>
+          </a:ln>
+        </p:spPr>
+        <p:txBody>
+          <a:bodyPr xmlns:a="http://schemas.openxmlformats.org/drawingml/2006/main" wrap="square" lIns="0" tIns="0" rIns="0" bIns="0" anchor="t">
+            <a:noAutofit/>
+          </a:bodyPr>
+          <a:lstStyle xmlns:a="http://schemas.openxmlformats.org/drawingml/2006/main"/>
+          <a:p xmlns:a="http://schemas.openxmlformats.org/drawingml/2006/main">
+            <a:pPr algn="l">
+              <a:lnSpc>
+                <a:spcPct val="100000"/>
+              </a:lnSpc>
+              <a:buNone/>
+              <a:defRPr sz="6900" b="1">
+                <a:solidFill>
+                  <a:srgbClr val="C7F52F"/>
+                </a:solidFill>
+                <a:latin typeface="Arial Black"/>
+                <a:ea typeface="Arial Black"/>
+                <a:cs typeface="Arial Black"/>
+              </a:defRPr>
+            </a:pPr>
+            <a:r>
+              <a:rPr sz="6900" b="1">
+                <a:solidFill>
+                  <a:srgbClr val="C7F52F"/>
+                </a:solidFill>
+                <a:latin typeface="Arial Black"/>
+                <a:ea typeface="Arial Black"/>
+                <a:cs typeface="Arial Black"/>
+              </a:rPr>
+              <a:t>560</a:t>
+            </a:r>
+          </a:p>
+        </p:txBody>
+      </p:sp>
+      <p:sp>
+        <p:nvSpPr>
+          <p:cNvPr id="39" name="frozen-label">
+            <a:extLst xmlns:a="http://schemas.openxmlformats.org/drawingml/2006/main">
+              <a:ext uri="{FF2B5EF4-FFF2-40B4-BE49-F238E27FC236}">
+                <a16:creationId xmlns:a16="http://schemas.microsoft.com/office/drawing/2014/main" id="{913796D2-D6D7-4CD4-BD62-0296AA3E6DD2}"/>
+              </a:ext>
+            </a:extLst>
+          </p:cNvPr>
+          <p:cNvSpPr>
+            <a:spLocks xmlns:a="http://schemas.openxmlformats.org/drawingml/2006/main" noGrp="1"/>
+          </p:cNvSpPr>
+          <p:nvPr/>
+        </p:nvSpPr>
+        <p:spPr>
+          <a:xfrm xmlns:a="http://schemas.openxmlformats.org/drawingml/2006/main">
+            <a:off x="457200" y="3752850"/>
+            <a:ext cx="2667000" cy="266700"/>
+          </a:xfrm>
+          <a:prstGeom xmlns:a="http://schemas.openxmlformats.org/drawingml/2006/main" prst="rect">
+            <a:avLst/>
+          </a:prstGeom>
+          <a:noFill xmlns:a="http://schemas.openxmlformats.org/drawingml/2006/main"/>
+          <a:ln xmlns:a="http://schemas.openxmlformats.org/drawingml/2006/main" w="0">
+            <a:noFill/>
+            <a:prstDash val="solid"/>
+          </a:ln>
+        </p:spPr>
+        <p:txBody>
+          <a:bodyPr xmlns:a="http://schemas.openxmlformats.org/drawingml/2006/main" wrap="square" lIns="0" tIns="0" rIns="0" bIns="0" anchor="t">
+            <a:noAutofit/>
+          </a:bodyPr>
+          <a:lstStyle xmlns:a="http://schemas.openxmlformats.org/drawingml/2006/main"/>
+          <a:p xmlns:a="http://schemas.openxmlformats.org/drawingml/2006/main">
+            <a:pPr algn="l">
+              <a:lnSpc>
+                <a:spcPct val="100000"/>
+              </a:lnSpc>
+              <a:buNone/>
+              <a:defRPr sz="1275" b="0">
+                <a:solidFill>
+                  <a:srgbClr val="D3D1C8"/>
+                </a:solidFill>
+                <a:latin typeface="Courier New"/>
+                <a:ea typeface="Courier New"/>
+                <a:cs typeface="Courier New"/>
+              </a:defRPr>
+            </a:pPr>
+            <a:r>
+              <a:rPr sz="1275" b="0">
+                <a:solidFill>
+                  <a:srgbClr val="D3D1C8"/>
+                </a:solidFill>
+                <a:latin typeface="Courier New"/>
+                <a:ea typeface="Courier New"/>
+                <a:cs typeface="Courier New"/>
+              </a:rPr>
+              <a:t>BUYERS PLEDGED</a:t>
+            </a:r>
+          </a:p>
+        </p:txBody>
+      </p:sp>
+      <p:sp>
+        <p:nvSpPr>
+          <p:cNvPr id="40" name="frozen-copy">
+            <a:extLst xmlns:a="http://schemas.openxmlformats.org/drawingml/2006/main">
+              <a:ext uri="{FF2B5EF4-FFF2-40B4-BE49-F238E27FC236}">
+                <a16:creationId xmlns:a16="http://schemas.microsoft.com/office/drawing/2014/main" id="{B1C65158-0C6B-409D-BC21-2BFE1D78A8B5}"/>
+              </a:ext>
+            </a:extLst>
+          </p:cNvPr>
+          <p:cNvSpPr>
+            <a:spLocks xmlns:a="http://schemas.openxmlformats.org/drawingml/2006/main" noGrp="1"/>
+          </p:cNvSpPr>
+          <p:nvPr/>
+        </p:nvSpPr>
+        <p:spPr>
+          <a:xfrm xmlns:a="http://schemas.openxmlformats.org/drawingml/2006/main">
+            <a:off x="457200" y="4171950"/>
+            <a:ext cx="2762250" cy="552450"/>
+          </a:xfrm>
+          <a:prstGeom xmlns:a="http://schemas.openxmlformats.org/drawingml/2006/main" prst="rect">
+            <a:avLst/>
+          </a:prstGeom>
+          <a:noFill xmlns:a="http://schemas.openxmlformats.org/drawingml/2006/main"/>
+          <a:ln xmlns:a="http://schemas.openxmlformats.org/drawingml/2006/main" w="0">
+            <a:noFill/>
+            <a:prstDash val="solid"/>
+          </a:ln>
+        </p:spPr>
+        <p:txBody>
+          <a:bodyPr xmlns:a="http://schemas.openxmlformats.org/drawingml/2006/main" wrap="square" lIns="0" tIns="0" rIns="0" bIns="0" anchor="t">
+            <a:noAutofit/>
+          </a:bodyPr>
+          <a:lstStyle xmlns:a="http://schemas.openxmlformats.org/drawingml/2006/main"/>
+          <a:p xmlns:a="http://schemas.openxmlformats.org/drawingml/2006/main">
+            <a:pPr algn="l">
+              <a:lnSpc>
+                <a:spcPct val="112000"/>
+              </a:lnSpc>
+              <a:buNone/>
+              <a:defRPr sz="1350" b="0">
+                <a:solidFill>
+                  <a:srgbClr val="858B84"/>
+                </a:solidFill>
+                <a:latin typeface="Arial"/>
+                <a:ea typeface="Arial"/>
+                <a:cs typeface="Arial"/>
+              </a:defRPr>
+            </a:pPr>
+            <a:r>
+              <a:rPr sz="1350" b="0">
+                <a:solidFill>
+                  <a:srgbClr val="858B84"/>
+                </a:solidFill>
+                <a:latin typeface="Arial"/>
+                <a:ea typeface="Arial"/>
+                <a:cs typeface="Arial"/>
+              </a:rPr>
+              <a:t>Each buyer pledges their highest price.</a:t>
+            </a:r>
+          </a:p>
+          <a:p xmlns:a="http://schemas.openxmlformats.org/drawingml/2006/main">
+            <a:pPr algn="l">
+              <a:lnSpc>
+                <a:spcPct val="112000"/>
+              </a:lnSpc>
+              <a:buNone/>
+              <a:defRPr sz="1350" b="0">
+                <a:solidFill>
+                  <a:srgbClr val="858B84"/>
+                </a:solidFill>
+                <a:latin typeface="Arial"/>
+                <a:ea typeface="Arial"/>
+                <a:cs typeface="Arial"/>
+              </a:defRPr>
+            </a:pPr>
+            <a:r>
+              <a:rPr sz="1350" b="0">
+                <a:solidFill>
+                  <a:srgbClr val="858B84"/>
+                </a:solidFill>
+                <a:latin typeface="Arial"/>
+                <a:ea typeface="Arial"/>
+                <a:cs typeface="Arial"/>
+              </a:rPr>
+              <a:t>Merchant floors exposed: 0.</a:t>
+            </a:r>
+          </a:p>
+        </p:txBody>
+      </p:sp>
+      <p:sp>
+        <p:nvSpPr>
+          <p:cNvPr id="41" name="seller-live-label">
+            <a:extLst xmlns:a="http://schemas.openxmlformats.org/drawingml/2006/main">
+              <a:ext uri="{FF2B5EF4-FFF2-40B4-BE49-F238E27FC236}">
+                <a16:creationId xmlns:a16="http://schemas.microsoft.com/office/drawing/2014/main" id="{CE12CDB8-78E4-4C7F-883F-2AC254CF6B8E}"/>
+              </a:ext>
+            </a:extLst>
+          </p:cNvPr>
+          <p:cNvSpPr>
+            <a:spLocks xmlns:a="http://schemas.openxmlformats.org/drawingml/2006/main" noGrp="1"/>
+          </p:cNvSpPr>
+          <p:nvPr/>
+        </p:nvSpPr>
+        <p:spPr>
+          <a:xfrm xmlns:a="http://schemas.openxmlformats.org/drawingml/2006/main">
+            <a:off x="457200" y="4953000"/>
+            <a:ext cx="1543050" cy="171450"/>
+          </a:xfrm>
+          <a:prstGeom xmlns:a="http://schemas.openxmlformats.org/drawingml/2006/main" prst="rect">
+            <a:avLst/>
+          </a:prstGeom>
+          <a:noFill xmlns:a="http://schemas.openxmlformats.org/drawingml/2006/main"/>
+          <a:ln xmlns:a="http://schemas.openxmlformats.org/drawingml/2006/main" w="0">
+            <a:noFill/>
+            <a:prstDash val="solid"/>
+          </a:ln>
+        </p:spPr>
+        <p:txBody>
+          <a:bodyPr xmlns:a="http://schemas.openxmlformats.org/drawingml/2006/main" wrap="square" lIns="0" tIns="0" rIns="0" bIns="0" anchor="t">
+            <a:noAutofit/>
+          </a:bodyPr>
+          <a:lstStyle xmlns:a="http://schemas.openxmlformats.org/drawingml/2006/main"/>
+          <a:p xmlns:a="http://schemas.openxmlformats.org/drawingml/2006/main">
+            <a:pPr algn="l">
+              <a:lnSpc>
+                <a:spcPct val="100000"/>
+              </a:lnSpc>
+              <a:buNone/>
+              <a:defRPr sz="900" b="0">
+                <a:solidFill>
+                  <a:srgbClr val="858B84"/>
+                </a:solidFill>
+                <a:latin typeface="Courier New"/>
+                <a:ea typeface="Courier New"/>
+                <a:cs typeface="Courier New"/>
+              </a:defRPr>
+            </a:pPr>
+            <a:r>
+              <a:rPr sz="900" b="0">
+                <a:solidFill>
+                  <a:srgbClr val="858B84"/>
+                </a:solidFill>
+                <a:latin typeface="Courier New"/>
+                <a:ea typeface="Courier New"/>
+                <a:cs typeface="Courier New"/>
+              </a:rPr>
+              <a:t>CLEARED PRICE</a:t>
+            </a:r>
+          </a:p>
+        </p:txBody>
+      </p:sp>
+      <p:sp>
+        <p:nvSpPr>
+          <p:cNvPr id="42" name="seller-live-value">
+            <a:extLst xmlns:a="http://schemas.openxmlformats.org/drawingml/2006/main">
+              <a:ext uri="{FF2B5EF4-FFF2-40B4-BE49-F238E27FC236}">
+                <a16:creationId xmlns:a16="http://schemas.microsoft.com/office/drawing/2014/main" id="{2FBA08DB-4BF4-4D01-87FC-B52AD3DC6974}"/>
+              </a:ext>
+            </a:extLst>
+          </p:cNvPr>
+          <p:cNvSpPr>
+            <a:spLocks xmlns:a="http://schemas.openxmlformats.org/drawingml/2006/main" noGrp="1"/>
+          </p:cNvSpPr>
+          <p:nvPr/>
+        </p:nvSpPr>
+        <p:spPr>
+          <a:xfrm xmlns:a="http://schemas.openxmlformats.org/drawingml/2006/main">
+            <a:off x="1943100" y="4810125"/>
+            <a:ext cx="419100" cy="400050"/>
+          </a:xfrm>
+          <a:prstGeom xmlns:a="http://schemas.openxmlformats.org/drawingml/2006/main" prst="rect">
+            <a:avLst/>
+          </a:prstGeom>
+          <a:noFill xmlns:a="http://schemas.openxmlformats.org/drawingml/2006/main"/>
+          <a:ln xmlns:a="http://schemas.openxmlformats.org/drawingml/2006/main" w="0">
+            <a:noFill/>
+            <a:prstDash val="solid"/>
+          </a:ln>
+        </p:spPr>
+        <p:txBody>
+          <a:bodyPr xmlns:a="http://schemas.openxmlformats.org/drawingml/2006/main" wrap="square" lIns="0" tIns="0" rIns="0" bIns="0" anchor="t">
+            <a:noAutofit/>
+          </a:bodyPr>
+          <a:lstStyle xmlns:a="http://schemas.openxmlformats.org/drawingml/2006/main"/>
+          <a:p xmlns:a="http://schemas.openxmlformats.org/drawingml/2006/main">
+            <a:pPr algn="r">
+              <a:lnSpc>
+                <a:spcPct val="100000"/>
+              </a:lnSpc>
+              <a:buNone/>
+              <a:defRPr sz="2400" b="1">
+                <a:solidFill>
+                  <a:srgbClr val="FF2B79"/>
+                </a:solidFill>
+                <a:latin typeface="Arial Black"/>
+                <a:ea typeface="Arial Black"/>
+                <a:cs typeface="Arial Black"/>
+              </a:defRPr>
+            </a:pPr>
+            <a:r>
+              <a:rPr sz="2400" b="1">
+                <a:solidFill>
+                  <a:srgbClr val="FF2B79"/>
+                </a:solidFill>
+                <a:latin typeface="Arial Black"/>
+                <a:ea typeface="Arial Black"/>
+                <a:cs typeface="Arial Black"/>
+              </a:rPr>
+              <a:t>$700</a:t>
+            </a:r>
+          </a:p>
+        </p:txBody>
+      </p:sp>
+      <p:sp>
+        <p:nvSpPr>
+          <p:cNvPr id="43" name="seller-write-label">
+            <a:extLst xmlns:a="http://schemas.openxmlformats.org/drawingml/2006/main">
+              <a:ext uri="{FF2B5EF4-FFF2-40B4-BE49-F238E27FC236}">
+                <a16:creationId xmlns:a16="http://schemas.microsoft.com/office/drawing/2014/main" id="{EE7DCBAF-F83A-4278-9FBE-37CEA8D6FED0}"/>
+              </a:ext>
+            </a:extLst>
+          </p:cNvPr>
+          <p:cNvSpPr>
+            <a:spLocks xmlns:a="http://schemas.openxmlformats.org/drawingml/2006/main" noGrp="1"/>
+          </p:cNvSpPr>
+          <p:nvPr/>
+        </p:nvSpPr>
+        <p:spPr>
+          <a:xfrm xmlns:a="http://schemas.openxmlformats.org/drawingml/2006/main">
+            <a:off x="457200" y="5276850"/>
+            <a:ext cx="1543050" cy="171450"/>
+          </a:xfrm>
+          <a:prstGeom xmlns:a="http://schemas.openxmlformats.org/drawingml/2006/main" prst="rect">
+            <a:avLst/>
+          </a:prstGeom>
+          <a:noFill xmlns:a="http://schemas.openxmlformats.org/drawingml/2006/main"/>
+          <a:ln xmlns:a="http://schemas.openxmlformats.org/drawingml/2006/main" w="0">
+            <a:noFill/>
+            <a:prstDash val="solid"/>
+          </a:ln>
+        </p:spPr>
+        <p:txBody>
+          <a:bodyPr xmlns:a="http://schemas.openxmlformats.org/drawingml/2006/main" wrap="square" lIns="0" tIns="0" rIns="0" bIns="0" anchor="t">
+            <a:noAutofit/>
+          </a:bodyPr>
+          <a:lstStyle xmlns:a="http://schemas.openxmlformats.org/drawingml/2006/main"/>
+          <a:p xmlns:a="http://schemas.openxmlformats.org/drawingml/2006/main">
+            <a:pPr algn="l">
+              <a:lnSpc>
+                <a:spcPct val="100000"/>
+              </a:lnSpc>
+              <a:buNone/>
+              <a:defRPr sz="900" b="0">
+                <a:solidFill>
+                  <a:srgbClr val="858B84"/>
+                </a:solidFill>
+                <a:latin typeface="Courier New"/>
+                <a:ea typeface="Courier New"/>
+                <a:cs typeface="Courier New"/>
+              </a:defRPr>
+            </a:pPr>
+            <a:r>
+              <a:rPr sz="900" b="0">
+                <a:solidFill>
+                  <a:srgbClr val="858B84"/>
+                </a:solidFill>
+                <a:latin typeface="Courier New"/>
+                <a:ea typeface="Courier New"/>
+                <a:cs typeface="Courier New"/>
+              </a:rPr>
+              <a:t>COLLECTIVE SAVINGS</a:t>
+            </a:r>
+          </a:p>
+        </p:txBody>
+      </p:sp>
+      <p:sp>
+        <p:nvSpPr>
+          <p:cNvPr id="44" name="seller-write-value">
+            <a:extLst xmlns:a="http://schemas.openxmlformats.org/drawingml/2006/main">
+              <a:ext uri="{FF2B5EF4-FFF2-40B4-BE49-F238E27FC236}">
+                <a16:creationId xmlns:a16="http://schemas.microsoft.com/office/drawing/2014/main" id="{99B6E84C-6B2F-422F-8AB3-C77F287541CD}"/>
+              </a:ext>
+            </a:extLst>
+          </p:cNvPr>
+          <p:cNvSpPr>
+            <a:spLocks xmlns:a="http://schemas.openxmlformats.org/drawingml/2006/main" noGrp="1"/>
+          </p:cNvSpPr>
+          <p:nvPr/>
+        </p:nvSpPr>
+        <p:spPr>
+          <a:xfrm xmlns:a="http://schemas.openxmlformats.org/drawingml/2006/main">
+            <a:off x="1943100" y="5133975"/>
+            <a:ext cx="419100" cy="400050"/>
+          </a:xfrm>
+          <a:prstGeom xmlns:a="http://schemas.openxmlformats.org/drawingml/2006/main" prst="rect">
+            <a:avLst/>
+          </a:prstGeom>
+          <a:noFill xmlns:a="http://schemas.openxmlformats.org/drawingml/2006/main"/>
+          <a:ln xmlns:a="http://schemas.openxmlformats.org/drawingml/2006/main" w="0">
+            <a:noFill/>
+            <a:prstDash val="solid"/>
+          </a:ln>
+        </p:spPr>
+        <p:txBody>
+          <a:bodyPr xmlns:a="http://schemas.openxmlformats.org/drawingml/2006/main" wrap="square" lIns="0" tIns="0" rIns="0" bIns="0" anchor="t">
+            <a:noAutofit/>
+          </a:bodyPr>
+          <a:lstStyle xmlns:a="http://schemas.openxmlformats.org/drawingml/2006/main"/>
+          <a:p xmlns:a="http://schemas.openxmlformats.org/drawingml/2006/main">
+            <a:pPr algn="r">
+              <a:lnSpc>
+                <a:spcPct val="100000"/>
+              </a:lnSpc>
+              <a:buNone/>
+              <a:defRPr sz="2400" b="1">
+                <a:solidFill>
+                  <a:srgbClr val="FF2B79"/>
+                </a:solidFill>
+                <a:latin typeface="Arial Black"/>
+                <a:ea typeface="Arial Black"/>
+                <a:cs typeface="Arial Black"/>
+              </a:defRPr>
+            </a:pPr>
+            <a:r>
+              <a:rPr sz="2400" b="1">
+                <a:solidFill>
+                  <a:srgbClr val="FF2B79"/>
+                </a:solidFill>
+                <a:latin typeface="Arial Black"/>
+                <a:ea typeface="Arial Black"/>
+                <a:cs typeface="Arial Black"/>
+              </a:rPr>
+              <a:t>$168,000</a:t>
+            </a:r>
+          </a:p>
+        </p:txBody>
+      </p:sp>
+      <p:sp>
+        <p:nvSpPr>
+          <p:cNvPr id="45" name="market-divider">
+            <a:extLst xmlns:a="http://schemas.openxmlformats.org/drawingml/2006/main">
+              <a:ext uri="{FF2B5EF4-FFF2-40B4-BE49-F238E27FC236}">
+                <a16:creationId xmlns:a16="http://schemas.microsoft.com/office/drawing/2014/main" id="{D005BCE6-5709-46E7-863B-04C191FCD8AF}"/>
+              </a:ext>
+            </a:extLst>
+          </p:cNvPr>
+          <p:cNvSpPr>
+            <a:spLocks xmlns:a="http://schemas.openxmlformats.org/drawingml/2006/main" noGrp="1"/>
+          </p:cNvSpPr>
+          <p:nvPr/>
+        </p:nvSpPr>
+        <p:spPr>
+          <a:xfrm xmlns:a="http://schemas.openxmlformats.org/drawingml/2006/main">
+            <a:off x="3333750" y="2533650"/>
+            <a:ext cx="0" cy="2971800"/>
+          </a:xfrm>
+          <a:prstGeom xmlns:a="http://schemas.openxmlformats.org/drawingml/2006/main" prst="line">
+            <a:avLst/>
+          </a:prstGeom>
+          <a:noFill xmlns:a="http://schemas.openxmlformats.org/drawingml/2006/main"/>
+          <a:ln xmlns:a="http://schemas.openxmlformats.org/drawingml/2006/main" w="14288">
+            <a:solidFill>
+              <a:srgbClr val="252A26"/>
+            </a:solidFill>
+            <a:prstDash val="solid"/>
+          </a:ln>
+        </p:spPr>
+      </p:sp>
+      <p:sp>
+        <p:nvSpPr>
+          <p:cNvPr id="46" name="offer-index-0">
+            <a:extLst xmlns:a="http://schemas.openxmlformats.org/drawingml/2006/main">
+              <a:ext uri="{FF2B5EF4-FFF2-40B4-BE49-F238E27FC236}">
+                <a16:creationId xmlns:a16="http://schemas.microsoft.com/office/drawing/2014/main" id="{65D9C05E-BF28-4A43-AAA7-6DE253B114AE}"/>
+              </a:ext>
+            </a:extLst>
+          </p:cNvPr>
+          <p:cNvSpPr>
+            <a:spLocks xmlns:a="http://schemas.openxmlformats.org/drawingml/2006/main" noGrp="1"/>
+          </p:cNvSpPr>
+          <p:nvPr/>
+        </p:nvSpPr>
+        <p:spPr>
+          <a:xfrm xmlns:a="http://schemas.openxmlformats.org/drawingml/2006/main">
+            <a:off x="3733800" y="2647950"/>
+            <a:ext cx="342900" cy="209550"/>
+          </a:xfrm>
+          <a:prstGeom xmlns:a="http://schemas.openxmlformats.org/drawingml/2006/main" prst="rect">
+            <a:avLst/>
+          </a:prstGeom>
+          <a:noFill xmlns:a="http://schemas.openxmlformats.org/drawingml/2006/main"/>
+          <a:ln xmlns:a="http://schemas.openxmlformats.org/drawingml/2006/main" w="0">
+            <a:noFill/>
+            <a:prstDash val="solid"/>
+          </a:ln>
+        </p:spPr>
+        <p:txBody>
+          <a:bodyPr xmlns:a="http://schemas.openxmlformats.org/drawingml/2006/main" wrap="square" lIns="0" tIns="0" rIns="0" bIns="0" anchor="t">
+            <a:noAutofit/>
+          </a:bodyPr>
+          <a:lstStyle xmlns:a="http://schemas.openxmlformats.org/drawingml/2006/main"/>
+          <a:p xmlns:a="http://schemas.openxmlformats.org/drawingml/2006/main">
+            <a:pPr algn="l">
+              <a:lnSpc>
+                <a:spcPct val="100000"/>
+              </a:lnSpc>
+              <a:buNone/>
+              <a:defRPr sz="1125" b="0">
+                <a:solidFill>
+                  <a:srgbClr val="858B84"/>
+                </a:solidFill>
+                <a:latin typeface="Courier New"/>
+                <a:ea typeface="Courier New"/>
+                <a:cs typeface="Courier New"/>
+              </a:defRPr>
+            </a:pPr>
+            <a:r>
+              <a:rPr sz="1125" b="0">
+                <a:solidFill>
+                  <a:srgbClr val="858B84"/>
+                </a:solidFill>
+                <a:latin typeface="Courier New"/>
+                <a:ea typeface="Courier New"/>
+                <a:cs typeface="Courier New"/>
+              </a:rPr>
+              <a:t>01</a:t>
+            </a:r>
+          </a:p>
+        </p:txBody>
+      </p:sp>
+      <p:sp>
+        <p:nvSpPr>
+          <p:cNvPr id="47" name="offer-merchant-0">
+            <a:extLst xmlns:a="http://schemas.openxmlformats.org/drawingml/2006/main">
+              <a:ext uri="{FF2B5EF4-FFF2-40B4-BE49-F238E27FC236}">
+                <a16:creationId xmlns:a16="http://schemas.microsoft.com/office/drawing/2014/main" id="{403C12A6-9C63-4D3E-A88A-55792F7BFF3E}"/>
+              </a:ext>
+            </a:extLst>
+          </p:cNvPr>
+          <p:cNvSpPr>
+            <a:spLocks xmlns:a="http://schemas.openxmlformats.org/drawingml/2006/main" noGrp="1"/>
+          </p:cNvSpPr>
+          <p:nvPr/>
+        </p:nvSpPr>
+        <p:spPr>
+          <a:xfrm xmlns:a="http://schemas.openxmlformats.org/drawingml/2006/main">
+            <a:off x="4267200" y="2647950"/>
+            <a:ext cx="2476500" cy="228600"/>
+          </a:xfrm>
+          <a:prstGeom xmlns:a="http://schemas.openxmlformats.org/drawingml/2006/main" prst="rect">
+            <a:avLst/>
+          </a:prstGeom>
+          <a:noFill xmlns:a="http://schemas.openxmlformats.org/drawingml/2006/main"/>
+          <a:ln xmlns:a="http://schemas.openxmlformats.org/drawingml/2006/main" w="0">
+            <a:noFill/>
+            <a:prstDash val="solid"/>
+          </a:ln>
+        </p:spPr>
+        <p:txBody>
+          <a:bodyPr xmlns:a="http://schemas.openxmlformats.org/drawingml/2006/main" wrap="square" lIns="0" tIns="0" rIns="0" bIns="0" anchor="t">
+            <a:noAutofit/>
+          </a:bodyPr>
+          <a:lstStyle xmlns:a="http://schemas.openxmlformats.org/drawingml/2006/main"/>
+          <a:p xmlns:a="http://schemas.openxmlformats.org/drawingml/2006/main">
+            <a:pPr algn="l">
+              <a:lnSpc>
+                <a:spcPct val="100000"/>
+              </a:lnSpc>
+              <a:buNone/>
+              <a:defRPr sz="1500" b="0">
+                <a:solidFill>
+                  <a:srgbClr val="F1EFE5"/>
+                </a:solidFill>
+                <a:latin typeface="Courier New"/>
+                <a:ea typeface="Courier New"/>
+                <a:cs typeface="Courier New"/>
+              </a:defRPr>
+            </a:pPr>
+            <a:r>
+              <a:rPr sz="1500" b="0">
+                <a:solidFill>
+                  <a:srgbClr val="F1EFE5"/>
+                </a:solidFill>
+                <a:latin typeface="Courier New"/>
+                <a:ea typeface="Courier New"/>
+                <a:cs typeface="Courier New"/>
+              </a:rPr>
+              <a:t>PLEDGED 10% OFF · 300 BUYERS</a:t>
+            </a:r>
+          </a:p>
+        </p:txBody>
+      </p:sp>
+      <p:sp>
+        <p:nvSpPr>
+          <p:cNvPr id="48" name="offer-initial-0">
+            <a:extLst xmlns:a="http://schemas.openxmlformats.org/drawingml/2006/main">
+              <a:ext uri="{FF2B5EF4-FFF2-40B4-BE49-F238E27FC236}">
+                <a16:creationId xmlns:a16="http://schemas.microsoft.com/office/drawing/2014/main" id="{6D18E46E-1BD9-4874-8380-1139419CA4B5}"/>
+              </a:ext>
+            </a:extLst>
+          </p:cNvPr>
+          <p:cNvSpPr>
+            <a:spLocks xmlns:a="http://schemas.openxmlformats.org/drawingml/2006/main" noGrp="1"/>
+          </p:cNvSpPr>
+          <p:nvPr/>
+        </p:nvSpPr>
+        <p:spPr>
+          <a:xfrm xmlns:a="http://schemas.openxmlformats.org/drawingml/2006/main">
+            <a:off x="6953250" y="2571750"/>
+            <a:ext cx="1047750" cy="419100"/>
+          </a:xfrm>
+          <a:prstGeom xmlns:a="http://schemas.openxmlformats.org/drawingml/2006/main" prst="rect">
+            <a:avLst/>
+          </a:prstGeom>
+          <a:noFill xmlns:a="http://schemas.openxmlformats.org/drawingml/2006/main"/>
+          <a:ln xmlns:a="http://schemas.openxmlformats.org/drawingml/2006/main" w="0">
+            <a:noFill/>
+            <a:prstDash val="solid"/>
+          </a:ln>
+        </p:spPr>
+        <p:txBody>
+          <a:bodyPr xmlns:a="http://schemas.openxmlformats.org/drawingml/2006/main" wrap="square" lIns="0" tIns="0" rIns="0" bIns="0" anchor="t">
+            <a:noAutofit/>
+          </a:bodyPr>
+          <a:lstStyle xmlns:a="http://schemas.openxmlformats.org/drawingml/2006/main"/>
+          <a:p xmlns:a="http://schemas.openxmlformats.org/drawingml/2006/main">
+            <a:pPr algn="r">
+              <a:lnSpc>
+                <a:spcPct val="100000"/>
+              </a:lnSpc>
+              <a:buNone/>
+              <a:defRPr sz="2250" b="1">
+                <a:solidFill>
+                  <a:srgbClr val="858B84"/>
+                </a:solidFill>
+                <a:latin typeface="Arial Black"/>
+                <a:ea typeface="Arial Black"/>
+                <a:cs typeface="Arial Black"/>
+              </a:defRPr>
+            </a:pPr>
+            <a:r>
+              <a:rPr sz="2250" b="1">
+                <a:solidFill>
+                  <a:srgbClr val="858B84"/>
+                </a:solidFill>
+                <a:latin typeface="Arial Black"/>
+                <a:ea typeface="Arial Black"/>
+                <a:cs typeface="Arial Black"/>
+              </a:rPr>
+              <a:t>$900</a:t>
+            </a:r>
+          </a:p>
+        </p:txBody>
+      </p:sp>
+      <p:sp>
+        <p:nvSpPr>
+          <p:cNvPr id="49" name="offer-arrow-0-shaft">
+            <a:extLst xmlns:a="http://schemas.openxmlformats.org/drawingml/2006/main">
+              <a:ext uri="{FF2B5EF4-FFF2-40B4-BE49-F238E27FC236}">
+                <a16:creationId xmlns:a16="http://schemas.microsoft.com/office/drawing/2014/main" id="{5CEE95D6-83DF-4BCA-860F-DED82D50E922}"/>
+              </a:ext>
+            </a:extLst>
+          </p:cNvPr>
+          <p:cNvSpPr>
+            <a:spLocks xmlns:a="http://schemas.openxmlformats.org/drawingml/2006/main" noGrp="1"/>
+          </p:cNvSpPr>
+          <p:nvPr/>
+        </p:nvSpPr>
+        <p:spPr>
+          <a:xfrm xmlns:a="http://schemas.openxmlformats.org/drawingml/2006/main">
+            <a:off x="8248650" y="2752725"/>
+            <a:ext cx="723900" cy="28575"/>
+          </a:xfrm>
+          <a:prstGeom xmlns:a="http://schemas.openxmlformats.org/drawingml/2006/main" prst="rect">
+            <a:avLst/>
+          </a:prstGeom>
+          <a:solidFill xmlns:a="http://schemas.openxmlformats.org/drawingml/2006/main">
+            <a:srgbClr val="C7F52F"/>
+          </a:solidFill>
+          <a:ln xmlns:a="http://schemas.openxmlformats.org/drawingml/2006/main" w="0">
+            <a:noFill/>
+            <a:prstDash val="solid"/>
+          </a:ln>
+        </p:spPr>
+      </p:sp>
+      <p:sp>
+        <p:nvSpPr>
+          <p:cNvPr id="50" name="offer-arrow-0-head">
+            <a:extLst xmlns:a="http://schemas.openxmlformats.org/drawingml/2006/main">
+              <a:ext uri="{FF2B5EF4-FFF2-40B4-BE49-F238E27FC236}">
+                <a16:creationId xmlns:a16="http://schemas.microsoft.com/office/drawing/2014/main" id="{A2CEC9E1-DE53-42F5-8C53-4C447EE27F86}"/>
+              </a:ext>
+            </a:extLst>
+          </p:cNvPr>
+          <p:cNvSpPr>
+            <a:spLocks xmlns:a="http://schemas.openxmlformats.org/drawingml/2006/main" noGrp="1"/>
+          </p:cNvSpPr>
+          <p:nvPr/>
+        </p:nvSpPr>
+        <p:spPr>
+          <a:xfrm xmlns:a="http://schemas.openxmlformats.org/drawingml/2006/main">
+            <a:off x="8934450" y="2676525"/>
+            <a:ext cx="209550" cy="180975"/>
+          </a:xfrm>
+          <a:prstGeom xmlns:a="http://schemas.openxmlformats.org/drawingml/2006/main" prst="rightArrow">
+            <a:avLst/>
+          </a:prstGeom>
+          <a:solidFill xmlns:a="http://schemas.openxmlformats.org/drawingml/2006/main">
+            <a:srgbClr val="C7F52F"/>
+          </a:solidFill>
+          <a:ln xmlns:a="http://schemas.openxmlformats.org/drawingml/2006/main" w="0">
+            <a:noFill/>
+            <a:prstDash val="solid"/>
+          </a:ln>
+        </p:spPr>
+      </p:sp>
+      <p:sp>
+        <p:nvSpPr>
+          <p:cNvPr id="51" name="offer-final-0">
+            <a:extLst xmlns:a="http://schemas.openxmlformats.org/drawingml/2006/main">
+              <a:ext uri="{FF2B5EF4-FFF2-40B4-BE49-F238E27FC236}">
+                <a16:creationId xmlns:a16="http://schemas.microsoft.com/office/drawing/2014/main" id="{AE20F2F9-0630-4FEC-ADB8-632433619070}"/>
+              </a:ext>
+            </a:extLst>
+          </p:cNvPr>
+          <p:cNvSpPr>
+            <a:spLocks xmlns:a="http://schemas.openxmlformats.org/drawingml/2006/main" noGrp="1"/>
+          </p:cNvSpPr>
+          <p:nvPr/>
+        </p:nvSpPr>
+        <p:spPr>
+          <a:xfrm xmlns:a="http://schemas.openxmlformats.org/drawingml/2006/main">
+            <a:off x="9277350" y="2552700"/>
+            <a:ext cx="1409700" cy="476250"/>
+          </a:xfrm>
+          <a:prstGeom xmlns:a="http://schemas.openxmlformats.org/drawingml/2006/main" prst="rect">
+            <a:avLst/>
+          </a:prstGeom>
+          <a:noFill xmlns:a="http://schemas.openxmlformats.org/drawingml/2006/main"/>
+          <a:ln xmlns:a="http://schemas.openxmlformats.org/drawingml/2006/main" w="0">
+            <a:noFill/>
+            <a:prstDash val="solid"/>
+          </a:ln>
+        </p:spPr>
+        <p:txBody>
+          <a:bodyPr xmlns:a="http://schemas.openxmlformats.org/drawingml/2006/main" wrap="square" lIns="0" tIns="0" rIns="0" bIns="0" anchor="t">
+            <a:noAutofit/>
+          </a:bodyPr>
+          <a:lstStyle xmlns:a="http://schemas.openxmlformats.org/drawingml/2006/main"/>
+          <a:p xmlns:a="http://schemas.openxmlformats.org/drawingml/2006/main">
+            <a:pPr algn="r">
+              <a:lnSpc>
+                <a:spcPct val="100000"/>
+              </a:lnSpc>
+              <a:buNone/>
+              <a:defRPr sz="2775" b="1">
+                <a:solidFill>
+                  <a:srgbClr val="C7F52F"/>
+                </a:solidFill>
+                <a:latin typeface="Arial Black"/>
+                <a:ea typeface="Arial Black"/>
+                <a:cs typeface="Arial Black"/>
+              </a:defRPr>
+            </a:pPr>
+            <a:r>
+              <a:rPr sz="2775" b="1">
+                <a:solidFill>
+                  <a:srgbClr val="C7F52F"/>
+                </a:solidFill>
+                <a:latin typeface="Arial Black"/>
+                <a:ea typeface="Arial Black"/>
+                <a:cs typeface="Arial Black"/>
+              </a:rPr>
+              <a:t>$700</a:t>
+            </a:r>
+          </a:p>
+        </p:txBody>
+      </p:sp>
+      <p:sp>
+        <p:nvSpPr>
+          <p:cNvPr id="52" name="winner-label">
+            <a:extLst xmlns:a="http://schemas.openxmlformats.org/drawingml/2006/main">
+              <a:ext uri="{FF2B5EF4-FFF2-40B4-BE49-F238E27FC236}">
+                <a16:creationId xmlns:a16="http://schemas.microsoft.com/office/drawing/2014/main" id="{DA673CD8-5C7E-454B-9E73-68027893075E}"/>
+              </a:ext>
+            </a:extLst>
+          </p:cNvPr>
+          <p:cNvSpPr>
+            <a:spLocks xmlns:a="http://schemas.openxmlformats.org/drawingml/2006/main" noGrp="1"/>
+          </p:cNvSpPr>
+          <p:nvPr/>
+        </p:nvSpPr>
+        <p:spPr>
+          <a:xfrm xmlns:a="http://schemas.openxmlformats.org/drawingml/2006/main">
+            <a:off x="10877550" y="2667000"/>
+            <a:ext cx="933450" cy="228600"/>
+          </a:xfrm>
+          <a:prstGeom xmlns:a="http://schemas.openxmlformats.org/drawingml/2006/main" prst="rect">
+            <a:avLst/>
+          </a:prstGeom>
+          <a:noFill xmlns:a="http://schemas.openxmlformats.org/drawingml/2006/main"/>
+          <a:ln xmlns:a="http://schemas.openxmlformats.org/drawingml/2006/main" w="0">
+            <a:noFill/>
+            <a:prstDash val="solid"/>
+          </a:ln>
+        </p:spPr>
+        <p:txBody>
+          <a:bodyPr xmlns:a="http://schemas.openxmlformats.org/drawingml/2006/main" wrap="square" lIns="0" tIns="0" rIns="0" bIns="0" anchor="t">
+            <a:noAutofit/>
+          </a:bodyPr>
+          <a:lstStyle xmlns:a="http://schemas.openxmlformats.org/drawingml/2006/main"/>
+          <a:p xmlns:a="http://schemas.openxmlformats.org/drawingml/2006/main">
+            <a:pPr algn="r">
+              <a:lnSpc>
+                <a:spcPct val="100000"/>
+              </a:lnSpc>
+              <a:buNone/>
+              <a:defRPr sz="1125" b="1">
+                <a:solidFill>
+                  <a:srgbClr val="C7F52F"/>
+                </a:solidFill>
+                <a:latin typeface="Courier New"/>
+                <a:ea typeface="Courier New"/>
+                <a:cs typeface="Courier New"/>
+              </a:defRPr>
+            </a:pPr>
+            <a:r>
+              <a:rPr sz="1125" b="1">
+                <a:solidFill>
+                  <a:srgbClr val="C7F52F"/>
+                </a:solidFill>
+                <a:latin typeface="Courier New"/>
+                <a:ea typeface="Courier New"/>
+                <a:cs typeface="Courier New"/>
+              </a:rPr>
+              <a:t>SAVES $200</a:t>
+            </a:r>
+          </a:p>
+        </p:txBody>
+      </p:sp>
+      <p:sp>
+        <p:nvSpPr>
+          <p:cNvPr id="53" name="offer-rule-0">
+            <a:extLst xmlns:a="http://schemas.openxmlformats.org/drawingml/2006/main">
+              <a:ext uri="{FF2B5EF4-FFF2-40B4-BE49-F238E27FC236}">
+                <a16:creationId xmlns:a16="http://schemas.microsoft.com/office/drawing/2014/main" id="{925DA0D9-292D-4849-BC1E-3B5DD60DD546}"/>
+              </a:ext>
+            </a:extLst>
+          </p:cNvPr>
+          <p:cNvSpPr>
+            <a:spLocks xmlns:a="http://schemas.openxmlformats.org/drawingml/2006/main" noGrp="1"/>
+          </p:cNvSpPr>
+          <p:nvPr/>
+        </p:nvSpPr>
+        <p:spPr>
+          <a:xfrm xmlns:a="http://schemas.openxmlformats.org/drawingml/2006/main">
+            <a:off x="3733800" y="3238500"/>
+            <a:ext cx="8077200" cy="0"/>
+          </a:xfrm>
+          <a:prstGeom xmlns:a="http://schemas.openxmlformats.org/drawingml/2006/main" prst="line">
+            <a:avLst/>
+          </a:prstGeom>
+          <a:noFill xmlns:a="http://schemas.openxmlformats.org/drawingml/2006/main"/>
+          <a:ln xmlns:a="http://schemas.openxmlformats.org/drawingml/2006/main" w="19050">
+            <a:solidFill>
+              <a:srgbClr val="7C9920"/>
+            </a:solidFill>
+            <a:prstDash val="solid"/>
+          </a:ln>
+        </p:spPr>
+      </p:sp>
+      <p:sp>
+        <p:nvSpPr>
+          <p:cNvPr id="54" name="offer-index-1">
+            <a:extLst xmlns:a="http://schemas.openxmlformats.org/drawingml/2006/main">
+              <a:ext uri="{FF2B5EF4-FFF2-40B4-BE49-F238E27FC236}">
+                <a16:creationId xmlns:a16="http://schemas.microsoft.com/office/drawing/2014/main" id="{449CDE48-094D-4376-A5B0-44592003B3EA}"/>
+              </a:ext>
+            </a:extLst>
+          </p:cNvPr>
+          <p:cNvSpPr>
+            <a:spLocks xmlns:a="http://schemas.openxmlformats.org/drawingml/2006/main" noGrp="1"/>
+          </p:cNvSpPr>
+          <p:nvPr/>
+        </p:nvSpPr>
+        <p:spPr>
+          <a:xfrm xmlns:a="http://schemas.openxmlformats.org/drawingml/2006/main">
+            <a:off x="3733800" y="3657600"/>
+            <a:ext cx="342900" cy="209550"/>
+          </a:xfrm>
+          <a:prstGeom xmlns:a="http://schemas.openxmlformats.org/drawingml/2006/main" prst="rect">
+            <a:avLst/>
+          </a:prstGeom>
+          <a:noFill xmlns:a="http://schemas.openxmlformats.org/drawingml/2006/main"/>
+          <a:ln xmlns:a="http://schemas.openxmlformats.org/drawingml/2006/main" w="0">
+            <a:noFill/>
+            <a:prstDash val="solid"/>
+          </a:ln>
+        </p:spPr>
+        <p:txBody>
+          <a:bodyPr xmlns:a="http://schemas.openxmlformats.org/drawingml/2006/main" wrap="square" lIns="0" tIns="0" rIns="0" bIns="0" anchor="t">
+            <a:noAutofit/>
+          </a:bodyPr>
+          <a:lstStyle xmlns:a="http://schemas.openxmlformats.org/drawingml/2006/main"/>
+          <a:p xmlns:a="http://schemas.openxmlformats.org/drawingml/2006/main">
+            <a:pPr algn="l">
+              <a:lnSpc>
+                <a:spcPct val="100000"/>
+              </a:lnSpc>
+              <a:buNone/>
+              <a:defRPr sz="1125" b="0">
+                <a:solidFill>
+                  <a:srgbClr val="858B84"/>
+                </a:solidFill>
+                <a:latin typeface="Courier New"/>
+                <a:ea typeface="Courier New"/>
+                <a:cs typeface="Courier New"/>
+              </a:defRPr>
+            </a:pPr>
+            <a:r>
+              <a:rPr sz="1125" b="0">
+                <a:solidFill>
+                  <a:srgbClr val="858B84"/>
+                </a:solidFill>
+                <a:latin typeface="Courier New"/>
+                <a:ea typeface="Courier New"/>
+                <a:cs typeface="Courier New"/>
+              </a:rPr>
+              <a:t>02</a:t>
+            </a:r>
+          </a:p>
+        </p:txBody>
+      </p:sp>
+      <p:sp>
+        <p:nvSpPr>
+          <p:cNvPr id="55" name="offer-merchant-1">
+            <a:extLst xmlns:a="http://schemas.openxmlformats.org/drawingml/2006/main">
+              <a:ext uri="{FF2B5EF4-FFF2-40B4-BE49-F238E27FC236}">
+                <a16:creationId xmlns:a16="http://schemas.microsoft.com/office/drawing/2014/main" id="{BE1EDFF8-C160-4B25-AD86-5F516E23FD6D}"/>
+              </a:ext>
+            </a:extLst>
+          </p:cNvPr>
+          <p:cNvSpPr>
+            <a:spLocks xmlns:a="http://schemas.openxmlformats.org/drawingml/2006/main" noGrp="1"/>
+          </p:cNvSpPr>
+          <p:nvPr/>
+        </p:nvSpPr>
+        <p:spPr>
+          <a:xfrm xmlns:a="http://schemas.openxmlformats.org/drawingml/2006/main">
+            <a:off x="4267200" y="3657600"/>
+            <a:ext cx="2476500" cy="228600"/>
+          </a:xfrm>
+          <a:prstGeom xmlns:a="http://schemas.openxmlformats.org/drawingml/2006/main" prst="rect">
+            <a:avLst/>
+          </a:prstGeom>
+          <a:noFill xmlns:a="http://schemas.openxmlformats.org/drawingml/2006/main"/>
+          <a:ln xmlns:a="http://schemas.openxmlformats.org/drawingml/2006/main" w="0">
+            <a:noFill/>
+            <a:prstDash val="solid"/>
+          </a:ln>
+        </p:spPr>
+        <p:txBody>
+          <a:bodyPr xmlns:a="http://schemas.openxmlformats.org/drawingml/2006/main" wrap="square" lIns="0" tIns="0" rIns="0" bIns="0" anchor="t">
+            <a:noAutofit/>
+          </a:bodyPr>
+          <a:lstStyle xmlns:a="http://schemas.openxmlformats.org/drawingml/2006/main"/>
+          <a:p xmlns:a="http://schemas.openxmlformats.org/drawingml/2006/main">
+            <a:pPr algn="l">
+              <a:lnSpc>
+                <a:spcPct val="100000"/>
+              </a:lnSpc>
+              <a:buNone/>
+              <a:defRPr sz="1500" b="0">
+                <a:solidFill>
+                  <a:srgbClr val="D3D1C8"/>
+                </a:solidFill>
+                <a:latin typeface="Courier New"/>
+                <a:ea typeface="Courier New"/>
+                <a:cs typeface="Courier New"/>
+              </a:defRPr>
+            </a:pPr>
+            <a:r>
+              <a:rPr sz="1500" b="0">
+                <a:solidFill>
+                  <a:srgbClr val="D3D1C8"/>
+                </a:solidFill>
+                <a:latin typeface="Courier New"/>
+                <a:ea typeface="Courier New"/>
+                <a:cs typeface="Courier New"/>
+              </a:rPr>
+              <a:t>PLEDGED 20% OFF · 180 BUYERS</a:t>
+            </a:r>
+          </a:p>
+        </p:txBody>
+      </p:sp>
+      <p:sp>
+        <p:nvSpPr>
+          <p:cNvPr id="56" name="offer-initial-1">
+            <a:extLst xmlns:a="http://schemas.openxmlformats.org/drawingml/2006/main">
+              <a:ext uri="{FF2B5EF4-FFF2-40B4-BE49-F238E27FC236}">
+                <a16:creationId xmlns:a16="http://schemas.microsoft.com/office/drawing/2014/main" id="{C6D83D1A-B0F1-4EE5-8B63-EC9B9169405E}"/>
+              </a:ext>
+            </a:extLst>
+          </p:cNvPr>
+          <p:cNvSpPr>
+            <a:spLocks xmlns:a="http://schemas.openxmlformats.org/drawingml/2006/main" noGrp="1"/>
+          </p:cNvSpPr>
+          <p:nvPr/>
+        </p:nvSpPr>
+        <p:spPr>
+          <a:xfrm xmlns:a="http://schemas.openxmlformats.org/drawingml/2006/main">
+            <a:off x="6953250" y="3581400"/>
+            <a:ext cx="1047750" cy="419100"/>
+          </a:xfrm>
+          <a:prstGeom xmlns:a="http://schemas.openxmlformats.org/drawingml/2006/main" prst="rect">
+            <a:avLst/>
+          </a:prstGeom>
+          <a:noFill xmlns:a="http://schemas.openxmlformats.org/drawingml/2006/main"/>
+          <a:ln xmlns:a="http://schemas.openxmlformats.org/drawingml/2006/main" w="0">
+            <a:noFill/>
+            <a:prstDash val="solid"/>
+          </a:ln>
+        </p:spPr>
+        <p:txBody>
+          <a:bodyPr xmlns:a="http://schemas.openxmlformats.org/drawingml/2006/main" wrap="square" lIns="0" tIns="0" rIns="0" bIns="0" anchor="t">
+            <a:noAutofit/>
+          </a:bodyPr>
+          <a:lstStyle xmlns:a="http://schemas.openxmlformats.org/drawingml/2006/main"/>
+          <a:p xmlns:a="http://schemas.openxmlformats.org/drawingml/2006/main">
+            <a:pPr algn="r">
+              <a:lnSpc>
+                <a:spcPct val="100000"/>
+              </a:lnSpc>
+              <a:buNone/>
+              <a:defRPr sz="2250" b="1">
+                <a:solidFill>
+                  <a:srgbClr val="858B84"/>
+                </a:solidFill>
+                <a:latin typeface="Arial Black"/>
+                <a:ea typeface="Arial Black"/>
+                <a:cs typeface="Arial Black"/>
+              </a:defRPr>
+            </a:pPr>
+            <a:r>
+              <a:rPr sz="2250" b="1">
+                <a:solidFill>
+                  <a:srgbClr val="858B84"/>
+                </a:solidFill>
+                <a:latin typeface="Arial Black"/>
+                <a:ea typeface="Arial Black"/>
+                <a:cs typeface="Arial Black"/>
+              </a:rPr>
+              <a:t>$800</a:t>
+            </a:r>
+          </a:p>
+        </p:txBody>
+      </p:sp>
+      <p:sp>
+        <p:nvSpPr>
+          <p:cNvPr id="57" name="offer-arrow-1-shaft">
+            <a:extLst xmlns:a="http://schemas.openxmlformats.org/drawingml/2006/main">
+              <a:ext uri="{FF2B5EF4-FFF2-40B4-BE49-F238E27FC236}">
+                <a16:creationId xmlns:a16="http://schemas.microsoft.com/office/drawing/2014/main" id="{A33AC764-9F36-419F-8F18-B3D2CA418698}"/>
+              </a:ext>
+            </a:extLst>
+          </p:cNvPr>
+          <p:cNvSpPr>
+            <a:spLocks xmlns:a="http://schemas.openxmlformats.org/drawingml/2006/main" noGrp="1"/>
+          </p:cNvSpPr>
+          <p:nvPr/>
+        </p:nvSpPr>
+        <p:spPr>
+          <a:xfrm xmlns:a="http://schemas.openxmlformats.org/drawingml/2006/main">
+            <a:off x="8248650" y="3762375"/>
+            <a:ext cx="723900" cy="28575"/>
+          </a:xfrm>
+          <a:prstGeom xmlns:a="http://schemas.openxmlformats.org/drawingml/2006/main" prst="rect">
+            <a:avLst/>
+          </a:prstGeom>
+          <a:solidFill xmlns:a="http://schemas.openxmlformats.org/drawingml/2006/main">
+            <a:srgbClr val="252A26"/>
+          </a:solidFill>
+          <a:ln xmlns:a="http://schemas.openxmlformats.org/drawingml/2006/main" w="0">
+            <a:noFill/>
+            <a:prstDash val="solid"/>
+          </a:ln>
+        </p:spPr>
+      </p:sp>
+      <p:sp>
+        <p:nvSpPr>
+          <p:cNvPr id="58" name="offer-arrow-1-head">
+            <a:extLst xmlns:a="http://schemas.openxmlformats.org/drawingml/2006/main">
+              <a:ext uri="{FF2B5EF4-FFF2-40B4-BE49-F238E27FC236}">
+                <a16:creationId xmlns:a16="http://schemas.microsoft.com/office/drawing/2014/main" id="{CA78D8DD-14D3-41C3-8DE2-E47CCE9F4162}"/>
+              </a:ext>
+            </a:extLst>
+          </p:cNvPr>
+          <p:cNvSpPr>
+            <a:spLocks xmlns:a="http://schemas.openxmlformats.org/drawingml/2006/main" noGrp="1"/>
+          </p:cNvSpPr>
+          <p:nvPr/>
+        </p:nvSpPr>
+        <p:spPr>
+          <a:xfrm xmlns:a="http://schemas.openxmlformats.org/drawingml/2006/main">
+            <a:off x="8934450" y="3686175"/>
+            <a:ext cx="209550" cy="180975"/>
+          </a:xfrm>
+          <a:prstGeom xmlns:a="http://schemas.openxmlformats.org/drawingml/2006/main" prst="rightArrow">
+            <a:avLst/>
+          </a:prstGeom>
+          <a:solidFill xmlns:a="http://schemas.openxmlformats.org/drawingml/2006/main">
+            <a:srgbClr val="252A26"/>
+          </a:solidFill>
+          <a:ln xmlns:a="http://schemas.openxmlformats.org/drawingml/2006/main" w="0">
+            <a:noFill/>
+            <a:prstDash val="solid"/>
+          </a:ln>
+        </p:spPr>
+      </p:sp>
+      <p:sp>
+        <p:nvSpPr>
+          <p:cNvPr id="59" name="offer-final-1">
+            <a:extLst xmlns:a="http://schemas.openxmlformats.org/drawingml/2006/main">
+              <a:ext uri="{FF2B5EF4-FFF2-40B4-BE49-F238E27FC236}">
+                <a16:creationId xmlns:a16="http://schemas.microsoft.com/office/drawing/2014/main" id="{85425EB8-B284-4B42-8310-78323E9405EA}"/>
+              </a:ext>
+            </a:extLst>
+          </p:cNvPr>
+          <p:cNvSpPr>
+            <a:spLocks xmlns:a="http://schemas.openxmlformats.org/drawingml/2006/main" noGrp="1"/>
+          </p:cNvSpPr>
+          <p:nvPr/>
+        </p:nvSpPr>
+        <p:spPr>
+          <a:xfrm xmlns:a="http://schemas.openxmlformats.org/drawingml/2006/main">
+            <a:off x="9277350" y="3562350"/>
+            <a:ext cx="1409700" cy="476250"/>
+          </a:xfrm>
+          <a:prstGeom xmlns:a="http://schemas.openxmlformats.org/drawingml/2006/main" prst="rect">
+            <a:avLst/>
+          </a:prstGeom>
+          <a:noFill xmlns:a="http://schemas.openxmlformats.org/drawingml/2006/main"/>
+          <a:ln xmlns:a="http://schemas.openxmlformats.org/drawingml/2006/main" w="0">
+            <a:noFill/>
+            <a:prstDash val="solid"/>
+          </a:ln>
+        </p:spPr>
+        <p:txBody>
+          <a:bodyPr xmlns:a="http://schemas.openxmlformats.org/drawingml/2006/main" wrap="square" lIns="0" tIns="0" rIns="0" bIns="0" anchor="t">
+            <a:noAutofit/>
+          </a:bodyPr>
+          <a:lstStyle xmlns:a="http://schemas.openxmlformats.org/drawingml/2006/main"/>
+          <a:p xmlns:a="http://schemas.openxmlformats.org/drawingml/2006/main">
+            <a:pPr algn="r">
+              <a:lnSpc>
+                <a:spcPct val="100000"/>
+              </a:lnSpc>
+              <a:buNone/>
+              <a:defRPr sz="2775" b="1">
+                <a:solidFill>
+                  <a:srgbClr val="D3D1C8"/>
+                </a:solidFill>
+                <a:latin typeface="Arial Black"/>
+                <a:ea typeface="Arial Black"/>
+                <a:cs typeface="Arial Black"/>
+              </a:defRPr>
+            </a:pPr>
+            <a:r>
+              <a:rPr sz="2775" b="1">
+                <a:solidFill>
+                  <a:srgbClr val="D3D1C8"/>
+                </a:solidFill>
+                <a:latin typeface="Arial Black"/>
+                <a:ea typeface="Arial Black"/>
+                <a:cs typeface="Arial Black"/>
+              </a:rPr>
+              <a:t>$700</a:t>
+            </a:r>
+          </a:p>
+        </p:txBody>
+      </p:sp>
+      <p:sp>
+        <p:nvSpPr>
+          <p:cNvPr id="60" name="offer-rule-1">
+            <a:extLst xmlns:a="http://schemas.openxmlformats.org/drawingml/2006/main">
+              <a:ext uri="{FF2B5EF4-FFF2-40B4-BE49-F238E27FC236}">
+                <a16:creationId xmlns:a16="http://schemas.microsoft.com/office/drawing/2014/main" id="{7372CE83-BAAA-4390-85D6-80CF594C1FFA}"/>
+              </a:ext>
+            </a:extLst>
+          </p:cNvPr>
+          <p:cNvSpPr>
+            <a:spLocks xmlns:a="http://schemas.openxmlformats.org/drawingml/2006/main" noGrp="1"/>
+          </p:cNvSpPr>
+          <p:nvPr/>
+        </p:nvSpPr>
+        <p:spPr>
+          <a:xfrm xmlns:a="http://schemas.openxmlformats.org/drawingml/2006/main">
+            <a:off x="3733800" y="4248150"/>
+            <a:ext cx="8077200" cy="0"/>
+          </a:xfrm>
+          <a:prstGeom xmlns:a="http://schemas.openxmlformats.org/drawingml/2006/main" prst="line">
+            <a:avLst/>
+          </a:prstGeom>
+          <a:noFill xmlns:a="http://schemas.openxmlformats.org/drawingml/2006/main"/>
+          <a:ln xmlns:a="http://schemas.openxmlformats.org/drawingml/2006/main" w="9525">
+            <a:solidFill>
+              <a:srgbClr val="252A26"/>
+            </a:solidFill>
+            <a:prstDash val="solid"/>
+          </a:ln>
+        </p:spPr>
+      </p:sp>
+      <p:sp>
+        <p:nvSpPr>
+          <p:cNvPr id="61" name="offer-index-2">
+            <a:extLst xmlns:a="http://schemas.openxmlformats.org/drawingml/2006/main">
+              <a:ext uri="{FF2B5EF4-FFF2-40B4-BE49-F238E27FC236}">
+                <a16:creationId xmlns:a16="http://schemas.microsoft.com/office/drawing/2014/main" id="{7190FA2E-BEED-4535-B5DA-FA03349F8EE3}"/>
+              </a:ext>
+            </a:extLst>
+          </p:cNvPr>
+          <p:cNvSpPr>
+            <a:spLocks xmlns:a="http://schemas.openxmlformats.org/drawingml/2006/main" noGrp="1"/>
+          </p:cNvSpPr>
+          <p:nvPr/>
+        </p:nvSpPr>
+        <p:spPr>
+          <a:xfrm xmlns:a="http://schemas.openxmlformats.org/drawingml/2006/main">
+            <a:off x="3733800" y="4667250"/>
+            <a:ext cx="342900" cy="209550"/>
+          </a:xfrm>
+          <a:prstGeom xmlns:a="http://schemas.openxmlformats.org/drawingml/2006/main" prst="rect">
+            <a:avLst/>
+          </a:prstGeom>
+          <a:noFill xmlns:a="http://schemas.openxmlformats.org/drawingml/2006/main"/>
+          <a:ln xmlns:a="http://schemas.openxmlformats.org/drawingml/2006/main" w="0">
+            <a:noFill/>
+            <a:prstDash val="solid"/>
+          </a:ln>
+        </p:spPr>
+        <p:txBody>
+          <a:bodyPr xmlns:a="http://schemas.openxmlformats.org/drawingml/2006/main" wrap="square" lIns="0" tIns="0" rIns="0" bIns="0" anchor="t">
+            <a:noAutofit/>
+          </a:bodyPr>
+          <a:lstStyle xmlns:a="http://schemas.openxmlformats.org/drawingml/2006/main"/>
+          <a:p xmlns:a="http://schemas.openxmlformats.org/drawingml/2006/main">
+            <a:pPr algn="l">
+              <a:lnSpc>
+                <a:spcPct val="100000"/>
+              </a:lnSpc>
+              <a:buNone/>
+              <a:defRPr sz="1125" b="0">
+                <a:solidFill>
+                  <a:srgbClr val="858B84"/>
+                </a:solidFill>
+                <a:latin typeface="Courier New"/>
+                <a:ea typeface="Courier New"/>
+                <a:cs typeface="Courier New"/>
+              </a:defRPr>
+            </a:pPr>
+            <a:r>
+              <a:rPr sz="1125" b="0">
+                <a:solidFill>
+                  <a:srgbClr val="858B84"/>
+                </a:solidFill>
+                <a:latin typeface="Courier New"/>
+                <a:ea typeface="Courier New"/>
+                <a:cs typeface="Courier New"/>
+              </a:rPr>
+              <a:t>03</a:t>
+            </a:r>
+          </a:p>
+        </p:txBody>
+      </p:sp>
+      <p:sp>
+        <p:nvSpPr>
+          <p:cNvPr id="62" name="offer-merchant-2">
+            <a:extLst xmlns:a="http://schemas.openxmlformats.org/drawingml/2006/main">
+              <a:ext uri="{FF2B5EF4-FFF2-40B4-BE49-F238E27FC236}">
+                <a16:creationId xmlns:a16="http://schemas.microsoft.com/office/drawing/2014/main" id="{55079F92-BF32-473C-806D-B1793C38644F}"/>
+              </a:ext>
+            </a:extLst>
+          </p:cNvPr>
+          <p:cNvSpPr>
+            <a:spLocks xmlns:a="http://schemas.openxmlformats.org/drawingml/2006/main" noGrp="1"/>
+          </p:cNvSpPr>
+          <p:nvPr/>
+        </p:nvSpPr>
+        <p:spPr>
+          <a:xfrm xmlns:a="http://schemas.openxmlformats.org/drawingml/2006/main">
+            <a:off x="4267200" y="4667250"/>
+            <a:ext cx="2476500" cy="228600"/>
+          </a:xfrm>
+          <a:prstGeom xmlns:a="http://schemas.openxmlformats.org/drawingml/2006/main" prst="rect">
+            <a:avLst/>
+          </a:prstGeom>
+          <a:noFill xmlns:a="http://schemas.openxmlformats.org/drawingml/2006/main"/>
+          <a:ln xmlns:a="http://schemas.openxmlformats.org/drawingml/2006/main" w="0">
+            <a:noFill/>
+            <a:prstDash val="solid"/>
+          </a:ln>
+        </p:spPr>
+        <p:txBody>
+          <a:bodyPr xmlns:a="http://schemas.openxmlformats.org/drawingml/2006/main" wrap="square" lIns="0" tIns="0" rIns="0" bIns="0" anchor="t">
+            <a:noAutofit/>
+          </a:bodyPr>
+          <a:lstStyle xmlns:a="http://schemas.openxmlformats.org/drawingml/2006/main"/>
+          <a:p xmlns:a="http://schemas.openxmlformats.org/drawingml/2006/main">
+            <a:pPr algn="l">
+              <a:lnSpc>
+                <a:spcPct val="100000"/>
+              </a:lnSpc>
+              <a:buNone/>
+              <a:defRPr sz="1500" b="0">
+                <a:solidFill>
+                  <a:srgbClr val="D3D1C8"/>
+                </a:solidFill>
+                <a:latin typeface="Courier New"/>
+                <a:ea typeface="Courier New"/>
+                <a:cs typeface="Courier New"/>
+              </a:defRPr>
+            </a:pPr>
+            <a:r>
+              <a:rPr sz="1500" b="0">
+                <a:solidFill>
+                  <a:srgbClr val="D3D1C8"/>
+                </a:solidFill>
+                <a:latin typeface="Courier New"/>
+                <a:ea typeface="Courier New"/>
+                <a:cs typeface="Courier New"/>
+              </a:rPr>
+              <a:t>PLEDGED 30% OFF · 80 BUYERS</a:t>
+            </a:r>
+          </a:p>
+        </p:txBody>
+      </p:sp>
+      <p:sp>
+        <p:nvSpPr>
+          <p:cNvPr id="63" name="offer-initial-2">
+            <a:extLst xmlns:a="http://schemas.openxmlformats.org/drawingml/2006/main">
+              <a:ext uri="{FF2B5EF4-FFF2-40B4-BE49-F238E27FC236}">
+                <a16:creationId xmlns:a16="http://schemas.microsoft.com/office/drawing/2014/main" id="{1004BC97-5945-4599-A456-C7C89AC27379}"/>
+              </a:ext>
+            </a:extLst>
+          </p:cNvPr>
+          <p:cNvSpPr>
+            <a:spLocks xmlns:a="http://schemas.openxmlformats.org/drawingml/2006/main" noGrp="1"/>
+          </p:cNvSpPr>
+          <p:nvPr/>
+        </p:nvSpPr>
+        <p:spPr>
+          <a:xfrm xmlns:a="http://schemas.openxmlformats.org/drawingml/2006/main">
+            <a:off x="6953250" y="4591050"/>
+            <a:ext cx="1047750" cy="419100"/>
+          </a:xfrm>
+          <a:prstGeom xmlns:a="http://schemas.openxmlformats.org/drawingml/2006/main" prst="rect">
+            <a:avLst/>
+          </a:prstGeom>
+          <a:noFill xmlns:a="http://schemas.openxmlformats.org/drawingml/2006/main"/>
+          <a:ln xmlns:a="http://schemas.openxmlformats.org/drawingml/2006/main" w="0">
+            <a:noFill/>
+            <a:prstDash val="solid"/>
+          </a:ln>
+        </p:spPr>
+        <p:txBody>
+          <a:bodyPr xmlns:a="http://schemas.openxmlformats.org/drawingml/2006/main" wrap="square" lIns="0" tIns="0" rIns="0" bIns="0" anchor="t">
+            <a:noAutofit/>
+          </a:bodyPr>
+          <a:lstStyle xmlns:a="http://schemas.openxmlformats.org/drawingml/2006/main"/>
+          <a:p xmlns:a="http://schemas.openxmlformats.org/drawingml/2006/main">
+            <a:pPr algn="r">
+              <a:lnSpc>
+                <a:spcPct val="100000"/>
+              </a:lnSpc>
+              <a:buNone/>
+              <a:defRPr sz="2250" b="1">
+                <a:solidFill>
+                  <a:srgbClr val="858B84"/>
+                </a:solidFill>
+                <a:latin typeface="Arial Black"/>
+                <a:ea typeface="Arial Black"/>
+                <a:cs typeface="Arial Black"/>
+              </a:defRPr>
+            </a:pPr>
+            <a:r>
+              <a:rPr sz="2250" b="1">
+                <a:solidFill>
+                  <a:srgbClr val="858B84"/>
+                </a:solidFill>
+                <a:latin typeface="Arial Black"/>
+                <a:ea typeface="Arial Black"/>
+                <a:cs typeface="Arial Black"/>
+              </a:rPr>
+              <a:t>$700</a:t>
+            </a:r>
+          </a:p>
+        </p:txBody>
+      </p:sp>
+      <p:sp>
+        <p:nvSpPr>
+          <p:cNvPr id="64" name="offer-arrow-2-shaft">
+            <a:extLst xmlns:a="http://schemas.openxmlformats.org/drawingml/2006/main">
+              <a:ext uri="{FF2B5EF4-FFF2-40B4-BE49-F238E27FC236}">
+                <a16:creationId xmlns:a16="http://schemas.microsoft.com/office/drawing/2014/main" id="{2D9982F1-7B13-4716-935C-C3A1674B6023}"/>
+              </a:ext>
+            </a:extLst>
+          </p:cNvPr>
+          <p:cNvSpPr>
+            <a:spLocks xmlns:a="http://schemas.openxmlformats.org/drawingml/2006/main" noGrp="1"/>
+          </p:cNvSpPr>
+          <p:nvPr/>
+        </p:nvSpPr>
+        <p:spPr>
+          <a:xfrm xmlns:a="http://schemas.openxmlformats.org/drawingml/2006/main">
+            <a:off x="8248650" y="4772025"/>
+            <a:ext cx="723900" cy="28575"/>
+          </a:xfrm>
+          <a:prstGeom xmlns:a="http://schemas.openxmlformats.org/drawingml/2006/main" prst="rect">
+            <a:avLst/>
+          </a:prstGeom>
+          <a:solidFill xmlns:a="http://schemas.openxmlformats.org/drawingml/2006/main">
+            <a:srgbClr val="252A26"/>
+          </a:solidFill>
+          <a:ln xmlns:a="http://schemas.openxmlformats.org/drawingml/2006/main" w="0">
+            <a:noFill/>
+            <a:prstDash val="solid"/>
+          </a:ln>
+        </p:spPr>
+      </p:sp>
+      <p:sp>
+        <p:nvSpPr>
+          <p:cNvPr id="65" name="offer-arrow-2-head">
+            <a:extLst xmlns:a="http://schemas.openxmlformats.org/drawingml/2006/main">
+              <a:ext uri="{FF2B5EF4-FFF2-40B4-BE49-F238E27FC236}">
+                <a16:creationId xmlns:a16="http://schemas.microsoft.com/office/drawing/2014/main" id="{A714AB18-CAE1-4F7E-83FF-66335466F4D3}"/>
+              </a:ext>
+            </a:extLst>
+          </p:cNvPr>
+          <p:cNvSpPr>
+            <a:spLocks xmlns:a="http://schemas.openxmlformats.org/drawingml/2006/main" noGrp="1"/>
+          </p:cNvSpPr>
+          <p:nvPr/>
+        </p:nvSpPr>
+        <p:spPr>
+          <a:xfrm xmlns:a="http://schemas.openxmlformats.org/drawingml/2006/main">
+            <a:off x="8934450" y="4695825"/>
+            <a:ext cx="209550" cy="180975"/>
+          </a:xfrm>
+          <a:prstGeom xmlns:a="http://schemas.openxmlformats.org/drawingml/2006/main" prst="rightArrow">
+            <a:avLst/>
+          </a:prstGeom>
+          <a:solidFill xmlns:a="http://schemas.openxmlformats.org/drawingml/2006/main">
+            <a:srgbClr val="252A26"/>
+          </a:solidFill>
+          <a:ln xmlns:a="http://schemas.openxmlformats.org/drawingml/2006/main" w="0">
+            <a:noFill/>
+            <a:prstDash val="solid"/>
+          </a:ln>
+        </p:spPr>
+      </p:sp>
+      <p:sp>
+        <p:nvSpPr>
+          <p:cNvPr id="66" name="offer-final-2">
+            <a:extLst xmlns:a="http://schemas.openxmlformats.org/drawingml/2006/main">
+              <a:ext uri="{FF2B5EF4-FFF2-40B4-BE49-F238E27FC236}">
+                <a16:creationId xmlns:a16="http://schemas.microsoft.com/office/drawing/2014/main" id="{B6A4C9C4-AC3E-4996-A387-5951525FC410}"/>
+              </a:ext>
+            </a:extLst>
+          </p:cNvPr>
+          <p:cNvSpPr>
+            <a:spLocks xmlns:a="http://schemas.openxmlformats.org/drawingml/2006/main" noGrp="1"/>
+          </p:cNvSpPr>
+          <p:nvPr/>
+        </p:nvSpPr>
+        <p:spPr>
+          <a:xfrm xmlns:a="http://schemas.openxmlformats.org/drawingml/2006/main">
+            <a:off x="9277350" y="4572000"/>
+            <a:ext cx="1409700" cy="476250"/>
+          </a:xfrm>
+          <a:prstGeom xmlns:a="http://schemas.openxmlformats.org/drawingml/2006/main" prst="rect">
+            <a:avLst/>
+          </a:prstGeom>
+          <a:noFill xmlns:a="http://schemas.openxmlformats.org/drawingml/2006/main"/>
+          <a:ln xmlns:a="http://schemas.openxmlformats.org/drawingml/2006/main" w="0">
+            <a:noFill/>
+            <a:prstDash val="solid"/>
+          </a:ln>
+        </p:spPr>
+        <p:txBody>
+          <a:bodyPr xmlns:a="http://schemas.openxmlformats.org/drawingml/2006/main" wrap="square" lIns="0" tIns="0" rIns="0" bIns="0" anchor="t">
+            <a:noAutofit/>
+          </a:bodyPr>
+          <a:lstStyle xmlns:a="http://schemas.openxmlformats.org/drawingml/2006/main"/>
+          <a:p xmlns:a="http://schemas.openxmlformats.org/drawingml/2006/main">
+            <a:pPr algn="r">
+              <a:lnSpc>
+                <a:spcPct val="100000"/>
+              </a:lnSpc>
+              <a:buNone/>
+              <a:defRPr sz="2775" b="1">
+                <a:solidFill>
+                  <a:srgbClr val="D3D1C8"/>
+                </a:solidFill>
+                <a:latin typeface="Arial Black"/>
+                <a:ea typeface="Arial Black"/>
+                <a:cs typeface="Arial Black"/>
+              </a:defRPr>
+            </a:pPr>
+            <a:r>
+              <a:rPr sz="2775" b="1">
+                <a:solidFill>
+                  <a:srgbClr val="D3D1C8"/>
+                </a:solidFill>
+                <a:latin typeface="Arial Black"/>
+                <a:ea typeface="Arial Black"/>
+                <a:cs typeface="Arial Black"/>
+              </a:rPr>
+              <a:t>$700</a:t>
+            </a:r>
+          </a:p>
+        </p:txBody>
+      </p:sp>
+      <p:sp>
+        <p:nvSpPr>
+          <p:cNvPr id="67" name="offer-rule-2">
+            <a:extLst xmlns:a="http://schemas.openxmlformats.org/drawingml/2006/main">
+              <a:ext uri="{FF2B5EF4-FFF2-40B4-BE49-F238E27FC236}">
+                <a16:creationId xmlns:a16="http://schemas.microsoft.com/office/drawing/2014/main" id="{72034B58-709B-4A7F-94A3-A0D540CFEBFB}"/>
+              </a:ext>
+            </a:extLst>
+          </p:cNvPr>
+          <p:cNvSpPr>
+            <a:spLocks xmlns:a="http://schemas.openxmlformats.org/drawingml/2006/main" noGrp="1"/>
+          </p:cNvSpPr>
+          <p:nvPr/>
+        </p:nvSpPr>
+        <p:spPr>
+          <a:xfrm xmlns:a="http://schemas.openxmlformats.org/drawingml/2006/main">
+            <a:off x="3733800" y="5257800"/>
+            <a:ext cx="8077200" cy="0"/>
+          </a:xfrm>
+          <a:prstGeom xmlns:a="http://schemas.openxmlformats.org/drawingml/2006/main" prst="line">
+            <a:avLst/>
+          </a:prstGeom>
+          <a:noFill xmlns:a="http://schemas.openxmlformats.org/drawingml/2006/main"/>
+          <a:ln xmlns:a="http://schemas.openxmlformats.org/drawingml/2006/main" w="9525">
+            <a:solidFill>
+              <a:srgbClr val="252A26"/>
+            </a:solidFill>
+            <a:prstDash val="solid"/>
+          </a:ln>
+        </p:spPr>
+      </p:sp>
+      <p:sp>
+        <p:nvSpPr>
+          <p:cNvPr id="68" name="seller-boundary-bg">
+            <a:extLst xmlns:a="http://schemas.openxmlformats.org/drawingml/2006/main">
+              <a:ext uri="{FF2B5EF4-FFF2-40B4-BE49-F238E27FC236}">
+                <a16:creationId xmlns:a16="http://schemas.microsoft.com/office/drawing/2014/main" id="{4C8520CD-2AA8-4D8B-9966-A1E188032120}"/>
+              </a:ext>
+            </a:extLst>
+          </p:cNvPr>
+          <p:cNvSpPr>
+            <a:spLocks xmlns:a="http://schemas.openxmlformats.org/drawingml/2006/main" noGrp="1"/>
+          </p:cNvSpPr>
+          <p:nvPr/>
+        </p:nvSpPr>
+        <p:spPr>
+          <a:xfrm xmlns:a="http://schemas.openxmlformats.org/drawingml/2006/main">
+            <a:off x="3733800" y="5695950"/>
+            <a:ext cx="8077200" cy="342900"/>
+          </a:xfrm>
+          <a:prstGeom xmlns:a="http://schemas.openxmlformats.org/drawingml/2006/main" prst="rect">
+            <a:avLst/>
+          </a:prstGeom>
+          <a:solidFill xmlns:a="http://schemas.openxmlformats.org/drawingml/2006/main">
+            <a:srgbClr val="2A101A"/>
+          </a:solidFill>
+          <a:ln xmlns:a="http://schemas.openxmlformats.org/drawingml/2006/main" w="9525">
+            <a:solidFill>
+              <a:srgbClr val="FF2B79"/>
+            </a:solidFill>
+            <a:prstDash val="solid"/>
+          </a:ln>
+        </p:spPr>
+      </p:sp>
+      <p:sp>
+        <p:nvSpPr>
+          <p:cNvPr id="69" name="rfp-label">
+            <a:extLst xmlns:a="http://schemas.openxmlformats.org/drawingml/2006/main">
+              <a:ext uri="{FF2B5EF4-FFF2-40B4-BE49-F238E27FC236}">
+                <a16:creationId xmlns:a16="http://schemas.microsoft.com/office/drawing/2014/main" id="{F68D55DA-2132-4CE0-A493-0192DECC4813}"/>
+              </a:ext>
+            </a:extLst>
+          </p:cNvPr>
+          <p:cNvSpPr>
+            <a:spLocks xmlns:a="http://schemas.openxmlformats.org/drawingml/2006/main" noGrp="1"/>
+          </p:cNvSpPr>
+          <p:nvPr/>
+        </p:nvSpPr>
+        <p:spPr>
+          <a:xfrm xmlns:a="http://schemas.openxmlformats.org/drawingml/2006/main">
+            <a:off x="3886200" y="5791200"/>
+            <a:ext cx="3333750" cy="171450"/>
+          </a:xfrm>
+          <a:prstGeom xmlns:a="http://schemas.openxmlformats.org/drawingml/2006/main" prst="rect">
+            <a:avLst/>
+          </a:prstGeom>
+          <a:noFill xmlns:a="http://schemas.openxmlformats.org/drawingml/2006/main"/>
+          <a:ln xmlns:a="http://schemas.openxmlformats.org/drawingml/2006/main" w="0">
+            <a:noFill/>
+            <a:prstDash val="solid"/>
+          </a:ln>
+        </p:spPr>
+        <p:txBody>
+          <a:bodyPr xmlns:a="http://schemas.openxmlformats.org/drawingml/2006/main" wrap="square" lIns="0" tIns="0" rIns="0" bIns="0" anchor="t">
+            <a:noAutofit/>
+          </a:bodyPr>
+          <a:lstStyle xmlns:a="http://schemas.openxmlformats.org/drawingml/2006/main"/>
+          <a:p xmlns:a="http://schemas.openxmlformats.org/drawingml/2006/main">
+            <a:pPr algn="l">
+              <a:lnSpc>
+                <a:spcPct val="100000"/>
+              </a:lnSpc>
+              <a:buNone/>
+              <a:defRPr sz="900" b="1">
+                <a:solidFill>
+                  <a:srgbClr val="D3D1C8"/>
+                </a:solidFill>
+                <a:latin typeface="Courier New"/>
+                <a:ea typeface="Courier New"/>
+                <a:cs typeface="Courier New"/>
+              </a:defRPr>
+            </a:pPr>
+            <a:r>
+              <a:rPr sz="900" b="1">
+                <a:solidFill>
+                  <a:srgbClr val="D3D1C8"/>
+                </a:solidFill>
+                <a:latin typeface="Courier New"/>
+                <a:ea typeface="Courier New"/>
+                <a:cs typeface="Courier New"/>
+              </a:rPr>
+              <a:t>DEEPER VOLUME UNLOCKS DEEPER DISCOUNTS</a:t>
+            </a:r>
+          </a:p>
+        </p:txBody>
+      </p:sp>
+      <p:sp>
+        <p:nvSpPr>
+          <p:cNvPr id="70" name="policy-list">
+            <a:extLst xmlns:a="http://schemas.openxmlformats.org/drawingml/2006/main">
+              <a:ext uri="{FF2B5EF4-FFF2-40B4-BE49-F238E27FC236}">
+                <a16:creationId xmlns:a16="http://schemas.microsoft.com/office/drawing/2014/main" id="{A968D816-A402-43FE-8CC9-965F1D7E4A4A}"/>
+              </a:ext>
+            </a:extLst>
+          </p:cNvPr>
+          <p:cNvSpPr>
+            <a:spLocks xmlns:a="http://schemas.openxmlformats.org/drawingml/2006/main" noGrp="1"/>
+          </p:cNvSpPr>
+          <p:nvPr/>
+        </p:nvSpPr>
+        <p:spPr>
+          <a:xfrm xmlns:a="http://schemas.openxmlformats.org/drawingml/2006/main">
+            <a:off x="7239000" y="5791200"/>
+            <a:ext cx="4419600" cy="171450"/>
+          </a:xfrm>
+          <a:prstGeom xmlns:a="http://schemas.openxmlformats.org/drawingml/2006/main" prst="rect">
+            <a:avLst/>
+          </a:prstGeom>
+          <a:noFill xmlns:a="http://schemas.openxmlformats.org/drawingml/2006/main"/>
+          <a:ln xmlns:a="http://schemas.openxmlformats.org/drawingml/2006/main" w="0">
+            <a:noFill/>
+            <a:prstDash val="solid"/>
+          </a:ln>
+        </p:spPr>
+        <p:txBody>
+          <a:bodyPr xmlns:a="http://schemas.openxmlformats.org/drawingml/2006/main" wrap="square" lIns="0" tIns="0" rIns="0" bIns="0" anchor="t">
+            <a:noAutofit/>
+          </a:bodyPr>
+          <a:lstStyle xmlns:a="http://schemas.openxmlformats.org/drawingml/2006/main"/>
+          <a:p xmlns:a="http://schemas.openxmlformats.org/drawingml/2006/main">
+            <a:pPr algn="r">
+              <a:lnSpc>
+                <a:spcPct val="100000"/>
+              </a:lnSpc>
+              <a:buNone/>
+              <a:defRPr sz="825" b="1">
+                <a:solidFill>
+                  <a:srgbClr val="FF2B79"/>
+                </a:solidFill>
+                <a:latin typeface="Courier New"/>
+                <a:ea typeface="Courier New"/>
+                <a:cs typeface="Courier New"/>
+              </a:defRPr>
+            </a:pPr>
+            <a:r>
+              <a:rPr sz="825" b="1">
+                <a:solidFill>
+                  <a:srgbClr val="FF2B79"/>
+                </a:solidFill>
+                <a:latin typeface="Courier New"/>
+                <a:ea typeface="Courier New"/>
+                <a:cs typeface="Courier New"/>
+              </a:rPr>
+              <a:t>ONE CLEARING PRICE FOR ALL 560 · AGENT BUYS ON RAIN AT EXACTLY THAT AMOUNT</a:t>
+            </a:r>
+          </a:p>
+        </p:txBody>
+      </p:sp>
+    </p:spTree>
+    <p:extLst>
+      <p:ext uri="{BB962C8B-B14F-4D97-AF65-F5344CB8AC3E}">
+        <p14:creationId xmlns:p14="http://schemas.microsoft.com/office/powerpoint/2010/main" val="1764752452"/>
       </p:ext>
     </p:extLst>
   </p:cSld>
